--- a/ER Model/ER.pptx
+++ b/ER Model/ER.pptx
@@ -3327,2744 +3327,3253 @@
           <a:chExt cx="0" cy="0"/>
         </a:xfrm>
       </p:grpSpPr>
-      <p:grpSp>
-        <p:nvGrpSpPr>
-          <p:cNvPr id="33" name="群組 32">
-            <a:extLst>
-              <a:ext uri="{FF2B5EF4-FFF2-40B4-BE49-F238E27FC236}">
-                <a16:creationId xmlns:a16="http://schemas.microsoft.com/office/drawing/2014/main" id="{12AB8AF2-FE20-4BAC-ACAD-AFE9658291E5}"/>
-              </a:ext>
-            </a:extLst>
-          </p:cNvPr>
-          <p:cNvGrpSpPr/>
+      <p:sp>
+        <p:nvSpPr>
+          <p:cNvPr id="4" name="矩形 3">
+            <a:extLst>
+              <a:ext uri="{FF2B5EF4-FFF2-40B4-BE49-F238E27FC236}">
+                <a16:creationId xmlns:a16="http://schemas.microsoft.com/office/drawing/2014/main" id="{F6EEDF99-A567-46F5-A8F0-54E29683616E}"/>
+              </a:ext>
+            </a:extLst>
+          </p:cNvPr>
+          <p:cNvSpPr/>
           <p:nvPr/>
-        </p:nvGrpSpPr>
-        <p:grpSpPr>
+        </p:nvSpPr>
+        <p:spPr>
           <a:xfrm>
-            <a:off x="264442" y="314795"/>
-            <a:ext cx="11663116" cy="6228410"/>
-            <a:chOff x="280990" y="314795"/>
-            <a:chExt cx="11663116" cy="6228410"/>
+            <a:off x="4187322" y="3030292"/>
+            <a:ext cx="963850" cy="578673"/>
           </a:xfrm>
-        </p:grpSpPr>
-        <p:sp>
-          <p:nvSpPr>
-            <p:cNvPr id="4" name="矩形 3">
-              <a:extLst>
-                <a:ext uri="{FF2B5EF4-FFF2-40B4-BE49-F238E27FC236}">
-                  <a16:creationId xmlns:a16="http://schemas.microsoft.com/office/drawing/2014/main" id="{F6EEDF99-A567-46F5-A8F0-54E29683616E}"/>
-                </a:ext>
-              </a:extLst>
-            </p:cNvPr>
-            <p:cNvSpPr/>
-            <p:nvPr/>
-          </p:nvSpPr>
-          <p:spPr>
-            <a:xfrm>
-              <a:off x="4203870" y="3030292"/>
-              <a:ext cx="963850" cy="578673"/>
-            </a:xfrm>
-            <a:prstGeom prst="rect">
-              <a:avLst/>
-            </a:prstGeom>
-            <a:noFill/>
-            <a:ln w="38100">
-              <a:solidFill>
-                <a:srgbClr val="2F528F"/>
-              </a:solidFill>
-            </a:ln>
-          </p:spPr>
-          <p:style>
-            <a:lnRef idx="2">
-              <a:schemeClr val="accent1">
-                <a:shade val="50000"/>
-              </a:schemeClr>
-            </a:lnRef>
-            <a:fillRef idx="1">
-              <a:schemeClr val="accent1"/>
-            </a:fillRef>
-            <a:effectRef idx="0">
-              <a:schemeClr val="accent1"/>
-            </a:effectRef>
-            <a:fontRef idx="minor">
-              <a:schemeClr val="lt1"/>
-            </a:fontRef>
-          </p:style>
-          <p:txBody>
-            <a:bodyPr rtlCol="0" anchor="ctr"/>
-            <a:lstStyle/>
-            <a:p>
-              <a:pPr algn="ctr"/>
-              <a:r>
-                <a:rPr lang="zh-TW" altLang="en-US" dirty="0">
-                  <a:solidFill>
-                    <a:sysClr val="windowText" lastClr="000000"/>
-                  </a:solidFill>
-                  <a:latin typeface="微軟正黑體" panose="020B0604030504040204" pitchFamily="34" charset="-120"/>
-                  <a:ea typeface="微軟正黑體" panose="020B0604030504040204" pitchFamily="34" charset="-120"/>
-                </a:rPr>
-                <a:t>小說</a:t>
-              </a:r>
-            </a:p>
-          </p:txBody>
-        </p:sp>
-        <p:sp>
-          <p:nvSpPr>
-            <p:cNvPr id="7" name="矩形 6">
-              <a:extLst>
-                <a:ext uri="{FF2B5EF4-FFF2-40B4-BE49-F238E27FC236}">
-                  <a16:creationId xmlns:a16="http://schemas.microsoft.com/office/drawing/2014/main" id="{8BA4813D-5E1C-42D9-A51A-236FA101D354}"/>
-                </a:ext>
-              </a:extLst>
-            </p:cNvPr>
-            <p:cNvSpPr/>
-            <p:nvPr/>
-          </p:nvSpPr>
-          <p:spPr>
-            <a:xfrm>
-              <a:off x="8744887" y="3029289"/>
-              <a:ext cx="963850" cy="578673"/>
-            </a:xfrm>
-            <a:prstGeom prst="rect">
-              <a:avLst/>
-            </a:prstGeom>
-            <a:noFill/>
-            <a:ln w="38100">
-              <a:solidFill>
-                <a:srgbClr val="7030A0"/>
-              </a:solidFill>
-            </a:ln>
-          </p:spPr>
-          <p:style>
-            <a:lnRef idx="2">
-              <a:schemeClr val="accent1">
-                <a:shade val="50000"/>
-              </a:schemeClr>
-            </a:lnRef>
-            <a:fillRef idx="1">
-              <a:schemeClr val="accent1"/>
-            </a:fillRef>
-            <a:effectRef idx="0">
-              <a:schemeClr val="accent1"/>
-            </a:effectRef>
-            <a:fontRef idx="minor">
-              <a:schemeClr val="lt1"/>
-            </a:fontRef>
-          </p:style>
-          <p:txBody>
-            <a:bodyPr rtlCol="0" anchor="ctr"/>
-            <a:lstStyle/>
-            <a:p>
-              <a:pPr algn="ctr"/>
-              <a:r>
-                <a:rPr lang="zh-TW" altLang="en-US" dirty="0">
-                  <a:solidFill>
-                    <a:sysClr val="windowText" lastClr="000000"/>
-                  </a:solidFill>
-                  <a:latin typeface="微軟正黑體" panose="020B0604030504040204" pitchFamily="34" charset="-120"/>
-                  <a:ea typeface="微軟正黑體" panose="020B0604030504040204" pitchFamily="34" charset="-120"/>
-                </a:rPr>
-                <a:t>作者</a:t>
-              </a:r>
-            </a:p>
-          </p:txBody>
-        </p:sp>
-        <p:sp>
-          <p:nvSpPr>
-            <p:cNvPr id="8" name="矩形 7">
-              <a:extLst>
-                <a:ext uri="{FF2B5EF4-FFF2-40B4-BE49-F238E27FC236}">
-                  <a16:creationId xmlns:a16="http://schemas.microsoft.com/office/drawing/2014/main" id="{82182DAA-0E8C-4F5B-9213-F4B6CFB4F174}"/>
-                </a:ext>
-              </a:extLst>
-            </p:cNvPr>
-            <p:cNvSpPr/>
-            <p:nvPr/>
-          </p:nvSpPr>
-          <p:spPr>
-            <a:xfrm>
-              <a:off x="7256463" y="1537864"/>
-              <a:ext cx="963850" cy="578673"/>
-            </a:xfrm>
-            <a:prstGeom prst="rect">
-              <a:avLst/>
-            </a:prstGeom>
-            <a:noFill/>
-            <a:ln w="38100">
-              <a:solidFill>
-                <a:srgbClr val="4D4D4D"/>
-              </a:solidFill>
-            </a:ln>
-          </p:spPr>
-          <p:style>
-            <a:lnRef idx="2">
-              <a:schemeClr val="accent1">
-                <a:shade val="50000"/>
-              </a:schemeClr>
-            </a:lnRef>
-            <a:fillRef idx="1">
-              <a:schemeClr val="accent1"/>
-            </a:fillRef>
-            <a:effectRef idx="0">
-              <a:schemeClr val="accent1"/>
-            </a:effectRef>
-            <a:fontRef idx="minor">
-              <a:schemeClr val="lt1"/>
-            </a:fontRef>
-          </p:style>
-          <p:txBody>
-            <a:bodyPr rtlCol="0" anchor="ctr"/>
-            <a:lstStyle/>
-            <a:p>
-              <a:pPr algn="ctr"/>
-              <a:r>
-                <a:rPr lang="zh-TW" altLang="en-US" dirty="0">
-                  <a:solidFill>
-                    <a:sysClr val="windowText" lastClr="000000"/>
-                  </a:solidFill>
-                  <a:latin typeface="微軟正黑體" panose="020B0604030504040204" pitchFamily="34" charset="-120"/>
-                  <a:ea typeface="微軟正黑體" panose="020B0604030504040204" pitchFamily="34" charset="-120"/>
-                </a:rPr>
-                <a:t>使用者</a:t>
-              </a:r>
-            </a:p>
-          </p:txBody>
-        </p:sp>
-        <p:sp>
-          <p:nvSpPr>
-            <p:cNvPr id="11" name="橢圓 10">
-              <a:extLst>
-                <a:ext uri="{FF2B5EF4-FFF2-40B4-BE49-F238E27FC236}">
-                  <a16:creationId xmlns:a16="http://schemas.microsoft.com/office/drawing/2014/main" id="{A74CC088-F6BB-4D78-8774-E19DB0C79FE8}"/>
-                </a:ext>
-              </a:extLst>
-            </p:cNvPr>
-            <p:cNvSpPr/>
-            <p:nvPr/>
-          </p:nvSpPr>
-          <p:spPr>
-            <a:xfrm>
-              <a:off x="5808564" y="314795"/>
-              <a:ext cx="1573035" cy="552543"/>
-            </a:xfrm>
-            <a:prstGeom prst="ellipse">
-              <a:avLst/>
-            </a:prstGeom>
-            <a:ln w="38100"/>
-          </p:spPr>
-          <p:style>
-            <a:lnRef idx="2">
-              <a:schemeClr val="accent2"/>
-            </a:lnRef>
-            <a:fillRef idx="1">
-              <a:schemeClr val="lt1"/>
-            </a:fillRef>
-            <a:effectRef idx="0">
-              <a:schemeClr val="accent2"/>
-            </a:effectRef>
-            <a:fontRef idx="minor">
-              <a:schemeClr val="dk1"/>
-            </a:fontRef>
-          </p:style>
-          <p:txBody>
-            <a:bodyPr rtlCol="0" anchor="ctr"/>
-            <a:lstStyle/>
-            <a:p>
-              <a:pPr algn="ctr"/>
-              <a:r>
-                <a:rPr lang="zh-TW" altLang="en-US" dirty="0">
-                  <a:solidFill>
-                    <a:sysClr val="windowText" lastClr="000000"/>
-                  </a:solidFill>
-                  <a:latin typeface="微軟正黑體" panose="020B0604030504040204" pitchFamily="34" charset="-120"/>
-                  <a:ea typeface="微軟正黑體" panose="020B0604030504040204" pitchFamily="34" charset="-120"/>
-                </a:rPr>
-                <a:t>愛心紀錄</a:t>
-              </a:r>
-            </a:p>
-          </p:txBody>
-        </p:sp>
-        <p:sp>
-          <p:nvSpPr>
-            <p:cNvPr id="12" name="橢圓 11">
-              <a:extLst>
-                <a:ext uri="{FF2B5EF4-FFF2-40B4-BE49-F238E27FC236}">
-                  <a16:creationId xmlns:a16="http://schemas.microsoft.com/office/drawing/2014/main" id="{50C7A5AB-1A86-48CD-8E4A-59295C6599A4}"/>
-                </a:ext>
-              </a:extLst>
-            </p:cNvPr>
-            <p:cNvSpPr/>
-            <p:nvPr/>
-          </p:nvSpPr>
-          <p:spPr>
-            <a:xfrm>
-              <a:off x="1811061" y="447868"/>
-              <a:ext cx="1573035" cy="552543"/>
-            </a:xfrm>
-            <a:prstGeom prst="ellipse">
-              <a:avLst/>
-            </a:prstGeom>
-            <a:noFill/>
-            <a:ln w="38100">
-              <a:solidFill>
-                <a:srgbClr val="2F528F"/>
-              </a:solidFill>
-            </a:ln>
-          </p:spPr>
-          <p:style>
-            <a:lnRef idx="2">
-              <a:schemeClr val="accent1">
-                <a:shade val="50000"/>
-              </a:schemeClr>
-            </a:lnRef>
-            <a:fillRef idx="1">
-              <a:schemeClr val="accent1"/>
-            </a:fillRef>
-            <a:effectRef idx="0">
-              <a:schemeClr val="accent1"/>
-            </a:effectRef>
-            <a:fontRef idx="minor">
-              <a:schemeClr val="lt1"/>
-            </a:fontRef>
-          </p:style>
-          <p:txBody>
-            <a:bodyPr rtlCol="0" anchor="ctr"/>
-            <a:lstStyle/>
-            <a:p>
-              <a:pPr algn="ctr"/>
-              <a:r>
-                <a:rPr lang="zh-TW" altLang="en-US" u="sng" dirty="0">
-                  <a:solidFill>
-                    <a:sysClr val="windowText" lastClr="000000"/>
-                  </a:solidFill>
-                  <a:latin typeface="微軟正黑體" panose="020B0604030504040204" pitchFamily="34" charset="-120"/>
-                  <a:ea typeface="微軟正黑體" panose="020B0604030504040204" pitchFamily="34" charset="-120"/>
-                </a:rPr>
-                <a:t>小說代號</a:t>
-              </a:r>
-            </a:p>
-          </p:txBody>
-        </p:sp>
-        <p:sp>
-          <p:nvSpPr>
-            <p:cNvPr id="13" name="橢圓 12">
-              <a:extLst>
-                <a:ext uri="{FF2B5EF4-FFF2-40B4-BE49-F238E27FC236}">
-                  <a16:creationId xmlns:a16="http://schemas.microsoft.com/office/drawing/2014/main" id="{3DA73774-161F-4E32-8D07-D371A0C6B297}"/>
-                </a:ext>
-              </a:extLst>
-            </p:cNvPr>
-            <p:cNvSpPr/>
-            <p:nvPr/>
-          </p:nvSpPr>
-          <p:spPr>
-            <a:xfrm>
-              <a:off x="280990" y="2043321"/>
-              <a:ext cx="1230942" cy="552543"/>
-            </a:xfrm>
-            <a:prstGeom prst="ellipse">
-              <a:avLst/>
-            </a:prstGeom>
-            <a:noFill/>
-            <a:ln w="38100">
-              <a:solidFill>
-                <a:srgbClr val="2F528F"/>
-              </a:solidFill>
-            </a:ln>
-          </p:spPr>
-          <p:style>
-            <a:lnRef idx="2">
-              <a:schemeClr val="accent1">
-                <a:shade val="50000"/>
-              </a:schemeClr>
-            </a:lnRef>
-            <a:fillRef idx="1">
-              <a:schemeClr val="accent1"/>
-            </a:fillRef>
-            <a:effectRef idx="0">
-              <a:schemeClr val="accent1"/>
-            </a:effectRef>
-            <a:fontRef idx="minor">
-              <a:schemeClr val="lt1"/>
-            </a:fontRef>
-          </p:style>
-          <p:txBody>
-            <a:bodyPr rtlCol="0" anchor="ctr"/>
-            <a:lstStyle/>
-            <a:p>
-              <a:pPr algn="ctr"/>
-              <a:r>
-                <a:rPr lang="zh-TW" altLang="en-US" dirty="0">
-                  <a:solidFill>
-                    <a:sysClr val="windowText" lastClr="000000"/>
-                  </a:solidFill>
-                  <a:latin typeface="微軟正黑體" panose="020B0604030504040204" pitchFamily="34" charset="-120"/>
-                  <a:ea typeface="微軟正黑體" panose="020B0604030504040204" pitchFamily="34" charset="-120"/>
-                </a:rPr>
-                <a:t>狀態</a:t>
-              </a:r>
-            </a:p>
-          </p:txBody>
-        </p:sp>
-        <p:sp>
-          <p:nvSpPr>
-            <p:cNvPr id="14" name="橢圓 13">
-              <a:extLst>
-                <a:ext uri="{FF2B5EF4-FFF2-40B4-BE49-F238E27FC236}">
-                  <a16:creationId xmlns:a16="http://schemas.microsoft.com/office/drawing/2014/main" id="{6F1FBEB0-2E02-445D-899B-763581FD5A81}"/>
-                </a:ext>
-              </a:extLst>
-            </p:cNvPr>
-            <p:cNvSpPr/>
-            <p:nvPr/>
-          </p:nvSpPr>
-          <p:spPr>
-            <a:xfrm>
-              <a:off x="727317" y="1376093"/>
-              <a:ext cx="1230942" cy="552543"/>
-            </a:xfrm>
-            <a:prstGeom prst="ellipse">
-              <a:avLst/>
-            </a:prstGeom>
-            <a:noFill/>
-            <a:ln w="38100">
-              <a:solidFill>
-                <a:srgbClr val="2F528F"/>
-              </a:solidFill>
-            </a:ln>
-          </p:spPr>
-          <p:style>
-            <a:lnRef idx="2">
-              <a:schemeClr val="accent1">
-                <a:shade val="50000"/>
-              </a:schemeClr>
-            </a:lnRef>
-            <a:fillRef idx="1">
-              <a:schemeClr val="accent1"/>
-            </a:fillRef>
-            <a:effectRef idx="0">
-              <a:schemeClr val="accent1"/>
-            </a:effectRef>
-            <a:fontRef idx="minor">
-              <a:schemeClr val="lt1"/>
-            </a:fontRef>
-          </p:style>
-          <p:txBody>
-            <a:bodyPr rtlCol="0" anchor="ctr"/>
-            <a:lstStyle/>
-            <a:p>
-              <a:pPr algn="ctr"/>
-              <a:r>
-                <a:rPr lang="zh-TW" altLang="en-US" dirty="0">
-                  <a:solidFill>
-                    <a:sysClr val="windowText" lastClr="000000"/>
-                  </a:solidFill>
-                  <a:latin typeface="微軟正黑體" panose="020B0604030504040204" pitchFamily="34" charset="-120"/>
-                  <a:ea typeface="微軟正黑體" panose="020B0604030504040204" pitchFamily="34" charset="-120"/>
-                </a:rPr>
-                <a:t>類別</a:t>
-              </a:r>
-            </a:p>
-          </p:txBody>
-        </p:sp>
-        <p:sp>
-          <p:nvSpPr>
-            <p:cNvPr id="15" name="橢圓 14">
-              <a:extLst>
-                <a:ext uri="{FF2B5EF4-FFF2-40B4-BE49-F238E27FC236}">
-                  <a16:creationId xmlns:a16="http://schemas.microsoft.com/office/drawing/2014/main" id="{904EE205-B037-44B5-A64A-7F12D5398B76}"/>
-                </a:ext>
-              </a:extLst>
-            </p:cNvPr>
-            <p:cNvSpPr/>
-            <p:nvPr/>
-          </p:nvSpPr>
-          <p:spPr>
-            <a:xfrm>
-              <a:off x="2374252" y="4254848"/>
-              <a:ext cx="1230942" cy="552543"/>
-            </a:xfrm>
-            <a:prstGeom prst="ellipse">
-              <a:avLst/>
-            </a:prstGeom>
-            <a:noFill/>
-            <a:ln w="38100">
-              <a:solidFill>
-                <a:srgbClr val="2F528F"/>
-              </a:solidFill>
-            </a:ln>
-          </p:spPr>
-          <p:style>
-            <a:lnRef idx="2">
-              <a:schemeClr val="accent1">
-                <a:shade val="50000"/>
-              </a:schemeClr>
-            </a:lnRef>
-            <a:fillRef idx="1">
-              <a:schemeClr val="accent1"/>
-            </a:fillRef>
-            <a:effectRef idx="0">
-              <a:schemeClr val="accent1"/>
-            </a:effectRef>
-            <a:fontRef idx="minor">
-              <a:schemeClr val="lt1"/>
-            </a:fontRef>
-          </p:style>
-          <p:txBody>
-            <a:bodyPr rtlCol="0" anchor="ctr"/>
-            <a:lstStyle/>
-            <a:p>
-              <a:pPr algn="ctr"/>
-              <a:r>
-                <a:rPr lang="zh-TW" altLang="en-US" dirty="0">
-                  <a:solidFill>
-                    <a:sysClr val="windowText" lastClr="000000"/>
-                  </a:solidFill>
-                  <a:latin typeface="微軟正黑體" panose="020B0604030504040204" pitchFamily="34" charset="-120"/>
-                  <a:ea typeface="微軟正黑體" panose="020B0604030504040204" pitchFamily="34" charset="-120"/>
-                </a:rPr>
-                <a:t>簡介</a:t>
-              </a:r>
-            </a:p>
-          </p:txBody>
-        </p:sp>
-        <p:sp>
-          <p:nvSpPr>
-            <p:cNvPr id="17" name="橢圓 16">
-              <a:extLst>
-                <a:ext uri="{FF2B5EF4-FFF2-40B4-BE49-F238E27FC236}">
-                  <a16:creationId xmlns:a16="http://schemas.microsoft.com/office/drawing/2014/main" id="{B6D631BD-55A0-4F2C-86C6-B99A6CBB8065}"/>
-                </a:ext>
-              </a:extLst>
-            </p:cNvPr>
-            <p:cNvSpPr/>
-            <p:nvPr/>
-          </p:nvSpPr>
-          <p:spPr>
-            <a:xfrm>
-              <a:off x="2153154" y="1279231"/>
-              <a:ext cx="1230942" cy="552543"/>
-            </a:xfrm>
-            <a:prstGeom prst="ellipse">
-              <a:avLst/>
-            </a:prstGeom>
-            <a:noFill/>
-            <a:ln w="38100">
-              <a:solidFill>
-                <a:srgbClr val="2F528F"/>
-              </a:solidFill>
-            </a:ln>
-          </p:spPr>
-          <p:style>
-            <a:lnRef idx="2">
-              <a:schemeClr val="accent1">
-                <a:shade val="50000"/>
-              </a:schemeClr>
-            </a:lnRef>
-            <a:fillRef idx="1">
-              <a:schemeClr val="accent1"/>
-            </a:fillRef>
-            <a:effectRef idx="0">
-              <a:schemeClr val="accent1"/>
-            </a:effectRef>
-            <a:fontRef idx="minor">
-              <a:schemeClr val="lt1"/>
-            </a:fontRef>
-          </p:style>
-          <p:txBody>
-            <a:bodyPr rtlCol="0" anchor="ctr"/>
-            <a:lstStyle/>
-            <a:p>
-              <a:pPr algn="ctr"/>
-              <a:r>
-                <a:rPr lang="zh-TW" altLang="en-US" dirty="0">
-                  <a:solidFill>
-                    <a:sysClr val="windowText" lastClr="000000"/>
-                  </a:solidFill>
-                  <a:latin typeface="微軟正黑體" panose="020B0604030504040204" pitchFamily="34" charset="-120"/>
-                  <a:ea typeface="微軟正黑體" panose="020B0604030504040204" pitchFamily="34" charset="-120"/>
-                </a:rPr>
-                <a:t>書名</a:t>
-              </a:r>
-            </a:p>
-          </p:txBody>
-        </p:sp>
-        <p:sp>
-          <p:nvSpPr>
-            <p:cNvPr id="18" name="橢圓 17">
-              <a:extLst>
-                <a:ext uri="{FF2B5EF4-FFF2-40B4-BE49-F238E27FC236}">
-                  <a16:creationId xmlns:a16="http://schemas.microsoft.com/office/drawing/2014/main" id="{BC76BE46-86FF-4B5A-968F-C55EC2FA534B}"/>
-                </a:ext>
-              </a:extLst>
-            </p:cNvPr>
-            <p:cNvSpPr/>
-            <p:nvPr/>
-          </p:nvSpPr>
-          <p:spPr>
-            <a:xfrm>
-              <a:off x="1206516" y="2710549"/>
-              <a:ext cx="1230942" cy="552543"/>
-            </a:xfrm>
-            <a:prstGeom prst="ellipse">
-              <a:avLst/>
-            </a:prstGeom>
-            <a:noFill/>
-            <a:ln w="38100">
-              <a:solidFill>
-                <a:srgbClr val="2F528F"/>
-              </a:solidFill>
-            </a:ln>
-          </p:spPr>
-          <p:style>
-            <a:lnRef idx="2">
-              <a:schemeClr val="accent1">
-                <a:shade val="50000"/>
-              </a:schemeClr>
-            </a:lnRef>
-            <a:fillRef idx="1">
-              <a:schemeClr val="accent1"/>
-            </a:fillRef>
-            <a:effectRef idx="0">
-              <a:schemeClr val="accent1"/>
-            </a:effectRef>
-            <a:fontRef idx="minor">
-              <a:schemeClr val="lt1"/>
-            </a:fontRef>
-          </p:style>
-          <p:txBody>
-            <a:bodyPr rtlCol="0" anchor="ctr"/>
-            <a:lstStyle/>
-            <a:p>
-              <a:pPr algn="ctr"/>
-              <a:r>
-                <a:rPr lang="zh-TW" altLang="en-US" dirty="0">
-                  <a:solidFill>
-                    <a:sysClr val="windowText" lastClr="000000"/>
-                  </a:solidFill>
-                  <a:latin typeface="微軟正黑體" panose="020B0604030504040204" pitchFamily="34" charset="-120"/>
-                  <a:ea typeface="微軟正黑體" panose="020B0604030504040204" pitchFamily="34" charset="-120"/>
-                </a:rPr>
-                <a:t>愛心數</a:t>
-              </a:r>
-            </a:p>
-          </p:txBody>
-        </p:sp>
-        <p:sp>
-          <p:nvSpPr>
-            <p:cNvPr id="19" name="橢圓 18">
-              <a:extLst>
-                <a:ext uri="{FF2B5EF4-FFF2-40B4-BE49-F238E27FC236}">
-                  <a16:creationId xmlns:a16="http://schemas.microsoft.com/office/drawing/2014/main" id="{B4EC46C7-04E8-4310-8736-49F1B6908626}"/>
-                </a:ext>
-              </a:extLst>
-            </p:cNvPr>
-            <p:cNvSpPr/>
-            <p:nvPr/>
-          </p:nvSpPr>
-          <p:spPr>
-            <a:xfrm>
-              <a:off x="3965929" y="349447"/>
-              <a:ext cx="1573035" cy="552543"/>
-            </a:xfrm>
-            <a:prstGeom prst="ellipse">
-              <a:avLst/>
-            </a:prstGeom>
-            <a:ln w="38100"/>
-          </p:spPr>
-          <p:style>
-            <a:lnRef idx="2">
-              <a:schemeClr val="accent2"/>
-            </a:lnRef>
-            <a:fillRef idx="1">
-              <a:schemeClr val="lt1"/>
-            </a:fillRef>
-            <a:effectRef idx="0">
-              <a:schemeClr val="accent2"/>
-            </a:effectRef>
-            <a:fontRef idx="minor">
-              <a:schemeClr val="dk1"/>
-            </a:fontRef>
-          </p:style>
-          <p:txBody>
-            <a:bodyPr rtlCol="0" anchor="ctr"/>
-            <a:lstStyle/>
-            <a:p>
-              <a:pPr algn="ctr"/>
-              <a:r>
-                <a:rPr lang="zh-TW" altLang="en-US" dirty="0">
-                  <a:solidFill>
-                    <a:sysClr val="windowText" lastClr="000000"/>
-                  </a:solidFill>
-                  <a:latin typeface="微軟正黑體" panose="020B0604030504040204" pitchFamily="34" charset="-120"/>
-                  <a:ea typeface="微軟正黑體" panose="020B0604030504040204" pitchFamily="34" charset="-120"/>
-                </a:rPr>
-                <a:t>歷史紀錄</a:t>
-              </a:r>
-            </a:p>
-          </p:txBody>
-        </p:sp>
-        <p:sp>
-          <p:nvSpPr>
-            <p:cNvPr id="20" name="橢圓 19">
-              <a:extLst>
-                <a:ext uri="{FF2B5EF4-FFF2-40B4-BE49-F238E27FC236}">
-                  <a16:creationId xmlns:a16="http://schemas.microsoft.com/office/drawing/2014/main" id="{8581CC69-98F4-46B0-AE91-8CA44F3236EF}"/>
-                </a:ext>
-              </a:extLst>
-            </p:cNvPr>
-            <p:cNvSpPr/>
-            <p:nvPr/>
-          </p:nvSpPr>
-          <p:spPr>
-            <a:xfrm>
-              <a:off x="528815" y="4226213"/>
-              <a:ext cx="1230942" cy="552543"/>
-            </a:xfrm>
-            <a:prstGeom prst="ellipse">
-              <a:avLst/>
-            </a:prstGeom>
-            <a:noFill/>
-            <a:ln w="38100">
-              <a:solidFill>
-                <a:srgbClr val="2F528F"/>
-              </a:solidFill>
-            </a:ln>
-          </p:spPr>
-          <p:style>
-            <a:lnRef idx="2">
-              <a:schemeClr val="accent1">
-                <a:shade val="50000"/>
-              </a:schemeClr>
-            </a:lnRef>
-            <a:fillRef idx="1">
-              <a:schemeClr val="accent1"/>
-            </a:fillRef>
-            <a:effectRef idx="0">
-              <a:schemeClr val="accent1"/>
-            </a:effectRef>
-            <a:fontRef idx="minor">
-              <a:schemeClr val="lt1"/>
-            </a:fontRef>
-          </p:style>
-          <p:txBody>
-            <a:bodyPr rtlCol="0" anchor="ctr"/>
-            <a:lstStyle/>
-            <a:p>
-              <a:pPr algn="ctr"/>
-              <a:r>
-                <a:rPr lang="zh-TW" altLang="en-US" dirty="0">
-                  <a:solidFill>
-                    <a:sysClr val="windowText" lastClr="000000"/>
-                  </a:solidFill>
-                  <a:latin typeface="微軟正黑體" panose="020B0604030504040204" pitchFamily="34" charset="-120"/>
-                  <a:ea typeface="微軟正黑體" panose="020B0604030504040204" pitchFamily="34" charset="-120"/>
-                </a:rPr>
-                <a:t>連結</a:t>
-              </a:r>
-            </a:p>
-          </p:txBody>
-        </p:sp>
-        <p:sp>
-          <p:nvSpPr>
-            <p:cNvPr id="21" name="橢圓 20">
-              <a:extLst>
-                <a:ext uri="{FF2B5EF4-FFF2-40B4-BE49-F238E27FC236}">
-                  <a16:creationId xmlns:a16="http://schemas.microsoft.com/office/drawing/2014/main" id="{9F875BE5-297C-4CC9-A47C-AE3019E5B3EF}"/>
-                </a:ext>
-              </a:extLst>
-            </p:cNvPr>
-            <p:cNvSpPr/>
-            <p:nvPr/>
-          </p:nvSpPr>
-          <p:spPr>
-            <a:xfrm>
-              <a:off x="2327795" y="5028635"/>
-              <a:ext cx="1230942" cy="552543"/>
-            </a:xfrm>
-            <a:prstGeom prst="ellipse">
-              <a:avLst/>
-            </a:prstGeom>
-            <a:noFill/>
-            <a:ln w="76200" cmpd="dbl">
-              <a:solidFill>
-                <a:srgbClr val="2F528F"/>
-              </a:solidFill>
-            </a:ln>
-          </p:spPr>
-          <p:style>
-            <a:lnRef idx="2">
-              <a:schemeClr val="accent1">
-                <a:shade val="50000"/>
-              </a:schemeClr>
-            </a:lnRef>
-            <a:fillRef idx="1">
-              <a:schemeClr val="accent1"/>
-            </a:fillRef>
-            <a:effectRef idx="0">
-              <a:schemeClr val="accent1"/>
-            </a:effectRef>
-            <a:fontRef idx="minor">
-              <a:schemeClr val="lt1"/>
-            </a:fontRef>
-          </p:style>
-          <p:txBody>
-            <a:bodyPr rtlCol="0" anchor="ctr"/>
-            <a:lstStyle/>
-            <a:p>
-              <a:pPr algn="ctr"/>
-              <a:r>
-                <a:rPr lang="en-US" altLang="zh-TW" dirty="0">
-                  <a:solidFill>
-                    <a:sysClr val="windowText" lastClr="000000"/>
-                  </a:solidFill>
-                  <a:latin typeface="微軟正黑體" panose="020B0604030504040204" pitchFamily="34" charset="-120"/>
-                  <a:ea typeface="微軟正黑體" panose="020B0604030504040204" pitchFamily="34" charset="-120"/>
-                </a:rPr>
-                <a:t>tag</a:t>
-              </a:r>
-              <a:endParaRPr lang="zh-TW" altLang="en-US" dirty="0">
+          <a:prstGeom prst="rect">
+            <a:avLst/>
+          </a:prstGeom>
+          <a:noFill/>
+          <a:ln w="38100">
+            <a:solidFill>
+              <a:srgbClr val="2F528F"/>
+            </a:solidFill>
+          </a:ln>
+        </p:spPr>
+        <p:style>
+          <a:lnRef idx="2">
+            <a:schemeClr val="accent1">
+              <a:shade val="50000"/>
+            </a:schemeClr>
+          </a:lnRef>
+          <a:fillRef idx="1">
+            <a:schemeClr val="accent1"/>
+          </a:fillRef>
+          <a:effectRef idx="0">
+            <a:schemeClr val="accent1"/>
+          </a:effectRef>
+          <a:fontRef idx="minor">
+            <a:schemeClr val="lt1"/>
+          </a:fontRef>
+        </p:style>
+        <p:txBody>
+          <a:bodyPr rtlCol="0" anchor="ctr"/>
+          <a:lstStyle/>
+          <a:p>
+            <a:pPr algn="ctr"/>
+            <a:r>
+              <a:rPr lang="zh-TW" altLang="en-US" dirty="0">
                 <a:solidFill>
                   <a:sysClr val="windowText" lastClr="000000"/>
                 </a:solidFill>
                 <a:latin typeface="微軟正黑體" panose="020B0604030504040204" pitchFamily="34" charset="-120"/>
                 <a:ea typeface="微軟正黑體" panose="020B0604030504040204" pitchFamily="34" charset="-120"/>
-              </a:endParaRPr>
-            </a:p>
-          </p:txBody>
-        </p:sp>
-        <p:sp>
-          <p:nvSpPr>
-            <p:cNvPr id="22" name="橢圓 21">
-              <a:extLst>
-                <a:ext uri="{FF2B5EF4-FFF2-40B4-BE49-F238E27FC236}">
-                  <a16:creationId xmlns:a16="http://schemas.microsoft.com/office/drawing/2014/main" id="{87A2ED50-B606-411A-8EF1-85E6A3BF2C94}"/>
-                </a:ext>
-              </a:extLst>
-            </p:cNvPr>
-            <p:cNvSpPr/>
-            <p:nvPr/>
-          </p:nvSpPr>
-          <p:spPr>
-            <a:xfrm>
-              <a:off x="498499" y="5686783"/>
-              <a:ext cx="1829833" cy="552543"/>
-            </a:xfrm>
-            <a:prstGeom prst="ellipse">
-              <a:avLst/>
-            </a:prstGeom>
-            <a:noFill/>
-            <a:ln w="38100" cmpd="sng">
+              </a:rPr>
+              <a:t>小說</a:t>
+            </a:r>
+          </a:p>
+        </p:txBody>
+      </p:sp>
+      <p:sp>
+        <p:nvSpPr>
+          <p:cNvPr id="7" name="矩形 6">
+            <a:extLst>
+              <a:ext uri="{FF2B5EF4-FFF2-40B4-BE49-F238E27FC236}">
+                <a16:creationId xmlns:a16="http://schemas.microsoft.com/office/drawing/2014/main" id="{8BA4813D-5E1C-42D9-A51A-236FA101D354}"/>
+              </a:ext>
+            </a:extLst>
+          </p:cNvPr>
+          <p:cNvSpPr/>
+          <p:nvPr/>
+        </p:nvSpPr>
+        <p:spPr>
+          <a:xfrm>
+            <a:off x="8728339" y="3029289"/>
+            <a:ext cx="963850" cy="578673"/>
+          </a:xfrm>
+          <a:prstGeom prst="rect">
+            <a:avLst/>
+          </a:prstGeom>
+          <a:noFill/>
+          <a:ln w="38100">
+            <a:solidFill>
+              <a:srgbClr val="7030A0"/>
+            </a:solidFill>
+          </a:ln>
+        </p:spPr>
+        <p:style>
+          <a:lnRef idx="2">
+            <a:schemeClr val="accent1">
+              <a:shade val="50000"/>
+            </a:schemeClr>
+          </a:lnRef>
+          <a:fillRef idx="1">
+            <a:schemeClr val="accent1"/>
+          </a:fillRef>
+          <a:effectRef idx="0">
+            <a:schemeClr val="accent1"/>
+          </a:effectRef>
+          <a:fontRef idx="minor">
+            <a:schemeClr val="lt1"/>
+          </a:fontRef>
+        </p:style>
+        <p:txBody>
+          <a:bodyPr rtlCol="0" anchor="ctr"/>
+          <a:lstStyle/>
+          <a:p>
+            <a:pPr algn="ctr"/>
+            <a:r>
+              <a:rPr lang="zh-TW" altLang="en-US" dirty="0">
+                <a:solidFill>
+                  <a:sysClr val="windowText" lastClr="000000"/>
+                </a:solidFill>
+                <a:latin typeface="微軟正黑體" panose="020B0604030504040204" pitchFamily="34" charset="-120"/>
+                <a:ea typeface="微軟正黑體" panose="020B0604030504040204" pitchFamily="34" charset="-120"/>
+              </a:rPr>
+              <a:t>作者</a:t>
+            </a:r>
+          </a:p>
+        </p:txBody>
+      </p:sp>
+      <p:sp>
+        <p:nvSpPr>
+          <p:cNvPr id="8" name="矩形 7">
+            <a:extLst>
+              <a:ext uri="{FF2B5EF4-FFF2-40B4-BE49-F238E27FC236}">
+                <a16:creationId xmlns:a16="http://schemas.microsoft.com/office/drawing/2014/main" id="{82182DAA-0E8C-4F5B-9213-F4B6CFB4F174}"/>
+              </a:ext>
+            </a:extLst>
+          </p:cNvPr>
+          <p:cNvSpPr/>
+          <p:nvPr/>
+        </p:nvSpPr>
+        <p:spPr>
+          <a:xfrm>
+            <a:off x="7239915" y="1537864"/>
+            <a:ext cx="963850" cy="578673"/>
+          </a:xfrm>
+          <a:prstGeom prst="rect">
+            <a:avLst/>
+          </a:prstGeom>
+          <a:noFill/>
+          <a:ln w="38100">
+            <a:solidFill>
+              <a:srgbClr val="4D4D4D"/>
+            </a:solidFill>
+          </a:ln>
+        </p:spPr>
+        <p:style>
+          <a:lnRef idx="2">
+            <a:schemeClr val="accent1">
+              <a:shade val="50000"/>
+            </a:schemeClr>
+          </a:lnRef>
+          <a:fillRef idx="1">
+            <a:schemeClr val="accent1"/>
+          </a:fillRef>
+          <a:effectRef idx="0">
+            <a:schemeClr val="accent1"/>
+          </a:effectRef>
+          <a:fontRef idx="minor">
+            <a:schemeClr val="lt1"/>
+          </a:fontRef>
+        </p:style>
+        <p:txBody>
+          <a:bodyPr rtlCol="0" anchor="ctr"/>
+          <a:lstStyle/>
+          <a:p>
+            <a:pPr algn="ctr"/>
+            <a:r>
+              <a:rPr lang="zh-TW" altLang="en-US" dirty="0">
+                <a:solidFill>
+                  <a:sysClr val="windowText" lastClr="000000"/>
+                </a:solidFill>
+                <a:latin typeface="微軟正黑體" panose="020B0604030504040204" pitchFamily="34" charset="-120"/>
+                <a:ea typeface="微軟正黑體" panose="020B0604030504040204" pitchFamily="34" charset="-120"/>
+              </a:rPr>
+              <a:t>使用者</a:t>
+            </a:r>
+          </a:p>
+        </p:txBody>
+      </p:sp>
+      <p:sp>
+        <p:nvSpPr>
+          <p:cNvPr id="11" name="橢圓 10">
+            <a:extLst>
+              <a:ext uri="{FF2B5EF4-FFF2-40B4-BE49-F238E27FC236}">
+                <a16:creationId xmlns:a16="http://schemas.microsoft.com/office/drawing/2014/main" id="{A74CC088-F6BB-4D78-8774-E19DB0C79FE8}"/>
+              </a:ext>
+            </a:extLst>
+          </p:cNvPr>
+          <p:cNvSpPr/>
+          <p:nvPr/>
+        </p:nvSpPr>
+        <p:spPr>
+          <a:xfrm>
+            <a:off x="5792016" y="314795"/>
+            <a:ext cx="1573035" cy="552543"/>
+          </a:xfrm>
+          <a:prstGeom prst="ellipse">
+            <a:avLst/>
+          </a:prstGeom>
+          <a:ln w="38100"/>
+        </p:spPr>
+        <p:style>
+          <a:lnRef idx="2">
+            <a:schemeClr val="accent2"/>
+          </a:lnRef>
+          <a:fillRef idx="1">
+            <a:schemeClr val="lt1"/>
+          </a:fillRef>
+          <a:effectRef idx="0">
+            <a:schemeClr val="accent2"/>
+          </a:effectRef>
+          <a:fontRef idx="minor">
+            <a:schemeClr val="dk1"/>
+          </a:fontRef>
+        </p:style>
+        <p:txBody>
+          <a:bodyPr rtlCol="0" anchor="ctr"/>
+          <a:lstStyle/>
+          <a:p>
+            <a:pPr algn="ctr"/>
+            <a:r>
+              <a:rPr lang="zh-TW" altLang="en-US" dirty="0">
+                <a:solidFill>
+                  <a:sysClr val="windowText" lastClr="000000"/>
+                </a:solidFill>
+                <a:latin typeface="微軟正黑體" panose="020B0604030504040204" pitchFamily="34" charset="-120"/>
+                <a:ea typeface="微軟正黑體" panose="020B0604030504040204" pitchFamily="34" charset="-120"/>
+              </a:rPr>
+              <a:t>愛心紀錄</a:t>
+            </a:r>
+          </a:p>
+        </p:txBody>
+      </p:sp>
+      <p:sp>
+        <p:nvSpPr>
+          <p:cNvPr id="12" name="橢圓 11">
+            <a:extLst>
+              <a:ext uri="{FF2B5EF4-FFF2-40B4-BE49-F238E27FC236}">
+                <a16:creationId xmlns:a16="http://schemas.microsoft.com/office/drawing/2014/main" id="{50C7A5AB-1A86-48CD-8E4A-59295C6599A4}"/>
+              </a:ext>
+            </a:extLst>
+          </p:cNvPr>
+          <p:cNvSpPr/>
+          <p:nvPr/>
+        </p:nvSpPr>
+        <p:spPr>
+          <a:xfrm>
+            <a:off x="1852004" y="290861"/>
+            <a:ext cx="1573035" cy="552543"/>
+          </a:xfrm>
+          <a:prstGeom prst="ellipse">
+            <a:avLst/>
+          </a:prstGeom>
+          <a:noFill/>
+          <a:ln w="38100">
+            <a:solidFill>
+              <a:srgbClr val="2F528F"/>
+            </a:solidFill>
+          </a:ln>
+        </p:spPr>
+        <p:style>
+          <a:lnRef idx="2">
+            <a:schemeClr val="accent1">
+              <a:shade val="50000"/>
+            </a:schemeClr>
+          </a:lnRef>
+          <a:fillRef idx="1">
+            <a:schemeClr val="accent1"/>
+          </a:fillRef>
+          <a:effectRef idx="0">
+            <a:schemeClr val="accent1"/>
+          </a:effectRef>
+          <a:fontRef idx="minor">
+            <a:schemeClr val="lt1"/>
+          </a:fontRef>
+        </p:style>
+        <p:txBody>
+          <a:bodyPr rtlCol="0" anchor="ctr"/>
+          <a:lstStyle/>
+          <a:p>
+            <a:pPr algn="ctr"/>
+            <a:r>
+              <a:rPr lang="zh-TW" altLang="en-US" u="sng" dirty="0">
+                <a:solidFill>
+                  <a:sysClr val="windowText" lastClr="000000"/>
+                </a:solidFill>
+                <a:latin typeface="微軟正黑體" panose="020B0604030504040204" pitchFamily="34" charset="-120"/>
+                <a:ea typeface="微軟正黑體" panose="020B0604030504040204" pitchFamily="34" charset="-120"/>
+              </a:rPr>
+              <a:t>小說代號</a:t>
+            </a:r>
+          </a:p>
+        </p:txBody>
+      </p:sp>
+      <p:sp>
+        <p:nvSpPr>
+          <p:cNvPr id="13" name="橢圓 12">
+            <a:extLst>
+              <a:ext uri="{FF2B5EF4-FFF2-40B4-BE49-F238E27FC236}">
+                <a16:creationId xmlns:a16="http://schemas.microsoft.com/office/drawing/2014/main" id="{3DA73774-161F-4E32-8D07-D371A0C6B297}"/>
+              </a:ext>
+            </a:extLst>
+          </p:cNvPr>
+          <p:cNvSpPr/>
+          <p:nvPr/>
+        </p:nvSpPr>
+        <p:spPr>
+          <a:xfrm>
+            <a:off x="264442" y="2043321"/>
+            <a:ext cx="1230942" cy="552543"/>
+          </a:xfrm>
+          <a:prstGeom prst="ellipse">
+            <a:avLst/>
+          </a:prstGeom>
+          <a:noFill/>
+          <a:ln w="38100">
+            <a:solidFill>
+              <a:srgbClr val="2F528F"/>
+            </a:solidFill>
+          </a:ln>
+        </p:spPr>
+        <p:style>
+          <a:lnRef idx="2">
+            <a:schemeClr val="accent1">
+              <a:shade val="50000"/>
+            </a:schemeClr>
+          </a:lnRef>
+          <a:fillRef idx="1">
+            <a:schemeClr val="accent1"/>
+          </a:fillRef>
+          <a:effectRef idx="0">
+            <a:schemeClr val="accent1"/>
+          </a:effectRef>
+          <a:fontRef idx="minor">
+            <a:schemeClr val="lt1"/>
+          </a:fontRef>
+        </p:style>
+        <p:txBody>
+          <a:bodyPr rtlCol="0" anchor="ctr"/>
+          <a:lstStyle/>
+          <a:p>
+            <a:pPr algn="ctr"/>
+            <a:r>
+              <a:rPr lang="zh-TW" altLang="en-US" dirty="0">
+                <a:solidFill>
+                  <a:sysClr val="windowText" lastClr="000000"/>
+                </a:solidFill>
+                <a:latin typeface="微軟正黑體" panose="020B0604030504040204" pitchFamily="34" charset="-120"/>
+                <a:ea typeface="微軟正黑體" panose="020B0604030504040204" pitchFamily="34" charset="-120"/>
+              </a:rPr>
+              <a:t>狀態</a:t>
+            </a:r>
+          </a:p>
+        </p:txBody>
+      </p:sp>
+      <p:sp>
+        <p:nvSpPr>
+          <p:cNvPr id="14" name="橢圓 13">
+            <a:extLst>
+              <a:ext uri="{FF2B5EF4-FFF2-40B4-BE49-F238E27FC236}">
+                <a16:creationId xmlns:a16="http://schemas.microsoft.com/office/drawing/2014/main" id="{6F1FBEB0-2E02-445D-899B-763581FD5A81}"/>
+              </a:ext>
+            </a:extLst>
+          </p:cNvPr>
+          <p:cNvSpPr/>
+          <p:nvPr/>
+        </p:nvSpPr>
+        <p:spPr>
+          <a:xfrm>
+            <a:off x="1468562" y="1812153"/>
+            <a:ext cx="1230942" cy="552543"/>
+          </a:xfrm>
+          <a:prstGeom prst="ellipse">
+            <a:avLst/>
+          </a:prstGeom>
+          <a:noFill/>
+          <a:ln w="38100">
+            <a:solidFill>
+              <a:srgbClr val="2F528F"/>
+            </a:solidFill>
+          </a:ln>
+        </p:spPr>
+        <p:style>
+          <a:lnRef idx="2">
+            <a:schemeClr val="accent1">
+              <a:shade val="50000"/>
+            </a:schemeClr>
+          </a:lnRef>
+          <a:fillRef idx="1">
+            <a:schemeClr val="accent1"/>
+          </a:fillRef>
+          <a:effectRef idx="0">
+            <a:schemeClr val="accent1"/>
+          </a:effectRef>
+          <a:fontRef idx="minor">
+            <a:schemeClr val="lt1"/>
+          </a:fontRef>
+        </p:style>
+        <p:txBody>
+          <a:bodyPr rtlCol="0" anchor="ctr"/>
+          <a:lstStyle/>
+          <a:p>
+            <a:pPr algn="ctr"/>
+            <a:r>
+              <a:rPr lang="zh-TW" altLang="en-US" dirty="0">
+                <a:solidFill>
+                  <a:sysClr val="windowText" lastClr="000000"/>
+                </a:solidFill>
+                <a:latin typeface="微軟正黑體" panose="020B0604030504040204" pitchFamily="34" charset="-120"/>
+                <a:ea typeface="微軟正黑體" panose="020B0604030504040204" pitchFamily="34" charset="-120"/>
+              </a:rPr>
+              <a:t>類別</a:t>
+            </a:r>
+          </a:p>
+        </p:txBody>
+      </p:sp>
+      <p:sp>
+        <p:nvSpPr>
+          <p:cNvPr id="15" name="橢圓 14">
+            <a:extLst>
+              <a:ext uri="{FF2B5EF4-FFF2-40B4-BE49-F238E27FC236}">
+                <a16:creationId xmlns:a16="http://schemas.microsoft.com/office/drawing/2014/main" id="{904EE205-B037-44B5-A64A-7F12D5398B76}"/>
+              </a:ext>
+            </a:extLst>
+          </p:cNvPr>
+          <p:cNvSpPr/>
+          <p:nvPr/>
+        </p:nvSpPr>
+        <p:spPr>
+          <a:xfrm>
+            <a:off x="2357704" y="4254848"/>
+            <a:ext cx="1230942" cy="552543"/>
+          </a:xfrm>
+          <a:prstGeom prst="ellipse">
+            <a:avLst/>
+          </a:prstGeom>
+          <a:noFill/>
+          <a:ln w="38100">
+            <a:solidFill>
+              <a:srgbClr val="2F528F"/>
+            </a:solidFill>
+          </a:ln>
+        </p:spPr>
+        <p:style>
+          <a:lnRef idx="2">
+            <a:schemeClr val="accent1">
+              <a:shade val="50000"/>
+            </a:schemeClr>
+          </a:lnRef>
+          <a:fillRef idx="1">
+            <a:schemeClr val="accent1"/>
+          </a:fillRef>
+          <a:effectRef idx="0">
+            <a:schemeClr val="accent1"/>
+          </a:effectRef>
+          <a:fontRef idx="minor">
+            <a:schemeClr val="lt1"/>
+          </a:fontRef>
+        </p:style>
+        <p:txBody>
+          <a:bodyPr rtlCol="0" anchor="ctr"/>
+          <a:lstStyle/>
+          <a:p>
+            <a:pPr algn="ctr"/>
+            <a:r>
+              <a:rPr lang="zh-TW" altLang="en-US" dirty="0">
+                <a:solidFill>
+                  <a:sysClr val="windowText" lastClr="000000"/>
+                </a:solidFill>
+                <a:latin typeface="微軟正黑體" panose="020B0604030504040204" pitchFamily="34" charset="-120"/>
+                <a:ea typeface="微軟正黑體" panose="020B0604030504040204" pitchFamily="34" charset="-120"/>
+              </a:rPr>
+              <a:t>簡介</a:t>
+            </a:r>
+          </a:p>
+        </p:txBody>
+      </p:sp>
+      <p:sp>
+        <p:nvSpPr>
+          <p:cNvPr id="17" name="橢圓 16">
+            <a:extLst>
+              <a:ext uri="{FF2B5EF4-FFF2-40B4-BE49-F238E27FC236}">
+                <a16:creationId xmlns:a16="http://schemas.microsoft.com/office/drawing/2014/main" id="{B6D631BD-55A0-4F2C-86C6-B99A6CBB8065}"/>
+              </a:ext>
+            </a:extLst>
+          </p:cNvPr>
+          <p:cNvSpPr/>
+          <p:nvPr/>
+        </p:nvSpPr>
+        <p:spPr>
+          <a:xfrm>
+            <a:off x="2194097" y="896207"/>
+            <a:ext cx="1230942" cy="552543"/>
+          </a:xfrm>
+          <a:prstGeom prst="ellipse">
+            <a:avLst/>
+          </a:prstGeom>
+          <a:noFill/>
+          <a:ln w="38100">
+            <a:solidFill>
+              <a:srgbClr val="2F528F"/>
+            </a:solidFill>
+          </a:ln>
+        </p:spPr>
+        <p:style>
+          <a:lnRef idx="2">
+            <a:schemeClr val="accent1">
+              <a:shade val="50000"/>
+            </a:schemeClr>
+          </a:lnRef>
+          <a:fillRef idx="1">
+            <a:schemeClr val="accent1"/>
+          </a:fillRef>
+          <a:effectRef idx="0">
+            <a:schemeClr val="accent1"/>
+          </a:effectRef>
+          <a:fontRef idx="minor">
+            <a:schemeClr val="lt1"/>
+          </a:fontRef>
+        </p:style>
+        <p:txBody>
+          <a:bodyPr rtlCol="0" anchor="ctr"/>
+          <a:lstStyle/>
+          <a:p>
+            <a:pPr algn="ctr"/>
+            <a:r>
+              <a:rPr lang="zh-TW" altLang="en-US" dirty="0">
+                <a:solidFill>
+                  <a:sysClr val="windowText" lastClr="000000"/>
+                </a:solidFill>
+                <a:latin typeface="微軟正黑體" panose="020B0604030504040204" pitchFamily="34" charset="-120"/>
+                <a:ea typeface="微軟正黑體" panose="020B0604030504040204" pitchFamily="34" charset="-120"/>
+              </a:rPr>
+              <a:t>書名</a:t>
+            </a:r>
+          </a:p>
+        </p:txBody>
+      </p:sp>
+      <p:sp>
+        <p:nvSpPr>
+          <p:cNvPr id="18" name="橢圓 17">
+            <a:extLst>
+              <a:ext uri="{FF2B5EF4-FFF2-40B4-BE49-F238E27FC236}">
+                <a16:creationId xmlns:a16="http://schemas.microsoft.com/office/drawing/2014/main" id="{BC76BE46-86FF-4B5A-968F-C55EC2FA534B}"/>
+              </a:ext>
+            </a:extLst>
+          </p:cNvPr>
+          <p:cNvSpPr/>
+          <p:nvPr/>
+        </p:nvSpPr>
+        <p:spPr>
+          <a:xfrm>
+            <a:off x="1188418" y="2551978"/>
+            <a:ext cx="1230942" cy="552543"/>
+          </a:xfrm>
+          <a:prstGeom prst="ellipse">
+            <a:avLst/>
+          </a:prstGeom>
+          <a:noFill/>
+          <a:ln w="38100">
+            <a:solidFill>
+              <a:srgbClr val="2F528F"/>
+            </a:solidFill>
+          </a:ln>
+        </p:spPr>
+        <p:style>
+          <a:lnRef idx="2">
+            <a:schemeClr val="accent1">
+              <a:shade val="50000"/>
+            </a:schemeClr>
+          </a:lnRef>
+          <a:fillRef idx="1">
+            <a:schemeClr val="accent1"/>
+          </a:fillRef>
+          <a:effectRef idx="0">
+            <a:schemeClr val="accent1"/>
+          </a:effectRef>
+          <a:fontRef idx="minor">
+            <a:schemeClr val="lt1"/>
+          </a:fontRef>
+        </p:style>
+        <p:txBody>
+          <a:bodyPr rtlCol="0" anchor="ctr"/>
+          <a:lstStyle/>
+          <a:p>
+            <a:pPr algn="ctr"/>
+            <a:r>
+              <a:rPr lang="zh-TW" altLang="en-US" dirty="0">
+                <a:solidFill>
+                  <a:sysClr val="windowText" lastClr="000000"/>
+                </a:solidFill>
+                <a:latin typeface="微軟正黑體" panose="020B0604030504040204" pitchFamily="34" charset="-120"/>
+                <a:ea typeface="微軟正黑體" panose="020B0604030504040204" pitchFamily="34" charset="-120"/>
+              </a:rPr>
+              <a:t>愛心數</a:t>
+            </a:r>
+          </a:p>
+        </p:txBody>
+      </p:sp>
+      <p:sp>
+        <p:nvSpPr>
+          <p:cNvPr id="19" name="橢圓 18">
+            <a:extLst>
+              <a:ext uri="{FF2B5EF4-FFF2-40B4-BE49-F238E27FC236}">
+                <a16:creationId xmlns:a16="http://schemas.microsoft.com/office/drawing/2014/main" id="{B4EC46C7-04E8-4310-8736-49F1B6908626}"/>
+              </a:ext>
+            </a:extLst>
+          </p:cNvPr>
+          <p:cNvSpPr/>
+          <p:nvPr/>
+        </p:nvSpPr>
+        <p:spPr>
+          <a:xfrm>
+            <a:off x="3949381" y="349447"/>
+            <a:ext cx="1573035" cy="552543"/>
+          </a:xfrm>
+          <a:prstGeom prst="ellipse">
+            <a:avLst/>
+          </a:prstGeom>
+          <a:ln w="38100"/>
+        </p:spPr>
+        <p:style>
+          <a:lnRef idx="2">
+            <a:schemeClr val="accent2"/>
+          </a:lnRef>
+          <a:fillRef idx="1">
+            <a:schemeClr val="lt1"/>
+          </a:fillRef>
+          <a:effectRef idx="0">
+            <a:schemeClr val="accent2"/>
+          </a:effectRef>
+          <a:fontRef idx="minor">
+            <a:schemeClr val="dk1"/>
+          </a:fontRef>
+        </p:style>
+        <p:txBody>
+          <a:bodyPr rtlCol="0" anchor="ctr"/>
+          <a:lstStyle/>
+          <a:p>
+            <a:pPr algn="ctr"/>
+            <a:r>
+              <a:rPr lang="zh-TW" altLang="en-US" dirty="0">
+                <a:solidFill>
+                  <a:sysClr val="windowText" lastClr="000000"/>
+                </a:solidFill>
+                <a:latin typeface="微軟正黑體" panose="020B0604030504040204" pitchFamily="34" charset="-120"/>
+                <a:ea typeface="微軟正黑體" panose="020B0604030504040204" pitchFamily="34" charset="-120"/>
+              </a:rPr>
+              <a:t>歷史紀錄</a:t>
+            </a:r>
+          </a:p>
+        </p:txBody>
+      </p:sp>
+      <p:sp>
+        <p:nvSpPr>
+          <p:cNvPr id="20" name="橢圓 19">
+            <a:extLst>
+              <a:ext uri="{FF2B5EF4-FFF2-40B4-BE49-F238E27FC236}">
+                <a16:creationId xmlns:a16="http://schemas.microsoft.com/office/drawing/2014/main" id="{8581CC69-98F4-46B0-AE91-8CA44F3236EF}"/>
+              </a:ext>
+            </a:extLst>
+          </p:cNvPr>
+          <p:cNvSpPr/>
+          <p:nvPr/>
+        </p:nvSpPr>
+        <p:spPr>
+          <a:xfrm>
+            <a:off x="512267" y="4226213"/>
+            <a:ext cx="1230942" cy="552543"/>
+          </a:xfrm>
+          <a:prstGeom prst="ellipse">
+            <a:avLst/>
+          </a:prstGeom>
+          <a:noFill/>
+          <a:ln w="38100">
+            <a:solidFill>
+              <a:srgbClr val="2F528F"/>
+            </a:solidFill>
+          </a:ln>
+        </p:spPr>
+        <p:style>
+          <a:lnRef idx="2">
+            <a:schemeClr val="accent1">
+              <a:shade val="50000"/>
+            </a:schemeClr>
+          </a:lnRef>
+          <a:fillRef idx="1">
+            <a:schemeClr val="accent1"/>
+          </a:fillRef>
+          <a:effectRef idx="0">
+            <a:schemeClr val="accent1"/>
+          </a:effectRef>
+          <a:fontRef idx="minor">
+            <a:schemeClr val="lt1"/>
+          </a:fontRef>
+        </p:style>
+        <p:txBody>
+          <a:bodyPr rtlCol="0" anchor="ctr"/>
+          <a:lstStyle/>
+          <a:p>
+            <a:pPr algn="ctr"/>
+            <a:r>
+              <a:rPr lang="zh-TW" altLang="en-US" dirty="0">
+                <a:solidFill>
+                  <a:sysClr val="windowText" lastClr="000000"/>
+                </a:solidFill>
+                <a:latin typeface="微軟正黑體" panose="020B0604030504040204" pitchFamily="34" charset="-120"/>
+                <a:ea typeface="微軟正黑體" panose="020B0604030504040204" pitchFamily="34" charset="-120"/>
+              </a:rPr>
+              <a:t>連結</a:t>
+            </a:r>
+          </a:p>
+        </p:txBody>
+      </p:sp>
+      <p:sp>
+        <p:nvSpPr>
+          <p:cNvPr id="21" name="橢圓 20">
+            <a:extLst>
+              <a:ext uri="{FF2B5EF4-FFF2-40B4-BE49-F238E27FC236}">
+                <a16:creationId xmlns:a16="http://schemas.microsoft.com/office/drawing/2014/main" id="{9F875BE5-297C-4CC9-A47C-AE3019E5B3EF}"/>
+              </a:ext>
+            </a:extLst>
+          </p:cNvPr>
+          <p:cNvSpPr/>
+          <p:nvPr/>
+        </p:nvSpPr>
+        <p:spPr>
+          <a:xfrm>
+            <a:off x="2311247" y="5028635"/>
+            <a:ext cx="1230942" cy="552543"/>
+          </a:xfrm>
+          <a:prstGeom prst="ellipse">
+            <a:avLst/>
+          </a:prstGeom>
+          <a:noFill/>
+          <a:ln w="76200" cmpd="dbl">
+            <a:solidFill>
+              <a:srgbClr val="2F528F"/>
+            </a:solidFill>
+          </a:ln>
+        </p:spPr>
+        <p:style>
+          <a:lnRef idx="2">
+            <a:schemeClr val="accent1">
+              <a:shade val="50000"/>
+            </a:schemeClr>
+          </a:lnRef>
+          <a:fillRef idx="1">
+            <a:schemeClr val="accent1"/>
+          </a:fillRef>
+          <a:effectRef idx="0">
+            <a:schemeClr val="accent1"/>
+          </a:effectRef>
+          <a:fontRef idx="minor">
+            <a:schemeClr val="lt1"/>
+          </a:fontRef>
+        </p:style>
+        <p:txBody>
+          <a:bodyPr rtlCol="0" anchor="ctr"/>
+          <a:lstStyle/>
+          <a:p>
+            <a:pPr algn="ctr"/>
+            <a:r>
+              <a:rPr lang="en-US" altLang="zh-TW" dirty="0">
+                <a:solidFill>
+                  <a:sysClr val="windowText" lastClr="000000"/>
+                </a:solidFill>
+                <a:latin typeface="微軟正黑體" panose="020B0604030504040204" pitchFamily="34" charset="-120"/>
+                <a:ea typeface="微軟正黑體" panose="020B0604030504040204" pitchFamily="34" charset="-120"/>
+              </a:rPr>
+              <a:t>tag</a:t>
+            </a:r>
+            <a:endParaRPr lang="zh-TW" altLang="en-US" dirty="0">
               <a:solidFill>
-                <a:srgbClr val="4C77C4"/>
+                <a:sysClr val="windowText" lastClr="000000"/>
               </a:solidFill>
-              <a:prstDash val="solid"/>
-            </a:ln>
-          </p:spPr>
-          <p:style>
-            <a:lnRef idx="2">
-              <a:schemeClr val="accent1">
-                <a:shade val="50000"/>
-              </a:schemeClr>
-            </a:lnRef>
-            <a:fillRef idx="1">
-              <a:schemeClr val="accent1"/>
-            </a:fillRef>
-            <a:effectRef idx="0">
-              <a:schemeClr val="accent1"/>
-            </a:effectRef>
-            <a:fontRef idx="minor">
-              <a:schemeClr val="lt1"/>
-            </a:fontRef>
-          </p:style>
-          <p:txBody>
-            <a:bodyPr rtlCol="0" anchor="ctr"/>
-            <a:lstStyle/>
-            <a:p>
-              <a:pPr algn="ctr"/>
-              <a:r>
-                <a:rPr lang="en-US" altLang="zh-TW" dirty="0">
-                  <a:solidFill>
-                    <a:sysClr val="windowText" lastClr="000000"/>
-                  </a:solidFill>
-                  <a:latin typeface="微軟正黑體" panose="020B0604030504040204" pitchFamily="34" charset="-120"/>
-                  <a:ea typeface="微軟正黑體" panose="020B0604030504040204" pitchFamily="34" charset="-120"/>
-                </a:rPr>
-                <a:t>tag</a:t>
-              </a:r>
-              <a:r>
-                <a:rPr lang="zh-TW" altLang="en-US" dirty="0">
-                  <a:solidFill>
-                    <a:sysClr val="windowText" lastClr="000000"/>
-                  </a:solidFill>
-                  <a:latin typeface="微軟正黑體" panose="020B0604030504040204" pitchFamily="34" charset="-120"/>
-                  <a:ea typeface="微軟正黑體" panose="020B0604030504040204" pitchFamily="34" charset="-120"/>
-                </a:rPr>
-                <a:t>正則化</a:t>
-              </a:r>
-            </a:p>
-          </p:txBody>
-        </p:sp>
-        <p:sp>
-          <p:nvSpPr>
-            <p:cNvPr id="23" name="橢圓 22">
-              <a:extLst>
-                <a:ext uri="{FF2B5EF4-FFF2-40B4-BE49-F238E27FC236}">
-                  <a16:creationId xmlns:a16="http://schemas.microsoft.com/office/drawing/2014/main" id="{836AC00E-2EB8-4751-BEAF-3631D95C4980}"/>
-                </a:ext>
-              </a:extLst>
-            </p:cNvPr>
-            <p:cNvSpPr/>
-            <p:nvPr/>
-          </p:nvSpPr>
-          <p:spPr>
-            <a:xfrm>
-              <a:off x="7486461" y="5990662"/>
-              <a:ext cx="1230942" cy="552543"/>
-            </a:xfrm>
-            <a:prstGeom prst="ellipse">
-              <a:avLst/>
-            </a:prstGeom>
-            <a:noFill/>
-            <a:ln w="38100">
-              <a:solidFill>
-                <a:srgbClr val="00B050"/>
-              </a:solidFill>
-            </a:ln>
-          </p:spPr>
-          <p:style>
-            <a:lnRef idx="2">
-              <a:schemeClr val="accent1">
-                <a:shade val="50000"/>
-              </a:schemeClr>
-            </a:lnRef>
-            <a:fillRef idx="1">
-              <a:schemeClr val="accent1"/>
-            </a:fillRef>
-            <a:effectRef idx="0">
-              <a:schemeClr val="accent1"/>
-            </a:effectRef>
-            <a:fontRef idx="minor">
-              <a:schemeClr val="lt1"/>
-            </a:fontRef>
-          </p:style>
-          <p:txBody>
-            <a:bodyPr rtlCol="0" anchor="ctr"/>
-            <a:lstStyle/>
-            <a:p>
-              <a:pPr algn="ctr"/>
-              <a:r>
-                <a:rPr lang="zh-TW" altLang="en-US" dirty="0">
-                  <a:solidFill>
-                    <a:sysClr val="windowText" lastClr="000000"/>
-                  </a:solidFill>
-                  <a:latin typeface="微軟正黑體" panose="020B0604030504040204" pitchFamily="34" charset="-120"/>
-                  <a:ea typeface="微軟正黑體" panose="020B0604030504040204" pitchFamily="34" charset="-120"/>
-                </a:rPr>
-                <a:t>名字</a:t>
-              </a:r>
-            </a:p>
-          </p:txBody>
-        </p:sp>
-        <p:sp>
-          <p:nvSpPr>
-            <p:cNvPr id="24" name="橢圓 23">
-              <a:extLst>
-                <a:ext uri="{FF2B5EF4-FFF2-40B4-BE49-F238E27FC236}">
-                  <a16:creationId xmlns:a16="http://schemas.microsoft.com/office/drawing/2014/main" id="{65D9E7A0-44BE-4855-856A-E6D1E673553D}"/>
-                </a:ext>
-              </a:extLst>
-            </p:cNvPr>
-            <p:cNvSpPr/>
-            <p:nvPr/>
-          </p:nvSpPr>
-          <p:spPr>
-            <a:xfrm>
-              <a:off x="5057215" y="5990661"/>
-              <a:ext cx="1911574" cy="552543"/>
-            </a:xfrm>
-            <a:prstGeom prst="ellipse">
-              <a:avLst/>
-            </a:prstGeom>
-            <a:noFill/>
-            <a:ln w="38100">
-              <a:solidFill>
-                <a:srgbClr val="00B050"/>
-              </a:solidFill>
-            </a:ln>
-          </p:spPr>
-          <p:style>
-            <a:lnRef idx="2">
-              <a:schemeClr val="accent1">
-                <a:shade val="50000"/>
-              </a:schemeClr>
-            </a:lnRef>
-            <a:fillRef idx="1">
-              <a:schemeClr val="accent1"/>
-            </a:fillRef>
-            <a:effectRef idx="0">
-              <a:schemeClr val="accent1"/>
-            </a:effectRef>
-            <a:fontRef idx="minor">
-              <a:schemeClr val="lt1"/>
-            </a:fontRef>
-          </p:style>
-          <p:txBody>
-            <a:bodyPr rtlCol="0" anchor="ctr"/>
-            <a:lstStyle/>
-            <a:p>
-              <a:pPr algn="ctr"/>
-              <a:r>
-                <a:rPr lang="zh-TW" altLang="en-US" u="sng" dirty="0">
-                  <a:solidFill>
-                    <a:sysClr val="windowText" lastClr="000000"/>
-                  </a:solidFill>
-                  <a:latin typeface="微軟正黑體" panose="020B0604030504040204" pitchFamily="34" charset="-120"/>
-                  <a:ea typeface="微軟正黑體" panose="020B0604030504040204" pitchFamily="34" charset="-120"/>
-                </a:rPr>
-                <a:t>出版社代號</a:t>
-              </a:r>
-            </a:p>
-          </p:txBody>
-        </p:sp>
-        <p:sp>
-          <p:nvSpPr>
-            <p:cNvPr id="25" name="橢圓 24">
-              <a:extLst>
-                <a:ext uri="{FF2B5EF4-FFF2-40B4-BE49-F238E27FC236}">
-                  <a16:creationId xmlns:a16="http://schemas.microsoft.com/office/drawing/2014/main" id="{916C7219-7D59-477B-83BF-4AF8FC830BA8}"/>
-                </a:ext>
-              </a:extLst>
-            </p:cNvPr>
-            <p:cNvSpPr/>
-            <p:nvPr/>
-          </p:nvSpPr>
-          <p:spPr>
-            <a:xfrm>
-              <a:off x="10543540" y="3633853"/>
-              <a:ext cx="1230942" cy="552543"/>
-            </a:xfrm>
-            <a:prstGeom prst="ellipse">
-              <a:avLst/>
-            </a:prstGeom>
-            <a:noFill/>
-            <a:ln w="38100">
-              <a:solidFill>
-                <a:srgbClr val="7030A0"/>
-              </a:solidFill>
-            </a:ln>
-          </p:spPr>
-          <p:style>
-            <a:lnRef idx="2">
-              <a:schemeClr val="accent1">
-                <a:shade val="50000"/>
-              </a:schemeClr>
-            </a:lnRef>
-            <a:fillRef idx="1">
-              <a:schemeClr val="accent1"/>
-            </a:fillRef>
-            <a:effectRef idx="0">
-              <a:schemeClr val="accent1"/>
-            </a:effectRef>
-            <a:fontRef idx="minor">
-              <a:schemeClr val="lt1"/>
-            </a:fontRef>
-          </p:style>
-          <p:txBody>
-            <a:bodyPr rtlCol="0" anchor="ctr"/>
-            <a:lstStyle/>
-            <a:p>
-              <a:pPr algn="ctr"/>
-              <a:r>
-                <a:rPr lang="zh-TW" altLang="en-US" dirty="0">
-                  <a:solidFill>
-                    <a:sysClr val="windowText" lastClr="000000"/>
-                  </a:solidFill>
-                  <a:latin typeface="微軟正黑體" panose="020B0604030504040204" pitchFamily="34" charset="-120"/>
-                  <a:ea typeface="微軟正黑體" panose="020B0604030504040204" pitchFamily="34" charset="-120"/>
-                </a:rPr>
-                <a:t>姓名</a:t>
-              </a:r>
-            </a:p>
-          </p:txBody>
-        </p:sp>
-        <p:sp>
-          <p:nvSpPr>
-            <p:cNvPr id="26" name="橢圓 25">
-              <a:extLst>
-                <a:ext uri="{FF2B5EF4-FFF2-40B4-BE49-F238E27FC236}">
-                  <a16:creationId xmlns:a16="http://schemas.microsoft.com/office/drawing/2014/main" id="{6DCCC405-FA22-4278-8938-CED02EE90AFB}"/>
-                </a:ext>
-              </a:extLst>
-            </p:cNvPr>
-            <p:cNvSpPr/>
-            <p:nvPr/>
-          </p:nvSpPr>
-          <p:spPr>
-            <a:xfrm>
-              <a:off x="10371071" y="2435373"/>
-              <a:ext cx="1573035" cy="552543"/>
-            </a:xfrm>
-            <a:prstGeom prst="ellipse">
-              <a:avLst/>
-            </a:prstGeom>
-            <a:ln w="38100">
-              <a:solidFill>
-                <a:srgbClr val="7030A0"/>
-              </a:solidFill>
-            </a:ln>
-          </p:spPr>
-          <p:style>
-            <a:lnRef idx="2">
-              <a:schemeClr val="accent2"/>
-            </a:lnRef>
-            <a:fillRef idx="1">
-              <a:schemeClr val="lt1"/>
-            </a:fillRef>
-            <a:effectRef idx="0">
-              <a:schemeClr val="accent2"/>
-            </a:effectRef>
-            <a:fontRef idx="minor">
-              <a:schemeClr val="dk1"/>
-            </a:fontRef>
-          </p:style>
-          <p:txBody>
-            <a:bodyPr rtlCol="0" anchor="ctr"/>
-            <a:lstStyle/>
-            <a:p>
-              <a:pPr algn="ctr"/>
-              <a:r>
-                <a:rPr lang="zh-TW" altLang="en-US" u="sng" dirty="0">
-                  <a:solidFill>
-                    <a:sysClr val="windowText" lastClr="000000"/>
-                  </a:solidFill>
-                  <a:latin typeface="微軟正黑體" panose="020B0604030504040204" pitchFamily="34" charset="-120"/>
-                  <a:ea typeface="微軟正黑體" panose="020B0604030504040204" pitchFamily="34" charset="-120"/>
-                </a:rPr>
-                <a:t>作者代號</a:t>
-              </a:r>
-            </a:p>
-          </p:txBody>
-        </p:sp>
-        <p:sp>
-          <p:nvSpPr>
-            <p:cNvPr id="27" name="橢圓 26">
-              <a:extLst>
-                <a:ext uri="{FF2B5EF4-FFF2-40B4-BE49-F238E27FC236}">
-                  <a16:creationId xmlns:a16="http://schemas.microsoft.com/office/drawing/2014/main" id="{0252EBF0-7A2A-4EA1-9D7D-CA4E813F4901}"/>
-                </a:ext>
-              </a:extLst>
-            </p:cNvPr>
-            <p:cNvSpPr/>
-            <p:nvPr/>
-          </p:nvSpPr>
-          <p:spPr>
-            <a:xfrm>
-              <a:off x="8808962" y="655237"/>
-              <a:ext cx="1230942" cy="552543"/>
-            </a:xfrm>
-            <a:prstGeom prst="ellipse">
-              <a:avLst/>
-            </a:prstGeom>
-            <a:noFill/>
-            <a:ln w="38100">
-              <a:solidFill>
-                <a:srgbClr val="4D4D4D"/>
-              </a:solidFill>
-            </a:ln>
-          </p:spPr>
-          <p:style>
-            <a:lnRef idx="2">
-              <a:schemeClr val="accent1">
-                <a:shade val="50000"/>
-              </a:schemeClr>
-            </a:lnRef>
-            <a:fillRef idx="1">
-              <a:schemeClr val="accent1"/>
-            </a:fillRef>
-            <a:effectRef idx="0">
-              <a:schemeClr val="accent1"/>
-            </a:effectRef>
-            <a:fontRef idx="minor">
-              <a:schemeClr val="lt1"/>
-            </a:fontRef>
-          </p:style>
-          <p:txBody>
-            <a:bodyPr rtlCol="0" anchor="ctr"/>
-            <a:lstStyle/>
-            <a:p>
-              <a:pPr algn="ctr"/>
-              <a:r>
-                <a:rPr lang="zh-TW" altLang="en-US" u="sng" dirty="0">
-                  <a:solidFill>
-                    <a:sysClr val="windowText" lastClr="000000"/>
-                  </a:solidFill>
-                  <a:latin typeface="微軟正黑體" panose="020B0604030504040204" pitchFamily="34" charset="-120"/>
-                  <a:ea typeface="微軟正黑體" panose="020B0604030504040204" pitchFamily="34" charset="-120"/>
-                </a:rPr>
-                <a:t>帳號</a:t>
-              </a:r>
-            </a:p>
-          </p:txBody>
-        </p:sp>
-        <p:sp>
-          <p:nvSpPr>
-            <p:cNvPr id="28" name="橢圓 27">
-              <a:extLst>
-                <a:ext uri="{FF2B5EF4-FFF2-40B4-BE49-F238E27FC236}">
-                  <a16:creationId xmlns:a16="http://schemas.microsoft.com/office/drawing/2014/main" id="{9DC33FA6-AABC-4C50-975A-D49FACBD2586}"/>
-                </a:ext>
-              </a:extLst>
-            </p:cNvPr>
-            <p:cNvSpPr/>
-            <p:nvPr/>
-          </p:nvSpPr>
-          <p:spPr>
-            <a:xfrm>
-              <a:off x="8808962" y="2018501"/>
-              <a:ext cx="1230942" cy="552543"/>
-            </a:xfrm>
-            <a:prstGeom prst="ellipse">
-              <a:avLst/>
-            </a:prstGeom>
-            <a:noFill/>
-            <a:ln w="38100">
-              <a:solidFill>
-                <a:srgbClr val="4D4D4D"/>
-              </a:solidFill>
-            </a:ln>
-          </p:spPr>
-          <p:style>
-            <a:lnRef idx="2">
-              <a:schemeClr val="accent1">
-                <a:shade val="50000"/>
-              </a:schemeClr>
-            </a:lnRef>
-            <a:fillRef idx="1">
-              <a:schemeClr val="accent1"/>
-            </a:fillRef>
-            <a:effectRef idx="0">
-              <a:schemeClr val="accent1"/>
-            </a:effectRef>
-            <a:fontRef idx="minor">
-              <a:schemeClr val="lt1"/>
-            </a:fontRef>
-          </p:style>
-          <p:txBody>
-            <a:bodyPr rtlCol="0" anchor="ctr"/>
-            <a:lstStyle/>
-            <a:p>
-              <a:pPr algn="ctr"/>
-              <a:r>
-                <a:rPr lang="zh-TW" altLang="en-US" dirty="0">
-                  <a:solidFill>
-                    <a:sysClr val="windowText" lastClr="000000"/>
-                  </a:solidFill>
-                  <a:latin typeface="微軟正黑體" panose="020B0604030504040204" pitchFamily="34" charset="-120"/>
-                  <a:ea typeface="微軟正黑體" panose="020B0604030504040204" pitchFamily="34" charset="-120"/>
-                </a:rPr>
-                <a:t>密碼</a:t>
-              </a:r>
-            </a:p>
-          </p:txBody>
-        </p:sp>
-        <p:sp>
-          <p:nvSpPr>
-            <p:cNvPr id="29" name="流程圖: 決策 28">
-              <a:extLst>
-                <a:ext uri="{FF2B5EF4-FFF2-40B4-BE49-F238E27FC236}">
-                  <a16:creationId xmlns:a16="http://schemas.microsoft.com/office/drawing/2014/main" id="{DA503EA1-6026-4B2E-85E1-6A63A472D0B0}"/>
-                </a:ext>
-              </a:extLst>
-            </p:cNvPr>
-            <p:cNvSpPr/>
-            <p:nvPr/>
-          </p:nvSpPr>
-          <p:spPr>
-            <a:xfrm>
-              <a:off x="4681668" y="1414657"/>
-              <a:ext cx="1467087" cy="833652"/>
-            </a:xfrm>
-            <a:prstGeom prst="flowChartDecision">
-              <a:avLst/>
-            </a:prstGeom>
-            <a:ln w="38100"/>
-          </p:spPr>
-          <p:style>
-            <a:lnRef idx="2">
-              <a:schemeClr val="accent2"/>
-            </a:lnRef>
-            <a:fillRef idx="1">
-              <a:schemeClr val="lt1"/>
-            </a:fillRef>
-            <a:effectRef idx="0">
-              <a:schemeClr val="accent2"/>
-            </a:effectRef>
-            <a:fontRef idx="minor">
-              <a:schemeClr val="dk1"/>
-            </a:fontRef>
-          </p:style>
-          <p:txBody>
-            <a:bodyPr rtlCol="0" anchor="ctr"/>
-            <a:lstStyle/>
-            <a:p>
-              <a:pPr algn="ctr"/>
-              <a:r>
-                <a:rPr lang="zh-TW" altLang="en-US" dirty="0">
-                  <a:solidFill>
-                    <a:sysClr val="windowText" lastClr="000000"/>
-                  </a:solidFill>
-                  <a:latin typeface="微軟正黑體" panose="020B0604030504040204" pitchFamily="34" charset="-120"/>
-                  <a:ea typeface="微軟正黑體" panose="020B0604030504040204" pitchFamily="34" charset="-120"/>
-                </a:rPr>
-                <a:t>閱讀</a:t>
-              </a:r>
-            </a:p>
-          </p:txBody>
-        </p:sp>
-        <p:sp>
-          <p:nvSpPr>
-            <p:cNvPr id="30" name="流程圖: 決策 29">
-              <a:extLst>
-                <a:ext uri="{FF2B5EF4-FFF2-40B4-BE49-F238E27FC236}">
-                  <a16:creationId xmlns:a16="http://schemas.microsoft.com/office/drawing/2014/main" id="{AA94ACB0-374A-428F-885A-54E11B5F9156}"/>
-                </a:ext>
-              </a:extLst>
-            </p:cNvPr>
-            <p:cNvSpPr/>
-            <p:nvPr/>
-          </p:nvSpPr>
-          <p:spPr>
-            <a:xfrm>
-              <a:off x="3949803" y="4382313"/>
-              <a:ext cx="1467087" cy="833652"/>
-            </a:xfrm>
-            <a:prstGeom prst="flowChartDecision">
-              <a:avLst/>
-            </a:prstGeom>
-            <a:ln w="38100">
-              <a:solidFill>
-                <a:srgbClr val="ED7D31"/>
-              </a:solidFill>
-            </a:ln>
-          </p:spPr>
-          <p:style>
-            <a:lnRef idx="2">
-              <a:schemeClr val="accent2"/>
-            </a:lnRef>
-            <a:fillRef idx="1">
-              <a:schemeClr val="lt1"/>
-            </a:fillRef>
-            <a:effectRef idx="0">
-              <a:schemeClr val="accent2"/>
-            </a:effectRef>
-            <a:fontRef idx="minor">
-              <a:schemeClr val="dk1"/>
-            </a:fontRef>
-          </p:style>
-          <p:txBody>
-            <a:bodyPr rtlCol="0" anchor="ctr"/>
-            <a:lstStyle/>
-            <a:p>
-              <a:pPr algn="ctr"/>
-              <a:r>
-                <a:rPr lang="zh-TW" altLang="en-US" dirty="0">
-                  <a:solidFill>
-                    <a:sysClr val="windowText" lastClr="000000"/>
-                  </a:solidFill>
-                  <a:latin typeface="微軟正黑體" panose="020B0604030504040204" pitchFamily="34" charset="-120"/>
-                  <a:ea typeface="微軟正黑體" panose="020B0604030504040204" pitchFamily="34" charset="-120"/>
-                </a:rPr>
-                <a:t>出版</a:t>
-              </a:r>
-            </a:p>
-          </p:txBody>
-        </p:sp>
-        <p:sp>
-          <p:nvSpPr>
-            <p:cNvPr id="31" name="流程圖: 決策 30">
-              <a:extLst>
-                <a:ext uri="{FF2B5EF4-FFF2-40B4-BE49-F238E27FC236}">
-                  <a16:creationId xmlns:a16="http://schemas.microsoft.com/office/drawing/2014/main" id="{B1D1C64B-5E5F-4921-BB31-20BB12819721}"/>
-                </a:ext>
-              </a:extLst>
-            </p:cNvPr>
-            <p:cNvSpPr/>
-            <p:nvPr/>
-          </p:nvSpPr>
-          <p:spPr>
-            <a:xfrm>
-              <a:off x="6235246" y="2902802"/>
-              <a:ext cx="1467087" cy="833652"/>
-            </a:xfrm>
-            <a:prstGeom prst="flowChartDecision">
-              <a:avLst/>
-            </a:prstGeom>
-            <a:ln w="38100"/>
-          </p:spPr>
-          <p:style>
-            <a:lnRef idx="2">
-              <a:schemeClr val="accent2"/>
-            </a:lnRef>
-            <a:fillRef idx="1">
-              <a:schemeClr val="lt1"/>
-            </a:fillRef>
-            <a:effectRef idx="0">
-              <a:schemeClr val="accent2"/>
-            </a:effectRef>
-            <a:fontRef idx="minor">
-              <a:schemeClr val="dk1"/>
-            </a:fontRef>
-          </p:style>
-          <p:txBody>
-            <a:bodyPr rtlCol="0" anchor="ctr"/>
-            <a:lstStyle/>
-            <a:p>
-              <a:pPr algn="ctr"/>
-              <a:r>
-                <a:rPr lang="zh-TW" altLang="en-US" dirty="0">
-                  <a:solidFill>
-                    <a:sysClr val="windowText" lastClr="000000"/>
-                  </a:solidFill>
-                  <a:latin typeface="微軟正黑體" panose="020B0604030504040204" pitchFamily="34" charset="-120"/>
-                  <a:ea typeface="微軟正黑體" panose="020B0604030504040204" pitchFamily="34" charset="-120"/>
-                </a:rPr>
-                <a:t>撰寫</a:t>
-              </a:r>
-            </a:p>
-          </p:txBody>
-        </p:sp>
-        <p:sp>
-          <p:nvSpPr>
-            <p:cNvPr id="32" name="流程圖: 決策 31">
-              <a:extLst>
-                <a:ext uri="{FF2B5EF4-FFF2-40B4-BE49-F238E27FC236}">
-                  <a16:creationId xmlns:a16="http://schemas.microsoft.com/office/drawing/2014/main" id="{F503F4C1-00BD-42DD-BB32-E8CE9F644772}"/>
-                </a:ext>
-              </a:extLst>
-            </p:cNvPr>
-            <p:cNvSpPr/>
-            <p:nvPr/>
-          </p:nvSpPr>
-          <p:spPr>
-            <a:xfrm>
-              <a:off x="8493269" y="4382313"/>
-              <a:ext cx="1467087" cy="833652"/>
-            </a:xfrm>
-            <a:prstGeom prst="flowChartDecision">
-              <a:avLst/>
-            </a:prstGeom>
-            <a:ln w="38100"/>
-          </p:spPr>
-          <p:style>
-            <a:lnRef idx="2">
-              <a:schemeClr val="accent2"/>
-            </a:lnRef>
-            <a:fillRef idx="1">
-              <a:schemeClr val="lt1"/>
-            </a:fillRef>
-            <a:effectRef idx="0">
-              <a:schemeClr val="accent2"/>
-            </a:effectRef>
-            <a:fontRef idx="minor">
-              <a:schemeClr val="dk1"/>
-            </a:fontRef>
-          </p:style>
-          <p:txBody>
-            <a:bodyPr rtlCol="0" anchor="ctr"/>
-            <a:lstStyle/>
-            <a:p>
-              <a:pPr algn="ctr"/>
-              <a:r>
-                <a:rPr lang="zh-TW" altLang="en-US" dirty="0">
-                  <a:solidFill>
-                    <a:sysClr val="windowText" lastClr="000000"/>
-                  </a:solidFill>
-                  <a:latin typeface="微軟正黑體" panose="020B0604030504040204" pitchFamily="34" charset="-120"/>
-                  <a:ea typeface="微軟正黑體" panose="020B0604030504040204" pitchFamily="34" charset="-120"/>
-                </a:rPr>
-                <a:t>簽約</a:t>
-              </a:r>
-            </a:p>
-          </p:txBody>
-        </p:sp>
-        <p:cxnSp>
-          <p:nvCxnSpPr>
-            <p:cNvPr id="34" name="直線接點 33">
-              <a:extLst>
-                <a:ext uri="{FF2B5EF4-FFF2-40B4-BE49-F238E27FC236}">
-                  <a16:creationId xmlns:a16="http://schemas.microsoft.com/office/drawing/2014/main" id="{30A20B9D-06F8-486A-8C92-BB9D95FD9810}"/>
-                </a:ext>
-              </a:extLst>
-            </p:cNvPr>
-            <p:cNvCxnSpPr>
-              <a:cxnSpLocks/>
-              <a:stCxn id="12" idx="6"/>
-              <a:endCxn id="4" idx="1"/>
-            </p:cNvCxnSpPr>
-            <p:nvPr/>
-          </p:nvCxnSpPr>
-          <p:spPr>
-            <a:xfrm>
-              <a:off x="3384096" y="724140"/>
-              <a:ext cx="819774" cy="2595489"/>
-            </a:xfrm>
-            <a:prstGeom prst="line">
-              <a:avLst/>
-            </a:prstGeom>
-            <a:ln w="38100">
-              <a:solidFill>
-                <a:srgbClr val="2F528F"/>
-              </a:solidFill>
-            </a:ln>
-          </p:spPr>
-          <p:style>
-            <a:lnRef idx="1">
-              <a:schemeClr val="accent1"/>
-            </a:lnRef>
-            <a:fillRef idx="0">
-              <a:schemeClr val="accent1"/>
-            </a:fillRef>
-            <a:effectRef idx="0">
-              <a:schemeClr val="accent1"/>
-            </a:effectRef>
-            <a:fontRef idx="minor">
-              <a:schemeClr val="tx1"/>
-            </a:fontRef>
-          </p:style>
-        </p:cxnSp>
-        <p:cxnSp>
-          <p:nvCxnSpPr>
-            <p:cNvPr id="36" name="直線接點 35">
-              <a:extLst>
-                <a:ext uri="{FF2B5EF4-FFF2-40B4-BE49-F238E27FC236}">
-                  <a16:creationId xmlns:a16="http://schemas.microsoft.com/office/drawing/2014/main" id="{6F6515FF-CABB-4B08-839F-08A4D41C304E}"/>
-                </a:ext>
-              </a:extLst>
-            </p:cNvPr>
-            <p:cNvCxnSpPr>
-              <a:cxnSpLocks/>
-              <a:stCxn id="17" idx="6"/>
-              <a:endCxn id="4" idx="1"/>
-            </p:cNvCxnSpPr>
-            <p:nvPr/>
-          </p:nvCxnSpPr>
-          <p:spPr>
-            <a:xfrm>
-              <a:off x="3384096" y="1555503"/>
-              <a:ext cx="819774" cy="1764126"/>
-            </a:xfrm>
-            <a:prstGeom prst="line">
-              <a:avLst/>
-            </a:prstGeom>
-            <a:ln w="38100">
-              <a:solidFill>
-                <a:srgbClr val="2F528F"/>
-              </a:solidFill>
-            </a:ln>
-          </p:spPr>
-          <p:style>
-            <a:lnRef idx="1">
-              <a:schemeClr val="accent1"/>
-            </a:lnRef>
-            <a:fillRef idx="0">
-              <a:schemeClr val="accent1"/>
-            </a:fillRef>
-            <a:effectRef idx="0">
-              <a:schemeClr val="accent1"/>
-            </a:effectRef>
-            <a:fontRef idx="minor">
-              <a:schemeClr val="tx1"/>
-            </a:fontRef>
-          </p:style>
-        </p:cxnSp>
-        <p:cxnSp>
-          <p:nvCxnSpPr>
-            <p:cNvPr id="42" name="直線接點 41">
-              <a:extLst>
-                <a:ext uri="{FF2B5EF4-FFF2-40B4-BE49-F238E27FC236}">
-                  <a16:creationId xmlns:a16="http://schemas.microsoft.com/office/drawing/2014/main" id="{951EBB64-AFDA-41FF-8829-AD71D11B78DA}"/>
-                </a:ext>
-              </a:extLst>
-            </p:cNvPr>
-            <p:cNvCxnSpPr>
-              <a:stCxn id="14" idx="6"/>
-              <a:endCxn id="4" idx="1"/>
-            </p:cNvCxnSpPr>
-            <p:nvPr/>
-          </p:nvCxnSpPr>
-          <p:spPr>
-            <a:xfrm>
-              <a:off x="1958259" y="1652365"/>
-              <a:ext cx="2245611" cy="1667264"/>
-            </a:xfrm>
-            <a:prstGeom prst="line">
-              <a:avLst/>
-            </a:prstGeom>
-            <a:ln w="38100">
-              <a:solidFill>
-                <a:srgbClr val="2F528F"/>
-              </a:solidFill>
-            </a:ln>
-          </p:spPr>
-          <p:style>
-            <a:lnRef idx="1">
-              <a:schemeClr val="accent1"/>
-            </a:lnRef>
-            <a:fillRef idx="0">
-              <a:schemeClr val="accent1"/>
-            </a:fillRef>
-            <a:effectRef idx="0">
-              <a:schemeClr val="accent1"/>
-            </a:effectRef>
-            <a:fontRef idx="minor">
-              <a:schemeClr val="tx1"/>
-            </a:fontRef>
-          </p:style>
-        </p:cxnSp>
-        <p:cxnSp>
-          <p:nvCxnSpPr>
-            <p:cNvPr id="44" name="直線接點 43">
-              <a:extLst>
-                <a:ext uri="{FF2B5EF4-FFF2-40B4-BE49-F238E27FC236}">
-                  <a16:creationId xmlns:a16="http://schemas.microsoft.com/office/drawing/2014/main" id="{1EC98F50-6EE5-4EB6-84FD-B4114B954638}"/>
-                </a:ext>
-              </a:extLst>
-            </p:cNvPr>
-            <p:cNvCxnSpPr>
-              <a:cxnSpLocks/>
-              <a:stCxn id="15" idx="6"/>
-              <a:endCxn id="4" idx="1"/>
-            </p:cNvCxnSpPr>
-            <p:nvPr/>
-          </p:nvCxnSpPr>
-          <p:spPr>
-            <a:xfrm flipV="1">
-              <a:off x="3605194" y="3319629"/>
-              <a:ext cx="598676" cy="1211491"/>
-            </a:xfrm>
-            <a:prstGeom prst="line">
-              <a:avLst/>
-            </a:prstGeom>
-            <a:ln w="38100">
-              <a:solidFill>
-                <a:srgbClr val="2F528F"/>
-              </a:solidFill>
-            </a:ln>
-          </p:spPr>
-          <p:style>
-            <a:lnRef idx="1">
-              <a:schemeClr val="accent1"/>
-            </a:lnRef>
-            <a:fillRef idx="0">
-              <a:schemeClr val="accent1"/>
-            </a:fillRef>
-            <a:effectRef idx="0">
-              <a:schemeClr val="accent1"/>
-            </a:effectRef>
-            <a:fontRef idx="minor">
-              <a:schemeClr val="tx1"/>
-            </a:fontRef>
-          </p:style>
-        </p:cxnSp>
-        <p:cxnSp>
-          <p:nvCxnSpPr>
-            <p:cNvPr id="46" name="直線接點 45">
-              <a:extLst>
-                <a:ext uri="{FF2B5EF4-FFF2-40B4-BE49-F238E27FC236}">
-                  <a16:creationId xmlns:a16="http://schemas.microsoft.com/office/drawing/2014/main" id="{F78D6C6B-AC27-48A0-8770-68F9AAE5D9D8}"/>
-                </a:ext>
-              </a:extLst>
-            </p:cNvPr>
-            <p:cNvCxnSpPr>
-              <a:stCxn id="20" idx="6"/>
-              <a:endCxn id="4" idx="1"/>
-            </p:cNvCxnSpPr>
-            <p:nvPr/>
-          </p:nvCxnSpPr>
-          <p:spPr>
-            <a:xfrm flipV="1">
-              <a:off x="1759757" y="3319629"/>
-              <a:ext cx="2444113" cy="1182856"/>
-            </a:xfrm>
-            <a:prstGeom prst="line">
-              <a:avLst/>
-            </a:prstGeom>
-            <a:ln w="38100">
-              <a:solidFill>
-                <a:srgbClr val="2F528F"/>
-              </a:solidFill>
-            </a:ln>
-          </p:spPr>
-          <p:style>
-            <a:lnRef idx="1">
-              <a:schemeClr val="accent1"/>
-            </a:lnRef>
-            <a:fillRef idx="0">
-              <a:schemeClr val="accent1"/>
-            </a:fillRef>
-            <a:effectRef idx="0">
-              <a:schemeClr val="accent1"/>
-            </a:effectRef>
-            <a:fontRef idx="minor">
-              <a:schemeClr val="tx1"/>
-            </a:fontRef>
-          </p:style>
-        </p:cxnSp>
-        <p:cxnSp>
-          <p:nvCxnSpPr>
-            <p:cNvPr id="48" name="直線接點 47">
-              <a:extLst>
-                <a:ext uri="{FF2B5EF4-FFF2-40B4-BE49-F238E27FC236}">
-                  <a16:creationId xmlns:a16="http://schemas.microsoft.com/office/drawing/2014/main" id="{B1C70860-DF32-490B-887C-45F51F6D8474}"/>
-                </a:ext>
-              </a:extLst>
-            </p:cNvPr>
-            <p:cNvCxnSpPr>
-              <a:cxnSpLocks/>
-              <a:stCxn id="13" idx="6"/>
-              <a:endCxn id="4" idx="1"/>
-            </p:cNvCxnSpPr>
-            <p:nvPr/>
-          </p:nvCxnSpPr>
-          <p:spPr>
-            <a:xfrm>
-              <a:off x="1511932" y="2319593"/>
-              <a:ext cx="2691938" cy="1000036"/>
-            </a:xfrm>
-            <a:prstGeom prst="line">
-              <a:avLst/>
-            </a:prstGeom>
-            <a:ln w="38100">
-              <a:solidFill>
-                <a:srgbClr val="2F528F"/>
-              </a:solidFill>
-            </a:ln>
-          </p:spPr>
-          <p:style>
-            <a:lnRef idx="1">
-              <a:schemeClr val="accent1"/>
-            </a:lnRef>
-            <a:fillRef idx="0">
-              <a:schemeClr val="accent1"/>
-            </a:fillRef>
-            <a:effectRef idx="0">
-              <a:schemeClr val="accent1"/>
-            </a:effectRef>
-            <a:fontRef idx="minor">
-              <a:schemeClr val="tx1"/>
-            </a:fontRef>
-          </p:style>
-        </p:cxnSp>
-        <p:cxnSp>
-          <p:nvCxnSpPr>
-            <p:cNvPr id="50" name="直線接點 49">
-              <a:extLst>
-                <a:ext uri="{FF2B5EF4-FFF2-40B4-BE49-F238E27FC236}">
-                  <a16:creationId xmlns:a16="http://schemas.microsoft.com/office/drawing/2014/main" id="{B9F81377-F027-4094-AD5D-385BA2A4CDA0}"/>
-                </a:ext>
-              </a:extLst>
-            </p:cNvPr>
-            <p:cNvCxnSpPr>
-              <a:stCxn id="18" idx="6"/>
-              <a:endCxn id="4" idx="1"/>
-            </p:cNvCxnSpPr>
-            <p:nvPr/>
-          </p:nvCxnSpPr>
-          <p:spPr>
-            <a:xfrm>
-              <a:off x="2437458" y="2986821"/>
-              <a:ext cx="1766412" cy="332808"/>
-            </a:xfrm>
-            <a:prstGeom prst="line">
-              <a:avLst/>
-            </a:prstGeom>
-            <a:ln w="38100">
-              <a:solidFill>
-                <a:srgbClr val="2F528F"/>
-              </a:solidFill>
-            </a:ln>
-          </p:spPr>
-          <p:style>
-            <a:lnRef idx="1">
-              <a:schemeClr val="accent1"/>
-            </a:lnRef>
-            <a:fillRef idx="0">
-              <a:schemeClr val="accent1"/>
-            </a:fillRef>
-            <a:effectRef idx="0">
-              <a:schemeClr val="accent1"/>
-            </a:effectRef>
-            <a:fontRef idx="minor">
-              <a:schemeClr val="tx1"/>
-            </a:fontRef>
-          </p:style>
-        </p:cxnSp>
-        <p:cxnSp>
-          <p:nvCxnSpPr>
-            <p:cNvPr id="52" name="直線接點 51">
-              <a:extLst>
-                <a:ext uri="{FF2B5EF4-FFF2-40B4-BE49-F238E27FC236}">
-                  <a16:creationId xmlns:a16="http://schemas.microsoft.com/office/drawing/2014/main" id="{C694CF34-7F3F-4BE0-990D-DCA7D695B5E1}"/>
-                </a:ext>
-              </a:extLst>
-            </p:cNvPr>
-            <p:cNvCxnSpPr>
-              <a:cxnSpLocks/>
-              <a:stCxn id="21" idx="6"/>
-              <a:endCxn id="4" idx="1"/>
-            </p:cNvCxnSpPr>
-            <p:nvPr/>
-          </p:nvCxnSpPr>
-          <p:spPr>
-            <a:xfrm flipV="1">
-              <a:off x="3558737" y="3319629"/>
-              <a:ext cx="645133" cy="1985278"/>
-            </a:xfrm>
-            <a:prstGeom prst="line">
-              <a:avLst/>
-            </a:prstGeom>
-            <a:ln w="38100">
-              <a:solidFill>
-                <a:srgbClr val="2F528F"/>
-              </a:solidFill>
-            </a:ln>
-          </p:spPr>
-          <p:style>
-            <a:lnRef idx="1">
-              <a:schemeClr val="accent1"/>
-            </a:lnRef>
-            <a:fillRef idx="0">
-              <a:schemeClr val="accent1"/>
-            </a:fillRef>
-            <a:effectRef idx="0">
-              <a:schemeClr val="accent1"/>
-            </a:effectRef>
-            <a:fontRef idx="minor">
-              <a:schemeClr val="tx1"/>
-            </a:fontRef>
-          </p:style>
-        </p:cxnSp>
-        <p:cxnSp>
-          <p:nvCxnSpPr>
-            <p:cNvPr id="91" name="直線接點 90">
-              <a:extLst>
-                <a:ext uri="{FF2B5EF4-FFF2-40B4-BE49-F238E27FC236}">
-                  <a16:creationId xmlns:a16="http://schemas.microsoft.com/office/drawing/2014/main" id="{9CD793D7-F2E4-4D46-A236-BCA3175C9881}"/>
-                </a:ext>
-              </a:extLst>
-            </p:cNvPr>
-            <p:cNvCxnSpPr>
-              <a:cxnSpLocks/>
-              <a:stCxn id="21" idx="4"/>
-              <a:endCxn id="22" idx="6"/>
-            </p:cNvCxnSpPr>
-            <p:nvPr/>
-          </p:nvCxnSpPr>
-          <p:spPr>
-            <a:xfrm flipH="1">
-              <a:off x="2328332" y="5581178"/>
-              <a:ext cx="614934" cy="381877"/>
-            </a:xfrm>
-            <a:prstGeom prst="line">
-              <a:avLst/>
-            </a:prstGeom>
-            <a:ln w="38100">
-              <a:solidFill>
-                <a:srgbClr val="4C77C4"/>
-              </a:solidFill>
-            </a:ln>
-          </p:spPr>
-          <p:style>
-            <a:lnRef idx="1">
-              <a:schemeClr val="accent1"/>
-            </a:lnRef>
-            <a:fillRef idx="0">
-              <a:schemeClr val="accent1"/>
-            </a:fillRef>
-            <a:effectRef idx="0">
-              <a:schemeClr val="accent1"/>
-            </a:effectRef>
-            <a:fontRef idx="minor">
-              <a:schemeClr val="tx1"/>
-            </a:fontRef>
-          </p:style>
-        </p:cxnSp>
-        <p:cxnSp>
-          <p:nvCxnSpPr>
-            <p:cNvPr id="114" name="直線接點 113">
-              <a:extLst>
-                <a:ext uri="{FF2B5EF4-FFF2-40B4-BE49-F238E27FC236}">
-                  <a16:creationId xmlns:a16="http://schemas.microsoft.com/office/drawing/2014/main" id="{D69700CE-C7D1-4D0C-88B5-81FB6269A630}"/>
-                </a:ext>
-              </a:extLst>
-            </p:cNvPr>
-            <p:cNvCxnSpPr>
-              <a:cxnSpLocks/>
-              <a:stCxn id="69" idx="2"/>
-              <a:endCxn id="24" idx="0"/>
-            </p:cNvCxnSpPr>
-            <p:nvPr/>
-          </p:nvCxnSpPr>
-          <p:spPr>
-            <a:xfrm flipH="1">
-              <a:off x="6013002" y="5507044"/>
-              <a:ext cx="1012982" cy="483617"/>
-            </a:xfrm>
-            <a:prstGeom prst="line">
-              <a:avLst/>
-            </a:prstGeom>
-            <a:ln w="38100">
-              <a:solidFill>
-                <a:srgbClr val="00B050"/>
-              </a:solidFill>
-            </a:ln>
-          </p:spPr>
-          <p:style>
-            <a:lnRef idx="1">
-              <a:schemeClr val="accent1"/>
-            </a:lnRef>
-            <a:fillRef idx="0">
-              <a:schemeClr val="accent1"/>
-            </a:fillRef>
-            <a:effectRef idx="0">
-              <a:schemeClr val="accent1"/>
-            </a:effectRef>
-            <a:fontRef idx="minor">
-              <a:schemeClr val="tx1"/>
-            </a:fontRef>
-          </p:style>
-        </p:cxnSp>
-        <p:cxnSp>
-          <p:nvCxnSpPr>
-            <p:cNvPr id="116" name="直線接點 115">
-              <a:extLst>
-                <a:ext uri="{FF2B5EF4-FFF2-40B4-BE49-F238E27FC236}">
-                  <a16:creationId xmlns:a16="http://schemas.microsoft.com/office/drawing/2014/main" id="{B3AB68E6-CD60-44EC-AF71-684B072B1039}"/>
-                </a:ext>
-              </a:extLst>
-            </p:cNvPr>
-            <p:cNvCxnSpPr>
-              <a:cxnSpLocks/>
-              <a:stCxn id="69" idx="2"/>
-              <a:endCxn id="23" idx="0"/>
-            </p:cNvCxnSpPr>
-            <p:nvPr/>
-          </p:nvCxnSpPr>
-          <p:spPr>
-            <a:xfrm>
-              <a:off x="7025984" y="5507044"/>
-              <a:ext cx="1075948" cy="483618"/>
-            </a:xfrm>
-            <a:prstGeom prst="line">
-              <a:avLst/>
-            </a:prstGeom>
-            <a:ln w="38100">
-              <a:solidFill>
-                <a:srgbClr val="00B050"/>
-              </a:solidFill>
-            </a:ln>
-          </p:spPr>
-          <p:style>
-            <a:lnRef idx="1">
-              <a:schemeClr val="accent1"/>
-            </a:lnRef>
-            <a:fillRef idx="0">
-              <a:schemeClr val="accent1"/>
-            </a:fillRef>
-            <a:effectRef idx="0">
-              <a:schemeClr val="accent1"/>
-            </a:effectRef>
-            <a:fontRef idx="minor">
-              <a:schemeClr val="tx1"/>
-            </a:fontRef>
-          </p:style>
-        </p:cxnSp>
-        <p:cxnSp>
-          <p:nvCxnSpPr>
-            <p:cNvPr id="118" name="直線接點 117">
-              <a:extLst>
-                <a:ext uri="{FF2B5EF4-FFF2-40B4-BE49-F238E27FC236}">
-                  <a16:creationId xmlns:a16="http://schemas.microsoft.com/office/drawing/2014/main" id="{1583C68D-36B7-47E3-B6FD-4A4F97FE514A}"/>
-                </a:ext>
-              </a:extLst>
-            </p:cNvPr>
-            <p:cNvCxnSpPr>
-              <a:stCxn id="7" idx="3"/>
-              <a:endCxn id="26" idx="2"/>
-            </p:cNvCxnSpPr>
-            <p:nvPr/>
-          </p:nvCxnSpPr>
-          <p:spPr>
-            <a:xfrm flipV="1">
-              <a:off x="9708737" y="2711645"/>
-              <a:ext cx="662334" cy="606981"/>
-            </a:xfrm>
-            <a:prstGeom prst="line">
-              <a:avLst/>
-            </a:prstGeom>
-            <a:ln w="38100">
-              <a:solidFill>
-                <a:srgbClr val="7030A0"/>
-              </a:solidFill>
-            </a:ln>
-          </p:spPr>
-          <p:style>
-            <a:lnRef idx="1">
-              <a:schemeClr val="accent1"/>
-            </a:lnRef>
-            <a:fillRef idx="0">
-              <a:schemeClr val="accent1"/>
-            </a:fillRef>
-            <a:effectRef idx="0">
-              <a:schemeClr val="accent1"/>
-            </a:effectRef>
-            <a:fontRef idx="minor">
-              <a:schemeClr val="tx1"/>
-            </a:fontRef>
-          </p:style>
-        </p:cxnSp>
-        <p:cxnSp>
-          <p:nvCxnSpPr>
-            <p:cNvPr id="120" name="直線接點 119">
-              <a:extLst>
-                <a:ext uri="{FF2B5EF4-FFF2-40B4-BE49-F238E27FC236}">
-                  <a16:creationId xmlns:a16="http://schemas.microsoft.com/office/drawing/2014/main" id="{E0DF614A-B2DC-4E63-92C5-86FE75DCD949}"/>
-                </a:ext>
-              </a:extLst>
-            </p:cNvPr>
-            <p:cNvCxnSpPr>
-              <a:stCxn id="7" idx="3"/>
-              <a:endCxn id="25" idx="2"/>
-            </p:cNvCxnSpPr>
-            <p:nvPr/>
-          </p:nvCxnSpPr>
-          <p:spPr>
-            <a:xfrm>
-              <a:off x="9708737" y="3318626"/>
-              <a:ext cx="834803" cy="591499"/>
-            </a:xfrm>
-            <a:prstGeom prst="line">
-              <a:avLst/>
-            </a:prstGeom>
-            <a:ln w="38100">
-              <a:solidFill>
-                <a:srgbClr val="7030A0"/>
-              </a:solidFill>
-            </a:ln>
-          </p:spPr>
-          <p:style>
-            <a:lnRef idx="1">
-              <a:schemeClr val="accent1"/>
-            </a:lnRef>
-            <a:fillRef idx="0">
-              <a:schemeClr val="accent1"/>
-            </a:fillRef>
-            <a:effectRef idx="0">
-              <a:schemeClr val="accent1"/>
-            </a:effectRef>
-            <a:fontRef idx="minor">
-              <a:schemeClr val="tx1"/>
-            </a:fontRef>
-          </p:style>
-        </p:cxnSp>
-        <p:cxnSp>
-          <p:nvCxnSpPr>
-            <p:cNvPr id="122" name="直線接點 121">
-              <a:extLst>
-                <a:ext uri="{FF2B5EF4-FFF2-40B4-BE49-F238E27FC236}">
-                  <a16:creationId xmlns:a16="http://schemas.microsoft.com/office/drawing/2014/main" id="{EA7F6708-0F86-4704-A171-6426D659B893}"/>
-                </a:ext>
-              </a:extLst>
-            </p:cNvPr>
-            <p:cNvCxnSpPr>
-              <a:stCxn id="8" idx="3"/>
-              <a:endCxn id="28" idx="2"/>
-            </p:cNvCxnSpPr>
-            <p:nvPr/>
-          </p:nvCxnSpPr>
-          <p:spPr>
-            <a:xfrm>
-              <a:off x="8220313" y="1827201"/>
-              <a:ext cx="588649" cy="467572"/>
-            </a:xfrm>
-            <a:prstGeom prst="line">
-              <a:avLst/>
-            </a:prstGeom>
-            <a:ln w="38100">
-              <a:solidFill>
-                <a:srgbClr val="4D4D4D"/>
-              </a:solidFill>
-            </a:ln>
-          </p:spPr>
-          <p:style>
-            <a:lnRef idx="1">
-              <a:schemeClr val="accent1"/>
-            </a:lnRef>
-            <a:fillRef idx="0">
-              <a:schemeClr val="accent1"/>
-            </a:fillRef>
-            <a:effectRef idx="0">
-              <a:schemeClr val="accent1"/>
-            </a:effectRef>
-            <a:fontRef idx="minor">
-              <a:schemeClr val="tx1"/>
-            </a:fontRef>
-          </p:style>
-        </p:cxnSp>
-        <p:cxnSp>
-          <p:nvCxnSpPr>
-            <p:cNvPr id="124" name="直線接點 123">
-              <a:extLst>
-                <a:ext uri="{FF2B5EF4-FFF2-40B4-BE49-F238E27FC236}">
-                  <a16:creationId xmlns:a16="http://schemas.microsoft.com/office/drawing/2014/main" id="{1C677481-5AEA-430D-9A9F-E4FF83DC87EF}"/>
-                </a:ext>
-              </a:extLst>
-            </p:cNvPr>
-            <p:cNvCxnSpPr>
-              <a:stCxn id="8" idx="3"/>
-              <a:endCxn id="27" idx="2"/>
-            </p:cNvCxnSpPr>
-            <p:nvPr/>
-          </p:nvCxnSpPr>
-          <p:spPr>
-            <a:xfrm flipV="1">
-              <a:off x="8220313" y="931509"/>
-              <a:ext cx="588649" cy="895692"/>
-            </a:xfrm>
-            <a:prstGeom prst="line">
-              <a:avLst/>
-            </a:prstGeom>
-            <a:ln w="38100">
-              <a:solidFill>
-                <a:srgbClr val="4D4D4D"/>
-              </a:solidFill>
-            </a:ln>
-          </p:spPr>
-          <p:style>
-            <a:lnRef idx="1">
-              <a:schemeClr val="accent1"/>
-            </a:lnRef>
-            <a:fillRef idx="0">
-              <a:schemeClr val="accent1"/>
-            </a:fillRef>
-            <a:effectRef idx="0">
-              <a:schemeClr val="accent1"/>
-            </a:effectRef>
-            <a:fontRef idx="minor">
-              <a:schemeClr val="tx1"/>
-            </a:fontRef>
-          </p:style>
-        </p:cxnSp>
-        <p:cxnSp>
-          <p:nvCxnSpPr>
-            <p:cNvPr id="130" name="直線接點 129">
-              <a:extLst>
-                <a:ext uri="{FF2B5EF4-FFF2-40B4-BE49-F238E27FC236}">
-                  <a16:creationId xmlns:a16="http://schemas.microsoft.com/office/drawing/2014/main" id="{229CE63F-CCAD-4E96-B326-D719E2AB69E2}"/>
-                </a:ext>
-              </a:extLst>
-            </p:cNvPr>
-            <p:cNvCxnSpPr>
-              <a:stCxn id="4" idx="2"/>
-              <a:endCxn id="30" idx="0"/>
-            </p:cNvCxnSpPr>
-            <p:nvPr/>
-          </p:nvCxnSpPr>
-          <p:spPr>
-            <a:xfrm flipH="1">
-              <a:off x="4683347" y="3608965"/>
-              <a:ext cx="2448" cy="773348"/>
-            </a:xfrm>
-            <a:prstGeom prst="line">
-              <a:avLst/>
-            </a:prstGeom>
-            <a:ln w="76200" cmpd="dbl">
-              <a:solidFill>
-                <a:srgbClr val="ED7D31"/>
-              </a:solidFill>
-            </a:ln>
-          </p:spPr>
-          <p:style>
-            <a:lnRef idx="1">
-              <a:schemeClr val="accent1"/>
-            </a:lnRef>
-            <a:fillRef idx="0">
-              <a:schemeClr val="accent1"/>
-            </a:fillRef>
-            <a:effectRef idx="0">
-              <a:schemeClr val="accent1"/>
-            </a:effectRef>
-            <a:fontRef idx="minor">
-              <a:schemeClr val="tx1"/>
-            </a:fontRef>
-          </p:style>
-        </p:cxnSp>
-        <p:cxnSp>
-          <p:nvCxnSpPr>
-            <p:cNvPr id="132" name="直線接點 131">
-              <a:extLst>
-                <a:ext uri="{FF2B5EF4-FFF2-40B4-BE49-F238E27FC236}">
-                  <a16:creationId xmlns:a16="http://schemas.microsoft.com/office/drawing/2014/main" id="{A16D8E0F-6997-4B6A-8072-ED83CA663C6D}"/>
-                </a:ext>
-              </a:extLst>
-            </p:cNvPr>
-            <p:cNvCxnSpPr>
-              <a:cxnSpLocks/>
-              <a:stCxn id="30" idx="2"/>
-              <a:endCxn id="69" idx="1"/>
-            </p:cNvCxnSpPr>
-            <p:nvPr/>
-          </p:nvCxnSpPr>
-          <p:spPr>
-            <a:xfrm>
-              <a:off x="4683347" y="5215965"/>
-              <a:ext cx="1860712" cy="1743"/>
-            </a:xfrm>
-            <a:prstGeom prst="line">
-              <a:avLst/>
-            </a:prstGeom>
-            <a:ln w="76200" cmpd="dbl">
-              <a:solidFill>
-                <a:srgbClr val="ED7D31"/>
-              </a:solidFill>
-            </a:ln>
-          </p:spPr>
-          <p:style>
-            <a:lnRef idx="1">
-              <a:schemeClr val="accent1"/>
-            </a:lnRef>
-            <a:fillRef idx="0">
-              <a:schemeClr val="accent1"/>
-            </a:fillRef>
-            <a:effectRef idx="0">
-              <a:schemeClr val="accent1"/>
-            </a:effectRef>
-            <a:fontRef idx="minor">
-              <a:schemeClr val="tx1"/>
-            </a:fontRef>
-          </p:style>
-        </p:cxnSp>
-        <p:cxnSp>
-          <p:nvCxnSpPr>
-            <p:cNvPr id="134" name="直線接點 133">
-              <a:extLst>
-                <a:ext uri="{FF2B5EF4-FFF2-40B4-BE49-F238E27FC236}">
-                  <a16:creationId xmlns:a16="http://schemas.microsoft.com/office/drawing/2014/main" id="{B771A834-D842-4990-843E-A0CFEB6A1311}"/>
-                </a:ext>
-              </a:extLst>
-            </p:cNvPr>
-            <p:cNvCxnSpPr>
-              <a:cxnSpLocks/>
-              <a:stCxn id="69" idx="3"/>
-              <a:endCxn id="32" idx="2"/>
-            </p:cNvCxnSpPr>
-            <p:nvPr/>
-          </p:nvCxnSpPr>
-          <p:spPr>
-            <a:xfrm flipV="1">
-              <a:off x="7507909" y="5215965"/>
-              <a:ext cx="1718904" cy="1743"/>
-            </a:xfrm>
-            <a:prstGeom prst="line">
-              <a:avLst/>
-            </a:prstGeom>
-            <a:ln w="76200" cmpd="dbl">
-              <a:solidFill>
-                <a:srgbClr val="ED7D31"/>
-              </a:solidFill>
-            </a:ln>
-          </p:spPr>
-          <p:style>
-            <a:lnRef idx="1">
-              <a:schemeClr val="accent1"/>
-            </a:lnRef>
-            <a:fillRef idx="0">
-              <a:schemeClr val="accent1"/>
-            </a:fillRef>
-            <a:effectRef idx="0">
-              <a:schemeClr val="accent1"/>
-            </a:effectRef>
-            <a:fontRef idx="minor">
-              <a:schemeClr val="tx1"/>
-            </a:fontRef>
-          </p:style>
-        </p:cxnSp>
-        <p:cxnSp>
-          <p:nvCxnSpPr>
-            <p:cNvPr id="136" name="直線接點 135">
-              <a:extLst>
-                <a:ext uri="{FF2B5EF4-FFF2-40B4-BE49-F238E27FC236}">
-                  <a16:creationId xmlns:a16="http://schemas.microsoft.com/office/drawing/2014/main" id="{A91C540E-4196-4AC9-8D8D-188F8B6045E3}"/>
-                </a:ext>
-              </a:extLst>
-            </p:cNvPr>
-            <p:cNvCxnSpPr>
-              <a:stCxn id="32" idx="0"/>
-              <a:endCxn id="7" idx="2"/>
-            </p:cNvCxnSpPr>
-            <p:nvPr/>
-          </p:nvCxnSpPr>
-          <p:spPr>
-            <a:xfrm flipH="1" flipV="1">
-              <a:off x="9226812" y="3607962"/>
-              <a:ext cx="1" cy="774351"/>
-            </a:xfrm>
-            <a:prstGeom prst="line">
-              <a:avLst/>
-            </a:prstGeom>
-            <a:ln w="76200" cmpd="dbl">
-              <a:solidFill>
-                <a:srgbClr val="ED7D31"/>
-              </a:solidFill>
-            </a:ln>
-          </p:spPr>
-          <p:style>
-            <a:lnRef idx="1">
-              <a:schemeClr val="accent1"/>
-            </a:lnRef>
-            <a:fillRef idx="0">
-              <a:schemeClr val="accent1"/>
-            </a:fillRef>
-            <a:effectRef idx="0">
-              <a:schemeClr val="accent1"/>
-            </a:effectRef>
-            <a:fontRef idx="minor">
-              <a:schemeClr val="tx1"/>
-            </a:fontRef>
-          </p:style>
-        </p:cxnSp>
-        <p:cxnSp>
-          <p:nvCxnSpPr>
-            <p:cNvPr id="138" name="直線接點 137">
-              <a:extLst>
-                <a:ext uri="{FF2B5EF4-FFF2-40B4-BE49-F238E27FC236}">
-                  <a16:creationId xmlns:a16="http://schemas.microsoft.com/office/drawing/2014/main" id="{4388DF5F-C414-4034-B9E4-4E5F1AE73A39}"/>
-                </a:ext>
-              </a:extLst>
-            </p:cNvPr>
-            <p:cNvCxnSpPr>
-              <a:stCxn id="31" idx="3"/>
-              <a:endCxn id="7" idx="1"/>
-            </p:cNvCxnSpPr>
-            <p:nvPr/>
-          </p:nvCxnSpPr>
-          <p:spPr>
-            <a:xfrm flipV="1">
-              <a:off x="7702333" y="3318626"/>
-              <a:ext cx="1042554" cy="1002"/>
-            </a:xfrm>
-            <a:prstGeom prst="line">
-              <a:avLst/>
-            </a:prstGeom>
-            <a:ln w="76200" cmpd="dbl">
-              <a:solidFill>
-                <a:srgbClr val="ED7D31"/>
-              </a:solidFill>
-            </a:ln>
-          </p:spPr>
-          <p:style>
-            <a:lnRef idx="1">
-              <a:schemeClr val="accent1"/>
-            </a:lnRef>
-            <a:fillRef idx="0">
-              <a:schemeClr val="accent1"/>
-            </a:fillRef>
-            <a:effectRef idx="0">
-              <a:schemeClr val="accent1"/>
-            </a:effectRef>
-            <a:fontRef idx="minor">
-              <a:schemeClr val="tx1"/>
-            </a:fontRef>
-          </p:style>
-        </p:cxnSp>
-        <p:cxnSp>
-          <p:nvCxnSpPr>
-            <p:cNvPr id="140" name="直線接點 139">
-              <a:extLst>
-                <a:ext uri="{FF2B5EF4-FFF2-40B4-BE49-F238E27FC236}">
-                  <a16:creationId xmlns:a16="http://schemas.microsoft.com/office/drawing/2014/main" id="{D0689312-1238-4003-BB6F-AC7E75B8AD49}"/>
-                </a:ext>
-              </a:extLst>
-            </p:cNvPr>
-            <p:cNvCxnSpPr>
-              <a:stCxn id="4" idx="3"/>
-              <a:endCxn id="31" idx="1"/>
-            </p:cNvCxnSpPr>
-            <p:nvPr/>
-          </p:nvCxnSpPr>
-          <p:spPr>
-            <a:xfrm flipV="1">
-              <a:off x="5167720" y="3319628"/>
-              <a:ext cx="1067526" cy="1"/>
-            </a:xfrm>
-            <a:prstGeom prst="line">
-              <a:avLst/>
-            </a:prstGeom>
-            <a:ln w="76200" cmpd="dbl">
-              <a:solidFill>
-                <a:srgbClr val="ED7D31"/>
-              </a:solidFill>
-            </a:ln>
-          </p:spPr>
-          <p:style>
-            <a:lnRef idx="1">
-              <a:schemeClr val="accent1"/>
-            </a:lnRef>
-            <a:fillRef idx="0">
-              <a:schemeClr val="accent1"/>
-            </a:fillRef>
-            <a:effectRef idx="0">
-              <a:schemeClr val="accent1"/>
-            </a:effectRef>
-            <a:fontRef idx="minor">
-              <a:schemeClr val="tx1"/>
-            </a:fontRef>
-          </p:style>
-        </p:cxnSp>
-        <p:cxnSp>
-          <p:nvCxnSpPr>
-            <p:cNvPr id="142" name="直線接點 141">
-              <a:extLst>
-                <a:ext uri="{FF2B5EF4-FFF2-40B4-BE49-F238E27FC236}">
-                  <a16:creationId xmlns:a16="http://schemas.microsoft.com/office/drawing/2014/main" id="{B86D59E7-50FD-40F7-8089-EBAB50160F7A}"/>
-                </a:ext>
-              </a:extLst>
-            </p:cNvPr>
-            <p:cNvCxnSpPr>
-              <a:stCxn id="29" idx="1"/>
-              <a:endCxn id="4" idx="0"/>
-            </p:cNvCxnSpPr>
-            <p:nvPr/>
-          </p:nvCxnSpPr>
-          <p:spPr>
-            <a:xfrm>
-              <a:off x="4681668" y="1831483"/>
-              <a:ext cx="4127" cy="1198809"/>
-            </a:xfrm>
-            <a:prstGeom prst="line">
-              <a:avLst/>
-            </a:prstGeom>
-            <a:ln w="38100">
-              <a:solidFill>
-                <a:srgbClr val="ED7D31"/>
-              </a:solidFill>
-            </a:ln>
-          </p:spPr>
-          <p:style>
-            <a:lnRef idx="1">
-              <a:schemeClr val="accent1"/>
-            </a:lnRef>
-            <a:fillRef idx="0">
-              <a:schemeClr val="accent1"/>
-            </a:fillRef>
-            <a:effectRef idx="0">
-              <a:schemeClr val="accent1"/>
-            </a:effectRef>
-            <a:fontRef idx="minor">
-              <a:schemeClr val="tx1"/>
-            </a:fontRef>
-          </p:style>
-        </p:cxnSp>
-        <p:cxnSp>
-          <p:nvCxnSpPr>
-            <p:cNvPr id="144" name="直線接點 143">
-              <a:extLst>
-                <a:ext uri="{FF2B5EF4-FFF2-40B4-BE49-F238E27FC236}">
-                  <a16:creationId xmlns:a16="http://schemas.microsoft.com/office/drawing/2014/main" id="{66101CEC-8885-4D9C-B364-A9BFF68169CE}"/>
-                </a:ext>
-              </a:extLst>
-            </p:cNvPr>
-            <p:cNvCxnSpPr>
-              <a:stCxn id="29" idx="3"/>
-              <a:endCxn id="8" idx="1"/>
-            </p:cNvCxnSpPr>
-            <p:nvPr/>
-          </p:nvCxnSpPr>
-          <p:spPr>
-            <a:xfrm flipV="1">
-              <a:off x="6148755" y="1827201"/>
-              <a:ext cx="1107708" cy="4282"/>
-            </a:xfrm>
-            <a:prstGeom prst="line">
-              <a:avLst/>
-            </a:prstGeom>
-            <a:ln w="38100">
-              <a:solidFill>
-                <a:srgbClr val="ED7D31"/>
-              </a:solidFill>
-            </a:ln>
-          </p:spPr>
-          <p:style>
-            <a:lnRef idx="1">
-              <a:schemeClr val="accent1"/>
-            </a:lnRef>
-            <a:fillRef idx="0">
-              <a:schemeClr val="accent1"/>
-            </a:fillRef>
-            <a:effectRef idx="0">
-              <a:schemeClr val="accent1"/>
-            </a:effectRef>
-            <a:fontRef idx="minor">
-              <a:schemeClr val="tx1"/>
-            </a:fontRef>
-          </p:style>
-        </p:cxnSp>
-        <p:cxnSp>
-          <p:nvCxnSpPr>
-            <p:cNvPr id="146" name="直線接點 145">
-              <a:extLst>
-                <a:ext uri="{FF2B5EF4-FFF2-40B4-BE49-F238E27FC236}">
-                  <a16:creationId xmlns:a16="http://schemas.microsoft.com/office/drawing/2014/main" id="{219D975D-4DDD-4F6D-9E89-DE35D4BF5166}"/>
-                </a:ext>
-              </a:extLst>
-            </p:cNvPr>
-            <p:cNvCxnSpPr>
-              <a:stCxn id="29" idx="0"/>
-              <a:endCxn id="19" idx="4"/>
-            </p:cNvCxnSpPr>
-            <p:nvPr/>
-          </p:nvCxnSpPr>
-          <p:spPr>
-            <a:xfrm flipH="1" flipV="1">
-              <a:off x="4752447" y="901990"/>
-              <a:ext cx="662765" cy="512667"/>
-            </a:xfrm>
-            <a:prstGeom prst="line">
-              <a:avLst/>
-            </a:prstGeom>
-            <a:ln w="38100">
-              <a:solidFill>
-                <a:srgbClr val="ED7D31"/>
-              </a:solidFill>
-            </a:ln>
-          </p:spPr>
-          <p:style>
-            <a:lnRef idx="1">
-              <a:schemeClr val="accent1"/>
-            </a:lnRef>
-            <a:fillRef idx="0">
-              <a:schemeClr val="accent1"/>
-            </a:fillRef>
-            <a:effectRef idx="0">
-              <a:schemeClr val="accent1"/>
-            </a:effectRef>
-            <a:fontRef idx="minor">
-              <a:schemeClr val="tx1"/>
-            </a:fontRef>
-          </p:style>
-        </p:cxnSp>
-        <p:cxnSp>
-          <p:nvCxnSpPr>
-            <p:cNvPr id="148" name="直線接點 147">
-              <a:extLst>
-                <a:ext uri="{FF2B5EF4-FFF2-40B4-BE49-F238E27FC236}">
-                  <a16:creationId xmlns:a16="http://schemas.microsoft.com/office/drawing/2014/main" id="{5AA120E0-7D2C-46D9-A533-2E98BC07C6D9}"/>
-                </a:ext>
-              </a:extLst>
-            </p:cNvPr>
-            <p:cNvCxnSpPr>
-              <a:stCxn id="11" idx="4"/>
-              <a:endCxn id="29" idx="0"/>
-            </p:cNvCxnSpPr>
-            <p:nvPr/>
-          </p:nvCxnSpPr>
-          <p:spPr>
-            <a:xfrm flipH="1">
-              <a:off x="5415212" y="867338"/>
-              <a:ext cx="1179870" cy="547319"/>
-            </a:xfrm>
-            <a:prstGeom prst="line">
-              <a:avLst/>
-            </a:prstGeom>
-            <a:ln w="38100">
-              <a:solidFill>
-                <a:srgbClr val="ED7D31"/>
-              </a:solidFill>
-            </a:ln>
-          </p:spPr>
-          <p:style>
-            <a:lnRef idx="1">
-              <a:schemeClr val="accent1"/>
-            </a:lnRef>
-            <a:fillRef idx="0">
-              <a:schemeClr val="accent1"/>
-            </a:fillRef>
-            <a:effectRef idx="0">
-              <a:schemeClr val="accent1"/>
-            </a:effectRef>
-            <a:fontRef idx="minor">
-              <a:schemeClr val="tx1"/>
-            </a:fontRef>
-          </p:style>
-        </p:cxnSp>
-        <p:sp>
-          <p:nvSpPr>
-            <p:cNvPr id="69" name="矩形 68">
-              <a:extLst>
-                <a:ext uri="{FF2B5EF4-FFF2-40B4-BE49-F238E27FC236}">
-                  <a16:creationId xmlns:a16="http://schemas.microsoft.com/office/drawing/2014/main" id="{AF074DE4-C9E2-4A29-A201-EA83108C0221}"/>
-                </a:ext>
-              </a:extLst>
-            </p:cNvPr>
-            <p:cNvSpPr/>
-            <p:nvPr/>
-          </p:nvSpPr>
-          <p:spPr>
-            <a:xfrm>
-              <a:off x="6544059" y="4928371"/>
-              <a:ext cx="963850" cy="578673"/>
-            </a:xfrm>
-            <a:prstGeom prst="rect">
-              <a:avLst/>
-            </a:prstGeom>
-            <a:noFill/>
-            <a:ln w="38100">
-              <a:solidFill>
-                <a:srgbClr val="00B050"/>
-              </a:solidFill>
-            </a:ln>
-          </p:spPr>
-          <p:style>
-            <a:lnRef idx="2">
-              <a:schemeClr val="accent1">
-                <a:shade val="50000"/>
-              </a:schemeClr>
-            </a:lnRef>
-            <a:fillRef idx="1">
-              <a:schemeClr val="accent1"/>
-            </a:fillRef>
-            <a:effectRef idx="0">
-              <a:schemeClr val="accent1"/>
-            </a:effectRef>
-            <a:fontRef idx="minor">
-              <a:schemeClr val="lt1"/>
-            </a:fontRef>
-          </p:style>
-          <p:txBody>
-            <a:bodyPr rtlCol="0" anchor="ctr"/>
-            <a:lstStyle/>
-            <a:p>
-              <a:pPr algn="ctr"/>
-              <a:r>
-                <a:rPr lang="zh-TW" altLang="en-US" dirty="0">
-                  <a:solidFill>
-                    <a:sysClr val="windowText" lastClr="000000"/>
-                  </a:solidFill>
-                  <a:latin typeface="微軟正黑體" panose="020B0604030504040204" pitchFamily="34" charset="-120"/>
-                  <a:ea typeface="微軟正黑體" panose="020B0604030504040204" pitchFamily="34" charset="-120"/>
-                </a:rPr>
-                <a:t>出版社</a:t>
-              </a:r>
-            </a:p>
-          </p:txBody>
-        </p:sp>
-        <p:sp>
-          <p:nvSpPr>
-            <p:cNvPr id="53" name="橢圓 52">
-              <a:extLst>
-                <a:ext uri="{FF2B5EF4-FFF2-40B4-BE49-F238E27FC236}">
-                  <a16:creationId xmlns:a16="http://schemas.microsoft.com/office/drawing/2014/main" id="{4DFC75C5-AE34-4B0C-A5BA-88EDEE029858}"/>
-                </a:ext>
-              </a:extLst>
-            </p:cNvPr>
-            <p:cNvSpPr/>
-            <p:nvPr/>
-          </p:nvSpPr>
-          <p:spPr>
-            <a:xfrm>
-              <a:off x="1020374" y="3465667"/>
-              <a:ext cx="1230942" cy="552543"/>
-            </a:xfrm>
-            <a:prstGeom prst="ellipse">
-              <a:avLst/>
-            </a:prstGeom>
-            <a:noFill/>
-            <a:ln w="38100">
-              <a:solidFill>
-                <a:srgbClr val="2F528F"/>
-              </a:solidFill>
-            </a:ln>
-          </p:spPr>
-          <p:style>
-            <a:lnRef idx="2">
-              <a:schemeClr val="accent1">
-                <a:shade val="50000"/>
-              </a:schemeClr>
-            </a:lnRef>
-            <a:fillRef idx="1">
-              <a:schemeClr val="accent1"/>
-            </a:fillRef>
-            <a:effectRef idx="0">
-              <a:schemeClr val="accent1"/>
-            </a:effectRef>
-            <a:fontRef idx="minor">
-              <a:schemeClr val="lt1"/>
-            </a:fontRef>
-          </p:style>
-          <p:txBody>
-            <a:bodyPr rtlCol="0" anchor="ctr"/>
-            <a:lstStyle/>
-            <a:p>
-              <a:pPr algn="ctr"/>
-              <a:r>
-                <a:rPr lang="zh-TW" altLang="en-US" dirty="0">
-                  <a:solidFill>
-                    <a:sysClr val="windowText" lastClr="000000"/>
-                  </a:solidFill>
-                  <a:latin typeface="微軟正黑體" panose="020B0604030504040204" pitchFamily="34" charset="-120"/>
-                  <a:ea typeface="微軟正黑體" panose="020B0604030504040204" pitchFamily="34" charset="-120"/>
-                </a:rPr>
-                <a:t>授權</a:t>
-              </a:r>
-            </a:p>
-          </p:txBody>
-        </p:sp>
-        <p:cxnSp>
-          <p:nvCxnSpPr>
-            <p:cNvPr id="16" name="直線接點 15">
-              <a:extLst>
-                <a:ext uri="{FF2B5EF4-FFF2-40B4-BE49-F238E27FC236}">
-                  <a16:creationId xmlns:a16="http://schemas.microsoft.com/office/drawing/2014/main" id="{6E92AF63-F176-4D6D-A764-41FCE76C92B6}"/>
-                </a:ext>
-              </a:extLst>
-            </p:cNvPr>
-            <p:cNvCxnSpPr>
-              <a:stCxn id="53" idx="6"/>
-              <a:endCxn id="4" idx="1"/>
-            </p:cNvCxnSpPr>
-            <p:nvPr/>
-          </p:nvCxnSpPr>
-          <p:spPr>
-            <a:xfrm flipV="1">
-              <a:off x="2251316" y="3319629"/>
-              <a:ext cx="1952554" cy="422310"/>
-            </a:xfrm>
-            <a:prstGeom prst="line">
-              <a:avLst/>
-            </a:prstGeom>
-            <a:ln w="38100">
-              <a:solidFill>
-                <a:srgbClr val="2F528F"/>
-              </a:solidFill>
-            </a:ln>
-          </p:spPr>
-          <p:style>
-            <a:lnRef idx="1">
-              <a:schemeClr val="accent1"/>
-            </a:lnRef>
-            <a:fillRef idx="0">
-              <a:schemeClr val="accent1"/>
-            </a:fillRef>
-            <a:effectRef idx="0">
-              <a:schemeClr val="accent1"/>
-            </a:effectRef>
-            <a:fontRef idx="minor">
-              <a:schemeClr val="tx1"/>
-            </a:fontRef>
-          </p:style>
-        </p:cxnSp>
-      </p:grpSp>
+              <a:latin typeface="微軟正黑體" panose="020B0604030504040204" pitchFamily="34" charset="-120"/>
+              <a:ea typeface="微軟正黑體" panose="020B0604030504040204" pitchFamily="34" charset="-120"/>
+            </a:endParaRPr>
+          </a:p>
+        </p:txBody>
+      </p:sp>
+      <p:sp>
+        <p:nvSpPr>
+          <p:cNvPr id="22" name="橢圓 21">
+            <a:extLst>
+              <a:ext uri="{FF2B5EF4-FFF2-40B4-BE49-F238E27FC236}">
+                <a16:creationId xmlns:a16="http://schemas.microsoft.com/office/drawing/2014/main" id="{87A2ED50-B606-411A-8EF1-85E6A3BF2C94}"/>
+              </a:ext>
+            </a:extLst>
+          </p:cNvPr>
+          <p:cNvSpPr/>
+          <p:nvPr/>
+        </p:nvSpPr>
+        <p:spPr>
+          <a:xfrm>
+            <a:off x="481951" y="5686783"/>
+            <a:ext cx="1829833" cy="552543"/>
+          </a:xfrm>
+          <a:prstGeom prst="ellipse">
+            <a:avLst/>
+          </a:prstGeom>
+          <a:noFill/>
+          <a:ln w="38100" cmpd="sng">
+            <a:solidFill>
+              <a:srgbClr val="4C77C4"/>
+            </a:solidFill>
+            <a:prstDash val="solid"/>
+          </a:ln>
+        </p:spPr>
+        <p:style>
+          <a:lnRef idx="2">
+            <a:schemeClr val="accent1">
+              <a:shade val="50000"/>
+            </a:schemeClr>
+          </a:lnRef>
+          <a:fillRef idx="1">
+            <a:schemeClr val="accent1"/>
+          </a:fillRef>
+          <a:effectRef idx="0">
+            <a:schemeClr val="accent1"/>
+          </a:effectRef>
+          <a:fontRef idx="minor">
+            <a:schemeClr val="lt1"/>
+          </a:fontRef>
+        </p:style>
+        <p:txBody>
+          <a:bodyPr rtlCol="0" anchor="ctr"/>
+          <a:lstStyle/>
+          <a:p>
+            <a:pPr algn="ctr"/>
+            <a:r>
+              <a:rPr lang="en-US" altLang="zh-TW" dirty="0">
+                <a:solidFill>
+                  <a:sysClr val="windowText" lastClr="000000"/>
+                </a:solidFill>
+                <a:latin typeface="微軟正黑體" panose="020B0604030504040204" pitchFamily="34" charset="-120"/>
+                <a:ea typeface="微軟正黑體" panose="020B0604030504040204" pitchFamily="34" charset="-120"/>
+              </a:rPr>
+              <a:t>tag</a:t>
+            </a:r>
+            <a:r>
+              <a:rPr lang="zh-TW" altLang="en-US" dirty="0">
+                <a:solidFill>
+                  <a:sysClr val="windowText" lastClr="000000"/>
+                </a:solidFill>
+                <a:latin typeface="微軟正黑體" panose="020B0604030504040204" pitchFamily="34" charset="-120"/>
+                <a:ea typeface="微軟正黑體" panose="020B0604030504040204" pitchFamily="34" charset="-120"/>
+              </a:rPr>
+              <a:t>正則化</a:t>
+            </a:r>
+          </a:p>
+        </p:txBody>
+      </p:sp>
+      <p:sp>
+        <p:nvSpPr>
+          <p:cNvPr id="23" name="橢圓 22">
+            <a:extLst>
+              <a:ext uri="{FF2B5EF4-FFF2-40B4-BE49-F238E27FC236}">
+                <a16:creationId xmlns:a16="http://schemas.microsoft.com/office/drawing/2014/main" id="{836AC00E-2EB8-4751-BEAF-3631D95C4980}"/>
+              </a:ext>
+            </a:extLst>
+          </p:cNvPr>
+          <p:cNvSpPr/>
+          <p:nvPr/>
+        </p:nvSpPr>
+        <p:spPr>
+          <a:xfrm>
+            <a:off x="6393965" y="5972930"/>
+            <a:ext cx="1230942" cy="552543"/>
+          </a:xfrm>
+          <a:prstGeom prst="ellipse">
+            <a:avLst/>
+          </a:prstGeom>
+          <a:noFill/>
+          <a:ln w="38100">
+            <a:solidFill>
+              <a:srgbClr val="00B050"/>
+            </a:solidFill>
+          </a:ln>
+        </p:spPr>
+        <p:style>
+          <a:lnRef idx="2">
+            <a:schemeClr val="accent1">
+              <a:shade val="50000"/>
+            </a:schemeClr>
+          </a:lnRef>
+          <a:fillRef idx="1">
+            <a:schemeClr val="accent1"/>
+          </a:fillRef>
+          <a:effectRef idx="0">
+            <a:schemeClr val="accent1"/>
+          </a:effectRef>
+          <a:fontRef idx="minor">
+            <a:schemeClr val="lt1"/>
+          </a:fontRef>
+        </p:style>
+        <p:txBody>
+          <a:bodyPr rtlCol="0" anchor="ctr"/>
+          <a:lstStyle/>
+          <a:p>
+            <a:pPr algn="ctr"/>
+            <a:r>
+              <a:rPr lang="zh-TW" altLang="en-US" dirty="0">
+                <a:solidFill>
+                  <a:sysClr val="windowText" lastClr="000000"/>
+                </a:solidFill>
+                <a:latin typeface="微軟正黑體" panose="020B0604030504040204" pitchFamily="34" charset="-120"/>
+                <a:ea typeface="微軟正黑體" panose="020B0604030504040204" pitchFamily="34" charset="-120"/>
+              </a:rPr>
+              <a:t>名字</a:t>
+            </a:r>
+          </a:p>
+        </p:txBody>
+      </p:sp>
+      <p:sp>
+        <p:nvSpPr>
+          <p:cNvPr id="24" name="橢圓 23">
+            <a:extLst>
+              <a:ext uri="{FF2B5EF4-FFF2-40B4-BE49-F238E27FC236}">
+                <a16:creationId xmlns:a16="http://schemas.microsoft.com/office/drawing/2014/main" id="{65D9E7A0-44BE-4855-856A-E6D1E673553D}"/>
+              </a:ext>
+            </a:extLst>
+          </p:cNvPr>
+          <p:cNvSpPr/>
+          <p:nvPr/>
+        </p:nvSpPr>
+        <p:spPr>
+          <a:xfrm>
+            <a:off x="4141617" y="5956010"/>
+            <a:ext cx="1911574" cy="552543"/>
+          </a:xfrm>
+          <a:prstGeom prst="ellipse">
+            <a:avLst/>
+          </a:prstGeom>
+          <a:noFill/>
+          <a:ln w="38100">
+            <a:solidFill>
+              <a:srgbClr val="00B050"/>
+            </a:solidFill>
+          </a:ln>
+        </p:spPr>
+        <p:style>
+          <a:lnRef idx="2">
+            <a:schemeClr val="accent1">
+              <a:shade val="50000"/>
+            </a:schemeClr>
+          </a:lnRef>
+          <a:fillRef idx="1">
+            <a:schemeClr val="accent1"/>
+          </a:fillRef>
+          <a:effectRef idx="0">
+            <a:schemeClr val="accent1"/>
+          </a:effectRef>
+          <a:fontRef idx="minor">
+            <a:schemeClr val="lt1"/>
+          </a:fontRef>
+        </p:style>
+        <p:txBody>
+          <a:bodyPr rtlCol="0" anchor="ctr"/>
+          <a:lstStyle/>
+          <a:p>
+            <a:pPr algn="ctr"/>
+            <a:r>
+              <a:rPr lang="zh-TW" altLang="en-US" u="sng" dirty="0">
+                <a:solidFill>
+                  <a:sysClr val="windowText" lastClr="000000"/>
+                </a:solidFill>
+                <a:latin typeface="微軟正黑體" panose="020B0604030504040204" pitchFamily="34" charset="-120"/>
+                <a:ea typeface="微軟正黑體" panose="020B0604030504040204" pitchFamily="34" charset="-120"/>
+              </a:rPr>
+              <a:t>出版社代號</a:t>
+            </a:r>
+          </a:p>
+        </p:txBody>
+      </p:sp>
+      <p:sp>
+        <p:nvSpPr>
+          <p:cNvPr id="25" name="橢圓 24">
+            <a:extLst>
+              <a:ext uri="{FF2B5EF4-FFF2-40B4-BE49-F238E27FC236}">
+                <a16:creationId xmlns:a16="http://schemas.microsoft.com/office/drawing/2014/main" id="{916C7219-7D59-477B-83BF-4AF8FC830BA8}"/>
+              </a:ext>
+            </a:extLst>
+          </p:cNvPr>
+          <p:cNvSpPr/>
+          <p:nvPr/>
+        </p:nvSpPr>
+        <p:spPr>
+          <a:xfrm>
+            <a:off x="10526992" y="3152728"/>
+            <a:ext cx="1230942" cy="552543"/>
+          </a:xfrm>
+          <a:prstGeom prst="ellipse">
+            <a:avLst/>
+          </a:prstGeom>
+          <a:noFill/>
+          <a:ln w="38100">
+            <a:solidFill>
+              <a:srgbClr val="7030A0"/>
+            </a:solidFill>
+          </a:ln>
+        </p:spPr>
+        <p:style>
+          <a:lnRef idx="2">
+            <a:schemeClr val="accent1">
+              <a:shade val="50000"/>
+            </a:schemeClr>
+          </a:lnRef>
+          <a:fillRef idx="1">
+            <a:schemeClr val="accent1"/>
+          </a:fillRef>
+          <a:effectRef idx="0">
+            <a:schemeClr val="accent1"/>
+          </a:effectRef>
+          <a:fontRef idx="minor">
+            <a:schemeClr val="lt1"/>
+          </a:fontRef>
+        </p:style>
+        <p:txBody>
+          <a:bodyPr rtlCol="0" anchor="ctr"/>
+          <a:lstStyle/>
+          <a:p>
+            <a:pPr algn="ctr"/>
+            <a:r>
+              <a:rPr lang="zh-TW" altLang="en-US" dirty="0">
+                <a:solidFill>
+                  <a:sysClr val="windowText" lastClr="000000"/>
+                </a:solidFill>
+                <a:latin typeface="微軟正黑體" panose="020B0604030504040204" pitchFamily="34" charset="-120"/>
+                <a:ea typeface="微軟正黑體" panose="020B0604030504040204" pitchFamily="34" charset="-120"/>
+              </a:rPr>
+              <a:t>姓名</a:t>
+            </a:r>
+          </a:p>
+        </p:txBody>
+      </p:sp>
+      <p:sp>
+        <p:nvSpPr>
+          <p:cNvPr id="26" name="橢圓 25">
+            <a:extLst>
+              <a:ext uri="{FF2B5EF4-FFF2-40B4-BE49-F238E27FC236}">
+                <a16:creationId xmlns:a16="http://schemas.microsoft.com/office/drawing/2014/main" id="{6DCCC405-FA22-4278-8938-CED02EE90AFB}"/>
+              </a:ext>
+            </a:extLst>
+          </p:cNvPr>
+          <p:cNvSpPr/>
+          <p:nvPr/>
+        </p:nvSpPr>
+        <p:spPr>
+          <a:xfrm>
+            <a:off x="10354523" y="2435373"/>
+            <a:ext cx="1573035" cy="552543"/>
+          </a:xfrm>
+          <a:prstGeom prst="ellipse">
+            <a:avLst/>
+          </a:prstGeom>
+          <a:ln w="38100">
+            <a:solidFill>
+              <a:srgbClr val="7030A0"/>
+            </a:solidFill>
+          </a:ln>
+        </p:spPr>
+        <p:style>
+          <a:lnRef idx="2">
+            <a:schemeClr val="accent2"/>
+          </a:lnRef>
+          <a:fillRef idx="1">
+            <a:schemeClr val="lt1"/>
+          </a:fillRef>
+          <a:effectRef idx="0">
+            <a:schemeClr val="accent2"/>
+          </a:effectRef>
+          <a:fontRef idx="minor">
+            <a:schemeClr val="dk1"/>
+          </a:fontRef>
+        </p:style>
+        <p:txBody>
+          <a:bodyPr rtlCol="0" anchor="ctr"/>
+          <a:lstStyle/>
+          <a:p>
+            <a:pPr algn="ctr"/>
+            <a:r>
+              <a:rPr lang="zh-TW" altLang="en-US" u="sng" dirty="0">
+                <a:solidFill>
+                  <a:sysClr val="windowText" lastClr="000000"/>
+                </a:solidFill>
+                <a:latin typeface="微軟正黑體" panose="020B0604030504040204" pitchFamily="34" charset="-120"/>
+                <a:ea typeface="微軟正黑體" panose="020B0604030504040204" pitchFamily="34" charset="-120"/>
+              </a:rPr>
+              <a:t>作者代號</a:t>
+            </a:r>
+          </a:p>
+        </p:txBody>
+      </p:sp>
+      <p:sp>
+        <p:nvSpPr>
+          <p:cNvPr id="27" name="橢圓 26">
+            <a:extLst>
+              <a:ext uri="{FF2B5EF4-FFF2-40B4-BE49-F238E27FC236}">
+                <a16:creationId xmlns:a16="http://schemas.microsoft.com/office/drawing/2014/main" id="{0252EBF0-7A2A-4EA1-9D7D-CA4E813F4901}"/>
+              </a:ext>
+            </a:extLst>
+          </p:cNvPr>
+          <p:cNvSpPr/>
+          <p:nvPr/>
+        </p:nvSpPr>
+        <p:spPr>
+          <a:xfrm>
+            <a:off x="8792414" y="655237"/>
+            <a:ext cx="1230942" cy="552543"/>
+          </a:xfrm>
+          <a:prstGeom prst="ellipse">
+            <a:avLst/>
+          </a:prstGeom>
+          <a:noFill/>
+          <a:ln w="38100">
+            <a:solidFill>
+              <a:srgbClr val="4D4D4D"/>
+            </a:solidFill>
+          </a:ln>
+        </p:spPr>
+        <p:style>
+          <a:lnRef idx="2">
+            <a:schemeClr val="accent1">
+              <a:shade val="50000"/>
+            </a:schemeClr>
+          </a:lnRef>
+          <a:fillRef idx="1">
+            <a:schemeClr val="accent1"/>
+          </a:fillRef>
+          <a:effectRef idx="0">
+            <a:schemeClr val="accent1"/>
+          </a:effectRef>
+          <a:fontRef idx="minor">
+            <a:schemeClr val="lt1"/>
+          </a:fontRef>
+        </p:style>
+        <p:txBody>
+          <a:bodyPr rtlCol="0" anchor="ctr"/>
+          <a:lstStyle/>
+          <a:p>
+            <a:pPr algn="ctr"/>
+            <a:r>
+              <a:rPr lang="zh-TW" altLang="en-US" u="sng" dirty="0">
+                <a:solidFill>
+                  <a:sysClr val="windowText" lastClr="000000"/>
+                </a:solidFill>
+                <a:latin typeface="微軟正黑體" panose="020B0604030504040204" pitchFamily="34" charset="-120"/>
+                <a:ea typeface="微軟正黑體" panose="020B0604030504040204" pitchFamily="34" charset="-120"/>
+              </a:rPr>
+              <a:t>帳號</a:t>
+            </a:r>
+          </a:p>
+        </p:txBody>
+      </p:sp>
+      <p:sp>
+        <p:nvSpPr>
+          <p:cNvPr id="28" name="橢圓 27">
+            <a:extLst>
+              <a:ext uri="{FF2B5EF4-FFF2-40B4-BE49-F238E27FC236}">
+                <a16:creationId xmlns:a16="http://schemas.microsoft.com/office/drawing/2014/main" id="{9DC33FA6-AABC-4C50-975A-D49FACBD2586}"/>
+              </a:ext>
+            </a:extLst>
+          </p:cNvPr>
+          <p:cNvSpPr/>
+          <p:nvPr/>
+        </p:nvSpPr>
+        <p:spPr>
+          <a:xfrm>
+            <a:off x="8792414" y="2018501"/>
+            <a:ext cx="1230942" cy="552543"/>
+          </a:xfrm>
+          <a:prstGeom prst="ellipse">
+            <a:avLst/>
+          </a:prstGeom>
+          <a:noFill/>
+          <a:ln w="38100">
+            <a:solidFill>
+              <a:srgbClr val="4D4D4D"/>
+            </a:solidFill>
+          </a:ln>
+        </p:spPr>
+        <p:style>
+          <a:lnRef idx="2">
+            <a:schemeClr val="accent1">
+              <a:shade val="50000"/>
+            </a:schemeClr>
+          </a:lnRef>
+          <a:fillRef idx="1">
+            <a:schemeClr val="accent1"/>
+          </a:fillRef>
+          <a:effectRef idx="0">
+            <a:schemeClr val="accent1"/>
+          </a:effectRef>
+          <a:fontRef idx="minor">
+            <a:schemeClr val="lt1"/>
+          </a:fontRef>
+        </p:style>
+        <p:txBody>
+          <a:bodyPr rtlCol="0" anchor="ctr"/>
+          <a:lstStyle/>
+          <a:p>
+            <a:pPr algn="ctr"/>
+            <a:r>
+              <a:rPr lang="zh-TW" altLang="en-US" dirty="0">
+                <a:solidFill>
+                  <a:sysClr val="windowText" lastClr="000000"/>
+                </a:solidFill>
+                <a:latin typeface="微軟正黑體" panose="020B0604030504040204" pitchFamily="34" charset="-120"/>
+                <a:ea typeface="微軟正黑體" panose="020B0604030504040204" pitchFamily="34" charset="-120"/>
+              </a:rPr>
+              <a:t>密碼</a:t>
+            </a:r>
+          </a:p>
+        </p:txBody>
+      </p:sp>
+      <p:sp>
+        <p:nvSpPr>
+          <p:cNvPr id="29" name="流程圖: 決策 28">
+            <a:extLst>
+              <a:ext uri="{FF2B5EF4-FFF2-40B4-BE49-F238E27FC236}">
+                <a16:creationId xmlns:a16="http://schemas.microsoft.com/office/drawing/2014/main" id="{DA503EA1-6026-4B2E-85E1-6A63A472D0B0}"/>
+              </a:ext>
+            </a:extLst>
+          </p:cNvPr>
+          <p:cNvSpPr/>
+          <p:nvPr/>
+        </p:nvSpPr>
+        <p:spPr>
+          <a:xfrm>
+            <a:off x="4665120" y="1414657"/>
+            <a:ext cx="1467087" cy="833652"/>
+          </a:xfrm>
+          <a:prstGeom prst="flowChartDecision">
+            <a:avLst/>
+          </a:prstGeom>
+          <a:ln w="38100"/>
+        </p:spPr>
+        <p:style>
+          <a:lnRef idx="2">
+            <a:schemeClr val="accent2"/>
+          </a:lnRef>
+          <a:fillRef idx="1">
+            <a:schemeClr val="lt1"/>
+          </a:fillRef>
+          <a:effectRef idx="0">
+            <a:schemeClr val="accent2"/>
+          </a:effectRef>
+          <a:fontRef idx="minor">
+            <a:schemeClr val="dk1"/>
+          </a:fontRef>
+        </p:style>
+        <p:txBody>
+          <a:bodyPr rtlCol="0" anchor="ctr"/>
+          <a:lstStyle/>
+          <a:p>
+            <a:pPr algn="ctr"/>
+            <a:r>
+              <a:rPr lang="zh-TW" altLang="en-US" dirty="0">
+                <a:solidFill>
+                  <a:sysClr val="windowText" lastClr="000000"/>
+                </a:solidFill>
+                <a:latin typeface="微軟正黑體" panose="020B0604030504040204" pitchFamily="34" charset="-120"/>
+                <a:ea typeface="微軟正黑體" panose="020B0604030504040204" pitchFamily="34" charset="-120"/>
+              </a:rPr>
+              <a:t>閱讀</a:t>
+            </a:r>
+          </a:p>
+        </p:txBody>
+      </p:sp>
+      <p:sp>
+        <p:nvSpPr>
+          <p:cNvPr id="30" name="流程圖: 決策 29">
+            <a:extLst>
+              <a:ext uri="{FF2B5EF4-FFF2-40B4-BE49-F238E27FC236}">
+                <a16:creationId xmlns:a16="http://schemas.microsoft.com/office/drawing/2014/main" id="{AA94ACB0-374A-428F-885A-54E11B5F9156}"/>
+              </a:ext>
+            </a:extLst>
+          </p:cNvPr>
+          <p:cNvSpPr/>
+          <p:nvPr/>
+        </p:nvSpPr>
+        <p:spPr>
+          <a:xfrm>
+            <a:off x="3933255" y="4382313"/>
+            <a:ext cx="1467087" cy="833652"/>
+          </a:xfrm>
+          <a:prstGeom prst="flowChartDecision">
+            <a:avLst/>
+          </a:prstGeom>
+          <a:ln w="38100">
+            <a:solidFill>
+              <a:srgbClr val="ED7D31"/>
+            </a:solidFill>
+          </a:ln>
+        </p:spPr>
+        <p:style>
+          <a:lnRef idx="2">
+            <a:schemeClr val="accent2"/>
+          </a:lnRef>
+          <a:fillRef idx="1">
+            <a:schemeClr val="lt1"/>
+          </a:fillRef>
+          <a:effectRef idx="0">
+            <a:schemeClr val="accent2"/>
+          </a:effectRef>
+          <a:fontRef idx="minor">
+            <a:schemeClr val="dk1"/>
+          </a:fontRef>
+        </p:style>
+        <p:txBody>
+          <a:bodyPr rtlCol="0" anchor="ctr"/>
+          <a:lstStyle/>
+          <a:p>
+            <a:pPr algn="ctr"/>
+            <a:r>
+              <a:rPr lang="zh-TW" altLang="en-US" dirty="0">
+                <a:solidFill>
+                  <a:sysClr val="windowText" lastClr="000000"/>
+                </a:solidFill>
+                <a:latin typeface="微軟正黑體" panose="020B0604030504040204" pitchFamily="34" charset="-120"/>
+                <a:ea typeface="微軟正黑體" panose="020B0604030504040204" pitchFamily="34" charset="-120"/>
+              </a:rPr>
+              <a:t>出版</a:t>
+            </a:r>
+          </a:p>
+        </p:txBody>
+      </p:sp>
+      <p:sp>
+        <p:nvSpPr>
+          <p:cNvPr id="31" name="流程圖: 決策 30">
+            <a:extLst>
+              <a:ext uri="{FF2B5EF4-FFF2-40B4-BE49-F238E27FC236}">
+                <a16:creationId xmlns:a16="http://schemas.microsoft.com/office/drawing/2014/main" id="{B1D1C64B-5E5F-4921-BB31-20BB12819721}"/>
+              </a:ext>
+            </a:extLst>
+          </p:cNvPr>
+          <p:cNvSpPr/>
+          <p:nvPr/>
+        </p:nvSpPr>
+        <p:spPr>
+          <a:xfrm>
+            <a:off x="6218698" y="2902802"/>
+            <a:ext cx="1467087" cy="833652"/>
+          </a:xfrm>
+          <a:prstGeom prst="flowChartDecision">
+            <a:avLst/>
+          </a:prstGeom>
+          <a:ln w="38100"/>
+        </p:spPr>
+        <p:style>
+          <a:lnRef idx="2">
+            <a:schemeClr val="accent2"/>
+          </a:lnRef>
+          <a:fillRef idx="1">
+            <a:schemeClr val="lt1"/>
+          </a:fillRef>
+          <a:effectRef idx="0">
+            <a:schemeClr val="accent2"/>
+          </a:effectRef>
+          <a:fontRef idx="minor">
+            <a:schemeClr val="dk1"/>
+          </a:fontRef>
+        </p:style>
+        <p:txBody>
+          <a:bodyPr rtlCol="0" anchor="ctr"/>
+          <a:lstStyle/>
+          <a:p>
+            <a:pPr algn="ctr"/>
+            <a:r>
+              <a:rPr lang="zh-TW" altLang="en-US" dirty="0">
+                <a:solidFill>
+                  <a:sysClr val="windowText" lastClr="000000"/>
+                </a:solidFill>
+                <a:latin typeface="微軟正黑體" panose="020B0604030504040204" pitchFamily="34" charset="-120"/>
+                <a:ea typeface="微軟正黑體" panose="020B0604030504040204" pitchFamily="34" charset="-120"/>
+              </a:rPr>
+              <a:t>撰寫</a:t>
+            </a:r>
+          </a:p>
+        </p:txBody>
+      </p:sp>
+      <p:sp>
+        <p:nvSpPr>
+          <p:cNvPr id="32" name="流程圖: 決策 31">
+            <a:extLst>
+              <a:ext uri="{FF2B5EF4-FFF2-40B4-BE49-F238E27FC236}">
+                <a16:creationId xmlns:a16="http://schemas.microsoft.com/office/drawing/2014/main" id="{F503F4C1-00BD-42DD-BB32-E8CE9F644772}"/>
+              </a:ext>
+            </a:extLst>
+          </p:cNvPr>
+          <p:cNvSpPr/>
+          <p:nvPr/>
+        </p:nvSpPr>
+        <p:spPr>
+          <a:xfrm>
+            <a:off x="8476721" y="4382313"/>
+            <a:ext cx="1467087" cy="833652"/>
+          </a:xfrm>
+          <a:prstGeom prst="flowChartDecision">
+            <a:avLst/>
+          </a:prstGeom>
+          <a:ln w="38100"/>
+        </p:spPr>
+        <p:style>
+          <a:lnRef idx="2">
+            <a:schemeClr val="accent2"/>
+          </a:lnRef>
+          <a:fillRef idx="1">
+            <a:schemeClr val="lt1"/>
+          </a:fillRef>
+          <a:effectRef idx="0">
+            <a:schemeClr val="accent2"/>
+          </a:effectRef>
+          <a:fontRef idx="minor">
+            <a:schemeClr val="dk1"/>
+          </a:fontRef>
+        </p:style>
+        <p:txBody>
+          <a:bodyPr rtlCol="0" anchor="ctr"/>
+          <a:lstStyle/>
+          <a:p>
+            <a:pPr algn="ctr"/>
+            <a:r>
+              <a:rPr lang="zh-TW" altLang="en-US" dirty="0">
+                <a:solidFill>
+                  <a:sysClr val="windowText" lastClr="000000"/>
+                </a:solidFill>
+                <a:latin typeface="微軟正黑體" panose="020B0604030504040204" pitchFamily="34" charset="-120"/>
+                <a:ea typeface="微軟正黑體" panose="020B0604030504040204" pitchFamily="34" charset="-120"/>
+              </a:rPr>
+              <a:t>簽約</a:t>
+            </a:r>
+          </a:p>
+        </p:txBody>
+      </p:sp>
+      <p:cxnSp>
+        <p:nvCxnSpPr>
+          <p:cNvPr id="34" name="直線接點 33">
+            <a:extLst>
+              <a:ext uri="{FF2B5EF4-FFF2-40B4-BE49-F238E27FC236}">
+                <a16:creationId xmlns:a16="http://schemas.microsoft.com/office/drawing/2014/main" id="{30A20B9D-06F8-486A-8C92-BB9D95FD9810}"/>
+              </a:ext>
+            </a:extLst>
+          </p:cNvPr>
+          <p:cNvCxnSpPr>
+            <a:cxnSpLocks/>
+            <a:stCxn id="12" idx="6"/>
+            <a:endCxn id="4" idx="1"/>
+          </p:cNvCxnSpPr>
+          <p:nvPr/>
+        </p:nvCxnSpPr>
+        <p:spPr>
+          <a:xfrm>
+            <a:off x="3425039" y="567133"/>
+            <a:ext cx="762283" cy="2752496"/>
+          </a:xfrm>
+          <a:prstGeom prst="line">
+            <a:avLst/>
+          </a:prstGeom>
+          <a:ln w="38100">
+            <a:solidFill>
+              <a:srgbClr val="2F528F"/>
+            </a:solidFill>
+          </a:ln>
+        </p:spPr>
+        <p:style>
+          <a:lnRef idx="1">
+            <a:schemeClr val="accent1"/>
+          </a:lnRef>
+          <a:fillRef idx="0">
+            <a:schemeClr val="accent1"/>
+          </a:fillRef>
+          <a:effectRef idx="0">
+            <a:schemeClr val="accent1"/>
+          </a:effectRef>
+          <a:fontRef idx="minor">
+            <a:schemeClr val="tx1"/>
+          </a:fontRef>
+        </p:style>
+      </p:cxnSp>
+      <p:cxnSp>
+        <p:nvCxnSpPr>
+          <p:cNvPr id="36" name="直線接點 35">
+            <a:extLst>
+              <a:ext uri="{FF2B5EF4-FFF2-40B4-BE49-F238E27FC236}">
+                <a16:creationId xmlns:a16="http://schemas.microsoft.com/office/drawing/2014/main" id="{6F6515FF-CABB-4B08-839F-08A4D41C304E}"/>
+              </a:ext>
+            </a:extLst>
+          </p:cNvPr>
+          <p:cNvCxnSpPr>
+            <a:cxnSpLocks/>
+            <a:stCxn id="17" idx="6"/>
+            <a:endCxn id="4" idx="1"/>
+          </p:cNvCxnSpPr>
+          <p:nvPr/>
+        </p:nvCxnSpPr>
+        <p:spPr>
+          <a:xfrm>
+            <a:off x="3425039" y="1172479"/>
+            <a:ext cx="762283" cy="2147150"/>
+          </a:xfrm>
+          <a:prstGeom prst="line">
+            <a:avLst/>
+          </a:prstGeom>
+          <a:ln w="38100">
+            <a:solidFill>
+              <a:srgbClr val="2F528F"/>
+            </a:solidFill>
+          </a:ln>
+        </p:spPr>
+        <p:style>
+          <a:lnRef idx="1">
+            <a:schemeClr val="accent1"/>
+          </a:lnRef>
+          <a:fillRef idx="0">
+            <a:schemeClr val="accent1"/>
+          </a:fillRef>
+          <a:effectRef idx="0">
+            <a:schemeClr val="accent1"/>
+          </a:effectRef>
+          <a:fontRef idx="minor">
+            <a:schemeClr val="tx1"/>
+          </a:fontRef>
+        </p:style>
+      </p:cxnSp>
+      <p:cxnSp>
+        <p:nvCxnSpPr>
+          <p:cNvPr id="42" name="直線接點 41">
+            <a:extLst>
+              <a:ext uri="{FF2B5EF4-FFF2-40B4-BE49-F238E27FC236}">
+                <a16:creationId xmlns:a16="http://schemas.microsoft.com/office/drawing/2014/main" id="{951EBB64-AFDA-41FF-8829-AD71D11B78DA}"/>
+              </a:ext>
+            </a:extLst>
+          </p:cNvPr>
+          <p:cNvCxnSpPr>
+            <a:cxnSpLocks/>
+            <a:stCxn id="14" idx="6"/>
+            <a:endCxn id="4" idx="1"/>
+          </p:cNvCxnSpPr>
+          <p:nvPr/>
+        </p:nvCxnSpPr>
+        <p:spPr>
+          <a:xfrm>
+            <a:off x="2699504" y="2088425"/>
+            <a:ext cx="1487818" cy="1231204"/>
+          </a:xfrm>
+          <a:prstGeom prst="line">
+            <a:avLst/>
+          </a:prstGeom>
+          <a:ln w="38100">
+            <a:solidFill>
+              <a:srgbClr val="2F528F"/>
+            </a:solidFill>
+          </a:ln>
+        </p:spPr>
+        <p:style>
+          <a:lnRef idx="1">
+            <a:schemeClr val="accent1"/>
+          </a:lnRef>
+          <a:fillRef idx="0">
+            <a:schemeClr val="accent1"/>
+          </a:fillRef>
+          <a:effectRef idx="0">
+            <a:schemeClr val="accent1"/>
+          </a:effectRef>
+          <a:fontRef idx="minor">
+            <a:schemeClr val="tx1"/>
+          </a:fontRef>
+        </p:style>
+      </p:cxnSp>
+      <p:cxnSp>
+        <p:nvCxnSpPr>
+          <p:cNvPr id="44" name="直線接點 43">
+            <a:extLst>
+              <a:ext uri="{FF2B5EF4-FFF2-40B4-BE49-F238E27FC236}">
+                <a16:creationId xmlns:a16="http://schemas.microsoft.com/office/drawing/2014/main" id="{1EC98F50-6EE5-4EB6-84FD-B4114B954638}"/>
+              </a:ext>
+            </a:extLst>
+          </p:cNvPr>
+          <p:cNvCxnSpPr>
+            <a:cxnSpLocks/>
+            <a:stCxn id="15" idx="6"/>
+            <a:endCxn id="4" idx="1"/>
+          </p:cNvCxnSpPr>
+          <p:nvPr/>
+        </p:nvCxnSpPr>
+        <p:spPr>
+          <a:xfrm flipV="1">
+            <a:off x="3588646" y="3319629"/>
+            <a:ext cx="598676" cy="1211491"/>
+          </a:xfrm>
+          <a:prstGeom prst="line">
+            <a:avLst/>
+          </a:prstGeom>
+          <a:ln w="38100">
+            <a:solidFill>
+              <a:srgbClr val="2F528F"/>
+            </a:solidFill>
+          </a:ln>
+        </p:spPr>
+        <p:style>
+          <a:lnRef idx="1">
+            <a:schemeClr val="accent1"/>
+          </a:lnRef>
+          <a:fillRef idx="0">
+            <a:schemeClr val="accent1"/>
+          </a:fillRef>
+          <a:effectRef idx="0">
+            <a:schemeClr val="accent1"/>
+          </a:effectRef>
+          <a:fontRef idx="minor">
+            <a:schemeClr val="tx1"/>
+          </a:fontRef>
+        </p:style>
+      </p:cxnSp>
+      <p:cxnSp>
+        <p:nvCxnSpPr>
+          <p:cNvPr id="46" name="直線接點 45">
+            <a:extLst>
+              <a:ext uri="{FF2B5EF4-FFF2-40B4-BE49-F238E27FC236}">
+                <a16:creationId xmlns:a16="http://schemas.microsoft.com/office/drawing/2014/main" id="{F78D6C6B-AC27-48A0-8770-68F9AAE5D9D8}"/>
+              </a:ext>
+            </a:extLst>
+          </p:cNvPr>
+          <p:cNvCxnSpPr>
+            <a:stCxn id="20" idx="6"/>
+            <a:endCxn id="4" idx="1"/>
+          </p:cNvCxnSpPr>
+          <p:nvPr/>
+        </p:nvCxnSpPr>
+        <p:spPr>
+          <a:xfrm flipV="1">
+            <a:off x="1743209" y="3319629"/>
+            <a:ext cx="2444113" cy="1182856"/>
+          </a:xfrm>
+          <a:prstGeom prst="line">
+            <a:avLst/>
+          </a:prstGeom>
+          <a:ln w="38100">
+            <a:solidFill>
+              <a:srgbClr val="2F528F"/>
+            </a:solidFill>
+          </a:ln>
+        </p:spPr>
+        <p:style>
+          <a:lnRef idx="1">
+            <a:schemeClr val="accent1"/>
+          </a:lnRef>
+          <a:fillRef idx="0">
+            <a:schemeClr val="accent1"/>
+          </a:fillRef>
+          <a:effectRef idx="0">
+            <a:schemeClr val="accent1"/>
+          </a:effectRef>
+          <a:fontRef idx="minor">
+            <a:schemeClr val="tx1"/>
+          </a:fontRef>
+        </p:style>
+      </p:cxnSp>
+      <p:cxnSp>
+        <p:nvCxnSpPr>
+          <p:cNvPr id="48" name="直線接點 47">
+            <a:extLst>
+              <a:ext uri="{FF2B5EF4-FFF2-40B4-BE49-F238E27FC236}">
+                <a16:creationId xmlns:a16="http://schemas.microsoft.com/office/drawing/2014/main" id="{B1C70860-DF32-490B-887C-45F51F6D8474}"/>
+              </a:ext>
+            </a:extLst>
+          </p:cNvPr>
+          <p:cNvCxnSpPr>
+            <a:cxnSpLocks/>
+            <a:stCxn id="13" idx="6"/>
+            <a:endCxn id="4" idx="1"/>
+          </p:cNvCxnSpPr>
+          <p:nvPr/>
+        </p:nvCxnSpPr>
+        <p:spPr>
+          <a:xfrm>
+            <a:off x="1495384" y="2319593"/>
+            <a:ext cx="2691938" cy="1000036"/>
+          </a:xfrm>
+          <a:prstGeom prst="line">
+            <a:avLst/>
+          </a:prstGeom>
+          <a:ln w="38100">
+            <a:solidFill>
+              <a:srgbClr val="2F528F"/>
+            </a:solidFill>
+          </a:ln>
+        </p:spPr>
+        <p:style>
+          <a:lnRef idx="1">
+            <a:schemeClr val="accent1"/>
+          </a:lnRef>
+          <a:fillRef idx="0">
+            <a:schemeClr val="accent1"/>
+          </a:fillRef>
+          <a:effectRef idx="0">
+            <a:schemeClr val="accent1"/>
+          </a:effectRef>
+          <a:fontRef idx="minor">
+            <a:schemeClr val="tx1"/>
+          </a:fontRef>
+        </p:style>
+      </p:cxnSp>
+      <p:cxnSp>
+        <p:nvCxnSpPr>
+          <p:cNvPr id="50" name="直線接點 49">
+            <a:extLst>
+              <a:ext uri="{FF2B5EF4-FFF2-40B4-BE49-F238E27FC236}">
+                <a16:creationId xmlns:a16="http://schemas.microsoft.com/office/drawing/2014/main" id="{B9F81377-F027-4094-AD5D-385BA2A4CDA0}"/>
+              </a:ext>
+            </a:extLst>
+          </p:cNvPr>
+          <p:cNvCxnSpPr>
+            <a:cxnSpLocks/>
+            <a:stCxn id="18" idx="6"/>
+            <a:endCxn id="4" idx="1"/>
+          </p:cNvCxnSpPr>
+          <p:nvPr/>
+        </p:nvCxnSpPr>
+        <p:spPr>
+          <a:xfrm>
+            <a:off x="2419360" y="2828250"/>
+            <a:ext cx="1767962" cy="491379"/>
+          </a:xfrm>
+          <a:prstGeom prst="line">
+            <a:avLst/>
+          </a:prstGeom>
+          <a:ln w="38100">
+            <a:solidFill>
+              <a:srgbClr val="2F528F"/>
+            </a:solidFill>
+          </a:ln>
+        </p:spPr>
+        <p:style>
+          <a:lnRef idx="1">
+            <a:schemeClr val="accent1"/>
+          </a:lnRef>
+          <a:fillRef idx="0">
+            <a:schemeClr val="accent1"/>
+          </a:fillRef>
+          <a:effectRef idx="0">
+            <a:schemeClr val="accent1"/>
+          </a:effectRef>
+          <a:fontRef idx="minor">
+            <a:schemeClr val="tx1"/>
+          </a:fontRef>
+        </p:style>
+      </p:cxnSp>
+      <p:cxnSp>
+        <p:nvCxnSpPr>
+          <p:cNvPr id="52" name="直線接點 51">
+            <a:extLst>
+              <a:ext uri="{FF2B5EF4-FFF2-40B4-BE49-F238E27FC236}">
+                <a16:creationId xmlns:a16="http://schemas.microsoft.com/office/drawing/2014/main" id="{C694CF34-7F3F-4BE0-990D-DCA7D695B5E1}"/>
+              </a:ext>
+            </a:extLst>
+          </p:cNvPr>
+          <p:cNvCxnSpPr>
+            <a:cxnSpLocks/>
+            <a:stCxn id="21" idx="6"/>
+            <a:endCxn id="4" idx="1"/>
+          </p:cNvCxnSpPr>
+          <p:nvPr/>
+        </p:nvCxnSpPr>
+        <p:spPr>
+          <a:xfrm flipV="1">
+            <a:off x="3542189" y="3319629"/>
+            <a:ext cx="645133" cy="1985278"/>
+          </a:xfrm>
+          <a:prstGeom prst="line">
+            <a:avLst/>
+          </a:prstGeom>
+          <a:ln w="38100">
+            <a:solidFill>
+              <a:srgbClr val="2F528F"/>
+            </a:solidFill>
+          </a:ln>
+        </p:spPr>
+        <p:style>
+          <a:lnRef idx="1">
+            <a:schemeClr val="accent1"/>
+          </a:lnRef>
+          <a:fillRef idx="0">
+            <a:schemeClr val="accent1"/>
+          </a:fillRef>
+          <a:effectRef idx="0">
+            <a:schemeClr val="accent1"/>
+          </a:effectRef>
+          <a:fontRef idx="minor">
+            <a:schemeClr val="tx1"/>
+          </a:fontRef>
+        </p:style>
+      </p:cxnSp>
+      <p:cxnSp>
+        <p:nvCxnSpPr>
+          <p:cNvPr id="91" name="直線接點 90">
+            <a:extLst>
+              <a:ext uri="{FF2B5EF4-FFF2-40B4-BE49-F238E27FC236}">
+                <a16:creationId xmlns:a16="http://schemas.microsoft.com/office/drawing/2014/main" id="{9CD793D7-F2E4-4D46-A236-BCA3175C9881}"/>
+              </a:ext>
+            </a:extLst>
+          </p:cNvPr>
+          <p:cNvCxnSpPr>
+            <a:cxnSpLocks/>
+            <a:stCxn id="21" idx="4"/>
+            <a:endCxn id="22" idx="6"/>
+          </p:cNvCxnSpPr>
+          <p:nvPr/>
+        </p:nvCxnSpPr>
+        <p:spPr>
+          <a:xfrm flipH="1">
+            <a:off x="2311784" y="5581178"/>
+            <a:ext cx="614934" cy="381877"/>
+          </a:xfrm>
+          <a:prstGeom prst="line">
+            <a:avLst/>
+          </a:prstGeom>
+          <a:ln w="38100">
+            <a:solidFill>
+              <a:srgbClr val="4C77C4"/>
+            </a:solidFill>
+          </a:ln>
+        </p:spPr>
+        <p:style>
+          <a:lnRef idx="1">
+            <a:schemeClr val="accent1"/>
+          </a:lnRef>
+          <a:fillRef idx="0">
+            <a:schemeClr val="accent1"/>
+          </a:fillRef>
+          <a:effectRef idx="0">
+            <a:schemeClr val="accent1"/>
+          </a:effectRef>
+          <a:fontRef idx="minor">
+            <a:schemeClr val="tx1"/>
+          </a:fontRef>
+        </p:style>
+      </p:cxnSp>
+      <p:cxnSp>
+        <p:nvCxnSpPr>
+          <p:cNvPr id="114" name="直線接點 113">
+            <a:extLst>
+              <a:ext uri="{FF2B5EF4-FFF2-40B4-BE49-F238E27FC236}">
+                <a16:creationId xmlns:a16="http://schemas.microsoft.com/office/drawing/2014/main" id="{D69700CE-C7D1-4D0C-88B5-81FB6269A630}"/>
+              </a:ext>
+            </a:extLst>
+          </p:cNvPr>
+          <p:cNvCxnSpPr>
+            <a:cxnSpLocks/>
+            <a:stCxn id="69" idx="2"/>
+            <a:endCxn id="24" idx="0"/>
+          </p:cNvCxnSpPr>
+          <p:nvPr/>
+        </p:nvCxnSpPr>
+        <p:spPr>
+          <a:xfrm flipH="1">
+            <a:off x="5097404" y="5507044"/>
+            <a:ext cx="1912032" cy="448966"/>
+          </a:xfrm>
+          <a:prstGeom prst="line">
+            <a:avLst/>
+          </a:prstGeom>
+          <a:ln w="38100">
+            <a:solidFill>
+              <a:srgbClr val="00B050"/>
+            </a:solidFill>
+          </a:ln>
+        </p:spPr>
+        <p:style>
+          <a:lnRef idx="1">
+            <a:schemeClr val="accent1"/>
+          </a:lnRef>
+          <a:fillRef idx="0">
+            <a:schemeClr val="accent1"/>
+          </a:fillRef>
+          <a:effectRef idx="0">
+            <a:schemeClr val="accent1"/>
+          </a:effectRef>
+          <a:fontRef idx="minor">
+            <a:schemeClr val="tx1"/>
+          </a:fontRef>
+        </p:style>
+      </p:cxnSp>
+      <p:cxnSp>
+        <p:nvCxnSpPr>
+          <p:cNvPr id="116" name="直線接點 115">
+            <a:extLst>
+              <a:ext uri="{FF2B5EF4-FFF2-40B4-BE49-F238E27FC236}">
+                <a16:creationId xmlns:a16="http://schemas.microsoft.com/office/drawing/2014/main" id="{B3AB68E6-CD60-44EC-AF71-684B072B1039}"/>
+              </a:ext>
+            </a:extLst>
+          </p:cNvPr>
+          <p:cNvCxnSpPr>
+            <a:cxnSpLocks/>
+            <a:stCxn id="69" idx="2"/>
+            <a:endCxn id="23" idx="0"/>
+          </p:cNvCxnSpPr>
+          <p:nvPr/>
+        </p:nvCxnSpPr>
+        <p:spPr>
+          <a:xfrm>
+            <a:off x="7009436" y="5507044"/>
+            <a:ext cx="0" cy="465886"/>
+          </a:xfrm>
+          <a:prstGeom prst="line">
+            <a:avLst/>
+          </a:prstGeom>
+          <a:ln w="38100">
+            <a:solidFill>
+              <a:srgbClr val="00B050"/>
+            </a:solidFill>
+          </a:ln>
+        </p:spPr>
+        <p:style>
+          <a:lnRef idx="1">
+            <a:schemeClr val="accent1"/>
+          </a:lnRef>
+          <a:fillRef idx="0">
+            <a:schemeClr val="accent1"/>
+          </a:fillRef>
+          <a:effectRef idx="0">
+            <a:schemeClr val="accent1"/>
+          </a:effectRef>
+          <a:fontRef idx="minor">
+            <a:schemeClr val="tx1"/>
+          </a:fontRef>
+        </p:style>
+      </p:cxnSp>
+      <p:cxnSp>
+        <p:nvCxnSpPr>
+          <p:cNvPr id="118" name="直線接點 117">
+            <a:extLst>
+              <a:ext uri="{FF2B5EF4-FFF2-40B4-BE49-F238E27FC236}">
+                <a16:creationId xmlns:a16="http://schemas.microsoft.com/office/drawing/2014/main" id="{1583C68D-36B7-47E3-B6FD-4A4F97FE514A}"/>
+              </a:ext>
+            </a:extLst>
+          </p:cNvPr>
+          <p:cNvCxnSpPr>
+            <a:stCxn id="7" idx="3"/>
+            <a:endCxn id="26" idx="2"/>
+          </p:cNvCxnSpPr>
+          <p:nvPr/>
+        </p:nvCxnSpPr>
+        <p:spPr>
+          <a:xfrm flipV="1">
+            <a:off x="9692189" y="2711645"/>
+            <a:ext cx="662334" cy="606981"/>
+          </a:xfrm>
+          <a:prstGeom prst="line">
+            <a:avLst/>
+          </a:prstGeom>
+          <a:ln w="38100">
+            <a:solidFill>
+              <a:srgbClr val="7030A0"/>
+            </a:solidFill>
+          </a:ln>
+        </p:spPr>
+        <p:style>
+          <a:lnRef idx="1">
+            <a:schemeClr val="accent1"/>
+          </a:lnRef>
+          <a:fillRef idx="0">
+            <a:schemeClr val="accent1"/>
+          </a:fillRef>
+          <a:effectRef idx="0">
+            <a:schemeClr val="accent1"/>
+          </a:effectRef>
+          <a:fontRef idx="minor">
+            <a:schemeClr val="tx1"/>
+          </a:fontRef>
+        </p:style>
+      </p:cxnSp>
+      <p:cxnSp>
+        <p:nvCxnSpPr>
+          <p:cNvPr id="120" name="直線接點 119">
+            <a:extLst>
+              <a:ext uri="{FF2B5EF4-FFF2-40B4-BE49-F238E27FC236}">
+                <a16:creationId xmlns:a16="http://schemas.microsoft.com/office/drawing/2014/main" id="{E0DF614A-B2DC-4E63-92C5-86FE75DCD949}"/>
+              </a:ext>
+            </a:extLst>
+          </p:cNvPr>
+          <p:cNvCxnSpPr>
+            <a:stCxn id="7" idx="3"/>
+            <a:endCxn id="25" idx="2"/>
+          </p:cNvCxnSpPr>
+          <p:nvPr/>
+        </p:nvCxnSpPr>
+        <p:spPr>
+          <a:xfrm>
+            <a:off x="9692189" y="3318626"/>
+            <a:ext cx="834803" cy="110374"/>
+          </a:xfrm>
+          <a:prstGeom prst="line">
+            <a:avLst/>
+          </a:prstGeom>
+          <a:ln w="38100">
+            <a:solidFill>
+              <a:srgbClr val="7030A0"/>
+            </a:solidFill>
+          </a:ln>
+        </p:spPr>
+        <p:style>
+          <a:lnRef idx="1">
+            <a:schemeClr val="accent1"/>
+          </a:lnRef>
+          <a:fillRef idx="0">
+            <a:schemeClr val="accent1"/>
+          </a:fillRef>
+          <a:effectRef idx="0">
+            <a:schemeClr val="accent1"/>
+          </a:effectRef>
+          <a:fontRef idx="minor">
+            <a:schemeClr val="tx1"/>
+          </a:fontRef>
+        </p:style>
+      </p:cxnSp>
+      <p:cxnSp>
+        <p:nvCxnSpPr>
+          <p:cNvPr id="122" name="直線接點 121">
+            <a:extLst>
+              <a:ext uri="{FF2B5EF4-FFF2-40B4-BE49-F238E27FC236}">
+                <a16:creationId xmlns:a16="http://schemas.microsoft.com/office/drawing/2014/main" id="{EA7F6708-0F86-4704-A171-6426D659B893}"/>
+              </a:ext>
+            </a:extLst>
+          </p:cNvPr>
+          <p:cNvCxnSpPr>
+            <a:stCxn id="8" idx="3"/>
+            <a:endCxn id="28" idx="2"/>
+          </p:cNvCxnSpPr>
+          <p:nvPr/>
+        </p:nvCxnSpPr>
+        <p:spPr>
+          <a:xfrm>
+            <a:off x="8203765" y="1827201"/>
+            <a:ext cx="588649" cy="467572"/>
+          </a:xfrm>
+          <a:prstGeom prst="line">
+            <a:avLst/>
+          </a:prstGeom>
+          <a:ln w="38100">
+            <a:solidFill>
+              <a:srgbClr val="4D4D4D"/>
+            </a:solidFill>
+          </a:ln>
+        </p:spPr>
+        <p:style>
+          <a:lnRef idx="1">
+            <a:schemeClr val="accent1"/>
+          </a:lnRef>
+          <a:fillRef idx="0">
+            <a:schemeClr val="accent1"/>
+          </a:fillRef>
+          <a:effectRef idx="0">
+            <a:schemeClr val="accent1"/>
+          </a:effectRef>
+          <a:fontRef idx="minor">
+            <a:schemeClr val="tx1"/>
+          </a:fontRef>
+        </p:style>
+      </p:cxnSp>
+      <p:cxnSp>
+        <p:nvCxnSpPr>
+          <p:cNvPr id="124" name="直線接點 123">
+            <a:extLst>
+              <a:ext uri="{FF2B5EF4-FFF2-40B4-BE49-F238E27FC236}">
+                <a16:creationId xmlns:a16="http://schemas.microsoft.com/office/drawing/2014/main" id="{1C677481-5AEA-430D-9A9F-E4FF83DC87EF}"/>
+              </a:ext>
+            </a:extLst>
+          </p:cNvPr>
+          <p:cNvCxnSpPr>
+            <a:stCxn id="8" idx="3"/>
+            <a:endCxn id="27" idx="2"/>
+          </p:cNvCxnSpPr>
+          <p:nvPr/>
+        </p:nvCxnSpPr>
+        <p:spPr>
+          <a:xfrm flipV="1">
+            <a:off x="8203765" y="931509"/>
+            <a:ext cx="588649" cy="895692"/>
+          </a:xfrm>
+          <a:prstGeom prst="line">
+            <a:avLst/>
+          </a:prstGeom>
+          <a:ln w="38100">
+            <a:solidFill>
+              <a:srgbClr val="4D4D4D"/>
+            </a:solidFill>
+          </a:ln>
+        </p:spPr>
+        <p:style>
+          <a:lnRef idx="1">
+            <a:schemeClr val="accent1"/>
+          </a:lnRef>
+          <a:fillRef idx="0">
+            <a:schemeClr val="accent1"/>
+          </a:fillRef>
+          <a:effectRef idx="0">
+            <a:schemeClr val="accent1"/>
+          </a:effectRef>
+          <a:fontRef idx="minor">
+            <a:schemeClr val="tx1"/>
+          </a:fontRef>
+        </p:style>
+      </p:cxnSp>
+      <p:cxnSp>
+        <p:nvCxnSpPr>
+          <p:cNvPr id="130" name="直線接點 129">
+            <a:extLst>
+              <a:ext uri="{FF2B5EF4-FFF2-40B4-BE49-F238E27FC236}">
+                <a16:creationId xmlns:a16="http://schemas.microsoft.com/office/drawing/2014/main" id="{229CE63F-CCAD-4E96-B326-D719E2AB69E2}"/>
+              </a:ext>
+            </a:extLst>
+          </p:cNvPr>
+          <p:cNvCxnSpPr>
+            <a:stCxn id="4" idx="2"/>
+            <a:endCxn id="30" idx="0"/>
+          </p:cNvCxnSpPr>
+          <p:nvPr/>
+        </p:nvCxnSpPr>
+        <p:spPr>
+          <a:xfrm flipH="1">
+            <a:off x="4666799" y="3608965"/>
+            <a:ext cx="2448" cy="773348"/>
+          </a:xfrm>
+          <a:prstGeom prst="line">
+            <a:avLst/>
+          </a:prstGeom>
+          <a:ln w="76200" cmpd="dbl">
+            <a:solidFill>
+              <a:srgbClr val="ED7D31"/>
+            </a:solidFill>
+          </a:ln>
+        </p:spPr>
+        <p:style>
+          <a:lnRef idx="1">
+            <a:schemeClr val="accent1"/>
+          </a:lnRef>
+          <a:fillRef idx="0">
+            <a:schemeClr val="accent1"/>
+          </a:fillRef>
+          <a:effectRef idx="0">
+            <a:schemeClr val="accent1"/>
+          </a:effectRef>
+          <a:fontRef idx="minor">
+            <a:schemeClr val="tx1"/>
+          </a:fontRef>
+        </p:style>
+      </p:cxnSp>
+      <p:cxnSp>
+        <p:nvCxnSpPr>
+          <p:cNvPr id="132" name="直線接點 131">
+            <a:extLst>
+              <a:ext uri="{FF2B5EF4-FFF2-40B4-BE49-F238E27FC236}">
+                <a16:creationId xmlns:a16="http://schemas.microsoft.com/office/drawing/2014/main" id="{A16D8E0F-6997-4B6A-8072-ED83CA663C6D}"/>
+              </a:ext>
+            </a:extLst>
+          </p:cNvPr>
+          <p:cNvCxnSpPr>
+            <a:cxnSpLocks/>
+            <a:stCxn id="30" idx="2"/>
+            <a:endCxn id="69" idx="1"/>
+          </p:cNvCxnSpPr>
+          <p:nvPr/>
+        </p:nvCxnSpPr>
+        <p:spPr>
+          <a:xfrm>
+            <a:off x="4666799" y="5215965"/>
+            <a:ext cx="1860712" cy="1743"/>
+          </a:xfrm>
+          <a:prstGeom prst="line">
+            <a:avLst/>
+          </a:prstGeom>
+          <a:ln w="76200" cmpd="dbl">
+            <a:solidFill>
+              <a:srgbClr val="ED7D31"/>
+            </a:solidFill>
+          </a:ln>
+        </p:spPr>
+        <p:style>
+          <a:lnRef idx="1">
+            <a:schemeClr val="accent1"/>
+          </a:lnRef>
+          <a:fillRef idx="0">
+            <a:schemeClr val="accent1"/>
+          </a:fillRef>
+          <a:effectRef idx="0">
+            <a:schemeClr val="accent1"/>
+          </a:effectRef>
+          <a:fontRef idx="minor">
+            <a:schemeClr val="tx1"/>
+          </a:fontRef>
+        </p:style>
+      </p:cxnSp>
+      <p:cxnSp>
+        <p:nvCxnSpPr>
+          <p:cNvPr id="134" name="直線接點 133">
+            <a:extLst>
+              <a:ext uri="{FF2B5EF4-FFF2-40B4-BE49-F238E27FC236}">
+                <a16:creationId xmlns:a16="http://schemas.microsoft.com/office/drawing/2014/main" id="{B771A834-D842-4990-843E-A0CFEB6A1311}"/>
+              </a:ext>
+            </a:extLst>
+          </p:cNvPr>
+          <p:cNvCxnSpPr>
+            <a:cxnSpLocks/>
+            <a:stCxn id="69" idx="3"/>
+            <a:endCxn id="32" idx="2"/>
+          </p:cNvCxnSpPr>
+          <p:nvPr/>
+        </p:nvCxnSpPr>
+        <p:spPr>
+          <a:xfrm flipV="1">
+            <a:off x="7491361" y="5215965"/>
+            <a:ext cx="1718904" cy="1743"/>
+          </a:xfrm>
+          <a:prstGeom prst="line">
+            <a:avLst/>
+          </a:prstGeom>
+          <a:ln w="76200" cmpd="dbl">
+            <a:solidFill>
+              <a:srgbClr val="ED7D31"/>
+            </a:solidFill>
+          </a:ln>
+        </p:spPr>
+        <p:style>
+          <a:lnRef idx="1">
+            <a:schemeClr val="accent1"/>
+          </a:lnRef>
+          <a:fillRef idx="0">
+            <a:schemeClr val="accent1"/>
+          </a:fillRef>
+          <a:effectRef idx="0">
+            <a:schemeClr val="accent1"/>
+          </a:effectRef>
+          <a:fontRef idx="minor">
+            <a:schemeClr val="tx1"/>
+          </a:fontRef>
+        </p:style>
+      </p:cxnSp>
+      <p:cxnSp>
+        <p:nvCxnSpPr>
+          <p:cNvPr id="136" name="直線接點 135">
+            <a:extLst>
+              <a:ext uri="{FF2B5EF4-FFF2-40B4-BE49-F238E27FC236}">
+                <a16:creationId xmlns:a16="http://schemas.microsoft.com/office/drawing/2014/main" id="{A91C540E-4196-4AC9-8D8D-188F8B6045E3}"/>
+              </a:ext>
+            </a:extLst>
+          </p:cNvPr>
+          <p:cNvCxnSpPr>
+            <a:stCxn id="32" idx="0"/>
+            <a:endCxn id="7" idx="2"/>
+          </p:cNvCxnSpPr>
+          <p:nvPr/>
+        </p:nvCxnSpPr>
+        <p:spPr>
+          <a:xfrm flipH="1" flipV="1">
+            <a:off x="9210264" y="3607962"/>
+            <a:ext cx="1" cy="774351"/>
+          </a:xfrm>
+          <a:prstGeom prst="line">
+            <a:avLst/>
+          </a:prstGeom>
+          <a:ln w="76200" cmpd="dbl">
+            <a:solidFill>
+              <a:srgbClr val="ED7D31"/>
+            </a:solidFill>
+          </a:ln>
+        </p:spPr>
+        <p:style>
+          <a:lnRef idx="1">
+            <a:schemeClr val="accent1"/>
+          </a:lnRef>
+          <a:fillRef idx="0">
+            <a:schemeClr val="accent1"/>
+          </a:fillRef>
+          <a:effectRef idx="0">
+            <a:schemeClr val="accent1"/>
+          </a:effectRef>
+          <a:fontRef idx="minor">
+            <a:schemeClr val="tx1"/>
+          </a:fontRef>
+        </p:style>
+      </p:cxnSp>
+      <p:cxnSp>
+        <p:nvCxnSpPr>
+          <p:cNvPr id="138" name="直線接點 137">
+            <a:extLst>
+              <a:ext uri="{FF2B5EF4-FFF2-40B4-BE49-F238E27FC236}">
+                <a16:creationId xmlns:a16="http://schemas.microsoft.com/office/drawing/2014/main" id="{4388DF5F-C414-4034-B9E4-4E5F1AE73A39}"/>
+              </a:ext>
+            </a:extLst>
+          </p:cNvPr>
+          <p:cNvCxnSpPr>
+            <a:stCxn id="31" idx="3"/>
+            <a:endCxn id="7" idx="1"/>
+          </p:cNvCxnSpPr>
+          <p:nvPr/>
+        </p:nvCxnSpPr>
+        <p:spPr>
+          <a:xfrm flipV="1">
+            <a:off x="7685785" y="3318626"/>
+            <a:ext cx="1042554" cy="1002"/>
+          </a:xfrm>
+          <a:prstGeom prst="line">
+            <a:avLst/>
+          </a:prstGeom>
+          <a:ln w="76200" cmpd="dbl">
+            <a:solidFill>
+              <a:srgbClr val="ED7D31"/>
+            </a:solidFill>
+          </a:ln>
+        </p:spPr>
+        <p:style>
+          <a:lnRef idx="1">
+            <a:schemeClr val="accent1"/>
+          </a:lnRef>
+          <a:fillRef idx="0">
+            <a:schemeClr val="accent1"/>
+          </a:fillRef>
+          <a:effectRef idx="0">
+            <a:schemeClr val="accent1"/>
+          </a:effectRef>
+          <a:fontRef idx="minor">
+            <a:schemeClr val="tx1"/>
+          </a:fontRef>
+        </p:style>
+      </p:cxnSp>
+      <p:cxnSp>
+        <p:nvCxnSpPr>
+          <p:cNvPr id="140" name="直線接點 139">
+            <a:extLst>
+              <a:ext uri="{FF2B5EF4-FFF2-40B4-BE49-F238E27FC236}">
+                <a16:creationId xmlns:a16="http://schemas.microsoft.com/office/drawing/2014/main" id="{D0689312-1238-4003-BB6F-AC7E75B8AD49}"/>
+              </a:ext>
+            </a:extLst>
+          </p:cNvPr>
+          <p:cNvCxnSpPr>
+            <a:stCxn id="4" idx="3"/>
+            <a:endCxn id="31" idx="1"/>
+          </p:cNvCxnSpPr>
+          <p:nvPr/>
+        </p:nvCxnSpPr>
+        <p:spPr>
+          <a:xfrm flipV="1">
+            <a:off x="5151172" y="3319628"/>
+            <a:ext cx="1067526" cy="1"/>
+          </a:xfrm>
+          <a:prstGeom prst="line">
+            <a:avLst/>
+          </a:prstGeom>
+          <a:ln w="76200" cmpd="dbl">
+            <a:solidFill>
+              <a:srgbClr val="ED7D31"/>
+            </a:solidFill>
+          </a:ln>
+        </p:spPr>
+        <p:style>
+          <a:lnRef idx="1">
+            <a:schemeClr val="accent1"/>
+          </a:lnRef>
+          <a:fillRef idx="0">
+            <a:schemeClr val="accent1"/>
+          </a:fillRef>
+          <a:effectRef idx="0">
+            <a:schemeClr val="accent1"/>
+          </a:effectRef>
+          <a:fontRef idx="minor">
+            <a:schemeClr val="tx1"/>
+          </a:fontRef>
+        </p:style>
+      </p:cxnSp>
+      <p:cxnSp>
+        <p:nvCxnSpPr>
+          <p:cNvPr id="142" name="直線接點 141">
+            <a:extLst>
+              <a:ext uri="{FF2B5EF4-FFF2-40B4-BE49-F238E27FC236}">
+                <a16:creationId xmlns:a16="http://schemas.microsoft.com/office/drawing/2014/main" id="{B86D59E7-50FD-40F7-8089-EBAB50160F7A}"/>
+              </a:ext>
+            </a:extLst>
+          </p:cNvPr>
+          <p:cNvCxnSpPr>
+            <a:stCxn id="29" idx="1"/>
+            <a:endCxn id="4" idx="0"/>
+          </p:cNvCxnSpPr>
+          <p:nvPr/>
+        </p:nvCxnSpPr>
+        <p:spPr>
+          <a:xfrm>
+            <a:off x="4665120" y="1831483"/>
+            <a:ext cx="4127" cy="1198809"/>
+          </a:xfrm>
+          <a:prstGeom prst="line">
+            <a:avLst/>
+          </a:prstGeom>
+          <a:ln w="38100">
+            <a:solidFill>
+              <a:srgbClr val="ED7D31"/>
+            </a:solidFill>
+          </a:ln>
+        </p:spPr>
+        <p:style>
+          <a:lnRef idx="1">
+            <a:schemeClr val="accent1"/>
+          </a:lnRef>
+          <a:fillRef idx="0">
+            <a:schemeClr val="accent1"/>
+          </a:fillRef>
+          <a:effectRef idx="0">
+            <a:schemeClr val="accent1"/>
+          </a:effectRef>
+          <a:fontRef idx="minor">
+            <a:schemeClr val="tx1"/>
+          </a:fontRef>
+        </p:style>
+      </p:cxnSp>
+      <p:cxnSp>
+        <p:nvCxnSpPr>
+          <p:cNvPr id="144" name="直線接點 143">
+            <a:extLst>
+              <a:ext uri="{FF2B5EF4-FFF2-40B4-BE49-F238E27FC236}">
+                <a16:creationId xmlns:a16="http://schemas.microsoft.com/office/drawing/2014/main" id="{66101CEC-8885-4D9C-B364-A9BFF68169CE}"/>
+              </a:ext>
+            </a:extLst>
+          </p:cNvPr>
+          <p:cNvCxnSpPr>
+            <a:stCxn id="29" idx="3"/>
+            <a:endCxn id="8" idx="1"/>
+          </p:cNvCxnSpPr>
+          <p:nvPr/>
+        </p:nvCxnSpPr>
+        <p:spPr>
+          <a:xfrm flipV="1">
+            <a:off x="6132207" y="1827201"/>
+            <a:ext cx="1107708" cy="4282"/>
+          </a:xfrm>
+          <a:prstGeom prst="line">
+            <a:avLst/>
+          </a:prstGeom>
+          <a:ln w="38100">
+            <a:solidFill>
+              <a:srgbClr val="ED7D31"/>
+            </a:solidFill>
+          </a:ln>
+        </p:spPr>
+        <p:style>
+          <a:lnRef idx="1">
+            <a:schemeClr val="accent1"/>
+          </a:lnRef>
+          <a:fillRef idx="0">
+            <a:schemeClr val="accent1"/>
+          </a:fillRef>
+          <a:effectRef idx="0">
+            <a:schemeClr val="accent1"/>
+          </a:effectRef>
+          <a:fontRef idx="minor">
+            <a:schemeClr val="tx1"/>
+          </a:fontRef>
+        </p:style>
+      </p:cxnSp>
+      <p:cxnSp>
+        <p:nvCxnSpPr>
+          <p:cNvPr id="146" name="直線接點 145">
+            <a:extLst>
+              <a:ext uri="{FF2B5EF4-FFF2-40B4-BE49-F238E27FC236}">
+                <a16:creationId xmlns:a16="http://schemas.microsoft.com/office/drawing/2014/main" id="{219D975D-4DDD-4F6D-9E89-DE35D4BF5166}"/>
+              </a:ext>
+            </a:extLst>
+          </p:cNvPr>
+          <p:cNvCxnSpPr>
+            <a:stCxn id="29" idx="0"/>
+            <a:endCxn id="19" idx="4"/>
+          </p:cNvCxnSpPr>
+          <p:nvPr/>
+        </p:nvCxnSpPr>
+        <p:spPr>
+          <a:xfrm flipH="1" flipV="1">
+            <a:off x="4735899" y="901990"/>
+            <a:ext cx="662765" cy="512667"/>
+          </a:xfrm>
+          <a:prstGeom prst="line">
+            <a:avLst/>
+          </a:prstGeom>
+          <a:ln w="38100">
+            <a:solidFill>
+              <a:srgbClr val="ED7D31"/>
+            </a:solidFill>
+          </a:ln>
+        </p:spPr>
+        <p:style>
+          <a:lnRef idx="1">
+            <a:schemeClr val="accent1"/>
+          </a:lnRef>
+          <a:fillRef idx="0">
+            <a:schemeClr val="accent1"/>
+          </a:fillRef>
+          <a:effectRef idx="0">
+            <a:schemeClr val="accent1"/>
+          </a:effectRef>
+          <a:fontRef idx="minor">
+            <a:schemeClr val="tx1"/>
+          </a:fontRef>
+        </p:style>
+      </p:cxnSp>
+      <p:cxnSp>
+        <p:nvCxnSpPr>
+          <p:cNvPr id="148" name="直線接點 147">
+            <a:extLst>
+              <a:ext uri="{FF2B5EF4-FFF2-40B4-BE49-F238E27FC236}">
+                <a16:creationId xmlns:a16="http://schemas.microsoft.com/office/drawing/2014/main" id="{5AA120E0-7D2C-46D9-A533-2E98BC07C6D9}"/>
+              </a:ext>
+            </a:extLst>
+          </p:cNvPr>
+          <p:cNvCxnSpPr>
+            <a:stCxn id="11" idx="4"/>
+            <a:endCxn id="29" idx="0"/>
+          </p:cNvCxnSpPr>
+          <p:nvPr/>
+        </p:nvCxnSpPr>
+        <p:spPr>
+          <a:xfrm flipH="1">
+            <a:off x="5398664" y="867338"/>
+            <a:ext cx="1179870" cy="547319"/>
+          </a:xfrm>
+          <a:prstGeom prst="line">
+            <a:avLst/>
+          </a:prstGeom>
+          <a:ln w="38100">
+            <a:solidFill>
+              <a:srgbClr val="ED7D31"/>
+            </a:solidFill>
+          </a:ln>
+        </p:spPr>
+        <p:style>
+          <a:lnRef idx="1">
+            <a:schemeClr val="accent1"/>
+          </a:lnRef>
+          <a:fillRef idx="0">
+            <a:schemeClr val="accent1"/>
+          </a:fillRef>
+          <a:effectRef idx="0">
+            <a:schemeClr val="accent1"/>
+          </a:effectRef>
+          <a:fontRef idx="minor">
+            <a:schemeClr val="tx1"/>
+          </a:fontRef>
+        </p:style>
+      </p:cxnSp>
+      <p:sp>
+        <p:nvSpPr>
+          <p:cNvPr id="69" name="矩形 68">
+            <a:extLst>
+              <a:ext uri="{FF2B5EF4-FFF2-40B4-BE49-F238E27FC236}">
+                <a16:creationId xmlns:a16="http://schemas.microsoft.com/office/drawing/2014/main" id="{AF074DE4-C9E2-4A29-A201-EA83108C0221}"/>
+              </a:ext>
+            </a:extLst>
+          </p:cNvPr>
+          <p:cNvSpPr/>
+          <p:nvPr/>
+        </p:nvSpPr>
+        <p:spPr>
+          <a:xfrm>
+            <a:off x="6527511" y="4928371"/>
+            <a:ext cx="963850" cy="578673"/>
+          </a:xfrm>
+          <a:prstGeom prst="rect">
+            <a:avLst/>
+          </a:prstGeom>
+          <a:noFill/>
+          <a:ln w="38100">
+            <a:solidFill>
+              <a:srgbClr val="00B050"/>
+            </a:solidFill>
+          </a:ln>
+        </p:spPr>
+        <p:style>
+          <a:lnRef idx="2">
+            <a:schemeClr val="accent1">
+              <a:shade val="50000"/>
+            </a:schemeClr>
+          </a:lnRef>
+          <a:fillRef idx="1">
+            <a:schemeClr val="accent1"/>
+          </a:fillRef>
+          <a:effectRef idx="0">
+            <a:schemeClr val="accent1"/>
+          </a:effectRef>
+          <a:fontRef idx="minor">
+            <a:schemeClr val="lt1"/>
+          </a:fontRef>
+        </p:style>
+        <p:txBody>
+          <a:bodyPr rtlCol="0" anchor="ctr"/>
+          <a:lstStyle/>
+          <a:p>
+            <a:pPr algn="ctr"/>
+            <a:r>
+              <a:rPr lang="zh-TW" altLang="en-US" dirty="0">
+                <a:solidFill>
+                  <a:sysClr val="windowText" lastClr="000000"/>
+                </a:solidFill>
+                <a:latin typeface="微軟正黑體" panose="020B0604030504040204" pitchFamily="34" charset="-120"/>
+                <a:ea typeface="微軟正黑體" panose="020B0604030504040204" pitchFamily="34" charset="-120"/>
+              </a:rPr>
+              <a:t>出版社</a:t>
+            </a:r>
+          </a:p>
+        </p:txBody>
+      </p:sp>
+      <p:sp>
+        <p:nvSpPr>
+          <p:cNvPr id="53" name="橢圓 52">
+            <a:extLst>
+              <a:ext uri="{FF2B5EF4-FFF2-40B4-BE49-F238E27FC236}">
+                <a16:creationId xmlns:a16="http://schemas.microsoft.com/office/drawing/2014/main" id="{4DFC75C5-AE34-4B0C-A5BA-88EDEE029858}"/>
+              </a:ext>
+            </a:extLst>
+          </p:cNvPr>
+          <p:cNvSpPr/>
+          <p:nvPr/>
+        </p:nvSpPr>
+        <p:spPr>
+          <a:xfrm>
+            <a:off x="1522901" y="3481060"/>
+            <a:ext cx="1230942" cy="552543"/>
+          </a:xfrm>
+          <a:prstGeom prst="ellipse">
+            <a:avLst/>
+          </a:prstGeom>
+          <a:noFill/>
+          <a:ln w="38100">
+            <a:solidFill>
+              <a:srgbClr val="2F528F"/>
+            </a:solidFill>
+          </a:ln>
+        </p:spPr>
+        <p:style>
+          <a:lnRef idx="2">
+            <a:schemeClr val="accent1">
+              <a:shade val="50000"/>
+            </a:schemeClr>
+          </a:lnRef>
+          <a:fillRef idx="1">
+            <a:schemeClr val="accent1"/>
+          </a:fillRef>
+          <a:effectRef idx="0">
+            <a:schemeClr val="accent1"/>
+          </a:effectRef>
+          <a:fontRef idx="minor">
+            <a:schemeClr val="lt1"/>
+          </a:fontRef>
+        </p:style>
+        <p:txBody>
+          <a:bodyPr rtlCol="0" anchor="ctr"/>
+          <a:lstStyle/>
+          <a:p>
+            <a:pPr algn="ctr"/>
+            <a:r>
+              <a:rPr lang="zh-TW" altLang="en-US" dirty="0">
+                <a:solidFill>
+                  <a:sysClr val="windowText" lastClr="000000"/>
+                </a:solidFill>
+                <a:latin typeface="微軟正黑體" panose="020B0604030504040204" pitchFamily="34" charset="-120"/>
+                <a:ea typeface="微軟正黑體" panose="020B0604030504040204" pitchFamily="34" charset="-120"/>
+              </a:rPr>
+              <a:t>授權</a:t>
+            </a:r>
+          </a:p>
+        </p:txBody>
+      </p:sp>
+      <p:cxnSp>
+        <p:nvCxnSpPr>
+          <p:cNvPr id="16" name="直線接點 15">
+            <a:extLst>
+              <a:ext uri="{FF2B5EF4-FFF2-40B4-BE49-F238E27FC236}">
+                <a16:creationId xmlns:a16="http://schemas.microsoft.com/office/drawing/2014/main" id="{6E92AF63-F176-4D6D-A764-41FCE76C92B6}"/>
+              </a:ext>
+            </a:extLst>
+          </p:cNvPr>
+          <p:cNvCxnSpPr>
+            <a:stCxn id="53" idx="6"/>
+            <a:endCxn id="4" idx="1"/>
+          </p:cNvCxnSpPr>
+          <p:nvPr/>
+        </p:nvCxnSpPr>
+        <p:spPr>
+          <a:xfrm flipV="1">
+            <a:off x="2753843" y="3319629"/>
+            <a:ext cx="1433479" cy="437703"/>
+          </a:xfrm>
+          <a:prstGeom prst="line">
+            <a:avLst/>
+          </a:prstGeom>
+          <a:ln w="38100">
+            <a:solidFill>
+              <a:srgbClr val="2F528F"/>
+            </a:solidFill>
+          </a:ln>
+        </p:spPr>
+        <p:style>
+          <a:lnRef idx="1">
+            <a:schemeClr val="accent1"/>
+          </a:lnRef>
+          <a:fillRef idx="0">
+            <a:schemeClr val="accent1"/>
+          </a:fillRef>
+          <a:effectRef idx="0">
+            <a:schemeClr val="accent1"/>
+          </a:effectRef>
+          <a:fontRef idx="minor">
+            <a:schemeClr val="tx1"/>
+          </a:fontRef>
+        </p:style>
+      </p:cxnSp>
+      <p:sp>
+        <p:nvSpPr>
+          <p:cNvPr id="2" name="橢圓 1">
+            <a:extLst>
+              <a:ext uri="{FF2B5EF4-FFF2-40B4-BE49-F238E27FC236}">
+                <a16:creationId xmlns:a16="http://schemas.microsoft.com/office/drawing/2014/main" id="{AB6085A2-3AA5-5D35-0587-A6CC01FEC25E}"/>
+              </a:ext>
+            </a:extLst>
+          </p:cNvPr>
+          <p:cNvSpPr/>
+          <p:nvPr/>
+        </p:nvSpPr>
+        <p:spPr>
+          <a:xfrm>
+            <a:off x="305855" y="3052214"/>
+            <a:ext cx="1230942" cy="552543"/>
+          </a:xfrm>
+          <a:prstGeom prst="ellipse">
+            <a:avLst/>
+          </a:prstGeom>
+          <a:noFill/>
+          <a:ln w="38100">
+            <a:solidFill>
+              <a:srgbClr val="2F528F"/>
+            </a:solidFill>
+          </a:ln>
+        </p:spPr>
+        <p:style>
+          <a:lnRef idx="2">
+            <a:schemeClr val="accent1">
+              <a:shade val="50000"/>
+            </a:schemeClr>
+          </a:lnRef>
+          <a:fillRef idx="1">
+            <a:schemeClr val="accent1"/>
+          </a:fillRef>
+          <a:effectRef idx="0">
+            <a:schemeClr val="accent1"/>
+          </a:effectRef>
+          <a:fontRef idx="minor">
+            <a:schemeClr val="lt1"/>
+          </a:fontRef>
+        </p:style>
+        <p:txBody>
+          <a:bodyPr rtlCol="0" anchor="ctr"/>
+          <a:lstStyle/>
+          <a:p>
+            <a:pPr algn="ctr"/>
+            <a:r>
+              <a:rPr lang="zh-TW" altLang="en-US" dirty="0">
+                <a:solidFill>
+                  <a:sysClr val="windowText" lastClr="000000"/>
+                </a:solidFill>
+                <a:latin typeface="微軟正黑體" panose="020B0604030504040204" pitchFamily="34" charset="-120"/>
+                <a:ea typeface="微軟正黑體" panose="020B0604030504040204" pitchFamily="34" charset="-120"/>
+              </a:rPr>
+              <a:t>出版社</a:t>
+            </a:r>
+          </a:p>
+        </p:txBody>
+      </p:sp>
+      <p:sp>
+        <p:nvSpPr>
+          <p:cNvPr id="3" name="橢圓 2">
+            <a:extLst>
+              <a:ext uri="{FF2B5EF4-FFF2-40B4-BE49-F238E27FC236}">
+                <a16:creationId xmlns:a16="http://schemas.microsoft.com/office/drawing/2014/main" id="{1383920A-A346-588B-C252-B4196F37C3A0}"/>
+              </a:ext>
+            </a:extLst>
+          </p:cNvPr>
+          <p:cNvSpPr/>
+          <p:nvPr/>
+        </p:nvSpPr>
+        <p:spPr>
+          <a:xfrm>
+            <a:off x="888617" y="1025777"/>
+            <a:ext cx="1230942" cy="552543"/>
+          </a:xfrm>
+          <a:prstGeom prst="ellipse">
+            <a:avLst/>
+          </a:prstGeom>
+          <a:noFill/>
+          <a:ln w="38100">
+            <a:solidFill>
+              <a:srgbClr val="2F528F"/>
+            </a:solidFill>
+          </a:ln>
+        </p:spPr>
+        <p:style>
+          <a:lnRef idx="2">
+            <a:schemeClr val="accent1">
+              <a:shade val="50000"/>
+            </a:schemeClr>
+          </a:lnRef>
+          <a:fillRef idx="1">
+            <a:schemeClr val="accent1"/>
+          </a:fillRef>
+          <a:effectRef idx="0">
+            <a:schemeClr val="accent1"/>
+          </a:effectRef>
+          <a:fontRef idx="minor">
+            <a:schemeClr val="lt1"/>
+          </a:fontRef>
+        </p:style>
+        <p:txBody>
+          <a:bodyPr rtlCol="0" anchor="ctr"/>
+          <a:lstStyle/>
+          <a:p>
+            <a:pPr algn="ctr"/>
+            <a:r>
+              <a:rPr lang="zh-TW" altLang="en-US" dirty="0">
+                <a:solidFill>
+                  <a:sysClr val="windowText" lastClr="000000"/>
+                </a:solidFill>
+                <a:latin typeface="微軟正黑體" panose="020B0604030504040204" pitchFamily="34" charset="-120"/>
+                <a:ea typeface="微軟正黑體" panose="020B0604030504040204" pitchFamily="34" charset="-120"/>
+              </a:rPr>
+              <a:t>作者</a:t>
+            </a:r>
+          </a:p>
+        </p:txBody>
+      </p:sp>
+      <p:cxnSp>
+        <p:nvCxnSpPr>
+          <p:cNvPr id="37" name="直線接點 36">
+            <a:extLst>
+              <a:ext uri="{FF2B5EF4-FFF2-40B4-BE49-F238E27FC236}">
+                <a16:creationId xmlns:a16="http://schemas.microsoft.com/office/drawing/2014/main" id="{7E8379BD-256B-30EE-BAF5-57832B5BC342}"/>
+              </a:ext>
+            </a:extLst>
+          </p:cNvPr>
+          <p:cNvCxnSpPr>
+            <a:stCxn id="3" idx="6"/>
+            <a:endCxn id="4" idx="1"/>
+          </p:cNvCxnSpPr>
+          <p:nvPr/>
+        </p:nvCxnSpPr>
+        <p:spPr>
+          <a:xfrm>
+            <a:off x="2119559" y="1302049"/>
+            <a:ext cx="2067763" cy="2017580"/>
+          </a:xfrm>
+          <a:prstGeom prst="line">
+            <a:avLst/>
+          </a:prstGeom>
+          <a:ln w="38100">
+            <a:solidFill>
+              <a:srgbClr val="2F528F"/>
+            </a:solidFill>
+          </a:ln>
+        </p:spPr>
+        <p:style>
+          <a:lnRef idx="1">
+            <a:schemeClr val="accent1"/>
+          </a:lnRef>
+          <a:fillRef idx="0">
+            <a:schemeClr val="accent1"/>
+          </a:fillRef>
+          <a:effectRef idx="0">
+            <a:schemeClr val="accent1"/>
+          </a:effectRef>
+          <a:fontRef idx="minor">
+            <a:schemeClr val="tx1"/>
+          </a:fontRef>
+        </p:style>
+      </p:cxnSp>
+      <p:cxnSp>
+        <p:nvCxnSpPr>
+          <p:cNvPr id="39" name="直線接點 38">
+            <a:extLst>
+              <a:ext uri="{FF2B5EF4-FFF2-40B4-BE49-F238E27FC236}">
+                <a16:creationId xmlns:a16="http://schemas.microsoft.com/office/drawing/2014/main" id="{4163A6DA-1E90-C567-1FFC-5628BC3A8FD8}"/>
+              </a:ext>
+            </a:extLst>
+          </p:cNvPr>
+          <p:cNvCxnSpPr>
+            <a:stCxn id="2" idx="6"/>
+            <a:endCxn id="4" idx="1"/>
+          </p:cNvCxnSpPr>
+          <p:nvPr/>
+        </p:nvCxnSpPr>
+        <p:spPr>
+          <a:xfrm flipV="1">
+            <a:off x="1536797" y="3319629"/>
+            <a:ext cx="2650525" cy="8857"/>
+          </a:xfrm>
+          <a:prstGeom prst="line">
+            <a:avLst/>
+          </a:prstGeom>
+          <a:ln w="38100">
+            <a:solidFill>
+              <a:srgbClr val="2F528F"/>
+            </a:solidFill>
+          </a:ln>
+        </p:spPr>
+        <p:style>
+          <a:lnRef idx="1">
+            <a:schemeClr val="accent1"/>
+          </a:lnRef>
+          <a:fillRef idx="0">
+            <a:schemeClr val="accent1"/>
+          </a:fillRef>
+          <a:effectRef idx="0">
+            <a:schemeClr val="accent1"/>
+          </a:effectRef>
+          <a:fontRef idx="minor">
+            <a:schemeClr val="tx1"/>
+          </a:fontRef>
+        </p:style>
+      </p:cxnSp>
+      <p:sp>
+        <p:nvSpPr>
+          <p:cNvPr id="71" name="橢圓 70">
+            <a:extLst>
+              <a:ext uri="{FF2B5EF4-FFF2-40B4-BE49-F238E27FC236}">
+                <a16:creationId xmlns:a16="http://schemas.microsoft.com/office/drawing/2014/main" id="{F9015AC3-D320-8673-01E1-AD6298FCBE1D}"/>
+              </a:ext>
+            </a:extLst>
+          </p:cNvPr>
+          <p:cNvSpPr/>
+          <p:nvPr/>
+        </p:nvSpPr>
+        <p:spPr>
+          <a:xfrm>
+            <a:off x="8112868" y="5956009"/>
+            <a:ext cx="1230942" cy="552543"/>
+          </a:xfrm>
+          <a:prstGeom prst="ellipse">
+            <a:avLst/>
+          </a:prstGeom>
+          <a:noFill/>
+          <a:ln w="76200" cmpd="dbl">
+            <a:solidFill>
+              <a:srgbClr val="00B050"/>
+            </a:solidFill>
+          </a:ln>
+        </p:spPr>
+        <p:style>
+          <a:lnRef idx="2">
+            <a:schemeClr val="accent1">
+              <a:shade val="50000"/>
+            </a:schemeClr>
+          </a:lnRef>
+          <a:fillRef idx="1">
+            <a:schemeClr val="accent1"/>
+          </a:fillRef>
+          <a:effectRef idx="0">
+            <a:schemeClr val="accent1"/>
+          </a:effectRef>
+          <a:fontRef idx="minor">
+            <a:schemeClr val="lt1"/>
+          </a:fontRef>
+        </p:style>
+        <p:txBody>
+          <a:bodyPr rtlCol="0" anchor="ctr"/>
+          <a:lstStyle/>
+          <a:p>
+            <a:pPr algn="ctr"/>
+            <a:r>
+              <a:rPr lang="zh-TW" altLang="en-US" dirty="0">
+                <a:solidFill>
+                  <a:sysClr val="windowText" lastClr="000000"/>
+                </a:solidFill>
+                <a:latin typeface="微軟正黑體" panose="020B0604030504040204" pitchFamily="34" charset="-120"/>
+                <a:ea typeface="微軟正黑體" panose="020B0604030504040204" pitchFamily="34" charset="-120"/>
+              </a:rPr>
+              <a:t>作者</a:t>
+            </a:r>
+          </a:p>
+        </p:txBody>
+      </p:sp>
+      <p:cxnSp>
+        <p:nvCxnSpPr>
+          <p:cNvPr id="79" name="直線接點 78">
+            <a:extLst>
+              <a:ext uri="{FF2B5EF4-FFF2-40B4-BE49-F238E27FC236}">
+                <a16:creationId xmlns:a16="http://schemas.microsoft.com/office/drawing/2014/main" id="{AF056078-CB83-542F-AC47-36E4CB78887F}"/>
+              </a:ext>
+            </a:extLst>
+          </p:cNvPr>
+          <p:cNvCxnSpPr>
+            <a:cxnSpLocks/>
+            <a:stCxn id="69" idx="2"/>
+            <a:endCxn id="71" idx="0"/>
+          </p:cNvCxnSpPr>
+          <p:nvPr/>
+        </p:nvCxnSpPr>
+        <p:spPr>
+          <a:xfrm>
+            <a:off x="7009436" y="5507044"/>
+            <a:ext cx="1718903" cy="448965"/>
+          </a:xfrm>
+          <a:prstGeom prst="line">
+            <a:avLst/>
+          </a:prstGeom>
+          <a:ln w="38100">
+            <a:solidFill>
+              <a:srgbClr val="00B050"/>
+            </a:solidFill>
+          </a:ln>
+        </p:spPr>
+        <p:style>
+          <a:lnRef idx="1">
+            <a:schemeClr val="accent1"/>
+          </a:lnRef>
+          <a:fillRef idx="0">
+            <a:schemeClr val="accent1"/>
+          </a:fillRef>
+          <a:effectRef idx="0">
+            <a:schemeClr val="accent1"/>
+          </a:effectRef>
+          <a:fontRef idx="minor">
+            <a:schemeClr val="tx1"/>
+          </a:fontRef>
+        </p:style>
+      </p:cxnSp>
+      <p:sp>
+        <p:nvSpPr>
+          <p:cNvPr id="82" name="橢圓 81">
+            <a:extLst>
+              <a:ext uri="{FF2B5EF4-FFF2-40B4-BE49-F238E27FC236}">
+                <a16:creationId xmlns:a16="http://schemas.microsoft.com/office/drawing/2014/main" id="{63ACC889-A59D-DE33-2150-D77F90D9A754}"/>
+              </a:ext>
+            </a:extLst>
+          </p:cNvPr>
+          <p:cNvSpPr/>
+          <p:nvPr/>
+        </p:nvSpPr>
+        <p:spPr>
+          <a:xfrm>
+            <a:off x="10532343" y="3870083"/>
+            <a:ext cx="1230942" cy="552543"/>
+          </a:xfrm>
+          <a:prstGeom prst="ellipse">
+            <a:avLst/>
+          </a:prstGeom>
+          <a:noFill/>
+          <a:ln w="76200" cmpd="dbl">
+            <a:solidFill>
+              <a:srgbClr val="7030A0"/>
+            </a:solidFill>
+          </a:ln>
+        </p:spPr>
+        <p:style>
+          <a:lnRef idx="2">
+            <a:schemeClr val="accent1">
+              <a:shade val="50000"/>
+            </a:schemeClr>
+          </a:lnRef>
+          <a:fillRef idx="1">
+            <a:schemeClr val="accent1"/>
+          </a:fillRef>
+          <a:effectRef idx="0">
+            <a:schemeClr val="accent1"/>
+          </a:effectRef>
+          <a:fontRef idx="minor">
+            <a:schemeClr val="lt1"/>
+          </a:fontRef>
+        </p:style>
+        <p:txBody>
+          <a:bodyPr rtlCol="0" anchor="ctr"/>
+          <a:lstStyle/>
+          <a:p>
+            <a:pPr algn="ctr"/>
+            <a:r>
+              <a:rPr lang="zh-TW" altLang="en-US" dirty="0">
+                <a:solidFill>
+                  <a:sysClr val="windowText" lastClr="000000"/>
+                </a:solidFill>
+                <a:latin typeface="微軟正黑體" panose="020B0604030504040204" pitchFamily="34" charset="-120"/>
+                <a:ea typeface="微軟正黑體" panose="020B0604030504040204" pitchFamily="34" charset="-120"/>
+              </a:rPr>
+              <a:t>小說</a:t>
+            </a:r>
+          </a:p>
+        </p:txBody>
+      </p:sp>
+      <p:sp>
+        <p:nvSpPr>
+          <p:cNvPr id="85" name="橢圓 84">
+            <a:extLst>
+              <a:ext uri="{FF2B5EF4-FFF2-40B4-BE49-F238E27FC236}">
+                <a16:creationId xmlns:a16="http://schemas.microsoft.com/office/drawing/2014/main" id="{54A375CF-3E04-A533-B45E-E8C224F38DC9}"/>
+              </a:ext>
+            </a:extLst>
+          </p:cNvPr>
+          <p:cNvSpPr/>
+          <p:nvPr/>
+        </p:nvSpPr>
+        <p:spPr>
+          <a:xfrm>
+            <a:off x="10526992" y="4663422"/>
+            <a:ext cx="1230942" cy="552543"/>
+          </a:xfrm>
+          <a:prstGeom prst="ellipse">
+            <a:avLst/>
+          </a:prstGeom>
+          <a:noFill/>
+          <a:ln w="76200" cmpd="dbl">
+            <a:solidFill>
+              <a:srgbClr val="7030A0"/>
+            </a:solidFill>
+          </a:ln>
+        </p:spPr>
+        <p:style>
+          <a:lnRef idx="2">
+            <a:schemeClr val="accent1">
+              <a:shade val="50000"/>
+            </a:schemeClr>
+          </a:lnRef>
+          <a:fillRef idx="1">
+            <a:schemeClr val="accent1"/>
+          </a:fillRef>
+          <a:effectRef idx="0">
+            <a:schemeClr val="accent1"/>
+          </a:effectRef>
+          <a:fontRef idx="minor">
+            <a:schemeClr val="lt1"/>
+          </a:fontRef>
+        </p:style>
+        <p:txBody>
+          <a:bodyPr rtlCol="0" anchor="ctr"/>
+          <a:lstStyle/>
+          <a:p>
+            <a:pPr algn="ctr"/>
+            <a:r>
+              <a:rPr lang="zh-TW" altLang="en-US" dirty="0">
+                <a:solidFill>
+                  <a:sysClr val="windowText" lastClr="000000"/>
+                </a:solidFill>
+                <a:latin typeface="微軟正黑體" panose="020B0604030504040204" pitchFamily="34" charset="-120"/>
+                <a:ea typeface="微軟正黑體" panose="020B0604030504040204" pitchFamily="34" charset="-120"/>
+              </a:rPr>
+              <a:t>出版社</a:t>
+            </a:r>
+          </a:p>
+        </p:txBody>
+      </p:sp>
+      <p:cxnSp>
+        <p:nvCxnSpPr>
+          <p:cNvPr id="86" name="直線接點 85">
+            <a:extLst>
+              <a:ext uri="{FF2B5EF4-FFF2-40B4-BE49-F238E27FC236}">
+                <a16:creationId xmlns:a16="http://schemas.microsoft.com/office/drawing/2014/main" id="{87DFF51D-97AA-5FFC-2F90-BE6CD88B8034}"/>
+              </a:ext>
+            </a:extLst>
+          </p:cNvPr>
+          <p:cNvCxnSpPr>
+            <a:cxnSpLocks/>
+            <a:stCxn id="7" idx="3"/>
+            <a:endCxn id="82" idx="2"/>
+          </p:cNvCxnSpPr>
+          <p:nvPr/>
+        </p:nvCxnSpPr>
+        <p:spPr>
+          <a:xfrm>
+            <a:off x="9692189" y="3318626"/>
+            <a:ext cx="840154" cy="827729"/>
+          </a:xfrm>
+          <a:prstGeom prst="line">
+            <a:avLst/>
+          </a:prstGeom>
+          <a:ln w="38100">
+            <a:solidFill>
+              <a:srgbClr val="7030A0"/>
+            </a:solidFill>
+          </a:ln>
+        </p:spPr>
+        <p:style>
+          <a:lnRef idx="1">
+            <a:schemeClr val="accent1"/>
+          </a:lnRef>
+          <a:fillRef idx="0">
+            <a:schemeClr val="accent1"/>
+          </a:fillRef>
+          <a:effectRef idx="0">
+            <a:schemeClr val="accent1"/>
+          </a:effectRef>
+          <a:fontRef idx="minor">
+            <a:schemeClr val="tx1"/>
+          </a:fontRef>
+        </p:style>
+      </p:cxnSp>
+      <p:cxnSp>
+        <p:nvCxnSpPr>
+          <p:cNvPr id="96" name="直線接點 95">
+            <a:extLst>
+              <a:ext uri="{FF2B5EF4-FFF2-40B4-BE49-F238E27FC236}">
+                <a16:creationId xmlns:a16="http://schemas.microsoft.com/office/drawing/2014/main" id="{0778A077-6939-52B3-C56C-CA5C1586E1EE}"/>
+              </a:ext>
+            </a:extLst>
+          </p:cNvPr>
+          <p:cNvCxnSpPr>
+            <a:cxnSpLocks/>
+            <a:stCxn id="7" idx="3"/>
+            <a:endCxn id="85" idx="2"/>
+          </p:cNvCxnSpPr>
+          <p:nvPr/>
+        </p:nvCxnSpPr>
+        <p:spPr>
+          <a:xfrm>
+            <a:off x="9692189" y="3318626"/>
+            <a:ext cx="834803" cy="1621068"/>
+          </a:xfrm>
+          <a:prstGeom prst="line">
+            <a:avLst/>
+          </a:prstGeom>
+          <a:ln w="38100">
+            <a:solidFill>
+              <a:srgbClr val="7030A0"/>
+            </a:solidFill>
+          </a:ln>
+        </p:spPr>
+        <p:style>
+          <a:lnRef idx="1">
+            <a:schemeClr val="accent1"/>
+          </a:lnRef>
+          <a:fillRef idx="0">
+            <a:schemeClr val="accent1"/>
+          </a:fillRef>
+          <a:effectRef idx="0">
+            <a:schemeClr val="accent1"/>
+          </a:effectRef>
+          <a:fontRef idx="minor">
+            <a:schemeClr val="tx1"/>
+          </a:fontRef>
+        </p:style>
+      </p:cxnSp>
     </p:spTree>
     <p:extLst>
       <p:ext uri="{BB962C8B-B14F-4D97-AF65-F5344CB8AC3E}">

--- a/ER Model/ER.pptx
+++ b/ER Model/ER.pptx
@@ -3327,3253 +3327,3204 @@
           <a:chExt cx="0" cy="0"/>
         </a:xfrm>
       </p:grpSpPr>
-      <p:sp>
-        <p:nvSpPr>
-          <p:cNvPr id="4" name="矩形 3">
+      <p:grpSp>
+        <p:nvGrpSpPr>
+          <p:cNvPr id="74" name="群組 73">
             <a:extLst>
               <a:ext uri="{FF2B5EF4-FFF2-40B4-BE49-F238E27FC236}">
-                <a16:creationId xmlns:a16="http://schemas.microsoft.com/office/drawing/2014/main" id="{F6EEDF99-A567-46F5-A8F0-54E29683616E}"/>
+                <a16:creationId xmlns:a16="http://schemas.microsoft.com/office/drawing/2014/main" id="{FFE47363-624B-046E-8955-5F65EB443087}"/>
               </a:ext>
             </a:extLst>
           </p:cNvPr>
-          <p:cNvSpPr/>
+          <p:cNvGrpSpPr/>
           <p:nvPr/>
-        </p:nvSpPr>
-        <p:spPr>
+        </p:nvGrpSpPr>
+        <p:grpSpPr>
           <a:xfrm>
-            <a:off x="4187322" y="3030292"/>
-            <a:ext cx="963850" cy="578673"/>
+            <a:off x="241713" y="338284"/>
+            <a:ext cx="11708574" cy="6181433"/>
+            <a:chOff x="218984" y="290861"/>
+            <a:chExt cx="11708574" cy="6181433"/>
           </a:xfrm>
-          <a:prstGeom prst="rect">
-            <a:avLst/>
-          </a:prstGeom>
-          <a:noFill/>
-          <a:ln w="38100">
-            <a:solidFill>
-              <a:srgbClr val="2F528F"/>
-            </a:solidFill>
-          </a:ln>
-        </p:spPr>
-        <p:style>
-          <a:lnRef idx="2">
-            <a:schemeClr val="accent1">
-              <a:shade val="50000"/>
-            </a:schemeClr>
-          </a:lnRef>
-          <a:fillRef idx="1">
-            <a:schemeClr val="accent1"/>
-          </a:fillRef>
-          <a:effectRef idx="0">
-            <a:schemeClr val="accent1"/>
-          </a:effectRef>
-          <a:fontRef idx="minor">
-            <a:schemeClr val="lt1"/>
-          </a:fontRef>
-        </p:style>
-        <p:txBody>
-          <a:bodyPr rtlCol="0" anchor="ctr"/>
-          <a:lstStyle/>
-          <a:p>
-            <a:pPr algn="ctr"/>
-            <a:r>
-              <a:rPr lang="zh-TW" altLang="en-US" dirty="0">
+        </p:grpSpPr>
+        <p:sp>
+          <p:nvSpPr>
+            <p:cNvPr id="4" name="矩形 3">
+              <a:extLst>
+                <a:ext uri="{FF2B5EF4-FFF2-40B4-BE49-F238E27FC236}">
+                  <a16:creationId xmlns:a16="http://schemas.microsoft.com/office/drawing/2014/main" id="{F6EEDF99-A567-46F5-A8F0-54E29683616E}"/>
+                </a:ext>
+              </a:extLst>
+            </p:cNvPr>
+            <p:cNvSpPr/>
+            <p:nvPr/>
+          </p:nvSpPr>
+          <p:spPr>
+            <a:xfrm>
+              <a:off x="4187322" y="3030292"/>
+              <a:ext cx="963850" cy="578673"/>
+            </a:xfrm>
+            <a:prstGeom prst="rect">
+              <a:avLst/>
+            </a:prstGeom>
+            <a:noFill/>
+            <a:ln w="38100">
+              <a:solidFill>
+                <a:srgbClr val="2F528F"/>
+              </a:solidFill>
+            </a:ln>
+          </p:spPr>
+          <p:style>
+            <a:lnRef idx="2">
+              <a:schemeClr val="accent1">
+                <a:shade val="50000"/>
+              </a:schemeClr>
+            </a:lnRef>
+            <a:fillRef idx="1">
+              <a:schemeClr val="accent1"/>
+            </a:fillRef>
+            <a:effectRef idx="0">
+              <a:schemeClr val="accent1"/>
+            </a:effectRef>
+            <a:fontRef idx="minor">
+              <a:schemeClr val="lt1"/>
+            </a:fontRef>
+          </p:style>
+          <p:txBody>
+            <a:bodyPr rtlCol="0" anchor="ctr"/>
+            <a:lstStyle/>
+            <a:p>
+              <a:pPr algn="ctr"/>
+              <a:r>
+                <a:rPr lang="zh-TW" altLang="en-US" dirty="0">
+                  <a:solidFill>
+                    <a:sysClr val="windowText" lastClr="000000"/>
+                  </a:solidFill>
+                  <a:latin typeface="微軟正黑體" panose="020B0604030504040204" pitchFamily="34" charset="-120"/>
+                  <a:ea typeface="微軟正黑體" panose="020B0604030504040204" pitchFamily="34" charset="-120"/>
+                </a:rPr>
+                <a:t>小說</a:t>
+              </a:r>
+            </a:p>
+          </p:txBody>
+        </p:sp>
+        <p:sp>
+          <p:nvSpPr>
+            <p:cNvPr id="7" name="矩形 6">
+              <a:extLst>
+                <a:ext uri="{FF2B5EF4-FFF2-40B4-BE49-F238E27FC236}">
+                  <a16:creationId xmlns:a16="http://schemas.microsoft.com/office/drawing/2014/main" id="{8BA4813D-5E1C-42D9-A51A-236FA101D354}"/>
+                </a:ext>
+              </a:extLst>
+            </p:cNvPr>
+            <p:cNvSpPr/>
+            <p:nvPr/>
+          </p:nvSpPr>
+          <p:spPr>
+            <a:xfrm>
+              <a:off x="8728339" y="3029289"/>
+              <a:ext cx="963850" cy="578673"/>
+            </a:xfrm>
+            <a:prstGeom prst="rect">
+              <a:avLst/>
+            </a:prstGeom>
+            <a:noFill/>
+            <a:ln w="38100">
+              <a:solidFill>
+                <a:srgbClr val="7030A0"/>
+              </a:solidFill>
+            </a:ln>
+          </p:spPr>
+          <p:style>
+            <a:lnRef idx="2">
+              <a:schemeClr val="accent1">
+                <a:shade val="50000"/>
+              </a:schemeClr>
+            </a:lnRef>
+            <a:fillRef idx="1">
+              <a:schemeClr val="accent1"/>
+            </a:fillRef>
+            <a:effectRef idx="0">
+              <a:schemeClr val="accent1"/>
+            </a:effectRef>
+            <a:fontRef idx="minor">
+              <a:schemeClr val="lt1"/>
+            </a:fontRef>
+          </p:style>
+          <p:txBody>
+            <a:bodyPr rtlCol="0" anchor="ctr"/>
+            <a:lstStyle/>
+            <a:p>
+              <a:pPr algn="ctr"/>
+              <a:r>
+                <a:rPr lang="zh-TW" altLang="en-US" dirty="0">
+                  <a:solidFill>
+                    <a:sysClr val="windowText" lastClr="000000"/>
+                  </a:solidFill>
+                  <a:latin typeface="微軟正黑體" panose="020B0604030504040204" pitchFamily="34" charset="-120"/>
+                  <a:ea typeface="微軟正黑體" panose="020B0604030504040204" pitchFamily="34" charset="-120"/>
+                </a:rPr>
+                <a:t>作者</a:t>
+              </a:r>
+            </a:p>
+          </p:txBody>
+        </p:sp>
+        <p:sp>
+          <p:nvSpPr>
+            <p:cNvPr id="8" name="矩形 7">
+              <a:extLst>
+                <a:ext uri="{FF2B5EF4-FFF2-40B4-BE49-F238E27FC236}">
+                  <a16:creationId xmlns:a16="http://schemas.microsoft.com/office/drawing/2014/main" id="{82182DAA-0E8C-4F5B-9213-F4B6CFB4F174}"/>
+                </a:ext>
+              </a:extLst>
+            </p:cNvPr>
+            <p:cNvSpPr/>
+            <p:nvPr/>
+          </p:nvSpPr>
+          <p:spPr>
+            <a:xfrm>
+              <a:off x="7239915" y="1537864"/>
+              <a:ext cx="963850" cy="578673"/>
+            </a:xfrm>
+            <a:prstGeom prst="rect">
+              <a:avLst/>
+            </a:prstGeom>
+            <a:noFill/>
+            <a:ln w="38100">
+              <a:solidFill>
+                <a:srgbClr val="4D4D4D"/>
+              </a:solidFill>
+            </a:ln>
+          </p:spPr>
+          <p:style>
+            <a:lnRef idx="2">
+              <a:schemeClr val="accent1">
+                <a:shade val="50000"/>
+              </a:schemeClr>
+            </a:lnRef>
+            <a:fillRef idx="1">
+              <a:schemeClr val="accent1"/>
+            </a:fillRef>
+            <a:effectRef idx="0">
+              <a:schemeClr val="accent1"/>
+            </a:effectRef>
+            <a:fontRef idx="minor">
+              <a:schemeClr val="lt1"/>
+            </a:fontRef>
+          </p:style>
+          <p:txBody>
+            <a:bodyPr rtlCol="0" anchor="ctr"/>
+            <a:lstStyle/>
+            <a:p>
+              <a:pPr algn="ctr"/>
+              <a:r>
+                <a:rPr lang="zh-TW" altLang="en-US" dirty="0">
+                  <a:solidFill>
+                    <a:sysClr val="windowText" lastClr="000000"/>
+                  </a:solidFill>
+                  <a:latin typeface="微軟正黑體" panose="020B0604030504040204" pitchFamily="34" charset="-120"/>
+                  <a:ea typeface="微軟正黑體" panose="020B0604030504040204" pitchFamily="34" charset="-120"/>
+                </a:rPr>
+                <a:t>使用者</a:t>
+              </a:r>
+            </a:p>
+          </p:txBody>
+        </p:sp>
+        <p:sp>
+          <p:nvSpPr>
+            <p:cNvPr id="11" name="橢圓 10">
+              <a:extLst>
+                <a:ext uri="{FF2B5EF4-FFF2-40B4-BE49-F238E27FC236}">
+                  <a16:creationId xmlns:a16="http://schemas.microsoft.com/office/drawing/2014/main" id="{A74CC088-F6BB-4D78-8774-E19DB0C79FE8}"/>
+                </a:ext>
+              </a:extLst>
+            </p:cNvPr>
+            <p:cNvSpPr/>
+            <p:nvPr/>
+          </p:nvSpPr>
+          <p:spPr>
+            <a:xfrm>
+              <a:off x="5792016" y="314795"/>
+              <a:ext cx="1573035" cy="552543"/>
+            </a:xfrm>
+            <a:prstGeom prst="ellipse">
+              <a:avLst/>
+            </a:prstGeom>
+            <a:ln w="38100"/>
+          </p:spPr>
+          <p:style>
+            <a:lnRef idx="2">
+              <a:schemeClr val="accent2"/>
+            </a:lnRef>
+            <a:fillRef idx="1">
+              <a:schemeClr val="lt1"/>
+            </a:fillRef>
+            <a:effectRef idx="0">
+              <a:schemeClr val="accent2"/>
+            </a:effectRef>
+            <a:fontRef idx="minor">
+              <a:schemeClr val="dk1"/>
+            </a:fontRef>
+          </p:style>
+          <p:txBody>
+            <a:bodyPr rtlCol="0" anchor="ctr"/>
+            <a:lstStyle/>
+            <a:p>
+              <a:pPr algn="ctr"/>
+              <a:r>
+                <a:rPr lang="zh-TW" altLang="en-US" dirty="0">
+                  <a:solidFill>
+                    <a:sysClr val="windowText" lastClr="000000"/>
+                  </a:solidFill>
+                  <a:latin typeface="微軟正黑體" panose="020B0604030504040204" pitchFamily="34" charset="-120"/>
+                  <a:ea typeface="微軟正黑體" panose="020B0604030504040204" pitchFamily="34" charset="-120"/>
+                </a:rPr>
+                <a:t>愛心紀錄</a:t>
+              </a:r>
+            </a:p>
+          </p:txBody>
+        </p:sp>
+        <p:sp>
+          <p:nvSpPr>
+            <p:cNvPr id="12" name="橢圓 11">
+              <a:extLst>
+                <a:ext uri="{FF2B5EF4-FFF2-40B4-BE49-F238E27FC236}">
+                  <a16:creationId xmlns:a16="http://schemas.microsoft.com/office/drawing/2014/main" id="{50C7A5AB-1A86-48CD-8E4A-59295C6599A4}"/>
+                </a:ext>
+              </a:extLst>
+            </p:cNvPr>
+            <p:cNvSpPr/>
+            <p:nvPr/>
+          </p:nvSpPr>
+          <p:spPr>
+            <a:xfrm>
+              <a:off x="1852004" y="290861"/>
+              <a:ext cx="1573035" cy="552543"/>
+            </a:xfrm>
+            <a:prstGeom prst="ellipse">
+              <a:avLst/>
+            </a:prstGeom>
+            <a:noFill/>
+            <a:ln w="38100">
+              <a:solidFill>
+                <a:srgbClr val="2F528F"/>
+              </a:solidFill>
+            </a:ln>
+          </p:spPr>
+          <p:style>
+            <a:lnRef idx="2">
+              <a:schemeClr val="accent1">
+                <a:shade val="50000"/>
+              </a:schemeClr>
+            </a:lnRef>
+            <a:fillRef idx="1">
+              <a:schemeClr val="accent1"/>
+            </a:fillRef>
+            <a:effectRef idx="0">
+              <a:schemeClr val="accent1"/>
+            </a:effectRef>
+            <a:fontRef idx="minor">
+              <a:schemeClr val="lt1"/>
+            </a:fontRef>
+          </p:style>
+          <p:txBody>
+            <a:bodyPr rtlCol="0" anchor="ctr"/>
+            <a:lstStyle/>
+            <a:p>
+              <a:pPr algn="ctr"/>
+              <a:r>
+                <a:rPr lang="zh-TW" altLang="en-US" u="sng" dirty="0">
+                  <a:solidFill>
+                    <a:sysClr val="windowText" lastClr="000000"/>
+                  </a:solidFill>
+                  <a:latin typeface="微軟正黑體" panose="020B0604030504040204" pitchFamily="34" charset="-120"/>
+                  <a:ea typeface="微軟正黑體" panose="020B0604030504040204" pitchFamily="34" charset="-120"/>
+                </a:rPr>
+                <a:t>小說代號</a:t>
+              </a:r>
+            </a:p>
+          </p:txBody>
+        </p:sp>
+        <p:sp>
+          <p:nvSpPr>
+            <p:cNvPr id="13" name="橢圓 12">
+              <a:extLst>
+                <a:ext uri="{FF2B5EF4-FFF2-40B4-BE49-F238E27FC236}">
+                  <a16:creationId xmlns:a16="http://schemas.microsoft.com/office/drawing/2014/main" id="{3DA73774-161F-4E32-8D07-D371A0C6B297}"/>
+                </a:ext>
+              </a:extLst>
+            </p:cNvPr>
+            <p:cNvSpPr/>
+            <p:nvPr/>
+          </p:nvSpPr>
+          <p:spPr>
+            <a:xfrm>
+              <a:off x="834455" y="1805312"/>
+              <a:ext cx="1230942" cy="552543"/>
+            </a:xfrm>
+            <a:prstGeom prst="ellipse">
+              <a:avLst/>
+            </a:prstGeom>
+            <a:noFill/>
+            <a:ln w="38100">
+              <a:solidFill>
+                <a:srgbClr val="2F528F"/>
+              </a:solidFill>
+            </a:ln>
+          </p:spPr>
+          <p:style>
+            <a:lnRef idx="2">
+              <a:schemeClr val="accent1">
+                <a:shade val="50000"/>
+              </a:schemeClr>
+            </a:lnRef>
+            <a:fillRef idx="1">
+              <a:schemeClr val="accent1"/>
+            </a:fillRef>
+            <a:effectRef idx="0">
+              <a:schemeClr val="accent1"/>
+            </a:effectRef>
+            <a:fontRef idx="minor">
+              <a:schemeClr val="lt1"/>
+            </a:fontRef>
+          </p:style>
+          <p:txBody>
+            <a:bodyPr rtlCol="0" anchor="ctr"/>
+            <a:lstStyle/>
+            <a:p>
+              <a:pPr algn="ctr"/>
+              <a:r>
+                <a:rPr lang="zh-TW" altLang="en-US" dirty="0">
+                  <a:solidFill>
+                    <a:sysClr val="windowText" lastClr="000000"/>
+                  </a:solidFill>
+                  <a:latin typeface="微軟正黑體" panose="020B0604030504040204" pitchFamily="34" charset="-120"/>
+                  <a:ea typeface="微軟正黑體" panose="020B0604030504040204" pitchFamily="34" charset="-120"/>
+                </a:rPr>
+                <a:t>狀態</a:t>
+              </a:r>
+            </a:p>
+          </p:txBody>
+        </p:sp>
+        <p:sp>
+          <p:nvSpPr>
+            <p:cNvPr id="14" name="橢圓 13">
+              <a:extLst>
+                <a:ext uri="{FF2B5EF4-FFF2-40B4-BE49-F238E27FC236}">
+                  <a16:creationId xmlns:a16="http://schemas.microsoft.com/office/drawing/2014/main" id="{6F1FBEB0-2E02-445D-899B-763581FD5A81}"/>
+                </a:ext>
+              </a:extLst>
+            </p:cNvPr>
+            <p:cNvSpPr/>
+            <p:nvPr/>
+          </p:nvSpPr>
+          <p:spPr>
+            <a:xfrm>
+              <a:off x="346838" y="1053075"/>
+              <a:ext cx="1230942" cy="552543"/>
+            </a:xfrm>
+            <a:prstGeom prst="ellipse">
+              <a:avLst/>
+            </a:prstGeom>
+            <a:noFill/>
+            <a:ln w="38100">
+              <a:solidFill>
+                <a:srgbClr val="2F528F"/>
+              </a:solidFill>
+            </a:ln>
+          </p:spPr>
+          <p:style>
+            <a:lnRef idx="2">
+              <a:schemeClr val="accent1">
+                <a:shade val="50000"/>
+              </a:schemeClr>
+            </a:lnRef>
+            <a:fillRef idx="1">
+              <a:schemeClr val="accent1"/>
+            </a:fillRef>
+            <a:effectRef idx="0">
+              <a:schemeClr val="accent1"/>
+            </a:effectRef>
+            <a:fontRef idx="minor">
+              <a:schemeClr val="lt1"/>
+            </a:fontRef>
+          </p:style>
+          <p:txBody>
+            <a:bodyPr rtlCol="0" anchor="ctr"/>
+            <a:lstStyle/>
+            <a:p>
+              <a:pPr algn="ctr"/>
+              <a:r>
+                <a:rPr lang="zh-TW" altLang="en-US" dirty="0">
+                  <a:solidFill>
+                    <a:sysClr val="windowText" lastClr="000000"/>
+                  </a:solidFill>
+                  <a:latin typeface="微軟正黑體" panose="020B0604030504040204" pitchFamily="34" charset="-120"/>
+                  <a:ea typeface="微軟正黑體" panose="020B0604030504040204" pitchFamily="34" charset="-120"/>
+                </a:rPr>
+                <a:t>類別</a:t>
+              </a:r>
+            </a:p>
+          </p:txBody>
+        </p:sp>
+        <p:sp>
+          <p:nvSpPr>
+            <p:cNvPr id="15" name="橢圓 14">
+              <a:extLst>
+                <a:ext uri="{FF2B5EF4-FFF2-40B4-BE49-F238E27FC236}">
+                  <a16:creationId xmlns:a16="http://schemas.microsoft.com/office/drawing/2014/main" id="{904EE205-B037-44B5-A64A-7F12D5398B76}"/>
+                </a:ext>
+              </a:extLst>
+            </p:cNvPr>
+            <p:cNvSpPr/>
+            <p:nvPr/>
+          </p:nvSpPr>
+          <p:spPr>
+            <a:xfrm>
+              <a:off x="2421719" y="4259889"/>
+              <a:ext cx="1230942" cy="552543"/>
+            </a:xfrm>
+            <a:prstGeom prst="ellipse">
+              <a:avLst/>
+            </a:prstGeom>
+            <a:noFill/>
+            <a:ln w="38100">
+              <a:solidFill>
+                <a:srgbClr val="2F528F"/>
+              </a:solidFill>
+            </a:ln>
+          </p:spPr>
+          <p:style>
+            <a:lnRef idx="2">
+              <a:schemeClr val="accent1">
+                <a:shade val="50000"/>
+              </a:schemeClr>
+            </a:lnRef>
+            <a:fillRef idx="1">
+              <a:schemeClr val="accent1"/>
+            </a:fillRef>
+            <a:effectRef idx="0">
+              <a:schemeClr val="accent1"/>
+            </a:effectRef>
+            <a:fontRef idx="minor">
+              <a:schemeClr val="lt1"/>
+            </a:fontRef>
+          </p:style>
+          <p:txBody>
+            <a:bodyPr rtlCol="0" anchor="ctr"/>
+            <a:lstStyle/>
+            <a:p>
+              <a:pPr algn="ctr"/>
+              <a:r>
+                <a:rPr lang="zh-TW" altLang="en-US" dirty="0">
+                  <a:solidFill>
+                    <a:sysClr val="windowText" lastClr="000000"/>
+                  </a:solidFill>
+                  <a:latin typeface="微軟正黑體" panose="020B0604030504040204" pitchFamily="34" charset="-120"/>
+                  <a:ea typeface="微軟正黑體" panose="020B0604030504040204" pitchFamily="34" charset="-120"/>
+                </a:rPr>
+                <a:t>簡介</a:t>
+              </a:r>
+            </a:p>
+          </p:txBody>
+        </p:sp>
+        <p:sp>
+          <p:nvSpPr>
+            <p:cNvPr id="17" name="橢圓 16">
+              <a:extLst>
+                <a:ext uri="{FF2B5EF4-FFF2-40B4-BE49-F238E27FC236}">
+                  <a16:creationId xmlns:a16="http://schemas.microsoft.com/office/drawing/2014/main" id="{B6D631BD-55A0-4F2C-86C6-B99A6CBB8065}"/>
+                </a:ext>
+              </a:extLst>
+            </p:cNvPr>
+            <p:cNvSpPr/>
+            <p:nvPr/>
+          </p:nvSpPr>
+          <p:spPr>
+            <a:xfrm>
+              <a:off x="2003780" y="972218"/>
+              <a:ext cx="1230942" cy="552543"/>
+            </a:xfrm>
+            <a:prstGeom prst="ellipse">
+              <a:avLst/>
+            </a:prstGeom>
+            <a:noFill/>
+            <a:ln w="38100">
+              <a:solidFill>
+                <a:srgbClr val="2F528F"/>
+              </a:solidFill>
+            </a:ln>
+          </p:spPr>
+          <p:style>
+            <a:lnRef idx="2">
+              <a:schemeClr val="accent1">
+                <a:shade val="50000"/>
+              </a:schemeClr>
+            </a:lnRef>
+            <a:fillRef idx="1">
+              <a:schemeClr val="accent1"/>
+            </a:fillRef>
+            <a:effectRef idx="0">
+              <a:schemeClr val="accent1"/>
+            </a:effectRef>
+            <a:fontRef idx="minor">
+              <a:schemeClr val="lt1"/>
+            </a:fontRef>
+          </p:style>
+          <p:txBody>
+            <a:bodyPr rtlCol="0" anchor="ctr"/>
+            <a:lstStyle/>
+            <a:p>
+              <a:pPr algn="ctr"/>
+              <a:r>
+                <a:rPr lang="zh-TW" altLang="en-US" dirty="0">
+                  <a:solidFill>
+                    <a:sysClr val="windowText" lastClr="000000"/>
+                  </a:solidFill>
+                  <a:latin typeface="微軟正黑體" panose="020B0604030504040204" pitchFamily="34" charset="-120"/>
+                  <a:ea typeface="微軟正黑體" panose="020B0604030504040204" pitchFamily="34" charset="-120"/>
+                </a:rPr>
+                <a:t>書名</a:t>
+              </a:r>
+            </a:p>
+          </p:txBody>
+        </p:sp>
+        <p:sp>
+          <p:nvSpPr>
+            <p:cNvPr id="18" name="橢圓 17">
+              <a:extLst>
+                <a:ext uri="{FF2B5EF4-FFF2-40B4-BE49-F238E27FC236}">
+                  <a16:creationId xmlns:a16="http://schemas.microsoft.com/office/drawing/2014/main" id="{BC76BE46-86FF-4B5A-968F-C55EC2FA534B}"/>
+                </a:ext>
+              </a:extLst>
+            </p:cNvPr>
+            <p:cNvSpPr/>
+            <p:nvPr/>
+          </p:nvSpPr>
+          <p:spPr>
+            <a:xfrm>
+              <a:off x="218984" y="2430887"/>
+              <a:ext cx="1230942" cy="552543"/>
+            </a:xfrm>
+            <a:prstGeom prst="ellipse">
+              <a:avLst/>
+            </a:prstGeom>
+            <a:noFill/>
+            <a:ln w="38100">
+              <a:solidFill>
+                <a:srgbClr val="2F528F"/>
+              </a:solidFill>
+            </a:ln>
+          </p:spPr>
+          <p:style>
+            <a:lnRef idx="2">
+              <a:schemeClr val="accent1">
+                <a:shade val="50000"/>
+              </a:schemeClr>
+            </a:lnRef>
+            <a:fillRef idx="1">
+              <a:schemeClr val="accent1"/>
+            </a:fillRef>
+            <a:effectRef idx="0">
+              <a:schemeClr val="accent1"/>
+            </a:effectRef>
+            <a:fontRef idx="minor">
+              <a:schemeClr val="lt1"/>
+            </a:fontRef>
+          </p:style>
+          <p:txBody>
+            <a:bodyPr rtlCol="0" anchor="ctr"/>
+            <a:lstStyle/>
+            <a:p>
+              <a:pPr algn="ctr"/>
+              <a:r>
+                <a:rPr lang="zh-TW" altLang="en-US" dirty="0">
+                  <a:solidFill>
+                    <a:sysClr val="windowText" lastClr="000000"/>
+                  </a:solidFill>
+                  <a:latin typeface="微軟正黑體" panose="020B0604030504040204" pitchFamily="34" charset="-120"/>
+                  <a:ea typeface="微軟正黑體" panose="020B0604030504040204" pitchFamily="34" charset="-120"/>
+                </a:rPr>
+                <a:t>愛心數</a:t>
+              </a:r>
+            </a:p>
+          </p:txBody>
+        </p:sp>
+        <p:sp>
+          <p:nvSpPr>
+            <p:cNvPr id="19" name="橢圓 18">
+              <a:extLst>
+                <a:ext uri="{FF2B5EF4-FFF2-40B4-BE49-F238E27FC236}">
+                  <a16:creationId xmlns:a16="http://schemas.microsoft.com/office/drawing/2014/main" id="{B4EC46C7-04E8-4310-8736-49F1B6908626}"/>
+                </a:ext>
+              </a:extLst>
+            </p:cNvPr>
+            <p:cNvSpPr/>
+            <p:nvPr/>
+          </p:nvSpPr>
+          <p:spPr>
+            <a:xfrm>
+              <a:off x="3949381" y="349447"/>
+              <a:ext cx="1573035" cy="552543"/>
+            </a:xfrm>
+            <a:prstGeom prst="ellipse">
+              <a:avLst/>
+            </a:prstGeom>
+            <a:ln w="38100"/>
+          </p:spPr>
+          <p:style>
+            <a:lnRef idx="2">
+              <a:schemeClr val="accent2"/>
+            </a:lnRef>
+            <a:fillRef idx="1">
+              <a:schemeClr val="lt1"/>
+            </a:fillRef>
+            <a:effectRef idx="0">
+              <a:schemeClr val="accent2"/>
+            </a:effectRef>
+            <a:fontRef idx="minor">
+              <a:schemeClr val="dk1"/>
+            </a:fontRef>
+          </p:style>
+          <p:txBody>
+            <a:bodyPr rtlCol="0" anchor="ctr"/>
+            <a:lstStyle/>
+            <a:p>
+              <a:pPr algn="ctr"/>
+              <a:r>
+                <a:rPr lang="zh-TW" altLang="en-US" dirty="0">
+                  <a:solidFill>
+                    <a:sysClr val="windowText" lastClr="000000"/>
+                  </a:solidFill>
+                  <a:latin typeface="微軟正黑體" panose="020B0604030504040204" pitchFamily="34" charset="-120"/>
+                  <a:ea typeface="微軟正黑體" panose="020B0604030504040204" pitchFamily="34" charset="-120"/>
+                </a:rPr>
+                <a:t>歷史紀錄</a:t>
+              </a:r>
+            </a:p>
+          </p:txBody>
+        </p:sp>
+        <p:sp>
+          <p:nvSpPr>
+            <p:cNvPr id="20" name="橢圓 19">
+              <a:extLst>
+                <a:ext uri="{FF2B5EF4-FFF2-40B4-BE49-F238E27FC236}">
+                  <a16:creationId xmlns:a16="http://schemas.microsoft.com/office/drawing/2014/main" id="{8581CC69-98F4-46B0-AE91-8CA44F3236EF}"/>
+                </a:ext>
+              </a:extLst>
+            </p:cNvPr>
+            <p:cNvSpPr/>
+            <p:nvPr/>
+          </p:nvSpPr>
+          <p:spPr>
+            <a:xfrm>
+              <a:off x="361624" y="4474662"/>
+              <a:ext cx="1230942" cy="552543"/>
+            </a:xfrm>
+            <a:prstGeom prst="ellipse">
+              <a:avLst/>
+            </a:prstGeom>
+            <a:noFill/>
+            <a:ln w="38100">
+              <a:solidFill>
+                <a:srgbClr val="2F528F"/>
+              </a:solidFill>
+            </a:ln>
+          </p:spPr>
+          <p:style>
+            <a:lnRef idx="2">
+              <a:schemeClr val="accent1">
+                <a:shade val="50000"/>
+              </a:schemeClr>
+            </a:lnRef>
+            <a:fillRef idx="1">
+              <a:schemeClr val="accent1"/>
+            </a:fillRef>
+            <a:effectRef idx="0">
+              <a:schemeClr val="accent1"/>
+            </a:effectRef>
+            <a:fontRef idx="minor">
+              <a:schemeClr val="lt1"/>
+            </a:fontRef>
+          </p:style>
+          <p:txBody>
+            <a:bodyPr rtlCol="0" anchor="ctr"/>
+            <a:lstStyle/>
+            <a:p>
+              <a:pPr algn="ctr"/>
+              <a:r>
+                <a:rPr lang="zh-TW" altLang="en-US" dirty="0">
+                  <a:solidFill>
+                    <a:sysClr val="windowText" lastClr="000000"/>
+                  </a:solidFill>
+                  <a:latin typeface="微軟正黑體" panose="020B0604030504040204" pitchFamily="34" charset="-120"/>
+                  <a:ea typeface="微軟正黑體" panose="020B0604030504040204" pitchFamily="34" charset="-120"/>
+                </a:rPr>
+                <a:t>連結</a:t>
+              </a:r>
+            </a:p>
+          </p:txBody>
+        </p:sp>
+        <p:sp>
+          <p:nvSpPr>
+            <p:cNvPr id="21" name="橢圓 20">
+              <a:extLst>
+                <a:ext uri="{FF2B5EF4-FFF2-40B4-BE49-F238E27FC236}">
+                  <a16:creationId xmlns:a16="http://schemas.microsoft.com/office/drawing/2014/main" id="{9F875BE5-297C-4CC9-A47C-AE3019E5B3EF}"/>
+                </a:ext>
+              </a:extLst>
+            </p:cNvPr>
+            <p:cNvSpPr/>
+            <p:nvPr/>
+          </p:nvSpPr>
+          <p:spPr>
+            <a:xfrm>
+              <a:off x="2311247" y="5028635"/>
+              <a:ext cx="1230942" cy="552543"/>
+            </a:xfrm>
+            <a:prstGeom prst="ellipse">
+              <a:avLst/>
+            </a:prstGeom>
+            <a:noFill/>
+            <a:ln w="76200" cmpd="dbl">
+              <a:solidFill>
+                <a:srgbClr val="2F528F"/>
+              </a:solidFill>
+            </a:ln>
+          </p:spPr>
+          <p:style>
+            <a:lnRef idx="2">
+              <a:schemeClr val="accent1">
+                <a:shade val="50000"/>
+              </a:schemeClr>
+            </a:lnRef>
+            <a:fillRef idx="1">
+              <a:schemeClr val="accent1"/>
+            </a:fillRef>
+            <a:effectRef idx="0">
+              <a:schemeClr val="accent1"/>
+            </a:effectRef>
+            <a:fontRef idx="minor">
+              <a:schemeClr val="lt1"/>
+            </a:fontRef>
+          </p:style>
+          <p:txBody>
+            <a:bodyPr rtlCol="0" anchor="ctr"/>
+            <a:lstStyle/>
+            <a:p>
+              <a:pPr algn="ctr"/>
+              <a:r>
+                <a:rPr lang="en-US" altLang="zh-TW" dirty="0">
+                  <a:solidFill>
+                    <a:sysClr val="windowText" lastClr="000000"/>
+                  </a:solidFill>
+                  <a:latin typeface="微軟正黑體" panose="020B0604030504040204" pitchFamily="34" charset="-120"/>
+                  <a:ea typeface="微軟正黑體" panose="020B0604030504040204" pitchFamily="34" charset="-120"/>
+                </a:rPr>
+                <a:t>tag</a:t>
+              </a:r>
+              <a:endParaRPr lang="zh-TW" altLang="en-US" dirty="0">
                 <a:solidFill>
                   <a:sysClr val="windowText" lastClr="000000"/>
                 </a:solidFill>
                 <a:latin typeface="微軟正黑體" panose="020B0604030504040204" pitchFamily="34" charset="-120"/>
                 <a:ea typeface="微軟正黑體" panose="020B0604030504040204" pitchFamily="34" charset="-120"/>
-              </a:rPr>
-              <a:t>小說</a:t>
-            </a:r>
-          </a:p>
-        </p:txBody>
-      </p:sp>
-      <p:sp>
-        <p:nvSpPr>
-          <p:cNvPr id="7" name="矩形 6">
-            <a:extLst>
-              <a:ext uri="{FF2B5EF4-FFF2-40B4-BE49-F238E27FC236}">
-                <a16:creationId xmlns:a16="http://schemas.microsoft.com/office/drawing/2014/main" id="{8BA4813D-5E1C-42D9-A51A-236FA101D354}"/>
-              </a:ext>
-            </a:extLst>
-          </p:cNvPr>
-          <p:cNvSpPr/>
-          <p:nvPr/>
-        </p:nvSpPr>
-        <p:spPr>
-          <a:xfrm>
-            <a:off x="8728339" y="3029289"/>
-            <a:ext cx="963850" cy="578673"/>
-          </a:xfrm>
-          <a:prstGeom prst="rect">
-            <a:avLst/>
-          </a:prstGeom>
-          <a:noFill/>
-          <a:ln w="38100">
-            <a:solidFill>
-              <a:srgbClr val="7030A0"/>
-            </a:solidFill>
-          </a:ln>
-        </p:spPr>
-        <p:style>
-          <a:lnRef idx="2">
-            <a:schemeClr val="accent1">
-              <a:shade val="50000"/>
-            </a:schemeClr>
-          </a:lnRef>
-          <a:fillRef idx="1">
-            <a:schemeClr val="accent1"/>
-          </a:fillRef>
-          <a:effectRef idx="0">
-            <a:schemeClr val="accent1"/>
-          </a:effectRef>
-          <a:fontRef idx="minor">
-            <a:schemeClr val="lt1"/>
-          </a:fontRef>
-        </p:style>
-        <p:txBody>
-          <a:bodyPr rtlCol="0" anchor="ctr"/>
-          <a:lstStyle/>
-          <a:p>
-            <a:pPr algn="ctr"/>
-            <a:r>
-              <a:rPr lang="zh-TW" altLang="en-US" dirty="0">
+              </a:endParaRPr>
+            </a:p>
+          </p:txBody>
+        </p:sp>
+        <p:sp>
+          <p:nvSpPr>
+            <p:cNvPr id="22" name="橢圓 21">
+              <a:extLst>
+                <a:ext uri="{FF2B5EF4-FFF2-40B4-BE49-F238E27FC236}">
+                  <a16:creationId xmlns:a16="http://schemas.microsoft.com/office/drawing/2014/main" id="{87A2ED50-B606-411A-8EF1-85E6A3BF2C94}"/>
+                </a:ext>
+              </a:extLst>
+            </p:cNvPr>
+            <p:cNvSpPr/>
+            <p:nvPr/>
+          </p:nvSpPr>
+          <p:spPr>
+            <a:xfrm>
+              <a:off x="481951" y="5686783"/>
+              <a:ext cx="1829833" cy="552543"/>
+            </a:xfrm>
+            <a:prstGeom prst="ellipse">
+              <a:avLst/>
+            </a:prstGeom>
+            <a:noFill/>
+            <a:ln w="38100" cmpd="sng">
+              <a:solidFill>
+                <a:srgbClr val="4C77C4"/>
+              </a:solidFill>
+              <a:prstDash val="solid"/>
+            </a:ln>
+          </p:spPr>
+          <p:style>
+            <a:lnRef idx="2">
+              <a:schemeClr val="accent1">
+                <a:shade val="50000"/>
+              </a:schemeClr>
+            </a:lnRef>
+            <a:fillRef idx="1">
+              <a:schemeClr val="accent1"/>
+            </a:fillRef>
+            <a:effectRef idx="0">
+              <a:schemeClr val="accent1"/>
+            </a:effectRef>
+            <a:fontRef idx="minor">
+              <a:schemeClr val="lt1"/>
+            </a:fontRef>
+          </p:style>
+          <p:txBody>
+            <a:bodyPr rtlCol="0" anchor="ctr"/>
+            <a:lstStyle/>
+            <a:p>
+              <a:pPr algn="ctr"/>
+              <a:r>
+                <a:rPr lang="en-US" altLang="zh-TW" dirty="0">
+                  <a:solidFill>
+                    <a:sysClr val="windowText" lastClr="000000"/>
+                  </a:solidFill>
+                  <a:latin typeface="微軟正黑體" panose="020B0604030504040204" pitchFamily="34" charset="-120"/>
+                  <a:ea typeface="微軟正黑體" panose="020B0604030504040204" pitchFamily="34" charset="-120"/>
+                </a:rPr>
+                <a:t>tag</a:t>
+              </a:r>
+              <a:r>
+                <a:rPr lang="zh-TW" altLang="en-US" dirty="0">
+                  <a:solidFill>
+                    <a:sysClr val="windowText" lastClr="000000"/>
+                  </a:solidFill>
+                  <a:latin typeface="微軟正黑體" panose="020B0604030504040204" pitchFamily="34" charset="-120"/>
+                  <a:ea typeface="微軟正黑體" panose="020B0604030504040204" pitchFamily="34" charset="-120"/>
+                </a:rPr>
+                <a:t>正則化</a:t>
+              </a:r>
+            </a:p>
+          </p:txBody>
+        </p:sp>
+        <p:sp>
+          <p:nvSpPr>
+            <p:cNvPr id="23" name="橢圓 22">
+              <a:extLst>
+                <a:ext uri="{FF2B5EF4-FFF2-40B4-BE49-F238E27FC236}">
+                  <a16:creationId xmlns:a16="http://schemas.microsoft.com/office/drawing/2014/main" id="{836AC00E-2EB8-4751-BEAF-3631D95C4980}"/>
+                </a:ext>
+              </a:extLst>
+            </p:cNvPr>
+            <p:cNvSpPr/>
+            <p:nvPr/>
+          </p:nvSpPr>
+          <p:spPr>
+            <a:xfrm>
+              <a:off x="7491361" y="5919750"/>
+              <a:ext cx="1230942" cy="552543"/>
+            </a:xfrm>
+            <a:prstGeom prst="ellipse">
+              <a:avLst/>
+            </a:prstGeom>
+            <a:noFill/>
+            <a:ln w="38100">
+              <a:solidFill>
+                <a:srgbClr val="00B050"/>
+              </a:solidFill>
+            </a:ln>
+          </p:spPr>
+          <p:style>
+            <a:lnRef idx="2">
+              <a:schemeClr val="accent1">
+                <a:shade val="50000"/>
+              </a:schemeClr>
+            </a:lnRef>
+            <a:fillRef idx="1">
+              <a:schemeClr val="accent1"/>
+            </a:fillRef>
+            <a:effectRef idx="0">
+              <a:schemeClr val="accent1"/>
+            </a:effectRef>
+            <a:fontRef idx="minor">
+              <a:schemeClr val="lt1"/>
+            </a:fontRef>
+          </p:style>
+          <p:txBody>
+            <a:bodyPr rtlCol="0" anchor="ctr"/>
+            <a:lstStyle/>
+            <a:p>
+              <a:pPr algn="ctr"/>
+              <a:r>
+                <a:rPr lang="zh-TW" altLang="en-US" dirty="0">
+                  <a:solidFill>
+                    <a:sysClr val="windowText" lastClr="000000"/>
+                  </a:solidFill>
+                  <a:latin typeface="微軟正黑體" panose="020B0604030504040204" pitchFamily="34" charset="-120"/>
+                  <a:ea typeface="微軟正黑體" panose="020B0604030504040204" pitchFamily="34" charset="-120"/>
+                </a:rPr>
+                <a:t>名字</a:t>
+              </a:r>
+            </a:p>
+          </p:txBody>
+        </p:sp>
+        <p:sp>
+          <p:nvSpPr>
+            <p:cNvPr id="24" name="橢圓 23">
+              <a:extLst>
+                <a:ext uri="{FF2B5EF4-FFF2-40B4-BE49-F238E27FC236}">
+                  <a16:creationId xmlns:a16="http://schemas.microsoft.com/office/drawing/2014/main" id="{65D9E7A0-44BE-4855-856A-E6D1E673553D}"/>
+                </a:ext>
+              </a:extLst>
+            </p:cNvPr>
+            <p:cNvSpPr/>
+            <p:nvPr/>
+          </p:nvSpPr>
+          <p:spPr>
+            <a:xfrm>
+              <a:off x="4856900" y="5919751"/>
+              <a:ext cx="1911574" cy="552543"/>
+            </a:xfrm>
+            <a:prstGeom prst="ellipse">
+              <a:avLst/>
+            </a:prstGeom>
+            <a:noFill/>
+            <a:ln w="38100">
+              <a:solidFill>
+                <a:srgbClr val="00B050"/>
+              </a:solidFill>
+            </a:ln>
+          </p:spPr>
+          <p:style>
+            <a:lnRef idx="2">
+              <a:schemeClr val="accent1">
+                <a:shade val="50000"/>
+              </a:schemeClr>
+            </a:lnRef>
+            <a:fillRef idx="1">
+              <a:schemeClr val="accent1"/>
+            </a:fillRef>
+            <a:effectRef idx="0">
+              <a:schemeClr val="accent1"/>
+            </a:effectRef>
+            <a:fontRef idx="minor">
+              <a:schemeClr val="lt1"/>
+            </a:fontRef>
+          </p:style>
+          <p:txBody>
+            <a:bodyPr rtlCol="0" anchor="ctr"/>
+            <a:lstStyle/>
+            <a:p>
+              <a:pPr algn="ctr"/>
+              <a:r>
+                <a:rPr lang="zh-TW" altLang="en-US" u="sng" dirty="0">
+                  <a:solidFill>
+                    <a:sysClr val="windowText" lastClr="000000"/>
+                  </a:solidFill>
+                  <a:latin typeface="微軟正黑體" panose="020B0604030504040204" pitchFamily="34" charset="-120"/>
+                  <a:ea typeface="微軟正黑體" panose="020B0604030504040204" pitchFamily="34" charset="-120"/>
+                </a:rPr>
+                <a:t>出版社代號</a:t>
+              </a:r>
+            </a:p>
+          </p:txBody>
+        </p:sp>
+        <p:sp>
+          <p:nvSpPr>
+            <p:cNvPr id="25" name="橢圓 24">
+              <a:extLst>
+                <a:ext uri="{FF2B5EF4-FFF2-40B4-BE49-F238E27FC236}">
+                  <a16:creationId xmlns:a16="http://schemas.microsoft.com/office/drawing/2014/main" id="{916C7219-7D59-477B-83BF-4AF8FC830BA8}"/>
+                </a:ext>
+              </a:extLst>
+            </p:cNvPr>
+            <p:cNvSpPr/>
+            <p:nvPr/>
+          </p:nvSpPr>
+          <p:spPr>
+            <a:xfrm>
+              <a:off x="10525569" y="3634785"/>
+              <a:ext cx="1230942" cy="552543"/>
+            </a:xfrm>
+            <a:prstGeom prst="ellipse">
+              <a:avLst/>
+            </a:prstGeom>
+            <a:noFill/>
+            <a:ln w="38100">
+              <a:solidFill>
+                <a:srgbClr val="7030A0"/>
+              </a:solidFill>
+            </a:ln>
+          </p:spPr>
+          <p:style>
+            <a:lnRef idx="2">
+              <a:schemeClr val="accent1">
+                <a:shade val="50000"/>
+              </a:schemeClr>
+            </a:lnRef>
+            <a:fillRef idx="1">
+              <a:schemeClr val="accent1"/>
+            </a:fillRef>
+            <a:effectRef idx="0">
+              <a:schemeClr val="accent1"/>
+            </a:effectRef>
+            <a:fontRef idx="minor">
+              <a:schemeClr val="lt1"/>
+            </a:fontRef>
+          </p:style>
+          <p:txBody>
+            <a:bodyPr rtlCol="0" anchor="ctr"/>
+            <a:lstStyle/>
+            <a:p>
+              <a:pPr algn="ctr"/>
+              <a:r>
+                <a:rPr lang="zh-TW" altLang="en-US" dirty="0">
+                  <a:solidFill>
+                    <a:sysClr val="windowText" lastClr="000000"/>
+                  </a:solidFill>
+                  <a:latin typeface="微軟正黑體" panose="020B0604030504040204" pitchFamily="34" charset="-120"/>
+                  <a:ea typeface="微軟正黑體" panose="020B0604030504040204" pitchFamily="34" charset="-120"/>
+                </a:rPr>
+                <a:t>姓名</a:t>
+              </a:r>
+            </a:p>
+          </p:txBody>
+        </p:sp>
+        <p:sp>
+          <p:nvSpPr>
+            <p:cNvPr id="26" name="橢圓 25">
+              <a:extLst>
+                <a:ext uri="{FF2B5EF4-FFF2-40B4-BE49-F238E27FC236}">
+                  <a16:creationId xmlns:a16="http://schemas.microsoft.com/office/drawing/2014/main" id="{6DCCC405-FA22-4278-8938-CED02EE90AFB}"/>
+                </a:ext>
+              </a:extLst>
+            </p:cNvPr>
+            <p:cNvSpPr/>
+            <p:nvPr/>
+          </p:nvSpPr>
+          <p:spPr>
+            <a:xfrm>
+              <a:off x="10354523" y="2576649"/>
+              <a:ext cx="1573035" cy="552543"/>
+            </a:xfrm>
+            <a:prstGeom prst="ellipse">
+              <a:avLst/>
+            </a:prstGeom>
+            <a:ln w="38100">
+              <a:solidFill>
+                <a:srgbClr val="7030A0"/>
+              </a:solidFill>
+            </a:ln>
+          </p:spPr>
+          <p:style>
+            <a:lnRef idx="2">
+              <a:schemeClr val="accent2"/>
+            </a:lnRef>
+            <a:fillRef idx="1">
+              <a:schemeClr val="lt1"/>
+            </a:fillRef>
+            <a:effectRef idx="0">
+              <a:schemeClr val="accent2"/>
+            </a:effectRef>
+            <a:fontRef idx="minor">
+              <a:schemeClr val="dk1"/>
+            </a:fontRef>
+          </p:style>
+          <p:txBody>
+            <a:bodyPr rtlCol="0" anchor="ctr"/>
+            <a:lstStyle/>
+            <a:p>
+              <a:pPr algn="ctr"/>
+              <a:r>
+                <a:rPr lang="zh-TW" altLang="en-US" u="sng" dirty="0">
+                  <a:solidFill>
+                    <a:sysClr val="windowText" lastClr="000000"/>
+                  </a:solidFill>
+                  <a:latin typeface="微軟正黑體" panose="020B0604030504040204" pitchFamily="34" charset="-120"/>
+                  <a:ea typeface="微軟正黑體" panose="020B0604030504040204" pitchFamily="34" charset="-120"/>
+                </a:rPr>
+                <a:t>作者代號</a:t>
+              </a:r>
+            </a:p>
+          </p:txBody>
+        </p:sp>
+        <p:sp>
+          <p:nvSpPr>
+            <p:cNvPr id="27" name="橢圓 26">
+              <a:extLst>
+                <a:ext uri="{FF2B5EF4-FFF2-40B4-BE49-F238E27FC236}">
+                  <a16:creationId xmlns:a16="http://schemas.microsoft.com/office/drawing/2014/main" id="{0252EBF0-7A2A-4EA1-9D7D-CA4E813F4901}"/>
+                </a:ext>
+              </a:extLst>
+            </p:cNvPr>
+            <p:cNvSpPr/>
+            <p:nvPr/>
+          </p:nvSpPr>
+          <p:spPr>
+            <a:xfrm>
+              <a:off x="8792414" y="655237"/>
+              <a:ext cx="1230942" cy="552543"/>
+            </a:xfrm>
+            <a:prstGeom prst="ellipse">
+              <a:avLst/>
+            </a:prstGeom>
+            <a:noFill/>
+            <a:ln w="38100">
+              <a:solidFill>
+                <a:srgbClr val="4D4D4D"/>
+              </a:solidFill>
+            </a:ln>
+          </p:spPr>
+          <p:style>
+            <a:lnRef idx="2">
+              <a:schemeClr val="accent1">
+                <a:shade val="50000"/>
+              </a:schemeClr>
+            </a:lnRef>
+            <a:fillRef idx="1">
+              <a:schemeClr val="accent1"/>
+            </a:fillRef>
+            <a:effectRef idx="0">
+              <a:schemeClr val="accent1"/>
+            </a:effectRef>
+            <a:fontRef idx="minor">
+              <a:schemeClr val="lt1"/>
+            </a:fontRef>
+          </p:style>
+          <p:txBody>
+            <a:bodyPr rtlCol="0" anchor="ctr"/>
+            <a:lstStyle/>
+            <a:p>
+              <a:pPr algn="ctr"/>
+              <a:r>
+                <a:rPr lang="zh-TW" altLang="en-US" u="sng" dirty="0">
+                  <a:solidFill>
+                    <a:sysClr val="windowText" lastClr="000000"/>
+                  </a:solidFill>
+                  <a:latin typeface="微軟正黑體" panose="020B0604030504040204" pitchFamily="34" charset="-120"/>
+                  <a:ea typeface="微軟正黑體" panose="020B0604030504040204" pitchFamily="34" charset="-120"/>
+                </a:rPr>
+                <a:t>帳號</a:t>
+              </a:r>
+            </a:p>
+          </p:txBody>
+        </p:sp>
+        <p:sp>
+          <p:nvSpPr>
+            <p:cNvPr id="28" name="橢圓 27">
+              <a:extLst>
+                <a:ext uri="{FF2B5EF4-FFF2-40B4-BE49-F238E27FC236}">
+                  <a16:creationId xmlns:a16="http://schemas.microsoft.com/office/drawing/2014/main" id="{9DC33FA6-AABC-4C50-975A-D49FACBD2586}"/>
+                </a:ext>
+              </a:extLst>
+            </p:cNvPr>
+            <p:cNvSpPr/>
+            <p:nvPr/>
+          </p:nvSpPr>
+          <p:spPr>
+            <a:xfrm>
+              <a:off x="8792414" y="2018501"/>
+              <a:ext cx="1230942" cy="552543"/>
+            </a:xfrm>
+            <a:prstGeom prst="ellipse">
+              <a:avLst/>
+            </a:prstGeom>
+            <a:noFill/>
+            <a:ln w="38100">
+              <a:solidFill>
+                <a:srgbClr val="4D4D4D"/>
+              </a:solidFill>
+            </a:ln>
+          </p:spPr>
+          <p:style>
+            <a:lnRef idx="2">
+              <a:schemeClr val="accent1">
+                <a:shade val="50000"/>
+              </a:schemeClr>
+            </a:lnRef>
+            <a:fillRef idx="1">
+              <a:schemeClr val="accent1"/>
+            </a:fillRef>
+            <a:effectRef idx="0">
+              <a:schemeClr val="accent1"/>
+            </a:effectRef>
+            <a:fontRef idx="minor">
+              <a:schemeClr val="lt1"/>
+            </a:fontRef>
+          </p:style>
+          <p:txBody>
+            <a:bodyPr rtlCol="0" anchor="ctr"/>
+            <a:lstStyle/>
+            <a:p>
+              <a:pPr algn="ctr"/>
+              <a:r>
+                <a:rPr lang="zh-TW" altLang="en-US" dirty="0">
+                  <a:solidFill>
+                    <a:sysClr val="windowText" lastClr="000000"/>
+                  </a:solidFill>
+                  <a:latin typeface="微軟正黑體" panose="020B0604030504040204" pitchFamily="34" charset="-120"/>
+                  <a:ea typeface="微軟正黑體" panose="020B0604030504040204" pitchFamily="34" charset="-120"/>
+                </a:rPr>
+                <a:t>密碼</a:t>
+              </a:r>
+            </a:p>
+          </p:txBody>
+        </p:sp>
+        <p:sp>
+          <p:nvSpPr>
+            <p:cNvPr id="29" name="流程圖: 決策 28">
+              <a:extLst>
+                <a:ext uri="{FF2B5EF4-FFF2-40B4-BE49-F238E27FC236}">
+                  <a16:creationId xmlns:a16="http://schemas.microsoft.com/office/drawing/2014/main" id="{DA503EA1-6026-4B2E-85E1-6A63A472D0B0}"/>
+                </a:ext>
+              </a:extLst>
+            </p:cNvPr>
+            <p:cNvSpPr/>
+            <p:nvPr/>
+          </p:nvSpPr>
+          <p:spPr>
+            <a:xfrm>
+              <a:off x="4665120" y="1414657"/>
+              <a:ext cx="1467087" cy="833652"/>
+            </a:xfrm>
+            <a:prstGeom prst="flowChartDecision">
+              <a:avLst/>
+            </a:prstGeom>
+            <a:ln w="38100"/>
+          </p:spPr>
+          <p:style>
+            <a:lnRef idx="2">
+              <a:schemeClr val="accent2"/>
+            </a:lnRef>
+            <a:fillRef idx="1">
+              <a:schemeClr val="lt1"/>
+            </a:fillRef>
+            <a:effectRef idx="0">
+              <a:schemeClr val="accent2"/>
+            </a:effectRef>
+            <a:fontRef idx="minor">
+              <a:schemeClr val="dk1"/>
+            </a:fontRef>
+          </p:style>
+          <p:txBody>
+            <a:bodyPr rtlCol="0" anchor="ctr"/>
+            <a:lstStyle/>
+            <a:p>
+              <a:pPr algn="ctr"/>
+              <a:r>
+                <a:rPr lang="zh-TW" altLang="en-US" dirty="0">
+                  <a:solidFill>
+                    <a:sysClr val="windowText" lastClr="000000"/>
+                  </a:solidFill>
+                  <a:latin typeface="微軟正黑體" panose="020B0604030504040204" pitchFamily="34" charset="-120"/>
+                  <a:ea typeface="微軟正黑體" panose="020B0604030504040204" pitchFamily="34" charset="-120"/>
+                </a:rPr>
+                <a:t>閱讀</a:t>
+              </a:r>
+            </a:p>
+          </p:txBody>
+        </p:sp>
+        <p:sp>
+          <p:nvSpPr>
+            <p:cNvPr id="30" name="流程圖: 決策 29">
+              <a:extLst>
+                <a:ext uri="{FF2B5EF4-FFF2-40B4-BE49-F238E27FC236}">
+                  <a16:creationId xmlns:a16="http://schemas.microsoft.com/office/drawing/2014/main" id="{AA94ACB0-374A-428F-885A-54E11B5F9156}"/>
+                </a:ext>
+              </a:extLst>
+            </p:cNvPr>
+            <p:cNvSpPr/>
+            <p:nvPr/>
+          </p:nvSpPr>
+          <p:spPr>
+            <a:xfrm>
+              <a:off x="3933255" y="4382313"/>
+              <a:ext cx="1467087" cy="833652"/>
+            </a:xfrm>
+            <a:prstGeom prst="flowChartDecision">
+              <a:avLst/>
+            </a:prstGeom>
+            <a:ln w="38100">
+              <a:solidFill>
+                <a:srgbClr val="ED7D31"/>
+              </a:solidFill>
+            </a:ln>
+          </p:spPr>
+          <p:style>
+            <a:lnRef idx="2">
+              <a:schemeClr val="accent2"/>
+            </a:lnRef>
+            <a:fillRef idx="1">
+              <a:schemeClr val="lt1"/>
+            </a:fillRef>
+            <a:effectRef idx="0">
+              <a:schemeClr val="accent2"/>
+            </a:effectRef>
+            <a:fontRef idx="minor">
+              <a:schemeClr val="dk1"/>
+            </a:fontRef>
+          </p:style>
+          <p:txBody>
+            <a:bodyPr rtlCol="0" anchor="ctr"/>
+            <a:lstStyle/>
+            <a:p>
+              <a:pPr algn="ctr"/>
+              <a:r>
+                <a:rPr lang="zh-TW" altLang="en-US" dirty="0">
+                  <a:solidFill>
+                    <a:sysClr val="windowText" lastClr="000000"/>
+                  </a:solidFill>
+                  <a:latin typeface="微軟正黑體" panose="020B0604030504040204" pitchFamily="34" charset="-120"/>
+                  <a:ea typeface="微軟正黑體" panose="020B0604030504040204" pitchFamily="34" charset="-120"/>
+                </a:rPr>
+                <a:t>出版</a:t>
+              </a:r>
+            </a:p>
+          </p:txBody>
+        </p:sp>
+        <p:sp>
+          <p:nvSpPr>
+            <p:cNvPr id="31" name="流程圖: 決策 30">
+              <a:extLst>
+                <a:ext uri="{FF2B5EF4-FFF2-40B4-BE49-F238E27FC236}">
+                  <a16:creationId xmlns:a16="http://schemas.microsoft.com/office/drawing/2014/main" id="{B1D1C64B-5E5F-4921-BB31-20BB12819721}"/>
+                </a:ext>
+              </a:extLst>
+            </p:cNvPr>
+            <p:cNvSpPr/>
+            <p:nvPr/>
+          </p:nvSpPr>
+          <p:spPr>
+            <a:xfrm>
+              <a:off x="6218698" y="2902802"/>
+              <a:ext cx="1467087" cy="833652"/>
+            </a:xfrm>
+            <a:prstGeom prst="flowChartDecision">
+              <a:avLst/>
+            </a:prstGeom>
+            <a:ln w="38100"/>
+          </p:spPr>
+          <p:style>
+            <a:lnRef idx="2">
+              <a:schemeClr val="accent2"/>
+            </a:lnRef>
+            <a:fillRef idx="1">
+              <a:schemeClr val="lt1"/>
+            </a:fillRef>
+            <a:effectRef idx="0">
+              <a:schemeClr val="accent2"/>
+            </a:effectRef>
+            <a:fontRef idx="minor">
+              <a:schemeClr val="dk1"/>
+            </a:fontRef>
+          </p:style>
+          <p:txBody>
+            <a:bodyPr rtlCol="0" anchor="ctr"/>
+            <a:lstStyle/>
+            <a:p>
+              <a:pPr algn="ctr"/>
+              <a:r>
+                <a:rPr lang="zh-TW" altLang="en-US" dirty="0">
+                  <a:solidFill>
+                    <a:sysClr val="windowText" lastClr="000000"/>
+                  </a:solidFill>
+                  <a:latin typeface="微軟正黑體" panose="020B0604030504040204" pitchFamily="34" charset="-120"/>
+                  <a:ea typeface="微軟正黑體" panose="020B0604030504040204" pitchFamily="34" charset="-120"/>
+                </a:rPr>
+                <a:t>撰寫</a:t>
+              </a:r>
+            </a:p>
+          </p:txBody>
+        </p:sp>
+        <p:sp>
+          <p:nvSpPr>
+            <p:cNvPr id="32" name="流程圖: 決策 31">
+              <a:extLst>
+                <a:ext uri="{FF2B5EF4-FFF2-40B4-BE49-F238E27FC236}">
+                  <a16:creationId xmlns:a16="http://schemas.microsoft.com/office/drawing/2014/main" id="{F503F4C1-00BD-42DD-BB32-E8CE9F644772}"/>
+                </a:ext>
+              </a:extLst>
+            </p:cNvPr>
+            <p:cNvSpPr/>
+            <p:nvPr/>
+          </p:nvSpPr>
+          <p:spPr>
+            <a:xfrm>
+              <a:off x="8476721" y="4382313"/>
+              <a:ext cx="1467087" cy="833652"/>
+            </a:xfrm>
+            <a:prstGeom prst="flowChartDecision">
+              <a:avLst/>
+            </a:prstGeom>
+            <a:ln w="38100"/>
+          </p:spPr>
+          <p:style>
+            <a:lnRef idx="2">
+              <a:schemeClr val="accent2"/>
+            </a:lnRef>
+            <a:fillRef idx="1">
+              <a:schemeClr val="lt1"/>
+            </a:fillRef>
+            <a:effectRef idx="0">
+              <a:schemeClr val="accent2"/>
+            </a:effectRef>
+            <a:fontRef idx="minor">
+              <a:schemeClr val="dk1"/>
+            </a:fontRef>
+          </p:style>
+          <p:txBody>
+            <a:bodyPr rtlCol="0" anchor="ctr"/>
+            <a:lstStyle/>
+            <a:p>
+              <a:pPr algn="ctr"/>
+              <a:r>
+                <a:rPr lang="zh-TW" altLang="en-US" dirty="0">
+                  <a:solidFill>
+                    <a:sysClr val="windowText" lastClr="000000"/>
+                  </a:solidFill>
+                  <a:latin typeface="微軟正黑體" panose="020B0604030504040204" pitchFamily="34" charset="-120"/>
+                  <a:ea typeface="微軟正黑體" panose="020B0604030504040204" pitchFamily="34" charset="-120"/>
+                </a:rPr>
+                <a:t>簽約</a:t>
+              </a:r>
+            </a:p>
+          </p:txBody>
+        </p:sp>
+        <p:cxnSp>
+          <p:nvCxnSpPr>
+            <p:cNvPr id="34" name="直線接點 33">
+              <a:extLst>
+                <a:ext uri="{FF2B5EF4-FFF2-40B4-BE49-F238E27FC236}">
+                  <a16:creationId xmlns:a16="http://schemas.microsoft.com/office/drawing/2014/main" id="{30A20B9D-06F8-486A-8C92-BB9D95FD9810}"/>
+                </a:ext>
+              </a:extLst>
+            </p:cNvPr>
+            <p:cNvCxnSpPr>
+              <a:cxnSpLocks/>
+              <a:stCxn id="12" idx="6"/>
+              <a:endCxn id="4" idx="1"/>
+            </p:cNvCxnSpPr>
+            <p:nvPr/>
+          </p:nvCxnSpPr>
+          <p:spPr>
+            <a:xfrm>
+              <a:off x="3425039" y="567133"/>
+              <a:ext cx="762283" cy="2752496"/>
+            </a:xfrm>
+            <a:prstGeom prst="line">
+              <a:avLst/>
+            </a:prstGeom>
+            <a:ln w="38100">
+              <a:solidFill>
+                <a:srgbClr val="2F528F"/>
+              </a:solidFill>
+            </a:ln>
+          </p:spPr>
+          <p:style>
+            <a:lnRef idx="1">
+              <a:schemeClr val="accent1"/>
+            </a:lnRef>
+            <a:fillRef idx="0">
+              <a:schemeClr val="accent1"/>
+            </a:fillRef>
+            <a:effectRef idx="0">
+              <a:schemeClr val="accent1"/>
+            </a:effectRef>
+            <a:fontRef idx="minor">
+              <a:schemeClr val="tx1"/>
+            </a:fontRef>
+          </p:style>
+        </p:cxnSp>
+        <p:cxnSp>
+          <p:nvCxnSpPr>
+            <p:cNvPr id="36" name="直線接點 35">
+              <a:extLst>
+                <a:ext uri="{FF2B5EF4-FFF2-40B4-BE49-F238E27FC236}">
+                  <a16:creationId xmlns:a16="http://schemas.microsoft.com/office/drawing/2014/main" id="{6F6515FF-CABB-4B08-839F-08A4D41C304E}"/>
+                </a:ext>
+              </a:extLst>
+            </p:cNvPr>
+            <p:cNvCxnSpPr>
+              <a:cxnSpLocks/>
+              <a:stCxn id="17" idx="6"/>
+              <a:endCxn id="4" idx="1"/>
+            </p:cNvCxnSpPr>
+            <p:nvPr/>
+          </p:nvCxnSpPr>
+          <p:spPr>
+            <a:xfrm>
+              <a:off x="3234722" y="1248490"/>
+              <a:ext cx="952600" cy="2071139"/>
+            </a:xfrm>
+            <a:prstGeom prst="line">
+              <a:avLst/>
+            </a:prstGeom>
+            <a:ln w="38100">
+              <a:solidFill>
+                <a:srgbClr val="2F528F"/>
+              </a:solidFill>
+            </a:ln>
+          </p:spPr>
+          <p:style>
+            <a:lnRef idx="1">
+              <a:schemeClr val="accent1"/>
+            </a:lnRef>
+            <a:fillRef idx="0">
+              <a:schemeClr val="accent1"/>
+            </a:fillRef>
+            <a:effectRef idx="0">
+              <a:schemeClr val="accent1"/>
+            </a:effectRef>
+            <a:fontRef idx="minor">
+              <a:schemeClr val="tx1"/>
+            </a:fontRef>
+          </p:style>
+        </p:cxnSp>
+        <p:cxnSp>
+          <p:nvCxnSpPr>
+            <p:cNvPr id="42" name="直線接點 41">
+              <a:extLst>
+                <a:ext uri="{FF2B5EF4-FFF2-40B4-BE49-F238E27FC236}">
+                  <a16:creationId xmlns:a16="http://schemas.microsoft.com/office/drawing/2014/main" id="{951EBB64-AFDA-41FF-8829-AD71D11B78DA}"/>
+                </a:ext>
+              </a:extLst>
+            </p:cNvPr>
+            <p:cNvCxnSpPr>
+              <a:cxnSpLocks/>
+              <a:stCxn id="14" idx="6"/>
+              <a:endCxn id="4" idx="1"/>
+            </p:cNvCxnSpPr>
+            <p:nvPr/>
+          </p:nvCxnSpPr>
+          <p:spPr>
+            <a:xfrm>
+              <a:off x="1577780" y="1329347"/>
+              <a:ext cx="2609542" cy="1990282"/>
+            </a:xfrm>
+            <a:prstGeom prst="line">
+              <a:avLst/>
+            </a:prstGeom>
+            <a:ln w="38100">
+              <a:solidFill>
+                <a:srgbClr val="2F528F"/>
+              </a:solidFill>
+            </a:ln>
+          </p:spPr>
+          <p:style>
+            <a:lnRef idx="1">
+              <a:schemeClr val="accent1"/>
+            </a:lnRef>
+            <a:fillRef idx="0">
+              <a:schemeClr val="accent1"/>
+            </a:fillRef>
+            <a:effectRef idx="0">
+              <a:schemeClr val="accent1"/>
+            </a:effectRef>
+            <a:fontRef idx="minor">
+              <a:schemeClr val="tx1"/>
+            </a:fontRef>
+          </p:style>
+        </p:cxnSp>
+        <p:cxnSp>
+          <p:nvCxnSpPr>
+            <p:cNvPr id="44" name="直線接點 43">
+              <a:extLst>
+                <a:ext uri="{FF2B5EF4-FFF2-40B4-BE49-F238E27FC236}">
+                  <a16:creationId xmlns:a16="http://schemas.microsoft.com/office/drawing/2014/main" id="{1EC98F50-6EE5-4EB6-84FD-B4114B954638}"/>
+                </a:ext>
+              </a:extLst>
+            </p:cNvPr>
+            <p:cNvCxnSpPr>
+              <a:cxnSpLocks/>
+              <a:stCxn id="15" idx="6"/>
+              <a:endCxn id="4" idx="1"/>
+            </p:cNvCxnSpPr>
+            <p:nvPr/>
+          </p:nvCxnSpPr>
+          <p:spPr>
+            <a:xfrm flipV="1">
+              <a:off x="3652661" y="3319629"/>
+              <a:ext cx="534661" cy="1216532"/>
+            </a:xfrm>
+            <a:prstGeom prst="line">
+              <a:avLst/>
+            </a:prstGeom>
+            <a:ln w="38100">
+              <a:solidFill>
+                <a:srgbClr val="2F528F"/>
+              </a:solidFill>
+            </a:ln>
+          </p:spPr>
+          <p:style>
+            <a:lnRef idx="1">
+              <a:schemeClr val="accent1"/>
+            </a:lnRef>
+            <a:fillRef idx="0">
+              <a:schemeClr val="accent1"/>
+            </a:fillRef>
+            <a:effectRef idx="0">
+              <a:schemeClr val="accent1"/>
+            </a:effectRef>
+            <a:fontRef idx="minor">
+              <a:schemeClr val="tx1"/>
+            </a:fontRef>
+          </p:style>
+        </p:cxnSp>
+        <p:cxnSp>
+          <p:nvCxnSpPr>
+            <p:cNvPr id="46" name="直線接點 45">
+              <a:extLst>
+                <a:ext uri="{FF2B5EF4-FFF2-40B4-BE49-F238E27FC236}">
+                  <a16:creationId xmlns:a16="http://schemas.microsoft.com/office/drawing/2014/main" id="{F78D6C6B-AC27-48A0-8770-68F9AAE5D9D8}"/>
+                </a:ext>
+              </a:extLst>
+            </p:cNvPr>
+            <p:cNvCxnSpPr>
+              <a:stCxn id="20" idx="6"/>
+              <a:endCxn id="4" idx="1"/>
+            </p:cNvCxnSpPr>
+            <p:nvPr/>
+          </p:nvCxnSpPr>
+          <p:spPr>
+            <a:xfrm flipV="1">
+              <a:off x="1592566" y="3319629"/>
+              <a:ext cx="2594756" cy="1431305"/>
+            </a:xfrm>
+            <a:prstGeom prst="line">
+              <a:avLst/>
+            </a:prstGeom>
+            <a:ln w="38100">
+              <a:solidFill>
+                <a:srgbClr val="2F528F"/>
+              </a:solidFill>
+            </a:ln>
+          </p:spPr>
+          <p:style>
+            <a:lnRef idx="1">
+              <a:schemeClr val="accent1"/>
+            </a:lnRef>
+            <a:fillRef idx="0">
+              <a:schemeClr val="accent1"/>
+            </a:fillRef>
+            <a:effectRef idx="0">
+              <a:schemeClr val="accent1"/>
+            </a:effectRef>
+            <a:fontRef idx="minor">
+              <a:schemeClr val="tx1"/>
+            </a:fontRef>
+          </p:style>
+        </p:cxnSp>
+        <p:cxnSp>
+          <p:nvCxnSpPr>
+            <p:cNvPr id="48" name="直線接點 47">
+              <a:extLst>
+                <a:ext uri="{FF2B5EF4-FFF2-40B4-BE49-F238E27FC236}">
+                  <a16:creationId xmlns:a16="http://schemas.microsoft.com/office/drawing/2014/main" id="{B1C70860-DF32-490B-887C-45F51F6D8474}"/>
+                </a:ext>
+              </a:extLst>
+            </p:cNvPr>
+            <p:cNvCxnSpPr>
+              <a:cxnSpLocks/>
+              <a:stCxn id="13" idx="6"/>
+              <a:endCxn id="4" idx="1"/>
+            </p:cNvCxnSpPr>
+            <p:nvPr/>
+          </p:nvCxnSpPr>
+          <p:spPr>
+            <a:xfrm>
+              <a:off x="2065397" y="2081584"/>
+              <a:ext cx="2121925" cy="1238045"/>
+            </a:xfrm>
+            <a:prstGeom prst="line">
+              <a:avLst/>
+            </a:prstGeom>
+            <a:ln w="38100">
+              <a:solidFill>
+                <a:srgbClr val="2F528F"/>
+              </a:solidFill>
+            </a:ln>
+          </p:spPr>
+          <p:style>
+            <a:lnRef idx="1">
+              <a:schemeClr val="accent1"/>
+            </a:lnRef>
+            <a:fillRef idx="0">
+              <a:schemeClr val="accent1"/>
+            </a:fillRef>
+            <a:effectRef idx="0">
+              <a:schemeClr val="accent1"/>
+            </a:effectRef>
+            <a:fontRef idx="minor">
+              <a:schemeClr val="tx1"/>
+            </a:fontRef>
+          </p:style>
+        </p:cxnSp>
+        <p:cxnSp>
+          <p:nvCxnSpPr>
+            <p:cNvPr id="50" name="直線接點 49">
+              <a:extLst>
+                <a:ext uri="{FF2B5EF4-FFF2-40B4-BE49-F238E27FC236}">
+                  <a16:creationId xmlns:a16="http://schemas.microsoft.com/office/drawing/2014/main" id="{B9F81377-F027-4094-AD5D-385BA2A4CDA0}"/>
+                </a:ext>
+              </a:extLst>
+            </p:cNvPr>
+            <p:cNvCxnSpPr>
+              <a:cxnSpLocks/>
+              <a:stCxn id="18" idx="6"/>
+              <a:endCxn id="4" idx="1"/>
+            </p:cNvCxnSpPr>
+            <p:nvPr/>
+          </p:nvCxnSpPr>
+          <p:spPr>
+            <a:xfrm>
+              <a:off x="1449926" y="2707159"/>
+              <a:ext cx="2737396" cy="612470"/>
+            </a:xfrm>
+            <a:prstGeom prst="line">
+              <a:avLst/>
+            </a:prstGeom>
+            <a:ln w="38100">
+              <a:solidFill>
+                <a:srgbClr val="2F528F"/>
+              </a:solidFill>
+            </a:ln>
+          </p:spPr>
+          <p:style>
+            <a:lnRef idx="1">
+              <a:schemeClr val="accent1"/>
+            </a:lnRef>
+            <a:fillRef idx="0">
+              <a:schemeClr val="accent1"/>
+            </a:fillRef>
+            <a:effectRef idx="0">
+              <a:schemeClr val="accent1"/>
+            </a:effectRef>
+            <a:fontRef idx="minor">
+              <a:schemeClr val="tx1"/>
+            </a:fontRef>
+          </p:style>
+        </p:cxnSp>
+        <p:cxnSp>
+          <p:nvCxnSpPr>
+            <p:cNvPr id="52" name="直線接點 51">
+              <a:extLst>
+                <a:ext uri="{FF2B5EF4-FFF2-40B4-BE49-F238E27FC236}">
+                  <a16:creationId xmlns:a16="http://schemas.microsoft.com/office/drawing/2014/main" id="{C694CF34-7F3F-4BE0-990D-DCA7D695B5E1}"/>
+                </a:ext>
+              </a:extLst>
+            </p:cNvPr>
+            <p:cNvCxnSpPr>
+              <a:cxnSpLocks/>
+              <a:stCxn id="21" idx="6"/>
+              <a:endCxn id="4" idx="1"/>
+            </p:cNvCxnSpPr>
+            <p:nvPr/>
+          </p:nvCxnSpPr>
+          <p:spPr>
+            <a:xfrm flipV="1">
+              <a:off x="3542189" y="3319629"/>
+              <a:ext cx="645133" cy="1985278"/>
+            </a:xfrm>
+            <a:prstGeom prst="line">
+              <a:avLst/>
+            </a:prstGeom>
+            <a:ln w="38100">
+              <a:solidFill>
+                <a:srgbClr val="2F528F"/>
+              </a:solidFill>
+            </a:ln>
+          </p:spPr>
+          <p:style>
+            <a:lnRef idx="1">
+              <a:schemeClr val="accent1"/>
+            </a:lnRef>
+            <a:fillRef idx="0">
+              <a:schemeClr val="accent1"/>
+            </a:fillRef>
+            <a:effectRef idx="0">
+              <a:schemeClr val="accent1"/>
+            </a:effectRef>
+            <a:fontRef idx="minor">
+              <a:schemeClr val="tx1"/>
+            </a:fontRef>
+          </p:style>
+        </p:cxnSp>
+        <p:cxnSp>
+          <p:nvCxnSpPr>
+            <p:cNvPr id="91" name="直線接點 90">
+              <a:extLst>
+                <a:ext uri="{FF2B5EF4-FFF2-40B4-BE49-F238E27FC236}">
+                  <a16:creationId xmlns:a16="http://schemas.microsoft.com/office/drawing/2014/main" id="{9CD793D7-F2E4-4D46-A236-BCA3175C9881}"/>
+                </a:ext>
+              </a:extLst>
+            </p:cNvPr>
+            <p:cNvCxnSpPr>
+              <a:cxnSpLocks/>
+              <a:stCxn id="21" idx="4"/>
+              <a:endCxn id="22" idx="6"/>
+            </p:cNvCxnSpPr>
+            <p:nvPr/>
+          </p:nvCxnSpPr>
+          <p:spPr>
+            <a:xfrm flipH="1">
+              <a:off x="2311784" y="5581178"/>
+              <a:ext cx="614934" cy="381877"/>
+            </a:xfrm>
+            <a:prstGeom prst="line">
+              <a:avLst/>
+            </a:prstGeom>
+            <a:ln w="38100">
+              <a:solidFill>
+                <a:srgbClr val="4C77C4"/>
+              </a:solidFill>
+            </a:ln>
+          </p:spPr>
+          <p:style>
+            <a:lnRef idx="1">
+              <a:schemeClr val="accent1"/>
+            </a:lnRef>
+            <a:fillRef idx="0">
+              <a:schemeClr val="accent1"/>
+            </a:fillRef>
+            <a:effectRef idx="0">
+              <a:schemeClr val="accent1"/>
+            </a:effectRef>
+            <a:fontRef idx="minor">
+              <a:schemeClr val="tx1"/>
+            </a:fontRef>
+          </p:style>
+        </p:cxnSp>
+        <p:cxnSp>
+          <p:nvCxnSpPr>
+            <p:cNvPr id="114" name="直線接點 113">
+              <a:extLst>
+                <a:ext uri="{FF2B5EF4-FFF2-40B4-BE49-F238E27FC236}">
+                  <a16:creationId xmlns:a16="http://schemas.microsoft.com/office/drawing/2014/main" id="{D69700CE-C7D1-4D0C-88B5-81FB6269A630}"/>
+                </a:ext>
+              </a:extLst>
+            </p:cNvPr>
+            <p:cNvCxnSpPr>
+              <a:cxnSpLocks/>
+              <a:stCxn id="69" idx="2"/>
+              <a:endCxn id="24" idx="0"/>
+            </p:cNvCxnSpPr>
+            <p:nvPr/>
+          </p:nvCxnSpPr>
+          <p:spPr>
+            <a:xfrm flipH="1">
+              <a:off x="5812687" y="5507044"/>
+              <a:ext cx="1196749" cy="412707"/>
+            </a:xfrm>
+            <a:prstGeom prst="line">
+              <a:avLst/>
+            </a:prstGeom>
+            <a:ln w="38100">
+              <a:solidFill>
+                <a:srgbClr val="00B050"/>
+              </a:solidFill>
+            </a:ln>
+          </p:spPr>
+          <p:style>
+            <a:lnRef idx="1">
+              <a:schemeClr val="accent1"/>
+            </a:lnRef>
+            <a:fillRef idx="0">
+              <a:schemeClr val="accent1"/>
+            </a:fillRef>
+            <a:effectRef idx="0">
+              <a:schemeClr val="accent1"/>
+            </a:effectRef>
+            <a:fontRef idx="minor">
+              <a:schemeClr val="tx1"/>
+            </a:fontRef>
+          </p:style>
+        </p:cxnSp>
+        <p:cxnSp>
+          <p:nvCxnSpPr>
+            <p:cNvPr id="116" name="直線接點 115">
+              <a:extLst>
+                <a:ext uri="{FF2B5EF4-FFF2-40B4-BE49-F238E27FC236}">
+                  <a16:creationId xmlns:a16="http://schemas.microsoft.com/office/drawing/2014/main" id="{B3AB68E6-CD60-44EC-AF71-684B072B1039}"/>
+                </a:ext>
+              </a:extLst>
+            </p:cNvPr>
+            <p:cNvCxnSpPr>
+              <a:cxnSpLocks/>
+              <a:stCxn id="69" idx="2"/>
+              <a:endCxn id="23" idx="0"/>
+            </p:cNvCxnSpPr>
+            <p:nvPr/>
+          </p:nvCxnSpPr>
+          <p:spPr>
+            <a:xfrm>
+              <a:off x="7009436" y="5507044"/>
+              <a:ext cx="1097396" cy="412706"/>
+            </a:xfrm>
+            <a:prstGeom prst="line">
+              <a:avLst/>
+            </a:prstGeom>
+            <a:ln w="38100">
+              <a:solidFill>
+                <a:srgbClr val="00B050"/>
+              </a:solidFill>
+            </a:ln>
+          </p:spPr>
+          <p:style>
+            <a:lnRef idx="1">
+              <a:schemeClr val="accent1"/>
+            </a:lnRef>
+            <a:fillRef idx="0">
+              <a:schemeClr val="accent1"/>
+            </a:fillRef>
+            <a:effectRef idx="0">
+              <a:schemeClr val="accent1"/>
+            </a:effectRef>
+            <a:fontRef idx="minor">
+              <a:schemeClr val="tx1"/>
+            </a:fontRef>
+          </p:style>
+        </p:cxnSp>
+        <p:cxnSp>
+          <p:nvCxnSpPr>
+            <p:cNvPr id="118" name="直線接點 117">
+              <a:extLst>
+                <a:ext uri="{FF2B5EF4-FFF2-40B4-BE49-F238E27FC236}">
+                  <a16:creationId xmlns:a16="http://schemas.microsoft.com/office/drawing/2014/main" id="{1583C68D-36B7-47E3-B6FD-4A4F97FE514A}"/>
+                </a:ext>
+              </a:extLst>
+            </p:cNvPr>
+            <p:cNvCxnSpPr>
+              <a:stCxn id="7" idx="3"/>
+              <a:endCxn id="26" idx="2"/>
+            </p:cNvCxnSpPr>
+            <p:nvPr/>
+          </p:nvCxnSpPr>
+          <p:spPr>
+            <a:xfrm flipV="1">
+              <a:off x="9692189" y="2852921"/>
+              <a:ext cx="662334" cy="465705"/>
+            </a:xfrm>
+            <a:prstGeom prst="line">
+              <a:avLst/>
+            </a:prstGeom>
+            <a:ln w="38100">
+              <a:solidFill>
+                <a:srgbClr val="7030A0"/>
+              </a:solidFill>
+            </a:ln>
+          </p:spPr>
+          <p:style>
+            <a:lnRef idx="1">
+              <a:schemeClr val="accent1"/>
+            </a:lnRef>
+            <a:fillRef idx="0">
+              <a:schemeClr val="accent1"/>
+            </a:fillRef>
+            <a:effectRef idx="0">
+              <a:schemeClr val="accent1"/>
+            </a:effectRef>
+            <a:fontRef idx="minor">
+              <a:schemeClr val="tx1"/>
+            </a:fontRef>
+          </p:style>
+        </p:cxnSp>
+        <p:cxnSp>
+          <p:nvCxnSpPr>
+            <p:cNvPr id="120" name="直線接點 119">
+              <a:extLst>
+                <a:ext uri="{FF2B5EF4-FFF2-40B4-BE49-F238E27FC236}">
+                  <a16:creationId xmlns:a16="http://schemas.microsoft.com/office/drawing/2014/main" id="{E0DF614A-B2DC-4E63-92C5-86FE75DCD949}"/>
+                </a:ext>
+              </a:extLst>
+            </p:cNvPr>
+            <p:cNvCxnSpPr>
+              <a:stCxn id="7" idx="3"/>
+              <a:endCxn id="25" idx="2"/>
+            </p:cNvCxnSpPr>
+            <p:nvPr/>
+          </p:nvCxnSpPr>
+          <p:spPr>
+            <a:xfrm>
+              <a:off x="9692189" y="3318626"/>
+              <a:ext cx="833380" cy="592431"/>
+            </a:xfrm>
+            <a:prstGeom prst="line">
+              <a:avLst/>
+            </a:prstGeom>
+            <a:ln w="38100">
+              <a:solidFill>
+                <a:srgbClr val="7030A0"/>
+              </a:solidFill>
+            </a:ln>
+          </p:spPr>
+          <p:style>
+            <a:lnRef idx="1">
+              <a:schemeClr val="accent1"/>
+            </a:lnRef>
+            <a:fillRef idx="0">
+              <a:schemeClr val="accent1"/>
+            </a:fillRef>
+            <a:effectRef idx="0">
+              <a:schemeClr val="accent1"/>
+            </a:effectRef>
+            <a:fontRef idx="minor">
+              <a:schemeClr val="tx1"/>
+            </a:fontRef>
+          </p:style>
+        </p:cxnSp>
+        <p:cxnSp>
+          <p:nvCxnSpPr>
+            <p:cNvPr id="122" name="直線接點 121">
+              <a:extLst>
+                <a:ext uri="{FF2B5EF4-FFF2-40B4-BE49-F238E27FC236}">
+                  <a16:creationId xmlns:a16="http://schemas.microsoft.com/office/drawing/2014/main" id="{EA7F6708-0F86-4704-A171-6426D659B893}"/>
+                </a:ext>
+              </a:extLst>
+            </p:cNvPr>
+            <p:cNvCxnSpPr>
+              <a:stCxn id="8" idx="3"/>
+              <a:endCxn id="28" idx="2"/>
+            </p:cNvCxnSpPr>
+            <p:nvPr/>
+          </p:nvCxnSpPr>
+          <p:spPr>
+            <a:xfrm>
+              <a:off x="8203765" y="1827201"/>
+              <a:ext cx="588649" cy="467572"/>
+            </a:xfrm>
+            <a:prstGeom prst="line">
+              <a:avLst/>
+            </a:prstGeom>
+            <a:ln w="38100">
+              <a:solidFill>
+                <a:srgbClr val="4D4D4D"/>
+              </a:solidFill>
+            </a:ln>
+          </p:spPr>
+          <p:style>
+            <a:lnRef idx="1">
+              <a:schemeClr val="accent1"/>
+            </a:lnRef>
+            <a:fillRef idx="0">
+              <a:schemeClr val="accent1"/>
+            </a:fillRef>
+            <a:effectRef idx="0">
+              <a:schemeClr val="accent1"/>
+            </a:effectRef>
+            <a:fontRef idx="minor">
+              <a:schemeClr val="tx1"/>
+            </a:fontRef>
+          </p:style>
+        </p:cxnSp>
+        <p:cxnSp>
+          <p:nvCxnSpPr>
+            <p:cNvPr id="124" name="直線接點 123">
+              <a:extLst>
+                <a:ext uri="{FF2B5EF4-FFF2-40B4-BE49-F238E27FC236}">
+                  <a16:creationId xmlns:a16="http://schemas.microsoft.com/office/drawing/2014/main" id="{1C677481-5AEA-430D-9A9F-E4FF83DC87EF}"/>
+                </a:ext>
+              </a:extLst>
+            </p:cNvPr>
+            <p:cNvCxnSpPr>
+              <a:stCxn id="8" idx="3"/>
+              <a:endCxn id="27" idx="2"/>
+            </p:cNvCxnSpPr>
+            <p:nvPr/>
+          </p:nvCxnSpPr>
+          <p:spPr>
+            <a:xfrm flipV="1">
+              <a:off x="8203765" y="931509"/>
+              <a:ext cx="588649" cy="895692"/>
+            </a:xfrm>
+            <a:prstGeom prst="line">
+              <a:avLst/>
+            </a:prstGeom>
+            <a:ln w="38100">
+              <a:solidFill>
+                <a:srgbClr val="4D4D4D"/>
+              </a:solidFill>
+            </a:ln>
+          </p:spPr>
+          <p:style>
+            <a:lnRef idx="1">
+              <a:schemeClr val="accent1"/>
+            </a:lnRef>
+            <a:fillRef idx="0">
+              <a:schemeClr val="accent1"/>
+            </a:fillRef>
+            <a:effectRef idx="0">
+              <a:schemeClr val="accent1"/>
+            </a:effectRef>
+            <a:fontRef idx="minor">
+              <a:schemeClr val="tx1"/>
+            </a:fontRef>
+          </p:style>
+        </p:cxnSp>
+        <p:cxnSp>
+          <p:nvCxnSpPr>
+            <p:cNvPr id="130" name="直線接點 129">
+              <a:extLst>
+                <a:ext uri="{FF2B5EF4-FFF2-40B4-BE49-F238E27FC236}">
+                  <a16:creationId xmlns:a16="http://schemas.microsoft.com/office/drawing/2014/main" id="{229CE63F-CCAD-4E96-B326-D719E2AB69E2}"/>
+                </a:ext>
+              </a:extLst>
+            </p:cNvPr>
+            <p:cNvCxnSpPr>
+              <a:stCxn id="4" idx="2"/>
+              <a:endCxn id="30" idx="0"/>
+            </p:cNvCxnSpPr>
+            <p:nvPr/>
+          </p:nvCxnSpPr>
+          <p:spPr>
+            <a:xfrm flipH="1">
+              <a:off x="4666799" y="3608965"/>
+              <a:ext cx="2448" cy="773348"/>
+            </a:xfrm>
+            <a:prstGeom prst="line">
+              <a:avLst/>
+            </a:prstGeom>
+            <a:ln w="76200" cmpd="dbl">
+              <a:solidFill>
+                <a:srgbClr val="ED7D31"/>
+              </a:solidFill>
+            </a:ln>
+          </p:spPr>
+          <p:style>
+            <a:lnRef idx="1">
+              <a:schemeClr val="accent1"/>
+            </a:lnRef>
+            <a:fillRef idx="0">
+              <a:schemeClr val="accent1"/>
+            </a:fillRef>
+            <a:effectRef idx="0">
+              <a:schemeClr val="accent1"/>
+            </a:effectRef>
+            <a:fontRef idx="minor">
+              <a:schemeClr val="tx1"/>
+            </a:fontRef>
+          </p:style>
+        </p:cxnSp>
+        <p:cxnSp>
+          <p:nvCxnSpPr>
+            <p:cNvPr id="132" name="直線接點 131">
+              <a:extLst>
+                <a:ext uri="{FF2B5EF4-FFF2-40B4-BE49-F238E27FC236}">
+                  <a16:creationId xmlns:a16="http://schemas.microsoft.com/office/drawing/2014/main" id="{A16D8E0F-6997-4B6A-8072-ED83CA663C6D}"/>
+                </a:ext>
+              </a:extLst>
+            </p:cNvPr>
+            <p:cNvCxnSpPr>
+              <a:cxnSpLocks/>
+              <a:stCxn id="30" idx="2"/>
+              <a:endCxn id="69" idx="1"/>
+            </p:cNvCxnSpPr>
+            <p:nvPr/>
+          </p:nvCxnSpPr>
+          <p:spPr>
+            <a:xfrm>
+              <a:off x="4666799" y="5215965"/>
+              <a:ext cx="1860712" cy="1743"/>
+            </a:xfrm>
+            <a:prstGeom prst="line">
+              <a:avLst/>
+            </a:prstGeom>
+            <a:ln w="76200" cmpd="dbl">
+              <a:solidFill>
+                <a:srgbClr val="ED7D31"/>
+              </a:solidFill>
+            </a:ln>
+          </p:spPr>
+          <p:style>
+            <a:lnRef idx="1">
+              <a:schemeClr val="accent1"/>
+            </a:lnRef>
+            <a:fillRef idx="0">
+              <a:schemeClr val="accent1"/>
+            </a:fillRef>
+            <a:effectRef idx="0">
+              <a:schemeClr val="accent1"/>
+            </a:effectRef>
+            <a:fontRef idx="minor">
+              <a:schemeClr val="tx1"/>
+            </a:fontRef>
+          </p:style>
+        </p:cxnSp>
+        <p:cxnSp>
+          <p:nvCxnSpPr>
+            <p:cNvPr id="134" name="直線接點 133">
+              <a:extLst>
+                <a:ext uri="{FF2B5EF4-FFF2-40B4-BE49-F238E27FC236}">
+                  <a16:creationId xmlns:a16="http://schemas.microsoft.com/office/drawing/2014/main" id="{B771A834-D842-4990-843E-A0CFEB6A1311}"/>
+                </a:ext>
+              </a:extLst>
+            </p:cNvPr>
+            <p:cNvCxnSpPr>
+              <a:cxnSpLocks/>
+              <a:stCxn id="69" idx="3"/>
+              <a:endCxn id="32" idx="2"/>
+            </p:cNvCxnSpPr>
+            <p:nvPr/>
+          </p:nvCxnSpPr>
+          <p:spPr>
+            <a:xfrm flipV="1">
+              <a:off x="7491361" y="5215965"/>
+              <a:ext cx="1718904" cy="1743"/>
+            </a:xfrm>
+            <a:prstGeom prst="line">
+              <a:avLst/>
+            </a:prstGeom>
+            <a:ln w="76200" cmpd="dbl">
+              <a:solidFill>
+                <a:srgbClr val="ED7D31"/>
+              </a:solidFill>
+            </a:ln>
+          </p:spPr>
+          <p:style>
+            <a:lnRef idx="1">
+              <a:schemeClr val="accent1"/>
+            </a:lnRef>
+            <a:fillRef idx="0">
+              <a:schemeClr val="accent1"/>
+            </a:fillRef>
+            <a:effectRef idx="0">
+              <a:schemeClr val="accent1"/>
+            </a:effectRef>
+            <a:fontRef idx="minor">
+              <a:schemeClr val="tx1"/>
+            </a:fontRef>
+          </p:style>
+        </p:cxnSp>
+        <p:cxnSp>
+          <p:nvCxnSpPr>
+            <p:cNvPr id="136" name="直線接點 135">
+              <a:extLst>
+                <a:ext uri="{FF2B5EF4-FFF2-40B4-BE49-F238E27FC236}">
+                  <a16:creationId xmlns:a16="http://schemas.microsoft.com/office/drawing/2014/main" id="{A91C540E-4196-4AC9-8D8D-188F8B6045E3}"/>
+                </a:ext>
+              </a:extLst>
+            </p:cNvPr>
+            <p:cNvCxnSpPr>
+              <a:stCxn id="32" idx="0"/>
+              <a:endCxn id="7" idx="2"/>
+            </p:cNvCxnSpPr>
+            <p:nvPr/>
+          </p:nvCxnSpPr>
+          <p:spPr>
+            <a:xfrm flipH="1" flipV="1">
+              <a:off x="9210264" y="3607962"/>
+              <a:ext cx="1" cy="774351"/>
+            </a:xfrm>
+            <a:prstGeom prst="line">
+              <a:avLst/>
+            </a:prstGeom>
+            <a:ln w="76200" cmpd="dbl">
+              <a:solidFill>
+                <a:srgbClr val="ED7D31"/>
+              </a:solidFill>
+            </a:ln>
+          </p:spPr>
+          <p:style>
+            <a:lnRef idx="1">
+              <a:schemeClr val="accent1"/>
+            </a:lnRef>
+            <a:fillRef idx="0">
+              <a:schemeClr val="accent1"/>
+            </a:fillRef>
+            <a:effectRef idx="0">
+              <a:schemeClr val="accent1"/>
+            </a:effectRef>
+            <a:fontRef idx="minor">
+              <a:schemeClr val="tx1"/>
+            </a:fontRef>
+          </p:style>
+        </p:cxnSp>
+        <p:cxnSp>
+          <p:nvCxnSpPr>
+            <p:cNvPr id="138" name="直線接點 137">
+              <a:extLst>
+                <a:ext uri="{FF2B5EF4-FFF2-40B4-BE49-F238E27FC236}">
+                  <a16:creationId xmlns:a16="http://schemas.microsoft.com/office/drawing/2014/main" id="{4388DF5F-C414-4034-B9E4-4E5F1AE73A39}"/>
+                </a:ext>
+              </a:extLst>
+            </p:cNvPr>
+            <p:cNvCxnSpPr>
+              <a:stCxn id="31" idx="3"/>
+              <a:endCxn id="7" idx="1"/>
+            </p:cNvCxnSpPr>
+            <p:nvPr/>
+          </p:nvCxnSpPr>
+          <p:spPr>
+            <a:xfrm flipV="1">
+              <a:off x="7685785" y="3318626"/>
+              <a:ext cx="1042554" cy="1002"/>
+            </a:xfrm>
+            <a:prstGeom prst="line">
+              <a:avLst/>
+            </a:prstGeom>
+            <a:ln w="76200" cmpd="dbl">
+              <a:solidFill>
+                <a:srgbClr val="ED7D31"/>
+              </a:solidFill>
+            </a:ln>
+          </p:spPr>
+          <p:style>
+            <a:lnRef idx="1">
+              <a:schemeClr val="accent1"/>
+            </a:lnRef>
+            <a:fillRef idx="0">
+              <a:schemeClr val="accent1"/>
+            </a:fillRef>
+            <a:effectRef idx="0">
+              <a:schemeClr val="accent1"/>
+            </a:effectRef>
+            <a:fontRef idx="minor">
+              <a:schemeClr val="tx1"/>
+            </a:fontRef>
+          </p:style>
+        </p:cxnSp>
+        <p:cxnSp>
+          <p:nvCxnSpPr>
+            <p:cNvPr id="140" name="直線接點 139">
+              <a:extLst>
+                <a:ext uri="{FF2B5EF4-FFF2-40B4-BE49-F238E27FC236}">
+                  <a16:creationId xmlns:a16="http://schemas.microsoft.com/office/drawing/2014/main" id="{D0689312-1238-4003-BB6F-AC7E75B8AD49}"/>
+                </a:ext>
+              </a:extLst>
+            </p:cNvPr>
+            <p:cNvCxnSpPr>
+              <a:stCxn id="4" idx="3"/>
+              <a:endCxn id="31" idx="1"/>
+            </p:cNvCxnSpPr>
+            <p:nvPr/>
+          </p:nvCxnSpPr>
+          <p:spPr>
+            <a:xfrm flipV="1">
+              <a:off x="5151172" y="3319628"/>
+              <a:ext cx="1067526" cy="1"/>
+            </a:xfrm>
+            <a:prstGeom prst="line">
+              <a:avLst/>
+            </a:prstGeom>
+            <a:ln w="76200" cmpd="dbl">
+              <a:solidFill>
+                <a:srgbClr val="ED7D31"/>
+              </a:solidFill>
+            </a:ln>
+          </p:spPr>
+          <p:style>
+            <a:lnRef idx="1">
+              <a:schemeClr val="accent1"/>
+            </a:lnRef>
+            <a:fillRef idx="0">
+              <a:schemeClr val="accent1"/>
+            </a:fillRef>
+            <a:effectRef idx="0">
+              <a:schemeClr val="accent1"/>
+            </a:effectRef>
+            <a:fontRef idx="minor">
+              <a:schemeClr val="tx1"/>
+            </a:fontRef>
+          </p:style>
+        </p:cxnSp>
+        <p:cxnSp>
+          <p:nvCxnSpPr>
+            <p:cNvPr id="142" name="直線接點 141">
+              <a:extLst>
+                <a:ext uri="{FF2B5EF4-FFF2-40B4-BE49-F238E27FC236}">
+                  <a16:creationId xmlns:a16="http://schemas.microsoft.com/office/drawing/2014/main" id="{B86D59E7-50FD-40F7-8089-EBAB50160F7A}"/>
+                </a:ext>
+              </a:extLst>
+            </p:cNvPr>
+            <p:cNvCxnSpPr>
+              <a:stCxn id="29" idx="1"/>
+              <a:endCxn id="4" idx="0"/>
+            </p:cNvCxnSpPr>
+            <p:nvPr/>
+          </p:nvCxnSpPr>
+          <p:spPr>
+            <a:xfrm>
+              <a:off x="4665120" y="1831483"/>
+              <a:ext cx="4127" cy="1198809"/>
+            </a:xfrm>
+            <a:prstGeom prst="line">
+              <a:avLst/>
+            </a:prstGeom>
+            <a:ln w="38100">
+              <a:solidFill>
+                <a:srgbClr val="ED7D31"/>
+              </a:solidFill>
+            </a:ln>
+          </p:spPr>
+          <p:style>
+            <a:lnRef idx="1">
+              <a:schemeClr val="accent1"/>
+            </a:lnRef>
+            <a:fillRef idx="0">
+              <a:schemeClr val="accent1"/>
+            </a:fillRef>
+            <a:effectRef idx="0">
+              <a:schemeClr val="accent1"/>
+            </a:effectRef>
+            <a:fontRef idx="minor">
+              <a:schemeClr val="tx1"/>
+            </a:fontRef>
+          </p:style>
+        </p:cxnSp>
+        <p:cxnSp>
+          <p:nvCxnSpPr>
+            <p:cNvPr id="144" name="直線接點 143">
+              <a:extLst>
+                <a:ext uri="{FF2B5EF4-FFF2-40B4-BE49-F238E27FC236}">
+                  <a16:creationId xmlns:a16="http://schemas.microsoft.com/office/drawing/2014/main" id="{66101CEC-8885-4D9C-B364-A9BFF68169CE}"/>
+                </a:ext>
+              </a:extLst>
+            </p:cNvPr>
+            <p:cNvCxnSpPr>
+              <a:stCxn id="29" idx="3"/>
+              <a:endCxn id="8" idx="1"/>
+            </p:cNvCxnSpPr>
+            <p:nvPr/>
+          </p:nvCxnSpPr>
+          <p:spPr>
+            <a:xfrm flipV="1">
+              <a:off x="6132207" y="1827201"/>
+              <a:ext cx="1107708" cy="4282"/>
+            </a:xfrm>
+            <a:prstGeom prst="line">
+              <a:avLst/>
+            </a:prstGeom>
+            <a:ln w="38100">
+              <a:solidFill>
+                <a:srgbClr val="ED7D31"/>
+              </a:solidFill>
+            </a:ln>
+          </p:spPr>
+          <p:style>
+            <a:lnRef idx="1">
+              <a:schemeClr val="accent1"/>
+            </a:lnRef>
+            <a:fillRef idx="0">
+              <a:schemeClr val="accent1"/>
+            </a:fillRef>
+            <a:effectRef idx="0">
+              <a:schemeClr val="accent1"/>
+            </a:effectRef>
+            <a:fontRef idx="minor">
+              <a:schemeClr val="tx1"/>
+            </a:fontRef>
+          </p:style>
+        </p:cxnSp>
+        <p:cxnSp>
+          <p:nvCxnSpPr>
+            <p:cNvPr id="146" name="直線接點 145">
+              <a:extLst>
+                <a:ext uri="{FF2B5EF4-FFF2-40B4-BE49-F238E27FC236}">
+                  <a16:creationId xmlns:a16="http://schemas.microsoft.com/office/drawing/2014/main" id="{219D975D-4DDD-4F6D-9E89-DE35D4BF5166}"/>
+                </a:ext>
+              </a:extLst>
+            </p:cNvPr>
+            <p:cNvCxnSpPr>
+              <a:stCxn id="29" idx="0"/>
+              <a:endCxn id="19" idx="4"/>
+            </p:cNvCxnSpPr>
+            <p:nvPr/>
+          </p:nvCxnSpPr>
+          <p:spPr>
+            <a:xfrm flipH="1" flipV="1">
+              <a:off x="4735899" y="901990"/>
+              <a:ext cx="662765" cy="512667"/>
+            </a:xfrm>
+            <a:prstGeom prst="line">
+              <a:avLst/>
+            </a:prstGeom>
+            <a:ln w="38100">
+              <a:solidFill>
+                <a:srgbClr val="ED7D31"/>
+              </a:solidFill>
+            </a:ln>
+          </p:spPr>
+          <p:style>
+            <a:lnRef idx="1">
+              <a:schemeClr val="accent1"/>
+            </a:lnRef>
+            <a:fillRef idx="0">
+              <a:schemeClr val="accent1"/>
+            </a:fillRef>
+            <a:effectRef idx="0">
+              <a:schemeClr val="accent1"/>
+            </a:effectRef>
+            <a:fontRef idx="minor">
+              <a:schemeClr val="tx1"/>
+            </a:fontRef>
+          </p:style>
+        </p:cxnSp>
+        <p:cxnSp>
+          <p:nvCxnSpPr>
+            <p:cNvPr id="148" name="直線接點 147">
+              <a:extLst>
+                <a:ext uri="{FF2B5EF4-FFF2-40B4-BE49-F238E27FC236}">
+                  <a16:creationId xmlns:a16="http://schemas.microsoft.com/office/drawing/2014/main" id="{5AA120E0-7D2C-46D9-A533-2E98BC07C6D9}"/>
+                </a:ext>
+              </a:extLst>
+            </p:cNvPr>
+            <p:cNvCxnSpPr>
+              <a:stCxn id="11" idx="4"/>
+              <a:endCxn id="29" idx="0"/>
+            </p:cNvCxnSpPr>
+            <p:nvPr/>
+          </p:nvCxnSpPr>
+          <p:spPr>
+            <a:xfrm flipH="1">
+              <a:off x="5398664" y="867338"/>
+              <a:ext cx="1179870" cy="547319"/>
+            </a:xfrm>
+            <a:prstGeom prst="line">
+              <a:avLst/>
+            </a:prstGeom>
+            <a:ln w="38100">
+              <a:solidFill>
+                <a:srgbClr val="ED7D31"/>
+              </a:solidFill>
+            </a:ln>
+          </p:spPr>
+          <p:style>
+            <a:lnRef idx="1">
+              <a:schemeClr val="accent1"/>
+            </a:lnRef>
+            <a:fillRef idx="0">
+              <a:schemeClr val="accent1"/>
+            </a:fillRef>
+            <a:effectRef idx="0">
+              <a:schemeClr val="accent1"/>
+            </a:effectRef>
+            <a:fontRef idx="minor">
+              <a:schemeClr val="tx1"/>
+            </a:fontRef>
+          </p:style>
+        </p:cxnSp>
+        <p:sp>
+          <p:nvSpPr>
+            <p:cNvPr id="69" name="矩形 68">
+              <a:extLst>
+                <a:ext uri="{FF2B5EF4-FFF2-40B4-BE49-F238E27FC236}">
+                  <a16:creationId xmlns:a16="http://schemas.microsoft.com/office/drawing/2014/main" id="{AF074DE4-C9E2-4A29-A201-EA83108C0221}"/>
+                </a:ext>
+              </a:extLst>
+            </p:cNvPr>
+            <p:cNvSpPr/>
+            <p:nvPr/>
+          </p:nvSpPr>
+          <p:spPr>
+            <a:xfrm>
+              <a:off x="6527511" y="4928371"/>
+              <a:ext cx="963850" cy="578673"/>
+            </a:xfrm>
+            <a:prstGeom prst="rect">
+              <a:avLst/>
+            </a:prstGeom>
+            <a:noFill/>
+            <a:ln w="38100">
+              <a:solidFill>
+                <a:srgbClr val="00B050"/>
+              </a:solidFill>
+            </a:ln>
+          </p:spPr>
+          <p:style>
+            <a:lnRef idx="2">
+              <a:schemeClr val="accent1">
+                <a:shade val="50000"/>
+              </a:schemeClr>
+            </a:lnRef>
+            <a:fillRef idx="1">
+              <a:schemeClr val="accent1"/>
+            </a:fillRef>
+            <a:effectRef idx="0">
+              <a:schemeClr val="accent1"/>
+            </a:effectRef>
+            <a:fontRef idx="minor">
+              <a:schemeClr val="lt1"/>
+            </a:fontRef>
+          </p:style>
+          <p:txBody>
+            <a:bodyPr rtlCol="0" anchor="ctr"/>
+            <a:lstStyle/>
+            <a:p>
+              <a:pPr algn="ctr"/>
+              <a:r>
+                <a:rPr lang="zh-TW" altLang="en-US" dirty="0">
+                  <a:solidFill>
+                    <a:sysClr val="windowText" lastClr="000000"/>
+                  </a:solidFill>
+                  <a:latin typeface="微軟正黑體" panose="020B0604030504040204" pitchFamily="34" charset="-120"/>
+                  <a:ea typeface="微軟正黑體" panose="020B0604030504040204" pitchFamily="34" charset="-120"/>
+                </a:rPr>
+                <a:t>出版社</a:t>
+              </a:r>
+            </a:p>
+          </p:txBody>
+        </p:sp>
+        <p:sp>
+          <p:nvSpPr>
+            <p:cNvPr id="53" name="橢圓 52">
+              <a:extLst>
+                <a:ext uri="{FF2B5EF4-FFF2-40B4-BE49-F238E27FC236}">
+                  <a16:creationId xmlns:a16="http://schemas.microsoft.com/office/drawing/2014/main" id="{4DFC75C5-AE34-4B0C-A5BA-88EDEE029858}"/>
+                </a:ext>
+              </a:extLst>
+            </p:cNvPr>
+            <p:cNvSpPr/>
+            <p:nvPr/>
+          </p:nvSpPr>
+          <p:spPr>
+            <a:xfrm>
+              <a:off x="1043414" y="3029289"/>
+              <a:ext cx="1230942" cy="552543"/>
+            </a:xfrm>
+            <a:prstGeom prst="ellipse">
+              <a:avLst/>
+            </a:prstGeom>
+            <a:noFill/>
+            <a:ln w="38100">
+              <a:solidFill>
+                <a:srgbClr val="2F528F"/>
+              </a:solidFill>
+            </a:ln>
+          </p:spPr>
+          <p:style>
+            <a:lnRef idx="2">
+              <a:schemeClr val="accent1">
+                <a:shade val="50000"/>
+              </a:schemeClr>
+            </a:lnRef>
+            <a:fillRef idx="1">
+              <a:schemeClr val="accent1"/>
+            </a:fillRef>
+            <a:effectRef idx="0">
+              <a:schemeClr val="accent1"/>
+            </a:effectRef>
+            <a:fontRef idx="minor">
+              <a:schemeClr val="lt1"/>
+            </a:fontRef>
+          </p:style>
+          <p:txBody>
+            <a:bodyPr rtlCol="0" anchor="ctr"/>
+            <a:lstStyle/>
+            <a:p>
+              <a:pPr algn="ctr"/>
+              <a:r>
+                <a:rPr lang="zh-TW" altLang="en-US" dirty="0">
+                  <a:solidFill>
+                    <a:sysClr val="windowText" lastClr="000000"/>
+                  </a:solidFill>
+                  <a:latin typeface="微軟正黑體" panose="020B0604030504040204" pitchFamily="34" charset="-120"/>
+                  <a:ea typeface="微軟正黑體" panose="020B0604030504040204" pitchFamily="34" charset="-120"/>
+                </a:rPr>
+                <a:t>授權</a:t>
+              </a:r>
+            </a:p>
+          </p:txBody>
+        </p:sp>
+        <p:cxnSp>
+          <p:nvCxnSpPr>
+            <p:cNvPr id="16" name="直線接點 15">
+              <a:extLst>
+                <a:ext uri="{FF2B5EF4-FFF2-40B4-BE49-F238E27FC236}">
+                  <a16:creationId xmlns:a16="http://schemas.microsoft.com/office/drawing/2014/main" id="{6E92AF63-F176-4D6D-A764-41FCE76C92B6}"/>
+                </a:ext>
+              </a:extLst>
+            </p:cNvPr>
+            <p:cNvCxnSpPr>
+              <a:stCxn id="53" idx="6"/>
+              <a:endCxn id="4" idx="1"/>
+            </p:cNvCxnSpPr>
+            <p:nvPr/>
+          </p:nvCxnSpPr>
+          <p:spPr>
+            <a:xfrm>
+              <a:off x="2274356" y="3305561"/>
+              <a:ext cx="1912966" cy="14068"/>
+            </a:xfrm>
+            <a:prstGeom prst="line">
+              <a:avLst/>
+            </a:prstGeom>
+            <a:ln w="38100">
+              <a:solidFill>
+                <a:srgbClr val="2F528F"/>
+              </a:solidFill>
+            </a:ln>
+          </p:spPr>
+          <p:style>
+            <a:lnRef idx="1">
+              <a:schemeClr val="accent1"/>
+            </a:lnRef>
+            <a:fillRef idx="0">
+              <a:schemeClr val="accent1"/>
+            </a:fillRef>
+            <a:effectRef idx="0">
+              <a:schemeClr val="accent1"/>
+            </a:effectRef>
+            <a:fontRef idx="minor">
+              <a:schemeClr val="tx1"/>
+            </a:fontRef>
+          </p:style>
+        </p:cxnSp>
+        <p:sp>
+          <p:nvSpPr>
+            <p:cNvPr id="55" name="橢圓 54">
+              <a:extLst>
+                <a:ext uri="{FF2B5EF4-FFF2-40B4-BE49-F238E27FC236}">
+                  <a16:creationId xmlns:a16="http://schemas.microsoft.com/office/drawing/2014/main" id="{5A7D492C-D947-02CE-97A8-3631A7E2CA59}"/>
+                </a:ext>
+              </a:extLst>
+            </p:cNvPr>
+            <p:cNvSpPr/>
+            <p:nvPr/>
+          </p:nvSpPr>
+          <p:spPr>
+            <a:xfrm>
+              <a:off x="1050960" y="3758206"/>
+              <a:ext cx="1230942" cy="552543"/>
+            </a:xfrm>
+            <a:prstGeom prst="ellipse">
+              <a:avLst/>
+            </a:prstGeom>
+            <a:noFill/>
+            <a:ln w="38100">
+              <a:solidFill>
+                <a:srgbClr val="2F528F"/>
+              </a:solidFill>
+            </a:ln>
+          </p:spPr>
+          <p:style>
+            <a:lnRef idx="2">
+              <a:schemeClr val="accent1">
+                <a:shade val="50000"/>
+              </a:schemeClr>
+            </a:lnRef>
+            <a:fillRef idx="1">
+              <a:schemeClr val="accent1"/>
+            </a:fillRef>
+            <a:effectRef idx="0">
+              <a:schemeClr val="accent1"/>
+            </a:effectRef>
+            <a:fontRef idx="minor">
+              <a:schemeClr val="lt1"/>
+            </a:fontRef>
+          </p:style>
+          <p:txBody>
+            <a:bodyPr rtlCol="0" anchor="ctr"/>
+            <a:lstStyle/>
+            <a:p>
+              <a:pPr algn="ctr"/>
+              <a:r>
+                <a:rPr lang="zh-TW" altLang="en-US" dirty="0">
+                  <a:solidFill>
+                    <a:sysClr val="windowText" lastClr="000000"/>
+                  </a:solidFill>
+                  <a:latin typeface="微軟正黑體" panose="020B0604030504040204" pitchFamily="34" charset="-120"/>
+                  <a:ea typeface="微軟正黑體" panose="020B0604030504040204" pitchFamily="34" charset="-120"/>
+                </a:rPr>
+                <a:t>系列</a:t>
+              </a:r>
+            </a:p>
+          </p:txBody>
+        </p:sp>
+        <p:cxnSp>
+          <p:nvCxnSpPr>
+            <p:cNvPr id="57" name="直線接點 56">
+              <a:extLst>
+                <a:ext uri="{FF2B5EF4-FFF2-40B4-BE49-F238E27FC236}">
+                  <a16:creationId xmlns:a16="http://schemas.microsoft.com/office/drawing/2014/main" id="{F7CCFE67-190A-F374-6D99-DB8C16DA77A5}"/>
+                </a:ext>
+              </a:extLst>
+            </p:cNvPr>
+            <p:cNvCxnSpPr>
+              <a:cxnSpLocks/>
+              <a:stCxn id="55" idx="6"/>
+              <a:endCxn id="4" idx="1"/>
+            </p:cNvCxnSpPr>
+            <p:nvPr/>
+          </p:nvCxnSpPr>
+          <p:spPr>
+            <a:xfrm flipV="1">
+              <a:off x="2281902" y="3319629"/>
+              <a:ext cx="1905420" cy="714849"/>
+            </a:xfrm>
+            <a:prstGeom prst="line">
+              <a:avLst/>
+            </a:prstGeom>
+            <a:ln w="38100">
+              <a:solidFill>
+                <a:srgbClr val="2F528F"/>
+              </a:solidFill>
+            </a:ln>
+          </p:spPr>
+          <p:style>
+            <a:lnRef idx="1">
+              <a:schemeClr val="accent1"/>
+            </a:lnRef>
+            <a:fillRef idx="0">
+              <a:schemeClr val="accent1"/>
+            </a:fillRef>
+            <a:effectRef idx="0">
+              <a:schemeClr val="accent1"/>
+            </a:effectRef>
+            <a:fontRef idx="minor">
+              <a:schemeClr val="tx1"/>
+            </a:fontRef>
+          </p:style>
+        </p:cxnSp>
+        <p:sp>
+          <p:nvSpPr>
+            <p:cNvPr id="64" name="文字方塊 63">
+              <a:extLst>
+                <a:ext uri="{FF2B5EF4-FFF2-40B4-BE49-F238E27FC236}">
+                  <a16:creationId xmlns:a16="http://schemas.microsoft.com/office/drawing/2014/main" id="{BB3F4FBB-7259-DE84-C6F5-B0B6DDFC3AEE}"/>
+                </a:ext>
+              </a:extLst>
+            </p:cNvPr>
+            <p:cNvSpPr txBox="1"/>
+            <p:nvPr/>
+          </p:nvSpPr>
+          <p:spPr>
+            <a:xfrm>
+              <a:off x="8086717" y="2946202"/>
+              <a:ext cx="301686" cy="369332"/>
+            </a:xfrm>
+            <a:prstGeom prst="rect">
+              <a:avLst/>
+            </a:prstGeom>
+            <a:noFill/>
+          </p:spPr>
+          <p:txBody>
+            <a:bodyPr wrap="none" rtlCol="0">
+              <a:spAutoFit/>
+            </a:bodyPr>
+            <a:lstStyle/>
+            <a:p>
+              <a:r>
+                <a:rPr lang="en-US" altLang="zh-TW" b="1" dirty="0">
+                  <a:solidFill>
+                    <a:srgbClr val="ED7D31"/>
+                  </a:solidFill>
+                </a:rPr>
+                <a:t>1</a:t>
+              </a:r>
+              <a:endParaRPr lang="zh-TW" altLang="en-US" b="1" dirty="0">
                 <a:solidFill>
-                  <a:sysClr val="windowText" lastClr="000000"/>
+                  <a:srgbClr val="ED7D31"/>
                 </a:solidFill>
-                <a:latin typeface="微軟正黑體" panose="020B0604030504040204" pitchFamily="34" charset="-120"/>
-                <a:ea typeface="微軟正黑體" panose="020B0604030504040204" pitchFamily="34" charset="-120"/>
-              </a:rPr>
-              <a:t>作者</a:t>
-            </a:r>
-          </a:p>
-        </p:txBody>
-      </p:sp>
-      <p:sp>
-        <p:nvSpPr>
-          <p:cNvPr id="8" name="矩形 7">
-            <a:extLst>
-              <a:ext uri="{FF2B5EF4-FFF2-40B4-BE49-F238E27FC236}">
-                <a16:creationId xmlns:a16="http://schemas.microsoft.com/office/drawing/2014/main" id="{82182DAA-0E8C-4F5B-9213-F4B6CFB4F174}"/>
-              </a:ext>
-            </a:extLst>
-          </p:cNvPr>
-          <p:cNvSpPr/>
-          <p:nvPr/>
-        </p:nvSpPr>
-        <p:spPr>
-          <a:xfrm>
-            <a:off x="7239915" y="1537864"/>
-            <a:ext cx="963850" cy="578673"/>
-          </a:xfrm>
-          <a:prstGeom prst="rect">
-            <a:avLst/>
-          </a:prstGeom>
-          <a:noFill/>
-          <a:ln w="38100">
-            <a:solidFill>
-              <a:srgbClr val="4D4D4D"/>
-            </a:solidFill>
-          </a:ln>
-        </p:spPr>
-        <p:style>
-          <a:lnRef idx="2">
-            <a:schemeClr val="accent1">
-              <a:shade val="50000"/>
-            </a:schemeClr>
-          </a:lnRef>
-          <a:fillRef idx="1">
-            <a:schemeClr val="accent1"/>
-          </a:fillRef>
-          <a:effectRef idx="0">
-            <a:schemeClr val="accent1"/>
-          </a:effectRef>
-          <a:fontRef idx="minor">
-            <a:schemeClr val="lt1"/>
-          </a:fontRef>
-        </p:style>
-        <p:txBody>
-          <a:bodyPr rtlCol="0" anchor="ctr"/>
-          <a:lstStyle/>
-          <a:p>
-            <a:pPr algn="ctr"/>
-            <a:r>
-              <a:rPr lang="zh-TW" altLang="en-US" dirty="0">
+              </a:endParaRPr>
+            </a:p>
+          </p:txBody>
+        </p:sp>
+        <p:sp>
+          <p:nvSpPr>
+            <p:cNvPr id="65" name="文字方塊 64">
+              <a:extLst>
+                <a:ext uri="{FF2B5EF4-FFF2-40B4-BE49-F238E27FC236}">
+                  <a16:creationId xmlns:a16="http://schemas.microsoft.com/office/drawing/2014/main" id="{BA75AB1B-105E-9971-C4AE-F5A6338EB984}"/>
+                </a:ext>
+              </a:extLst>
+            </p:cNvPr>
+            <p:cNvSpPr txBox="1"/>
+            <p:nvPr/>
+          </p:nvSpPr>
+          <p:spPr>
+            <a:xfrm>
+              <a:off x="4271788" y="3849811"/>
+              <a:ext cx="308098" cy="369332"/>
+            </a:xfrm>
+            <a:prstGeom prst="rect">
+              <a:avLst/>
+            </a:prstGeom>
+            <a:noFill/>
+          </p:spPr>
+          <p:txBody>
+            <a:bodyPr wrap="none" rtlCol="0">
+              <a:spAutoFit/>
+            </a:bodyPr>
+            <a:lstStyle/>
+            <a:p>
+              <a:r>
+                <a:rPr lang="en-US" altLang="zh-TW" b="1" dirty="0">
+                  <a:solidFill>
+                    <a:srgbClr val="ED7D31"/>
+                  </a:solidFill>
+                </a:rPr>
+                <a:t>n</a:t>
+              </a:r>
+              <a:endParaRPr lang="zh-TW" altLang="en-US" b="1" dirty="0">
                 <a:solidFill>
-                  <a:sysClr val="windowText" lastClr="000000"/>
+                  <a:srgbClr val="ED7D31"/>
                 </a:solidFill>
-                <a:latin typeface="微軟正黑體" panose="020B0604030504040204" pitchFamily="34" charset="-120"/>
-                <a:ea typeface="微軟正黑體" panose="020B0604030504040204" pitchFamily="34" charset="-120"/>
-              </a:rPr>
-              <a:t>使用者</a:t>
-            </a:r>
-          </a:p>
-        </p:txBody>
-      </p:sp>
-      <p:sp>
-        <p:nvSpPr>
-          <p:cNvPr id="11" name="橢圓 10">
-            <a:extLst>
-              <a:ext uri="{FF2B5EF4-FFF2-40B4-BE49-F238E27FC236}">
-                <a16:creationId xmlns:a16="http://schemas.microsoft.com/office/drawing/2014/main" id="{A74CC088-F6BB-4D78-8774-E19DB0C79FE8}"/>
-              </a:ext>
-            </a:extLst>
-          </p:cNvPr>
-          <p:cNvSpPr/>
-          <p:nvPr/>
-        </p:nvSpPr>
-        <p:spPr>
-          <a:xfrm>
-            <a:off x="5792016" y="314795"/>
-            <a:ext cx="1573035" cy="552543"/>
-          </a:xfrm>
-          <a:prstGeom prst="ellipse">
-            <a:avLst/>
-          </a:prstGeom>
-          <a:ln w="38100"/>
-        </p:spPr>
-        <p:style>
-          <a:lnRef idx="2">
-            <a:schemeClr val="accent2"/>
-          </a:lnRef>
-          <a:fillRef idx="1">
-            <a:schemeClr val="lt1"/>
-          </a:fillRef>
-          <a:effectRef idx="0">
-            <a:schemeClr val="accent2"/>
-          </a:effectRef>
-          <a:fontRef idx="minor">
-            <a:schemeClr val="dk1"/>
-          </a:fontRef>
-        </p:style>
-        <p:txBody>
-          <a:bodyPr rtlCol="0" anchor="ctr"/>
-          <a:lstStyle/>
-          <a:p>
-            <a:pPr algn="ctr"/>
-            <a:r>
-              <a:rPr lang="zh-TW" altLang="en-US" dirty="0">
+              </a:endParaRPr>
+            </a:p>
+          </p:txBody>
+        </p:sp>
+        <p:sp>
+          <p:nvSpPr>
+            <p:cNvPr id="66" name="文字方塊 65">
+              <a:extLst>
+                <a:ext uri="{FF2B5EF4-FFF2-40B4-BE49-F238E27FC236}">
+                  <a16:creationId xmlns:a16="http://schemas.microsoft.com/office/drawing/2014/main" id="{29876635-666F-78C1-1B59-1477142226A2}"/>
+                </a:ext>
+              </a:extLst>
+            </p:cNvPr>
+            <p:cNvSpPr txBox="1"/>
+            <p:nvPr/>
+          </p:nvSpPr>
+          <p:spPr>
+            <a:xfrm>
+              <a:off x="4276504" y="2331409"/>
+              <a:ext cx="372218" cy="369332"/>
+            </a:xfrm>
+            <a:prstGeom prst="rect">
+              <a:avLst/>
+            </a:prstGeom>
+            <a:noFill/>
+          </p:spPr>
+          <p:txBody>
+            <a:bodyPr wrap="none" rtlCol="0">
+              <a:spAutoFit/>
+            </a:bodyPr>
+            <a:lstStyle/>
+            <a:p>
+              <a:r>
+                <a:rPr lang="en-US" altLang="zh-TW" b="1" dirty="0">
+                  <a:solidFill>
+                    <a:srgbClr val="ED7D31"/>
+                  </a:solidFill>
+                </a:rPr>
+                <a:t>m</a:t>
+              </a:r>
+              <a:endParaRPr lang="zh-TW" altLang="en-US" b="1" dirty="0">
                 <a:solidFill>
-                  <a:sysClr val="windowText" lastClr="000000"/>
+                  <a:srgbClr val="ED7D31"/>
                 </a:solidFill>
-                <a:latin typeface="微軟正黑體" panose="020B0604030504040204" pitchFamily="34" charset="-120"/>
-                <a:ea typeface="微軟正黑體" panose="020B0604030504040204" pitchFamily="34" charset="-120"/>
-              </a:rPr>
-              <a:t>愛心紀錄</a:t>
-            </a:r>
-          </a:p>
-        </p:txBody>
-      </p:sp>
-      <p:sp>
-        <p:nvSpPr>
-          <p:cNvPr id="12" name="橢圓 11">
-            <a:extLst>
-              <a:ext uri="{FF2B5EF4-FFF2-40B4-BE49-F238E27FC236}">
-                <a16:creationId xmlns:a16="http://schemas.microsoft.com/office/drawing/2014/main" id="{50C7A5AB-1A86-48CD-8E4A-59295C6599A4}"/>
-              </a:ext>
-            </a:extLst>
-          </p:cNvPr>
-          <p:cNvSpPr/>
-          <p:nvPr/>
-        </p:nvSpPr>
-        <p:spPr>
-          <a:xfrm>
-            <a:off x="1852004" y="290861"/>
-            <a:ext cx="1573035" cy="552543"/>
-          </a:xfrm>
-          <a:prstGeom prst="ellipse">
-            <a:avLst/>
-          </a:prstGeom>
-          <a:noFill/>
-          <a:ln w="38100">
-            <a:solidFill>
-              <a:srgbClr val="2F528F"/>
-            </a:solidFill>
-          </a:ln>
-        </p:spPr>
-        <p:style>
-          <a:lnRef idx="2">
-            <a:schemeClr val="accent1">
-              <a:shade val="50000"/>
-            </a:schemeClr>
-          </a:lnRef>
-          <a:fillRef idx="1">
-            <a:schemeClr val="accent1"/>
-          </a:fillRef>
-          <a:effectRef idx="0">
-            <a:schemeClr val="accent1"/>
-          </a:effectRef>
-          <a:fontRef idx="minor">
-            <a:schemeClr val="lt1"/>
-          </a:fontRef>
-        </p:style>
-        <p:txBody>
-          <a:bodyPr rtlCol="0" anchor="ctr"/>
-          <a:lstStyle/>
-          <a:p>
-            <a:pPr algn="ctr"/>
-            <a:r>
-              <a:rPr lang="zh-TW" altLang="en-US" u="sng" dirty="0">
+              </a:endParaRPr>
+            </a:p>
+          </p:txBody>
+        </p:sp>
+        <p:sp>
+          <p:nvSpPr>
+            <p:cNvPr id="67" name="文字方塊 66">
+              <a:extLst>
+                <a:ext uri="{FF2B5EF4-FFF2-40B4-BE49-F238E27FC236}">
+                  <a16:creationId xmlns:a16="http://schemas.microsoft.com/office/drawing/2014/main" id="{9DE4D70D-85ED-C307-B75E-B5E2AD43AED4}"/>
+                </a:ext>
+              </a:extLst>
+            </p:cNvPr>
+            <p:cNvSpPr txBox="1"/>
+            <p:nvPr/>
+          </p:nvSpPr>
+          <p:spPr>
+            <a:xfrm>
+              <a:off x="5567546" y="5277661"/>
+              <a:ext cx="301686" cy="369332"/>
+            </a:xfrm>
+            <a:prstGeom prst="rect">
+              <a:avLst/>
+            </a:prstGeom>
+            <a:noFill/>
+          </p:spPr>
+          <p:txBody>
+            <a:bodyPr wrap="none" rtlCol="0">
+              <a:spAutoFit/>
+            </a:bodyPr>
+            <a:lstStyle/>
+            <a:p>
+              <a:r>
+                <a:rPr lang="en-US" altLang="zh-TW" b="1" dirty="0">
+                  <a:solidFill>
+                    <a:srgbClr val="ED7D31"/>
+                  </a:solidFill>
+                </a:rPr>
+                <a:t>1</a:t>
+              </a:r>
+              <a:endParaRPr lang="zh-TW" altLang="en-US" b="1" dirty="0">
                 <a:solidFill>
-                  <a:sysClr val="windowText" lastClr="000000"/>
+                  <a:srgbClr val="ED7D31"/>
                 </a:solidFill>
-                <a:latin typeface="微軟正黑體" panose="020B0604030504040204" pitchFamily="34" charset="-120"/>
-                <a:ea typeface="微軟正黑體" panose="020B0604030504040204" pitchFamily="34" charset="-120"/>
-              </a:rPr>
-              <a:t>小說代號</a:t>
-            </a:r>
-          </a:p>
-        </p:txBody>
-      </p:sp>
-      <p:sp>
-        <p:nvSpPr>
-          <p:cNvPr id="13" name="橢圓 12">
-            <a:extLst>
-              <a:ext uri="{FF2B5EF4-FFF2-40B4-BE49-F238E27FC236}">
-                <a16:creationId xmlns:a16="http://schemas.microsoft.com/office/drawing/2014/main" id="{3DA73774-161F-4E32-8D07-D371A0C6B297}"/>
-              </a:ext>
-            </a:extLst>
-          </p:cNvPr>
-          <p:cNvSpPr/>
-          <p:nvPr/>
-        </p:nvSpPr>
-        <p:spPr>
-          <a:xfrm>
-            <a:off x="264442" y="2043321"/>
-            <a:ext cx="1230942" cy="552543"/>
-          </a:xfrm>
-          <a:prstGeom prst="ellipse">
-            <a:avLst/>
-          </a:prstGeom>
-          <a:noFill/>
-          <a:ln w="38100">
-            <a:solidFill>
-              <a:srgbClr val="2F528F"/>
-            </a:solidFill>
-          </a:ln>
-        </p:spPr>
-        <p:style>
-          <a:lnRef idx="2">
-            <a:schemeClr val="accent1">
-              <a:shade val="50000"/>
-            </a:schemeClr>
-          </a:lnRef>
-          <a:fillRef idx="1">
-            <a:schemeClr val="accent1"/>
-          </a:fillRef>
-          <a:effectRef idx="0">
-            <a:schemeClr val="accent1"/>
-          </a:effectRef>
-          <a:fontRef idx="minor">
-            <a:schemeClr val="lt1"/>
-          </a:fontRef>
-        </p:style>
-        <p:txBody>
-          <a:bodyPr rtlCol="0" anchor="ctr"/>
-          <a:lstStyle/>
-          <a:p>
-            <a:pPr algn="ctr"/>
-            <a:r>
-              <a:rPr lang="zh-TW" altLang="en-US" dirty="0">
+              </a:endParaRPr>
+            </a:p>
+          </p:txBody>
+        </p:sp>
+        <p:sp>
+          <p:nvSpPr>
+            <p:cNvPr id="68" name="文字方塊 67">
+              <a:extLst>
+                <a:ext uri="{FF2B5EF4-FFF2-40B4-BE49-F238E27FC236}">
+                  <a16:creationId xmlns:a16="http://schemas.microsoft.com/office/drawing/2014/main" id="{EAEB7E16-5AFB-F82A-D940-579D335E40E7}"/>
+                </a:ext>
+              </a:extLst>
+            </p:cNvPr>
+            <p:cNvSpPr txBox="1"/>
+            <p:nvPr/>
+          </p:nvSpPr>
+          <p:spPr>
+            <a:xfrm>
+              <a:off x="6575677" y="1436182"/>
+              <a:ext cx="308098" cy="369332"/>
+            </a:xfrm>
+            <a:prstGeom prst="rect">
+              <a:avLst/>
+            </a:prstGeom>
+            <a:noFill/>
+          </p:spPr>
+          <p:txBody>
+            <a:bodyPr wrap="none" rtlCol="0">
+              <a:spAutoFit/>
+            </a:bodyPr>
+            <a:lstStyle/>
+            <a:p>
+              <a:r>
+                <a:rPr lang="en-US" altLang="zh-TW" b="1" dirty="0">
+                  <a:solidFill>
+                    <a:srgbClr val="ED7D31"/>
+                  </a:solidFill>
+                </a:rPr>
+                <a:t>n</a:t>
+              </a:r>
+              <a:endParaRPr lang="zh-TW" altLang="en-US" b="1" dirty="0">
                 <a:solidFill>
-                  <a:sysClr val="windowText" lastClr="000000"/>
+                  <a:srgbClr val="ED7D31"/>
                 </a:solidFill>
-                <a:latin typeface="微軟正黑體" panose="020B0604030504040204" pitchFamily="34" charset="-120"/>
-                <a:ea typeface="微軟正黑體" panose="020B0604030504040204" pitchFamily="34" charset="-120"/>
-              </a:rPr>
-              <a:t>狀態</a:t>
-            </a:r>
-          </a:p>
-        </p:txBody>
-      </p:sp>
-      <p:sp>
-        <p:nvSpPr>
-          <p:cNvPr id="14" name="橢圓 13">
-            <a:extLst>
-              <a:ext uri="{FF2B5EF4-FFF2-40B4-BE49-F238E27FC236}">
-                <a16:creationId xmlns:a16="http://schemas.microsoft.com/office/drawing/2014/main" id="{6F1FBEB0-2E02-445D-899B-763581FD5A81}"/>
-              </a:ext>
-            </a:extLst>
-          </p:cNvPr>
-          <p:cNvSpPr/>
-          <p:nvPr/>
-        </p:nvSpPr>
-        <p:spPr>
-          <a:xfrm>
-            <a:off x="1468562" y="1812153"/>
-            <a:ext cx="1230942" cy="552543"/>
-          </a:xfrm>
-          <a:prstGeom prst="ellipse">
-            <a:avLst/>
-          </a:prstGeom>
-          <a:noFill/>
-          <a:ln w="38100">
-            <a:solidFill>
-              <a:srgbClr val="2F528F"/>
-            </a:solidFill>
-          </a:ln>
-        </p:spPr>
-        <p:style>
-          <a:lnRef idx="2">
-            <a:schemeClr val="accent1">
-              <a:shade val="50000"/>
-            </a:schemeClr>
-          </a:lnRef>
-          <a:fillRef idx="1">
-            <a:schemeClr val="accent1"/>
-          </a:fillRef>
-          <a:effectRef idx="0">
-            <a:schemeClr val="accent1"/>
-          </a:effectRef>
-          <a:fontRef idx="minor">
-            <a:schemeClr val="lt1"/>
-          </a:fontRef>
-        </p:style>
-        <p:txBody>
-          <a:bodyPr rtlCol="0" anchor="ctr"/>
-          <a:lstStyle/>
-          <a:p>
-            <a:pPr algn="ctr"/>
-            <a:r>
-              <a:rPr lang="zh-TW" altLang="en-US" dirty="0">
+              </a:endParaRPr>
+            </a:p>
+          </p:txBody>
+        </p:sp>
+        <p:sp>
+          <p:nvSpPr>
+            <p:cNvPr id="70" name="文字方塊 69">
+              <a:extLst>
+                <a:ext uri="{FF2B5EF4-FFF2-40B4-BE49-F238E27FC236}">
+                  <a16:creationId xmlns:a16="http://schemas.microsoft.com/office/drawing/2014/main" id="{3130797A-65BF-CECE-508E-76E77ADB1CA0}"/>
+                </a:ext>
+              </a:extLst>
+            </p:cNvPr>
+            <p:cNvSpPr txBox="1"/>
+            <p:nvPr/>
+          </p:nvSpPr>
+          <p:spPr>
+            <a:xfrm>
+              <a:off x="8199767" y="5259339"/>
+              <a:ext cx="308098" cy="369332"/>
+            </a:xfrm>
+            <a:prstGeom prst="rect">
+              <a:avLst/>
+            </a:prstGeom>
+            <a:noFill/>
+          </p:spPr>
+          <p:txBody>
+            <a:bodyPr wrap="none" rtlCol="0">
+              <a:spAutoFit/>
+            </a:bodyPr>
+            <a:lstStyle/>
+            <a:p>
+              <a:r>
+                <a:rPr lang="en-US" altLang="zh-TW" b="1" dirty="0">
+                  <a:solidFill>
+                    <a:srgbClr val="ED7D31"/>
+                  </a:solidFill>
+                </a:rPr>
+                <a:t>n</a:t>
+              </a:r>
+              <a:endParaRPr lang="zh-TW" altLang="en-US" b="1" dirty="0">
                 <a:solidFill>
-                  <a:sysClr val="windowText" lastClr="000000"/>
+                  <a:srgbClr val="ED7D31"/>
                 </a:solidFill>
-                <a:latin typeface="微軟正黑體" panose="020B0604030504040204" pitchFamily="34" charset="-120"/>
-                <a:ea typeface="微軟正黑體" panose="020B0604030504040204" pitchFamily="34" charset="-120"/>
-              </a:rPr>
-              <a:t>類別</a:t>
-            </a:r>
-          </a:p>
-        </p:txBody>
-      </p:sp>
-      <p:sp>
-        <p:nvSpPr>
-          <p:cNvPr id="15" name="橢圓 14">
-            <a:extLst>
-              <a:ext uri="{FF2B5EF4-FFF2-40B4-BE49-F238E27FC236}">
-                <a16:creationId xmlns:a16="http://schemas.microsoft.com/office/drawing/2014/main" id="{904EE205-B037-44B5-A64A-7F12D5398B76}"/>
-              </a:ext>
-            </a:extLst>
-          </p:cNvPr>
-          <p:cNvSpPr/>
-          <p:nvPr/>
-        </p:nvSpPr>
-        <p:spPr>
-          <a:xfrm>
-            <a:off x="2357704" y="4254848"/>
-            <a:ext cx="1230942" cy="552543"/>
-          </a:xfrm>
-          <a:prstGeom prst="ellipse">
-            <a:avLst/>
-          </a:prstGeom>
-          <a:noFill/>
-          <a:ln w="38100">
-            <a:solidFill>
-              <a:srgbClr val="2F528F"/>
-            </a:solidFill>
-          </a:ln>
-        </p:spPr>
-        <p:style>
-          <a:lnRef idx="2">
-            <a:schemeClr val="accent1">
-              <a:shade val="50000"/>
-            </a:schemeClr>
-          </a:lnRef>
-          <a:fillRef idx="1">
-            <a:schemeClr val="accent1"/>
-          </a:fillRef>
-          <a:effectRef idx="0">
-            <a:schemeClr val="accent1"/>
-          </a:effectRef>
-          <a:fontRef idx="minor">
-            <a:schemeClr val="lt1"/>
-          </a:fontRef>
-        </p:style>
-        <p:txBody>
-          <a:bodyPr rtlCol="0" anchor="ctr"/>
-          <a:lstStyle/>
-          <a:p>
-            <a:pPr algn="ctr"/>
-            <a:r>
-              <a:rPr lang="zh-TW" altLang="en-US" dirty="0">
+              </a:endParaRPr>
+            </a:p>
+          </p:txBody>
+        </p:sp>
+        <p:sp>
+          <p:nvSpPr>
+            <p:cNvPr id="72" name="文字方塊 71">
+              <a:extLst>
+                <a:ext uri="{FF2B5EF4-FFF2-40B4-BE49-F238E27FC236}">
+                  <a16:creationId xmlns:a16="http://schemas.microsoft.com/office/drawing/2014/main" id="{9DBBFDB9-3773-CC73-59AE-1218B6AFD16C}"/>
+                </a:ext>
+              </a:extLst>
+            </p:cNvPr>
+            <p:cNvSpPr txBox="1"/>
+            <p:nvPr/>
+          </p:nvSpPr>
+          <p:spPr>
+            <a:xfrm>
+              <a:off x="5509668" y="2940331"/>
+              <a:ext cx="308098" cy="369332"/>
+            </a:xfrm>
+            <a:prstGeom prst="rect">
+              <a:avLst/>
+            </a:prstGeom>
+            <a:noFill/>
+          </p:spPr>
+          <p:txBody>
+            <a:bodyPr wrap="none" rtlCol="0">
+              <a:spAutoFit/>
+            </a:bodyPr>
+            <a:lstStyle/>
+            <a:p>
+              <a:r>
+                <a:rPr lang="en-US" altLang="zh-TW" b="1" dirty="0">
+                  <a:solidFill>
+                    <a:srgbClr val="ED7D31"/>
+                  </a:solidFill>
+                </a:rPr>
+                <a:t>n</a:t>
+              </a:r>
+              <a:endParaRPr lang="zh-TW" altLang="en-US" b="1" dirty="0">
                 <a:solidFill>
-                  <a:sysClr val="windowText" lastClr="000000"/>
+                  <a:srgbClr val="ED7D31"/>
                 </a:solidFill>
-                <a:latin typeface="微軟正黑體" panose="020B0604030504040204" pitchFamily="34" charset="-120"/>
-                <a:ea typeface="微軟正黑體" panose="020B0604030504040204" pitchFamily="34" charset="-120"/>
-              </a:rPr>
-              <a:t>簡介</a:t>
-            </a:r>
-          </a:p>
-        </p:txBody>
-      </p:sp>
-      <p:sp>
-        <p:nvSpPr>
-          <p:cNvPr id="17" name="橢圓 16">
-            <a:extLst>
-              <a:ext uri="{FF2B5EF4-FFF2-40B4-BE49-F238E27FC236}">
-                <a16:creationId xmlns:a16="http://schemas.microsoft.com/office/drawing/2014/main" id="{B6D631BD-55A0-4F2C-86C6-B99A6CBB8065}"/>
-              </a:ext>
-            </a:extLst>
-          </p:cNvPr>
-          <p:cNvSpPr/>
-          <p:nvPr/>
-        </p:nvSpPr>
-        <p:spPr>
-          <a:xfrm>
-            <a:off x="2194097" y="896207"/>
-            <a:ext cx="1230942" cy="552543"/>
-          </a:xfrm>
-          <a:prstGeom prst="ellipse">
-            <a:avLst/>
-          </a:prstGeom>
-          <a:noFill/>
-          <a:ln w="38100">
-            <a:solidFill>
-              <a:srgbClr val="2F528F"/>
-            </a:solidFill>
-          </a:ln>
-        </p:spPr>
-        <p:style>
-          <a:lnRef idx="2">
-            <a:schemeClr val="accent1">
-              <a:shade val="50000"/>
-            </a:schemeClr>
-          </a:lnRef>
-          <a:fillRef idx="1">
-            <a:schemeClr val="accent1"/>
-          </a:fillRef>
-          <a:effectRef idx="0">
-            <a:schemeClr val="accent1"/>
-          </a:effectRef>
-          <a:fontRef idx="minor">
-            <a:schemeClr val="lt1"/>
-          </a:fontRef>
-        </p:style>
-        <p:txBody>
-          <a:bodyPr rtlCol="0" anchor="ctr"/>
-          <a:lstStyle/>
-          <a:p>
-            <a:pPr algn="ctr"/>
-            <a:r>
-              <a:rPr lang="zh-TW" altLang="en-US" dirty="0">
+              </a:endParaRPr>
+            </a:p>
+          </p:txBody>
+        </p:sp>
+        <p:sp>
+          <p:nvSpPr>
+            <p:cNvPr id="73" name="文字方塊 72">
+              <a:extLst>
+                <a:ext uri="{FF2B5EF4-FFF2-40B4-BE49-F238E27FC236}">
+                  <a16:creationId xmlns:a16="http://schemas.microsoft.com/office/drawing/2014/main" id="{A5B7503C-D851-16E2-52DC-F7AE073D0C64}"/>
+                </a:ext>
+              </a:extLst>
+            </p:cNvPr>
+            <p:cNvSpPr txBox="1"/>
+            <p:nvPr/>
+          </p:nvSpPr>
+          <p:spPr>
+            <a:xfrm>
+              <a:off x="9221776" y="3810471"/>
+              <a:ext cx="372218" cy="369332"/>
+            </a:xfrm>
+            <a:prstGeom prst="rect">
+              <a:avLst/>
+            </a:prstGeom>
+            <a:noFill/>
+          </p:spPr>
+          <p:txBody>
+            <a:bodyPr wrap="none" rtlCol="0">
+              <a:spAutoFit/>
+            </a:bodyPr>
+            <a:lstStyle/>
+            <a:p>
+              <a:r>
+                <a:rPr lang="en-US" altLang="zh-TW" b="1" dirty="0">
+                  <a:solidFill>
+                    <a:srgbClr val="ED7D31"/>
+                  </a:solidFill>
+                </a:rPr>
+                <a:t>m</a:t>
+              </a:r>
+              <a:endParaRPr lang="zh-TW" altLang="en-US" b="1" dirty="0">
                 <a:solidFill>
-                  <a:sysClr val="windowText" lastClr="000000"/>
+                  <a:srgbClr val="ED7D31"/>
                 </a:solidFill>
-                <a:latin typeface="微軟正黑體" panose="020B0604030504040204" pitchFamily="34" charset="-120"/>
-                <a:ea typeface="微軟正黑體" panose="020B0604030504040204" pitchFamily="34" charset="-120"/>
-              </a:rPr>
-              <a:t>書名</a:t>
-            </a:r>
-          </a:p>
-        </p:txBody>
-      </p:sp>
-      <p:sp>
-        <p:nvSpPr>
-          <p:cNvPr id="18" name="橢圓 17">
-            <a:extLst>
-              <a:ext uri="{FF2B5EF4-FFF2-40B4-BE49-F238E27FC236}">
-                <a16:creationId xmlns:a16="http://schemas.microsoft.com/office/drawing/2014/main" id="{BC76BE46-86FF-4B5A-968F-C55EC2FA534B}"/>
-              </a:ext>
-            </a:extLst>
-          </p:cNvPr>
-          <p:cNvSpPr/>
-          <p:nvPr/>
-        </p:nvSpPr>
-        <p:spPr>
-          <a:xfrm>
-            <a:off x="1188418" y="2551978"/>
-            <a:ext cx="1230942" cy="552543"/>
-          </a:xfrm>
-          <a:prstGeom prst="ellipse">
-            <a:avLst/>
-          </a:prstGeom>
-          <a:noFill/>
-          <a:ln w="38100">
-            <a:solidFill>
-              <a:srgbClr val="2F528F"/>
-            </a:solidFill>
-          </a:ln>
-        </p:spPr>
-        <p:style>
-          <a:lnRef idx="2">
-            <a:schemeClr val="accent1">
-              <a:shade val="50000"/>
-            </a:schemeClr>
-          </a:lnRef>
-          <a:fillRef idx="1">
-            <a:schemeClr val="accent1"/>
-          </a:fillRef>
-          <a:effectRef idx="0">
-            <a:schemeClr val="accent1"/>
-          </a:effectRef>
-          <a:fontRef idx="minor">
-            <a:schemeClr val="lt1"/>
-          </a:fontRef>
-        </p:style>
-        <p:txBody>
-          <a:bodyPr rtlCol="0" anchor="ctr"/>
-          <a:lstStyle/>
-          <a:p>
-            <a:pPr algn="ctr"/>
-            <a:r>
-              <a:rPr lang="zh-TW" altLang="en-US" dirty="0">
-                <a:solidFill>
-                  <a:sysClr val="windowText" lastClr="000000"/>
-                </a:solidFill>
-                <a:latin typeface="微軟正黑體" panose="020B0604030504040204" pitchFamily="34" charset="-120"/>
-                <a:ea typeface="微軟正黑體" panose="020B0604030504040204" pitchFamily="34" charset="-120"/>
-              </a:rPr>
-              <a:t>愛心數</a:t>
-            </a:r>
-          </a:p>
-        </p:txBody>
-      </p:sp>
-      <p:sp>
-        <p:nvSpPr>
-          <p:cNvPr id="19" name="橢圓 18">
-            <a:extLst>
-              <a:ext uri="{FF2B5EF4-FFF2-40B4-BE49-F238E27FC236}">
-                <a16:creationId xmlns:a16="http://schemas.microsoft.com/office/drawing/2014/main" id="{B4EC46C7-04E8-4310-8736-49F1B6908626}"/>
-              </a:ext>
-            </a:extLst>
-          </p:cNvPr>
-          <p:cNvSpPr/>
-          <p:nvPr/>
-        </p:nvSpPr>
-        <p:spPr>
-          <a:xfrm>
-            <a:off x="3949381" y="349447"/>
-            <a:ext cx="1573035" cy="552543"/>
-          </a:xfrm>
-          <a:prstGeom prst="ellipse">
-            <a:avLst/>
-          </a:prstGeom>
-          <a:ln w="38100"/>
-        </p:spPr>
-        <p:style>
-          <a:lnRef idx="2">
-            <a:schemeClr val="accent2"/>
-          </a:lnRef>
-          <a:fillRef idx="1">
-            <a:schemeClr val="lt1"/>
-          </a:fillRef>
-          <a:effectRef idx="0">
-            <a:schemeClr val="accent2"/>
-          </a:effectRef>
-          <a:fontRef idx="minor">
-            <a:schemeClr val="dk1"/>
-          </a:fontRef>
-        </p:style>
-        <p:txBody>
-          <a:bodyPr rtlCol="0" anchor="ctr"/>
-          <a:lstStyle/>
-          <a:p>
-            <a:pPr algn="ctr"/>
-            <a:r>
-              <a:rPr lang="zh-TW" altLang="en-US" dirty="0">
-                <a:solidFill>
-                  <a:sysClr val="windowText" lastClr="000000"/>
-                </a:solidFill>
-                <a:latin typeface="微軟正黑體" panose="020B0604030504040204" pitchFamily="34" charset="-120"/>
-                <a:ea typeface="微軟正黑體" panose="020B0604030504040204" pitchFamily="34" charset="-120"/>
-              </a:rPr>
-              <a:t>歷史紀錄</a:t>
-            </a:r>
-          </a:p>
-        </p:txBody>
-      </p:sp>
-      <p:sp>
-        <p:nvSpPr>
-          <p:cNvPr id="20" name="橢圓 19">
-            <a:extLst>
-              <a:ext uri="{FF2B5EF4-FFF2-40B4-BE49-F238E27FC236}">
-                <a16:creationId xmlns:a16="http://schemas.microsoft.com/office/drawing/2014/main" id="{8581CC69-98F4-46B0-AE91-8CA44F3236EF}"/>
-              </a:ext>
-            </a:extLst>
-          </p:cNvPr>
-          <p:cNvSpPr/>
-          <p:nvPr/>
-        </p:nvSpPr>
-        <p:spPr>
-          <a:xfrm>
-            <a:off x="512267" y="4226213"/>
-            <a:ext cx="1230942" cy="552543"/>
-          </a:xfrm>
-          <a:prstGeom prst="ellipse">
-            <a:avLst/>
-          </a:prstGeom>
-          <a:noFill/>
-          <a:ln w="38100">
-            <a:solidFill>
-              <a:srgbClr val="2F528F"/>
-            </a:solidFill>
-          </a:ln>
-        </p:spPr>
-        <p:style>
-          <a:lnRef idx="2">
-            <a:schemeClr val="accent1">
-              <a:shade val="50000"/>
-            </a:schemeClr>
-          </a:lnRef>
-          <a:fillRef idx="1">
-            <a:schemeClr val="accent1"/>
-          </a:fillRef>
-          <a:effectRef idx="0">
-            <a:schemeClr val="accent1"/>
-          </a:effectRef>
-          <a:fontRef idx="minor">
-            <a:schemeClr val="lt1"/>
-          </a:fontRef>
-        </p:style>
-        <p:txBody>
-          <a:bodyPr rtlCol="0" anchor="ctr"/>
-          <a:lstStyle/>
-          <a:p>
-            <a:pPr algn="ctr"/>
-            <a:r>
-              <a:rPr lang="zh-TW" altLang="en-US" dirty="0">
-                <a:solidFill>
-                  <a:sysClr val="windowText" lastClr="000000"/>
-                </a:solidFill>
-                <a:latin typeface="微軟正黑體" panose="020B0604030504040204" pitchFamily="34" charset="-120"/>
-                <a:ea typeface="微軟正黑體" panose="020B0604030504040204" pitchFamily="34" charset="-120"/>
-              </a:rPr>
-              <a:t>連結</a:t>
-            </a:r>
-          </a:p>
-        </p:txBody>
-      </p:sp>
-      <p:sp>
-        <p:nvSpPr>
-          <p:cNvPr id="21" name="橢圓 20">
-            <a:extLst>
-              <a:ext uri="{FF2B5EF4-FFF2-40B4-BE49-F238E27FC236}">
-                <a16:creationId xmlns:a16="http://schemas.microsoft.com/office/drawing/2014/main" id="{9F875BE5-297C-4CC9-A47C-AE3019E5B3EF}"/>
-              </a:ext>
-            </a:extLst>
-          </p:cNvPr>
-          <p:cNvSpPr/>
-          <p:nvPr/>
-        </p:nvSpPr>
-        <p:spPr>
-          <a:xfrm>
-            <a:off x="2311247" y="5028635"/>
-            <a:ext cx="1230942" cy="552543"/>
-          </a:xfrm>
-          <a:prstGeom prst="ellipse">
-            <a:avLst/>
-          </a:prstGeom>
-          <a:noFill/>
-          <a:ln w="76200" cmpd="dbl">
-            <a:solidFill>
-              <a:srgbClr val="2F528F"/>
-            </a:solidFill>
-          </a:ln>
-        </p:spPr>
-        <p:style>
-          <a:lnRef idx="2">
-            <a:schemeClr val="accent1">
-              <a:shade val="50000"/>
-            </a:schemeClr>
-          </a:lnRef>
-          <a:fillRef idx="1">
-            <a:schemeClr val="accent1"/>
-          </a:fillRef>
-          <a:effectRef idx="0">
-            <a:schemeClr val="accent1"/>
-          </a:effectRef>
-          <a:fontRef idx="minor">
-            <a:schemeClr val="lt1"/>
-          </a:fontRef>
-        </p:style>
-        <p:txBody>
-          <a:bodyPr rtlCol="0" anchor="ctr"/>
-          <a:lstStyle/>
-          <a:p>
-            <a:pPr algn="ctr"/>
-            <a:r>
-              <a:rPr lang="en-US" altLang="zh-TW" dirty="0">
-                <a:solidFill>
-                  <a:sysClr val="windowText" lastClr="000000"/>
-                </a:solidFill>
-                <a:latin typeface="微軟正黑體" panose="020B0604030504040204" pitchFamily="34" charset="-120"/>
-                <a:ea typeface="微軟正黑體" panose="020B0604030504040204" pitchFamily="34" charset="-120"/>
-              </a:rPr>
-              <a:t>tag</a:t>
-            </a:r>
-            <a:endParaRPr lang="zh-TW" altLang="en-US" dirty="0">
-              <a:solidFill>
-                <a:sysClr val="windowText" lastClr="000000"/>
-              </a:solidFill>
-              <a:latin typeface="微軟正黑體" panose="020B0604030504040204" pitchFamily="34" charset="-120"/>
-              <a:ea typeface="微軟正黑體" panose="020B0604030504040204" pitchFamily="34" charset="-120"/>
-            </a:endParaRPr>
-          </a:p>
-        </p:txBody>
-      </p:sp>
-      <p:sp>
-        <p:nvSpPr>
-          <p:cNvPr id="22" name="橢圓 21">
-            <a:extLst>
-              <a:ext uri="{FF2B5EF4-FFF2-40B4-BE49-F238E27FC236}">
-                <a16:creationId xmlns:a16="http://schemas.microsoft.com/office/drawing/2014/main" id="{87A2ED50-B606-411A-8EF1-85E6A3BF2C94}"/>
-              </a:ext>
-            </a:extLst>
-          </p:cNvPr>
-          <p:cNvSpPr/>
-          <p:nvPr/>
-        </p:nvSpPr>
-        <p:spPr>
-          <a:xfrm>
-            <a:off x="481951" y="5686783"/>
-            <a:ext cx="1829833" cy="552543"/>
-          </a:xfrm>
-          <a:prstGeom prst="ellipse">
-            <a:avLst/>
-          </a:prstGeom>
-          <a:noFill/>
-          <a:ln w="38100" cmpd="sng">
-            <a:solidFill>
-              <a:srgbClr val="4C77C4"/>
-            </a:solidFill>
-            <a:prstDash val="solid"/>
-          </a:ln>
-        </p:spPr>
-        <p:style>
-          <a:lnRef idx="2">
-            <a:schemeClr val="accent1">
-              <a:shade val="50000"/>
-            </a:schemeClr>
-          </a:lnRef>
-          <a:fillRef idx="1">
-            <a:schemeClr val="accent1"/>
-          </a:fillRef>
-          <a:effectRef idx="0">
-            <a:schemeClr val="accent1"/>
-          </a:effectRef>
-          <a:fontRef idx="minor">
-            <a:schemeClr val="lt1"/>
-          </a:fontRef>
-        </p:style>
-        <p:txBody>
-          <a:bodyPr rtlCol="0" anchor="ctr"/>
-          <a:lstStyle/>
-          <a:p>
-            <a:pPr algn="ctr"/>
-            <a:r>
-              <a:rPr lang="en-US" altLang="zh-TW" dirty="0">
-                <a:solidFill>
-                  <a:sysClr val="windowText" lastClr="000000"/>
-                </a:solidFill>
-                <a:latin typeface="微軟正黑體" panose="020B0604030504040204" pitchFamily="34" charset="-120"/>
-                <a:ea typeface="微軟正黑體" panose="020B0604030504040204" pitchFamily="34" charset="-120"/>
-              </a:rPr>
-              <a:t>tag</a:t>
-            </a:r>
-            <a:r>
-              <a:rPr lang="zh-TW" altLang="en-US" dirty="0">
-                <a:solidFill>
-                  <a:sysClr val="windowText" lastClr="000000"/>
-                </a:solidFill>
-                <a:latin typeface="微軟正黑體" panose="020B0604030504040204" pitchFamily="34" charset="-120"/>
-                <a:ea typeface="微軟正黑體" panose="020B0604030504040204" pitchFamily="34" charset="-120"/>
-              </a:rPr>
-              <a:t>正則化</a:t>
-            </a:r>
-          </a:p>
-        </p:txBody>
-      </p:sp>
-      <p:sp>
-        <p:nvSpPr>
-          <p:cNvPr id="23" name="橢圓 22">
-            <a:extLst>
-              <a:ext uri="{FF2B5EF4-FFF2-40B4-BE49-F238E27FC236}">
-                <a16:creationId xmlns:a16="http://schemas.microsoft.com/office/drawing/2014/main" id="{836AC00E-2EB8-4751-BEAF-3631D95C4980}"/>
-              </a:ext>
-            </a:extLst>
-          </p:cNvPr>
-          <p:cNvSpPr/>
-          <p:nvPr/>
-        </p:nvSpPr>
-        <p:spPr>
-          <a:xfrm>
-            <a:off x="6393965" y="5972930"/>
-            <a:ext cx="1230942" cy="552543"/>
-          </a:xfrm>
-          <a:prstGeom prst="ellipse">
-            <a:avLst/>
-          </a:prstGeom>
-          <a:noFill/>
-          <a:ln w="38100">
-            <a:solidFill>
-              <a:srgbClr val="00B050"/>
-            </a:solidFill>
-          </a:ln>
-        </p:spPr>
-        <p:style>
-          <a:lnRef idx="2">
-            <a:schemeClr val="accent1">
-              <a:shade val="50000"/>
-            </a:schemeClr>
-          </a:lnRef>
-          <a:fillRef idx="1">
-            <a:schemeClr val="accent1"/>
-          </a:fillRef>
-          <a:effectRef idx="0">
-            <a:schemeClr val="accent1"/>
-          </a:effectRef>
-          <a:fontRef idx="minor">
-            <a:schemeClr val="lt1"/>
-          </a:fontRef>
-        </p:style>
-        <p:txBody>
-          <a:bodyPr rtlCol="0" anchor="ctr"/>
-          <a:lstStyle/>
-          <a:p>
-            <a:pPr algn="ctr"/>
-            <a:r>
-              <a:rPr lang="zh-TW" altLang="en-US" dirty="0">
-                <a:solidFill>
-                  <a:sysClr val="windowText" lastClr="000000"/>
-                </a:solidFill>
-                <a:latin typeface="微軟正黑體" panose="020B0604030504040204" pitchFamily="34" charset="-120"/>
-                <a:ea typeface="微軟正黑體" panose="020B0604030504040204" pitchFamily="34" charset="-120"/>
-              </a:rPr>
-              <a:t>名字</a:t>
-            </a:r>
-          </a:p>
-        </p:txBody>
-      </p:sp>
-      <p:sp>
-        <p:nvSpPr>
-          <p:cNvPr id="24" name="橢圓 23">
-            <a:extLst>
-              <a:ext uri="{FF2B5EF4-FFF2-40B4-BE49-F238E27FC236}">
-                <a16:creationId xmlns:a16="http://schemas.microsoft.com/office/drawing/2014/main" id="{65D9E7A0-44BE-4855-856A-E6D1E673553D}"/>
-              </a:ext>
-            </a:extLst>
-          </p:cNvPr>
-          <p:cNvSpPr/>
-          <p:nvPr/>
-        </p:nvSpPr>
-        <p:spPr>
-          <a:xfrm>
-            <a:off x="4141617" y="5956010"/>
-            <a:ext cx="1911574" cy="552543"/>
-          </a:xfrm>
-          <a:prstGeom prst="ellipse">
-            <a:avLst/>
-          </a:prstGeom>
-          <a:noFill/>
-          <a:ln w="38100">
-            <a:solidFill>
-              <a:srgbClr val="00B050"/>
-            </a:solidFill>
-          </a:ln>
-        </p:spPr>
-        <p:style>
-          <a:lnRef idx="2">
-            <a:schemeClr val="accent1">
-              <a:shade val="50000"/>
-            </a:schemeClr>
-          </a:lnRef>
-          <a:fillRef idx="1">
-            <a:schemeClr val="accent1"/>
-          </a:fillRef>
-          <a:effectRef idx="0">
-            <a:schemeClr val="accent1"/>
-          </a:effectRef>
-          <a:fontRef idx="minor">
-            <a:schemeClr val="lt1"/>
-          </a:fontRef>
-        </p:style>
-        <p:txBody>
-          <a:bodyPr rtlCol="0" anchor="ctr"/>
-          <a:lstStyle/>
-          <a:p>
-            <a:pPr algn="ctr"/>
-            <a:r>
-              <a:rPr lang="zh-TW" altLang="en-US" u="sng" dirty="0">
-                <a:solidFill>
-                  <a:sysClr val="windowText" lastClr="000000"/>
-                </a:solidFill>
-                <a:latin typeface="微軟正黑體" panose="020B0604030504040204" pitchFamily="34" charset="-120"/>
-                <a:ea typeface="微軟正黑體" panose="020B0604030504040204" pitchFamily="34" charset="-120"/>
-              </a:rPr>
-              <a:t>出版社代號</a:t>
-            </a:r>
-          </a:p>
-        </p:txBody>
-      </p:sp>
-      <p:sp>
-        <p:nvSpPr>
-          <p:cNvPr id="25" name="橢圓 24">
-            <a:extLst>
-              <a:ext uri="{FF2B5EF4-FFF2-40B4-BE49-F238E27FC236}">
-                <a16:creationId xmlns:a16="http://schemas.microsoft.com/office/drawing/2014/main" id="{916C7219-7D59-477B-83BF-4AF8FC830BA8}"/>
-              </a:ext>
-            </a:extLst>
-          </p:cNvPr>
-          <p:cNvSpPr/>
-          <p:nvPr/>
-        </p:nvSpPr>
-        <p:spPr>
-          <a:xfrm>
-            <a:off x="10526992" y="3152728"/>
-            <a:ext cx="1230942" cy="552543"/>
-          </a:xfrm>
-          <a:prstGeom prst="ellipse">
-            <a:avLst/>
-          </a:prstGeom>
-          <a:noFill/>
-          <a:ln w="38100">
-            <a:solidFill>
-              <a:srgbClr val="7030A0"/>
-            </a:solidFill>
-          </a:ln>
-        </p:spPr>
-        <p:style>
-          <a:lnRef idx="2">
-            <a:schemeClr val="accent1">
-              <a:shade val="50000"/>
-            </a:schemeClr>
-          </a:lnRef>
-          <a:fillRef idx="1">
-            <a:schemeClr val="accent1"/>
-          </a:fillRef>
-          <a:effectRef idx="0">
-            <a:schemeClr val="accent1"/>
-          </a:effectRef>
-          <a:fontRef idx="minor">
-            <a:schemeClr val="lt1"/>
-          </a:fontRef>
-        </p:style>
-        <p:txBody>
-          <a:bodyPr rtlCol="0" anchor="ctr"/>
-          <a:lstStyle/>
-          <a:p>
-            <a:pPr algn="ctr"/>
-            <a:r>
-              <a:rPr lang="zh-TW" altLang="en-US" dirty="0">
-                <a:solidFill>
-                  <a:sysClr val="windowText" lastClr="000000"/>
-                </a:solidFill>
-                <a:latin typeface="微軟正黑體" panose="020B0604030504040204" pitchFamily="34" charset="-120"/>
-                <a:ea typeface="微軟正黑體" panose="020B0604030504040204" pitchFamily="34" charset="-120"/>
-              </a:rPr>
-              <a:t>姓名</a:t>
-            </a:r>
-          </a:p>
-        </p:txBody>
-      </p:sp>
-      <p:sp>
-        <p:nvSpPr>
-          <p:cNvPr id="26" name="橢圓 25">
-            <a:extLst>
-              <a:ext uri="{FF2B5EF4-FFF2-40B4-BE49-F238E27FC236}">
-                <a16:creationId xmlns:a16="http://schemas.microsoft.com/office/drawing/2014/main" id="{6DCCC405-FA22-4278-8938-CED02EE90AFB}"/>
-              </a:ext>
-            </a:extLst>
-          </p:cNvPr>
-          <p:cNvSpPr/>
-          <p:nvPr/>
-        </p:nvSpPr>
-        <p:spPr>
-          <a:xfrm>
-            <a:off x="10354523" y="2435373"/>
-            <a:ext cx="1573035" cy="552543"/>
-          </a:xfrm>
-          <a:prstGeom prst="ellipse">
-            <a:avLst/>
-          </a:prstGeom>
-          <a:ln w="38100">
-            <a:solidFill>
-              <a:srgbClr val="7030A0"/>
-            </a:solidFill>
-          </a:ln>
-        </p:spPr>
-        <p:style>
-          <a:lnRef idx="2">
-            <a:schemeClr val="accent2"/>
-          </a:lnRef>
-          <a:fillRef idx="1">
-            <a:schemeClr val="lt1"/>
-          </a:fillRef>
-          <a:effectRef idx="0">
-            <a:schemeClr val="accent2"/>
-          </a:effectRef>
-          <a:fontRef idx="minor">
-            <a:schemeClr val="dk1"/>
-          </a:fontRef>
-        </p:style>
-        <p:txBody>
-          <a:bodyPr rtlCol="0" anchor="ctr"/>
-          <a:lstStyle/>
-          <a:p>
-            <a:pPr algn="ctr"/>
-            <a:r>
-              <a:rPr lang="zh-TW" altLang="en-US" u="sng" dirty="0">
-                <a:solidFill>
-                  <a:sysClr val="windowText" lastClr="000000"/>
-                </a:solidFill>
-                <a:latin typeface="微軟正黑體" panose="020B0604030504040204" pitchFamily="34" charset="-120"/>
-                <a:ea typeface="微軟正黑體" panose="020B0604030504040204" pitchFamily="34" charset="-120"/>
-              </a:rPr>
-              <a:t>作者代號</a:t>
-            </a:r>
-          </a:p>
-        </p:txBody>
-      </p:sp>
-      <p:sp>
-        <p:nvSpPr>
-          <p:cNvPr id="27" name="橢圓 26">
-            <a:extLst>
-              <a:ext uri="{FF2B5EF4-FFF2-40B4-BE49-F238E27FC236}">
-                <a16:creationId xmlns:a16="http://schemas.microsoft.com/office/drawing/2014/main" id="{0252EBF0-7A2A-4EA1-9D7D-CA4E813F4901}"/>
-              </a:ext>
-            </a:extLst>
-          </p:cNvPr>
-          <p:cNvSpPr/>
-          <p:nvPr/>
-        </p:nvSpPr>
-        <p:spPr>
-          <a:xfrm>
-            <a:off x="8792414" y="655237"/>
-            <a:ext cx="1230942" cy="552543"/>
-          </a:xfrm>
-          <a:prstGeom prst="ellipse">
-            <a:avLst/>
-          </a:prstGeom>
-          <a:noFill/>
-          <a:ln w="38100">
-            <a:solidFill>
-              <a:srgbClr val="4D4D4D"/>
-            </a:solidFill>
-          </a:ln>
-        </p:spPr>
-        <p:style>
-          <a:lnRef idx="2">
-            <a:schemeClr val="accent1">
-              <a:shade val="50000"/>
-            </a:schemeClr>
-          </a:lnRef>
-          <a:fillRef idx="1">
-            <a:schemeClr val="accent1"/>
-          </a:fillRef>
-          <a:effectRef idx="0">
-            <a:schemeClr val="accent1"/>
-          </a:effectRef>
-          <a:fontRef idx="minor">
-            <a:schemeClr val="lt1"/>
-          </a:fontRef>
-        </p:style>
-        <p:txBody>
-          <a:bodyPr rtlCol="0" anchor="ctr"/>
-          <a:lstStyle/>
-          <a:p>
-            <a:pPr algn="ctr"/>
-            <a:r>
-              <a:rPr lang="zh-TW" altLang="en-US" u="sng" dirty="0">
-                <a:solidFill>
-                  <a:sysClr val="windowText" lastClr="000000"/>
-                </a:solidFill>
-                <a:latin typeface="微軟正黑體" panose="020B0604030504040204" pitchFamily="34" charset="-120"/>
-                <a:ea typeface="微軟正黑體" panose="020B0604030504040204" pitchFamily="34" charset="-120"/>
-              </a:rPr>
-              <a:t>帳號</a:t>
-            </a:r>
-          </a:p>
-        </p:txBody>
-      </p:sp>
-      <p:sp>
-        <p:nvSpPr>
-          <p:cNvPr id="28" name="橢圓 27">
-            <a:extLst>
-              <a:ext uri="{FF2B5EF4-FFF2-40B4-BE49-F238E27FC236}">
-                <a16:creationId xmlns:a16="http://schemas.microsoft.com/office/drawing/2014/main" id="{9DC33FA6-AABC-4C50-975A-D49FACBD2586}"/>
-              </a:ext>
-            </a:extLst>
-          </p:cNvPr>
-          <p:cNvSpPr/>
-          <p:nvPr/>
-        </p:nvSpPr>
-        <p:spPr>
-          <a:xfrm>
-            <a:off x="8792414" y="2018501"/>
-            <a:ext cx="1230942" cy="552543"/>
-          </a:xfrm>
-          <a:prstGeom prst="ellipse">
-            <a:avLst/>
-          </a:prstGeom>
-          <a:noFill/>
-          <a:ln w="38100">
-            <a:solidFill>
-              <a:srgbClr val="4D4D4D"/>
-            </a:solidFill>
-          </a:ln>
-        </p:spPr>
-        <p:style>
-          <a:lnRef idx="2">
-            <a:schemeClr val="accent1">
-              <a:shade val="50000"/>
-            </a:schemeClr>
-          </a:lnRef>
-          <a:fillRef idx="1">
-            <a:schemeClr val="accent1"/>
-          </a:fillRef>
-          <a:effectRef idx="0">
-            <a:schemeClr val="accent1"/>
-          </a:effectRef>
-          <a:fontRef idx="minor">
-            <a:schemeClr val="lt1"/>
-          </a:fontRef>
-        </p:style>
-        <p:txBody>
-          <a:bodyPr rtlCol="0" anchor="ctr"/>
-          <a:lstStyle/>
-          <a:p>
-            <a:pPr algn="ctr"/>
-            <a:r>
-              <a:rPr lang="zh-TW" altLang="en-US" dirty="0">
-                <a:solidFill>
-                  <a:sysClr val="windowText" lastClr="000000"/>
-                </a:solidFill>
-                <a:latin typeface="微軟正黑體" panose="020B0604030504040204" pitchFamily="34" charset="-120"/>
-                <a:ea typeface="微軟正黑體" panose="020B0604030504040204" pitchFamily="34" charset="-120"/>
-              </a:rPr>
-              <a:t>密碼</a:t>
-            </a:r>
-          </a:p>
-        </p:txBody>
-      </p:sp>
-      <p:sp>
-        <p:nvSpPr>
-          <p:cNvPr id="29" name="流程圖: 決策 28">
-            <a:extLst>
-              <a:ext uri="{FF2B5EF4-FFF2-40B4-BE49-F238E27FC236}">
-                <a16:creationId xmlns:a16="http://schemas.microsoft.com/office/drawing/2014/main" id="{DA503EA1-6026-4B2E-85E1-6A63A472D0B0}"/>
-              </a:ext>
-            </a:extLst>
-          </p:cNvPr>
-          <p:cNvSpPr/>
-          <p:nvPr/>
-        </p:nvSpPr>
-        <p:spPr>
-          <a:xfrm>
-            <a:off x="4665120" y="1414657"/>
-            <a:ext cx="1467087" cy="833652"/>
-          </a:xfrm>
-          <a:prstGeom prst="flowChartDecision">
-            <a:avLst/>
-          </a:prstGeom>
-          <a:ln w="38100"/>
-        </p:spPr>
-        <p:style>
-          <a:lnRef idx="2">
-            <a:schemeClr val="accent2"/>
-          </a:lnRef>
-          <a:fillRef idx="1">
-            <a:schemeClr val="lt1"/>
-          </a:fillRef>
-          <a:effectRef idx="0">
-            <a:schemeClr val="accent2"/>
-          </a:effectRef>
-          <a:fontRef idx="minor">
-            <a:schemeClr val="dk1"/>
-          </a:fontRef>
-        </p:style>
-        <p:txBody>
-          <a:bodyPr rtlCol="0" anchor="ctr"/>
-          <a:lstStyle/>
-          <a:p>
-            <a:pPr algn="ctr"/>
-            <a:r>
-              <a:rPr lang="zh-TW" altLang="en-US" dirty="0">
-                <a:solidFill>
-                  <a:sysClr val="windowText" lastClr="000000"/>
-                </a:solidFill>
-                <a:latin typeface="微軟正黑體" panose="020B0604030504040204" pitchFamily="34" charset="-120"/>
-                <a:ea typeface="微軟正黑體" panose="020B0604030504040204" pitchFamily="34" charset="-120"/>
-              </a:rPr>
-              <a:t>閱讀</a:t>
-            </a:r>
-          </a:p>
-        </p:txBody>
-      </p:sp>
-      <p:sp>
-        <p:nvSpPr>
-          <p:cNvPr id="30" name="流程圖: 決策 29">
-            <a:extLst>
-              <a:ext uri="{FF2B5EF4-FFF2-40B4-BE49-F238E27FC236}">
-                <a16:creationId xmlns:a16="http://schemas.microsoft.com/office/drawing/2014/main" id="{AA94ACB0-374A-428F-885A-54E11B5F9156}"/>
-              </a:ext>
-            </a:extLst>
-          </p:cNvPr>
-          <p:cNvSpPr/>
-          <p:nvPr/>
-        </p:nvSpPr>
-        <p:spPr>
-          <a:xfrm>
-            <a:off x="3933255" y="4382313"/>
-            <a:ext cx="1467087" cy="833652"/>
-          </a:xfrm>
-          <a:prstGeom prst="flowChartDecision">
-            <a:avLst/>
-          </a:prstGeom>
-          <a:ln w="38100">
-            <a:solidFill>
-              <a:srgbClr val="ED7D31"/>
-            </a:solidFill>
-          </a:ln>
-        </p:spPr>
-        <p:style>
-          <a:lnRef idx="2">
-            <a:schemeClr val="accent2"/>
-          </a:lnRef>
-          <a:fillRef idx="1">
-            <a:schemeClr val="lt1"/>
-          </a:fillRef>
-          <a:effectRef idx="0">
-            <a:schemeClr val="accent2"/>
-          </a:effectRef>
-          <a:fontRef idx="minor">
-            <a:schemeClr val="dk1"/>
-          </a:fontRef>
-        </p:style>
-        <p:txBody>
-          <a:bodyPr rtlCol="0" anchor="ctr"/>
-          <a:lstStyle/>
-          <a:p>
-            <a:pPr algn="ctr"/>
-            <a:r>
-              <a:rPr lang="zh-TW" altLang="en-US" dirty="0">
-                <a:solidFill>
-                  <a:sysClr val="windowText" lastClr="000000"/>
-                </a:solidFill>
-                <a:latin typeface="微軟正黑體" panose="020B0604030504040204" pitchFamily="34" charset="-120"/>
-                <a:ea typeface="微軟正黑體" panose="020B0604030504040204" pitchFamily="34" charset="-120"/>
-              </a:rPr>
-              <a:t>出版</a:t>
-            </a:r>
-          </a:p>
-        </p:txBody>
-      </p:sp>
-      <p:sp>
-        <p:nvSpPr>
-          <p:cNvPr id="31" name="流程圖: 決策 30">
-            <a:extLst>
-              <a:ext uri="{FF2B5EF4-FFF2-40B4-BE49-F238E27FC236}">
-                <a16:creationId xmlns:a16="http://schemas.microsoft.com/office/drawing/2014/main" id="{B1D1C64B-5E5F-4921-BB31-20BB12819721}"/>
-              </a:ext>
-            </a:extLst>
-          </p:cNvPr>
-          <p:cNvSpPr/>
-          <p:nvPr/>
-        </p:nvSpPr>
-        <p:spPr>
-          <a:xfrm>
-            <a:off x="6218698" y="2902802"/>
-            <a:ext cx="1467087" cy="833652"/>
-          </a:xfrm>
-          <a:prstGeom prst="flowChartDecision">
-            <a:avLst/>
-          </a:prstGeom>
-          <a:ln w="38100"/>
-        </p:spPr>
-        <p:style>
-          <a:lnRef idx="2">
-            <a:schemeClr val="accent2"/>
-          </a:lnRef>
-          <a:fillRef idx="1">
-            <a:schemeClr val="lt1"/>
-          </a:fillRef>
-          <a:effectRef idx="0">
-            <a:schemeClr val="accent2"/>
-          </a:effectRef>
-          <a:fontRef idx="minor">
-            <a:schemeClr val="dk1"/>
-          </a:fontRef>
-        </p:style>
-        <p:txBody>
-          <a:bodyPr rtlCol="0" anchor="ctr"/>
-          <a:lstStyle/>
-          <a:p>
-            <a:pPr algn="ctr"/>
-            <a:r>
-              <a:rPr lang="zh-TW" altLang="en-US" dirty="0">
-                <a:solidFill>
-                  <a:sysClr val="windowText" lastClr="000000"/>
-                </a:solidFill>
-                <a:latin typeface="微軟正黑體" panose="020B0604030504040204" pitchFamily="34" charset="-120"/>
-                <a:ea typeface="微軟正黑體" panose="020B0604030504040204" pitchFamily="34" charset="-120"/>
-              </a:rPr>
-              <a:t>撰寫</a:t>
-            </a:r>
-          </a:p>
-        </p:txBody>
-      </p:sp>
-      <p:sp>
-        <p:nvSpPr>
-          <p:cNvPr id="32" name="流程圖: 決策 31">
-            <a:extLst>
-              <a:ext uri="{FF2B5EF4-FFF2-40B4-BE49-F238E27FC236}">
-                <a16:creationId xmlns:a16="http://schemas.microsoft.com/office/drawing/2014/main" id="{F503F4C1-00BD-42DD-BB32-E8CE9F644772}"/>
-              </a:ext>
-            </a:extLst>
-          </p:cNvPr>
-          <p:cNvSpPr/>
-          <p:nvPr/>
-        </p:nvSpPr>
-        <p:spPr>
-          <a:xfrm>
-            <a:off x="8476721" y="4382313"/>
-            <a:ext cx="1467087" cy="833652"/>
-          </a:xfrm>
-          <a:prstGeom prst="flowChartDecision">
-            <a:avLst/>
-          </a:prstGeom>
-          <a:ln w="38100"/>
-        </p:spPr>
-        <p:style>
-          <a:lnRef idx="2">
-            <a:schemeClr val="accent2"/>
-          </a:lnRef>
-          <a:fillRef idx="1">
-            <a:schemeClr val="lt1"/>
-          </a:fillRef>
-          <a:effectRef idx="0">
-            <a:schemeClr val="accent2"/>
-          </a:effectRef>
-          <a:fontRef idx="minor">
-            <a:schemeClr val="dk1"/>
-          </a:fontRef>
-        </p:style>
-        <p:txBody>
-          <a:bodyPr rtlCol="0" anchor="ctr"/>
-          <a:lstStyle/>
-          <a:p>
-            <a:pPr algn="ctr"/>
-            <a:r>
-              <a:rPr lang="zh-TW" altLang="en-US" dirty="0">
-                <a:solidFill>
-                  <a:sysClr val="windowText" lastClr="000000"/>
-                </a:solidFill>
-                <a:latin typeface="微軟正黑體" panose="020B0604030504040204" pitchFamily="34" charset="-120"/>
-                <a:ea typeface="微軟正黑體" panose="020B0604030504040204" pitchFamily="34" charset="-120"/>
-              </a:rPr>
-              <a:t>簽約</a:t>
-            </a:r>
-          </a:p>
-        </p:txBody>
-      </p:sp>
-      <p:cxnSp>
-        <p:nvCxnSpPr>
-          <p:cNvPr id="34" name="直線接點 33">
-            <a:extLst>
-              <a:ext uri="{FF2B5EF4-FFF2-40B4-BE49-F238E27FC236}">
-                <a16:creationId xmlns:a16="http://schemas.microsoft.com/office/drawing/2014/main" id="{30A20B9D-06F8-486A-8C92-BB9D95FD9810}"/>
-              </a:ext>
-            </a:extLst>
-          </p:cNvPr>
-          <p:cNvCxnSpPr>
-            <a:cxnSpLocks/>
-            <a:stCxn id="12" idx="6"/>
-            <a:endCxn id="4" idx="1"/>
-          </p:cNvCxnSpPr>
-          <p:nvPr/>
-        </p:nvCxnSpPr>
-        <p:spPr>
-          <a:xfrm>
-            <a:off x="3425039" y="567133"/>
-            <a:ext cx="762283" cy="2752496"/>
-          </a:xfrm>
-          <a:prstGeom prst="line">
-            <a:avLst/>
-          </a:prstGeom>
-          <a:ln w="38100">
-            <a:solidFill>
-              <a:srgbClr val="2F528F"/>
-            </a:solidFill>
-          </a:ln>
-        </p:spPr>
-        <p:style>
-          <a:lnRef idx="1">
-            <a:schemeClr val="accent1"/>
-          </a:lnRef>
-          <a:fillRef idx="0">
-            <a:schemeClr val="accent1"/>
-          </a:fillRef>
-          <a:effectRef idx="0">
-            <a:schemeClr val="accent1"/>
-          </a:effectRef>
-          <a:fontRef idx="minor">
-            <a:schemeClr val="tx1"/>
-          </a:fontRef>
-        </p:style>
-      </p:cxnSp>
-      <p:cxnSp>
-        <p:nvCxnSpPr>
-          <p:cNvPr id="36" name="直線接點 35">
-            <a:extLst>
-              <a:ext uri="{FF2B5EF4-FFF2-40B4-BE49-F238E27FC236}">
-                <a16:creationId xmlns:a16="http://schemas.microsoft.com/office/drawing/2014/main" id="{6F6515FF-CABB-4B08-839F-08A4D41C304E}"/>
-              </a:ext>
-            </a:extLst>
-          </p:cNvPr>
-          <p:cNvCxnSpPr>
-            <a:cxnSpLocks/>
-            <a:stCxn id="17" idx="6"/>
-            <a:endCxn id="4" idx="1"/>
-          </p:cNvCxnSpPr>
-          <p:nvPr/>
-        </p:nvCxnSpPr>
-        <p:spPr>
-          <a:xfrm>
-            <a:off x="3425039" y="1172479"/>
-            <a:ext cx="762283" cy="2147150"/>
-          </a:xfrm>
-          <a:prstGeom prst="line">
-            <a:avLst/>
-          </a:prstGeom>
-          <a:ln w="38100">
-            <a:solidFill>
-              <a:srgbClr val="2F528F"/>
-            </a:solidFill>
-          </a:ln>
-        </p:spPr>
-        <p:style>
-          <a:lnRef idx="1">
-            <a:schemeClr val="accent1"/>
-          </a:lnRef>
-          <a:fillRef idx="0">
-            <a:schemeClr val="accent1"/>
-          </a:fillRef>
-          <a:effectRef idx="0">
-            <a:schemeClr val="accent1"/>
-          </a:effectRef>
-          <a:fontRef idx="minor">
-            <a:schemeClr val="tx1"/>
-          </a:fontRef>
-        </p:style>
-      </p:cxnSp>
-      <p:cxnSp>
-        <p:nvCxnSpPr>
-          <p:cNvPr id="42" name="直線接點 41">
-            <a:extLst>
-              <a:ext uri="{FF2B5EF4-FFF2-40B4-BE49-F238E27FC236}">
-                <a16:creationId xmlns:a16="http://schemas.microsoft.com/office/drawing/2014/main" id="{951EBB64-AFDA-41FF-8829-AD71D11B78DA}"/>
-              </a:ext>
-            </a:extLst>
-          </p:cNvPr>
-          <p:cNvCxnSpPr>
-            <a:cxnSpLocks/>
-            <a:stCxn id="14" idx="6"/>
-            <a:endCxn id="4" idx="1"/>
-          </p:cNvCxnSpPr>
-          <p:nvPr/>
-        </p:nvCxnSpPr>
-        <p:spPr>
-          <a:xfrm>
-            <a:off x="2699504" y="2088425"/>
-            <a:ext cx="1487818" cy="1231204"/>
-          </a:xfrm>
-          <a:prstGeom prst="line">
-            <a:avLst/>
-          </a:prstGeom>
-          <a:ln w="38100">
-            <a:solidFill>
-              <a:srgbClr val="2F528F"/>
-            </a:solidFill>
-          </a:ln>
-        </p:spPr>
-        <p:style>
-          <a:lnRef idx="1">
-            <a:schemeClr val="accent1"/>
-          </a:lnRef>
-          <a:fillRef idx="0">
-            <a:schemeClr val="accent1"/>
-          </a:fillRef>
-          <a:effectRef idx="0">
-            <a:schemeClr val="accent1"/>
-          </a:effectRef>
-          <a:fontRef idx="minor">
-            <a:schemeClr val="tx1"/>
-          </a:fontRef>
-        </p:style>
-      </p:cxnSp>
-      <p:cxnSp>
-        <p:nvCxnSpPr>
-          <p:cNvPr id="44" name="直線接點 43">
-            <a:extLst>
-              <a:ext uri="{FF2B5EF4-FFF2-40B4-BE49-F238E27FC236}">
-                <a16:creationId xmlns:a16="http://schemas.microsoft.com/office/drawing/2014/main" id="{1EC98F50-6EE5-4EB6-84FD-B4114B954638}"/>
-              </a:ext>
-            </a:extLst>
-          </p:cNvPr>
-          <p:cNvCxnSpPr>
-            <a:cxnSpLocks/>
-            <a:stCxn id="15" idx="6"/>
-            <a:endCxn id="4" idx="1"/>
-          </p:cNvCxnSpPr>
-          <p:nvPr/>
-        </p:nvCxnSpPr>
-        <p:spPr>
-          <a:xfrm flipV="1">
-            <a:off x="3588646" y="3319629"/>
-            <a:ext cx="598676" cy="1211491"/>
-          </a:xfrm>
-          <a:prstGeom prst="line">
-            <a:avLst/>
-          </a:prstGeom>
-          <a:ln w="38100">
-            <a:solidFill>
-              <a:srgbClr val="2F528F"/>
-            </a:solidFill>
-          </a:ln>
-        </p:spPr>
-        <p:style>
-          <a:lnRef idx="1">
-            <a:schemeClr val="accent1"/>
-          </a:lnRef>
-          <a:fillRef idx="0">
-            <a:schemeClr val="accent1"/>
-          </a:fillRef>
-          <a:effectRef idx="0">
-            <a:schemeClr val="accent1"/>
-          </a:effectRef>
-          <a:fontRef idx="minor">
-            <a:schemeClr val="tx1"/>
-          </a:fontRef>
-        </p:style>
-      </p:cxnSp>
-      <p:cxnSp>
-        <p:nvCxnSpPr>
-          <p:cNvPr id="46" name="直線接點 45">
-            <a:extLst>
-              <a:ext uri="{FF2B5EF4-FFF2-40B4-BE49-F238E27FC236}">
-                <a16:creationId xmlns:a16="http://schemas.microsoft.com/office/drawing/2014/main" id="{F78D6C6B-AC27-48A0-8770-68F9AAE5D9D8}"/>
-              </a:ext>
-            </a:extLst>
-          </p:cNvPr>
-          <p:cNvCxnSpPr>
-            <a:stCxn id="20" idx="6"/>
-            <a:endCxn id="4" idx="1"/>
-          </p:cNvCxnSpPr>
-          <p:nvPr/>
-        </p:nvCxnSpPr>
-        <p:spPr>
-          <a:xfrm flipV="1">
-            <a:off x="1743209" y="3319629"/>
-            <a:ext cx="2444113" cy="1182856"/>
-          </a:xfrm>
-          <a:prstGeom prst="line">
-            <a:avLst/>
-          </a:prstGeom>
-          <a:ln w="38100">
-            <a:solidFill>
-              <a:srgbClr val="2F528F"/>
-            </a:solidFill>
-          </a:ln>
-        </p:spPr>
-        <p:style>
-          <a:lnRef idx="1">
-            <a:schemeClr val="accent1"/>
-          </a:lnRef>
-          <a:fillRef idx="0">
-            <a:schemeClr val="accent1"/>
-          </a:fillRef>
-          <a:effectRef idx="0">
-            <a:schemeClr val="accent1"/>
-          </a:effectRef>
-          <a:fontRef idx="minor">
-            <a:schemeClr val="tx1"/>
-          </a:fontRef>
-        </p:style>
-      </p:cxnSp>
-      <p:cxnSp>
-        <p:nvCxnSpPr>
-          <p:cNvPr id="48" name="直線接點 47">
-            <a:extLst>
-              <a:ext uri="{FF2B5EF4-FFF2-40B4-BE49-F238E27FC236}">
-                <a16:creationId xmlns:a16="http://schemas.microsoft.com/office/drawing/2014/main" id="{B1C70860-DF32-490B-887C-45F51F6D8474}"/>
-              </a:ext>
-            </a:extLst>
-          </p:cNvPr>
-          <p:cNvCxnSpPr>
-            <a:cxnSpLocks/>
-            <a:stCxn id="13" idx="6"/>
-            <a:endCxn id="4" idx="1"/>
-          </p:cNvCxnSpPr>
-          <p:nvPr/>
-        </p:nvCxnSpPr>
-        <p:spPr>
-          <a:xfrm>
-            <a:off x="1495384" y="2319593"/>
-            <a:ext cx="2691938" cy="1000036"/>
-          </a:xfrm>
-          <a:prstGeom prst="line">
-            <a:avLst/>
-          </a:prstGeom>
-          <a:ln w="38100">
-            <a:solidFill>
-              <a:srgbClr val="2F528F"/>
-            </a:solidFill>
-          </a:ln>
-        </p:spPr>
-        <p:style>
-          <a:lnRef idx="1">
-            <a:schemeClr val="accent1"/>
-          </a:lnRef>
-          <a:fillRef idx="0">
-            <a:schemeClr val="accent1"/>
-          </a:fillRef>
-          <a:effectRef idx="0">
-            <a:schemeClr val="accent1"/>
-          </a:effectRef>
-          <a:fontRef idx="minor">
-            <a:schemeClr val="tx1"/>
-          </a:fontRef>
-        </p:style>
-      </p:cxnSp>
-      <p:cxnSp>
-        <p:nvCxnSpPr>
-          <p:cNvPr id="50" name="直線接點 49">
-            <a:extLst>
-              <a:ext uri="{FF2B5EF4-FFF2-40B4-BE49-F238E27FC236}">
-                <a16:creationId xmlns:a16="http://schemas.microsoft.com/office/drawing/2014/main" id="{B9F81377-F027-4094-AD5D-385BA2A4CDA0}"/>
-              </a:ext>
-            </a:extLst>
-          </p:cNvPr>
-          <p:cNvCxnSpPr>
-            <a:cxnSpLocks/>
-            <a:stCxn id="18" idx="6"/>
-            <a:endCxn id="4" idx="1"/>
-          </p:cNvCxnSpPr>
-          <p:nvPr/>
-        </p:nvCxnSpPr>
-        <p:spPr>
-          <a:xfrm>
-            <a:off x="2419360" y="2828250"/>
-            <a:ext cx="1767962" cy="491379"/>
-          </a:xfrm>
-          <a:prstGeom prst="line">
-            <a:avLst/>
-          </a:prstGeom>
-          <a:ln w="38100">
-            <a:solidFill>
-              <a:srgbClr val="2F528F"/>
-            </a:solidFill>
-          </a:ln>
-        </p:spPr>
-        <p:style>
-          <a:lnRef idx="1">
-            <a:schemeClr val="accent1"/>
-          </a:lnRef>
-          <a:fillRef idx="0">
-            <a:schemeClr val="accent1"/>
-          </a:fillRef>
-          <a:effectRef idx="0">
-            <a:schemeClr val="accent1"/>
-          </a:effectRef>
-          <a:fontRef idx="minor">
-            <a:schemeClr val="tx1"/>
-          </a:fontRef>
-        </p:style>
-      </p:cxnSp>
-      <p:cxnSp>
-        <p:nvCxnSpPr>
-          <p:cNvPr id="52" name="直線接點 51">
-            <a:extLst>
-              <a:ext uri="{FF2B5EF4-FFF2-40B4-BE49-F238E27FC236}">
-                <a16:creationId xmlns:a16="http://schemas.microsoft.com/office/drawing/2014/main" id="{C694CF34-7F3F-4BE0-990D-DCA7D695B5E1}"/>
-              </a:ext>
-            </a:extLst>
-          </p:cNvPr>
-          <p:cNvCxnSpPr>
-            <a:cxnSpLocks/>
-            <a:stCxn id="21" idx="6"/>
-            <a:endCxn id="4" idx="1"/>
-          </p:cNvCxnSpPr>
-          <p:nvPr/>
-        </p:nvCxnSpPr>
-        <p:spPr>
-          <a:xfrm flipV="1">
-            <a:off x="3542189" y="3319629"/>
-            <a:ext cx="645133" cy="1985278"/>
-          </a:xfrm>
-          <a:prstGeom prst="line">
-            <a:avLst/>
-          </a:prstGeom>
-          <a:ln w="38100">
-            <a:solidFill>
-              <a:srgbClr val="2F528F"/>
-            </a:solidFill>
-          </a:ln>
-        </p:spPr>
-        <p:style>
-          <a:lnRef idx="1">
-            <a:schemeClr val="accent1"/>
-          </a:lnRef>
-          <a:fillRef idx="0">
-            <a:schemeClr val="accent1"/>
-          </a:fillRef>
-          <a:effectRef idx="0">
-            <a:schemeClr val="accent1"/>
-          </a:effectRef>
-          <a:fontRef idx="minor">
-            <a:schemeClr val="tx1"/>
-          </a:fontRef>
-        </p:style>
-      </p:cxnSp>
-      <p:cxnSp>
-        <p:nvCxnSpPr>
-          <p:cNvPr id="91" name="直線接點 90">
-            <a:extLst>
-              <a:ext uri="{FF2B5EF4-FFF2-40B4-BE49-F238E27FC236}">
-                <a16:creationId xmlns:a16="http://schemas.microsoft.com/office/drawing/2014/main" id="{9CD793D7-F2E4-4D46-A236-BCA3175C9881}"/>
-              </a:ext>
-            </a:extLst>
-          </p:cNvPr>
-          <p:cNvCxnSpPr>
-            <a:cxnSpLocks/>
-            <a:stCxn id="21" idx="4"/>
-            <a:endCxn id="22" idx="6"/>
-          </p:cNvCxnSpPr>
-          <p:nvPr/>
-        </p:nvCxnSpPr>
-        <p:spPr>
-          <a:xfrm flipH="1">
-            <a:off x="2311784" y="5581178"/>
-            <a:ext cx="614934" cy="381877"/>
-          </a:xfrm>
-          <a:prstGeom prst="line">
-            <a:avLst/>
-          </a:prstGeom>
-          <a:ln w="38100">
-            <a:solidFill>
-              <a:srgbClr val="4C77C4"/>
-            </a:solidFill>
-          </a:ln>
-        </p:spPr>
-        <p:style>
-          <a:lnRef idx="1">
-            <a:schemeClr val="accent1"/>
-          </a:lnRef>
-          <a:fillRef idx="0">
-            <a:schemeClr val="accent1"/>
-          </a:fillRef>
-          <a:effectRef idx="0">
-            <a:schemeClr val="accent1"/>
-          </a:effectRef>
-          <a:fontRef idx="minor">
-            <a:schemeClr val="tx1"/>
-          </a:fontRef>
-        </p:style>
-      </p:cxnSp>
-      <p:cxnSp>
-        <p:nvCxnSpPr>
-          <p:cNvPr id="114" name="直線接點 113">
-            <a:extLst>
-              <a:ext uri="{FF2B5EF4-FFF2-40B4-BE49-F238E27FC236}">
-                <a16:creationId xmlns:a16="http://schemas.microsoft.com/office/drawing/2014/main" id="{D69700CE-C7D1-4D0C-88B5-81FB6269A630}"/>
-              </a:ext>
-            </a:extLst>
-          </p:cNvPr>
-          <p:cNvCxnSpPr>
-            <a:cxnSpLocks/>
-            <a:stCxn id="69" idx="2"/>
-            <a:endCxn id="24" idx="0"/>
-          </p:cNvCxnSpPr>
-          <p:nvPr/>
-        </p:nvCxnSpPr>
-        <p:spPr>
-          <a:xfrm flipH="1">
-            <a:off x="5097404" y="5507044"/>
-            <a:ext cx="1912032" cy="448966"/>
-          </a:xfrm>
-          <a:prstGeom prst="line">
-            <a:avLst/>
-          </a:prstGeom>
-          <a:ln w="38100">
-            <a:solidFill>
-              <a:srgbClr val="00B050"/>
-            </a:solidFill>
-          </a:ln>
-        </p:spPr>
-        <p:style>
-          <a:lnRef idx="1">
-            <a:schemeClr val="accent1"/>
-          </a:lnRef>
-          <a:fillRef idx="0">
-            <a:schemeClr val="accent1"/>
-          </a:fillRef>
-          <a:effectRef idx="0">
-            <a:schemeClr val="accent1"/>
-          </a:effectRef>
-          <a:fontRef idx="minor">
-            <a:schemeClr val="tx1"/>
-          </a:fontRef>
-        </p:style>
-      </p:cxnSp>
-      <p:cxnSp>
-        <p:nvCxnSpPr>
-          <p:cNvPr id="116" name="直線接點 115">
-            <a:extLst>
-              <a:ext uri="{FF2B5EF4-FFF2-40B4-BE49-F238E27FC236}">
-                <a16:creationId xmlns:a16="http://schemas.microsoft.com/office/drawing/2014/main" id="{B3AB68E6-CD60-44EC-AF71-684B072B1039}"/>
-              </a:ext>
-            </a:extLst>
-          </p:cNvPr>
-          <p:cNvCxnSpPr>
-            <a:cxnSpLocks/>
-            <a:stCxn id="69" idx="2"/>
-            <a:endCxn id="23" idx="0"/>
-          </p:cNvCxnSpPr>
-          <p:nvPr/>
-        </p:nvCxnSpPr>
-        <p:spPr>
-          <a:xfrm>
-            <a:off x="7009436" y="5507044"/>
-            <a:ext cx="0" cy="465886"/>
-          </a:xfrm>
-          <a:prstGeom prst="line">
-            <a:avLst/>
-          </a:prstGeom>
-          <a:ln w="38100">
-            <a:solidFill>
-              <a:srgbClr val="00B050"/>
-            </a:solidFill>
-          </a:ln>
-        </p:spPr>
-        <p:style>
-          <a:lnRef idx="1">
-            <a:schemeClr val="accent1"/>
-          </a:lnRef>
-          <a:fillRef idx="0">
-            <a:schemeClr val="accent1"/>
-          </a:fillRef>
-          <a:effectRef idx="0">
-            <a:schemeClr val="accent1"/>
-          </a:effectRef>
-          <a:fontRef idx="minor">
-            <a:schemeClr val="tx1"/>
-          </a:fontRef>
-        </p:style>
-      </p:cxnSp>
-      <p:cxnSp>
-        <p:nvCxnSpPr>
-          <p:cNvPr id="118" name="直線接點 117">
-            <a:extLst>
-              <a:ext uri="{FF2B5EF4-FFF2-40B4-BE49-F238E27FC236}">
-                <a16:creationId xmlns:a16="http://schemas.microsoft.com/office/drawing/2014/main" id="{1583C68D-36B7-47E3-B6FD-4A4F97FE514A}"/>
-              </a:ext>
-            </a:extLst>
-          </p:cNvPr>
-          <p:cNvCxnSpPr>
-            <a:stCxn id="7" idx="3"/>
-            <a:endCxn id="26" idx="2"/>
-          </p:cNvCxnSpPr>
-          <p:nvPr/>
-        </p:nvCxnSpPr>
-        <p:spPr>
-          <a:xfrm flipV="1">
-            <a:off x="9692189" y="2711645"/>
-            <a:ext cx="662334" cy="606981"/>
-          </a:xfrm>
-          <a:prstGeom prst="line">
-            <a:avLst/>
-          </a:prstGeom>
-          <a:ln w="38100">
-            <a:solidFill>
-              <a:srgbClr val="7030A0"/>
-            </a:solidFill>
-          </a:ln>
-        </p:spPr>
-        <p:style>
-          <a:lnRef idx="1">
-            <a:schemeClr val="accent1"/>
-          </a:lnRef>
-          <a:fillRef idx="0">
-            <a:schemeClr val="accent1"/>
-          </a:fillRef>
-          <a:effectRef idx="0">
-            <a:schemeClr val="accent1"/>
-          </a:effectRef>
-          <a:fontRef idx="minor">
-            <a:schemeClr val="tx1"/>
-          </a:fontRef>
-        </p:style>
-      </p:cxnSp>
-      <p:cxnSp>
-        <p:nvCxnSpPr>
-          <p:cNvPr id="120" name="直線接點 119">
-            <a:extLst>
-              <a:ext uri="{FF2B5EF4-FFF2-40B4-BE49-F238E27FC236}">
-                <a16:creationId xmlns:a16="http://schemas.microsoft.com/office/drawing/2014/main" id="{E0DF614A-B2DC-4E63-92C5-86FE75DCD949}"/>
-              </a:ext>
-            </a:extLst>
-          </p:cNvPr>
-          <p:cNvCxnSpPr>
-            <a:stCxn id="7" idx="3"/>
-            <a:endCxn id="25" idx="2"/>
-          </p:cNvCxnSpPr>
-          <p:nvPr/>
-        </p:nvCxnSpPr>
-        <p:spPr>
-          <a:xfrm>
-            <a:off x="9692189" y="3318626"/>
-            <a:ext cx="834803" cy="110374"/>
-          </a:xfrm>
-          <a:prstGeom prst="line">
-            <a:avLst/>
-          </a:prstGeom>
-          <a:ln w="38100">
-            <a:solidFill>
-              <a:srgbClr val="7030A0"/>
-            </a:solidFill>
-          </a:ln>
-        </p:spPr>
-        <p:style>
-          <a:lnRef idx="1">
-            <a:schemeClr val="accent1"/>
-          </a:lnRef>
-          <a:fillRef idx="0">
-            <a:schemeClr val="accent1"/>
-          </a:fillRef>
-          <a:effectRef idx="0">
-            <a:schemeClr val="accent1"/>
-          </a:effectRef>
-          <a:fontRef idx="minor">
-            <a:schemeClr val="tx1"/>
-          </a:fontRef>
-        </p:style>
-      </p:cxnSp>
-      <p:cxnSp>
-        <p:nvCxnSpPr>
-          <p:cNvPr id="122" name="直線接點 121">
-            <a:extLst>
-              <a:ext uri="{FF2B5EF4-FFF2-40B4-BE49-F238E27FC236}">
-                <a16:creationId xmlns:a16="http://schemas.microsoft.com/office/drawing/2014/main" id="{EA7F6708-0F86-4704-A171-6426D659B893}"/>
-              </a:ext>
-            </a:extLst>
-          </p:cNvPr>
-          <p:cNvCxnSpPr>
-            <a:stCxn id="8" idx="3"/>
-            <a:endCxn id="28" idx="2"/>
-          </p:cNvCxnSpPr>
-          <p:nvPr/>
-        </p:nvCxnSpPr>
-        <p:spPr>
-          <a:xfrm>
-            <a:off x="8203765" y="1827201"/>
-            <a:ext cx="588649" cy="467572"/>
-          </a:xfrm>
-          <a:prstGeom prst="line">
-            <a:avLst/>
-          </a:prstGeom>
-          <a:ln w="38100">
-            <a:solidFill>
-              <a:srgbClr val="4D4D4D"/>
-            </a:solidFill>
-          </a:ln>
-        </p:spPr>
-        <p:style>
-          <a:lnRef idx="1">
-            <a:schemeClr val="accent1"/>
-          </a:lnRef>
-          <a:fillRef idx="0">
-            <a:schemeClr val="accent1"/>
-          </a:fillRef>
-          <a:effectRef idx="0">
-            <a:schemeClr val="accent1"/>
-          </a:effectRef>
-          <a:fontRef idx="minor">
-            <a:schemeClr val="tx1"/>
-          </a:fontRef>
-        </p:style>
-      </p:cxnSp>
-      <p:cxnSp>
-        <p:nvCxnSpPr>
-          <p:cNvPr id="124" name="直線接點 123">
-            <a:extLst>
-              <a:ext uri="{FF2B5EF4-FFF2-40B4-BE49-F238E27FC236}">
-                <a16:creationId xmlns:a16="http://schemas.microsoft.com/office/drawing/2014/main" id="{1C677481-5AEA-430D-9A9F-E4FF83DC87EF}"/>
-              </a:ext>
-            </a:extLst>
-          </p:cNvPr>
-          <p:cNvCxnSpPr>
-            <a:stCxn id="8" idx="3"/>
-            <a:endCxn id="27" idx="2"/>
-          </p:cNvCxnSpPr>
-          <p:nvPr/>
-        </p:nvCxnSpPr>
-        <p:spPr>
-          <a:xfrm flipV="1">
-            <a:off x="8203765" y="931509"/>
-            <a:ext cx="588649" cy="895692"/>
-          </a:xfrm>
-          <a:prstGeom prst="line">
-            <a:avLst/>
-          </a:prstGeom>
-          <a:ln w="38100">
-            <a:solidFill>
-              <a:srgbClr val="4D4D4D"/>
-            </a:solidFill>
-          </a:ln>
-        </p:spPr>
-        <p:style>
-          <a:lnRef idx="1">
-            <a:schemeClr val="accent1"/>
-          </a:lnRef>
-          <a:fillRef idx="0">
-            <a:schemeClr val="accent1"/>
-          </a:fillRef>
-          <a:effectRef idx="0">
-            <a:schemeClr val="accent1"/>
-          </a:effectRef>
-          <a:fontRef idx="minor">
-            <a:schemeClr val="tx1"/>
-          </a:fontRef>
-        </p:style>
-      </p:cxnSp>
-      <p:cxnSp>
-        <p:nvCxnSpPr>
-          <p:cNvPr id="130" name="直線接點 129">
-            <a:extLst>
-              <a:ext uri="{FF2B5EF4-FFF2-40B4-BE49-F238E27FC236}">
-                <a16:creationId xmlns:a16="http://schemas.microsoft.com/office/drawing/2014/main" id="{229CE63F-CCAD-4E96-B326-D719E2AB69E2}"/>
-              </a:ext>
-            </a:extLst>
-          </p:cNvPr>
-          <p:cNvCxnSpPr>
-            <a:stCxn id="4" idx="2"/>
-            <a:endCxn id="30" idx="0"/>
-          </p:cNvCxnSpPr>
-          <p:nvPr/>
-        </p:nvCxnSpPr>
-        <p:spPr>
-          <a:xfrm flipH="1">
-            <a:off x="4666799" y="3608965"/>
-            <a:ext cx="2448" cy="773348"/>
-          </a:xfrm>
-          <a:prstGeom prst="line">
-            <a:avLst/>
-          </a:prstGeom>
-          <a:ln w="76200" cmpd="dbl">
-            <a:solidFill>
-              <a:srgbClr val="ED7D31"/>
-            </a:solidFill>
-          </a:ln>
-        </p:spPr>
-        <p:style>
-          <a:lnRef idx="1">
-            <a:schemeClr val="accent1"/>
-          </a:lnRef>
-          <a:fillRef idx="0">
-            <a:schemeClr val="accent1"/>
-          </a:fillRef>
-          <a:effectRef idx="0">
-            <a:schemeClr val="accent1"/>
-          </a:effectRef>
-          <a:fontRef idx="minor">
-            <a:schemeClr val="tx1"/>
-          </a:fontRef>
-        </p:style>
-      </p:cxnSp>
-      <p:cxnSp>
-        <p:nvCxnSpPr>
-          <p:cNvPr id="132" name="直線接點 131">
-            <a:extLst>
-              <a:ext uri="{FF2B5EF4-FFF2-40B4-BE49-F238E27FC236}">
-                <a16:creationId xmlns:a16="http://schemas.microsoft.com/office/drawing/2014/main" id="{A16D8E0F-6997-4B6A-8072-ED83CA663C6D}"/>
-              </a:ext>
-            </a:extLst>
-          </p:cNvPr>
-          <p:cNvCxnSpPr>
-            <a:cxnSpLocks/>
-            <a:stCxn id="30" idx="2"/>
-            <a:endCxn id="69" idx="1"/>
-          </p:cNvCxnSpPr>
-          <p:nvPr/>
-        </p:nvCxnSpPr>
-        <p:spPr>
-          <a:xfrm>
-            <a:off x="4666799" y="5215965"/>
-            <a:ext cx="1860712" cy="1743"/>
-          </a:xfrm>
-          <a:prstGeom prst="line">
-            <a:avLst/>
-          </a:prstGeom>
-          <a:ln w="76200" cmpd="dbl">
-            <a:solidFill>
-              <a:srgbClr val="ED7D31"/>
-            </a:solidFill>
-          </a:ln>
-        </p:spPr>
-        <p:style>
-          <a:lnRef idx="1">
-            <a:schemeClr val="accent1"/>
-          </a:lnRef>
-          <a:fillRef idx="0">
-            <a:schemeClr val="accent1"/>
-          </a:fillRef>
-          <a:effectRef idx="0">
-            <a:schemeClr val="accent1"/>
-          </a:effectRef>
-          <a:fontRef idx="minor">
-            <a:schemeClr val="tx1"/>
-          </a:fontRef>
-        </p:style>
-      </p:cxnSp>
-      <p:cxnSp>
-        <p:nvCxnSpPr>
-          <p:cNvPr id="134" name="直線接點 133">
-            <a:extLst>
-              <a:ext uri="{FF2B5EF4-FFF2-40B4-BE49-F238E27FC236}">
-                <a16:creationId xmlns:a16="http://schemas.microsoft.com/office/drawing/2014/main" id="{B771A834-D842-4990-843E-A0CFEB6A1311}"/>
-              </a:ext>
-            </a:extLst>
-          </p:cNvPr>
-          <p:cNvCxnSpPr>
-            <a:cxnSpLocks/>
-            <a:stCxn id="69" idx="3"/>
-            <a:endCxn id="32" idx="2"/>
-          </p:cNvCxnSpPr>
-          <p:nvPr/>
-        </p:nvCxnSpPr>
-        <p:spPr>
-          <a:xfrm flipV="1">
-            <a:off x="7491361" y="5215965"/>
-            <a:ext cx="1718904" cy="1743"/>
-          </a:xfrm>
-          <a:prstGeom prst="line">
-            <a:avLst/>
-          </a:prstGeom>
-          <a:ln w="76200" cmpd="dbl">
-            <a:solidFill>
-              <a:srgbClr val="ED7D31"/>
-            </a:solidFill>
-          </a:ln>
-        </p:spPr>
-        <p:style>
-          <a:lnRef idx="1">
-            <a:schemeClr val="accent1"/>
-          </a:lnRef>
-          <a:fillRef idx="0">
-            <a:schemeClr val="accent1"/>
-          </a:fillRef>
-          <a:effectRef idx="0">
-            <a:schemeClr val="accent1"/>
-          </a:effectRef>
-          <a:fontRef idx="minor">
-            <a:schemeClr val="tx1"/>
-          </a:fontRef>
-        </p:style>
-      </p:cxnSp>
-      <p:cxnSp>
-        <p:nvCxnSpPr>
-          <p:cNvPr id="136" name="直線接點 135">
-            <a:extLst>
-              <a:ext uri="{FF2B5EF4-FFF2-40B4-BE49-F238E27FC236}">
-                <a16:creationId xmlns:a16="http://schemas.microsoft.com/office/drawing/2014/main" id="{A91C540E-4196-4AC9-8D8D-188F8B6045E3}"/>
-              </a:ext>
-            </a:extLst>
-          </p:cNvPr>
-          <p:cNvCxnSpPr>
-            <a:stCxn id="32" idx="0"/>
-            <a:endCxn id="7" idx="2"/>
-          </p:cNvCxnSpPr>
-          <p:nvPr/>
-        </p:nvCxnSpPr>
-        <p:spPr>
-          <a:xfrm flipH="1" flipV="1">
-            <a:off x="9210264" y="3607962"/>
-            <a:ext cx="1" cy="774351"/>
-          </a:xfrm>
-          <a:prstGeom prst="line">
-            <a:avLst/>
-          </a:prstGeom>
-          <a:ln w="76200" cmpd="dbl">
-            <a:solidFill>
-              <a:srgbClr val="ED7D31"/>
-            </a:solidFill>
-          </a:ln>
-        </p:spPr>
-        <p:style>
-          <a:lnRef idx="1">
-            <a:schemeClr val="accent1"/>
-          </a:lnRef>
-          <a:fillRef idx="0">
-            <a:schemeClr val="accent1"/>
-          </a:fillRef>
-          <a:effectRef idx="0">
-            <a:schemeClr val="accent1"/>
-          </a:effectRef>
-          <a:fontRef idx="minor">
-            <a:schemeClr val="tx1"/>
-          </a:fontRef>
-        </p:style>
-      </p:cxnSp>
-      <p:cxnSp>
-        <p:nvCxnSpPr>
-          <p:cNvPr id="138" name="直線接點 137">
-            <a:extLst>
-              <a:ext uri="{FF2B5EF4-FFF2-40B4-BE49-F238E27FC236}">
-                <a16:creationId xmlns:a16="http://schemas.microsoft.com/office/drawing/2014/main" id="{4388DF5F-C414-4034-B9E4-4E5F1AE73A39}"/>
-              </a:ext>
-            </a:extLst>
-          </p:cNvPr>
-          <p:cNvCxnSpPr>
-            <a:stCxn id="31" idx="3"/>
-            <a:endCxn id="7" idx="1"/>
-          </p:cNvCxnSpPr>
-          <p:nvPr/>
-        </p:nvCxnSpPr>
-        <p:spPr>
-          <a:xfrm flipV="1">
-            <a:off x="7685785" y="3318626"/>
-            <a:ext cx="1042554" cy="1002"/>
-          </a:xfrm>
-          <a:prstGeom prst="line">
-            <a:avLst/>
-          </a:prstGeom>
-          <a:ln w="76200" cmpd="dbl">
-            <a:solidFill>
-              <a:srgbClr val="ED7D31"/>
-            </a:solidFill>
-          </a:ln>
-        </p:spPr>
-        <p:style>
-          <a:lnRef idx="1">
-            <a:schemeClr val="accent1"/>
-          </a:lnRef>
-          <a:fillRef idx="0">
-            <a:schemeClr val="accent1"/>
-          </a:fillRef>
-          <a:effectRef idx="0">
-            <a:schemeClr val="accent1"/>
-          </a:effectRef>
-          <a:fontRef idx="minor">
-            <a:schemeClr val="tx1"/>
-          </a:fontRef>
-        </p:style>
-      </p:cxnSp>
-      <p:cxnSp>
-        <p:nvCxnSpPr>
-          <p:cNvPr id="140" name="直線接點 139">
-            <a:extLst>
-              <a:ext uri="{FF2B5EF4-FFF2-40B4-BE49-F238E27FC236}">
-                <a16:creationId xmlns:a16="http://schemas.microsoft.com/office/drawing/2014/main" id="{D0689312-1238-4003-BB6F-AC7E75B8AD49}"/>
-              </a:ext>
-            </a:extLst>
-          </p:cNvPr>
-          <p:cNvCxnSpPr>
-            <a:stCxn id="4" idx="3"/>
-            <a:endCxn id="31" idx="1"/>
-          </p:cNvCxnSpPr>
-          <p:nvPr/>
-        </p:nvCxnSpPr>
-        <p:spPr>
-          <a:xfrm flipV="1">
-            <a:off x="5151172" y="3319628"/>
-            <a:ext cx="1067526" cy="1"/>
-          </a:xfrm>
-          <a:prstGeom prst="line">
-            <a:avLst/>
-          </a:prstGeom>
-          <a:ln w="76200" cmpd="dbl">
-            <a:solidFill>
-              <a:srgbClr val="ED7D31"/>
-            </a:solidFill>
-          </a:ln>
-        </p:spPr>
-        <p:style>
-          <a:lnRef idx="1">
-            <a:schemeClr val="accent1"/>
-          </a:lnRef>
-          <a:fillRef idx="0">
-            <a:schemeClr val="accent1"/>
-          </a:fillRef>
-          <a:effectRef idx="0">
-            <a:schemeClr val="accent1"/>
-          </a:effectRef>
-          <a:fontRef idx="minor">
-            <a:schemeClr val="tx1"/>
-          </a:fontRef>
-        </p:style>
-      </p:cxnSp>
-      <p:cxnSp>
-        <p:nvCxnSpPr>
-          <p:cNvPr id="142" name="直線接點 141">
-            <a:extLst>
-              <a:ext uri="{FF2B5EF4-FFF2-40B4-BE49-F238E27FC236}">
-                <a16:creationId xmlns:a16="http://schemas.microsoft.com/office/drawing/2014/main" id="{B86D59E7-50FD-40F7-8089-EBAB50160F7A}"/>
-              </a:ext>
-            </a:extLst>
-          </p:cNvPr>
-          <p:cNvCxnSpPr>
-            <a:stCxn id="29" idx="1"/>
-            <a:endCxn id="4" idx="0"/>
-          </p:cNvCxnSpPr>
-          <p:nvPr/>
-        </p:nvCxnSpPr>
-        <p:spPr>
-          <a:xfrm>
-            <a:off x="4665120" y="1831483"/>
-            <a:ext cx="4127" cy="1198809"/>
-          </a:xfrm>
-          <a:prstGeom prst="line">
-            <a:avLst/>
-          </a:prstGeom>
-          <a:ln w="38100">
-            <a:solidFill>
-              <a:srgbClr val="ED7D31"/>
-            </a:solidFill>
-          </a:ln>
-        </p:spPr>
-        <p:style>
-          <a:lnRef idx="1">
-            <a:schemeClr val="accent1"/>
-          </a:lnRef>
-          <a:fillRef idx="0">
-            <a:schemeClr val="accent1"/>
-          </a:fillRef>
-          <a:effectRef idx="0">
-            <a:schemeClr val="accent1"/>
-          </a:effectRef>
-          <a:fontRef idx="minor">
-            <a:schemeClr val="tx1"/>
-          </a:fontRef>
-        </p:style>
-      </p:cxnSp>
-      <p:cxnSp>
-        <p:nvCxnSpPr>
-          <p:cNvPr id="144" name="直線接點 143">
-            <a:extLst>
-              <a:ext uri="{FF2B5EF4-FFF2-40B4-BE49-F238E27FC236}">
-                <a16:creationId xmlns:a16="http://schemas.microsoft.com/office/drawing/2014/main" id="{66101CEC-8885-4D9C-B364-A9BFF68169CE}"/>
-              </a:ext>
-            </a:extLst>
-          </p:cNvPr>
-          <p:cNvCxnSpPr>
-            <a:stCxn id="29" idx="3"/>
-            <a:endCxn id="8" idx="1"/>
-          </p:cNvCxnSpPr>
-          <p:nvPr/>
-        </p:nvCxnSpPr>
-        <p:spPr>
-          <a:xfrm flipV="1">
-            <a:off x="6132207" y="1827201"/>
-            <a:ext cx="1107708" cy="4282"/>
-          </a:xfrm>
-          <a:prstGeom prst="line">
-            <a:avLst/>
-          </a:prstGeom>
-          <a:ln w="38100">
-            <a:solidFill>
-              <a:srgbClr val="ED7D31"/>
-            </a:solidFill>
-          </a:ln>
-        </p:spPr>
-        <p:style>
-          <a:lnRef idx="1">
-            <a:schemeClr val="accent1"/>
-          </a:lnRef>
-          <a:fillRef idx="0">
-            <a:schemeClr val="accent1"/>
-          </a:fillRef>
-          <a:effectRef idx="0">
-            <a:schemeClr val="accent1"/>
-          </a:effectRef>
-          <a:fontRef idx="minor">
-            <a:schemeClr val="tx1"/>
-          </a:fontRef>
-        </p:style>
-      </p:cxnSp>
-      <p:cxnSp>
-        <p:nvCxnSpPr>
-          <p:cNvPr id="146" name="直線接點 145">
-            <a:extLst>
-              <a:ext uri="{FF2B5EF4-FFF2-40B4-BE49-F238E27FC236}">
-                <a16:creationId xmlns:a16="http://schemas.microsoft.com/office/drawing/2014/main" id="{219D975D-4DDD-4F6D-9E89-DE35D4BF5166}"/>
-              </a:ext>
-            </a:extLst>
-          </p:cNvPr>
-          <p:cNvCxnSpPr>
-            <a:stCxn id="29" idx="0"/>
-            <a:endCxn id="19" idx="4"/>
-          </p:cNvCxnSpPr>
-          <p:nvPr/>
-        </p:nvCxnSpPr>
-        <p:spPr>
-          <a:xfrm flipH="1" flipV="1">
-            <a:off x="4735899" y="901990"/>
-            <a:ext cx="662765" cy="512667"/>
-          </a:xfrm>
-          <a:prstGeom prst="line">
-            <a:avLst/>
-          </a:prstGeom>
-          <a:ln w="38100">
-            <a:solidFill>
-              <a:srgbClr val="ED7D31"/>
-            </a:solidFill>
-          </a:ln>
-        </p:spPr>
-        <p:style>
-          <a:lnRef idx="1">
-            <a:schemeClr val="accent1"/>
-          </a:lnRef>
-          <a:fillRef idx="0">
-            <a:schemeClr val="accent1"/>
-          </a:fillRef>
-          <a:effectRef idx="0">
-            <a:schemeClr val="accent1"/>
-          </a:effectRef>
-          <a:fontRef idx="minor">
-            <a:schemeClr val="tx1"/>
-          </a:fontRef>
-        </p:style>
-      </p:cxnSp>
-      <p:cxnSp>
-        <p:nvCxnSpPr>
-          <p:cNvPr id="148" name="直線接點 147">
-            <a:extLst>
-              <a:ext uri="{FF2B5EF4-FFF2-40B4-BE49-F238E27FC236}">
-                <a16:creationId xmlns:a16="http://schemas.microsoft.com/office/drawing/2014/main" id="{5AA120E0-7D2C-46D9-A533-2E98BC07C6D9}"/>
-              </a:ext>
-            </a:extLst>
-          </p:cNvPr>
-          <p:cNvCxnSpPr>
-            <a:stCxn id="11" idx="4"/>
-            <a:endCxn id="29" idx="0"/>
-          </p:cNvCxnSpPr>
-          <p:nvPr/>
-        </p:nvCxnSpPr>
-        <p:spPr>
-          <a:xfrm flipH="1">
-            <a:off x="5398664" y="867338"/>
-            <a:ext cx="1179870" cy="547319"/>
-          </a:xfrm>
-          <a:prstGeom prst="line">
-            <a:avLst/>
-          </a:prstGeom>
-          <a:ln w="38100">
-            <a:solidFill>
-              <a:srgbClr val="ED7D31"/>
-            </a:solidFill>
-          </a:ln>
-        </p:spPr>
-        <p:style>
-          <a:lnRef idx="1">
-            <a:schemeClr val="accent1"/>
-          </a:lnRef>
-          <a:fillRef idx="0">
-            <a:schemeClr val="accent1"/>
-          </a:fillRef>
-          <a:effectRef idx="0">
-            <a:schemeClr val="accent1"/>
-          </a:effectRef>
-          <a:fontRef idx="minor">
-            <a:schemeClr val="tx1"/>
-          </a:fontRef>
-        </p:style>
-      </p:cxnSp>
-      <p:sp>
-        <p:nvSpPr>
-          <p:cNvPr id="69" name="矩形 68">
-            <a:extLst>
-              <a:ext uri="{FF2B5EF4-FFF2-40B4-BE49-F238E27FC236}">
-                <a16:creationId xmlns:a16="http://schemas.microsoft.com/office/drawing/2014/main" id="{AF074DE4-C9E2-4A29-A201-EA83108C0221}"/>
-              </a:ext>
-            </a:extLst>
-          </p:cNvPr>
-          <p:cNvSpPr/>
-          <p:nvPr/>
-        </p:nvSpPr>
-        <p:spPr>
-          <a:xfrm>
-            <a:off x="6527511" y="4928371"/>
-            <a:ext cx="963850" cy="578673"/>
-          </a:xfrm>
-          <a:prstGeom prst="rect">
-            <a:avLst/>
-          </a:prstGeom>
-          <a:noFill/>
-          <a:ln w="38100">
-            <a:solidFill>
-              <a:srgbClr val="00B050"/>
-            </a:solidFill>
-          </a:ln>
-        </p:spPr>
-        <p:style>
-          <a:lnRef idx="2">
-            <a:schemeClr val="accent1">
-              <a:shade val="50000"/>
-            </a:schemeClr>
-          </a:lnRef>
-          <a:fillRef idx="1">
-            <a:schemeClr val="accent1"/>
-          </a:fillRef>
-          <a:effectRef idx="0">
-            <a:schemeClr val="accent1"/>
-          </a:effectRef>
-          <a:fontRef idx="minor">
-            <a:schemeClr val="lt1"/>
-          </a:fontRef>
-        </p:style>
-        <p:txBody>
-          <a:bodyPr rtlCol="0" anchor="ctr"/>
-          <a:lstStyle/>
-          <a:p>
-            <a:pPr algn="ctr"/>
-            <a:r>
-              <a:rPr lang="zh-TW" altLang="en-US" dirty="0">
-                <a:solidFill>
-                  <a:sysClr val="windowText" lastClr="000000"/>
-                </a:solidFill>
-                <a:latin typeface="微軟正黑體" panose="020B0604030504040204" pitchFamily="34" charset="-120"/>
-                <a:ea typeface="微軟正黑體" panose="020B0604030504040204" pitchFamily="34" charset="-120"/>
-              </a:rPr>
-              <a:t>出版社</a:t>
-            </a:r>
-          </a:p>
-        </p:txBody>
-      </p:sp>
-      <p:sp>
-        <p:nvSpPr>
-          <p:cNvPr id="53" name="橢圓 52">
-            <a:extLst>
-              <a:ext uri="{FF2B5EF4-FFF2-40B4-BE49-F238E27FC236}">
-                <a16:creationId xmlns:a16="http://schemas.microsoft.com/office/drawing/2014/main" id="{4DFC75C5-AE34-4B0C-A5BA-88EDEE029858}"/>
-              </a:ext>
-            </a:extLst>
-          </p:cNvPr>
-          <p:cNvSpPr/>
-          <p:nvPr/>
-        </p:nvSpPr>
-        <p:spPr>
-          <a:xfrm>
-            <a:off x="1522901" y="3481060"/>
-            <a:ext cx="1230942" cy="552543"/>
-          </a:xfrm>
-          <a:prstGeom prst="ellipse">
-            <a:avLst/>
-          </a:prstGeom>
-          <a:noFill/>
-          <a:ln w="38100">
-            <a:solidFill>
-              <a:srgbClr val="2F528F"/>
-            </a:solidFill>
-          </a:ln>
-        </p:spPr>
-        <p:style>
-          <a:lnRef idx="2">
-            <a:schemeClr val="accent1">
-              <a:shade val="50000"/>
-            </a:schemeClr>
-          </a:lnRef>
-          <a:fillRef idx="1">
-            <a:schemeClr val="accent1"/>
-          </a:fillRef>
-          <a:effectRef idx="0">
-            <a:schemeClr val="accent1"/>
-          </a:effectRef>
-          <a:fontRef idx="minor">
-            <a:schemeClr val="lt1"/>
-          </a:fontRef>
-        </p:style>
-        <p:txBody>
-          <a:bodyPr rtlCol="0" anchor="ctr"/>
-          <a:lstStyle/>
-          <a:p>
-            <a:pPr algn="ctr"/>
-            <a:r>
-              <a:rPr lang="zh-TW" altLang="en-US" dirty="0">
-                <a:solidFill>
-                  <a:sysClr val="windowText" lastClr="000000"/>
-                </a:solidFill>
-                <a:latin typeface="微軟正黑體" panose="020B0604030504040204" pitchFamily="34" charset="-120"/>
-                <a:ea typeface="微軟正黑體" panose="020B0604030504040204" pitchFamily="34" charset="-120"/>
-              </a:rPr>
-              <a:t>授權</a:t>
-            </a:r>
-          </a:p>
-        </p:txBody>
-      </p:sp>
-      <p:cxnSp>
-        <p:nvCxnSpPr>
-          <p:cNvPr id="16" name="直線接點 15">
-            <a:extLst>
-              <a:ext uri="{FF2B5EF4-FFF2-40B4-BE49-F238E27FC236}">
-                <a16:creationId xmlns:a16="http://schemas.microsoft.com/office/drawing/2014/main" id="{6E92AF63-F176-4D6D-A764-41FCE76C92B6}"/>
-              </a:ext>
-            </a:extLst>
-          </p:cNvPr>
-          <p:cNvCxnSpPr>
-            <a:stCxn id="53" idx="6"/>
-            <a:endCxn id="4" idx="1"/>
-          </p:cNvCxnSpPr>
-          <p:nvPr/>
-        </p:nvCxnSpPr>
-        <p:spPr>
-          <a:xfrm flipV="1">
-            <a:off x="2753843" y="3319629"/>
-            <a:ext cx="1433479" cy="437703"/>
-          </a:xfrm>
-          <a:prstGeom prst="line">
-            <a:avLst/>
-          </a:prstGeom>
-          <a:ln w="38100">
-            <a:solidFill>
-              <a:srgbClr val="2F528F"/>
-            </a:solidFill>
-          </a:ln>
-        </p:spPr>
-        <p:style>
-          <a:lnRef idx="1">
-            <a:schemeClr val="accent1"/>
-          </a:lnRef>
-          <a:fillRef idx="0">
-            <a:schemeClr val="accent1"/>
-          </a:fillRef>
-          <a:effectRef idx="0">
-            <a:schemeClr val="accent1"/>
-          </a:effectRef>
-          <a:fontRef idx="minor">
-            <a:schemeClr val="tx1"/>
-          </a:fontRef>
-        </p:style>
-      </p:cxnSp>
-      <p:sp>
-        <p:nvSpPr>
-          <p:cNvPr id="2" name="橢圓 1">
-            <a:extLst>
-              <a:ext uri="{FF2B5EF4-FFF2-40B4-BE49-F238E27FC236}">
-                <a16:creationId xmlns:a16="http://schemas.microsoft.com/office/drawing/2014/main" id="{AB6085A2-3AA5-5D35-0587-A6CC01FEC25E}"/>
-              </a:ext>
-            </a:extLst>
-          </p:cNvPr>
-          <p:cNvSpPr/>
-          <p:nvPr/>
-        </p:nvSpPr>
-        <p:spPr>
-          <a:xfrm>
-            <a:off x="305855" y="3052214"/>
-            <a:ext cx="1230942" cy="552543"/>
-          </a:xfrm>
-          <a:prstGeom prst="ellipse">
-            <a:avLst/>
-          </a:prstGeom>
-          <a:noFill/>
-          <a:ln w="38100">
-            <a:solidFill>
-              <a:srgbClr val="2F528F"/>
-            </a:solidFill>
-          </a:ln>
-        </p:spPr>
-        <p:style>
-          <a:lnRef idx="2">
-            <a:schemeClr val="accent1">
-              <a:shade val="50000"/>
-            </a:schemeClr>
-          </a:lnRef>
-          <a:fillRef idx="1">
-            <a:schemeClr val="accent1"/>
-          </a:fillRef>
-          <a:effectRef idx="0">
-            <a:schemeClr val="accent1"/>
-          </a:effectRef>
-          <a:fontRef idx="minor">
-            <a:schemeClr val="lt1"/>
-          </a:fontRef>
-        </p:style>
-        <p:txBody>
-          <a:bodyPr rtlCol="0" anchor="ctr"/>
-          <a:lstStyle/>
-          <a:p>
-            <a:pPr algn="ctr"/>
-            <a:r>
-              <a:rPr lang="zh-TW" altLang="en-US" dirty="0">
-                <a:solidFill>
-                  <a:sysClr val="windowText" lastClr="000000"/>
-                </a:solidFill>
-                <a:latin typeface="微軟正黑體" panose="020B0604030504040204" pitchFamily="34" charset="-120"/>
-                <a:ea typeface="微軟正黑體" panose="020B0604030504040204" pitchFamily="34" charset="-120"/>
-              </a:rPr>
-              <a:t>出版社</a:t>
-            </a:r>
-          </a:p>
-        </p:txBody>
-      </p:sp>
-      <p:sp>
-        <p:nvSpPr>
-          <p:cNvPr id="3" name="橢圓 2">
-            <a:extLst>
-              <a:ext uri="{FF2B5EF4-FFF2-40B4-BE49-F238E27FC236}">
-                <a16:creationId xmlns:a16="http://schemas.microsoft.com/office/drawing/2014/main" id="{1383920A-A346-588B-C252-B4196F37C3A0}"/>
-              </a:ext>
-            </a:extLst>
-          </p:cNvPr>
-          <p:cNvSpPr/>
-          <p:nvPr/>
-        </p:nvSpPr>
-        <p:spPr>
-          <a:xfrm>
-            <a:off x="888617" y="1025777"/>
-            <a:ext cx="1230942" cy="552543"/>
-          </a:xfrm>
-          <a:prstGeom prst="ellipse">
-            <a:avLst/>
-          </a:prstGeom>
-          <a:noFill/>
-          <a:ln w="38100">
-            <a:solidFill>
-              <a:srgbClr val="2F528F"/>
-            </a:solidFill>
-          </a:ln>
-        </p:spPr>
-        <p:style>
-          <a:lnRef idx="2">
-            <a:schemeClr val="accent1">
-              <a:shade val="50000"/>
-            </a:schemeClr>
-          </a:lnRef>
-          <a:fillRef idx="1">
-            <a:schemeClr val="accent1"/>
-          </a:fillRef>
-          <a:effectRef idx="0">
-            <a:schemeClr val="accent1"/>
-          </a:effectRef>
-          <a:fontRef idx="minor">
-            <a:schemeClr val="lt1"/>
-          </a:fontRef>
-        </p:style>
-        <p:txBody>
-          <a:bodyPr rtlCol="0" anchor="ctr"/>
-          <a:lstStyle/>
-          <a:p>
-            <a:pPr algn="ctr"/>
-            <a:r>
-              <a:rPr lang="zh-TW" altLang="en-US" dirty="0">
-                <a:solidFill>
-                  <a:sysClr val="windowText" lastClr="000000"/>
-                </a:solidFill>
-                <a:latin typeface="微軟正黑體" panose="020B0604030504040204" pitchFamily="34" charset="-120"/>
-                <a:ea typeface="微軟正黑體" panose="020B0604030504040204" pitchFamily="34" charset="-120"/>
-              </a:rPr>
-              <a:t>作者</a:t>
-            </a:r>
-          </a:p>
-        </p:txBody>
-      </p:sp>
-      <p:cxnSp>
-        <p:nvCxnSpPr>
-          <p:cNvPr id="37" name="直線接點 36">
-            <a:extLst>
-              <a:ext uri="{FF2B5EF4-FFF2-40B4-BE49-F238E27FC236}">
-                <a16:creationId xmlns:a16="http://schemas.microsoft.com/office/drawing/2014/main" id="{7E8379BD-256B-30EE-BAF5-57832B5BC342}"/>
-              </a:ext>
-            </a:extLst>
-          </p:cNvPr>
-          <p:cNvCxnSpPr>
-            <a:stCxn id="3" idx="6"/>
-            <a:endCxn id="4" idx="1"/>
-          </p:cNvCxnSpPr>
-          <p:nvPr/>
-        </p:nvCxnSpPr>
-        <p:spPr>
-          <a:xfrm>
-            <a:off x="2119559" y="1302049"/>
-            <a:ext cx="2067763" cy="2017580"/>
-          </a:xfrm>
-          <a:prstGeom prst="line">
-            <a:avLst/>
-          </a:prstGeom>
-          <a:ln w="38100">
-            <a:solidFill>
-              <a:srgbClr val="2F528F"/>
-            </a:solidFill>
-          </a:ln>
-        </p:spPr>
-        <p:style>
-          <a:lnRef idx="1">
-            <a:schemeClr val="accent1"/>
-          </a:lnRef>
-          <a:fillRef idx="0">
-            <a:schemeClr val="accent1"/>
-          </a:fillRef>
-          <a:effectRef idx="0">
-            <a:schemeClr val="accent1"/>
-          </a:effectRef>
-          <a:fontRef idx="minor">
-            <a:schemeClr val="tx1"/>
-          </a:fontRef>
-        </p:style>
-      </p:cxnSp>
-      <p:cxnSp>
-        <p:nvCxnSpPr>
-          <p:cNvPr id="39" name="直線接點 38">
-            <a:extLst>
-              <a:ext uri="{FF2B5EF4-FFF2-40B4-BE49-F238E27FC236}">
-                <a16:creationId xmlns:a16="http://schemas.microsoft.com/office/drawing/2014/main" id="{4163A6DA-1E90-C567-1FFC-5628BC3A8FD8}"/>
-              </a:ext>
-            </a:extLst>
-          </p:cNvPr>
-          <p:cNvCxnSpPr>
-            <a:stCxn id="2" idx="6"/>
-            <a:endCxn id="4" idx="1"/>
-          </p:cNvCxnSpPr>
-          <p:nvPr/>
-        </p:nvCxnSpPr>
-        <p:spPr>
-          <a:xfrm flipV="1">
-            <a:off x="1536797" y="3319629"/>
-            <a:ext cx="2650525" cy="8857"/>
-          </a:xfrm>
-          <a:prstGeom prst="line">
-            <a:avLst/>
-          </a:prstGeom>
-          <a:ln w="38100">
-            <a:solidFill>
-              <a:srgbClr val="2F528F"/>
-            </a:solidFill>
-          </a:ln>
-        </p:spPr>
-        <p:style>
-          <a:lnRef idx="1">
-            <a:schemeClr val="accent1"/>
-          </a:lnRef>
-          <a:fillRef idx="0">
-            <a:schemeClr val="accent1"/>
-          </a:fillRef>
-          <a:effectRef idx="0">
-            <a:schemeClr val="accent1"/>
-          </a:effectRef>
-          <a:fontRef idx="minor">
-            <a:schemeClr val="tx1"/>
-          </a:fontRef>
-        </p:style>
-      </p:cxnSp>
-      <p:sp>
-        <p:nvSpPr>
-          <p:cNvPr id="71" name="橢圓 70">
-            <a:extLst>
-              <a:ext uri="{FF2B5EF4-FFF2-40B4-BE49-F238E27FC236}">
-                <a16:creationId xmlns:a16="http://schemas.microsoft.com/office/drawing/2014/main" id="{F9015AC3-D320-8673-01E1-AD6298FCBE1D}"/>
-              </a:ext>
-            </a:extLst>
-          </p:cNvPr>
-          <p:cNvSpPr/>
-          <p:nvPr/>
-        </p:nvSpPr>
-        <p:spPr>
-          <a:xfrm>
-            <a:off x="8112868" y="5956009"/>
-            <a:ext cx="1230942" cy="552543"/>
-          </a:xfrm>
-          <a:prstGeom prst="ellipse">
-            <a:avLst/>
-          </a:prstGeom>
-          <a:noFill/>
-          <a:ln w="76200" cmpd="dbl">
-            <a:solidFill>
-              <a:srgbClr val="00B050"/>
-            </a:solidFill>
-          </a:ln>
-        </p:spPr>
-        <p:style>
-          <a:lnRef idx="2">
-            <a:schemeClr val="accent1">
-              <a:shade val="50000"/>
-            </a:schemeClr>
-          </a:lnRef>
-          <a:fillRef idx="1">
-            <a:schemeClr val="accent1"/>
-          </a:fillRef>
-          <a:effectRef idx="0">
-            <a:schemeClr val="accent1"/>
-          </a:effectRef>
-          <a:fontRef idx="minor">
-            <a:schemeClr val="lt1"/>
-          </a:fontRef>
-        </p:style>
-        <p:txBody>
-          <a:bodyPr rtlCol="0" anchor="ctr"/>
-          <a:lstStyle/>
-          <a:p>
-            <a:pPr algn="ctr"/>
-            <a:r>
-              <a:rPr lang="zh-TW" altLang="en-US" dirty="0">
-                <a:solidFill>
-                  <a:sysClr val="windowText" lastClr="000000"/>
-                </a:solidFill>
-                <a:latin typeface="微軟正黑體" panose="020B0604030504040204" pitchFamily="34" charset="-120"/>
-                <a:ea typeface="微軟正黑體" panose="020B0604030504040204" pitchFamily="34" charset="-120"/>
-              </a:rPr>
-              <a:t>作者</a:t>
-            </a:r>
-          </a:p>
-        </p:txBody>
-      </p:sp>
-      <p:cxnSp>
-        <p:nvCxnSpPr>
-          <p:cNvPr id="79" name="直線接點 78">
-            <a:extLst>
-              <a:ext uri="{FF2B5EF4-FFF2-40B4-BE49-F238E27FC236}">
-                <a16:creationId xmlns:a16="http://schemas.microsoft.com/office/drawing/2014/main" id="{AF056078-CB83-542F-AC47-36E4CB78887F}"/>
-              </a:ext>
-            </a:extLst>
-          </p:cNvPr>
-          <p:cNvCxnSpPr>
-            <a:cxnSpLocks/>
-            <a:stCxn id="69" idx="2"/>
-            <a:endCxn id="71" idx="0"/>
-          </p:cNvCxnSpPr>
-          <p:nvPr/>
-        </p:nvCxnSpPr>
-        <p:spPr>
-          <a:xfrm>
-            <a:off x="7009436" y="5507044"/>
-            <a:ext cx="1718903" cy="448965"/>
-          </a:xfrm>
-          <a:prstGeom prst="line">
-            <a:avLst/>
-          </a:prstGeom>
-          <a:ln w="38100">
-            <a:solidFill>
-              <a:srgbClr val="00B050"/>
-            </a:solidFill>
-          </a:ln>
-        </p:spPr>
-        <p:style>
-          <a:lnRef idx="1">
-            <a:schemeClr val="accent1"/>
-          </a:lnRef>
-          <a:fillRef idx="0">
-            <a:schemeClr val="accent1"/>
-          </a:fillRef>
-          <a:effectRef idx="0">
-            <a:schemeClr val="accent1"/>
-          </a:effectRef>
-          <a:fontRef idx="minor">
-            <a:schemeClr val="tx1"/>
-          </a:fontRef>
-        </p:style>
-      </p:cxnSp>
-      <p:sp>
-        <p:nvSpPr>
-          <p:cNvPr id="82" name="橢圓 81">
-            <a:extLst>
-              <a:ext uri="{FF2B5EF4-FFF2-40B4-BE49-F238E27FC236}">
-                <a16:creationId xmlns:a16="http://schemas.microsoft.com/office/drawing/2014/main" id="{63ACC889-A59D-DE33-2150-D77F90D9A754}"/>
-              </a:ext>
-            </a:extLst>
-          </p:cNvPr>
-          <p:cNvSpPr/>
-          <p:nvPr/>
-        </p:nvSpPr>
-        <p:spPr>
-          <a:xfrm>
-            <a:off x="10532343" y="3870083"/>
-            <a:ext cx="1230942" cy="552543"/>
-          </a:xfrm>
-          <a:prstGeom prst="ellipse">
-            <a:avLst/>
-          </a:prstGeom>
-          <a:noFill/>
-          <a:ln w="76200" cmpd="dbl">
-            <a:solidFill>
-              <a:srgbClr val="7030A0"/>
-            </a:solidFill>
-          </a:ln>
-        </p:spPr>
-        <p:style>
-          <a:lnRef idx="2">
-            <a:schemeClr val="accent1">
-              <a:shade val="50000"/>
-            </a:schemeClr>
-          </a:lnRef>
-          <a:fillRef idx="1">
-            <a:schemeClr val="accent1"/>
-          </a:fillRef>
-          <a:effectRef idx="0">
-            <a:schemeClr val="accent1"/>
-          </a:effectRef>
-          <a:fontRef idx="minor">
-            <a:schemeClr val="lt1"/>
-          </a:fontRef>
-        </p:style>
-        <p:txBody>
-          <a:bodyPr rtlCol="0" anchor="ctr"/>
-          <a:lstStyle/>
-          <a:p>
-            <a:pPr algn="ctr"/>
-            <a:r>
-              <a:rPr lang="zh-TW" altLang="en-US" dirty="0">
-                <a:solidFill>
-                  <a:sysClr val="windowText" lastClr="000000"/>
-                </a:solidFill>
-                <a:latin typeface="微軟正黑體" panose="020B0604030504040204" pitchFamily="34" charset="-120"/>
-                <a:ea typeface="微軟正黑體" panose="020B0604030504040204" pitchFamily="34" charset="-120"/>
-              </a:rPr>
-              <a:t>小說</a:t>
-            </a:r>
-          </a:p>
-        </p:txBody>
-      </p:sp>
-      <p:sp>
-        <p:nvSpPr>
-          <p:cNvPr id="85" name="橢圓 84">
-            <a:extLst>
-              <a:ext uri="{FF2B5EF4-FFF2-40B4-BE49-F238E27FC236}">
-                <a16:creationId xmlns:a16="http://schemas.microsoft.com/office/drawing/2014/main" id="{54A375CF-3E04-A533-B45E-E8C224F38DC9}"/>
-              </a:ext>
-            </a:extLst>
-          </p:cNvPr>
-          <p:cNvSpPr/>
-          <p:nvPr/>
-        </p:nvSpPr>
-        <p:spPr>
-          <a:xfrm>
-            <a:off x="10526992" y="4663422"/>
-            <a:ext cx="1230942" cy="552543"/>
-          </a:xfrm>
-          <a:prstGeom prst="ellipse">
-            <a:avLst/>
-          </a:prstGeom>
-          <a:noFill/>
-          <a:ln w="76200" cmpd="dbl">
-            <a:solidFill>
-              <a:srgbClr val="7030A0"/>
-            </a:solidFill>
-          </a:ln>
-        </p:spPr>
-        <p:style>
-          <a:lnRef idx="2">
-            <a:schemeClr val="accent1">
-              <a:shade val="50000"/>
-            </a:schemeClr>
-          </a:lnRef>
-          <a:fillRef idx="1">
-            <a:schemeClr val="accent1"/>
-          </a:fillRef>
-          <a:effectRef idx="0">
-            <a:schemeClr val="accent1"/>
-          </a:effectRef>
-          <a:fontRef idx="minor">
-            <a:schemeClr val="lt1"/>
-          </a:fontRef>
-        </p:style>
-        <p:txBody>
-          <a:bodyPr rtlCol="0" anchor="ctr"/>
-          <a:lstStyle/>
-          <a:p>
-            <a:pPr algn="ctr"/>
-            <a:r>
-              <a:rPr lang="zh-TW" altLang="en-US" dirty="0">
-                <a:solidFill>
-                  <a:sysClr val="windowText" lastClr="000000"/>
-                </a:solidFill>
-                <a:latin typeface="微軟正黑體" panose="020B0604030504040204" pitchFamily="34" charset="-120"/>
-                <a:ea typeface="微軟正黑體" panose="020B0604030504040204" pitchFamily="34" charset="-120"/>
-              </a:rPr>
-              <a:t>出版社</a:t>
-            </a:r>
-          </a:p>
-        </p:txBody>
-      </p:sp>
-      <p:cxnSp>
-        <p:nvCxnSpPr>
-          <p:cNvPr id="86" name="直線接點 85">
-            <a:extLst>
-              <a:ext uri="{FF2B5EF4-FFF2-40B4-BE49-F238E27FC236}">
-                <a16:creationId xmlns:a16="http://schemas.microsoft.com/office/drawing/2014/main" id="{87DFF51D-97AA-5FFC-2F90-BE6CD88B8034}"/>
-              </a:ext>
-            </a:extLst>
-          </p:cNvPr>
-          <p:cNvCxnSpPr>
-            <a:cxnSpLocks/>
-            <a:stCxn id="7" idx="3"/>
-            <a:endCxn id="82" idx="2"/>
-          </p:cNvCxnSpPr>
-          <p:nvPr/>
-        </p:nvCxnSpPr>
-        <p:spPr>
-          <a:xfrm>
-            <a:off x="9692189" y="3318626"/>
-            <a:ext cx="840154" cy="827729"/>
-          </a:xfrm>
-          <a:prstGeom prst="line">
-            <a:avLst/>
-          </a:prstGeom>
-          <a:ln w="38100">
-            <a:solidFill>
-              <a:srgbClr val="7030A0"/>
-            </a:solidFill>
-          </a:ln>
-        </p:spPr>
-        <p:style>
-          <a:lnRef idx="1">
-            <a:schemeClr val="accent1"/>
-          </a:lnRef>
-          <a:fillRef idx="0">
-            <a:schemeClr val="accent1"/>
-          </a:fillRef>
-          <a:effectRef idx="0">
-            <a:schemeClr val="accent1"/>
-          </a:effectRef>
-          <a:fontRef idx="minor">
-            <a:schemeClr val="tx1"/>
-          </a:fontRef>
-        </p:style>
-      </p:cxnSp>
-      <p:cxnSp>
-        <p:nvCxnSpPr>
-          <p:cNvPr id="96" name="直線接點 95">
-            <a:extLst>
-              <a:ext uri="{FF2B5EF4-FFF2-40B4-BE49-F238E27FC236}">
-                <a16:creationId xmlns:a16="http://schemas.microsoft.com/office/drawing/2014/main" id="{0778A077-6939-52B3-C56C-CA5C1586E1EE}"/>
-              </a:ext>
-            </a:extLst>
-          </p:cNvPr>
-          <p:cNvCxnSpPr>
-            <a:cxnSpLocks/>
-            <a:stCxn id="7" idx="3"/>
-            <a:endCxn id="85" idx="2"/>
-          </p:cNvCxnSpPr>
-          <p:nvPr/>
-        </p:nvCxnSpPr>
-        <p:spPr>
-          <a:xfrm>
-            <a:off x="9692189" y="3318626"/>
-            <a:ext cx="834803" cy="1621068"/>
-          </a:xfrm>
-          <a:prstGeom prst="line">
-            <a:avLst/>
-          </a:prstGeom>
-          <a:ln w="38100">
-            <a:solidFill>
-              <a:srgbClr val="7030A0"/>
-            </a:solidFill>
-          </a:ln>
-        </p:spPr>
-        <p:style>
-          <a:lnRef idx="1">
-            <a:schemeClr val="accent1"/>
-          </a:lnRef>
-          <a:fillRef idx="0">
-            <a:schemeClr val="accent1"/>
-          </a:fillRef>
-          <a:effectRef idx="0">
-            <a:schemeClr val="accent1"/>
-          </a:effectRef>
-          <a:fontRef idx="minor">
-            <a:schemeClr val="tx1"/>
-          </a:fontRef>
-        </p:style>
-      </p:cxnSp>
+              </a:endParaRPr>
+            </a:p>
+          </p:txBody>
+        </p:sp>
+      </p:grpSp>
     </p:spTree>
     <p:extLst>
       <p:ext uri="{BB962C8B-B14F-4D97-AF65-F5344CB8AC3E}">
@@ -6606,10 +6557,10 @@
       </p:grpSpPr>
       <p:grpSp>
         <p:nvGrpSpPr>
-          <p:cNvPr id="16" name="群組 15">
+          <p:cNvPr id="58" name="群組 57">
             <a:extLst>
               <a:ext uri="{FF2B5EF4-FFF2-40B4-BE49-F238E27FC236}">
-                <a16:creationId xmlns:a16="http://schemas.microsoft.com/office/drawing/2014/main" id="{32ACDE33-6828-4A83-B8FE-21404795773E}"/>
+                <a16:creationId xmlns:a16="http://schemas.microsoft.com/office/drawing/2014/main" id="{4001C8BB-7364-0A29-83D2-68CC5E9FAA2C}"/>
               </a:ext>
             </a:extLst>
           </p:cNvPr>
@@ -6618,10 +6569,10 @@
         </p:nvGrpSpPr>
         <p:grpSpPr>
           <a:xfrm>
-            <a:off x="192458" y="271280"/>
-            <a:ext cx="11807085" cy="6315440"/>
-            <a:chOff x="137021" y="271280"/>
-            <a:chExt cx="11807085" cy="6315440"/>
+            <a:off x="177829" y="271280"/>
+            <a:ext cx="11836342" cy="6315440"/>
+            <a:chOff x="163201" y="271280"/>
+            <a:chExt cx="11836342" cy="6315440"/>
           </a:xfrm>
         </p:grpSpPr>
         <p:sp>
@@ -6638,7 +6589,7 @@
           </p:nvSpPr>
           <p:spPr>
             <a:xfrm>
-              <a:off x="4203870" y="3073807"/>
+              <a:off x="4259307" y="3073807"/>
               <a:ext cx="963850" cy="578673"/>
             </a:xfrm>
             <a:prstGeom prst="rect">
@@ -6706,7 +6657,7 @@
           </p:nvSpPr>
           <p:spPr>
             <a:xfrm>
-              <a:off x="8744887" y="3072804"/>
+              <a:off x="8800324" y="3072804"/>
               <a:ext cx="963850" cy="578673"/>
             </a:xfrm>
             <a:prstGeom prst="rect">
@@ -6774,7 +6725,7 @@
           </p:nvSpPr>
           <p:spPr>
             <a:xfrm>
-              <a:off x="7256463" y="1581379"/>
+              <a:off x="7311900" y="1581379"/>
               <a:ext cx="963850" cy="578673"/>
             </a:xfrm>
             <a:prstGeom prst="rect">
@@ -6842,7 +6793,7 @@
           </p:nvSpPr>
           <p:spPr>
             <a:xfrm>
-              <a:off x="6353318" y="4970143"/>
+              <a:off x="6408755" y="4970143"/>
               <a:ext cx="1230942" cy="578673"/>
             </a:xfrm>
             <a:prstGeom prst="rect">
@@ -6910,7 +6861,7 @@
           </p:nvSpPr>
           <p:spPr>
             <a:xfrm>
-              <a:off x="5842237" y="618497"/>
+              <a:off x="5897674" y="618497"/>
               <a:ext cx="2108100" cy="552543"/>
             </a:xfrm>
             <a:prstGeom prst="ellipse">
@@ -6971,7 +6922,7 @@
           </p:nvSpPr>
           <p:spPr>
             <a:xfrm>
-              <a:off x="1811061" y="491383"/>
+              <a:off x="1866498" y="491383"/>
               <a:ext cx="1573035" cy="552543"/>
             </a:xfrm>
             <a:prstGeom prst="ellipse">
@@ -7039,7 +6990,7 @@
           </p:nvSpPr>
           <p:spPr>
             <a:xfrm>
-              <a:off x="1175871" y="2176070"/>
+              <a:off x="1231308" y="2176070"/>
               <a:ext cx="1230942" cy="552543"/>
             </a:xfrm>
             <a:prstGeom prst="ellipse">
@@ -7107,7 +7058,7 @@
           </p:nvSpPr>
           <p:spPr>
             <a:xfrm>
-              <a:off x="137021" y="1493040"/>
+              <a:off x="192458" y="1493040"/>
               <a:ext cx="1777234" cy="552543"/>
             </a:xfrm>
             <a:prstGeom prst="ellipse">
@@ -7175,7 +7126,7 @@
           </p:nvSpPr>
           <p:spPr>
             <a:xfrm>
-              <a:off x="590940" y="4709000"/>
+              <a:off x="646377" y="4709000"/>
               <a:ext cx="2195905" cy="552543"/>
             </a:xfrm>
             <a:prstGeom prst="ellipse">
@@ -7243,7 +7194,7 @@
           </p:nvSpPr>
           <p:spPr>
             <a:xfrm>
-              <a:off x="2153154" y="1322746"/>
+              <a:off x="2208591" y="1322746"/>
               <a:ext cx="1230942" cy="552543"/>
             </a:xfrm>
             <a:prstGeom prst="ellipse">
@@ -7311,7 +7262,7 @@
           </p:nvSpPr>
           <p:spPr>
             <a:xfrm>
-              <a:off x="256777" y="2842813"/>
+              <a:off x="163201" y="2573307"/>
               <a:ext cx="1230942" cy="552543"/>
             </a:xfrm>
             <a:prstGeom prst="ellipse">
@@ -7379,8 +7330,8 @@
           </p:nvSpPr>
           <p:spPr>
             <a:xfrm>
-              <a:off x="3793983" y="271280"/>
-              <a:ext cx="2108100" cy="552543"/>
+              <a:off x="4161086" y="271280"/>
+              <a:ext cx="1373737" cy="552543"/>
             </a:xfrm>
             <a:prstGeom prst="ellipse">
               <a:avLst/>
@@ -7407,14 +7358,14 @@
             <a:p>
               <a:pPr algn="ctr"/>
               <a:r>
-                <a:rPr lang="en-US" altLang="zh-TW" dirty="0" err="1">
+                <a:rPr lang="en-US" altLang="zh-TW" dirty="0">
                   <a:solidFill>
                     <a:sysClr val="windowText" lastClr="000000"/>
                   </a:solidFill>
                   <a:latin typeface="微軟正黑體" panose="020B0604030504040204" pitchFamily="34" charset="-120"/>
                   <a:ea typeface="微軟正黑體" panose="020B0604030504040204" pitchFamily="34" charset="-120"/>
                 </a:rPr>
-                <a:t>ReadRecord</a:t>
+                <a:t>History</a:t>
               </a:r>
               <a:endParaRPr lang="zh-TW" altLang="en-US" dirty="0">
                 <a:solidFill>
@@ -7440,7 +7391,7 @@
           </p:nvSpPr>
           <p:spPr>
             <a:xfrm>
-              <a:off x="1944026" y="3953639"/>
+              <a:off x="1925300" y="4077599"/>
               <a:ext cx="1230942" cy="552543"/>
             </a:xfrm>
             <a:prstGeom prst="ellipse">
@@ -7508,7 +7459,7 @@
           </p:nvSpPr>
           <p:spPr>
             <a:xfrm>
-              <a:off x="2110825" y="5346012"/>
+              <a:off x="2166262" y="5346012"/>
               <a:ext cx="1230942" cy="552543"/>
             </a:xfrm>
             <a:prstGeom prst="ellipse">
@@ -7576,7 +7527,7 @@
           </p:nvSpPr>
           <p:spPr>
             <a:xfrm>
-              <a:off x="330377" y="5919039"/>
+              <a:off x="385814" y="5919039"/>
               <a:ext cx="1829833" cy="552543"/>
             </a:xfrm>
             <a:prstGeom prst="ellipse">
@@ -7645,7 +7596,7 @@
           </p:nvSpPr>
           <p:spPr>
             <a:xfrm>
-              <a:off x="7486461" y="6034177"/>
+              <a:off x="7541898" y="6034177"/>
               <a:ext cx="1230942" cy="552543"/>
             </a:xfrm>
             <a:prstGeom prst="ellipse">
@@ -7713,7 +7664,7 @@
           </p:nvSpPr>
           <p:spPr>
             <a:xfrm>
-              <a:off x="5057215" y="6034176"/>
+              <a:off x="5112652" y="6034176"/>
               <a:ext cx="1911574" cy="552543"/>
             </a:xfrm>
             <a:prstGeom prst="ellipse">
@@ -7781,7 +7732,7 @@
           </p:nvSpPr>
           <p:spPr>
             <a:xfrm>
-              <a:off x="10543540" y="3677368"/>
+              <a:off x="10598977" y="3677368"/>
               <a:ext cx="1230942" cy="552543"/>
             </a:xfrm>
             <a:prstGeom prst="ellipse">
@@ -7849,7 +7800,7 @@
           </p:nvSpPr>
           <p:spPr>
             <a:xfrm>
-              <a:off x="10371071" y="2478888"/>
+              <a:off x="10426508" y="2478888"/>
               <a:ext cx="1573035" cy="552543"/>
             </a:xfrm>
             <a:prstGeom prst="ellipse">
@@ -7914,7 +7865,7 @@
           </p:nvSpPr>
           <p:spPr>
             <a:xfrm>
-              <a:off x="8808961" y="698752"/>
+              <a:off x="8864398" y="698752"/>
               <a:ext cx="1562109" cy="552543"/>
             </a:xfrm>
             <a:prstGeom prst="ellipse">
@@ -7982,7 +7933,7 @@
           </p:nvSpPr>
           <p:spPr>
             <a:xfrm>
-              <a:off x="8808961" y="1712647"/>
+              <a:off x="8864398" y="1712647"/>
               <a:ext cx="1730451" cy="552543"/>
             </a:xfrm>
             <a:prstGeom prst="ellipse">
@@ -8050,7 +8001,7 @@
           </p:nvSpPr>
           <p:spPr>
             <a:xfrm>
-              <a:off x="4681668" y="1458172"/>
+              <a:off x="4737105" y="1458172"/>
               <a:ext cx="1467087" cy="833652"/>
             </a:xfrm>
             <a:prstGeom prst="flowChartDecision">
@@ -8111,7 +8062,7 @@
           </p:nvSpPr>
           <p:spPr>
             <a:xfrm>
-              <a:off x="3710534" y="4425828"/>
+              <a:off x="3765971" y="4425828"/>
               <a:ext cx="1952280" cy="833652"/>
             </a:xfrm>
             <a:prstGeom prst="flowChartDecision">
@@ -8176,7 +8127,7 @@
           </p:nvSpPr>
           <p:spPr>
             <a:xfrm>
-              <a:off x="6183407" y="2946317"/>
+              <a:off x="6238844" y="2946317"/>
               <a:ext cx="1570763" cy="833652"/>
             </a:xfrm>
             <a:prstGeom prst="flowChartDecision">
@@ -8237,7 +8188,7 @@
           </p:nvSpPr>
           <p:spPr>
             <a:xfrm>
-              <a:off x="8053485" y="4425828"/>
+              <a:off x="8108922" y="4425828"/>
               <a:ext cx="2376096" cy="833652"/>
             </a:xfrm>
             <a:prstGeom prst="flowChartDecision">
@@ -8302,7 +8253,7 @@
           </p:nvCxnSpPr>
           <p:spPr>
             <a:xfrm>
-              <a:off x="3384096" y="767655"/>
+              <a:off x="3439533" y="767655"/>
               <a:ext cx="819774" cy="2595489"/>
             </a:xfrm>
             <a:prstGeom prst="line">
@@ -8347,7 +8298,7 @@
           </p:nvCxnSpPr>
           <p:spPr>
             <a:xfrm>
-              <a:off x="3384096" y="1599018"/>
+              <a:off x="3439533" y="1599018"/>
               <a:ext cx="819774" cy="1764126"/>
             </a:xfrm>
             <a:prstGeom prst="line">
@@ -8392,7 +8343,7 @@
           </p:nvCxnSpPr>
           <p:spPr>
             <a:xfrm>
-              <a:off x="1914255" y="1769312"/>
+              <a:off x="1969692" y="1769312"/>
               <a:ext cx="2289615" cy="1593832"/>
             </a:xfrm>
             <a:prstGeom prst="line">
@@ -8437,7 +8388,7 @@
           </p:nvCxnSpPr>
           <p:spPr>
             <a:xfrm flipV="1">
-              <a:off x="2786845" y="3363144"/>
+              <a:off x="2842282" y="3363144"/>
               <a:ext cx="1417025" cy="1622128"/>
             </a:xfrm>
             <a:prstGeom prst="line">
@@ -8474,6 +8425,7 @@
               </a:extLst>
             </p:cNvPr>
             <p:cNvCxnSpPr>
+              <a:cxnSpLocks/>
               <a:stCxn id="20" idx="6"/>
               <a:endCxn id="4" idx="1"/>
             </p:cNvCxnSpPr>
@@ -8481,8 +8433,8 @@
           </p:nvCxnSpPr>
           <p:spPr>
             <a:xfrm flipV="1">
-              <a:off x="3174968" y="3363144"/>
-              <a:ext cx="1028902" cy="866767"/>
+              <a:off x="3156242" y="3363144"/>
+              <a:ext cx="1103065" cy="990727"/>
             </a:xfrm>
             <a:prstGeom prst="line">
               <a:avLst/>
@@ -8526,7 +8478,7 @@
           </p:nvCxnSpPr>
           <p:spPr>
             <a:xfrm>
-              <a:off x="2406813" y="2452342"/>
+              <a:off x="2462250" y="2452342"/>
               <a:ext cx="1797057" cy="910802"/>
             </a:xfrm>
             <a:prstGeom prst="line">
@@ -8563,6 +8515,7 @@
               </a:extLst>
             </p:cNvPr>
             <p:cNvCxnSpPr>
+              <a:cxnSpLocks/>
               <a:stCxn id="18" idx="6"/>
               <a:endCxn id="4" idx="1"/>
             </p:cNvCxnSpPr>
@@ -8570,8 +8523,8 @@
           </p:nvCxnSpPr>
           <p:spPr>
             <a:xfrm>
-              <a:off x="1487719" y="3119085"/>
-              <a:ext cx="2716151" cy="244059"/>
+              <a:off x="1394143" y="2849579"/>
+              <a:ext cx="2865164" cy="513565"/>
             </a:xfrm>
             <a:prstGeom prst="line">
               <a:avLst/>
@@ -8615,7 +8568,7 @@
           </p:nvCxnSpPr>
           <p:spPr>
             <a:xfrm flipV="1">
-              <a:off x="3341767" y="3363144"/>
+              <a:off x="3397204" y="3363144"/>
               <a:ext cx="862103" cy="2259140"/>
             </a:xfrm>
             <a:prstGeom prst="line">
@@ -8660,7 +8613,7 @@
           </p:nvCxnSpPr>
           <p:spPr>
             <a:xfrm flipH="1">
-              <a:off x="2160210" y="5898555"/>
+              <a:off x="2215647" y="5898555"/>
               <a:ext cx="566086" cy="296756"/>
             </a:xfrm>
             <a:prstGeom prst="line">
@@ -8705,7 +8658,7 @@
           </p:nvCxnSpPr>
           <p:spPr>
             <a:xfrm flipH="1">
-              <a:off x="6013002" y="5548816"/>
+              <a:off x="6068439" y="5548816"/>
               <a:ext cx="955787" cy="485360"/>
             </a:xfrm>
             <a:prstGeom prst="line">
@@ -8750,7 +8703,7 @@
           </p:nvCxnSpPr>
           <p:spPr>
             <a:xfrm>
-              <a:off x="6968789" y="5548816"/>
+              <a:off x="7024226" y="5548816"/>
               <a:ext cx="1133143" cy="485361"/>
             </a:xfrm>
             <a:prstGeom prst="line">
@@ -8787,6 +8740,7 @@
               </a:extLst>
             </p:cNvPr>
             <p:cNvCxnSpPr>
+              <a:cxnSpLocks/>
               <a:stCxn id="7" idx="3"/>
               <a:endCxn id="26" idx="2"/>
             </p:cNvCxnSpPr>
@@ -8794,7 +8748,7 @@
           </p:nvCxnSpPr>
           <p:spPr>
             <a:xfrm flipV="1">
-              <a:off x="9708737" y="2755160"/>
+              <a:off x="9764174" y="2755160"/>
               <a:ext cx="662334" cy="606981"/>
             </a:xfrm>
             <a:prstGeom prst="line">
@@ -8831,6 +8785,7 @@
               </a:extLst>
             </p:cNvPr>
             <p:cNvCxnSpPr>
+              <a:cxnSpLocks/>
               <a:stCxn id="7" idx="3"/>
               <a:endCxn id="25" idx="2"/>
             </p:cNvCxnSpPr>
@@ -8838,7 +8793,7 @@
           </p:nvCxnSpPr>
           <p:spPr>
             <a:xfrm>
-              <a:off x="9708737" y="3362141"/>
+              <a:off x="9764174" y="3362141"/>
               <a:ext cx="834803" cy="591499"/>
             </a:xfrm>
             <a:prstGeom prst="line">
@@ -8883,7 +8838,7 @@
           </p:nvCxnSpPr>
           <p:spPr>
             <a:xfrm>
-              <a:off x="8220313" y="1870716"/>
+              <a:off x="8275750" y="1870716"/>
               <a:ext cx="588648" cy="118203"/>
             </a:xfrm>
             <a:prstGeom prst="line">
@@ -8928,7 +8883,7 @@
           </p:nvCxnSpPr>
           <p:spPr>
             <a:xfrm flipV="1">
-              <a:off x="8220313" y="975024"/>
+              <a:off x="8275750" y="975024"/>
               <a:ext cx="588648" cy="895692"/>
             </a:xfrm>
             <a:prstGeom prst="line">
@@ -8973,7 +8928,7 @@
           </p:nvCxnSpPr>
           <p:spPr>
             <a:xfrm>
-              <a:off x="4685795" y="3652480"/>
+              <a:off x="4741232" y="3652480"/>
               <a:ext cx="879" cy="773348"/>
             </a:xfrm>
             <a:prstGeom prst="line">
@@ -9018,7 +8973,7 @@
           </p:nvCxnSpPr>
           <p:spPr>
             <a:xfrm>
-              <a:off x="4686674" y="5259480"/>
+              <a:off x="4742111" y="5259480"/>
               <a:ext cx="1666644" cy="0"/>
             </a:xfrm>
             <a:prstGeom prst="line">
@@ -9063,7 +9018,7 @@
           </p:nvCxnSpPr>
           <p:spPr>
             <a:xfrm>
-              <a:off x="7584260" y="5259480"/>
+              <a:off x="7639697" y="5259480"/>
               <a:ext cx="1657273" cy="0"/>
             </a:xfrm>
             <a:prstGeom prst="line">
@@ -9108,7 +9063,7 @@
           </p:nvCxnSpPr>
           <p:spPr>
             <a:xfrm flipH="1" flipV="1">
-              <a:off x="9226812" y="3651477"/>
+              <a:off x="9282249" y="3651477"/>
               <a:ext cx="14721" cy="774351"/>
             </a:xfrm>
             <a:prstGeom prst="line">
@@ -9153,7 +9108,7 @@
           </p:nvCxnSpPr>
           <p:spPr>
             <a:xfrm flipV="1">
-              <a:off x="7754170" y="3362141"/>
+              <a:off x="7809607" y="3362141"/>
               <a:ext cx="990717" cy="1002"/>
             </a:xfrm>
             <a:prstGeom prst="line">
@@ -9198,7 +9153,7 @@
           </p:nvCxnSpPr>
           <p:spPr>
             <a:xfrm flipV="1">
-              <a:off x="5167720" y="3363143"/>
+              <a:off x="5223157" y="3363143"/>
               <a:ext cx="1015687" cy="1"/>
             </a:xfrm>
             <a:prstGeom prst="line">
@@ -9235,6 +9190,7 @@
               </a:extLst>
             </p:cNvPr>
             <p:cNvCxnSpPr>
+              <a:cxnSpLocks/>
               <a:stCxn id="29" idx="1"/>
               <a:endCxn id="4" idx="0"/>
             </p:cNvCxnSpPr>
@@ -9242,7 +9198,7 @@
           </p:nvCxnSpPr>
           <p:spPr>
             <a:xfrm>
-              <a:off x="4681668" y="1874998"/>
+              <a:off x="4737105" y="1874998"/>
               <a:ext cx="4127" cy="1198809"/>
             </a:xfrm>
             <a:prstGeom prst="line">
@@ -9279,6 +9235,7 @@
               </a:extLst>
             </p:cNvPr>
             <p:cNvCxnSpPr>
+              <a:cxnSpLocks/>
               <a:stCxn id="29" idx="3"/>
               <a:endCxn id="8" idx="1"/>
             </p:cNvCxnSpPr>
@@ -9286,7 +9243,7 @@
           </p:nvCxnSpPr>
           <p:spPr>
             <a:xfrm flipV="1">
-              <a:off x="6148755" y="1870716"/>
+              <a:off x="6204192" y="1870716"/>
               <a:ext cx="1107708" cy="4282"/>
             </a:xfrm>
             <a:prstGeom prst="line">
@@ -9331,8 +9288,8 @@
           </p:nvCxnSpPr>
           <p:spPr>
             <a:xfrm flipH="1" flipV="1">
-              <a:off x="4848033" y="823823"/>
-              <a:ext cx="567179" cy="634349"/>
+              <a:off x="4847955" y="823823"/>
+              <a:ext cx="622694" cy="634349"/>
             </a:xfrm>
             <a:prstGeom prst="line">
               <a:avLst/>
@@ -9376,7 +9333,7 @@
           </p:nvCxnSpPr>
           <p:spPr>
             <a:xfrm flipH="1">
-              <a:off x="5415212" y="1171040"/>
+              <a:off x="5470649" y="1171040"/>
               <a:ext cx="1481075" cy="287132"/>
             </a:xfrm>
             <a:prstGeom prst="line">
@@ -9417,7 +9374,7 @@
           </p:nvSpPr>
           <p:spPr>
             <a:xfrm>
-              <a:off x="256777" y="3671628"/>
+              <a:off x="1154402" y="3207838"/>
               <a:ext cx="1492137" cy="552543"/>
             </a:xfrm>
             <a:prstGeom prst="ellipse">
@@ -9481,6 +9438,7 @@
               </a:extLst>
             </p:cNvPr>
             <p:cNvCxnSpPr>
+              <a:cxnSpLocks/>
               <a:stCxn id="56" idx="6"/>
               <a:endCxn id="4" idx="1"/>
             </p:cNvCxnSpPr>
@@ -9488,8 +9446,8 @@
           </p:nvCxnSpPr>
           <p:spPr>
             <a:xfrm flipV="1">
-              <a:off x="1748914" y="3363144"/>
-              <a:ext cx="2454956" cy="584756"/>
+              <a:off x="2646539" y="3363144"/>
+              <a:ext cx="1612768" cy="120966"/>
             </a:xfrm>
             <a:prstGeom prst="line">
               <a:avLst/>
@@ -9515,6 +9473,471 @@
             </a:fontRef>
           </p:style>
         </p:cxnSp>
+        <p:sp>
+          <p:nvSpPr>
+            <p:cNvPr id="2" name="橢圓 1">
+              <a:extLst>
+                <a:ext uri="{FF2B5EF4-FFF2-40B4-BE49-F238E27FC236}">
+                  <a16:creationId xmlns:a16="http://schemas.microsoft.com/office/drawing/2014/main" id="{0C27E502-8E56-576F-2822-D37DE4441AAB}"/>
+                </a:ext>
+              </a:extLst>
+            </p:cNvPr>
+            <p:cNvSpPr/>
+            <p:nvPr/>
+          </p:nvSpPr>
+          <p:spPr>
+            <a:xfrm>
+              <a:off x="192458" y="3842275"/>
+              <a:ext cx="1492137" cy="552543"/>
+            </a:xfrm>
+            <a:prstGeom prst="ellipse">
+              <a:avLst/>
+            </a:prstGeom>
+            <a:noFill/>
+            <a:ln w="38100">
+              <a:solidFill>
+                <a:srgbClr val="2F528F"/>
+              </a:solidFill>
+            </a:ln>
+          </p:spPr>
+          <p:style>
+            <a:lnRef idx="2">
+              <a:schemeClr val="accent1">
+                <a:shade val="50000"/>
+              </a:schemeClr>
+            </a:lnRef>
+            <a:fillRef idx="1">
+              <a:schemeClr val="accent1"/>
+            </a:fillRef>
+            <a:effectRef idx="0">
+              <a:schemeClr val="accent1"/>
+            </a:effectRef>
+            <a:fontRef idx="minor">
+              <a:schemeClr val="lt1"/>
+            </a:fontRef>
+          </p:style>
+          <p:txBody>
+            <a:bodyPr rtlCol="0" anchor="ctr"/>
+            <a:lstStyle/>
+            <a:p>
+              <a:pPr algn="ctr"/>
+              <a:r>
+                <a:rPr lang="en-US" altLang="zh-TW" dirty="0">
+                  <a:solidFill>
+                    <a:sysClr val="windowText" lastClr="000000"/>
+                  </a:solidFill>
+                  <a:latin typeface="微軟正黑體" panose="020B0604030504040204" pitchFamily="34" charset="-120"/>
+                  <a:ea typeface="微軟正黑體" panose="020B0604030504040204" pitchFamily="34" charset="-120"/>
+                </a:rPr>
+                <a:t>Series</a:t>
+              </a:r>
+              <a:endParaRPr lang="zh-TW" altLang="en-US" dirty="0">
+                <a:solidFill>
+                  <a:sysClr val="windowText" lastClr="000000"/>
+                </a:solidFill>
+                <a:latin typeface="微軟正黑體" panose="020B0604030504040204" pitchFamily="34" charset="-120"/>
+                <a:ea typeface="微軟正黑體" panose="020B0604030504040204" pitchFamily="34" charset="-120"/>
+              </a:endParaRPr>
+            </a:p>
+          </p:txBody>
+        </p:sp>
+        <p:cxnSp>
+          <p:nvCxnSpPr>
+            <p:cNvPr id="3" name="直線接點 2">
+              <a:extLst>
+                <a:ext uri="{FF2B5EF4-FFF2-40B4-BE49-F238E27FC236}">
+                  <a16:creationId xmlns:a16="http://schemas.microsoft.com/office/drawing/2014/main" id="{18507A98-6CF2-DD24-C0EF-3BCF3E92134A}"/>
+                </a:ext>
+              </a:extLst>
+            </p:cNvPr>
+            <p:cNvCxnSpPr>
+              <a:cxnSpLocks/>
+              <a:stCxn id="2" idx="6"/>
+              <a:endCxn id="4" idx="1"/>
+            </p:cNvCxnSpPr>
+            <p:nvPr/>
+          </p:nvCxnSpPr>
+          <p:spPr>
+            <a:xfrm flipV="1">
+              <a:off x="1684595" y="3363144"/>
+              <a:ext cx="2574712" cy="755403"/>
+            </a:xfrm>
+            <a:prstGeom prst="line">
+              <a:avLst/>
+            </a:prstGeom>
+            <a:ln w="38100">
+              <a:solidFill>
+                <a:srgbClr val="2F528F"/>
+              </a:solidFill>
+            </a:ln>
+          </p:spPr>
+          <p:style>
+            <a:lnRef idx="1">
+              <a:schemeClr val="accent1"/>
+            </a:lnRef>
+            <a:fillRef idx="0">
+              <a:schemeClr val="accent1"/>
+            </a:fillRef>
+            <a:effectRef idx="0">
+              <a:schemeClr val="accent1"/>
+            </a:effectRef>
+            <a:fontRef idx="minor">
+              <a:schemeClr val="tx1"/>
+            </a:fontRef>
+          </p:style>
+        </p:cxnSp>
+        <p:sp>
+          <p:nvSpPr>
+            <p:cNvPr id="45" name="文字方塊 44">
+              <a:extLst>
+                <a:ext uri="{FF2B5EF4-FFF2-40B4-BE49-F238E27FC236}">
+                  <a16:creationId xmlns:a16="http://schemas.microsoft.com/office/drawing/2014/main" id="{BBA8A04A-E50C-B3F2-9174-B8166C270F7E}"/>
+                </a:ext>
+              </a:extLst>
+            </p:cNvPr>
+            <p:cNvSpPr txBox="1"/>
+            <p:nvPr/>
+          </p:nvSpPr>
+          <p:spPr>
+            <a:xfrm>
+              <a:off x="8148863" y="2946202"/>
+              <a:ext cx="301686" cy="369332"/>
+            </a:xfrm>
+            <a:prstGeom prst="rect">
+              <a:avLst/>
+            </a:prstGeom>
+            <a:noFill/>
+          </p:spPr>
+          <p:txBody>
+            <a:bodyPr wrap="none" rtlCol="0">
+              <a:spAutoFit/>
+            </a:bodyPr>
+            <a:lstStyle/>
+            <a:p>
+              <a:r>
+                <a:rPr lang="en-US" altLang="zh-TW" b="1" dirty="0">
+                  <a:solidFill>
+                    <a:srgbClr val="ED7D31"/>
+                  </a:solidFill>
+                </a:rPr>
+                <a:t>1</a:t>
+              </a:r>
+              <a:endParaRPr lang="zh-TW" altLang="en-US" b="1" dirty="0">
+                <a:solidFill>
+                  <a:srgbClr val="ED7D31"/>
+                </a:solidFill>
+              </a:endParaRPr>
+            </a:p>
+          </p:txBody>
+        </p:sp>
+        <p:sp>
+          <p:nvSpPr>
+            <p:cNvPr id="47" name="文字方塊 46">
+              <a:extLst>
+                <a:ext uri="{FF2B5EF4-FFF2-40B4-BE49-F238E27FC236}">
+                  <a16:creationId xmlns:a16="http://schemas.microsoft.com/office/drawing/2014/main" id="{14656F58-1ADE-02A0-1143-092B2A15D2A5}"/>
+                </a:ext>
+              </a:extLst>
+            </p:cNvPr>
+            <p:cNvSpPr txBox="1"/>
+            <p:nvPr/>
+          </p:nvSpPr>
+          <p:spPr>
+            <a:xfrm>
+              <a:off x="4333934" y="3849811"/>
+              <a:ext cx="308098" cy="369332"/>
+            </a:xfrm>
+            <a:prstGeom prst="rect">
+              <a:avLst/>
+            </a:prstGeom>
+            <a:noFill/>
+          </p:spPr>
+          <p:txBody>
+            <a:bodyPr wrap="none" rtlCol="0">
+              <a:spAutoFit/>
+            </a:bodyPr>
+            <a:lstStyle/>
+            <a:p>
+              <a:r>
+                <a:rPr lang="en-US" altLang="zh-TW" b="1" dirty="0">
+                  <a:solidFill>
+                    <a:srgbClr val="ED7D31"/>
+                  </a:solidFill>
+                </a:rPr>
+                <a:t>n</a:t>
+              </a:r>
+              <a:endParaRPr lang="zh-TW" altLang="en-US" b="1" dirty="0">
+                <a:solidFill>
+                  <a:srgbClr val="ED7D31"/>
+                </a:solidFill>
+              </a:endParaRPr>
+            </a:p>
+          </p:txBody>
+        </p:sp>
+        <p:sp>
+          <p:nvSpPr>
+            <p:cNvPr id="49" name="文字方塊 48">
+              <a:extLst>
+                <a:ext uri="{FF2B5EF4-FFF2-40B4-BE49-F238E27FC236}">
+                  <a16:creationId xmlns:a16="http://schemas.microsoft.com/office/drawing/2014/main" id="{834F2C92-8A7B-AC5B-597D-BA8E32C176C3}"/>
+                </a:ext>
+              </a:extLst>
+            </p:cNvPr>
+            <p:cNvSpPr txBox="1"/>
+            <p:nvPr/>
+          </p:nvSpPr>
+          <p:spPr>
+            <a:xfrm>
+              <a:off x="4338650" y="2331409"/>
+              <a:ext cx="372218" cy="369332"/>
+            </a:xfrm>
+            <a:prstGeom prst="rect">
+              <a:avLst/>
+            </a:prstGeom>
+            <a:noFill/>
+          </p:spPr>
+          <p:txBody>
+            <a:bodyPr wrap="none" rtlCol="0">
+              <a:spAutoFit/>
+            </a:bodyPr>
+            <a:lstStyle/>
+            <a:p>
+              <a:r>
+                <a:rPr lang="en-US" altLang="zh-TW" b="1" dirty="0">
+                  <a:solidFill>
+                    <a:srgbClr val="ED7D31"/>
+                  </a:solidFill>
+                </a:rPr>
+                <a:t>m</a:t>
+              </a:r>
+              <a:endParaRPr lang="zh-TW" altLang="en-US" b="1" dirty="0">
+                <a:solidFill>
+                  <a:srgbClr val="ED7D31"/>
+                </a:solidFill>
+              </a:endParaRPr>
+            </a:p>
+          </p:txBody>
+        </p:sp>
+        <p:sp>
+          <p:nvSpPr>
+            <p:cNvPr id="51" name="文字方塊 50">
+              <a:extLst>
+                <a:ext uri="{FF2B5EF4-FFF2-40B4-BE49-F238E27FC236}">
+                  <a16:creationId xmlns:a16="http://schemas.microsoft.com/office/drawing/2014/main" id="{7480586F-3395-6E02-C832-161F0B4D5353}"/>
+                </a:ext>
+              </a:extLst>
+            </p:cNvPr>
+            <p:cNvSpPr txBox="1"/>
+            <p:nvPr/>
+          </p:nvSpPr>
+          <p:spPr>
+            <a:xfrm>
+              <a:off x="5629692" y="5277661"/>
+              <a:ext cx="301686" cy="369332"/>
+            </a:xfrm>
+            <a:prstGeom prst="rect">
+              <a:avLst/>
+            </a:prstGeom>
+            <a:noFill/>
+          </p:spPr>
+          <p:txBody>
+            <a:bodyPr wrap="none" rtlCol="0">
+              <a:spAutoFit/>
+            </a:bodyPr>
+            <a:lstStyle/>
+            <a:p>
+              <a:r>
+                <a:rPr lang="en-US" altLang="zh-TW" b="1" dirty="0">
+                  <a:solidFill>
+                    <a:srgbClr val="ED7D31"/>
+                  </a:solidFill>
+                </a:rPr>
+                <a:t>1</a:t>
+              </a:r>
+              <a:endParaRPr lang="zh-TW" altLang="en-US" b="1" dirty="0">
+                <a:solidFill>
+                  <a:srgbClr val="ED7D31"/>
+                </a:solidFill>
+              </a:endParaRPr>
+            </a:p>
+          </p:txBody>
+        </p:sp>
+        <p:sp>
+          <p:nvSpPr>
+            <p:cNvPr id="53" name="文字方塊 52">
+              <a:extLst>
+                <a:ext uri="{FF2B5EF4-FFF2-40B4-BE49-F238E27FC236}">
+                  <a16:creationId xmlns:a16="http://schemas.microsoft.com/office/drawing/2014/main" id="{9E1ED487-3EA9-3EEF-B8B0-4DCE2A0CB1E6}"/>
+                </a:ext>
+              </a:extLst>
+            </p:cNvPr>
+            <p:cNvSpPr txBox="1"/>
+            <p:nvPr/>
+          </p:nvSpPr>
+          <p:spPr>
+            <a:xfrm>
+              <a:off x="6637823" y="1436182"/>
+              <a:ext cx="308098" cy="369332"/>
+            </a:xfrm>
+            <a:prstGeom prst="rect">
+              <a:avLst/>
+            </a:prstGeom>
+            <a:noFill/>
+          </p:spPr>
+          <p:txBody>
+            <a:bodyPr wrap="none" rtlCol="0">
+              <a:spAutoFit/>
+            </a:bodyPr>
+            <a:lstStyle/>
+            <a:p>
+              <a:r>
+                <a:rPr lang="en-US" altLang="zh-TW" b="1" dirty="0">
+                  <a:solidFill>
+                    <a:srgbClr val="ED7D31"/>
+                  </a:solidFill>
+                </a:rPr>
+                <a:t>n</a:t>
+              </a:r>
+              <a:endParaRPr lang="zh-TW" altLang="en-US" b="1" dirty="0">
+                <a:solidFill>
+                  <a:srgbClr val="ED7D31"/>
+                </a:solidFill>
+              </a:endParaRPr>
+            </a:p>
+          </p:txBody>
+        </p:sp>
+        <p:sp>
+          <p:nvSpPr>
+            <p:cNvPr id="54" name="文字方塊 53">
+              <a:extLst>
+                <a:ext uri="{FF2B5EF4-FFF2-40B4-BE49-F238E27FC236}">
+                  <a16:creationId xmlns:a16="http://schemas.microsoft.com/office/drawing/2014/main" id="{4D63F78D-6E56-F181-A45A-7250EA5E5611}"/>
+                </a:ext>
+              </a:extLst>
+            </p:cNvPr>
+            <p:cNvSpPr txBox="1"/>
+            <p:nvPr/>
+          </p:nvSpPr>
+          <p:spPr>
+            <a:xfrm>
+              <a:off x="8261913" y="5259339"/>
+              <a:ext cx="308098" cy="369332"/>
+            </a:xfrm>
+            <a:prstGeom prst="rect">
+              <a:avLst/>
+            </a:prstGeom>
+            <a:noFill/>
+          </p:spPr>
+          <p:txBody>
+            <a:bodyPr wrap="none" rtlCol="0">
+              <a:spAutoFit/>
+            </a:bodyPr>
+            <a:lstStyle/>
+            <a:p>
+              <a:r>
+                <a:rPr lang="en-US" altLang="zh-TW" b="1" dirty="0">
+                  <a:solidFill>
+                    <a:srgbClr val="ED7D31"/>
+                  </a:solidFill>
+                </a:rPr>
+                <a:t>n</a:t>
+              </a:r>
+              <a:endParaRPr lang="zh-TW" altLang="en-US" b="1" dirty="0">
+                <a:solidFill>
+                  <a:srgbClr val="ED7D31"/>
+                </a:solidFill>
+              </a:endParaRPr>
+            </a:p>
+          </p:txBody>
+        </p:sp>
+        <p:sp>
+          <p:nvSpPr>
+            <p:cNvPr id="55" name="文字方塊 54">
+              <a:extLst>
+                <a:ext uri="{FF2B5EF4-FFF2-40B4-BE49-F238E27FC236}">
+                  <a16:creationId xmlns:a16="http://schemas.microsoft.com/office/drawing/2014/main" id="{17DB882D-9697-FDE0-112A-AEA91417CFD8}"/>
+                </a:ext>
+              </a:extLst>
+            </p:cNvPr>
+            <p:cNvSpPr txBox="1"/>
+            <p:nvPr/>
+          </p:nvSpPr>
+          <p:spPr>
+            <a:xfrm>
+              <a:off x="5571814" y="2940331"/>
+              <a:ext cx="308098" cy="369332"/>
+            </a:xfrm>
+            <a:prstGeom prst="rect">
+              <a:avLst/>
+            </a:prstGeom>
+            <a:noFill/>
+          </p:spPr>
+          <p:txBody>
+            <a:bodyPr wrap="none" rtlCol="0">
+              <a:spAutoFit/>
+            </a:bodyPr>
+            <a:lstStyle/>
+            <a:p>
+              <a:r>
+                <a:rPr lang="en-US" altLang="zh-TW" b="1" dirty="0">
+                  <a:solidFill>
+                    <a:srgbClr val="ED7D31"/>
+                  </a:solidFill>
+                </a:rPr>
+                <a:t>n</a:t>
+              </a:r>
+              <a:endParaRPr lang="zh-TW" altLang="en-US" b="1" dirty="0">
+                <a:solidFill>
+                  <a:srgbClr val="ED7D31"/>
+                </a:solidFill>
+              </a:endParaRPr>
+            </a:p>
+          </p:txBody>
+        </p:sp>
+        <p:sp>
+          <p:nvSpPr>
+            <p:cNvPr id="57" name="文字方塊 56">
+              <a:extLst>
+                <a:ext uri="{FF2B5EF4-FFF2-40B4-BE49-F238E27FC236}">
+                  <a16:creationId xmlns:a16="http://schemas.microsoft.com/office/drawing/2014/main" id="{2DA9E1DF-B9DE-ED67-EB27-E7FEF0D8E041}"/>
+                </a:ext>
+              </a:extLst>
+            </p:cNvPr>
+            <p:cNvSpPr txBox="1"/>
+            <p:nvPr/>
+          </p:nvSpPr>
+          <p:spPr>
+            <a:xfrm>
+              <a:off x="9354114" y="3860579"/>
+              <a:ext cx="372218" cy="369332"/>
+            </a:xfrm>
+            <a:prstGeom prst="rect">
+              <a:avLst/>
+            </a:prstGeom>
+            <a:noFill/>
+          </p:spPr>
+          <p:txBody>
+            <a:bodyPr wrap="none" rtlCol="0">
+              <a:spAutoFit/>
+            </a:bodyPr>
+            <a:lstStyle/>
+            <a:p>
+              <a:r>
+                <a:rPr lang="en-US" altLang="zh-TW" b="1" dirty="0">
+                  <a:solidFill>
+                    <a:srgbClr val="ED7D31"/>
+                  </a:solidFill>
+                </a:rPr>
+                <a:t>m</a:t>
+              </a:r>
+              <a:endParaRPr lang="zh-TW" altLang="en-US" b="1" dirty="0">
+                <a:solidFill>
+                  <a:srgbClr val="ED7D31"/>
+                </a:solidFill>
+              </a:endParaRPr>
+            </a:p>
+          </p:txBody>
+        </p:sp>
       </p:grpSp>
     </p:spTree>
     <p:extLst>

--- a/ER Model/ER.pptx
+++ b/ER Model/ER.pptx
@@ -3329,10 +3329,10 @@
       </p:grpSpPr>
       <p:grpSp>
         <p:nvGrpSpPr>
-          <p:cNvPr id="74" name="群組 73">
+          <p:cNvPr id="39" name="群組 38">
             <a:extLst>
               <a:ext uri="{FF2B5EF4-FFF2-40B4-BE49-F238E27FC236}">
-                <a16:creationId xmlns:a16="http://schemas.microsoft.com/office/drawing/2014/main" id="{FFE47363-624B-046E-8955-5F65EB443087}"/>
+                <a16:creationId xmlns:a16="http://schemas.microsoft.com/office/drawing/2014/main" id="{ECF04E04-3FB9-4125-BF6D-67F198309D1C}"/>
               </a:ext>
             </a:extLst>
           </p:cNvPr>
@@ -3341,10 +3341,10 @@
         </p:nvGrpSpPr>
         <p:grpSpPr>
           <a:xfrm>
-            <a:off x="241713" y="338284"/>
-            <a:ext cx="11708574" cy="6181433"/>
-            <a:chOff x="218984" y="290861"/>
-            <a:chExt cx="11708574" cy="6181433"/>
+            <a:off x="264442" y="314795"/>
+            <a:ext cx="11663116" cy="6228410"/>
+            <a:chOff x="264442" y="267661"/>
+            <a:chExt cx="11663116" cy="6228410"/>
           </a:xfrm>
         </p:grpSpPr>
         <p:sp>
@@ -3361,7 +3361,7 @@
           </p:nvSpPr>
           <p:spPr>
             <a:xfrm>
-              <a:off x="4187322" y="3030292"/>
+              <a:off x="4187322" y="2983158"/>
               <a:ext cx="963850" cy="578673"/>
             </a:xfrm>
             <a:prstGeom prst="rect">
@@ -3422,7 +3422,7 @@
           </p:nvSpPr>
           <p:spPr>
             <a:xfrm>
-              <a:off x="8728339" y="3029289"/>
+              <a:off x="8728339" y="2982155"/>
               <a:ext cx="963850" cy="578673"/>
             </a:xfrm>
             <a:prstGeom prst="rect">
@@ -3483,7 +3483,7 @@
           </p:nvSpPr>
           <p:spPr>
             <a:xfrm>
-              <a:off x="7239915" y="1537864"/>
+              <a:off x="7239915" y="1490730"/>
               <a:ext cx="963850" cy="578673"/>
             </a:xfrm>
             <a:prstGeom prst="rect">
@@ -3544,13 +3544,17 @@
           </p:nvSpPr>
           <p:spPr>
             <a:xfrm>
-              <a:off x="5792016" y="314795"/>
+              <a:off x="8792414" y="1858258"/>
               <a:ext cx="1573035" cy="552543"/>
             </a:xfrm>
             <a:prstGeom prst="ellipse">
               <a:avLst/>
             </a:prstGeom>
-            <a:ln w="38100"/>
+            <a:ln w="76200" cmpd="dbl">
+              <a:solidFill>
+                <a:srgbClr val="4D4D4D"/>
+              </a:solidFill>
+            </a:ln>
           </p:spPr>
           <p:style>
             <a:lnRef idx="2">
@@ -3598,7 +3602,7 @@
           </p:nvSpPr>
           <p:spPr>
             <a:xfrm>
-              <a:off x="1852004" y="290861"/>
+              <a:off x="1794513" y="400734"/>
               <a:ext cx="1573035" cy="552543"/>
             </a:xfrm>
             <a:prstGeom prst="ellipse">
@@ -3659,7 +3663,7 @@
           </p:nvSpPr>
           <p:spPr>
             <a:xfrm>
-              <a:off x="834455" y="1805312"/>
+              <a:off x="264442" y="1996187"/>
               <a:ext cx="1230942" cy="552543"/>
             </a:xfrm>
             <a:prstGeom prst="ellipse">
@@ -3720,7 +3724,7 @@
           </p:nvSpPr>
           <p:spPr>
             <a:xfrm>
-              <a:off x="346838" y="1053075"/>
+              <a:off x="710769" y="1328959"/>
               <a:ext cx="1230942" cy="552543"/>
             </a:xfrm>
             <a:prstGeom prst="ellipse">
@@ -3781,7 +3785,7 @@
           </p:nvSpPr>
           <p:spPr>
             <a:xfrm>
-              <a:off x="2421719" y="4259889"/>
+              <a:off x="2357704" y="4207714"/>
               <a:ext cx="1230942" cy="552543"/>
             </a:xfrm>
             <a:prstGeom prst="ellipse">
@@ -3842,7 +3846,7 @@
           </p:nvSpPr>
           <p:spPr>
             <a:xfrm>
-              <a:off x="2003780" y="972218"/>
+              <a:off x="2136606" y="1232097"/>
               <a:ext cx="1230942" cy="552543"/>
             </a:xfrm>
             <a:prstGeom prst="ellipse">
@@ -3903,7 +3907,7 @@
           </p:nvSpPr>
           <p:spPr>
             <a:xfrm>
-              <a:off x="218984" y="2430887"/>
+              <a:off x="1189968" y="2663415"/>
               <a:ext cx="1230942" cy="552543"/>
             </a:xfrm>
             <a:prstGeom prst="ellipse">
@@ -3964,13 +3968,13 @@
           </p:nvSpPr>
           <p:spPr>
             <a:xfrm>
-              <a:off x="3949381" y="349447"/>
+              <a:off x="4612145" y="302313"/>
               <a:ext cx="1573035" cy="552543"/>
             </a:xfrm>
             <a:prstGeom prst="ellipse">
               <a:avLst/>
             </a:prstGeom>
-            <a:ln w="38100"/>
+            <a:ln w="76200" cmpd="dbl"/>
           </p:spPr>
           <p:style>
             <a:lnRef idx="2">
@@ -4018,7 +4022,7 @@
           </p:nvSpPr>
           <p:spPr>
             <a:xfrm>
-              <a:off x="361624" y="4474662"/>
+              <a:off x="512267" y="4179079"/>
               <a:ext cx="1230942" cy="552543"/>
             </a:xfrm>
             <a:prstGeom prst="ellipse">
@@ -4079,7 +4083,7 @@
           </p:nvSpPr>
           <p:spPr>
             <a:xfrm>
-              <a:off x="2311247" y="5028635"/>
+              <a:off x="2311247" y="4981501"/>
               <a:ext cx="1230942" cy="552543"/>
             </a:xfrm>
             <a:prstGeom prst="ellipse">
@@ -4147,7 +4151,7 @@
           </p:nvSpPr>
           <p:spPr>
             <a:xfrm>
-              <a:off x="481951" y="5686783"/>
+              <a:off x="481951" y="5639649"/>
               <a:ext cx="1829833" cy="552543"/>
             </a:xfrm>
             <a:prstGeom prst="ellipse">
@@ -4219,7 +4223,7 @@
           </p:nvSpPr>
           <p:spPr>
             <a:xfrm>
-              <a:off x="7491361" y="5919750"/>
+              <a:off x="7469913" y="5943528"/>
               <a:ext cx="1230942" cy="552543"/>
             </a:xfrm>
             <a:prstGeom prst="ellipse">
@@ -4280,7 +4284,7 @@
           </p:nvSpPr>
           <p:spPr>
             <a:xfrm>
-              <a:off x="4856900" y="5919751"/>
+              <a:off x="5040667" y="5943527"/>
               <a:ext cx="1911574" cy="552543"/>
             </a:xfrm>
             <a:prstGeom prst="ellipse">
@@ -4341,7 +4345,7 @@
           </p:nvSpPr>
           <p:spPr>
             <a:xfrm>
-              <a:off x="10525569" y="3634785"/>
+              <a:off x="10526992" y="3586719"/>
               <a:ext cx="1230942" cy="552543"/>
             </a:xfrm>
             <a:prstGeom prst="ellipse">
@@ -4402,7 +4406,7 @@
           </p:nvSpPr>
           <p:spPr>
             <a:xfrm>
-              <a:off x="10354523" y="2576649"/>
+              <a:off x="10354523" y="2388239"/>
               <a:ext cx="1573035" cy="552543"/>
             </a:xfrm>
             <a:prstGeom prst="ellipse">
@@ -4460,7 +4464,7 @@
           </p:nvSpPr>
           <p:spPr>
             <a:xfrm>
-              <a:off x="8792414" y="655237"/>
+              <a:off x="8792414" y="267661"/>
               <a:ext cx="1230942" cy="552543"/>
             </a:xfrm>
             <a:prstGeom prst="ellipse">
@@ -4521,7 +4525,7 @@
           </p:nvSpPr>
           <p:spPr>
             <a:xfrm>
-              <a:off x="8792414" y="2018501"/>
+              <a:off x="8792414" y="1032952"/>
               <a:ext cx="1230942" cy="552543"/>
             </a:xfrm>
             <a:prstGeom prst="ellipse">
@@ -4582,7 +4586,7 @@
           </p:nvSpPr>
           <p:spPr>
             <a:xfrm>
-              <a:off x="4665120" y="1414657"/>
+              <a:off x="4665120" y="1367523"/>
               <a:ext cx="1467087" cy="833652"/>
             </a:xfrm>
             <a:prstGeom prst="flowChartDecision">
@@ -4636,7 +4640,7 @@
           </p:nvSpPr>
           <p:spPr>
             <a:xfrm>
-              <a:off x="3933255" y="4382313"/>
+              <a:off x="3933255" y="4335179"/>
               <a:ext cx="1467087" cy="833652"/>
             </a:xfrm>
             <a:prstGeom prst="flowChartDecision">
@@ -4694,7 +4698,7 @@
           </p:nvSpPr>
           <p:spPr>
             <a:xfrm>
-              <a:off x="6218698" y="2902802"/>
+              <a:off x="6218698" y="2855668"/>
               <a:ext cx="1467087" cy="833652"/>
             </a:xfrm>
             <a:prstGeom prst="flowChartDecision">
@@ -4748,7 +4752,7 @@
           </p:nvSpPr>
           <p:spPr>
             <a:xfrm>
-              <a:off x="8476721" y="4382313"/>
+              <a:off x="8476721" y="4335179"/>
               <a:ext cx="1467087" cy="833652"/>
             </a:xfrm>
             <a:prstGeom prst="flowChartDecision">
@@ -4806,8 +4810,8 @@
           </p:nvCxnSpPr>
           <p:spPr>
             <a:xfrm>
-              <a:off x="3425039" y="567133"/>
-              <a:ext cx="762283" cy="2752496"/>
+              <a:off x="3367548" y="677006"/>
+              <a:ext cx="819774" cy="2595489"/>
             </a:xfrm>
             <a:prstGeom prst="line">
               <a:avLst/>
@@ -4851,8 +4855,8 @@
           </p:nvCxnSpPr>
           <p:spPr>
             <a:xfrm>
-              <a:off x="3234722" y="1248490"/>
-              <a:ext cx="952600" cy="2071139"/>
+              <a:off x="3367548" y="1508369"/>
+              <a:ext cx="819774" cy="1764126"/>
             </a:xfrm>
             <a:prstGeom prst="line">
               <a:avLst/>
@@ -4888,7 +4892,6 @@
               </a:extLst>
             </p:cNvPr>
             <p:cNvCxnSpPr>
-              <a:cxnSpLocks/>
               <a:stCxn id="14" idx="6"/>
               <a:endCxn id="4" idx="1"/>
             </p:cNvCxnSpPr>
@@ -4896,8 +4899,8 @@
           </p:nvCxnSpPr>
           <p:spPr>
             <a:xfrm>
-              <a:off x="1577780" y="1329347"/>
-              <a:ext cx="2609542" cy="1990282"/>
+              <a:off x="1941711" y="1605231"/>
+              <a:ext cx="2245611" cy="1667264"/>
             </a:xfrm>
             <a:prstGeom prst="line">
               <a:avLst/>
@@ -4941,8 +4944,8 @@
           </p:nvCxnSpPr>
           <p:spPr>
             <a:xfrm flipV="1">
-              <a:off x="3652661" y="3319629"/>
-              <a:ext cx="534661" cy="1216532"/>
+              <a:off x="3588646" y="3272495"/>
+              <a:ext cx="598676" cy="1211491"/>
             </a:xfrm>
             <a:prstGeom prst="line">
               <a:avLst/>
@@ -4985,8 +4988,8 @@
           </p:nvCxnSpPr>
           <p:spPr>
             <a:xfrm flipV="1">
-              <a:off x="1592566" y="3319629"/>
-              <a:ext cx="2594756" cy="1431305"/>
+              <a:off x="1743209" y="3272495"/>
+              <a:ext cx="2444113" cy="1182856"/>
             </a:xfrm>
             <a:prstGeom prst="line">
               <a:avLst/>
@@ -5030,8 +5033,8 @@
           </p:nvCxnSpPr>
           <p:spPr>
             <a:xfrm>
-              <a:off x="2065397" y="2081584"/>
-              <a:ext cx="2121925" cy="1238045"/>
+              <a:off x="1495384" y="2272459"/>
+              <a:ext cx="2691938" cy="1000036"/>
             </a:xfrm>
             <a:prstGeom prst="line">
               <a:avLst/>
@@ -5067,7 +5070,6 @@
               </a:extLst>
             </p:cNvPr>
             <p:cNvCxnSpPr>
-              <a:cxnSpLocks/>
               <a:stCxn id="18" idx="6"/>
               <a:endCxn id="4" idx="1"/>
             </p:cNvCxnSpPr>
@@ -5075,8 +5077,8 @@
           </p:nvCxnSpPr>
           <p:spPr>
             <a:xfrm>
-              <a:off x="1449926" y="2707159"/>
-              <a:ext cx="2737396" cy="612470"/>
+              <a:off x="2420910" y="2939687"/>
+              <a:ext cx="1766412" cy="332808"/>
             </a:xfrm>
             <a:prstGeom prst="line">
               <a:avLst/>
@@ -5120,7 +5122,7 @@
           </p:nvCxnSpPr>
           <p:spPr>
             <a:xfrm flipV="1">
-              <a:off x="3542189" y="3319629"/>
+              <a:off x="3542189" y="3272495"/>
               <a:ext cx="645133" cy="1985278"/>
             </a:xfrm>
             <a:prstGeom prst="line">
@@ -5165,7 +5167,7 @@
           </p:nvCxnSpPr>
           <p:spPr>
             <a:xfrm flipH="1">
-              <a:off x="2311784" y="5581178"/>
+              <a:off x="2311784" y="5534044"/>
               <a:ext cx="614934" cy="381877"/>
             </a:xfrm>
             <a:prstGeom prst="line">
@@ -5210,8 +5212,8 @@
           </p:nvCxnSpPr>
           <p:spPr>
             <a:xfrm flipH="1">
-              <a:off x="5812687" y="5507044"/>
-              <a:ext cx="1196749" cy="412707"/>
+              <a:off x="5996454" y="5459910"/>
+              <a:ext cx="1012982" cy="483617"/>
             </a:xfrm>
             <a:prstGeom prst="line">
               <a:avLst/>
@@ -5255,8 +5257,8 @@
           </p:nvCxnSpPr>
           <p:spPr>
             <a:xfrm>
-              <a:off x="7009436" y="5507044"/>
-              <a:ext cx="1097396" cy="412706"/>
+              <a:off x="7009436" y="5459910"/>
+              <a:ext cx="1075948" cy="483618"/>
             </a:xfrm>
             <a:prstGeom prst="line">
               <a:avLst/>
@@ -5299,8 +5301,8 @@
           </p:nvCxnSpPr>
           <p:spPr>
             <a:xfrm flipV="1">
-              <a:off x="9692189" y="2852921"/>
-              <a:ext cx="662334" cy="465705"/>
+              <a:off x="9692189" y="2664511"/>
+              <a:ext cx="662334" cy="606981"/>
             </a:xfrm>
             <a:prstGeom prst="line">
               <a:avLst/>
@@ -5343,8 +5345,8 @@
           </p:nvCxnSpPr>
           <p:spPr>
             <a:xfrm>
-              <a:off x="9692189" y="3318626"/>
-              <a:ext cx="833380" cy="592431"/>
+              <a:off x="9692189" y="3271492"/>
+              <a:ext cx="834803" cy="591499"/>
             </a:xfrm>
             <a:prstGeom prst="line">
               <a:avLst/>
@@ -5386,9 +5388,9 @@
             <p:nvPr/>
           </p:nvCxnSpPr>
           <p:spPr>
-            <a:xfrm>
-              <a:off x="8203765" y="1827201"/>
-              <a:ext cx="588649" cy="467572"/>
+            <a:xfrm flipV="1">
+              <a:off x="8203765" y="1309224"/>
+              <a:ext cx="588649" cy="470843"/>
             </a:xfrm>
             <a:prstGeom prst="line">
               <a:avLst/>
@@ -5431,8 +5433,8 @@
           </p:nvCxnSpPr>
           <p:spPr>
             <a:xfrm flipV="1">
-              <a:off x="8203765" y="931509"/>
-              <a:ext cx="588649" cy="895692"/>
+              <a:off x="8203765" y="543933"/>
+              <a:ext cx="588649" cy="1236134"/>
             </a:xfrm>
             <a:prstGeom prst="line">
               <a:avLst/>
@@ -5475,7 +5477,7 @@
           </p:nvCxnSpPr>
           <p:spPr>
             <a:xfrm flipH="1">
-              <a:off x="4666799" y="3608965"/>
+              <a:off x="4666799" y="3561831"/>
               <a:ext cx="2448" cy="773348"/>
             </a:xfrm>
             <a:prstGeom prst="line">
@@ -5520,7 +5522,7 @@
           </p:nvCxnSpPr>
           <p:spPr>
             <a:xfrm>
-              <a:off x="4666799" y="5215965"/>
+              <a:off x="4666799" y="5168831"/>
               <a:ext cx="1860712" cy="1743"/>
             </a:xfrm>
             <a:prstGeom prst="line">
@@ -5565,7 +5567,7 @@
           </p:nvCxnSpPr>
           <p:spPr>
             <a:xfrm flipV="1">
-              <a:off x="7491361" y="5215965"/>
+              <a:off x="7491361" y="5168831"/>
               <a:ext cx="1718904" cy="1743"/>
             </a:xfrm>
             <a:prstGeom prst="line">
@@ -5609,7 +5611,7 @@
           </p:nvCxnSpPr>
           <p:spPr>
             <a:xfrm flipH="1" flipV="1">
-              <a:off x="9210264" y="3607962"/>
+              <a:off x="9210264" y="3560828"/>
               <a:ext cx="1" cy="774351"/>
             </a:xfrm>
             <a:prstGeom prst="line">
@@ -5653,7 +5655,7 @@
           </p:nvCxnSpPr>
           <p:spPr>
             <a:xfrm flipV="1">
-              <a:off x="7685785" y="3318626"/>
+              <a:off x="7685785" y="3271492"/>
               <a:ext cx="1042554" cy="1002"/>
             </a:xfrm>
             <a:prstGeom prst="line">
@@ -5697,7 +5699,7 @@
           </p:nvCxnSpPr>
           <p:spPr>
             <a:xfrm flipV="1">
-              <a:off x="5151172" y="3319628"/>
+              <a:off x="5151172" y="3272494"/>
               <a:ext cx="1067526" cy="1"/>
             </a:xfrm>
             <a:prstGeom prst="line">
@@ -5741,7 +5743,7 @@
           </p:nvCxnSpPr>
           <p:spPr>
             <a:xfrm>
-              <a:off x="4665120" y="1831483"/>
+              <a:off x="4665120" y="1784349"/>
               <a:ext cx="4127" cy="1198809"/>
             </a:xfrm>
             <a:prstGeom prst="line">
@@ -5785,7 +5787,7 @@
           </p:nvCxnSpPr>
           <p:spPr>
             <a:xfrm flipV="1">
-              <a:off x="6132207" y="1827201"/>
+              <a:off x="6132207" y="1780067"/>
               <a:ext cx="1107708" cy="4282"/>
             </a:xfrm>
             <a:prstGeom prst="line">
@@ -5829,8 +5831,8 @@
           </p:nvCxnSpPr>
           <p:spPr>
             <a:xfrm flipH="1" flipV="1">
-              <a:off x="4735899" y="901990"/>
-              <a:ext cx="662765" cy="512667"/>
+              <a:off x="5398663" y="854856"/>
+              <a:ext cx="1" cy="512667"/>
             </a:xfrm>
             <a:prstGeom prst="line">
               <a:avLst/>
@@ -5866,22 +5868,23 @@
               </a:extLst>
             </p:cNvPr>
             <p:cNvCxnSpPr>
-              <a:stCxn id="11" idx="4"/>
-              <a:endCxn id="29" idx="0"/>
+              <a:cxnSpLocks/>
+              <a:stCxn id="11" idx="2"/>
+              <a:endCxn id="8" idx="3"/>
             </p:cNvCxnSpPr>
             <p:nvPr/>
           </p:nvCxnSpPr>
           <p:spPr>
-            <a:xfrm flipH="1">
-              <a:off x="5398664" y="867338"/>
-              <a:ext cx="1179870" cy="547319"/>
+            <a:xfrm flipH="1" flipV="1">
+              <a:off x="8203765" y="1780067"/>
+              <a:ext cx="588649" cy="354463"/>
             </a:xfrm>
             <a:prstGeom prst="line">
               <a:avLst/>
             </a:prstGeom>
             <a:ln w="38100">
               <a:solidFill>
-                <a:srgbClr val="ED7D31"/>
+                <a:srgbClr val="4D4D4D"/>
               </a:solidFill>
             </a:ln>
           </p:spPr>
@@ -5914,7 +5917,7 @@
           </p:nvSpPr>
           <p:spPr>
             <a:xfrm>
-              <a:off x="6527511" y="4928371"/>
+              <a:off x="6527511" y="4881237"/>
               <a:ext cx="963850" cy="578673"/>
             </a:xfrm>
             <a:prstGeom prst="rect">
@@ -5975,7 +5978,7 @@
           </p:nvSpPr>
           <p:spPr>
             <a:xfrm>
-              <a:off x="1043414" y="3029289"/>
+              <a:off x="1003826" y="3418533"/>
               <a:ext cx="1230942" cy="552543"/>
             </a:xfrm>
             <a:prstGeom prst="ellipse">
@@ -6038,9 +6041,9 @@
             <p:nvPr/>
           </p:nvCxnSpPr>
           <p:spPr>
-            <a:xfrm>
-              <a:off x="2274356" y="3305561"/>
-              <a:ext cx="1912966" cy="14068"/>
+            <a:xfrm flipV="1">
+              <a:off x="2234768" y="3272495"/>
+              <a:ext cx="1952554" cy="422310"/>
             </a:xfrm>
             <a:prstGeom prst="line">
               <a:avLst/>
@@ -6068,116 +6071,54 @@
         </p:cxnSp>
         <p:sp>
           <p:nvSpPr>
-            <p:cNvPr id="55" name="橢圓 54">
-              <a:extLst>
-                <a:ext uri="{FF2B5EF4-FFF2-40B4-BE49-F238E27FC236}">
-                  <a16:creationId xmlns:a16="http://schemas.microsoft.com/office/drawing/2014/main" id="{5A7D492C-D947-02CE-97A8-3631A7E2CA59}"/>
-                </a:ext>
-              </a:extLst>
-            </p:cNvPr>
-            <p:cNvSpPr/>
+            <p:cNvPr id="38" name="文字方塊 37">
+              <a:extLst>
+                <a:ext uri="{FF2B5EF4-FFF2-40B4-BE49-F238E27FC236}">
+                  <a16:creationId xmlns:a16="http://schemas.microsoft.com/office/drawing/2014/main" id="{BB0A17A0-8AC3-4401-92F8-48CC09698C99}"/>
+                </a:ext>
+              </a:extLst>
+            </p:cNvPr>
+            <p:cNvSpPr txBox="1"/>
             <p:nvPr/>
           </p:nvSpPr>
           <p:spPr>
             <a:xfrm>
-              <a:off x="1050960" y="3758206"/>
-              <a:ext cx="1230942" cy="552543"/>
-            </a:xfrm>
-            <a:prstGeom prst="ellipse">
+              <a:off x="9210264" y="3755124"/>
+              <a:ext cx="372218" cy="369332"/>
+            </a:xfrm>
+            <a:prstGeom prst="rect">
               <a:avLst/>
             </a:prstGeom>
             <a:noFill/>
-            <a:ln w="38100">
-              <a:solidFill>
-                <a:srgbClr val="2F528F"/>
-              </a:solidFill>
-            </a:ln>
-          </p:spPr>
-          <p:style>
-            <a:lnRef idx="2">
-              <a:schemeClr val="accent1">
-                <a:shade val="50000"/>
-              </a:schemeClr>
-            </a:lnRef>
-            <a:fillRef idx="1">
-              <a:schemeClr val="accent1"/>
-            </a:fillRef>
-            <a:effectRef idx="0">
-              <a:schemeClr val="accent1"/>
-            </a:effectRef>
-            <a:fontRef idx="minor">
-              <a:schemeClr val="lt1"/>
-            </a:fontRef>
-          </p:style>
+          </p:spPr>
           <p:txBody>
-            <a:bodyPr rtlCol="0" anchor="ctr"/>
+            <a:bodyPr wrap="none" rtlCol="0">
+              <a:spAutoFit/>
+            </a:bodyPr>
             <a:lstStyle/>
             <a:p>
-              <a:pPr algn="ctr"/>
               <a:r>
-                <a:rPr lang="zh-TW" altLang="en-US" dirty="0">
+                <a:rPr lang="en-US" altLang="zh-TW" b="1" dirty="0">
                   <a:solidFill>
-                    <a:sysClr val="windowText" lastClr="000000"/>
+                    <a:srgbClr val="ED7D31"/>
                   </a:solidFill>
-                  <a:latin typeface="微軟正黑體" panose="020B0604030504040204" pitchFamily="34" charset="-120"/>
-                  <a:ea typeface="微軟正黑體" panose="020B0604030504040204" pitchFamily="34" charset="-120"/>
                 </a:rPr>
-                <a:t>系列</a:t>
+                <a:t>m</a:t>
               </a:r>
+              <a:endParaRPr lang="zh-TW" altLang="en-US" b="1" dirty="0">
+                <a:solidFill>
+                  <a:srgbClr val="ED7D31"/>
+                </a:solidFill>
+              </a:endParaRPr>
             </a:p>
           </p:txBody>
         </p:sp>
-        <p:cxnSp>
-          <p:nvCxnSpPr>
-            <p:cNvPr id="57" name="直線接點 56">
-              <a:extLst>
-                <a:ext uri="{FF2B5EF4-FFF2-40B4-BE49-F238E27FC236}">
-                  <a16:creationId xmlns:a16="http://schemas.microsoft.com/office/drawing/2014/main" id="{F7CCFE67-190A-F374-6D99-DB8C16DA77A5}"/>
-                </a:ext>
-              </a:extLst>
-            </p:cNvPr>
-            <p:cNvCxnSpPr>
-              <a:cxnSpLocks/>
-              <a:stCxn id="55" idx="6"/>
-              <a:endCxn id="4" idx="1"/>
-            </p:cNvCxnSpPr>
-            <p:nvPr/>
-          </p:nvCxnSpPr>
-          <p:spPr>
-            <a:xfrm flipV="1">
-              <a:off x="2281902" y="3319629"/>
-              <a:ext cx="1905420" cy="714849"/>
-            </a:xfrm>
-            <a:prstGeom prst="line">
-              <a:avLst/>
-            </a:prstGeom>
-            <a:ln w="38100">
-              <a:solidFill>
-                <a:srgbClr val="2F528F"/>
-              </a:solidFill>
-            </a:ln>
-          </p:spPr>
-          <p:style>
-            <a:lnRef idx="1">
-              <a:schemeClr val="accent1"/>
-            </a:lnRef>
-            <a:fillRef idx="0">
-              <a:schemeClr val="accent1"/>
-            </a:fillRef>
-            <a:effectRef idx="0">
-              <a:schemeClr val="accent1"/>
-            </a:effectRef>
-            <a:fontRef idx="minor">
-              <a:schemeClr val="tx1"/>
-            </a:fontRef>
-          </p:style>
-        </p:cxnSp>
         <p:sp>
           <p:nvSpPr>
             <p:cNvPr id="64" name="文字方塊 63">
               <a:extLst>
                 <a:ext uri="{FF2B5EF4-FFF2-40B4-BE49-F238E27FC236}">
-                  <a16:creationId xmlns:a16="http://schemas.microsoft.com/office/drawing/2014/main" id="{BB3F4FBB-7259-DE84-C6F5-B0B6DDFC3AEE}"/>
+                  <a16:creationId xmlns:a16="http://schemas.microsoft.com/office/drawing/2014/main" id="{B932F89F-DA41-4B18-85A4-91D3D3AE6254}"/>
                 </a:ext>
               </a:extLst>
             </p:cNvPr>
@@ -6186,7 +6127,51 @@
           </p:nvSpPr>
           <p:spPr>
             <a:xfrm>
-              <a:off x="8086717" y="2946202"/>
+              <a:off x="5550799" y="2857049"/>
+              <a:ext cx="308098" cy="369332"/>
+            </a:xfrm>
+            <a:prstGeom prst="rect">
+              <a:avLst/>
+            </a:prstGeom>
+            <a:noFill/>
+          </p:spPr>
+          <p:txBody>
+            <a:bodyPr wrap="none" rtlCol="0">
+              <a:spAutoFit/>
+            </a:bodyPr>
+            <a:lstStyle/>
+            <a:p>
+              <a:r>
+                <a:rPr lang="en-US" altLang="zh-TW" b="1" dirty="0">
+                  <a:solidFill>
+                    <a:srgbClr val="ED7D31"/>
+                  </a:solidFill>
+                </a:rPr>
+                <a:t>n</a:t>
+              </a:r>
+              <a:endParaRPr lang="zh-TW" altLang="en-US" b="1" dirty="0">
+                <a:solidFill>
+                  <a:srgbClr val="ED7D31"/>
+                </a:solidFill>
+              </a:endParaRPr>
+            </a:p>
+          </p:txBody>
+        </p:sp>
+        <p:sp>
+          <p:nvSpPr>
+            <p:cNvPr id="65" name="文字方塊 64">
+              <a:extLst>
+                <a:ext uri="{FF2B5EF4-FFF2-40B4-BE49-F238E27FC236}">
+                  <a16:creationId xmlns:a16="http://schemas.microsoft.com/office/drawing/2014/main" id="{65B7BF98-E8C9-4F76-A59C-13E115F33771}"/>
+                </a:ext>
+              </a:extLst>
+            </p:cNvPr>
+            <p:cNvSpPr txBox="1"/>
+            <p:nvPr/>
+          </p:nvSpPr>
+          <p:spPr>
+            <a:xfrm>
+              <a:off x="8145724" y="2855570"/>
               <a:ext cx="301686" cy="369332"/>
             </a:xfrm>
             <a:prstGeom prst="rect">
@@ -6218,10 +6203,10 @@
         </p:sp>
         <p:sp>
           <p:nvSpPr>
-            <p:cNvPr id="65" name="文字方塊 64">
-              <a:extLst>
-                <a:ext uri="{FF2B5EF4-FFF2-40B4-BE49-F238E27FC236}">
-                  <a16:creationId xmlns:a16="http://schemas.microsoft.com/office/drawing/2014/main" id="{BA75AB1B-105E-9971-C4AE-F5A6338EB984}"/>
+            <p:cNvPr id="66" name="文字方塊 65">
+              <a:extLst>
+                <a:ext uri="{FF2B5EF4-FFF2-40B4-BE49-F238E27FC236}">
+                  <a16:creationId xmlns:a16="http://schemas.microsoft.com/office/drawing/2014/main" id="{72B39064-389D-49D5-8347-E2F15C515391}"/>
                 </a:ext>
               </a:extLst>
             </p:cNvPr>
@@ -6230,8 +6215,8 @@
           </p:nvSpPr>
           <p:spPr>
             <a:xfrm>
-              <a:off x="4271788" y="3849811"/>
-              <a:ext cx="308098" cy="369332"/>
+              <a:off x="5574668" y="4761244"/>
+              <a:ext cx="301686" cy="369332"/>
             </a:xfrm>
             <a:prstGeom prst="rect">
               <a:avLst/>
@@ -6250,7 +6235,7 @@
                     <a:srgbClr val="ED7D31"/>
                   </a:solidFill>
                 </a:rPr>
-                <a:t>n</a:t>
+                <a:t>1</a:t>
               </a:r>
               <a:endParaRPr lang="zh-TW" altLang="en-US" b="1" dirty="0">
                 <a:solidFill>
@@ -6262,10 +6247,10 @@
         </p:sp>
         <p:sp>
           <p:nvSpPr>
-            <p:cNvPr id="66" name="文字方塊 65">
-              <a:extLst>
-                <a:ext uri="{FF2B5EF4-FFF2-40B4-BE49-F238E27FC236}">
-                  <a16:creationId xmlns:a16="http://schemas.microsoft.com/office/drawing/2014/main" id="{29876635-666F-78C1-1B59-1477142226A2}"/>
+            <p:cNvPr id="67" name="文字方塊 66">
+              <a:extLst>
+                <a:ext uri="{FF2B5EF4-FFF2-40B4-BE49-F238E27FC236}">
+                  <a16:creationId xmlns:a16="http://schemas.microsoft.com/office/drawing/2014/main" id="{327DB8C5-05A5-4AEE-89EA-BCE23FB8D151}"/>
                 </a:ext>
               </a:extLst>
             </p:cNvPr>
@@ -6274,7 +6259,7 @@
           </p:nvSpPr>
           <p:spPr>
             <a:xfrm>
-              <a:off x="4276504" y="2331409"/>
+              <a:off x="4264597" y="2263268"/>
               <a:ext cx="372218" cy="369332"/>
             </a:xfrm>
             <a:prstGeom prst="rect">
@@ -6306,10 +6291,10 @@
         </p:sp>
         <p:sp>
           <p:nvSpPr>
-            <p:cNvPr id="67" name="文字方塊 66">
-              <a:extLst>
-                <a:ext uri="{FF2B5EF4-FFF2-40B4-BE49-F238E27FC236}">
-                  <a16:creationId xmlns:a16="http://schemas.microsoft.com/office/drawing/2014/main" id="{9DE4D70D-85ED-C307-B75E-B5E2AD43AED4}"/>
+            <p:cNvPr id="68" name="文字方塊 67">
+              <a:extLst>
+                <a:ext uri="{FF2B5EF4-FFF2-40B4-BE49-F238E27FC236}">
+                  <a16:creationId xmlns:a16="http://schemas.microsoft.com/office/drawing/2014/main" id="{82C568CE-4DBC-4A1E-B700-64B22D4A261F}"/>
                 </a:ext>
               </a:extLst>
             </p:cNvPr>
@@ -6318,51 +6303,7 @@
           </p:nvSpPr>
           <p:spPr>
             <a:xfrm>
-              <a:off x="5567546" y="5277661"/>
-              <a:ext cx="301686" cy="369332"/>
-            </a:xfrm>
-            <a:prstGeom prst="rect">
-              <a:avLst/>
-            </a:prstGeom>
-            <a:noFill/>
-          </p:spPr>
-          <p:txBody>
-            <a:bodyPr wrap="none" rtlCol="0">
-              <a:spAutoFit/>
-            </a:bodyPr>
-            <a:lstStyle/>
-            <a:p>
-              <a:r>
-                <a:rPr lang="en-US" altLang="zh-TW" b="1" dirty="0">
-                  <a:solidFill>
-                    <a:srgbClr val="ED7D31"/>
-                  </a:solidFill>
-                </a:rPr>
-                <a:t>1</a:t>
-              </a:r>
-              <a:endParaRPr lang="zh-TW" altLang="en-US" b="1" dirty="0">
-                <a:solidFill>
-                  <a:srgbClr val="ED7D31"/>
-                </a:solidFill>
-              </a:endParaRPr>
-            </a:p>
-          </p:txBody>
-        </p:sp>
-        <p:sp>
-          <p:nvSpPr>
-            <p:cNvPr id="68" name="文字方塊 67">
-              <a:extLst>
-                <a:ext uri="{FF2B5EF4-FFF2-40B4-BE49-F238E27FC236}">
-                  <a16:creationId xmlns:a16="http://schemas.microsoft.com/office/drawing/2014/main" id="{EAEB7E16-5AFB-F82A-D940-579D335E40E7}"/>
-                </a:ext>
-              </a:extLst>
-            </p:cNvPr>
-            <p:cNvSpPr txBox="1"/>
-            <p:nvPr/>
-          </p:nvSpPr>
-          <p:spPr>
-            <a:xfrm>
-              <a:off x="6575677" y="1436182"/>
+              <a:off x="7988469" y="4752005"/>
               <a:ext cx="308098" cy="369332"/>
             </a:xfrm>
             <a:prstGeom prst="rect">
@@ -6397,7 +6338,7 @@
             <p:cNvPr id="70" name="文字方塊 69">
               <a:extLst>
                 <a:ext uri="{FF2B5EF4-FFF2-40B4-BE49-F238E27FC236}">
-                  <a16:creationId xmlns:a16="http://schemas.microsoft.com/office/drawing/2014/main" id="{3130797A-65BF-CECE-508E-76E77ADB1CA0}"/>
+                  <a16:creationId xmlns:a16="http://schemas.microsoft.com/office/drawing/2014/main" id="{0E4D0BE4-AE01-4FD8-8310-03E7D92239C2}"/>
                 </a:ext>
               </a:extLst>
             </p:cNvPr>
@@ -6406,7 +6347,7 @@
           </p:nvSpPr>
           <p:spPr>
             <a:xfrm>
-              <a:off x="8199767" y="5259339"/>
+              <a:off x="6517772" y="1420564"/>
               <a:ext cx="308098" cy="369332"/>
             </a:xfrm>
             <a:prstGeom prst="rect">
@@ -6438,10 +6379,10 @@
         </p:sp>
         <p:sp>
           <p:nvSpPr>
-            <p:cNvPr id="72" name="文字方塊 71">
-              <a:extLst>
-                <a:ext uri="{FF2B5EF4-FFF2-40B4-BE49-F238E27FC236}">
-                  <a16:creationId xmlns:a16="http://schemas.microsoft.com/office/drawing/2014/main" id="{9DBBFDB9-3773-CC73-59AE-1218B6AFD16C}"/>
+            <p:cNvPr id="71" name="文字方塊 70">
+              <a:extLst>
+                <a:ext uri="{FF2B5EF4-FFF2-40B4-BE49-F238E27FC236}">
+                  <a16:creationId xmlns:a16="http://schemas.microsoft.com/office/drawing/2014/main" id="{9ABAFE30-B10B-40B2-B1AC-85B0C5A64B65}"/>
                 </a:ext>
               </a:extLst>
             </p:cNvPr>
@@ -6450,7 +6391,7 @@
           </p:nvSpPr>
           <p:spPr>
             <a:xfrm>
-              <a:off x="5509668" y="2940331"/>
+              <a:off x="4268894" y="3763337"/>
               <a:ext cx="308098" cy="369332"/>
             </a:xfrm>
             <a:prstGeom prst="rect">
@@ -6471,50 +6412,6 @@
                   </a:solidFill>
                 </a:rPr>
                 <a:t>n</a:t>
-              </a:r>
-              <a:endParaRPr lang="zh-TW" altLang="en-US" b="1" dirty="0">
-                <a:solidFill>
-                  <a:srgbClr val="ED7D31"/>
-                </a:solidFill>
-              </a:endParaRPr>
-            </a:p>
-          </p:txBody>
-        </p:sp>
-        <p:sp>
-          <p:nvSpPr>
-            <p:cNvPr id="73" name="文字方塊 72">
-              <a:extLst>
-                <a:ext uri="{FF2B5EF4-FFF2-40B4-BE49-F238E27FC236}">
-                  <a16:creationId xmlns:a16="http://schemas.microsoft.com/office/drawing/2014/main" id="{A5B7503C-D851-16E2-52DC-F7AE073D0C64}"/>
-                </a:ext>
-              </a:extLst>
-            </p:cNvPr>
-            <p:cNvSpPr txBox="1"/>
-            <p:nvPr/>
-          </p:nvSpPr>
-          <p:spPr>
-            <a:xfrm>
-              <a:off x="9221776" y="3810471"/>
-              <a:ext cx="372218" cy="369332"/>
-            </a:xfrm>
-            <a:prstGeom prst="rect">
-              <a:avLst/>
-            </a:prstGeom>
-            <a:noFill/>
-          </p:spPr>
-          <p:txBody>
-            <a:bodyPr wrap="none" rtlCol="0">
-              <a:spAutoFit/>
-            </a:bodyPr>
-            <a:lstStyle/>
-            <a:p>
-              <a:r>
-                <a:rPr lang="en-US" altLang="zh-TW" b="1" dirty="0">
-                  <a:solidFill>
-                    <a:srgbClr val="ED7D31"/>
-                  </a:solidFill>
-                </a:rPr>
-                <a:t>m</a:t>
               </a:r>
               <a:endParaRPr lang="zh-TW" altLang="en-US" b="1" dirty="0">
                 <a:solidFill>
@@ -6557,10 +6454,10 @@
       </p:grpSpPr>
       <p:grpSp>
         <p:nvGrpSpPr>
-          <p:cNvPr id="58" name="群組 57">
+          <p:cNvPr id="38" name="群組 37">
             <a:extLst>
               <a:ext uri="{FF2B5EF4-FFF2-40B4-BE49-F238E27FC236}">
-                <a16:creationId xmlns:a16="http://schemas.microsoft.com/office/drawing/2014/main" id="{4001C8BB-7364-0A29-83D2-68CC5E9FAA2C}"/>
+                <a16:creationId xmlns:a16="http://schemas.microsoft.com/office/drawing/2014/main" id="{F96F601F-A4FC-4EED-82A6-9000E26ED304}"/>
               </a:ext>
             </a:extLst>
           </p:cNvPr>
@@ -6569,10 +6466,10 @@
         </p:nvGrpSpPr>
         <p:grpSpPr>
           <a:xfrm>
-            <a:off x="177829" y="271280"/>
-            <a:ext cx="11836342" cy="6315440"/>
-            <a:chOff x="163201" y="271280"/>
-            <a:chExt cx="11836342" cy="6315440"/>
+            <a:off x="192458" y="270045"/>
+            <a:ext cx="11807085" cy="6317910"/>
+            <a:chOff x="192458" y="268810"/>
+            <a:chExt cx="11807085" cy="6317910"/>
           </a:xfrm>
         </p:grpSpPr>
         <p:sp>
@@ -6861,13 +6758,17 @@
           </p:nvSpPr>
           <p:spPr>
             <a:xfrm>
-              <a:off x="5897674" y="618497"/>
+              <a:off x="8710124" y="1947546"/>
               <a:ext cx="2108100" cy="552543"/>
             </a:xfrm>
             <a:prstGeom prst="ellipse">
               <a:avLst/>
             </a:prstGeom>
-            <a:ln w="38100"/>
+            <a:ln w="76200" cmpd="dbl">
+              <a:solidFill>
+                <a:srgbClr val="4D4D4D"/>
+              </a:solidFill>
+            </a:ln>
           </p:spPr>
           <p:style>
             <a:lnRef idx="2">
@@ -7262,7 +7163,7 @@
           </p:nvSpPr>
           <p:spPr>
             <a:xfrm>
-              <a:off x="163201" y="2573307"/>
+              <a:off x="312214" y="2842813"/>
               <a:ext cx="1230942" cy="552543"/>
             </a:xfrm>
             <a:prstGeom prst="ellipse">
@@ -7330,13 +7231,13 @@
           </p:nvSpPr>
           <p:spPr>
             <a:xfrm>
-              <a:off x="4161086" y="271280"/>
-              <a:ext cx="1373737" cy="552543"/>
+              <a:off x="4757519" y="399917"/>
+              <a:ext cx="1426257" cy="552543"/>
             </a:xfrm>
             <a:prstGeom prst="ellipse">
               <a:avLst/>
             </a:prstGeom>
-            <a:ln w="38100"/>
+            <a:ln w="76200" cmpd="dbl"/>
           </p:spPr>
           <p:style>
             <a:lnRef idx="2">
@@ -7391,7 +7292,7 @@
           </p:nvSpPr>
           <p:spPr>
             <a:xfrm>
-              <a:off x="1925300" y="4077599"/>
+              <a:off x="1999463" y="3953639"/>
               <a:ext cx="1230942" cy="552543"/>
             </a:xfrm>
             <a:prstGeom prst="ellipse">
@@ -7865,7 +7766,7 @@
           </p:nvSpPr>
           <p:spPr>
             <a:xfrm>
-              <a:off x="8864398" y="698752"/>
+              <a:off x="8948568" y="268810"/>
               <a:ext cx="1562109" cy="552543"/>
             </a:xfrm>
             <a:prstGeom prst="ellipse">
@@ -7933,7 +7834,7 @@
           </p:nvSpPr>
           <p:spPr>
             <a:xfrm>
-              <a:off x="8864398" y="1712647"/>
+              <a:off x="8859157" y="1069763"/>
               <a:ext cx="1730451" cy="552543"/>
             </a:xfrm>
             <a:prstGeom prst="ellipse">
@@ -8425,7 +8326,6 @@
               </a:extLst>
             </p:cNvPr>
             <p:cNvCxnSpPr>
-              <a:cxnSpLocks/>
               <a:stCxn id="20" idx="6"/>
               <a:endCxn id="4" idx="1"/>
             </p:cNvCxnSpPr>
@@ -8433,8 +8333,8 @@
           </p:nvCxnSpPr>
           <p:spPr>
             <a:xfrm flipV="1">
-              <a:off x="3156242" y="3363144"/>
-              <a:ext cx="1103065" cy="990727"/>
+              <a:off x="3230405" y="3363144"/>
+              <a:ext cx="1028902" cy="866767"/>
             </a:xfrm>
             <a:prstGeom prst="line">
               <a:avLst/>
@@ -8515,7 +8415,6 @@
               </a:extLst>
             </p:cNvPr>
             <p:cNvCxnSpPr>
-              <a:cxnSpLocks/>
               <a:stCxn id="18" idx="6"/>
               <a:endCxn id="4" idx="1"/>
             </p:cNvCxnSpPr>
@@ -8523,8 +8422,8 @@
           </p:nvCxnSpPr>
           <p:spPr>
             <a:xfrm>
-              <a:off x="1394143" y="2849579"/>
-              <a:ext cx="2865164" cy="513565"/>
+              <a:off x="1543156" y="3119085"/>
+              <a:ext cx="2716151" cy="244059"/>
             </a:xfrm>
             <a:prstGeom prst="line">
               <a:avLst/>
@@ -8740,7 +8639,6 @@
               </a:extLst>
             </p:cNvPr>
             <p:cNvCxnSpPr>
-              <a:cxnSpLocks/>
               <a:stCxn id="7" idx="3"/>
               <a:endCxn id="26" idx="2"/>
             </p:cNvCxnSpPr>
@@ -8785,7 +8683,6 @@
               </a:extLst>
             </p:cNvPr>
             <p:cNvCxnSpPr>
-              <a:cxnSpLocks/>
               <a:stCxn id="7" idx="3"/>
               <a:endCxn id="25" idx="2"/>
             </p:cNvCxnSpPr>
@@ -8837,9 +8734,9 @@
             <p:nvPr/>
           </p:nvCxnSpPr>
           <p:spPr>
-            <a:xfrm>
-              <a:off x="8275750" y="1870716"/>
-              <a:ext cx="588648" cy="118203"/>
+            <a:xfrm flipV="1">
+              <a:off x="8275750" y="1346035"/>
+              <a:ext cx="583407" cy="524681"/>
             </a:xfrm>
             <a:prstGeom prst="line">
               <a:avLst/>
@@ -8883,8 +8780,8 @@
           </p:nvCxnSpPr>
           <p:spPr>
             <a:xfrm flipV="1">
-              <a:off x="8275750" y="975024"/>
-              <a:ext cx="588648" cy="895692"/>
+              <a:off x="8275750" y="545082"/>
+              <a:ext cx="672818" cy="1325634"/>
             </a:xfrm>
             <a:prstGeom prst="line">
               <a:avLst/>
@@ -9190,7 +9087,6 @@
               </a:extLst>
             </p:cNvPr>
             <p:cNvCxnSpPr>
-              <a:cxnSpLocks/>
               <a:stCxn id="29" idx="1"/>
               <a:endCxn id="4" idx="0"/>
             </p:cNvCxnSpPr>
@@ -9235,7 +9131,6 @@
               </a:extLst>
             </p:cNvPr>
             <p:cNvCxnSpPr>
-              <a:cxnSpLocks/>
               <a:stCxn id="29" idx="3"/>
               <a:endCxn id="8" idx="1"/>
             </p:cNvCxnSpPr>
@@ -9288,8 +9183,8 @@
           </p:nvCxnSpPr>
           <p:spPr>
             <a:xfrm flipH="1" flipV="1">
-              <a:off x="4847955" y="823823"/>
-              <a:ext cx="622694" cy="634349"/>
+              <a:off x="5470648" y="952460"/>
+              <a:ext cx="1" cy="505712"/>
             </a:xfrm>
             <a:prstGeom prst="line">
               <a:avLst/>
@@ -9326,22 +9221,22 @@
             </p:cNvPr>
             <p:cNvCxnSpPr>
               <a:cxnSpLocks/>
-              <a:stCxn id="11" idx="4"/>
-              <a:endCxn id="29" idx="0"/>
+              <a:stCxn id="11" idx="2"/>
+              <a:endCxn id="8" idx="3"/>
             </p:cNvCxnSpPr>
             <p:nvPr/>
           </p:nvCxnSpPr>
           <p:spPr>
-            <a:xfrm flipH="1">
-              <a:off x="5470649" y="1171040"/>
-              <a:ext cx="1481075" cy="287132"/>
+            <a:xfrm flipH="1" flipV="1">
+              <a:off x="8275750" y="1870716"/>
+              <a:ext cx="434374" cy="353102"/>
             </a:xfrm>
             <a:prstGeom prst="line">
               <a:avLst/>
             </a:prstGeom>
             <a:ln w="38100">
               <a:solidFill>
-                <a:srgbClr val="ED7D31"/>
+                <a:srgbClr val="4D4D4D"/>
               </a:solidFill>
             </a:ln>
           </p:spPr>
@@ -9374,7 +9269,7 @@
           </p:nvSpPr>
           <p:spPr>
             <a:xfrm>
-              <a:off x="1154402" y="3207838"/>
+              <a:off x="312214" y="3671628"/>
               <a:ext cx="1492137" cy="552543"/>
             </a:xfrm>
             <a:prstGeom prst="ellipse">
@@ -9438,7 +9333,6 @@
               </a:extLst>
             </p:cNvPr>
             <p:cNvCxnSpPr>
-              <a:cxnSpLocks/>
               <a:stCxn id="56" idx="6"/>
               <a:endCxn id="4" idx="1"/>
             </p:cNvCxnSpPr>
@@ -9446,8 +9340,8 @@
           </p:nvCxnSpPr>
           <p:spPr>
             <a:xfrm flipV="1">
-              <a:off x="2646539" y="3363144"/>
-              <a:ext cx="1612768" cy="120966"/>
+              <a:off x="1804351" y="3363144"/>
+              <a:ext cx="2454956" cy="584756"/>
             </a:xfrm>
             <a:prstGeom prst="line">
               <a:avLst/>
@@ -9473,472 +9367,359 @@
             </a:fontRef>
           </p:style>
         </p:cxnSp>
-        <p:sp>
-          <p:nvSpPr>
-            <p:cNvPr id="2" name="橢圓 1">
-              <a:extLst>
-                <a:ext uri="{FF2B5EF4-FFF2-40B4-BE49-F238E27FC236}">
-                  <a16:creationId xmlns:a16="http://schemas.microsoft.com/office/drawing/2014/main" id="{0C27E502-8E56-576F-2822-D37DE4441AAB}"/>
-                </a:ext>
-              </a:extLst>
-            </p:cNvPr>
-            <p:cNvSpPr/>
-            <p:nvPr/>
-          </p:nvSpPr>
-          <p:spPr>
-            <a:xfrm>
-              <a:off x="192458" y="3842275"/>
-              <a:ext cx="1492137" cy="552543"/>
-            </a:xfrm>
-            <a:prstGeom prst="ellipse">
-              <a:avLst/>
-            </a:prstGeom>
-            <a:noFill/>
-            <a:ln w="38100">
-              <a:solidFill>
-                <a:srgbClr val="2F528F"/>
-              </a:solidFill>
-            </a:ln>
-          </p:spPr>
-          <p:style>
-            <a:lnRef idx="2">
-              <a:schemeClr val="accent1">
-                <a:shade val="50000"/>
-              </a:schemeClr>
-            </a:lnRef>
-            <a:fillRef idx="1">
-              <a:schemeClr val="accent1"/>
-            </a:fillRef>
-            <a:effectRef idx="0">
-              <a:schemeClr val="accent1"/>
-            </a:effectRef>
-            <a:fontRef idx="minor">
-              <a:schemeClr val="lt1"/>
-            </a:fontRef>
-          </p:style>
-          <p:txBody>
-            <a:bodyPr rtlCol="0" anchor="ctr"/>
-            <a:lstStyle/>
-            <a:p>
-              <a:pPr algn="ctr"/>
-              <a:r>
-                <a:rPr lang="en-US" altLang="zh-TW" dirty="0">
-                  <a:solidFill>
-                    <a:sysClr val="windowText" lastClr="000000"/>
-                  </a:solidFill>
-                  <a:latin typeface="微軟正黑體" panose="020B0604030504040204" pitchFamily="34" charset="-120"/>
-                  <a:ea typeface="微軟正黑體" panose="020B0604030504040204" pitchFamily="34" charset="-120"/>
-                </a:rPr>
-                <a:t>Series</a:t>
-              </a:r>
-              <a:endParaRPr lang="zh-TW" altLang="en-US" dirty="0">
-                <a:solidFill>
-                  <a:sysClr val="windowText" lastClr="000000"/>
-                </a:solidFill>
-                <a:latin typeface="微軟正黑體" panose="020B0604030504040204" pitchFamily="34" charset="-120"/>
-                <a:ea typeface="微軟正黑體" panose="020B0604030504040204" pitchFamily="34" charset="-120"/>
-              </a:endParaRPr>
-            </a:p>
-          </p:txBody>
-        </p:sp>
-        <p:cxnSp>
-          <p:nvCxnSpPr>
-            <p:cNvPr id="3" name="直線接點 2">
-              <a:extLst>
-                <a:ext uri="{FF2B5EF4-FFF2-40B4-BE49-F238E27FC236}">
-                  <a16:creationId xmlns:a16="http://schemas.microsoft.com/office/drawing/2014/main" id="{18507A98-6CF2-DD24-C0EF-3BCF3E92134A}"/>
-                </a:ext>
-              </a:extLst>
-            </p:cNvPr>
-            <p:cNvCxnSpPr>
-              <a:cxnSpLocks/>
-              <a:stCxn id="2" idx="6"/>
-              <a:endCxn id="4" idx="1"/>
-            </p:cNvCxnSpPr>
-            <p:nvPr/>
-          </p:nvCxnSpPr>
-          <p:spPr>
-            <a:xfrm flipV="1">
-              <a:off x="1684595" y="3363144"/>
-              <a:ext cx="2574712" cy="755403"/>
-            </a:xfrm>
-            <a:prstGeom prst="line">
-              <a:avLst/>
-            </a:prstGeom>
-            <a:ln w="38100">
-              <a:solidFill>
-                <a:srgbClr val="2F528F"/>
-              </a:solidFill>
-            </a:ln>
-          </p:spPr>
-          <p:style>
-            <a:lnRef idx="1">
-              <a:schemeClr val="accent1"/>
-            </a:lnRef>
-            <a:fillRef idx="0">
-              <a:schemeClr val="accent1"/>
-            </a:fillRef>
-            <a:effectRef idx="0">
-              <a:schemeClr val="accent1"/>
-            </a:effectRef>
-            <a:fontRef idx="minor">
-              <a:schemeClr val="tx1"/>
-            </a:fontRef>
-          </p:style>
-        </p:cxnSp>
-        <p:sp>
-          <p:nvSpPr>
-            <p:cNvPr id="45" name="文字方塊 44">
-              <a:extLst>
-                <a:ext uri="{FF2B5EF4-FFF2-40B4-BE49-F238E27FC236}">
-                  <a16:creationId xmlns:a16="http://schemas.microsoft.com/office/drawing/2014/main" id="{BBA8A04A-E50C-B3F2-9174-B8166C270F7E}"/>
-                </a:ext>
-              </a:extLst>
-            </p:cNvPr>
-            <p:cNvSpPr txBox="1"/>
-            <p:nvPr/>
-          </p:nvSpPr>
-          <p:spPr>
-            <a:xfrm>
-              <a:off x="8148863" y="2946202"/>
-              <a:ext cx="301686" cy="369332"/>
-            </a:xfrm>
-            <a:prstGeom prst="rect">
-              <a:avLst/>
-            </a:prstGeom>
-            <a:noFill/>
-          </p:spPr>
-          <p:txBody>
-            <a:bodyPr wrap="none" rtlCol="0">
-              <a:spAutoFit/>
-            </a:bodyPr>
-            <a:lstStyle/>
-            <a:p>
-              <a:r>
-                <a:rPr lang="en-US" altLang="zh-TW" b="1" dirty="0">
-                  <a:solidFill>
-                    <a:srgbClr val="ED7D31"/>
-                  </a:solidFill>
-                </a:rPr>
-                <a:t>1</a:t>
-              </a:r>
-              <a:endParaRPr lang="zh-TW" altLang="en-US" b="1" dirty="0">
+      </p:grpSp>
+      <p:sp>
+        <p:nvSpPr>
+          <p:cNvPr id="62" name="文字方塊 61">
+            <a:extLst>
+              <a:ext uri="{FF2B5EF4-FFF2-40B4-BE49-F238E27FC236}">
+                <a16:creationId xmlns:a16="http://schemas.microsoft.com/office/drawing/2014/main" id="{3D8C1A10-819F-4DD6-B925-AC20448D018D}"/>
+              </a:ext>
+            </a:extLst>
+          </p:cNvPr>
+          <p:cNvSpPr txBox="1"/>
+          <p:nvPr/>
+        </p:nvSpPr>
+        <p:spPr>
+          <a:xfrm>
+            <a:off x="9313961" y="3849394"/>
+            <a:ext cx="372218" cy="369332"/>
+          </a:xfrm>
+          <a:prstGeom prst="rect">
+            <a:avLst/>
+          </a:prstGeom>
+          <a:noFill/>
+        </p:spPr>
+        <p:txBody>
+          <a:bodyPr wrap="none" rtlCol="0">
+            <a:spAutoFit/>
+          </a:bodyPr>
+          <a:lstStyle/>
+          <a:p>
+            <a:r>
+              <a:rPr lang="en-US" altLang="zh-TW" b="1" dirty="0">
                 <a:solidFill>
                   <a:srgbClr val="ED7D31"/>
                 </a:solidFill>
-              </a:endParaRPr>
-            </a:p>
-          </p:txBody>
-        </p:sp>
-        <p:sp>
-          <p:nvSpPr>
-            <p:cNvPr id="47" name="文字方塊 46">
-              <a:extLst>
-                <a:ext uri="{FF2B5EF4-FFF2-40B4-BE49-F238E27FC236}">
-                  <a16:creationId xmlns:a16="http://schemas.microsoft.com/office/drawing/2014/main" id="{14656F58-1ADE-02A0-1143-092B2A15D2A5}"/>
-                </a:ext>
-              </a:extLst>
-            </p:cNvPr>
-            <p:cNvSpPr txBox="1"/>
-            <p:nvPr/>
-          </p:nvSpPr>
-          <p:spPr>
-            <a:xfrm>
-              <a:off x="4333934" y="3849811"/>
-              <a:ext cx="308098" cy="369332"/>
-            </a:xfrm>
-            <a:prstGeom prst="rect">
-              <a:avLst/>
-            </a:prstGeom>
-            <a:noFill/>
-          </p:spPr>
-          <p:txBody>
-            <a:bodyPr wrap="none" rtlCol="0">
-              <a:spAutoFit/>
-            </a:bodyPr>
-            <a:lstStyle/>
-            <a:p>
-              <a:r>
-                <a:rPr lang="en-US" altLang="zh-TW" b="1" dirty="0">
-                  <a:solidFill>
-                    <a:srgbClr val="ED7D31"/>
-                  </a:solidFill>
-                </a:rPr>
-                <a:t>n</a:t>
-              </a:r>
-              <a:endParaRPr lang="zh-TW" altLang="en-US" b="1" dirty="0">
+              </a:rPr>
+              <a:t>m</a:t>
+            </a:r>
+            <a:endParaRPr lang="zh-TW" altLang="en-US" b="1" dirty="0">
+              <a:solidFill>
+                <a:srgbClr val="ED7D31"/>
+              </a:solidFill>
+            </a:endParaRPr>
+          </a:p>
+        </p:txBody>
+      </p:sp>
+      <p:sp>
+        <p:nvSpPr>
+          <p:cNvPr id="63" name="文字方塊 62">
+            <a:extLst>
+              <a:ext uri="{FF2B5EF4-FFF2-40B4-BE49-F238E27FC236}">
+                <a16:creationId xmlns:a16="http://schemas.microsoft.com/office/drawing/2014/main" id="{23F21494-4C4B-4E78-AC67-2048E0372D35}"/>
+              </a:ext>
+            </a:extLst>
+          </p:cNvPr>
+          <p:cNvSpPr txBox="1"/>
+          <p:nvPr/>
+        </p:nvSpPr>
+        <p:spPr>
+          <a:xfrm>
+            <a:off x="5550799" y="2951319"/>
+            <a:ext cx="308098" cy="369332"/>
+          </a:xfrm>
+          <a:prstGeom prst="rect">
+            <a:avLst/>
+          </a:prstGeom>
+          <a:noFill/>
+        </p:spPr>
+        <p:txBody>
+          <a:bodyPr wrap="none" rtlCol="0">
+            <a:spAutoFit/>
+          </a:bodyPr>
+          <a:lstStyle/>
+          <a:p>
+            <a:r>
+              <a:rPr lang="en-US" altLang="zh-TW" b="1" dirty="0">
                 <a:solidFill>
                   <a:srgbClr val="ED7D31"/>
                 </a:solidFill>
-              </a:endParaRPr>
-            </a:p>
-          </p:txBody>
-        </p:sp>
-        <p:sp>
-          <p:nvSpPr>
-            <p:cNvPr id="49" name="文字方塊 48">
-              <a:extLst>
-                <a:ext uri="{FF2B5EF4-FFF2-40B4-BE49-F238E27FC236}">
-                  <a16:creationId xmlns:a16="http://schemas.microsoft.com/office/drawing/2014/main" id="{834F2C92-8A7B-AC5B-597D-BA8E32C176C3}"/>
-                </a:ext>
-              </a:extLst>
-            </p:cNvPr>
-            <p:cNvSpPr txBox="1"/>
-            <p:nvPr/>
-          </p:nvSpPr>
-          <p:spPr>
-            <a:xfrm>
-              <a:off x="4338650" y="2331409"/>
-              <a:ext cx="372218" cy="369332"/>
-            </a:xfrm>
-            <a:prstGeom prst="rect">
-              <a:avLst/>
-            </a:prstGeom>
-            <a:noFill/>
-          </p:spPr>
-          <p:txBody>
-            <a:bodyPr wrap="none" rtlCol="0">
-              <a:spAutoFit/>
-            </a:bodyPr>
-            <a:lstStyle/>
-            <a:p>
-              <a:r>
-                <a:rPr lang="en-US" altLang="zh-TW" b="1" dirty="0">
-                  <a:solidFill>
-                    <a:srgbClr val="ED7D31"/>
-                  </a:solidFill>
-                </a:rPr>
-                <a:t>m</a:t>
-              </a:r>
-              <a:endParaRPr lang="zh-TW" altLang="en-US" b="1" dirty="0">
+              </a:rPr>
+              <a:t>n</a:t>
+            </a:r>
+            <a:endParaRPr lang="zh-TW" altLang="en-US" b="1" dirty="0">
+              <a:solidFill>
+                <a:srgbClr val="ED7D31"/>
+              </a:solidFill>
+            </a:endParaRPr>
+          </a:p>
+        </p:txBody>
+      </p:sp>
+      <p:sp>
+        <p:nvSpPr>
+          <p:cNvPr id="64" name="文字方塊 63">
+            <a:extLst>
+              <a:ext uri="{FF2B5EF4-FFF2-40B4-BE49-F238E27FC236}">
+                <a16:creationId xmlns:a16="http://schemas.microsoft.com/office/drawing/2014/main" id="{B3E33CFD-DC88-43C3-9E1A-F18243937F54}"/>
+              </a:ext>
+            </a:extLst>
+          </p:cNvPr>
+          <p:cNvSpPr txBox="1"/>
+          <p:nvPr/>
+        </p:nvSpPr>
+        <p:spPr>
+          <a:xfrm>
+            <a:off x="8145724" y="2949840"/>
+            <a:ext cx="301686" cy="369332"/>
+          </a:xfrm>
+          <a:prstGeom prst="rect">
+            <a:avLst/>
+          </a:prstGeom>
+          <a:noFill/>
+        </p:spPr>
+        <p:txBody>
+          <a:bodyPr wrap="none" rtlCol="0">
+            <a:spAutoFit/>
+          </a:bodyPr>
+          <a:lstStyle/>
+          <a:p>
+            <a:r>
+              <a:rPr lang="en-US" altLang="zh-TW" b="1" dirty="0">
                 <a:solidFill>
                   <a:srgbClr val="ED7D31"/>
                 </a:solidFill>
-              </a:endParaRPr>
-            </a:p>
-          </p:txBody>
-        </p:sp>
-        <p:sp>
-          <p:nvSpPr>
-            <p:cNvPr id="51" name="文字方塊 50">
-              <a:extLst>
-                <a:ext uri="{FF2B5EF4-FFF2-40B4-BE49-F238E27FC236}">
-                  <a16:creationId xmlns:a16="http://schemas.microsoft.com/office/drawing/2014/main" id="{7480586F-3395-6E02-C832-161F0B4D5353}"/>
-                </a:ext>
-              </a:extLst>
-            </p:cNvPr>
-            <p:cNvSpPr txBox="1"/>
-            <p:nvPr/>
-          </p:nvSpPr>
-          <p:spPr>
-            <a:xfrm>
-              <a:off x="5629692" y="5277661"/>
-              <a:ext cx="301686" cy="369332"/>
-            </a:xfrm>
-            <a:prstGeom prst="rect">
-              <a:avLst/>
-            </a:prstGeom>
-            <a:noFill/>
-          </p:spPr>
-          <p:txBody>
-            <a:bodyPr wrap="none" rtlCol="0">
-              <a:spAutoFit/>
-            </a:bodyPr>
-            <a:lstStyle/>
-            <a:p>
-              <a:r>
-                <a:rPr lang="en-US" altLang="zh-TW" b="1" dirty="0">
-                  <a:solidFill>
-                    <a:srgbClr val="ED7D31"/>
-                  </a:solidFill>
-                </a:rPr>
-                <a:t>1</a:t>
-              </a:r>
-              <a:endParaRPr lang="zh-TW" altLang="en-US" b="1" dirty="0">
+              </a:rPr>
+              <a:t>1</a:t>
+            </a:r>
+            <a:endParaRPr lang="zh-TW" altLang="en-US" b="1" dirty="0">
+              <a:solidFill>
+                <a:srgbClr val="ED7D31"/>
+              </a:solidFill>
+            </a:endParaRPr>
+          </a:p>
+        </p:txBody>
+      </p:sp>
+      <p:sp>
+        <p:nvSpPr>
+          <p:cNvPr id="65" name="文字方塊 64">
+            <a:extLst>
+              <a:ext uri="{FF2B5EF4-FFF2-40B4-BE49-F238E27FC236}">
+                <a16:creationId xmlns:a16="http://schemas.microsoft.com/office/drawing/2014/main" id="{4AB0C048-6AD3-4352-9829-91E52EDC04E8}"/>
+              </a:ext>
+            </a:extLst>
+          </p:cNvPr>
+          <p:cNvSpPr txBox="1"/>
+          <p:nvPr/>
+        </p:nvSpPr>
+        <p:spPr>
+          <a:xfrm>
+            <a:off x="5782061" y="4855514"/>
+            <a:ext cx="301686" cy="369332"/>
+          </a:xfrm>
+          <a:prstGeom prst="rect">
+            <a:avLst/>
+          </a:prstGeom>
+          <a:noFill/>
+        </p:spPr>
+        <p:txBody>
+          <a:bodyPr wrap="none" rtlCol="0">
+            <a:spAutoFit/>
+          </a:bodyPr>
+          <a:lstStyle/>
+          <a:p>
+            <a:r>
+              <a:rPr lang="en-US" altLang="zh-TW" b="1" dirty="0">
                 <a:solidFill>
                   <a:srgbClr val="ED7D31"/>
                 </a:solidFill>
-              </a:endParaRPr>
-            </a:p>
-          </p:txBody>
-        </p:sp>
-        <p:sp>
-          <p:nvSpPr>
-            <p:cNvPr id="53" name="文字方塊 52">
-              <a:extLst>
-                <a:ext uri="{FF2B5EF4-FFF2-40B4-BE49-F238E27FC236}">
-                  <a16:creationId xmlns:a16="http://schemas.microsoft.com/office/drawing/2014/main" id="{9E1ED487-3EA9-3EEF-B8B0-4DCE2A0CB1E6}"/>
-                </a:ext>
-              </a:extLst>
-            </p:cNvPr>
-            <p:cNvSpPr txBox="1"/>
-            <p:nvPr/>
-          </p:nvSpPr>
-          <p:spPr>
-            <a:xfrm>
-              <a:off x="6637823" y="1436182"/>
-              <a:ext cx="308098" cy="369332"/>
-            </a:xfrm>
-            <a:prstGeom prst="rect">
-              <a:avLst/>
-            </a:prstGeom>
-            <a:noFill/>
-          </p:spPr>
-          <p:txBody>
-            <a:bodyPr wrap="none" rtlCol="0">
-              <a:spAutoFit/>
-            </a:bodyPr>
-            <a:lstStyle/>
-            <a:p>
-              <a:r>
-                <a:rPr lang="en-US" altLang="zh-TW" b="1" dirty="0">
-                  <a:solidFill>
-                    <a:srgbClr val="ED7D31"/>
-                  </a:solidFill>
-                </a:rPr>
-                <a:t>n</a:t>
-              </a:r>
-              <a:endParaRPr lang="zh-TW" altLang="en-US" b="1" dirty="0">
+              </a:rPr>
+              <a:t>1</a:t>
+            </a:r>
+            <a:endParaRPr lang="zh-TW" altLang="en-US" b="1" dirty="0">
+              <a:solidFill>
+                <a:srgbClr val="ED7D31"/>
+              </a:solidFill>
+            </a:endParaRPr>
+          </a:p>
+        </p:txBody>
+      </p:sp>
+      <p:sp>
+        <p:nvSpPr>
+          <p:cNvPr id="66" name="文字方塊 65">
+            <a:extLst>
+              <a:ext uri="{FF2B5EF4-FFF2-40B4-BE49-F238E27FC236}">
+                <a16:creationId xmlns:a16="http://schemas.microsoft.com/office/drawing/2014/main" id="{7700FDC4-A189-4590-8985-A5FCA590E176}"/>
+              </a:ext>
+            </a:extLst>
+          </p:cNvPr>
+          <p:cNvSpPr txBox="1"/>
+          <p:nvPr/>
+        </p:nvSpPr>
+        <p:spPr>
+          <a:xfrm>
+            <a:off x="4368294" y="2357538"/>
+            <a:ext cx="372218" cy="369332"/>
+          </a:xfrm>
+          <a:prstGeom prst="rect">
+            <a:avLst/>
+          </a:prstGeom>
+          <a:noFill/>
+        </p:spPr>
+        <p:txBody>
+          <a:bodyPr wrap="none" rtlCol="0">
+            <a:spAutoFit/>
+          </a:bodyPr>
+          <a:lstStyle/>
+          <a:p>
+            <a:r>
+              <a:rPr lang="en-US" altLang="zh-TW" b="1" dirty="0">
                 <a:solidFill>
                   <a:srgbClr val="ED7D31"/>
                 </a:solidFill>
-              </a:endParaRPr>
-            </a:p>
-          </p:txBody>
-        </p:sp>
-        <p:sp>
-          <p:nvSpPr>
-            <p:cNvPr id="54" name="文字方塊 53">
-              <a:extLst>
-                <a:ext uri="{FF2B5EF4-FFF2-40B4-BE49-F238E27FC236}">
-                  <a16:creationId xmlns:a16="http://schemas.microsoft.com/office/drawing/2014/main" id="{4D63F78D-6E56-F181-A45A-7250EA5E5611}"/>
-                </a:ext>
-              </a:extLst>
-            </p:cNvPr>
-            <p:cNvSpPr txBox="1"/>
-            <p:nvPr/>
-          </p:nvSpPr>
-          <p:spPr>
-            <a:xfrm>
-              <a:off x="8261913" y="5259339"/>
-              <a:ext cx="308098" cy="369332"/>
-            </a:xfrm>
-            <a:prstGeom prst="rect">
-              <a:avLst/>
-            </a:prstGeom>
-            <a:noFill/>
-          </p:spPr>
-          <p:txBody>
-            <a:bodyPr wrap="none" rtlCol="0">
-              <a:spAutoFit/>
-            </a:bodyPr>
-            <a:lstStyle/>
-            <a:p>
-              <a:r>
-                <a:rPr lang="en-US" altLang="zh-TW" b="1" dirty="0">
-                  <a:solidFill>
-                    <a:srgbClr val="ED7D31"/>
-                  </a:solidFill>
-                </a:rPr>
-                <a:t>n</a:t>
-              </a:r>
-              <a:endParaRPr lang="zh-TW" altLang="en-US" b="1" dirty="0">
+              </a:rPr>
+              <a:t>m</a:t>
+            </a:r>
+            <a:endParaRPr lang="zh-TW" altLang="en-US" b="1" dirty="0">
+              <a:solidFill>
+                <a:srgbClr val="ED7D31"/>
+              </a:solidFill>
+            </a:endParaRPr>
+          </a:p>
+        </p:txBody>
+      </p:sp>
+      <p:sp>
+        <p:nvSpPr>
+          <p:cNvPr id="67" name="文字方塊 66">
+            <a:extLst>
+              <a:ext uri="{FF2B5EF4-FFF2-40B4-BE49-F238E27FC236}">
+                <a16:creationId xmlns:a16="http://schemas.microsoft.com/office/drawing/2014/main" id="{B52D6AF2-6E43-4895-BAD6-69EEC0A312DF}"/>
+              </a:ext>
+            </a:extLst>
+          </p:cNvPr>
+          <p:cNvSpPr txBox="1"/>
+          <p:nvPr/>
+        </p:nvSpPr>
+        <p:spPr>
+          <a:xfrm>
+            <a:off x="7799931" y="4846275"/>
+            <a:ext cx="308098" cy="369332"/>
+          </a:xfrm>
+          <a:prstGeom prst="rect">
+            <a:avLst/>
+          </a:prstGeom>
+          <a:noFill/>
+        </p:spPr>
+        <p:txBody>
+          <a:bodyPr wrap="none" rtlCol="0">
+            <a:spAutoFit/>
+          </a:bodyPr>
+          <a:lstStyle/>
+          <a:p>
+            <a:r>
+              <a:rPr lang="en-US" altLang="zh-TW" b="1" dirty="0">
                 <a:solidFill>
                   <a:srgbClr val="ED7D31"/>
                 </a:solidFill>
-              </a:endParaRPr>
-            </a:p>
-          </p:txBody>
-        </p:sp>
-        <p:sp>
-          <p:nvSpPr>
-            <p:cNvPr id="55" name="文字方塊 54">
-              <a:extLst>
-                <a:ext uri="{FF2B5EF4-FFF2-40B4-BE49-F238E27FC236}">
-                  <a16:creationId xmlns:a16="http://schemas.microsoft.com/office/drawing/2014/main" id="{17DB882D-9697-FDE0-112A-AEA91417CFD8}"/>
-                </a:ext>
-              </a:extLst>
-            </p:cNvPr>
-            <p:cNvSpPr txBox="1"/>
-            <p:nvPr/>
-          </p:nvSpPr>
-          <p:spPr>
-            <a:xfrm>
-              <a:off x="5571814" y="2940331"/>
-              <a:ext cx="308098" cy="369332"/>
-            </a:xfrm>
-            <a:prstGeom prst="rect">
-              <a:avLst/>
-            </a:prstGeom>
-            <a:noFill/>
-          </p:spPr>
-          <p:txBody>
-            <a:bodyPr wrap="none" rtlCol="0">
-              <a:spAutoFit/>
-            </a:bodyPr>
-            <a:lstStyle/>
-            <a:p>
-              <a:r>
-                <a:rPr lang="en-US" altLang="zh-TW" b="1" dirty="0">
-                  <a:solidFill>
-                    <a:srgbClr val="ED7D31"/>
-                  </a:solidFill>
-                </a:rPr>
-                <a:t>n</a:t>
-              </a:r>
-              <a:endParaRPr lang="zh-TW" altLang="en-US" b="1" dirty="0">
+              </a:rPr>
+              <a:t>n</a:t>
+            </a:r>
+            <a:endParaRPr lang="zh-TW" altLang="en-US" b="1" dirty="0">
+              <a:solidFill>
+                <a:srgbClr val="ED7D31"/>
+              </a:solidFill>
+            </a:endParaRPr>
+          </a:p>
+        </p:txBody>
+      </p:sp>
+      <p:sp>
+        <p:nvSpPr>
+          <p:cNvPr id="68" name="文字方塊 67">
+            <a:extLst>
+              <a:ext uri="{FF2B5EF4-FFF2-40B4-BE49-F238E27FC236}">
+                <a16:creationId xmlns:a16="http://schemas.microsoft.com/office/drawing/2014/main" id="{DBDBCB29-D269-41A8-8199-B8FE0891F1F0}"/>
+              </a:ext>
+            </a:extLst>
+          </p:cNvPr>
+          <p:cNvSpPr txBox="1"/>
+          <p:nvPr/>
+        </p:nvSpPr>
+        <p:spPr>
+          <a:xfrm>
+            <a:off x="6517772" y="1514834"/>
+            <a:ext cx="308098" cy="369332"/>
+          </a:xfrm>
+          <a:prstGeom prst="rect">
+            <a:avLst/>
+          </a:prstGeom>
+          <a:noFill/>
+        </p:spPr>
+        <p:txBody>
+          <a:bodyPr wrap="none" rtlCol="0">
+            <a:spAutoFit/>
+          </a:bodyPr>
+          <a:lstStyle/>
+          <a:p>
+            <a:r>
+              <a:rPr lang="en-US" altLang="zh-TW" b="1" dirty="0">
                 <a:solidFill>
                   <a:srgbClr val="ED7D31"/>
                 </a:solidFill>
-              </a:endParaRPr>
-            </a:p>
-          </p:txBody>
-        </p:sp>
-        <p:sp>
-          <p:nvSpPr>
-            <p:cNvPr id="57" name="文字方塊 56">
-              <a:extLst>
-                <a:ext uri="{FF2B5EF4-FFF2-40B4-BE49-F238E27FC236}">
-                  <a16:creationId xmlns:a16="http://schemas.microsoft.com/office/drawing/2014/main" id="{2DA9E1DF-B9DE-ED67-EB27-E7FEF0D8E041}"/>
-                </a:ext>
-              </a:extLst>
-            </p:cNvPr>
-            <p:cNvSpPr txBox="1"/>
-            <p:nvPr/>
-          </p:nvSpPr>
-          <p:spPr>
-            <a:xfrm>
-              <a:off x="9354114" y="3860579"/>
-              <a:ext cx="372218" cy="369332"/>
-            </a:xfrm>
-            <a:prstGeom prst="rect">
-              <a:avLst/>
-            </a:prstGeom>
-            <a:noFill/>
-          </p:spPr>
-          <p:txBody>
-            <a:bodyPr wrap="none" rtlCol="0">
-              <a:spAutoFit/>
-            </a:bodyPr>
-            <a:lstStyle/>
-            <a:p>
-              <a:r>
-                <a:rPr lang="en-US" altLang="zh-TW" b="1" dirty="0">
-                  <a:solidFill>
-                    <a:srgbClr val="ED7D31"/>
-                  </a:solidFill>
-                </a:rPr>
-                <a:t>m</a:t>
-              </a:r>
-              <a:endParaRPr lang="zh-TW" altLang="en-US" b="1" dirty="0">
+              </a:rPr>
+              <a:t>n</a:t>
+            </a:r>
+            <a:endParaRPr lang="zh-TW" altLang="en-US" b="1" dirty="0">
+              <a:solidFill>
+                <a:srgbClr val="ED7D31"/>
+              </a:solidFill>
+            </a:endParaRPr>
+          </a:p>
+        </p:txBody>
+      </p:sp>
+      <p:sp>
+        <p:nvSpPr>
+          <p:cNvPr id="69" name="文字方塊 68">
+            <a:extLst>
+              <a:ext uri="{FF2B5EF4-FFF2-40B4-BE49-F238E27FC236}">
+                <a16:creationId xmlns:a16="http://schemas.microsoft.com/office/drawing/2014/main" id="{6C4AE39F-50F2-4421-92FB-47EFDC966B88}"/>
+              </a:ext>
+            </a:extLst>
+          </p:cNvPr>
+          <p:cNvSpPr txBox="1"/>
+          <p:nvPr/>
+        </p:nvSpPr>
+        <p:spPr>
+          <a:xfrm>
+            <a:off x="4372591" y="3857607"/>
+            <a:ext cx="308098" cy="369332"/>
+          </a:xfrm>
+          <a:prstGeom prst="rect">
+            <a:avLst/>
+          </a:prstGeom>
+          <a:noFill/>
+        </p:spPr>
+        <p:txBody>
+          <a:bodyPr wrap="none" rtlCol="0">
+            <a:spAutoFit/>
+          </a:bodyPr>
+          <a:lstStyle/>
+          <a:p>
+            <a:r>
+              <a:rPr lang="en-US" altLang="zh-TW" b="1" dirty="0">
                 <a:solidFill>
                   <a:srgbClr val="ED7D31"/>
                 </a:solidFill>
-              </a:endParaRPr>
-            </a:p>
-          </p:txBody>
-        </p:sp>
-      </p:grpSp>
+              </a:rPr>
+              <a:t>n</a:t>
+            </a:r>
+            <a:endParaRPr lang="zh-TW" altLang="en-US" b="1" dirty="0">
+              <a:solidFill>
+                <a:srgbClr val="ED7D31"/>
+              </a:solidFill>
+            </a:endParaRPr>
+          </a:p>
+        </p:txBody>
+      </p:sp>
     </p:spTree>
     <p:extLst>
       <p:ext uri="{BB962C8B-B14F-4D97-AF65-F5344CB8AC3E}">

--- a/ER Model/ER.pptx
+++ b/ER Model/ER.pptx
@@ -5,8 +5,10 @@
     <p:sldMasterId id="2147483648" r:id="rId1"/>
   </p:sldMasterIdLst>
   <p:sldIdLst>
-    <p:sldId id="257" r:id="rId2"/>
-    <p:sldId id="258" r:id="rId3"/>
+    <p:sldId id="259" r:id="rId2"/>
+    <p:sldId id="260" r:id="rId3"/>
+    <p:sldId id="257" r:id="rId4"/>
+    <p:sldId id="258" r:id="rId5"/>
   </p:sldIdLst>
   <p:sldSz cx="12192000" cy="6858000"/>
   <p:notesSz cx="6858000" cy="9144000"/>
@@ -260,7 +262,7 @@
           <a:p>
             <a:fld id="{0D8238D4-763C-4F93-B535-FB0D7E2D5F46}" type="datetimeFigureOut">
               <a:rPr lang="zh-TW" altLang="en-US" smtClean="0"/>
-              <a:t>2025/5/1</a:t>
+              <a:t>2025/5/8</a:t>
             </a:fld>
             <a:endParaRPr lang="zh-TW" altLang="en-US"/>
           </a:p>
@@ -458,7 +460,7 @@
           <a:p>
             <a:fld id="{0D8238D4-763C-4F93-B535-FB0D7E2D5F46}" type="datetimeFigureOut">
               <a:rPr lang="zh-TW" altLang="en-US" smtClean="0"/>
-              <a:t>2025/5/1</a:t>
+              <a:t>2025/5/8</a:t>
             </a:fld>
             <a:endParaRPr lang="zh-TW" altLang="en-US"/>
           </a:p>
@@ -666,7 +668,7 @@
           <a:p>
             <a:fld id="{0D8238D4-763C-4F93-B535-FB0D7E2D5F46}" type="datetimeFigureOut">
               <a:rPr lang="zh-TW" altLang="en-US" smtClean="0"/>
-              <a:t>2025/5/1</a:t>
+              <a:t>2025/5/8</a:t>
             </a:fld>
             <a:endParaRPr lang="zh-TW" altLang="en-US"/>
           </a:p>
@@ -864,7 +866,7 @@
           <a:p>
             <a:fld id="{0D8238D4-763C-4F93-B535-FB0D7E2D5F46}" type="datetimeFigureOut">
               <a:rPr lang="zh-TW" altLang="en-US" smtClean="0"/>
-              <a:t>2025/5/1</a:t>
+              <a:t>2025/5/8</a:t>
             </a:fld>
             <a:endParaRPr lang="zh-TW" altLang="en-US"/>
           </a:p>
@@ -1139,7 +1141,7 @@
           <a:p>
             <a:fld id="{0D8238D4-763C-4F93-B535-FB0D7E2D5F46}" type="datetimeFigureOut">
               <a:rPr lang="zh-TW" altLang="en-US" smtClean="0"/>
-              <a:t>2025/5/1</a:t>
+              <a:t>2025/5/8</a:t>
             </a:fld>
             <a:endParaRPr lang="zh-TW" altLang="en-US"/>
           </a:p>
@@ -1404,7 +1406,7 @@
           <a:p>
             <a:fld id="{0D8238D4-763C-4F93-B535-FB0D7E2D5F46}" type="datetimeFigureOut">
               <a:rPr lang="zh-TW" altLang="en-US" smtClean="0"/>
-              <a:t>2025/5/1</a:t>
+              <a:t>2025/5/8</a:t>
             </a:fld>
             <a:endParaRPr lang="zh-TW" altLang="en-US"/>
           </a:p>
@@ -1816,7 +1818,7 @@
           <a:p>
             <a:fld id="{0D8238D4-763C-4F93-B535-FB0D7E2D5F46}" type="datetimeFigureOut">
               <a:rPr lang="zh-TW" altLang="en-US" smtClean="0"/>
-              <a:t>2025/5/1</a:t>
+              <a:t>2025/5/8</a:t>
             </a:fld>
             <a:endParaRPr lang="zh-TW" altLang="en-US"/>
           </a:p>
@@ -1957,7 +1959,7 @@
           <a:p>
             <a:fld id="{0D8238D4-763C-4F93-B535-FB0D7E2D5F46}" type="datetimeFigureOut">
               <a:rPr lang="zh-TW" altLang="en-US" smtClean="0"/>
-              <a:t>2025/5/1</a:t>
+              <a:t>2025/5/8</a:t>
             </a:fld>
             <a:endParaRPr lang="zh-TW" altLang="en-US"/>
           </a:p>
@@ -2070,7 +2072,7 @@
           <a:p>
             <a:fld id="{0D8238D4-763C-4F93-B535-FB0D7E2D5F46}" type="datetimeFigureOut">
               <a:rPr lang="zh-TW" altLang="en-US" smtClean="0"/>
-              <a:t>2025/5/1</a:t>
+              <a:t>2025/5/8</a:t>
             </a:fld>
             <a:endParaRPr lang="zh-TW" altLang="en-US"/>
           </a:p>
@@ -2381,7 +2383,7 @@
           <a:p>
             <a:fld id="{0D8238D4-763C-4F93-B535-FB0D7E2D5F46}" type="datetimeFigureOut">
               <a:rPr lang="zh-TW" altLang="en-US" smtClean="0"/>
-              <a:t>2025/5/1</a:t>
+              <a:t>2025/5/8</a:t>
             </a:fld>
             <a:endParaRPr lang="zh-TW" altLang="en-US"/>
           </a:p>
@@ -2669,7 +2671,7 @@
           <a:p>
             <a:fld id="{0D8238D4-763C-4F93-B535-FB0D7E2D5F46}" type="datetimeFigureOut">
               <a:rPr lang="zh-TW" altLang="en-US" smtClean="0"/>
-              <a:t>2025/5/1</a:t>
+              <a:t>2025/5/8</a:t>
             </a:fld>
             <a:endParaRPr lang="zh-TW" altLang="en-US"/>
           </a:p>
@@ -2910,7 +2912,7 @@
           <a:p>
             <a:fld id="{0D8238D4-763C-4F93-B535-FB0D7E2D5F46}" type="datetimeFigureOut">
               <a:rPr lang="zh-TW" altLang="en-US" smtClean="0"/>
-              <a:t>2025/5/1</a:t>
+              <a:t>2025/5/8</a:t>
             </a:fld>
             <a:endParaRPr lang="zh-TW" altLang="en-US"/>
           </a:p>
@@ -3329,6 +3331,7256 @@
       </p:grpSpPr>
       <p:grpSp>
         <p:nvGrpSpPr>
+          <p:cNvPr id="212" name="群組 211">
+            <a:extLst>
+              <a:ext uri="{FF2B5EF4-FFF2-40B4-BE49-F238E27FC236}">
+                <a16:creationId xmlns:a16="http://schemas.microsoft.com/office/drawing/2014/main" id="{6E005348-37DF-432A-9A82-04036B6D0484}"/>
+              </a:ext>
+            </a:extLst>
+          </p:cNvPr>
+          <p:cNvGrpSpPr/>
+          <p:nvPr/>
+        </p:nvGrpSpPr>
+        <p:grpSpPr>
+          <a:xfrm>
+            <a:off x="800314" y="236657"/>
+            <a:ext cx="10591372" cy="6315674"/>
+            <a:chOff x="722317" y="271163"/>
+            <a:chExt cx="10591372" cy="6315674"/>
+          </a:xfrm>
+        </p:grpSpPr>
+        <p:sp>
+          <p:nvSpPr>
+            <p:cNvPr id="4" name="矩形 3">
+              <a:extLst>
+                <a:ext uri="{FF2B5EF4-FFF2-40B4-BE49-F238E27FC236}">
+                  <a16:creationId xmlns:a16="http://schemas.microsoft.com/office/drawing/2014/main" id="{F6EEDF99-A567-46F5-A8F0-54E29683616E}"/>
+                </a:ext>
+              </a:extLst>
+            </p:cNvPr>
+            <p:cNvSpPr/>
+            <p:nvPr/>
+          </p:nvSpPr>
+          <p:spPr>
+            <a:xfrm>
+              <a:off x="3818670" y="2437872"/>
+              <a:ext cx="963850" cy="578673"/>
+            </a:xfrm>
+            <a:prstGeom prst="rect">
+              <a:avLst/>
+            </a:prstGeom>
+            <a:noFill/>
+            <a:ln w="38100">
+              <a:solidFill>
+                <a:srgbClr val="2F528F"/>
+              </a:solidFill>
+            </a:ln>
+          </p:spPr>
+          <p:style>
+            <a:lnRef idx="2">
+              <a:schemeClr val="accent1">
+                <a:shade val="50000"/>
+              </a:schemeClr>
+            </a:lnRef>
+            <a:fillRef idx="1">
+              <a:schemeClr val="accent1"/>
+            </a:fillRef>
+            <a:effectRef idx="0">
+              <a:schemeClr val="accent1"/>
+            </a:effectRef>
+            <a:fontRef idx="minor">
+              <a:schemeClr val="lt1"/>
+            </a:fontRef>
+          </p:style>
+          <p:txBody>
+            <a:bodyPr rtlCol="0" anchor="ctr"/>
+            <a:lstStyle/>
+            <a:p>
+              <a:pPr algn="ctr"/>
+              <a:r>
+                <a:rPr lang="zh-TW" altLang="en-US" dirty="0">
+                  <a:solidFill>
+                    <a:sysClr val="windowText" lastClr="000000"/>
+                  </a:solidFill>
+                  <a:latin typeface="微軟正黑體" panose="020B0604030504040204" pitchFamily="34" charset="-120"/>
+                  <a:ea typeface="微軟正黑體" panose="020B0604030504040204" pitchFamily="34" charset="-120"/>
+                </a:rPr>
+                <a:t>小說</a:t>
+              </a:r>
+            </a:p>
+          </p:txBody>
+        </p:sp>
+        <p:sp>
+          <p:nvSpPr>
+            <p:cNvPr id="7" name="矩形 6">
+              <a:extLst>
+                <a:ext uri="{FF2B5EF4-FFF2-40B4-BE49-F238E27FC236}">
+                  <a16:creationId xmlns:a16="http://schemas.microsoft.com/office/drawing/2014/main" id="{8BA4813D-5E1C-42D9-A51A-236FA101D354}"/>
+                </a:ext>
+              </a:extLst>
+            </p:cNvPr>
+            <p:cNvSpPr/>
+            <p:nvPr/>
+          </p:nvSpPr>
+          <p:spPr>
+            <a:xfrm>
+              <a:off x="8359687" y="2436869"/>
+              <a:ext cx="963850" cy="578673"/>
+            </a:xfrm>
+            <a:prstGeom prst="rect">
+              <a:avLst/>
+            </a:prstGeom>
+            <a:noFill/>
+            <a:ln w="38100">
+              <a:solidFill>
+                <a:srgbClr val="7030A0"/>
+              </a:solidFill>
+            </a:ln>
+          </p:spPr>
+          <p:style>
+            <a:lnRef idx="2">
+              <a:schemeClr val="accent1">
+                <a:shade val="50000"/>
+              </a:schemeClr>
+            </a:lnRef>
+            <a:fillRef idx="1">
+              <a:schemeClr val="accent1"/>
+            </a:fillRef>
+            <a:effectRef idx="0">
+              <a:schemeClr val="accent1"/>
+            </a:effectRef>
+            <a:fontRef idx="minor">
+              <a:schemeClr val="lt1"/>
+            </a:fontRef>
+          </p:style>
+          <p:txBody>
+            <a:bodyPr rtlCol="0" anchor="ctr"/>
+            <a:lstStyle/>
+            <a:p>
+              <a:pPr algn="ctr"/>
+              <a:r>
+                <a:rPr lang="zh-TW" altLang="en-US" dirty="0">
+                  <a:solidFill>
+                    <a:sysClr val="windowText" lastClr="000000"/>
+                  </a:solidFill>
+                  <a:latin typeface="微軟正黑體" panose="020B0604030504040204" pitchFamily="34" charset="-120"/>
+                  <a:ea typeface="微軟正黑體" panose="020B0604030504040204" pitchFamily="34" charset="-120"/>
+                </a:rPr>
+                <a:t>作者</a:t>
+              </a:r>
+            </a:p>
+          </p:txBody>
+        </p:sp>
+        <p:sp>
+          <p:nvSpPr>
+            <p:cNvPr id="8" name="矩形 7">
+              <a:extLst>
+                <a:ext uri="{FF2B5EF4-FFF2-40B4-BE49-F238E27FC236}">
+                  <a16:creationId xmlns:a16="http://schemas.microsoft.com/office/drawing/2014/main" id="{82182DAA-0E8C-4F5B-9213-F4B6CFB4F174}"/>
+                </a:ext>
+              </a:extLst>
+            </p:cNvPr>
+            <p:cNvSpPr/>
+            <p:nvPr/>
+          </p:nvSpPr>
+          <p:spPr>
+            <a:xfrm>
+              <a:off x="6937351" y="1392018"/>
+              <a:ext cx="963850" cy="578673"/>
+            </a:xfrm>
+            <a:prstGeom prst="rect">
+              <a:avLst/>
+            </a:prstGeom>
+            <a:noFill/>
+            <a:ln w="38100">
+              <a:solidFill>
+                <a:srgbClr val="4D4D4D"/>
+              </a:solidFill>
+            </a:ln>
+          </p:spPr>
+          <p:style>
+            <a:lnRef idx="2">
+              <a:schemeClr val="accent1">
+                <a:shade val="50000"/>
+              </a:schemeClr>
+            </a:lnRef>
+            <a:fillRef idx="1">
+              <a:schemeClr val="accent1"/>
+            </a:fillRef>
+            <a:effectRef idx="0">
+              <a:schemeClr val="accent1"/>
+            </a:effectRef>
+            <a:fontRef idx="minor">
+              <a:schemeClr val="lt1"/>
+            </a:fontRef>
+          </p:style>
+          <p:txBody>
+            <a:bodyPr rtlCol="0" anchor="ctr"/>
+            <a:lstStyle/>
+            <a:p>
+              <a:pPr algn="ctr"/>
+              <a:r>
+                <a:rPr lang="zh-TW" altLang="en-US" dirty="0">
+                  <a:solidFill>
+                    <a:sysClr val="windowText" lastClr="000000"/>
+                  </a:solidFill>
+                  <a:latin typeface="微軟正黑體" panose="020B0604030504040204" pitchFamily="34" charset="-120"/>
+                  <a:ea typeface="微軟正黑體" panose="020B0604030504040204" pitchFamily="34" charset="-120"/>
+                </a:rPr>
+                <a:t>使用者</a:t>
+              </a:r>
+            </a:p>
+          </p:txBody>
+        </p:sp>
+        <p:sp>
+          <p:nvSpPr>
+            <p:cNvPr id="11" name="橢圓 10">
+              <a:extLst>
+                <a:ext uri="{FF2B5EF4-FFF2-40B4-BE49-F238E27FC236}">
+                  <a16:creationId xmlns:a16="http://schemas.microsoft.com/office/drawing/2014/main" id="{A74CC088-F6BB-4D78-8774-E19DB0C79FE8}"/>
+                </a:ext>
+              </a:extLst>
+            </p:cNvPr>
+            <p:cNvSpPr/>
+            <p:nvPr/>
+          </p:nvSpPr>
+          <p:spPr>
+            <a:xfrm>
+              <a:off x="8877939" y="1637578"/>
+              <a:ext cx="1573035" cy="552543"/>
+            </a:xfrm>
+            <a:prstGeom prst="ellipse">
+              <a:avLst/>
+            </a:prstGeom>
+            <a:ln w="76200" cmpd="dbl">
+              <a:solidFill>
+                <a:srgbClr val="4D4D4D"/>
+              </a:solidFill>
+            </a:ln>
+          </p:spPr>
+          <p:style>
+            <a:lnRef idx="2">
+              <a:schemeClr val="accent2"/>
+            </a:lnRef>
+            <a:fillRef idx="1">
+              <a:schemeClr val="lt1"/>
+            </a:fillRef>
+            <a:effectRef idx="0">
+              <a:schemeClr val="accent2"/>
+            </a:effectRef>
+            <a:fontRef idx="minor">
+              <a:schemeClr val="dk1"/>
+            </a:fontRef>
+          </p:style>
+          <p:txBody>
+            <a:bodyPr rtlCol="0" anchor="ctr"/>
+            <a:lstStyle/>
+            <a:p>
+              <a:pPr algn="ctr"/>
+              <a:r>
+                <a:rPr lang="zh-TW" altLang="en-US" dirty="0">
+                  <a:solidFill>
+                    <a:sysClr val="windowText" lastClr="000000"/>
+                  </a:solidFill>
+                  <a:latin typeface="微軟正黑體" panose="020B0604030504040204" pitchFamily="34" charset="-120"/>
+                  <a:ea typeface="微軟正黑體" panose="020B0604030504040204" pitchFamily="34" charset="-120"/>
+                </a:rPr>
+                <a:t>愛心紀錄</a:t>
+              </a:r>
+            </a:p>
+          </p:txBody>
+        </p:sp>
+        <p:sp>
+          <p:nvSpPr>
+            <p:cNvPr id="12" name="橢圓 11">
+              <a:extLst>
+                <a:ext uri="{FF2B5EF4-FFF2-40B4-BE49-F238E27FC236}">
+                  <a16:creationId xmlns:a16="http://schemas.microsoft.com/office/drawing/2014/main" id="{50C7A5AB-1A86-48CD-8E4A-59295C6599A4}"/>
+                </a:ext>
+              </a:extLst>
+            </p:cNvPr>
+            <p:cNvSpPr/>
+            <p:nvPr/>
+          </p:nvSpPr>
+          <p:spPr>
+            <a:xfrm>
+              <a:off x="1835748" y="359170"/>
+              <a:ext cx="1573035" cy="552543"/>
+            </a:xfrm>
+            <a:prstGeom prst="ellipse">
+              <a:avLst/>
+            </a:prstGeom>
+            <a:noFill/>
+            <a:ln w="38100">
+              <a:solidFill>
+                <a:srgbClr val="2F528F"/>
+              </a:solidFill>
+            </a:ln>
+          </p:spPr>
+          <p:style>
+            <a:lnRef idx="2">
+              <a:schemeClr val="accent1">
+                <a:shade val="50000"/>
+              </a:schemeClr>
+            </a:lnRef>
+            <a:fillRef idx="1">
+              <a:schemeClr val="accent1"/>
+            </a:fillRef>
+            <a:effectRef idx="0">
+              <a:schemeClr val="accent1"/>
+            </a:effectRef>
+            <a:fontRef idx="minor">
+              <a:schemeClr val="lt1"/>
+            </a:fontRef>
+          </p:style>
+          <p:txBody>
+            <a:bodyPr rtlCol="0" anchor="ctr"/>
+            <a:lstStyle/>
+            <a:p>
+              <a:pPr algn="ctr"/>
+              <a:r>
+                <a:rPr lang="zh-TW" altLang="en-US" u="sng" dirty="0">
+                  <a:solidFill>
+                    <a:sysClr val="windowText" lastClr="000000"/>
+                  </a:solidFill>
+                  <a:latin typeface="微軟正黑體" panose="020B0604030504040204" pitchFamily="34" charset="-120"/>
+                  <a:ea typeface="微軟正黑體" panose="020B0604030504040204" pitchFamily="34" charset="-120"/>
+                </a:rPr>
+                <a:t>小說代號</a:t>
+              </a:r>
+            </a:p>
+          </p:txBody>
+        </p:sp>
+        <p:sp>
+          <p:nvSpPr>
+            <p:cNvPr id="13" name="橢圓 12">
+              <a:extLst>
+                <a:ext uri="{FF2B5EF4-FFF2-40B4-BE49-F238E27FC236}">
+                  <a16:creationId xmlns:a16="http://schemas.microsoft.com/office/drawing/2014/main" id="{3DA73774-161F-4E32-8D07-D371A0C6B297}"/>
+                </a:ext>
+              </a:extLst>
+            </p:cNvPr>
+            <p:cNvSpPr/>
+            <p:nvPr/>
+          </p:nvSpPr>
+          <p:spPr>
+            <a:xfrm>
+              <a:off x="1039283" y="1819349"/>
+              <a:ext cx="1230942" cy="552543"/>
+            </a:xfrm>
+            <a:prstGeom prst="ellipse">
+              <a:avLst/>
+            </a:prstGeom>
+            <a:noFill/>
+            <a:ln w="38100">
+              <a:solidFill>
+                <a:srgbClr val="2F528F"/>
+              </a:solidFill>
+            </a:ln>
+          </p:spPr>
+          <p:style>
+            <a:lnRef idx="2">
+              <a:schemeClr val="accent1">
+                <a:shade val="50000"/>
+              </a:schemeClr>
+            </a:lnRef>
+            <a:fillRef idx="1">
+              <a:schemeClr val="accent1"/>
+            </a:fillRef>
+            <a:effectRef idx="0">
+              <a:schemeClr val="accent1"/>
+            </a:effectRef>
+            <a:fontRef idx="minor">
+              <a:schemeClr val="lt1"/>
+            </a:fontRef>
+          </p:style>
+          <p:txBody>
+            <a:bodyPr rtlCol="0" anchor="ctr"/>
+            <a:lstStyle/>
+            <a:p>
+              <a:pPr algn="ctr"/>
+              <a:r>
+                <a:rPr lang="zh-TW" altLang="en-US" dirty="0">
+                  <a:solidFill>
+                    <a:sysClr val="windowText" lastClr="000000"/>
+                  </a:solidFill>
+                  <a:latin typeface="微軟正黑體" panose="020B0604030504040204" pitchFamily="34" charset="-120"/>
+                  <a:ea typeface="微軟正黑體" panose="020B0604030504040204" pitchFamily="34" charset="-120"/>
+                </a:rPr>
+                <a:t>狀態</a:t>
+              </a:r>
+            </a:p>
+          </p:txBody>
+        </p:sp>
+        <p:sp>
+          <p:nvSpPr>
+            <p:cNvPr id="14" name="橢圓 13">
+              <a:extLst>
+                <a:ext uri="{FF2B5EF4-FFF2-40B4-BE49-F238E27FC236}">
+                  <a16:creationId xmlns:a16="http://schemas.microsoft.com/office/drawing/2014/main" id="{6F1FBEB0-2E02-445D-899B-763581FD5A81}"/>
+                </a:ext>
+              </a:extLst>
+            </p:cNvPr>
+            <p:cNvSpPr/>
+            <p:nvPr/>
+          </p:nvSpPr>
+          <p:spPr>
+            <a:xfrm>
+              <a:off x="2264986" y="1637578"/>
+              <a:ext cx="1230942" cy="552543"/>
+            </a:xfrm>
+            <a:prstGeom prst="ellipse">
+              <a:avLst/>
+            </a:prstGeom>
+            <a:noFill/>
+            <a:ln w="38100">
+              <a:solidFill>
+                <a:srgbClr val="2F528F"/>
+              </a:solidFill>
+            </a:ln>
+          </p:spPr>
+          <p:style>
+            <a:lnRef idx="2">
+              <a:schemeClr val="accent1">
+                <a:shade val="50000"/>
+              </a:schemeClr>
+            </a:lnRef>
+            <a:fillRef idx="1">
+              <a:schemeClr val="accent1"/>
+            </a:fillRef>
+            <a:effectRef idx="0">
+              <a:schemeClr val="accent1"/>
+            </a:effectRef>
+            <a:fontRef idx="minor">
+              <a:schemeClr val="lt1"/>
+            </a:fontRef>
+          </p:style>
+          <p:txBody>
+            <a:bodyPr rtlCol="0" anchor="ctr"/>
+            <a:lstStyle/>
+            <a:p>
+              <a:pPr algn="ctr"/>
+              <a:r>
+                <a:rPr lang="zh-TW" altLang="en-US" dirty="0">
+                  <a:solidFill>
+                    <a:sysClr val="windowText" lastClr="000000"/>
+                  </a:solidFill>
+                  <a:latin typeface="微軟正黑體" panose="020B0604030504040204" pitchFamily="34" charset="-120"/>
+                  <a:ea typeface="微軟正黑體" panose="020B0604030504040204" pitchFamily="34" charset="-120"/>
+                </a:rPr>
+                <a:t>類別</a:t>
+              </a:r>
+            </a:p>
+          </p:txBody>
+        </p:sp>
+        <p:sp>
+          <p:nvSpPr>
+            <p:cNvPr id="15" name="橢圓 14">
+              <a:extLst>
+                <a:ext uri="{FF2B5EF4-FFF2-40B4-BE49-F238E27FC236}">
+                  <a16:creationId xmlns:a16="http://schemas.microsoft.com/office/drawing/2014/main" id="{904EE205-B037-44B5-A64A-7F12D5398B76}"/>
+                </a:ext>
+              </a:extLst>
+            </p:cNvPr>
+            <p:cNvSpPr/>
+            <p:nvPr/>
+          </p:nvSpPr>
+          <p:spPr>
+            <a:xfrm>
+              <a:off x="1772095" y="3916653"/>
+              <a:ext cx="1230942" cy="552543"/>
+            </a:xfrm>
+            <a:prstGeom prst="ellipse">
+              <a:avLst/>
+            </a:prstGeom>
+            <a:noFill/>
+            <a:ln w="38100">
+              <a:solidFill>
+                <a:srgbClr val="2F528F"/>
+              </a:solidFill>
+            </a:ln>
+          </p:spPr>
+          <p:style>
+            <a:lnRef idx="2">
+              <a:schemeClr val="accent1">
+                <a:shade val="50000"/>
+              </a:schemeClr>
+            </a:lnRef>
+            <a:fillRef idx="1">
+              <a:schemeClr val="accent1"/>
+            </a:fillRef>
+            <a:effectRef idx="0">
+              <a:schemeClr val="accent1"/>
+            </a:effectRef>
+            <a:fontRef idx="minor">
+              <a:schemeClr val="lt1"/>
+            </a:fontRef>
+          </p:style>
+          <p:txBody>
+            <a:bodyPr rtlCol="0" anchor="ctr"/>
+            <a:lstStyle/>
+            <a:p>
+              <a:pPr algn="ctr"/>
+              <a:r>
+                <a:rPr lang="zh-TW" altLang="en-US" dirty="0">
+                  <a:solidFill>
+                    <a:sysClr val="windowText" lastClr="000000"/>
+                  </a:solidFill>
+                  <a:latin typeface="微軟正黑體" panose="020B0604030504040204" pitchFamily="34" charset="-120"/>
+                  <a:ea typeface="微軟正黑體" panose="020B0604030504040204" pitchFamily="34" charset="-120"/>
+                </a:rPr>
+                <a:t>簡介</a:t>
+              </a:r>
+            </a:p>
+          </p:txBody>
+        </p:sp>
+        <p:sp>
+          <p:nvSpPr>
+            <p:cNvPr id="17" name="橢圓 16">
+              <a:extLst>
+                <a:ext uri="{FF2B5EF4-FFF2-40B4-BE49-F238E27FC236}">
+                  <a16:creationId xmlns:a16="http://schemas.microsoft.com/office/drawing/2014/main" id="{B6D631BD-55A0-4F2C-86C6-B99A6CBB8065}"/>
+                </a:ext>
+              </a:extLst>
+            </p:cNvPr>
+            <p:cNvSpPr/>
+            <p:nvPr/>
+          </p:nvSpPr>
+          <p:spPr>
+            <a:xfrm>
+              <a:off x="2206414" y="989160"/>
+              <a:ext cx="1230942" cy="552543"/>
+            </a:xfrm>
+            <a:prstGeom prst="ellipse">
+              <a:avLst/>
+            </a:prstGeom>
+            <a:noFill/>
+            <a:ln w="38100">
+              <a:solidFill>
+                <a:srgbClr val="2F528F"/>
+              </a:solidFill>
+            </a:ln>
+          </p:spPr>
+          <p:style>
+            <a:lnRef idx="2">
+              <a:schemeClr val="accent1">
+                <a:shade val="50000"/>
+              </a:schemeClr>
+            </a:lnRef>
+            <a:fillRef idx="1">
+              <a:schemeClr val="accent1"/>
+            </a:fillRef>
+            <a:effectRef idx="0">
+              <a:schemeClr val="accent1"/>
+            </a:effectRef>
+            <a:fontRef idx="minor">
+              <a:schemeClr val="lt1"/>
+            </a:fontRef>
+          </p:style>
+          <p:txBody>
+            <a:bodyPr rtlCol="0" anchor="ctr"/>
+            <a:lstStyle/>
+            <a:p>
+              <a:pPr algn="ctr"/>
+              <a:r>
+                <a:rPr lang="zh-TW" altLang="en-US" dirty="0">
+                  <a:solidFill>
+                    <a:sysClr val="windowText" lastClr="000000"/>
+                  </a:solidFill>
+                  <a:latin typeface="微軟正黑體" panose="020B0604030504040204" pitchFamily="34" charset="-120"/>
+                  <a:ea typeface="微軟正黑體" panose="020B0604030504040204" pitchFamily="34" charset="-120"/>
+                </a:rPr>
+                <a:t>書名</a:t>
+              </a:r>
+            </a:p>
+          </p:txBody>
+        </p:sp>
+        <p:sp>
+          <p:nvSpPr>
+            <p:cNvPr id="18" name="橢圓 17">
+              <a:extLst>
+                <a:ext uri="{FF2B5EF4-FFF2-40B4-BE49-F238E27FC236}">
+                  <a16:creationId xmlns:a16="http://schemas.microsoft.com/office/drawing/2014/main" id="{BC76BE46-86FF-4B5A-968F-C55EC2FA534B}"/>
+                </a:ext>
+              </a:extLst>
+            </p:cNvPr>
+            <p:cNvSpPr/>
+            <p:nvPr/>
+          </p:nvSpPr>
+          <p:spPr>
+            <a:xfrm>
+              <a:off x="1884034" y="2477692"/>
+              <a:ext cx="1230942" cy="552543"/>
+            </a:xfrm>
+            <a:prstGeom prst="ellipse">
+              <a:avLst/>
+            </a:prstGeom>
+            <a:noFill/>
+            <a:ln w="38100">
+              <a:solidFill>
+                <a:srgbClr val="2F528F"/>
+              </a:solidFill>
+            </a:ln>
+          </p:spPr>
+          <p:style>
+            <a:lnRef idx="2">
+              <a:schemeClr val="accent1">
+                <a:shade val="50000"/>
+              </a:schemeClr>
+            </a:lnRef>
+            <a:fillRef idx="1">
+              <a:schemeClr val="accent1"/>
+            </a:fillRef>
+            <a:effectRef idx="0">
+              <a:schemeClr val="accent1"/>
+            </a:effectRef>
+            <a:fontRef idx="minor">
+              <a:schemeClr val="lt1"/>
+            </a:fontRef>
+          </p:style>
+          <p:txBody>
+            <a:bodyPr rtlCol="0" anchor="ctr"/>
+            <a:lstStyle/>
+            <a:p>
+              <a:pPr algn="ctr"/>
+              <a:r>
+                <a:rPr lang="zh-TW" altLang="en-US" dirty="0">
+                  <a:solidFill>
+                    <a:sysClr val="windowText" lastClr="000000"/>
+                  </a:solidFill>
+                  <a:latin typeface="微軟正黑體" panose="020B0604030504040204" pitchFamily="34" charset="-120"/>
+                  <a:ea typeface="微軟正黑體" panose="020B0604030504040204" pitchFamily="34" charset="-120"/>
+                </a:rPr>
+                <a:t>愛心數</a:t>
+              </a:r>
+            </a:p>
+          </p:txBody>
+        </p:sp>
+        <p:sp>
+          <p:nvSpPr>
+            <p:cNvPr id="19" name="橢圓 18">
+              <a:extLst>
+                <a:ext uri="{FF2B5EF4-FFF2-40B4-BE49-F238E27FC236}">
+                  <a16:creationId xmlns:a16="http://schemas.microsoft.com/office/drawing/2014/main" id="{B4EC46C7-04E8-4310-8736-49F1B6908626}"/>
+                </a:ext>
+              </a:extLst>
+            </p:cNvPr>
+            <p:cNvSpPr/>
+            <p:nvPr/>
+          </p:nvSpPr>
+          <p:spPr>
+            <a:xfrm>
+              <a:off x="4243493" y="271163"/>
+              <a:ext cx="1573035" cy="552543"/>
+            </a:xfrm>
+            <a:prstGeom prst="ellipse">
+              <a:avLst/>
+            </a:prstGeom>
+            <a:ln w="76200" cmpd="dbl"/>
+          </p:spPr>
+          <p:style>
+            <a:lnRef idx="2">
+              <a:schemeClr val="accent2"/>
+            </a:lnRef>
+            <a:fillRef idx="1">
+              <a:schemeClr val="lt1"/>
+            </a:fillRef>
+            <a:effectRef idx="0">
+              <a:schemeClr val="accent2"/>
+            </a:effectRef>
+            <a:fontRef idx="minor">
+              <a:schemeClr val="dk1"/>
+            </a:fontRef>
+          </p:style>
+          <p:txBody>
+            <a:bodyPr rtlCol="0" anchor="ctr"/>
+            <a:lstStyle/>
+            <a:p>
+              <a:pPr algn="ctr"/>
+              <a:r>
+                <a:rPr lang="zh-TW" altLang="en-US" dirty="0">
+                  <a:solidFill>
+                    <a:sysClr val="windowText" lastClr="000000"/>
+                  </a:solidFill>
+                  <a:latin typeface="微軟正黑體" panose="020B0604030504040204" pitchFamily="34" charset="-120"/>
+                  <a:ea typeface="微軟正黑體" panose="020B0604030504040204" pitchFamily="34" charset="-120"/>
+                </a:rPr>
+                <a:t>歷史紀錄</a:t>
+              </a:r>
+            </a:p>
+          </p:txBody>
+        </p:sp>
+        <p:sp>
+          <p:nvSpPr>
+            <p:cNvPr id="20" name="橢圓 19">
+              <a:extLst>
+                <a:ext uri="{FF2B5EF4-FFF2-40B4-BE49-F238E27FC236}">
+                  <a16:creationId xmlns:a16="http://schemas.microsoft.com/office/drawing/2014/main" id="{8581CC69-98F4-46B0-AE91-8CA44F3236EF}"/>
+                </a:ext>
+              </a:extLst>
+            </p:cNvPr>
+            <p:cNvSpPr/>
+            <p:nvPr/>
+          </p:nvSpPr>
+          <p:spPr>
+            <a:xfrm>
+              <a:off x="2005284" y="3280006"/>
+              <a:ext cx="1230942" cy="552543"/>
+            </a:xfrm>
+            <a:prstGeom prst="ellipse">
+              <a:avLst/>
+            </a:prstGeom>
+            <a:noFill/>
+            <a:ln w="38100">
+              <a:solidFill>
+                <a:srgbClr val="2F528F"/>
+              </a:solidFill>
+            </a:ln>
+          </p:spPr>
+          <p:style>
+            <a:lnRef idx="2">
+              <a:schemeClr val="accent1">
+                <a:shade val="50000"/>
+              </a:schemeClr>
+            </a:lnRef>
+            <a:fillRef idx="1">
+              <a:schemeClr val="accent1"/>
+            </a:fillRef>
+            <a:effectRef idx="0">
+              <a:schemeClr val="accent1"/>
+            </a:effectRef>
+            <a:fontRef idx="minor">
+              <a:schemeClr val="lt1"/>
+            </a:fontRef>
+          </p:style>
+          <p:txBody>
+            <a:bodyPr rtlCol="0" anchor="ctr"/>
+            <a:lstStyle/>
+            <a:p>
+              <a:pPr algn="ctr"/>
+              <a:r>
+                <a:rPr lang="zh-TW" altLang="en-US" dirty="0">
+                  <a:solidFill>
+                    <a:sysClr val="windowText" lastClr="000000"/>
+                  </a:solidFill>
+                  <a:latin typeface="微軟正黑體" panose="020B0604030504040204" pitchFamily="34" charset="-120"/>
+                  <a:ea typeface="微軟正黑體" panose="020B0604030504040204" pitchFamily="34" charset="-120"/>
+                </a:rPr>
+                <a:t>連結</a:t>
+              </a:r>
+            </a:p>
+          </p:txBody>
+        </p:sp>
+        <p:sp>
+          <p:nvSpPr>
+            <p:cNvPr id="21" name="橢圓 20">
+              <a:extLst>
+                <a:ext uri="{FF2B5EF4-FFF2-40B4-BE49-F238E27FC236}">
+                  <a16:creationId xmlns:a16="http://schemas.microsoft.com/office/drawing/2014/main" id="{9F875BE5-297C-4CC9-A47C-AE3019E5B3EF}"/>
+                </a:ext>
+              </a:extLst>
+            </p:cNvPr>
+            <p:cNvSpPr/>
+            <p:nvPr/>
+          </p:nvSpPr>
+          <p:spPr>
+            <a:xfrm>
+              <a:off x="722317" y="5396301"/>
+              <a:ext cx="1230942" cy="552543"/>
+            </a:xfrm>
+            <a:prstGeom prst="ellipse">
+              <a:avLst/>
+            </a:prstGeom>
+            <a:noFill/>
+            <a:ln w="38100" cmpd="sng">
+              <a:solidFill>
+                <a:schemeClr val="accent4"/>
+              </a:solidFill>
+            </a:ln>
+          </p:spPr>
+          <p:style>
+            <a:lnRef idx="2">
+              <a:schemeClr val="accent1">
+                <a:shade val="50000"/>
+              </a:schemeClr>
+            </a:lnRef>
+            <a:fillRef idx="1">
+              <a:schemeClr val="accent1"/>
+            </a:fillRef>
+            <a:effectRef idx="0">
+              <a:schemeClr val="accent1"/>
+            </a:effectRef>
+            <a:fontRef idx="minor">
+              <a:schemeClr val="lt1"/>
+            </a:fontRef>
+          </p:style>
+          <p:txBody>
+            <a:bodyPr rtlCol="0" anchor="ctr"/>
+            <a:lstStyle/>
+            <a:p>
+              <a:pPr algn="ctr"/>
+              <a:r>
+                <a:rPr lang="en-US" altLang="zh-TW" dirty="0">
+                  <a:solidFill>
+                    <a:sysClr val="windowText" lastClr="000000"/>
+                  </a:solidFill>
+                  <a:latin typeface="微軟正黑體" panose="020B0604030504040204" pitchFamily="34" charset="-120"/>
+                  <a:ea typeface="微軟正黑體" panose="020B0604030504040204" pitchFamily="34" charset="-120"/>
+                </a:rPr>
+                <a:t>tag</a:t>
+              </a:r>
+              <a:endParaRPr lang="zh-TW" altLang="en-US" dirty="0">
+                <a:solidFill>
+                  <a:sysClr val="windowText" lastClr="000000"/>
+                </a:solidFill>
+                <a:latin typeface="微軟正黑體" panose="020B0604030504040204" pitchFamily="34" charset="-120"/>
+                <a:ea typeface="微軟正黑體" panose="020B0604030504040204" pitchFamily="34" charset="-120"/>
+              </a:endParaRPr>
+            </a:p>
+          </p:txBody>
+        </p:sp>
+        <p:sp>
+          <p:nvSpPr>
+            <p:cNvPr id="22" name="橢圓 21">
+              <a:extLst>
+                <a:ext uri="{FF2B5EF4-FFF2-40B4-BE49-F238E27FC236}">
+                  <a16:creationId xmlns:a16="http://schemas.microsoft.com/office/drawing/2014/main" id="{87A2ED50-B606-411A-8EF1-85E6A3BF2C94}"/>
+                </a:ext>
+              </a:extLst>
+            </p:cNvPr>
+            <p:cNvSpPr/>
+            <p:nvPr/>
+          </p:nvSpPr>
+          <p:spPr>
+            <a:xfrm>
+              <a:off x="1350069" y="6034294"/>
+              <a:ext cx="1829833" cy="552543"/>
+            </a:xfrm>
+            <a:prstGeom prst="ellipse">
+              <a:avLst/>
+            </a:prstGeom>
+            <a:noFill/>
+            <a:ln w="38100" cmpd="sng">
+              <a:solidFill>
+                <a:schemeClr val="accent4"/>
+              </a:solidFill>
+              <a:prstDash val="solid"/>
+            </a:ln>
+          </p:spPr>
+          <p:style>
+            <a:lnRef idx="2">
+              <a:schemeClr val="accent1">
+                <a:shade val="50000"/>
+              </a:schemeClr>
+            </a:lnRef>
+            <a:fillRef idx="1">
+              <a:schemeClr val="accent1"/>
+            </a:fillRef>
+            <a:effectRef idx="0">
+              <a:schemeClr val="accent1"/>
+            </a:effectRef>
+            <a:fontRef idx="minor">
+              <a:schemeClr val="lt1"/>
+            </a:fontRef>
+          </p:style>
+          <p:txBody>
+            <a:bodyPr rtlCol="0" anchor="ctr"/>
+            <a:lstStyle/>
+            <a:p>
+              <a:pPr algn="ctr"/>
+              <a:r>
+                <a:rPr lang="en-US" altLang="zh-TW" dirty="0">
+                  <a:solidFill>
+                    <a:sysClr val="windowText" lastClr="000000"/>
+                  </a:solidFill>
+                  <a:latin typeface="微軟正黑體" panose="020B0604030504040204" pitchFamily="34" charset="-120"/>
+                  <a:ea typeface="微軟正黑體" panose="020B0604030504040204" pitchFamily="34" charset="-120"/>
+                </a:rPr>
+                <a:t>tag</a:t>
+              </a:r>
+              <a:r>
+                <a:rPr lang="zh-TW" altLang="en-US" dirty="0">
+                  <a:solidFill>
+                    <a:sysClr val="windowText" lastClr="000000"/>
+                  </a:solidFill>
+                  <a:latin typeface="微軟正黑體" panose="020B0604030504040204" pitchFamily="34" charset="-120"/>
+                  <a:ea typeface="微軟正黑體" panose="020B0604030504040204" pitchFamily="34" charset="-120"/>
+                </a:rPr>
+                <a:t>正則化</a:t>
+              </a:r>
+            </a:p>
+          </p:txBody>
+        </p:sp>
+        <p:sp>
+          <p:nvSpPr>
+            <p:cNvPr id="23" name="橢圓 22">
+              <a:extLst>
+                <a:ext uri="{FF2B5EF4-FFF2-40B4-BE49-F238E27FC236}">
+                  <a16:creationId xmlns:a16="http://schemas.microsoft.com/office/drawing/2014/main" id="{836AC00E-2EB8-4751-BEAF-3631D95C4980}"/>
+                </a:ext>
+              </a:extLst>
+            </p:cNvPr>
+            <p:cNvSpPr/>
+            <p:nvPr/>
+          </p:nvSpPr>
+          <p:spPr>
+            <a:xfrm>
+              <a:off x="7927915" y="5196238"/>
+              <a:ext cx="1230942" cy="552543"/>
+            </a:xfrm>
+            <a:prstGeom prst="ellipse">
+              <a:avLst/>
+            </a:prstGeom>
+            <a:noFill/>
+            <a:ln w="38100">
+              <a:solidFill>
+                <a:srgbClr val="00B050"/>
+              </a:solidFill>
+            </a:ln>
+          </p:spPr>
+          <p:style>
+            <a:lnRef idx="2">
+              <a:schemeClr val="accent1">
+                <a:shade val="50000"/>
+              </a:schemeClr>
+            </a:lnRef>
+            <a:fillRef idx="1">
+              <a:schemeClr val="accent1"/>
+            </a:fillRef>
+            <a:effectRef idx="0">
+              <a:schemeClr val="accent1"/>
+            </a:effectRef>
+            <a:fontRef idx="minor">
+              <a:schemeClr val="lt1"/>
+            </a:fontRef>
+          </p:style>
+          <p:txBody>
+            <a:bodyPr rtlCol="0" anchor="ctr"/>
+            <a:lstStyle/>
+            <a:p>
+              <a:pPr algn="ctr"/>
+              <a:r>
+                <a:rPr lang="zh-TW" altLang="en-US" dirty="0">
+                  <a:solidFill>
+                    <a:sysClr val="windowText" lastClr="000000"/>
+                  </a:solidFill>
+                  <a:latin typeface="微軟正黑體" panose="020B0604030504040204" pitchFamily="34" charset="-120"/>
+                  <a:ea typeface="微軟正黑體" panose="020B0604030504040204" pitchFamily="34" charset="-120"/>
+                </a:rPr>
+                <a:t>名字</a:t>
+              </a:r>
+            </a:p>
+          </p:txBody>
+        </p:sp>
+        <p:sp>
+          <p:nvSpPr>
+            <p:cNvPr id="24" name="橢圓 23">
+              <a:extLst>
+                <a:ext uri="{FF2B5EF4-FFF2-40B4-BE49-F238E27FC236}">
+                  <a16:creationId xmlns:a16="http://schemas.microsoft.com/office/drawing/2014/main" id="{65D9E7A0-44BE-4855-856A-E6D1E673553D}"/>
+                </a:ext>
+              </a:extLst>
+            </p:cNvPr>
+            <p:cNvSpPr/>
+            <p:nvPr/>
+          </p:nvSpPr>
+          <p:spPr>
+            <a:xfrm>
+              <a:off x="5507702" y="5173201"/>
+              <a:ext cx="1911574" cy="552543"/>
+            </a:xfrm>
+            <a:prstGeom prst="ellipse">
+              <a:avLst/>
+            </a:prstGeom>
+            <a:noFill/>
+            <a:ln w="38100">
+              <a:solidFill>
+                <a:srgbClr val="00B050"/>
+              </a:solidFill>
+            </a:ln>
+          </p:spPr>
+          <p:style>
+            <a:lnRef idx="2">
+              <a:schemeClr val="accent1">
+                <a:shade val="50000"/>
+              </a:schemeClr>
+            </a:lnRef>
+            <a:fillRef idx="1">
+              <a:schemeClr val="accent1"/>
+            </a:fillRef>
+            <a:effectRef idx="0">
+              <a:schemeClr val="accent1"/>
+            </a:effectRef>
+            <a:fontRef idx="minor">
+              <a:schemeClr val="lt1"/>
+            </a:fontRef>
+          </p:style>
+          <p:txBody>
+            <a:bodyPr rtlCol="0" anchor="ctr"/>
+            <a:lstStyle/>
+            <a:p>
+              <a:pPr algn="ctr"/>
+              <a:r>
+                <a:rPr lang="zh-TW" altLang="en-US" u="sng" dirty="0">
+                  <a:solidFill>
+                    <a:sysClr val="windowText" lastClr="000000"/>
+                  </a:solidFill>
+                  <a:latin typeface="微軟正黑體" panose="020B0604030504040204" pitchFamily="34" charset="-120"/>
+                  <a:ea typeface="微軟正黑體" panose="020B0604030504040204" pitchFamily="34" charset="-120"/>
+                </a:rPr>
+                <a:t>出版社代號</a:t>
+              </a:r>
+            </a:p>
+          </p:txBody>
+        </p:sp>
+        <p:sp>
+          <p:nvSpPr>
+            <p:cNvPr id="25" name="橢圓 24">
+              <a:extLst>
+                <a:ext uri="{FF2B5EF4-FFF2-40B4-BE49-F238E27FC236}">
+                  <a16:creationId xmlns:a16="http://schemas.microsoft.com/office/drawing/2014/main" id="{916C7219-7D59-477B-83BF-4AF8FC830BA8}"/>
+                </a:ext>
+              </a:extLst>
+            </p:cNvPr>
+            <p:cNvSpPr/>
+            <p:nvPr/>
+          </p:nvSpPr>
+          <p:spPr>
+            <a:xfrm>
+              <a:off x="9760774" y="3311111"/>
+              <a:ext cx="1230942" cy="552543"/>
+            </a:xfrm>
+            <a:prstGeom prst="ellipse">
+              <a:avLst/>
+            </a:prstGeom>
+            <a:noFill/>
+            <a:ln w="38100">
+              <a:solidFill>
+                <a:srgbClr val="7030A0"/>
+              </a:solidFill>
+            </a:ln>
+          </p:spPr>
+          <p:style>
+            <a:lnRef idx="2">
+              <a:schemeClr val="accent1">
+                <a:shade val="50000"/>
+              </a:schemeClr>
+            </a:lnRef>
+            <a:fillRef idx="1">
+              <a:schemeClr val="accent1"/>
+            </a:fillRef>
+            <a:effectRef idx="0">
+              <a:schemeClr val="accent1"/>
+            </a:effectRef>
+            <a:fontRef idx="minor">
+              <a:schemeClr val="lt1"/>
+            </a:fontRef>
+          </p:style>
+          <p:txBody>
+            <a:bodyPr rtlCol="0" anchor="ctr"/>
+            <a:lstStyle/>
+            <a:p>
+              <a:pPr algn="ctr"/>
+              <a:r>
+                <a:rPr lang="zh-TW" altLang="en-US" dirty="0">
+                  <a:solidFill>
+                    <a:sysClr val="windowText" lastClr="000000"/>
+                  </a:solidFill>
+                  <a:latin typeface="微軟正黑體" panose="020B0604030504040204" pitchFamily="34" charset="-120"/>
+                  <a:ea typeface="微軟正黑體" panose="020B0604030504040204" pitchFamily="34" charset="-120"/>
+                </a:rPr>
+                <a:t>姓名</a:t>
+              </a:r>
+            </a:p>
+          </p:txBody>
+        </p:sp>
+        <p:sp>
+          <p:nvSpPr>
+            <p:cNvPr id="26" name="橢圓 25">
+              <a:extLst>
+                <a:ext uri="{FF2B5EF4-FFF2-40B4-BE49-F238E27FC236}">
+                  <a16:creationId xmlns:a16="http://schemas.microsoft.com/office/drawing/2014/main" id="{6DCCC405-FA22-4278-8938-CED02EE90AFB}"/>
+                </a:ext>
+              </a:extLst>
+            </p:cNvPr>
+            <p:cNvSpPr/>
+            <p:nvPr/>
+          </p:nvSpPr>
+          <p:spPr>
+            <a:xfrm>
+              <a:off x="9740654" y="2440191"/>
+              <a:ext cx="1573035" cy="552543"/>
+            </a:xfrm>
+            <a:prstGeom prst="ellipse">
+              <a:avLst/>
+            </a:prstGeom>
+            <a:ln w="38100">
+              <a:solidFill>
+                <a:srgbClr val="7030A0"/>
+              </a:solidFill>
+            </a:ln>
+          </p:spPr>
+          <p:style>
+            <a:lnRef idx="2">
+              <a:schemeClr val="accent2"/>
+            </a:lnRef>
+            <a:fillRef idx="1">
+              <a:schemeClr val="lt1"/>
+            </a:fillRef>
+            <a:effectRef idx="0">
+              <a:schemeClr val="accent2"/>
+            </a:effectRef>
+            <a:fontRef idx="minor">
+              <a:schemeClr val="dk1"/>
+            </a:fontRef>
+          </p:style>
+          <p:txBody>
+            <a:bodyPr rtlCol="0" anchor="ctr"/>
+            <a:lstStyle/>
+            <a:p>
+              <a:pPr algn="ctr"/>
+              <a:r>
+                <a:rPr lang="zh-TW" altLang="en-US" u="sng" dirty="0">
+                  <a:solidFill>
+                    <a:sysClr val="windowText" lastClr="000000"/>
+                  </a:solidFill>
+                  <a:latin typeface="微軟正黑體" panose="020B0604030504040204" pitchFamily="34" charset="-120"/>
+                  <a:ea typeface="微軟正黑體" panose="020B0604030504040204" pitchFamily="34" charset="-120"/>
+                </a:rPr>
+                <a:t>作者代號</a:t>
+              </a:r>
+            </a:p>
+          </p:txBody>
+        </p:sp>
+        <p:sp>
+          <p:nvSpPr>
+            <p:cNvPr id="27" name="橢圓 26">
+              <a:extLst>
+                <a:ext uri="{FF2B5EF4-FFF2-40B4-BE49-F238E27FC236}">
+                  <a16:creationId xmlns:a16="http://schemas.microsoft.com/office/drawing/2014/main" id="{0252EBF0-7A2A-4EA1-9D7D-CA4E813F4901}"/>
+                </a:ext>
+              </a:extLst>
+            </p:cNvPr>
+            <p:cNvSpPr/>
+            <p:nvPr/>
+          </p:nvSpPr>
+          <p:spPr>
+            <a:xfrm>
+              <a:off x="8192434" y="532024"/>
+              <a:ext cx="1230942" cy="552543"/>
+            </a:xfrm>
+            <a:prstGeom prst="ellipse">
+              <a:avLst/>
+            </a:prstGeom>
+            <a:noFill/>
+            <a:ln w="38100">
+              <a:solidFill>
+                <a:srgbClr val="4D4D4D"/>
+              </a:solidFill>
+            </a:ln>
+          </p:spPr>
+          <p:style>
+            <a:lnRef idx="2">
+              <a:schemeClr val="accent1">
+                <a:shade val="50000"/>
+              </a:schemeClr>
+            </a:lnRef>
+            <a:fillRef idx="1">
+              <a:schemeClr val="accent1"/>
+            </a:fillRef>
+            <a:effectRef idx="0">
+              <a:schemeClr val="accent1"/>
+            </a:effectRef>
+            <a:fontRef idx="minor">
+              <a:schemeClr val="lt1"/>
+            </a:fontRef>
+          </p:style>
+          <p:txBody>
+            <a:bodyPr rtlCol="0" anchor="ctr"/>
+            <a:lstStyle/>
+            <a:p>
+              <a:pPr algn="ctr"/>
+              <a:r>
+                <a:rPr lang="zh-TW" altLang="en-US" u="sng" dirty="0">
+                  <a:solidFill>
+                    <a:sysClr val="windowText" lastClr="000000"/>
+                  </a:solidFill>
+                  <a:latin typeface="微軟正黑體" panose="020B0604030504040204" pitchFamily="34" charset="-120"/>
+                  <a:ea typeface="微軟正黑體" panose="020B0604030504040204" pitchFamily="34" charset="-120"/>
+                </a:rPr>
+                <a:t>帳號</a:t>
+              </a:r>
+            </a:p>
+          </p:txBody>
+        </p:sp>
+        <p:sp>
+          <p:nvSpPr>
+            <p:cNvPr id="28" name="橢圓 27">
+              <a:extLst>
+                <a:ext uri="{FF2B5EF4-FFF2-40B4-BE49-F238E27FC236}">
+                  <a16:creationId xmlns:a16="http://schemas.microsoft.com/office/drawing/2014/main" id="{9DC33FA6-AABC-4C50-975A-D49FACBD2586}"/>
+                </a:ext>
+              </a:extLst>
+            </p:cNvPr>
+            <p:cNvSpPr/>
+            <p:nvPr/>
+          </p:nvSpPr>
+          <p:spPr>
+            <a:xfrm>
+              <a:off x="9337398" y="852541"/>
+              <a:ext cx="1230942" cy="552543"/>
+            </a:xfrm>
+            <a:prstGeom prst="ellipse">
+              <a:avLst/>
+            </a:prstGeom>
+            <a:noFill/>
+            <a:ln w="38100">
+              <a:solidFill>
+                <a:srgbClr val="4D4D4D"/>
+              </a:solidFill>
+            </a:ln>
+          </p:spPr>
+          <p:style>
+            <a:lnRef idx="2">
+              <a:schemeClr val="accent1">
+                <a:shade val="50000"/>
+              </a:schemeClr>
+            </a:lnRef>
+            <a:fillRef idx="1">
+              <a:schemeClr val="accent1"/>
+            </a:fillRef>
+            <a:effectRef idx="0">
+              <a:schemeClr val="accent1"/>
+            </a:effectRef>
+            <a:fontRef idx="minor">
+              <a:schemeClr val="lt1"/>
+            </a:fontRef>
+          </p:style>
+          <p:txBody>
+            <a:bodyPr rtlCol="0" anchor="ctr"/>
+            <a:lstStyle/>
+            <a:p>
+              <a:pPr algn="ctr"/>
+              <a:r>
+                <a:rPr lang="zh-TW" altLang="en-US" dirty="0">
+                  <a:solidFill>
+                    <a:sysClr val="windowText" lastClr="000000"/>
+                  </a:solidFill>
+                  <a:latin typeface="微軟正黑體" panose="020B0604030504040204" pitchFamily="34" charset="-120"/>
+                  <a:ea typeface="微軟正黑體" panose="020B0604030504040204" pitchFamily="34" charset="-120"/>
+                </a:rPr>
+                <a:t>密碼</a:t>
+              </a:r>
+            </a:p>
+          </p:txBody>
+        </p:sp>
+        <p:sp>
+          <p:nvSpPr>
+            <p:cNvPr id="29" name="流程圖: 決策 28">
+              <a:extLst>
+                <a:ext uri="{FF2B5EF4-FFF2-40B4-BE49-F238E27FC236}">
+                  <a16:creationId xmlns:a16="http://schemas.microsoft.com/office/drawing/2014/main" id="{DA503EA1-6026-4B2E-85E1-6A63A472D0B0}"/>
+                </a:ext>
+              </a:extLst>
+            </p:cNvPr>
+            <p:cNvSpPr/>
+            <p:nvPr/>
+          </p:nvSpPr>
+          <p:spPr>
+            <a:xfrm>
+              <a:off x="4296468" y="1270815"/>
+              <a:ext cx="1467087" cy="833652"/>
+            </a:xfrm>
+            <a:prstGeom prst="flowChartDecision">
+              <a:avLst/>
+            </a:prstGeom>
+            <a:ln w="38100"/>
+          </p:spPr>
+          <p:style>
+            <a:lnRef idx="2">
+              <a:schemeClr val="accent2"/>
+            </a:lnRef>
+            <a:fillRef idx="1">
+              <a:schemeClr val="lt1"/>
+            </a:fillRef>
+            <a:effectRef idx="0">
+              <a:schemeClr val="accent2"/>
+            </a:effectRef>
+            <a:fontRef idx="minor">
+              <a:schemeClr val="dk1"/>
+            </a:fontRef>
+          </p:style>
+          <p:txBody>
+            <a:bodyPr rtlCol="0" anchor="ctr"/>
+            <a:lstStyle/>
+            <a:p>
+              <a:pPr algn="ctr"/>
+              <a:r>
+                <a:rPr lang="zh-TW" altLang="en-US" dirty="0">
+                  <a:solidFill>
+                    <a:sysClr val="windowText" lastClr="000000"/>
+                  </a:solidFill>
+                  <a:latin typeface="微軟正黑體" panose="020B0604030504040204" pitchFamily="34" charset="-120"/>
+                  <a:ea typeface="微軟正黑體" panose="020B0604030504040204" pitchFamily="34" charset="-120"/>
+                </a:rPr>
+                <a:t>閱讀</a:t>
+              </a:r>
+            </a:p>
+          </p:txBody>
+        </p:sp>
+        <p:sp>
+          <p:nvSpPr>
+            <p:cNvPr id="30" name="流程圖: 決策 29">
+              <a:extLst>
+                <a:ext uri="{FF2B5EF4-FFF2-40B4-BE49-F238E27FC236}">
+                  <a16:creationId xmlns:a16="http://schemas.microsoft.com/office/drawing/2014/main" id="{AA94ACB0-374A-428F-885A-54E11B5F9156}"/>
+                </a:ext>
+              </a:extLst>
+            </p:cNvPr>
+            <p:cNvSpPr/>
+            <p:nvPr/>
+          </p:nvSpPr>
+          <p:spPr>
+            <a:xfrm>
+              <a:off x="4013181" y="3789893"/>
+              <a:ext cx="1467087" cy="833652"/>
+            </a:xfrm>
+            <a:prstGeom prst="flowChartDecision">
+              <a:avLst/>
+            </a:prstGeom>
+            <a:ln w="38100">
+              <a:solidFill>
+                <a:srgbClr val="ED7D31"/>
+              </a:solidFill>
+            </a:ln>
+          </p:spPr>
+          <p:style>
+            <a:lnRef idx="2">
+              <a:schemeClr val="accent2"/>
+            </a:lnRef>
+            <a:fillRef idx="1">
+              <a:schemeClr val="lt1"/>
+            </a:fillRef>
+            <a:effectRef idx="0">
+              <a:schemeClr val="accent2"/>
+            </a:effectRef>
+            <a:fontRef idx="minor">
+              <a:schemeClr val="dk1"/>
+            </a:fontRef>
+          </p:style>
+          <p:txBody>
+            <a:bodyPr rtlCol="0" anchor="ctr"/>
+            <a:lstStyle/>
+            <a:p>
+              <a:pPr algn="ctr"/>
+              <a:r>
+                <a:rPr lang="zh-TW" altLang="en-US" dirty="0">
+                  <a:solidFill>
+                    <a:sysClr val="windowText" lastClr="000000"/>
+                  </a:solidFill>
+                  <a:latin typeface="微軟正黑體" panose="020B0604030504040204" pitchFamily="34" charset="-120"/>
+                  <a:ea typeface="微軟正黑體" panose="020B0604030504040204" pitchFamily="34" charset="-120"/>
+                </a:rPr>
+                <a:t>出版</a:t>
+              </a:r>
+            </a:p>
+          </p:txBody>
+        </p:sp>
+        <p:sp>
+          <p:nvSpPr>
+            <p:cNvPr id="31" name="流程圖: 決策 30">
+              <a:extLst>
+                <a:ext uri="{FF2B5EF4-FFF2-40B4-BE49-F238E27FC236}">
+                  <a16:creationId xmlns:a16="http://schemas.microsoft.com/office/drawing/2014/main" id="{B1D1C64B-5E5F-4921-BB31-20BB12819721}"/>
+                </a:ext>
+              </a:extLst>
+            </p:cNvPr>
+            <p:cNvSpPr/>
+            <p:nvPr/>
+          </p:nvSpPr>
+          <p:spPr>
+            <a:xfrm>
+              <a:off x="5850046" y="2310382"/>
+              <a:ext cx="1467087" cy="833652"/>
+            </a:xfrm>
+            <a:prstGeom prst="flowChartDecision">
+              <a:avLst/>
+            </a:prstGeom>
+            <a:ln w="38100"/>
+          </p:spPr>
+          <p:style>
+            <a:lnRef idx="2">
+              <a:schemeClr val="accent2"/>
+            </a:lnRef>
+            <a:fillRef idx="1">
+              <a:schemeClr val="lt1"/>
+            </a:fillRef>
+            <a:effectRef idx="0">
+              <a:schemeClr val="accent2"/>
+            </a:effectRef>
+            <a:fontRef idx="minor">
+              <a:schemeClr val="dk1"/>
+            </a:fontRef>
+          </p:style>
+          <p:txBody>
+            <a:bodyPr rtlCol="0" anchor="ctr"/>
+            <a:lstStyle/>
+            <a:p>
+              <a:pPr algn="ctr"/>
+              <a:r>
+                <a:rPr lang="zh-TW" altLang="en-US" dirty="0">
+                  <a:solidFill>
+                    <a:sysClr val="windowText" lastClr="000000"/>
+                  </a:solidFill>
+                  <a:latin typeface="微軟正黑體" panose="020B0604030504040204" pitchFamily="34" charset="-120"/>
+                  <a:ea typeface="微軟正黑體" panose="020B0604030504040204" pitchFamily="34" charset="-120"/>
+                </a:rPr>
+                <a:t>撰寫</a:t>
+              </a:r>
+            </a:p>
+          </p:txBody>
+        </p:sp>
+        <p:sp>
+          <p:nvSpPr>
+            <p:cNvPr id="32" name="流程圖: 決策 31">
+              <a:extLst>
+                <a:ext uri="{FF2B5EF4-FFF2-40B4-BE49-F238E27FC236}">
+                  <a16:creationId xmlns:a16="http://schemas.microsoft.com/office/drawing/2014/main" id="{F503F4C1-00BD-42DD-BB32-E8CE9F644772}"/>
+                </a:ext>
+              </a:extLst>
+            </p:cNvPr>
+            <p:cNvSpPr/>
+            <p:nvPr/>
+          </p:nvSpPr>
+          <p:spPr>
+            <a:xfrm>
+              <a:off x="8108068" y="3751637"/>
+              <a:ext cx="1467087" cy="833652"/>
+            </a:xfrm>
+            <a:prstGeom prst="flowChartDecision">
+              <a:avLst/>
+            </a:prstGeom>
+            <a:ln w="38100"/>
+          </p:spPr>
+          <p:style>
+            <a:lnRef idx="2">
+              <a:schemeClr val="accent2"/>
+            </a:lnRef>
+            <a:fillRef idx="1">
+              <a:schemeClr val="lt1"/>
+            </a:fillRef>
+            <a:effectRef idx="0">
+              <a:schemeClr val="accent2"/>
+            </a:effectRef>
+            <a:fontRef idx="minor">
+              <a:schemeClr val="dk1"/>
+            </a:fontRef>
+          </p:style>
+          <p:txBody>
+            <a:bodyPr rtlCol="0" anchor="ctr"/>
+            <a:lstStyle/>
+            <a:p>
+              <a:pPr algn="ctr"/>
+              <a:r>
+                <a:rPr lang="zh-TW" altLang="en-US" dirty="0">
+                  <a:solidFill>
+                    <a:sysClr val="windowText" lastClr="000000"/>
+                  </a:solidFill>
+                  <a:latin typeface="微軟正黑體" panose="020B0604030504040204" pitchFamily="34" charset="-120"/>
+                  <a:ea typeface="微軟正黑體" panose="020B0604030504040204" pitchFamily="34" charset="-120"/>
+                </a:rPr>
+                <a:t>簽約</a:t>
+              </a:r>
+            </a:p>
+          </p:txBody>
+        </p:sp>
+        <p:cxnSp>
+          <p:nvCxnSpPr>
+            <p:cNvPr id="34" name="直線接點 33">
+              <a:extLst>
+                <a:ext uri="{FF2B5EF4-FFF2-40B4-BE49-F238E27FC236}">
+                  <a16:creationId xmlns:a16="http://schemas.microsoft.com/office/drawing/2014/main" id="{30A20B9D-06F8-486A-8C92-BB9D95FD9810}"/>
+                </a:ext>
+              </a:extLst>
+            </p:cNvPr>
+            <p:cNvCxnSpPr>
+              <a:cxnSpLocks/>
+              <a:stCxn id="12" idx="6"/>
+              <a:endCxn id="4" idx="1"/>
+            </p:cNvCxnSpPr>
+            <p:nvPr/>
+          </p:nvCxnSpPr>
+          <p:spPr>
+            <a:xfrm>
+              <a:off x="3408783" y="635442"/>
+              <a:ext cx="409887" cy="2091767"/>
+            </a:xfrm>
+            <a:prstGeom prst="line">
+              <a:avLst/>
+            </a:prstGeom>
+            <a:ln w="38100">
+              <a:solidFill>
+                <a:srgbClr val="2F528F"/>
+              </a:solidFill>
+            </a:ln>
+          </p:spPr>
+          <p:style>
+            <a:lnRef idx="1">
+              <a:schemeClr val="accent1"/>
+            </a:lnRef>
+            <a:fillRef idx="0">
+              <a:schemeClr val="accent1"/>
+            </a:fillRef>
+            <a:effectRef idx="0">
+              <a:schemeClr val="accent1"/>
+            </a:effectRef>
+            <a:fontRef idx="minor">
+              <a:schemeClr val="tx1"/>
+            </a:fontRef>
+          </p:style>
+        </p:cxnSp>
+        <p:cxnSp>
+          <p:nvCxnSpPr>
+            <p:cNvPr id="36" name="直線接點 35">
+              <a:extLst>
+                <a:ext uri="{FF2B5EF4-FFF2-40B4-BE49-F238E27FC236}">
+                  <a16:creationId xmlns:a16="http://schemas.microsoft.com/office/drawing/2014/main" id="{6F6515FF-CABB-4B08-839F-08A4D41C304E}"/>
+                </a:ext>
+              </a:extLst>
+            </p:cNvPr>
+            <p:cNvCxnSpPr>
+              <a:cxnSpLocks/>
+              <a:stCxn id="17" idx="6"/>
+              <a:endCxn id="4" idx="1"/>
+            </p:cNvCxnSpPr>
+            <p:nvPr/>
+          </p:nvCxnSpPr>
+          <p:spPr>
+            <a:xfrm>
+              <a:off x="3437356" y="1265432"/>
+              <a:ext cx="381314" cy="1461777"/>
+            </a:xfrm>
+            <a:prstGeom prst="line">
+              <a:avLst/>
+            </a:prstGeom>
+            <a:ln w="38100">
+              <a:solidFill>
+                <a:srgbClr val="2F528F"/>
+              </a:solidFill>
+            </a:ln>
+          </p:spPr>
+          <p:style>
+            <a:lnRef idx="1">
+              <a:schemeClr val="accent1"/>
+            </a:lnRef>
+            <a:fillRef idx="0">
+              <a:schemeClr val="accent1"/>
+            </a:fillRef>
+            <a:effectRef idx="0">
+              <a:schemeClr val="accent1"/>
+            </a:effectRef>
+            <a:fontRef idx="minor">
+              <a:schemeClr val="tx1"/>
+            </a:fontRef>
+          </p:style>
+        </p:cxnSp>
+        <p:cxnSp>
+          <p:nvCxnSpPr>
+            <p:cNvPr id="42" name="直線接點 41">
+              <a:extLst>
+                <a:ext uri="{FF2B5EF4-FFF2-40B4-BE49-F238E27FC236}">
+                  <a16:creationId xmlns:a16="http://schemas.microsoft.com/office/drawing/2014/main" id="{951EBB64-AFDA-41FF-8829-AD71D11B78DA}"/>
+                </a:ext>
+              </a:extLst>
+            </p:cNvPr>
+            <p:cNvCxnSpPr>
+              <a:stCxn id="14" idx="6"/>
+              <a:endCxn id="4" idx="1"/>
+            </p:cNvCxnSpPr>
+            <p:nvPr/>
+          </p:nvCxnSpPr>
+          <p:spPr>
+            <a:xfrm>
+              <a:off x="3495928" y="1913850"/>
+              <a:ext cx="322742" cy="813359"/>
+            </a:xfrm>
+            <a:prstGeom prst="line">
+              <a:avLst/>
+            </a:prstGeom>
+            <a:ln w="38100">
+              <a:solidFill>
+                <a:srgbClr val="2F528F"/>
+              </a:solidFill>
+            </a:ln>
+          </p:spPr>
+          <p:style>
+            <a:lnRef idx="1">
+              <a:schemeClr val="accent1"/>
+            </a:lnRef>
+            <a:fillRef idx="0">
+              <a:schemeClr val="accent1"/>
+            </a:fillRef>
+            <a:effectRef idx="0">
+              <a:schemeClr val="accent1"/>
+            </a:effectRef>
+            <a:fontRef idx="minor">
+              <a:schemeClr val="tx1"/>
+            </a:fontRef>
+          </p:style>
+        </p:cxnSp>
+        <p:cxnSp>
+          <p:nvCxnSpPr>
+            <p:cNvPr id="44" name="直線接點 43">
+              <a:extLst>
+                <a:ext uri="{FF2B5EF4-FFF2-40B4-BE49-F238E27FC236}">
+                  <a16:creationId xmlns:a16="http://schemas.microsoft.com/office/drawing/2014/main" id="{1EC98F50-6EE5-4EB6-84FD-B4114B954638}"/>
+                </a:ext>
+              </a:extLst>
+            </p:cNvPr>
+            <p:cNvCxnSpPr>
+              <a:cxnSpLocks/>
+              <a:stCxn id="15" idx="6"/>
+              <a:endCxn id="4" idx="1"/>
+            </p:cNvCxnSpPr>
+            <p:nvPr/>
+          </p:nvCxnSpPr>
+          <p:spPr>
+            <a:xfrm flipV="1">
+              <a:off x="3003037" y="2727209"/>
+              <a:ext cx="815633" cy="1465716"/>
+            </a:xfrm>
+            <a:prstGeom prst="line">
+              <a:avLst/>
+            </a:prstGeom>
+            <a:ln w="38100">
+              <a:solidFill>
+                <a:srgbClr val="2F528F"/>
+              </a:solidFill>
+            </a:ln>
+          </p:spPr>
+          <p:style>
+            <a:lnRef idx="1">
+              <a:schemeClr val="accent1"/>
+            </a:lnRef>
+            <a:fillRef idx="0">
+              <a:schemeClr val="accent1"/>
+            </a:fillRef>
+            <a:effectRef idx="0">
+              <a:schemeClr val="accent1"/>
+            </a:effectRef>
+            <a:fontRef idx="minor">
+              <a:schemeClr val="tx1"/>
+            </a:fontRef>
+          </p:style>
+        </p:cxnSp>
+        <p:cxnSp>
+          <p:nvCxnSpPr>
+            <p:cNvPr id="46" name="直線接點 45">
+              <a:extLst>
+                <a:ext uri="{FF2B5EF4-FFF2-40B4-BE49-F238E27FC236}">
+                  <a16:creationId xmlns:a16="http://schemas.microsoft.com/office/drawing/2014/main" id="{F78D6C6B-AC27-48A0-8770-68F9AAE5D9D8}"/>
+                </a:ext>
+              </a:extLst>
+            </p:cNvPr>
+            <p:cNvCxnSpPr>
+              <a:stCxn id="20" idx="6"/>
+              <a:endCxn id="4" idx="1"/>
+            </p:cNvCxnSpPr>
+            <p:nvPr/>
+          </p:nvCxnSpPr>
+          <p:spPr>
+            <a:xfrm flipV="1">
+              <a:off x="3236226" y="2727209"/>
+              <a:ext cx="582444" cy="829069"/>
+            </a:xfrm>
+            <a:prstGeom prst="line">
+              <a:avLst/>
+            </a:prstGeom>
+            <a:ln w="38100">
+              <a:solidFill>
+                <a:srgbClr val="2F528F"/>
+              </a:solidFill>
+            </a:ln>
+          </p:spPr>
+          <p:style>
+            <a:lnRef idx="1">
+              <a:schemeClr val="accent1"/>
+            </a:lnRef>
+            <a:fillRef idx="0">
+              <a:schemeClr val="accent1"/>
+            </a:fillRef>
+            <a:effectRef idx="0">
+              <a:schemeClr val="accent1"/>
+            </a:effectRef>
+            <a:fontRef idx="minor">
+              <a:schemeClr val="tx1"/>
+            </a:fontRef>
+          </p:style>
+        </p:cxnSp>
+        <p:cxnSp>
+          <p:nvCxnSpPr>
+            <p:cNvPr id="48" name="直線接點 47">
+              <a:extLst>
+                <a:ext uri="{FF2B5EF4-FFF2-40B4-BE49-F238E27FC236}">
+                  <a16:creationId xmlns:a16="http://schemas.microsoft.com/office/drawing/2014/main" id="{B1C70860-DF32-490B-887C-45F51F6D8474}"/>
+                </a:ext>
+              </a:extLst>
+            </p:cNvPr>
+            <p:cNvCxnSpPr>
+              <a:cxnSpLocks/>
+              <a:stCxn id="13" idx="6"/>
+              <a:endCxn id="4" idx="1"/>
+            </p:cNvCxnSpPr>
+            <p:nvPr/>
+          </p:nvCxnSpPr>
+          <p:spPr>
+            <a:xfrm>
+              <a:off x="2270225" y="2095621"/>
+              <a:ext cx="1548445" cy="631588"/>
+            </a:xfrm>
+            <a:prstGeom prst="line">
+              <a:avLst/>
+            </a:prstGeom>
+            <a:ln w="38100">
+              <a:solidFill>
+                <a:srgbClr val="2F528F"/>
+              </a:solidFill>
+            </a:ln>
+          </p:spPr>
+          <p:style>
+            <a:lnRef idx="1">
+              <a:schemeClr val="accent1"/>
+            </a:lnRef>
+            <a:fillRef idx="0">
+              <a:schemeClr val="accent1"/>
+            </a:fillRef>
+            <a:effectRef idx="0">
+              <a:schemeClr val="accent1"/>
+            </a:effectRef>
+            <a:fontRef idx="minor">
+              <a:schemeClr val="tx1"/>
+            </a:fontRef>
+          </p:style>
+        </p:cxnSp>
+        <p:cxnSp>
+          <p:nvCxnSpPr>
+            <p:cNvPr id="50" name="直線接點 49">
+              <a:extLst>
+                <a:ext uri="{FF2B5EF4-FFF2-40B4-BE49-F238E27FC236}">
+                  <a16:creationId xmlns:a16="http://schemas.microsoft.com/office/drawing/2014/main" id="{B9F81377-F027-4094-AD5D-385BA2A4CDA0}"/>
+                </a:ext>
+              </a:extLst>
+            </p:cNvPr>
+            <p:cNvCxnSpPr>
+              <a:stCxn id="18" idx="6"/>
+              <a:endCxn id="4" idx="1"/>
+            </p:cNvCxnSpPr>
+            <p:nvPr/>
+          </p:nvCxnSpPr>
+          <p:spPr>
+            <a:xfrm flipV="1">
+              <a:off x="3114976" y="2727209"/>
+              <a:ext cx="703694" cy="26755"/>
+            </a:xfrm>
+            <a:prstGeom prst="line">
+              <a:avLst/>
+            </a:prstGeom>
+            <a:ln w="38100">
+              <a:solidFill>
+                <a:srgbClr val="2F528F"/>
+              </a:solidFill>
+            </a:ln>
+          </p:spPr>
+          <p:style>
+            <a:lnRef idx="1">
+              <a:schemeClr val="accent1"/>
+            </a:lnRef>
+            <a:fillRef idx="0">
+              <a:schemeClr val="accent1"/>
+            </a:fillRef>
+            <a:effectRef idx="0">
+              <a:schemeClr val="accent1"/>
+            </a:effectRef>
+            <a:fontRef idx="minor">
+              <a:schemeClr val="tx1"/>
+            </a:fontRef>
+          </p:style>
+        </p:cxnSp>
+        <p:cxnSp>
+          <p:nvCxnSpPr>
+            <p:cNvPr id="52" name="直線接點 51">
+              <a:extLst>
+                <a:ext uri="{FF2B5EF4-FFF2-40B4-BE49-F238E27FC236}">
+                  <a16:creationId xmlns:a16="http://schemas.microsoft.com/office/drawing/2014/main" id="{C694CF34-7F3F-4BE0-990D-DCA7D695B5E1}"/>
+                </a:ext>
+              </a:extLst>
+            </p:cNvPr>
+            <p:cNvCxnSpPr>
+              <a:cxnSpLocks/>
+              <a:stCxn id="21" idx="6"/>
+              <a:endCxn id="97" idx="1"/>
+            </p:cNvCxnSpPr>
+            <p:nvPr/>
+          </p:nvCxnSpPr>
+          <p:spPr>
+            <a:xfrm>
+              <a:off x="1953259" y="5672573"/>
+              <a:ext cx="1474602" cy="38217"/>
+            </a:xfrm>
+            <a:prstGeom prst="line">
+              <a:avLst/>
+            </a:prstGeom>
+            <a:ln w="38100">
+              <a:solidFill>
+                <a:schemeClr val="accent4"/>
+              </a:solidFill>
+            </a:ln>
+          </p:spPr>
+          <p:style>
+            <a:lnRef idx="1">
+              <a:schemeClr val="accent1"/>
+            </a:lnRef>
+            <a:fillRef idx="0">
+              <a:schemeClr val="accent1"/>
+            </a:fillRef>
+            <a:effectRef idx="0">
+              <a:schemeClr val="accent1"/>
+            </a:effectRef>
+            <a:fontRef idx="minor">
+              <a:schemeClr val="tx1"/>
+            </a:fontRef>
+          </p:style>
+        </p:cxnSp>
+        <p:cxnSp>
+          <p:nvCxnSpPr>
+            <p:cNvPr id="91" name="直線接點 90">
+              <a:extLst>
+                <a:ext uri="{FF2B5EF4-FFF2-40B4-BE49-F238E27FC236}">
+                  <a16:creationId xmlns:a16="http://schemas.microsoft.com/office/drawing/2014/main" id="{9CD793D7-F2E4-4D46-A236-BCA3175C9881}"/>
+                </a:ext>
+              </a:extLst>
+            </p:cNvPr>
+            <p:cNvCxnSpPr>
+              <a:cxnSpLocks/>
+              <a:stCxn id="97" idx="1"/>
+              <a:endCxn id="22" idx="6"/>
+            </p:cNvCxnSpPr>
+            <p:nvPr/>
+          </p:nvCxnSpPr>
+          <p:spPr>
+            <a:xfrm flipH="1">
+              <a:off x="3179902" y="5710790"/>
+              <a:ext cx="247959" cy="599776"/>
+            </a:xfrm>
+            <a:prstGeom prst="line">
+              <a:avLst/>
+            </a:prstGeom>
+            <a:ln w="38100">
+              <a:solidFill>
+                <a:schemeClr val="accent4"/>
+              </a:solidFill>
+            </a:ln>
+          </p:spPr>
+          <p:style>
+            <a:lnRef idx="1">
+              <a:schemeClr val="accent1"/>
+            </a:lnRef>
+            <a:fillRef idx="0">
+              <a:schemeClr val="accent1"/>
+            </a:fillRef>
+            <a:effectRef idx="0">
+              <a:schemeClr val="accent1"/>
+            </a:effectRef>
+            <a:fontRef idx="minor">
+              <a:schemeClr val="tx1"/>
+            </a:fontRef>
+          </p:style>
+        </p:cxnSp>
+        <p:cxnSp>
+          <p:nvCxnSpPr>
+            <p:cNvPr id="114" name="直線接點 113">
+              <a:extLst>
+                <a:ext uri="{FF2B5EF4-FFF2-40B4-BE49-F238E27FC236}">
+                  <a16:creationId xmlns:a16="http://schemas.microsoft.com/office/drawing/2014/main" id="{D69700CE-C7D1-4D0C-88B5-81FB6269A630}"/>
+                </a:ext>
+              </a:extLst>
+            </p:cNvPr>
+            <p:cNvCxnSpPr>
+              <a:cxnSpLocks/>
+              <a:stCxn id="69" idx="2"/>
+              <a:endCxn id="24" idx="0"/>
+            </p:cNvCxnSpPr>
+            <p:nvPr/>
+          </p:nvCxnSpPr>
+          <p:spPr>
+            <a:xfrm flipH="1">
+              <a:off x="6463489" y="4874626"/>
+              <a:ext cx="701837" cy="298575"/>
+            </a:xfrm>
+            <a:prstGeom prst="line">
+              <a:avLst/>
+            </a:prstGeom>
+            <a:ln w="38100">
+              <a:solidFill>
+                <a:srgbClr val="00B050"/>
+              </a:solidFill>
+            </a:ln>
+          </p:spPr>
+          <p:style>
+            <a:lnRef idx="1">
+              <a:schemeClr val="accent1"/>
+            </a:lnRef>
+            <a:fillRef idx="0">
+              <a:schemeClr val="accent1"/>
+            </a:fillRef>
+            <a:effectRef idx="0">
+              <a:schemeClr val="accent1"/>
+            </a:effectRef>
+            <a:fontRef idx="minor">
+              <a:schemeClr val="tx1"/>
+            </a:fontRef>
+          </p:style>
+        </p:cxnSp>
+        <p:cxnSp>
+          <p:nvCxnSpPr>
+            <p:cNvPr id="116" name="直線接點 115">
+              <a:extLst>
+                <a:ext uri="{FF2B5EF4-FFF2-40B4-BE49-F238E27FC236}">
+                  <a16:creationId xmlns:a16="http://schemas.microsoft.com/office/drawing/2014/main" id="{B3AB68E6-CD60-44EC-AF71-684B072B1039}"/>
+                </a:ext>
+              </a:extLst>
+            </p:cNvPr>
+            <p:cNvCxnSpPr>
+              <a:cxnSpLocks/>
+              <a:stCxn id="69" idx="2"/>
+              <a:endCxn id="23" idx="0"/>
+            </p:cNvCxnSpPr>
+            <p:nvPr/>
+          </p:nvCxnSpPr>
+          <p:spPr>
+            <a:xfrm>
+              <a:off x="7165326" y="4874626"/>
+              <a:ext cx="1378060" cy="321612"/>
+            </a:xfrm>
+            <a:prstGeom prst="line">
+              <a:avLst/>
+            </a:prstGeom>
+            <a:ln w="38100">
+              <a:solidFill>
+                <a:srgbClr val="00B050"/>
+              </a:solidFill>
+            </a:ln>
+          </p:spPr>
+          <p:style>
+            <a:lnRef idx="1">
+              <a:schemeClr val="accent1"/>
+            </a:lnRef>
+            <a:fillRef idx="0">
+              <a:schemeClr val="accent1"/>
+            </a:fillRef>
+            <a:effectRef idx="0">
+              <a:schemeClr val="accent1"/>
+            </a:effectRef>
+            <a:fontRef idx="minor">
+              <a:schemeClr val="tx1"/>
+            </a:fontRef>
+          </p:style>
+        </p:cxnSp>
+        <p:cxnSp>
+          <p:nvCxnSpPr>
+            <p:cNvPr id="118" name="直線接點 117">
+              <a:extLst>
+                <a:ext uri="{FF2B5EF4-FFF2-40B4-BE49-F238E27FC236}">
+                  <a16:creationId xmlns:a16="http://schemas.microsoft.com/office/drawing/2014/main" id="{1583C68D-36B7-47E3-B6FD-4A4F97FE514A}"/>
+                </a:ext>
+              </a:extLst>
+            </p:cNvPr>
+            <p:cNvCxnSpPr>
+              <a:stCxn id="7" idx="3"/>
+              <a:endCxn id="26" idx="2"/>
+            </p:cNvCxnSpPr>
+            <p:nvPr/>
+          </p:nvCxnSpPr>
+          <p:spPr>
+            <a:xfrm flipV="1">
+              <a:off x="9323537" y="2716463"/>
+              <a:ext cx="417117" cy="9743"/>
+            </a:xfrm>
+            <a:prstGeom prst="line">
+              <a:avLst/>
+            </a:prstGeom>
+            <a:ln w="38100">
+              <a:solidFill>
+                <a:srgbClr val="7030A0"/>
+              </a:solidFill>
+            </a:ln>
+          </p:spPr>
+          <p:style>
+            <a:lnRef idx="1">
+              <a:schemeClr val="accent1"/>
+            </a:lnRef>
+            <a:fillRef idx="0">
+              <a:schemeClr val="accent1"/>
+            </a:fillRef>
+            <a:effectRef idx="0">
+              <a:schemeClr val="accent1"/>
+            </a:effectRef>
+            <a:fontRef idx="minor">
+              <a:schemeClr val="tx1"/>
+            </a:fontRef>
+          </p:style>
+        </p:cxnSp>
+        <p:cxnSp>
+          <p:nvCxnSpPr>
+            <p:cNvPr id="120" name="直線接點 119">
+              <a:extLst>
+                <a:ext uri="{FF2B5EF4-FFF2-40B4-BE49-F238E27FC236}">
+                  <a16:creationId xmlns:a16="http://schemas.microsoft.com/office/drawing/2014/main" id="{E0DF614A-B2DC-4E63-92C5-86FE75DCD949}"/>
+                </a:ext>
+              </a:extLst>
+            </p:cNvPr>
+            <p:cNvCxnSpPr>
+              <a:stCxn id="7" idx="3"/>
+              <a:endCxn id="25" idx="2"/>
+            </p:cNvCxnSpPr>
+            <p:nvPr/>
+          </p:nvCxnSpPr>
+          <p:spPr>
+            <a:xfrm>
+              <a:off x="9323537" y="2726206"/>
+              <a:ext cx="437237" cy="861177"/>
+            </a:xfrm>
+            <a:prstGeom prst="line">
+              <a:avLst/>
+            </a:prstGeom>
+            <a:ln w="38100">
+              <a:solidFill>
+                <a:srgbClr val="7030A0"/>
+              </a:solidFill>
+            </a:ln>
+          </p:spPr>
+          <p:style>
+            <a:lnRef idx="1">
+              <a:schemeClr val="accent1"/>
+            </a:lnRef>
+            <a:fillRef idx="0">
+              <a:schemeClr val="accent1"/>
+            </a:fillRef>
+            <a:effectRef idx="0">
+              <a:schemeClr val="accent1"/>
+            </a:effectRef>
+            <a:fontRef idx="minor">
+              <a:schemeClr val="tx1"/>
+            </a:fontRef>
+          </p:style>
+        </p:cxnSp>
+        <p:cxnSp>
+          <p:nvCxnSpPr>
+            <p:cNvPr id="122" name="直線接點 121">
+              <a:extLst>
+                <a:ext uri="{FF2B5EF4-FFF2-40B4-BE49-F238E27FC236}">
+                  <a16:creationId xmlns:a16="http://schemas.microsoft.com/office/drawing/2014/main" id="{EA7F6708-0F86-4704-A171-6426D659B893}"/>
+                </a:ext>
+              </a:extLst>
+            </p:cNvPr>
+            <p:cNvCxnSpPr>
+              <a:stCxn id="8" idx="3"/>
+              <a:endCxn id="28" idx="2"/>
+            </p:cNvCxnSpPr>
+            <p:nvPr/>
+          </p:nvCxnSpPr>
+          <p:spPr>
+            <a:xfrm flipV="1">
+              <a:off x="7901201" y="1128813"/>
+              <a:ext cx="1436197" cy="552542"/>
+            </a:xfrm>
+            <a:prstGeom prst="line">
+              <a:avLst/>
+            </a:prstGeom>
+            <a:ln w="38100">
+              <a:solidFill>
+                <a:srgbClr val="4D4D4D"/>
+              </a:solidFill>
+            </a:ln>
+          </p:spPr>
+          <p:style>
+            <a:lnRef idx="1">
+              <a:schemeClr val="accent1"/>
+            </a:lnRef>
+            <a:fillRef idx="0">
+              <a:schemeClr val="accent1"/>
+            </a:fillRef>
+            <a:effectRef idx="0">
+              <a:schemeClr val="accent1"/>
+            </a:effectRef>
+            <a:fontRef idx="minor">
+              <a:schemeClr val="tx1"/>
+            </a:fontRef>
+          </p:style>
+        </p:cxnSp>
+        <p:cxnSp>
+          <p:nvCxnSpPr>
+            <p:cNvPr id="124" name="直線接點 123">
+              <a:extLst>
+                <a:ext uri="{FF2B5EF4-FFF2-40B4-BE49-F238E27FC236}">
+                  <a16:creationId xmlns:a16="http://schemas.microsoft.com/office/drawing/2014/main" id="{1C677481-5AEA-430D-9A9F-E4FF83DC87EF}"/>
+                </a:ext>
+              </a:extLst>
+            </p:cNvPr>
+            <p:cNvCxnSpPr>
+              <a:stCxn id="8" idx="3"/>
+              <a:endCxn id="27" idx="2"/>
+            </p:cNvCxnSpPr>
+            <p:nvPr/>
+          </p:nvCxnSpPr>
+          <p:spPr>
+            <a:xfrm flipV="1">
+              <a:off x="7901201" y="808296"/>
+              <a:ext cx="291233" cy="873059"/>
+            </a:xfrm>
+            <a:prstGeom prst="line">
+              <a:avLst/>
+            </a:prstGeom>
+            <a:ln w="38100">
+              <a:solidFill>
+                <a:srgbClr val="4D4D4D"/>
+              </a:solidFill>
+            </a:ln>
+          </p:spPr>
+          <p:style>
+            <a:lnRef idx="1">
+              <a:schemeClr val="accent1"/>
+            </a:lnRef>
+            <a:fillRef idx="0">
+              <a:schemeClr val="accent1"/>
+            </a:fillRef>
+            <a:effectRef idx="0">
+              <a:schemeClr val="accent1"/>
+            </a:effectRef>
+            <a:fontRef idx="minor">
+              <a:schemeClr val="tx1"/>
+            </a:fontRef>
+          </p:style>
+        </p:cxnSp>
+        <p:cxnSp>
+          <p:nvCxnSpPr>
+            <p:cNvPr id="130" name="直線接點 129">
+              <a:extLst>
+                <a:ext uri="{FF2B5EF4-FFF2-40B4-BE49-F238E27FC236}">
+                  <a16:creationId xmlns:a16="http://schemas.microsoft.com/office/drawing/2014/main" id="{229CE63F-CCAD-4E96-B326-D719E2AB69E2}"/>
+                </a:ext>
+              </a:extLst>
+            </p:cNvPr>
+            <p:cNvCxnSpPr>
+              <a:cxnSpLocks/>
+              <a:endCxn id="30" idx="0"/>
+            </p:cNvCxnSpPr>
+            <p:nvPr/>
+          </p:nvCxnSpPr>
+          <p:spPr>
+            <a:xfrm>
+              <a:off x="4735901" y="3033816"/>
+              <a:ext cx="10824" cy="756077"/>
+            </a:xfrm>
+            <a:prstGeom prst="line">
+              <a:avLst/>
+            </a:prstGeom>
+            <a:ln w="76200" cmpd="dbl">
+              <a:solidFill>
+                <a:srgbClr val="ED7D31"/>
+              </a:solidFill>
+            </a:ln>
+          </p:spPr>
+          <p:style>
+            <a:lnRef idx="1">
+              <a:schemeClr val="accent1"/>
+            </a:lnRef>
+            <a:fillRef idx="0">
+              <a:schemeClr val="accent1"/>
+            </a:fillRef>
+            <a:effectRef idx="0">
+              <a:schemeClr val="accent1"/>
+            </a:effectRef>
+            <a:fontRef idx="minor">
+              <a:schemeClr val="tx1"/>
+            </a:fontRef>
+          </p:style>
+        </p:cxnSp>
+        <p:cxnSp>
+          <p:nvCxnSpPr>
+            <p:cNvPr id="132" name="直線接點 131">
+              <a:extLst>
+                <a:ext uri="{FF2B5EF4-FFF2-40B4-BE49-F238E27FC236}">
+                  <a16:creationId xmlns:a16="http://schemas.microsoft.com/office/drawing/2014/main" id="{A16D8E0F-6997-4B6A-8072-ED83CA663C6D}"/>
+                </a:ext>
+              </a:extLst>
+            </p:cNvPr>
+            <p:cNvCxnSpPr>
+              <a:cxnSpLocks/>
+              <a:stCxn id="30" idx="2"/>
+              <a:endCxn id="69" idx="1"/>
+            </p:cNvCxnSpPr>
+            <p:nvPr/>
+          </p:nvCxnSpPr>
+          <p:spPr>
+            <a:xfrm flipV="1">
+              <a:off x="4746725" y="4585290"/>
+              <a:ext cx="1936676" cy="38255"/>
+            </a:xfrm>
+            <a:prstGeom prst="line">
+              <a:avLst/>
+            </a:prstGeom>
+            <a:ln w="76200" cmpd="dbl">
+              <a:solidFill>
+                <a:srgbClr val="ED7D31"/>
+              </a:solidFill>
+            </a:ln>
+          </p:spPr>
+          <p:style>
+            <a:lnRef idx="1">
+              <a:schemeClr val="accent1"/>
+            </a:lnRef>
+            <a:fillRef idx="0">
+              <a:schemeClr val="accent1"/>
+            </a:fillRef>
+            <a:effectRef idx="0">
+              <a:schemeClr val="accent1"/>
+            </a:effectRef>
+            <a:fontRef idx="minor">
+              <a:schemeClr val="tx1"/>
+            </a:fontRef>
+          </p:style>
+        </p:cxnSp>
+        <p:cxnSp>
+          <p:nvCxnSpPr>
+            <p:cNvPr id="134" name="直線接點 133">
+              <a:extLst>
+                <a:ext uri="{FF2B5EF4-FFF2-40B4-BE49-F238E27FC236}">
+                  <a16:creationId xmlns:a16="http://schemas.microsoft.com/office/drawing/2014/main" id="{B771A834-D842-4990-843E-A0CFEB6A1311}"/>
+                </a:ext>
+              </a:extLst>
+            </p:cNvPr>
+            <p:cNvCxnSpPr>
+              <a:cxnSpLocks/>
+              <a:stCxn id="69" idx="3"/>
+              <a:endCxn id="32" idx="2"/>
+            </p:cNvCxnSpPr>
+            <p:nvPr/>
+          </p:nvCxnSpPr>
+          <p:spPr>
+            <a:xfrm flipV="1">
+              <a:off x="7647251" y="4585289"/>
+              <a:ext cx="1194361" cy="1"/>
+            </a:xfrm>
+            <a:prstGeom prst="line">
+              <a:avLst/>
+            </a:prstGeom>
+            <a:ln w="76200" cmpd="dbl">
+              <a:solidFill>
+                <a:srgbClr val="ED7D31"/>
+              </a:solidFill>
+            </a:ln>
+          </p:spPr>
+          <p:style>
+            <a:lnRef idx="1">
+              <a:schemeClr val="accent1"/>
+            </a:lnRef>
+            <a:fillRef idx="0">
+              <a:schemeClr val="accent1"/>
+            </a:fillRef>
+            <a:effectRef idx="0">
+              <a:schemeClr val="accent1"/>
+            </a:effectRef>
+            <a:fontRef idx="minor">
+              <a:schemeClr val="tx1"/>
+            </a:fontRef>
+          </p:style>
+        </p:cxnSp>
+        <p:cxnSp>
+          <p:nvCxnSpPr>
+            <p:cNvPr id="136" name="直線接點 135">
+              <a:extLst>
+                <a:ext uri="{FF2B5EF4-FFF2-40B4-BE49-F238E27FC236}">
+                  <a16:creationId xmlns:a16="http://schemas.microsoft.com/office/drawing/2014/main" id="{A91C540E-4196-4AC9-8D8D-188F8B6045E3}"/>
+                </a:ext>
+              </a:extLst>
+            </p:cNvPr>
+            <p:cNvCxnSpPr>
+              <a:stCxn id="32" idx="0"/>
+              <a:endCxn id="7" idx="2"/>
+            </p:cNvCxnSpPr>
+            <p:nvPr/>
+          </p:nvCxnSpPr>
+          <p:spPr>
+            <a:xfrm flipV="1">
+              <a:off x="8841612" y="3015542"/>
+              <a:ext cx="0" cy="736095"/>
+            </a:xfrm>
+            <a:prstGeom prst="line">
+              <a:avLst/>
+            </a:prstGeom>
+            <a:ln w="76200" cmpd="dbl">
+              <a:solidFill>
+                <a:srgbClr val="ED7D31"/>
+              </a:solidFill>
+            </a:ln>
+          </p:spPr>
+          <p:style>
+            <a:lnRef idx="1">
+              <a:schemeClr val="accent1"/>
+            </a:lnRef>
+            <a:fillRef idx="0">
+              <a:schemeClr val="accent1"/>
+            </a:fillRef>
+            <a:effectRef idx="0">
+              <a:schemeClr val="accent1"/>
+            </a:effectRef>
+            <a:fontRef idx="minor">
+              <a:schemeClr val="tx1"/>
+            </a:fontRef>
+          </p:style>
+        </p:cxnSp>
+        <p:cxnSp>
+          <p:nvCxnSpPr>
+            <p:cNvPr id="138" name="直線接點 137">
+              <a:extLst>
+                <a:ext uri="{FF2B5EF4-FFF2-40B4-BE49-F238E27FC236}">
+                  <a16:creationId xmlns:a16="http://schemas.microsoft.com/office/drawing/2014/main" id="{4388DF5F-C414-4034-B9E4-4E5F1AE73A39}"/>
+                </a:ext>
+              </a:extLst>
+            </p:cNvPr>
+            <p:cNvCxnSpPr>
+              <a:stCxn id="31" idx="3"/>
+              <a:endCxn id="7" idx="1"/>
+            </p:cNvCxnSpPr>
+            <p:nvPr/>
+          </p:nvCxnSpPr>
+          <p:spPr>
+            <a:xfrm flipV="1">
+              <a:off x="7317133" y="2726206"/>
+              <a:ext cx="1042554" cy="1002"/>
+            </a:xfrm>
+            <a:prstGeom prst="line">
+              <a:avLst/>
+            </a:prstGeom>
+            <a:ln w="76200" cmpd="dbl">
+              <a:solidFill>
+                <a:srgbClr val="ED7D31"/>
+              </a:solidFill>
+            </a:ln>
+          </p:spPr>
+          <p:style>
+            <a:lnRef idx="1">
+              <a:schemeClr val="accent1"/>
+            </a:lnRef>
+            <a:fillRef idx="0">
+              <a:schemeClr val="accent1"/>
+            </a:fillRef>
+            <a:effectRef idx="0">
+              <a:schemeClr val="accent1"/>
+            </a:effectRef>
+            <a:fontRef idx="minor">
+              <a:schemeClr val="tx1"/>
+            </a:fontRef>
+          </p:style>
+        </p:cxnSp>
+        <p:cxnSp>
+          <p:nvCxnSpPr>
+            <p:cNvPr id="140" name="直線接點 139">
+              <a:extLst>
+                <a:ext uri="{FF2B5EF4-FFF2-40B4-BE49-F238E27FC236}">
+                  <a16:creationId xmlns:a16="http://schemas.microsoft.com/office/drawing/2014/main" id="{D0689312-1238-4003-BB6F-AC7E75B8AD49}"/>
+                </a:ext>
+              </a:extLst>
+            </p:cNvPr>
+            <p:cNvCxnSpPr>
+              <a:stCxn id="4" idx="3"/>
+              <a:endCxn id="31" idx="1"/>
+            </p:cNvCxnSpPr>
+            <p:nvPr/>
+          </p:nvCxnSpPr>
+          <p:spPr>
+            <a:xfrm flipV="1">
+              <a:off x="4782520" y="2727208"/>
+              <a:ext cx="1067526" cy="1"/>
+            </a:xfrm>
+            <a:prstGeom prst="line">
+              <a:avLst/>
+            </a:prstGeom>
+            <a:ln w="76200" cmpd="dbl">
+              <a:solidFill>
+                <a:srgbClr val="ED7D31"/>
+              </a:solidFill>
+            </a:ln>
+          </p:spPr>
+          <p:style>
+            <a:lnRef idx="1">
+              <a:schemeClr val="accent1"/>
+            </a:lnRef>
+            <a:fillRef idx="0">
+              <a:schemeClr val="accent1"/>
+            </a:fillRef>
+            <a:effectRef idx="0">
+              <a:schemeClr val="accent1"/>
+            </a:effectRef>
+            <a:fontRef idx="minor">
+              <a:schemeClr val="tx1"/>
+            </a:fontRef>
+          </p:style>
+        </p:cxnSp>
+        <p:cxnSp>
+          <p:nvCxnSpPr>
+            <p:cNvPr id="142" name="直線接點 141">
+              <a:extLst>
+                <a:ext uri="{FF2B5EF4-FFF2-40B4-BE49-F238E27FC236}">
+                  <a16:creationId xmlns:a16="http://schemas.microsoft.com/office/drawing/2014/main" id="{B86D59E7-50FD-40F7-8089-EBAB50160F7A}"/>
+                </a:ext>
+              </a:extLst>
+            </p:cNvPr>
+            <p:cNvCxnSpPr>
+              <a:stCxn id="29" idx="1"/>
+              <a:endCxn id="4" idx="0"/>
+            </p:cNvCxnSpPr>
+            <p:nvPr/>
+          </p:nvCxnSpPr>
+          <p:spPr>
+            <a:xfrm>
+              <a:off x="4296468" y="1687641"/>
+              <a:ext cx="4127" cy="750231"/>
+            </a:xfrm>
+            <a:prstGeom prst="line">
+              <a:avLst/>
+            </a:prstGeom>
+            <a:ln w="38100">
+              <a:solidFill>
+                <a:srgbClr val="ED7D31"/>
+              </a:solidFill>
+            </a:ln>
+          </p:spPr>
+          <p:style>
+            <a:lnRef idx="1">
+              <a:schemeClr val="accent1"/>
+            </a:lnRef>
+            <a:fillRef idx="0">
+              <a:schemeClr val="accent1"/>
+            </a:fillRef>
+            <a:effectRef idx="0">
+              <a:schemeClr val="accent1"/>
+            </a:effectRef>
+            <a:fontRef idx="minor">
+              <a:schemeClr val="tx1"/>
+            </a:fontRef>
+          </p:style>
+        </p:cxnSp>
+        <p:cxnSp>
+          <p:nvCxnSpPr>
+            <p:cNvPr id="144" name="直線接點 143">
+              <a:extLst>
+                <a:ext uri="{FF2B5EF4-FFF2-40B4-BE49-F238E27FC236}">
+                  <a16:creationId xmlns:a16="http://schemas.microsoft.com/office/drawing/2014/main" id="{66101CEC-8885-4D9C-B364-A9BFF68169CE}"/>
+                </a:ext>
+              </a:extLst>
+            </p:cNvPr>
+            <p:cNvCxnSpPr>
+              <a:stCxn id="29" idx="3"/>
+              <a:endCxn id="8" idx="1"/>
+            </p:cNvCxnSpPr>
+            <p:nvPr/>
+          </p:nvCxnSpPr>
+          <p:spPr>
+            <a:xfrm flipV="1">
+              <a:off x="5763555" y="1681355"/>
+              <a:ext cx="1173796" cy="6286"/>
+            </a:xfrm>
+            <a:prstGeom prst="line">
+              <a:avLst/>
+            </a:prstGeom>
+            <a:ln w="38100">
+              <a:solidFill>
+                <a:srgbClr val="ED7D31"/>
+              </a:solidFill>
+            </a:ln>
+          </p:spPr>
+          <p:style>
+            <a:lnRef idx="1">
+              <a:schemeClr val="accent1"/>
+            </a:lnRef>
+            <a:fillRef idx="0">
+              <a:schemeClr val="accent1"/>
+            </a:fillRef>
+            <a:effectRef idx="0">
+              <a:schemeClr val="accent1"/>
+            </a:effectRef>
+            <a:fontRef idx="minor">
+              <a:schemeClr val="tx1"/>
+            </a:fontRef>
+          </p:style>
+        </p:cxnSp>
+        <p:cxnSp>
+          <p:nvCxnSpPr>
+            <p:cNvPr id="146" name="直線接點 145">
+              <a:extLst>
+                <a:ext uri="{FF2B5EF4-FFF2-40B4-BE49-F238E27FC236}">
+                  <a16:creationId xmlns:a16="http://schemas.microsoft.com/office/drawing/2014/main" id="{219D975D-4DDD-4F6D-9E89-DE35D4BF5166}"/>
+                </a:ext>
+              </a:extLst>
+            </p:cNvPr>
+            <p:cNvCxnSpPr>
+              <a:stCxn id="29" idx="0"/>
+              <a:endCxn id="19" idx="4"/>
+            </p:cNvCxnSpPr>
+            <p:nvPr/>
+          </p:nvCxnSpPr>
+          <p:spPr>
+            <a:xfrm flipH="1" flipV="1">
+              <a:off x="5030011" y="823706"/>
+              <a:ext cx="1" cy="447109"/>
+            </a:xfrm>
+            <a:prstGeom prst="line">
+              <a:avLst/>
+            </a:prstGeom>
+            <a:ln w="38100">
+              <a:solidFill>
+                <a:srgbClr val="ED7D31"/>
+              </a:solidFill>
+            </a:ln>
+          </p:spPr>
+          <p:style>
+            <a:lnRef idx="1">
+              <a:schemeClr val="accent1"/>
+            </a:lnRef>
+            <a:fillRef idx="0">
+              <a:schemeClr val="accent1"/>
+            </a:fillRef>
+            <a:effectRef idx="0">
+              <a:schemeClr val="accent1"/>
+            </a:effectRef>
+            <a:fontRef idx="minor">
+              <a:schemeClr val="tx1"/>
+            </a:fontRef>
+          </p:style>
+        </p:cxnSp>
+        <p:cxnSp>
+          <p:nvCxnSpPr>
+            <p:cNvPr id="148" name="直線接點 147">
+              <a:extLst>
+                <a:ext uri="{FF2B5EF4-FFF2-40B4-BE49-F238E27FC236}">
+                  <a16:creationId xmlns:a16="http://schemas.microsoft.com/office/drawing/2014/main" id="{5AA120E0-7D2C-46D9-A533-2E98BC07C6D9}"/>
+                </a:ext>
+              </a:extLst>
+            </p:cNvPr>
+            <p:cNvCxnSpPr>
+              <a:cxnSpLocks/>
+              <a:stCxn id="11" idx="2"/>
+              <a:endCxn id="8" idx="3"/>
+            </p:cNvCxnSpPr>
+            <p:nvPr/>
+          </p:nvCxnSpPr>
+          <p:spPr>
+            <a:xfrm flipH="1" flipV="1">
+              <a:off x="7901201" y="1681355"/>
+              <a:ext cx="976738" cy="232495"/>
+            </a:xfrm>
+            <a:prstGeom prst="line">
+              <a:avLst/>
+            </a:prstGeom>
+            <a:ln w="38100">
+              <a:solidFill>
+                <a:srgbClr val="4D4D4D"/>
+              </a:solidFill>
+            </a:ln>
+          </p:spPr>
+          <p:style>
+            <a:lnRef idx="1">
+              <a:schemeClr val="accent1"/>
+            </a:lnRef>
+            <a:fillRef idx="0">
+              <a:schemeClr val="accent1"/>
+            </a:fillRef>
+            <a:effectRef idx="0">
+              <a:schemeClr val="accent1"/>
+            </a:effectRef>
+            <a:fontRef idx="minor">
+              <a:schemeClr val="tx1"/>
+            </a:fontRef>
+          </p:style>
+        </p:cxnSp>
+        <p:sp>
+          <p:nvSpPr>
+            <p:cNvPr id="69" name="矩形 68">
+              <a:extLst>
+                <a:ext uri="{FF2B5EF4-FFF2-40B4-BE49-F238E27FC236}">
+                  <a16:creationId xmlns:a16="http://schemas.microsoft.com/office/drawing/2014/main" id="{AF074DE4-C9E2-4A29-A201-EA83108C0221}"/>
+                </a:ext>
+              </a:extLst>
+            </p:cNvPr>
+            <p:cNvSpPr/>
+            <p:nvPr/>
+          </p:nvSpPr>
+          <p:spPr>
+            <a:xfrm>
+              <a:off x="6683401" y="4295953"/>
+              <a:ext cx="963850" cy="578673"/>
+            </a:xfrm>
+            <a:prstGeom prst="rect">
+              <a:avLst/>
+            </a:prstGeom>
+            <a:noFill/>
+            <a:ln w="38100">
+              <a:solidFill>
+                <a:srgbClr val="00B050"/>
+              </a:solidFill>
+            </a:ln>
+          </p:spPr>
+          <p:style>
+            <a:lnRef idx="2">
+              <a:schemeClr val="accent1">
+                <a:shade val="50000"/>
+              </a:schemeClr>
+            </a:lnRef>
+            <a:fillRef idx="1">
+              <a:schemeClr val="accent1"/>
+            </a:fillRef>
+            <a:effectRef idx="0">
+              <a:schemeClr val="accent1"/>
+            </a:effectRef>
+            <a:fontRef idx="minor">
+              <a:schemeClr val="lt1"/>
+            </a:fontRef>
+          </p:style>
+          <p:txBody>
+            <a:bodyPr rtlCol="0" anchor="ctr"/>
+            <a:lstStyle/>
+            <a:p>
+              <a:pPr algn="ctr"/>
+              <a:r>
+                <a:rPr lang="zh-TW" altLang="en-US" dirty="0">
+                  <a:solidFill>
+                    <a:sysClr val="windowText" lastClr="000000"/>
+                  </a:solidFill>
+                  <a:latin typeface="微軟正黑體" panose="020B0604030504040204" pitchFamily="34" charset="-120"/>
+                  <a:ea typeface="微軟正黑體" panose="020B0604030504040204" pitchFamily="34" charset="-120"/>
+                </a:rPr>
+                <a:t>出版社</a:t>
+              </a:r>
+            </a:p>
+          </p:txBody>
+        </p:sp>
+        <p:sp>
+          <p:nvSpPr>
+            <p:cNvPr id="53" name="橢圓 52">
+              <a:extLst>
+                <a:ext uri="{FF2B5EF4-FFF2-40B4-BE49-F238E27FC236}">
+                  <a16:creationId xmlns:a16="http://schemas.microsoft.com/office/drawing/2014/main" id="{4DFC75C5-AE34-4B0C-A5BA-88EDEE029858}"/>
+                </a:ext>
+              </a:extLst>
+            </p:cNvPr>
+            <p:cNvSpPr/>
+            <p:nvPr/>
+          </p:nvSpPr>
+          <p:spPr>
+            <a:xfrm>
+              <a:off x="878311" y="2981988"/>
+              <a:ext cx="1230942" cy="552543"/>
+            </a:xfrm>
+            <a:prstGeom prst="ellipse">
+              <a:avLst/>
+            </a:prstGeom>
+            <a:noFill/>
+            <a:ln w="38100">
+              <a:solidFill>
+                <a:srgbClr val="2F528F"/>
+              </a:solidFill>
+            </a:ln>
+          </p:spPr>
+          <p:style>
+            <a:lnRef idx="2">
+              <a:schemeClr val="accent1">
+                <a:shade val="50000"/>
+              </a:schemeClr>
+            </a:lnRef>
+            <a:fillRef idx="1">
+              <a:schemeClr val="accent1"/>
+            </a:fillRef>
+            <a:effectRef idx="0">
+              <a:schemeClr val="accent1"/>
+            </a:effectRef>
+            <a:fontRef idx="minor">
+              <a:schemeClr val="lt1"/>
+            </a:fontRef>
+          </p:style>
+          <p:txBody>
+            <a:bodyPr rtlCol="0" anchor="ctr"/>
+            <a:lstStyle/>
+            <a:p>
+              <a:pPr algn="ctr"/>
+              <a:r>
+                <a:rPr lang="zh-TW" altLang="en-US" dirty="0">
+                  <a:solidFill>
+                    <a:sysClr val="windowText" lastClr="000000"/>
+                  </a:solidFill>
+                  <a:latin typeface="微軟正黑體" panose="020B0604030504040204" pitchFamily="34" charset="-120"/>
+                  <a:ea typeface="微軟正黑體" panose="020B0604030504040204" pitchFamily="34" charset="-120"/>
+                </a:rPr>
+                <a:t>授權</a:t>
+              </a:r>
+            </a:p>
+          </p:txBody>
+        </p:sp>
+        <p:cxnSp>
+          <p:nvCxnSpPr>
+            <p:cNvPr id="16" name="直線接點 15">
+              <a:extLst>
+                <a:ext uri="{FF2B5EF4-FFF2-40B4-BE49-F238E27FC236}">
+                  <a16:creationId xmlns:a16="http://schemas.microsoft.com/office/drawing/2014/main" id="{6E92AF63-F176-4D6D-A764-41FCE76C92B6}"/>
+                </a:ext>
+              </a:extLst>
+            </p:cNvPr>
+            <p:cNvCxnSpPr>
+              <a:stCxn id="53" idx="6"/>
+              <a:endCxn id="4" idx="1"/>
+            </p:cNvCxnSpPr>
+            <p:nvPr/>
+          </p:nvCxnSpPr>
+          <p:spPr>
+            <a:xfrm flipV="1">
+              <a:off x="2109253" y="2727209"/>
+              <a:ext cx="1709417" cy="531051"/>
+            </a:xfrm>
+            <a:prstGeom prst="line">
+              <a:avLst/>
+            </a:prstGeom>
+            <a:ln w="38100">
+              <a:solidFill>
+                <a:srgbClr val="2F528F"/>
+              </a:solidFill>
+            </a:ln>
+          </p:spPr>
+          <p:style>
+            <a:lnRef idx="1">
+              <a:schemeClr val="accent1"/>
+            </a:lnRef>
+            <a:fillRef idx="0">
+              <a:schemeClr val="accent1"/>
+            </a:fillRef>
+            <a:effectRef idx="0">
+              <a:schemeClr val="accent1"/>
+            </a:effectRef>
+            <a:fontRef idx="minor">
+              <a:schemeClr val="tx1"/>
+            </a:fontRef>
+          </p:style>
+        </p:cxnSp>
+        <p:sp>
+          <p:nvSpPr>
+            <p:cNvPr id="38" name="文字方塊 37">
+              <a:extLst>
+                <a:ext uri="{FF2B5EF4-FFF2-40B4-BE49-F238E27FC236}">
+                  <a16:creationId xmlns:a16="http://schemas.microsoft.com/office/drawing/2014/main" id="{BB0A17A0-8AC3-4401-92F8-48CC09698C99}"/>
+                </a:ext>
+              </a:extLst>
+            </p:cNvPr>
+            <p:cNvSpPr txBox="1"/>
+            <p:nvPr/>
+          </p:nvSpPr>
+          <p:spPr>
+            <a:xfrm>
+              <a:off x="8841612" y="3209838"/>
+              <a:ext cx="372218" cy="369332"/>
+            </a:xfrm>
+            <a:prstGeom prst="rect">
+              <a:avLst/>
+            </a:prstGeom>
+            <a:noFill/>
+          </p:spPr>
+          <p:txBody>
+            <a:bodyPr wrap="none" rtlCol="0">
+              <a:spAutoFit/>
+            </a:bodyPr>
+            <a:lstStyle/>
+            <a:p>
+              <a:r>
+                <a:rPr lang="en-US" altLang="zh-TW" b="1" dirty="0">
+                  <a:solidFill>
+                    <a:srgbClr val="ED7D31"/>
+                  </a:solidFill>
+                </a:rPr>
+                <a:t>m</a:t>
+              </a:r>
+              <a:endParaRPr lang="zh-TW" altLang="en-US" b="1" dirty="0">
+                <a:solidFill>
+                  <a:srgbClr val="ED7D31"/>
+                </a:solidFill>
+              </a:endParaRPr>
+            </a:p>
+          </p:txBody>
+        </p:sp>
+        <p:sp>
+          <p:nvSpPr>
+            <p:cNvPr id="64" name="文字方塊 63">
+              <a:extLst>
+                <a:ext uri="{FF2B5EF4-FFF2-40B4-BE49-F238E27FC236}">
+                  <a16:creationId xmlns:a16="http://schemas.microsoft.com/office/drawing/2014/main" id="{B932F89F-DA41-4B18-85A4-91D3D3AE6254}"/>
+                </a:ext>
+              </a:extLst>
+            </p:cNvPr>
+            <p:cNvSpPr txBox="1"/>
+            <p:nvPr/>
+          </p:nvSpPr>
+          <p:spPr>
+            <a:xfrm>
+              <a:off x="5182147" y="2311763"/>
+              <a:ext cx="308098" cy="369332"/>
+            </a:xfrm>
+            <a:prstGeom prst="rect">
+              <a:avLst/>
+            </a:prstGeom>
+            <a:noFill/>
+          </p:spPr>
+          <p:txBody>
+            <a:bodyPr wrap="none" rtlCol="0">
+              <a:spAutoFit/>
+            </a:bodyPr>
+            <a:lstStyle/>
+            <a:p>
+              <a:r>
+                <a:rPr lang="en-US" altLang="zh-TW" b="1" dirty="0">
+                  <a:solidFill>
+                    <a:srgbClr val="ED7D31"/>
+                  </a:solidFill>
+                </a:rPr>
+                <a:t>n</a:t>
+              </a:r>
+              <a:endParaRPr lang="zh-TW" altLang="en-US" b="1" dirty="0">
+                <a:solidFill>
+                  <a:srgbClr val="ED7D31"/>
+                </a:solidFill>
+              </a:endParaRPr>
+            </a:p>
+          </p:txBody>
+        </p:sp>
+        <p:sp>
+          <p:nvSpPr>
+            <p:cNvPr id="65" name="文字方塊 64">
+              <a:extLst>
+                <a:ext uri="{FF2B5EF4-FFF2-40B4-BE49-F238E27FC236}">
+                  <a16:creationId xmlns:a16="http://schemas.microsoft.com/office/drawing/2014/main" id="{65B7BF98-E8C9-4F76-A59C-13E115F33771}"/>
+                </a:ext>
+              </a:extLst>
+            </p:cNvPr>
+            <p:cNvSpPr txBox="1"/>
+            <p:nvPr/>
+          </p:nvSpPr>
+          <p:spPr>
+            <a:xfrm>
+              <a:off x="7777072" y="2310284"/>
+              <a:ext cx="301686" cy="369332"/>
+            </a:xfrm>
+            <a:prstGeom prst="rect">
+              <a:avLst/>
+            </a:prstGeom>
+            <a:noFill/>
+          </p:spPr>
+          <p:txBody>
+            <a:bodyPr wrap="none" rtlCol="0">
+              <a:spAutoFit/>
+            </a:bodyPr>
+            <a:lstStyle/>
+            <a:p>
+              <a:r>
+                <a:rPr lang="en-US" altLang="zh-TW" b="1" dirty="0">
+                  <a:solidFill>
+                    <a:srgbClr val="ED7D31"/>
+                  </a:solidFill>
+                </a:rPr>
+                <a:t>1</a:t>
+              </a:r>
+              <a:endParaRPr lang="zh-TW" altLang="en-US" b="1" dirty="0">
+                <a:solidFill>
+                  <a:srgbClr val="ED7D31"/>
+                </a:solidFill>
+              </a:endParaRPr>
+            </a:p>
+          </p:txBody>
+        </p:sp>
+        <p:sp>
+          <p:nvSpPr>
+            <p:cNvPr id="66" name="文字方塊 65">
+              <a:extLst>
+                <a:ext uri="{FF2B5EF4-FFF2-40B4-BE49-F238E27FC236}">
+                  <a16:creationId xmlns:a16="http://schemas.microsoft.com/office/drawing/2014/main" id="{72B39064-389D-49D5-8347-E2F15C515391}"/>
+                </a:ext>
+              </a:extLst>
+            </p:cNvPr>
+            <p:cNvSpPr txBox="1"/>
+            <p:nvPr/>
+          </p:nvSpPr>
+          <p:spPr>
+            <a:xfrm>
+              <a:off x="5805499" y="4245790"/>
+              <a:ext cx="301686" cy="369332"/>
+            </a:xfrm>
+            <a:prstGeom prst="rect">
+              <a:avLst/>
+            </a:prstGeom>
+            <a:noFill/>
+          </p:spPr>
+          <p:txBody>
+            <a:bodyPr wrap="none" rtlCol="0">
+              <a:spAutoFit/>
+            </a:bodyPr>
+            <a:lstStyle/>
+            <a:p>
+              <a:r>
+                <a:rPr lang="en-US" altLang="zh-TW" b="1" dirty="0">
+                  <a:solidFill>
+                    <a:srgbClr val="ED7D31"/>
+                  </a:solidFill>
+                </a:rPr>
+                <a:t>1</a:t>
+              </a:r>
+              <a:endParaRPr lang="zh-TW" altLang="en-US" b="1" dirty="0">
+                <a:solidFill>
+                  <a:srgbClr val="ED7D31"/>
+                </a:solidFill>
+              </a:endParaRPr>
+            </a:p>
+          </p:txBody>
+        </p:sp>
+        <p:sp>
+          <p:nvSpPr>
+            <p:cNvPr id="67" name="文字方塊 66">
+              <a:extLst>
+                <a:ext uri="{FF2B5EF4-FFF2-40B4-BE49-F238E27FC236}">
+                  <a16:creationId xmlns:a16="http://schemas.microsoft.com/office/drawing/2014/main" id="{327DB8C5-05A5-4AEE-89EA-BCE23FB8D151}"/>
+                </a:ext>
+              </a:extLst>
+            </p:cNvPr>
+            <p:cNvSpPr txBox="1"/>
+            <p:nvPr/>
+          </p:nvSpPr>
+          <p:spPr>
+            <a:xfrm>
+              <a:off x="3895945" y="1717982"/>
+              <a:ext cx="372218" cy="369332"/>
+            </a:xfrm>
+            <a:prstGeom prst="rect">
+              <a:avLst/>
+            </a:prstGeom>
+            <a:noFill/>
+          </p:spPr>
+          <p:txBody>
+            <a:bodyPr wrap="none" rtlCol="0">
+              <a:spAutoFit/>
+            </a:bodyPr>
+            <a:lstStyle/>
+            <a:p>
+              <a:r>
+                <a:rPr lang="en-US" altLang="zh-TW" b="1" dirty="0">
+                  <a:solidFill>
+                    <a:srgbClr val="ED7D31"/>
+                  </a:solidFill>
+                </a:rPr>
+                <a:t>m</a:t>
+              </a:r>
+              <a:endParaRPr lang="zh-TW" altLang="en-US" b="1" dirty="0">
+                <a:solidFill>
+                  <a:srgbClr val="ED7D31"/>
+                </a:solidFill>
+              </a:endParaRPr>
+            </a:p>
+          </p:txBody>
+        </p:sp>
+        <p:sp>
+          <p:nvSpPr>
+            <p:cNvPr id="68" name="文字方塊 67">
+              <a:extLst>
+                <a:ext uri="{FF2B5EF4-FFF2-40B4-BE49-F238E27FC236}">
+                  <a16:creationId xmlns:a16="http://schemas.microsoft.com/office/drawing/2014/main" id="{82C568CE-4DBC-4A1E-B700-64B22D4A261F}"/>
+                </a:ext>
+              </a:extLst>
+            </p:cNvPr>
+            <p:cNvSpPr txBox="1"/>
+            <p:nvPr/>
+          </p:nvSpPr>
+          <p:spPr>
+            <a:xfrm>
+              <a:off x="7810455" y="4206719"/>
+              <a:ext cx="308098" cy="369332"/>
+            </a:xfrm>
+            <a:prstGeom prst="rect">
+              <a:avLst/>
+            </a:prstGeom>
+            <a:noFill/>
+          </p:spPr>
+          <p:txBody>
+            <a:bodyPr wrap="none" rtlCol="0">
+              <a:spAutoFit/>
+            </a:bodyPr>
+            <a:lstStyle/>
+            <a:p>
+              <a:r>
+                <a:rPr lang="en-US" altLang="zh-TW" b="1" dirty="0">
+                  <a:solidFill>
+                    <a:srgbClr val="ED7D31"/>
+                  </a:solidFill>
+                </a:rPr>
+                <a:t>n</a:t>
+              </a:r>
+              <a:endParaRPr lang="zh-TW" altLang="en-US" b="1" dirty="0">
+                <a:solidFill>
+                  <a:srgbClr val="ED7D31"/>
+                </a:solidFill>
+              </a:endParaRPr>
+            </a:p>
+          </p:txBody>
+        </p:sp>
+        <p:sp>
+          <p:nvSpPr>
+            <p:cNvPr id="70" name="文字方塊 69">
+              <a:extLst>
+                <a:ext uri="{FF2B5EF4-FFF2-40B4-BE49-F238E27FC236}">
+                  <a16:creationId xmlns:a16="http://schemas.microsoft.com/office/drawing/2014/main" id="{0E4D0BE4-AE01-4FD8-8310-03E7D92239C2}"/>
+                </a:ext>
+              </a:extLst>
+            </p:cNvPr>
+            <p:cNvSpPr txBox="1"/>
+            <p:nvPr/>
+          </p:nvSpPr>
+          <p:spPr>
+            <a:xfrm>
+              <a:off x="6195323" y="1329828"/>
+              <a:ext cx="308098" cy="369332"/>
+            </a:xfrm>
+            <a:prstGeom prst="rect">
+              <a:avLst/>
+            </a:prstGeom>
+            <a:noFill/>
+          </p:spPr>
+          <p:txBody>
+            <a:bodyPr wrap="none" rtlCol="0">
+              <a:spAutoFit/>
+            </a:bodyPr>
+            <a:lstStyle/>
+            <a:p>
+              <a:r>
+                <a:rPr lang="en-US" altLang="zh-TW" b="1" dirty="0">
+                  <a:solidFill>
+                    <a:srgbClr val="ED7D31"/>
+                  </a:solidFill>
+                </a:rPr>
+                <a:t>n</a:t>
+              </a:r>
+              <a:endParaRPr lang="zh-TW" altLang="en-US" b="1" dirty="0">
+                <a:solidFill>
+                  <a:srgbClr val="ED7D31"/>
+                </a:solidFill>
+              </a:endParaRPr>
+            </a:p>
+          </p:txBody>
+        </p:sp>
+        <p:sp>
+          <p:nvSpPr>
+            <p:cNvPr id="71" name="文字方塊 70">
+              <a:extLst>
+                <a:ext uri="{FF2B5EF4-FFF2-40B4-BE49-F238E27FC236}">
+                  <a16:creationId xmlns:a16="http://schemas.microsoft.com/office/drawing/2014/main" id="{9ABAFE30-B10B-40B2-B1AC-85B0C5A64B65}"/>
+                </a:ext>
+              </a:extLst>
+            </p:cNvPr>
+            <p:cNvSpPr txBox="1"/>
+            <p:nvPr/>
+          </p:nvSpPr>
+          <p:spPr>
+            <a:xfrm>
+              <a:off x="4746724" y="3218051"/>
+              <a:ext cx="308098" cy="369332"/>
+            </a:xfrm>
+            <a:prstGeom prst="rect">
+              <a:avLst/>
+            </a:prstGeom>
+            <a:noFill/>
+          </p:spPr>
+          <p:txBody>
+            <a:bodyPr wrap="none" rtlCol="0">
+              <a:spAutoFit/>
+            </a:bodyPr>
+            <a:lstStyle/>
+            <a:p>
+              <a:r>
+                <a:rPr lang="en-US" altLang="zh-TW" b="1" dirty="0">
+                  <a:solidFill>
+                    <a:srgbClr val="ED7D31"/>
+                  </a:solidFill>
+                </a:rPr>
+                <a:t>n</a:t>
+              </a:r>
+              <a:endParaRPr lang="zh-TW" altLang="en-US" b="1" dirty="0">
+                <a:solidFill>
+                  <a:srgbClr val="ED7D31"/>
+                </a:solidFill>
+              </a:endParaRPr>
+            </a:p>
+          </p:txBody>
+        </p:sp>
+        <p:cxnSp>
+          <p:nvCxnSpPr>
+            <p:cNvPr id="90" name="直線接點 89">
+              <a:extLst>
+                <a:ext uri="{FF2B5EF4-FFF2-40B4-BE49-F238E27FC236}">
+                  <a16:creationId xmlns:a16="http://schemas.microsoft.com/office/drawing/2014/main" id="{8D0619C2-1813-49C6-A8C4-9F6E78B5F492}"/>
+                </a:ext>
+              </a:extLst>
+            </p:cNvPr>
+            <p:cNvCxnSpPr>
+              <a:cxnSpLocks/>
+              <a:endCxn id="92" idx="0"/>
+            </p:cNvCxnSpPr>
+            <p:nvPr/>
+          </p:nvCxnSpPr>
+          <p:spPr>
+            <a:xfrm>
+              <a:off x="3899172" y="3033816"/>
+              <a:ext cx="9727" cy="1246240"/>
+            </a:xfrm>
+            <a:prstGeom prst="line">
+              <a:avLst/>
+            </a:prstGeom>
+            <a:ln w="76200" cmpd="dbl">
+              <a:solidFill>
+                <a:srgbClr val="ED7D31"/>
+              </a:solidFill>
+            </a:ln>
+          </p:spPr>
+          <p:style>
+            <a:lnRef idx="1">
+              <a:schemeClr val="accent1"/>
+            </a:lnRef>
+            <a:fillRef idx="0">
+              <a:schemeClr val="accent1"/>
+            </a:fillRef>
+            <a:effectRef idx="0">
+              <a:schemeClr val="accent1"/>
+            </a:effectRef>
+            <a:fontRef idx="minor">
+              <a:schemeClr val="tx1"/>
+            </a:fontRef>
+          </p:style>
+        </p:cxnSp>
+        <p:sp>
+          <p:nvSpPr>
+            <p:cNvPr id="92" name="流程圖: 決策 91">
+              <a:extLst>
+                <a:ext uri="{FF2B5EF4-FFF2-40B4-BE49-F238E27FC236}">
+                  <a16:creationId xmlns:a16="http://schemas.microsoft.com/office/drawing/2014/main" id="{1DA8C0A2-709C-49C3-B7CD-59856E645889}"/>
+                </a:ext>
+              </a:extLst>
+            </p:cNvPr>
+            <p:cNvSpPr/>
+            <p:nvPr/>
+          </p:nvSpPr>
+          <p:spPr>
+            <a:xfrm>
+              <a:off x="3175355" y="4280056"/>
+              <a:ext cx="1467087" cy="833652"/>
+            </a:xfrm>
+            <a:prstGeom prst="flowChartDecision">
+              <a:avLst/>
+            </a:prstGeom>
+            <a:ln w="38100">
+              <a:solidFill>
+                <a:srgbClr val="ED7D31"/>
+              </a:solidFill>
+            </a:ln>
+          </p:spPr>
+          <p:style>
+            <a:lnRef idx="2">
+              <a:schemeClr val="accent2"/>
+            </a:lnRef>
+            <a:fillRef idx="1">
+              <a:schemeClr val="lt1"/>
+            </a:fillRef>
+            <a:effectRef idx="0">
+              <a:schemeClr val="accent2"/>
+            </a:effectRef>
+            <a:fontRef idx="minor">
+              <a:schemeClr val="dk1"/>
+            </a:fontRef>
+          </p:style>
+          <p:txBody>
+            <a:bodyPr rtlCol="0" anchor="ctr"/>
+            <a:lstStyle/>
+            <a:p>
+              <a:pPr algn="ctr"/>
+              <a:r>
+                <a:rPr lang="zh-TW" altLang="en-US" dirty="0">
+                  <a:solidFill>
+                    <a:sysClr val="windowText" lastClr="000000"/>
+                  </a:solidFill>
+                  <a:latin typeface="微軟正黑體" panose="020B0604030504040204" pitchFamily="34" charset="-120"/>
+                  <a:ea typeface="微軟正黑體" panose="020B0604030504040204" pitchFamily="34" charset="-120"/>
+                </a:rPr>
+                <a:t>有</a:t>
+              </a:r>
+            </a:p>
+          </p:txBody>
+        </p:sp>
+        <p:sp>
+          <p:nvSpPr>
+            <p:cNvPr id="97" name="矩形 96">
+              <a:extLst>
+                <a:ext uri="{FF2B5EF4-FFF2-40B4-BE49-F238E27FC236}">
+                  <a16:creationId xmlns:a16="http://schemas.microsoft.com/office/drawing/2014/main" id="{B6219D12-5C09-4654-80EE-120713811794}"/>
+                </a:ext>
+              </a:extLst>
+            </p:cNvPr>
+            <p:cNvSpPr/>
+            <p:nvPr/>
+          </p:nvSpPr>
+          <p:spPr>
+            <a:xfrm>
+              <a:off x="3427861" y="5421453"/>
+              <a:ext cx="963850" cy="578673"/>
+            </a:xfrm>
+            <a:prstGeom prst="rect">
+              <a:avLst/>
+            </a:prstGeom>
+            <a:noFill/>
+            <a:ln w="38100">
+              <a:solidFill>
+                <a:schemeClr val="accent4"/>
+              </a:solidFill>
+            </a:ln>
+          </p:spPr>
+          <p:style>
+            <a:lnRef idx="2">
+              <a:schemeClr val="accent1">
+                <a:shade val="50000"/>
+              </a:schemeClr>
+            </a:lnRef>
+            <a:fillRef idx="1">
+              <a:schemeClr val="accent1"/>
+            </a:fillRef>
+            <a:effectRef idx="0">
+              <a:schemeClr val="accent1"/>
+            </a:effectRef>
+            <a:fontRef idx="minor">
+              <a:schemeClr val="lt1"/>
+            </a:fontRef>
+          </p:style>
+          <p:txBody>
+            <a:bodyPr rtlCol="0" anchor="ctr"/>
+            <a:lstStyle/>
+            <a:p>
+              <a:pPr algn="ctr"/>
+              <a:r>
+                <a:rPr lang="en-US" altLang="zh-TW" dirty="0">
+                  <a:solidFill>
+                    <a:sysClr val="windowText" lastClr="000000"/>
+                  </a:solidFill>
+                  <a:latin typeface="微軟正黑體" panose="020B0604030504040204" pitchFamily="34" charset="-120"/>
+                  <a:ea typeface="微軟正黑體" panose="020B0604030504040204" pitchFamily="34" charset="-120"/>
+                </a:rPr>
+                <a:t>tag</a:t>
+              </a:r>
+              <a:endParaRPr lang="zh-TW" altLang="en-US" dirty="0">
+                <a:solidFill>
+                  <a:sysClr val="windowText" lastClr="000000"/>
+                </a:solidFill>
+                <a:latin typeface="微軟正黑體" panose="020B0604030504040204" pitchFamily="34" charset="-120"/>
+                <a:ea typeface="微軟正黑體" panose="020B0604030504040204" pitchFamily="34" charset="-120"/>
+              </a:endParaRPr>
+            </a:p>
+          </p:txBody>
+        </p:sp>
+        <p:sp>
+          <p:nvSpPr>
+            <p:cNvPr id="98" name="橢圓 97">
+              <a:extLst>
+                <a:ext uri="{FF2B5EF4-FFF2-40B4-BE49-F238E27FC236}">
+                  <a16:creationId xmlns:a16="http://schemas.microsoft.com/office/drawing/2014/main" id="{964692CF-4D88-40A0-B629-D3219F0AAF36}"/>
+                </a:ext>
+              </a:extLst>
+            </p:cNvPr>
+            <p:cNvSpPr/>
+            <p:nvPr/>
+          </p:nvSpPr>
+          <p:spPr>
+            <a:xfrm>
+              <a:off x="1654754" y="4731389"/>
+              <a:ext cx="1515246" cy="552543"/>
+            </a:xfrm>
+            <a:prstGeom prst="ellipse">
+              <a:avLst/>
+            </a:prstGeom>
+            <a:noFill/>
+            <a:ln w="38100" cmpd="sng">
+              <a:solidFill>
+                <a:schemeClr val="accent4"/>
+              </a:solidFill>
+            </a:ln>
+          </p:spPr>
+          <p:style>
+            <a:lnRef idx="2">
+              <a:schemeClr val="accent1">
+                <a:shade val="50000"/>
+              </a:schemeClr>
+            </a:lnRef>
+            <a:fillRef idx="1">
+              <a:schemeClr val="accent1"/>
+            </a:fillRef>
+            <a:effectRef idx="0">
+              <a:schemeClr val="accent1"/>
+            </a:effectRef>
+            <a:fontRef idx="minor">
+              <a:schemeClr val="lt1"/>
+            </a:fontRef>
+          </p:style>
+          <p:txBody>
+            <a:bodyPr rtlCol="0" anchor="ctr"/>
+            <a:lstStyle/>
+            <a:p>
+              <a:pPr algn="ctr"/>
+              <a:r>
+                <a:rPr lang="en-US" altLang="zh-TW" u="sng" dirty="0">
+                  <a:solidFill>
+                    <a:sysClr val="windowText" lastClr="000000"/>
+                  </a:solidFill>
+                  <a:latin typeface="微軟正黑體" panose="020B0604030504040204" pitchFamily="34" charset="-120"/>
+                  <a:ea typeface="微軟正黑體" panose="020B0604030504040204" pitchFamily="34" charset="-120"/>
+                </a:rPr>
+                <a:t>Tag</a:t>
+              </a:r>
+              <a:r>
+                <a:rPr lang="zh-TW" altLang="en-US" u="sng" dirty="0">
+                  <a:solidFill>
+                    <a:sysClr val="windowText" lastClr="000000"/>
+                  </a:solidFill>
+                  <a:latin typeface="微軟正黑體" panose="020B0604030504040204" pitchFamily="34" charset="-120"/>
+                  <a:ea typeface="微軟正黑體" panose="020B0604030504040204" pitchFamily="34" charset="-120"/>
+                </a:rPr>
+                <a:t>代號</a:t>
+              </a:r>
+            </a:p>
+          </p:txBody>
+        </p:sp>
+        <p:cxnSp>
+          <p:nvCxnSpPr>
+            <p:cNvPr id="106" name="直線接點 105">
+              <a:extLst>
+                <a:ext uri="{FF2B5EF4-FFF2-40B4-BE49-F238E27FC236}">
+                  <a16:creationId xmlns:a16="http://schemas.microsoft.com/office/drawing/2014/main" id="{8CBB5843-E777-418A-BBF6-56E98597345A}"/>
+                </a:ext>
+              </a:extLst>
+            </p:cNvPr>
+            <p:cNvCxnSpPr>
+              <a:cxnSpLocks/>
+              <a:stCxn id="92" idx="2"/>
+              <a:endCxn id="97" idx="0"/>
+            </p:cNvCxnSpPr>
+            <p:nvPr/>
+          </p:nvCxnSpPr>
+          <p:spPr>
+            <a:xfrm>
+              <a:off x="3908899" y="5113708"/>
+              <a:ext cx="887" cy="307745"/>
+            </a:xfrm>
+            <a:prstGeom prst="line">
+              <a:avLst/>
+            </a:prstGeom>
+            <a:ln w="76200" cmpd="dbl">
+              <a:solidFill>
+                <a:srgbClr val="ED7D31"/>
+              </a:solidFill>
+            </a:ln>
+          </p:spPr>
+          <p:style>
+            <a:lnRef idx="1">
+              <a:schemeClr val="accent1"/>
+            </a:lnRef>
+            <a:fillRef idx="0">
+              <a:schemeClr val="accent1"/>
+            </a:fillRef>
+            <a:effectRef idx="0">
+              <a:schemeClr val="accent1"/>
+            </a:effectRef>
+            <a:fontRef idx="minor">
+              <a:schemeClr val="tx1"/>
+            </a:fontRef>
+          </p:style>
+        </p:cxnSp>
+        <p:cxnSp>
+          <p:nvCxnSpPr>
+            <p:cNvPr id="121" name="直線接點 120">
+              <a:extLst>
+                <a:ext uri="{FF2B5EF4-FFF2-40B4-BE49-F238E27FC236}">
+                  <a16:creationId xmlns:a16="http://schemas.microsoft.com/office/drawing/2014/main" id="{D98B4ADE-CEC7-4982-A7DC-27181C16D555}"/>
+                </a:ext>
+              </a:extLst>
+            </p:cNvPr>
+            <p:cNvCxnSpPr>
+              <a:cxnSpLocks/>
+              <a:stCxn id="97" idx="1"/>
+              <a:endCxn id="98" idx="6"/>
+            </p:cNvCxnSpPr>
+            <p:nvPr/>
+          </p:nvCxnSpPr>
+          <p:spPr>
+            <a:xfrm flipH="1" flipV="1">
+              <a:off x="3170000" y="5007661"/>
+              <a:ext cx="257861" cy="703129"/>
+            </a:xfrm>
+            <a:prstGeom prst="line">
+              <a:avLst/>
+            </a:prstGeom>
+            <a:ln w="38100">
+              <a:solidFill>
+                <a:schemeClr val="accent4"/>
+              </a:solidFill>
+            </a:ln>
+          </p:spPr>
+          <p:style>
+            <a:lnRef idx="1">
+              <a:schemeClr val="accent1"/>
+            </a:lnRef>
+            <a:fillRef idx="0">
+              <a:schemeClr val="accent1"/>
+            </a:fillRef>
+            <a:effectRef idx="0">
+              <a:schemeClr val="accent1"/>
+            </a:effectRef>
+            <a:fontRef idx="minor">
+              <a:schemeClr val="tx1"/>
+            </a:fontRef>
+          </p:style>
+        </p:cxnSp>
+        <p:sp>
+          <p:nvSpPr>
+            <p:cNvPr id="162" name="文字方塊 161">
+              <a:extLst>
+                <a:ext uri="{FF2B5EF4-FFF2-40B4-BE49-F238E27FC236}">
+                  <a16:creationId xmlns:a16="http://schemas.microsoft.com/office/drawing/2014/main" id="{118EAA88-7231-4785-9C30-133C33D82D5B}"/>
+                </a:ext>
+              </a:extLst>
+            </p:cNvPr>
+            <p:cNvSpPr txBox="1"/>
+            <p:nvPr/>
+          </p:nvSpPr>
+          <p:spPr>
+            <a:xfrm>
+              <a:off x="3922713" y="3230033"/>
+              <a:ext cx="301686" cy="369332"/>
+            </a:xfrm>
+            <a:prstGeom prst="rect">
+              <a:avLst/>
+            </a:prstGeom>
+            <a:noFill/>
+          </p:spPr>
+          <p:txBody>
+            <a:bodyPr wrap="none" rtlCol="0">
+              <a:spAutoFit/>
+            </a:bodyPr>
+            <a:lstStyle/>
+            <a:p>
+              <a:r>
+                <a:rPr lang="en-US" altLang="zh-TW" b="1" dirty="0">
+                  <a:solidFill>
+                    <a:srgbClr val="ED7D31"/>
+                  </a:solidFill>
+                </a:rPr>
+                <a:t>1</a:t>
+              </a:r>
+              <a:endParaRPr lang="zh-TW" altLang="en-US" b="1" dirty="0">
+                <a:solidFill>
+                  <a:srgbClr val="ED7D31"/>
+                </a:solidFill>
+              </a:endParaRPr>
+            </a:p>
+          </p:txBody>
+        </p:sp>
+        <p:sp>
+          <p:nvSpPr>
+            <p:cNvPr id="163" name="文字方塊 162">
+              <a:extLst>
+                <a:ext uri="{FF2B5EF4-FFF2-40B4-BE49-F238E27FC236}">
+                  <a16:creationId xmlns:a16="http://schemas.microsoft.com/office/drawing/2014/main" id="{39639A44-A471-4AC4-B7FB-9912339D40C0}"/>
+                </a:ext>
+              </a:extLst>
+            </p:cNvPr>
+            <p:cNvSpPr txBox="1"/>
+            <p:nvPr/>
+          </p:nvSpPr>
+          <p:spPr>
+            <a:xfrm>
+              <a:off x="4065318" y="5026969"/>
+              <a:ext cx="308098" cy="369332"/>
+            </a:xfrm>
+            <a:prstGeom prst="rect">
+              <a:avLst/>
+            </a:prstGeom>
+            <a:noFill/>
+          </p:spPr>
+          <p:txBody>
+            <a:bodyPr wrap="none" rtlCol="0">
+              <a:spAutoFit/>
+            </a:bodyPr>
+            <a:lstStyle/>
+            <a:p>
+              <a:r>
+                <a:rPr lang="en-US" altLang="zh-TW" b="1" dirty="0">
+                  <a:solidFill>
+                    <a:srgbClr val="ED7D31"/>
+                  </a:solidFill>
+                </a:rPr>
+                <a:t>n</a:t>
+              </a:r>
+              <a:endParaRPr lang="zh-TW" altLang="en-US" b="1" dirty="0">
+                <a:solidFill>
+                  <a:srgbClr val="ED7D31"/>
+                </a:solidFill>
+              </a:endParaRPr>
+            </a:p>
+          </p:txBody>
+        </p:sp>
+      </p:grpSp>
+    </p:spTree>
+    <p:extLst>
+      <p:ext uri="{BB962C8B-B14F-4D97-AF65-F5344CB8AC3E}">
+        <p14:creationId xmlns:p14="http://schemas.microsoft.com/office/powerpoint/2010/main" val="3856543320"/>
+      </p:ext>
+    </p:extLst>
+  </p:cSld>
+  <p:clrMapOvr>
+    <a:masterClrMapping/>
+  </p:clrMapOvr>
+</p:sld>
+</file>
+
+<file path=ppt/slides/slide2.xml><?xml version="1.0" encoding="utf-8"?>
+<p:sld xmlns:a="http://schemas.openxmlformats.org/drawingml/2006/main" xmlns:r="http://schemas.openxmlformats.org/officeDocument/2006/relationships" xmlns:p="http://schemas.openxmlformats.org/presentationml/2006/main">
+  <p:cSld>
+    <p:spTree>
+      <p:nvGrpSpPr>
+        <p:cNvPr id="1" name=""/>
+        <p:cNvGrpSpPr/>
+        <p:nvPr/>
+      </p:nvGrpSpPr>
+      <p:grpSpPr>
+        <a:xfrm>
+          <a:off x="0" y="0"/>
+          <a:ext cx="0" cy="0"/>
+          <a:chOff x="0" y="0"/>
+          <a:chExt cx="0" cy="0"/>
+        </a:xfrm>
+      </p:grpSpPr>
+      <p:grpSp>
+        <p:nvGrpSpPr>
+          <p:cNvPr id="212" name="群組 211">
+            <a:extLst>
+              <a:ext uri="{FF2B5EF4-FFF2-40B4-BE49-F238E27FC236}">
+                <a16:creationId xmlns:a16="http://schemas.microsoft.com/office/drawing/2014/main" id="{6E005348-37DF-432A-9A82-04036B6D0484}"/>
+              </a:ext>
+            </a:extLst>
+          </p:cNvPr>
+          <p:cNvGrpSpPr/>
+          <p:nvPr/>
+        </p:nvGrpSpPr>
+        <p:grpSpPr>
+          <a:xfrm>
+            <a:off x="800314" y="271163"/>
+            <a:ext cx="10591372" cy="6315674"/>
+            <a:chOff x="722317" y="271163"/>
+            <a:chExt cx="10591372" cy="6315674"/>
+          </a:xfrm>
+        </p:grpSpPr>
+        <p:sp>
+          <p:nvSpPr>
+            <p:cNvPr id="4" name="矩形 3">
+              <a:extLst>
+                <a:ext uri="{FF2B5EF4-FFF2-40B4-BE49-F238E27FC236}">
+                  <a16:creationId xmlns:a16="http://schemas.microsoft.com/office/drawing/2014/main" id="{F6EEDF99-A567-46F5-A8F0-54E29683616E}"/>
+                </a:ext>
+              </a:extLst>
+            </p:cNvPr>
+            <p:cNvSpPr/>
+            <p:nvPr/>
+          </p:nvSpPr>
+          <p:spPr>
+            <a:xfrm>
+              <a:off x="3818670" y="2437872"/>
+              <a:ext cx="963850" cy="578673"/>
+            </a:xfrm>
+            <a:prstGeom prst="rect">
+              <a:avLst/>
+            </a:prstGeom>
+            <a:noFill/>
+            <a:ln w="38100">
+              <a:solidFill>
+                <a:srgbClr val="2F528F"/>
+              </a:solidFill>
+            </a:ln>
+          </p:spPr>
+          <p:style>
+            <a:lnRef idx="2">
+              <a:schemeClr val="accent1">
+                <a:shade val="50000"/>
+              </a:schemeClr>
+            </a:lnRef>
+            <a:fillRef idx="1">
+              <a:schemeClr val="accent1"/>
+            </a:fillRef>
+            <a:effectRef idx="0">
+              <a:schemeClr val="accent1"/>
+            </a:effectRef>
+            <a:fontRef idx="minor">
+              <a:schemeClr val="lt1"/>
+            </a:fontRef>
+          </p:style>
+          <p:txBody>
+            <a:bodyPr rtlCol="0" anchor="ctr"/>
+            <a:lstStyle/>
+            <a:p>
+              <a:pPr algn="ctr"/>
+              <a:r>
+                <a:rPr lang="en-US" altLang="zh-TW" dirty="0">
+                  <a:solidFill>
+                    <a:sysClr val="windowText" lastClr="000000"/>
+                  </a:solidFill>
+                  <a:latin typeface="微軟正黑體" panose="020B0604030504040204" pitchFamily="34" charset="-120"/>
+                  <a:ea typeface="微軟正黑體" panose="020B0604030504040204" pitchFamily="34" charset="-120"/>
+                </a:rPr>
+                <a:t>Novel</a:t>
+              </a:r>
+              <a:endParaRPr lang="zh-TW" altLang="en-US" dirty="0">
+                <a:solidFill>
+                  <a:sysClr val="windowText" lastClr="000000"/>
+                </a:solidFill>
+                <a:latin typeface="微軟正黑體" panose="020B0604030504040204" pitchFamily="34" charset="-120"/>
+                <a:ea typeface="微軟正黑體" panose="020B0604030504040204" pitchFamily="34" charset="-120"/>
+              </a:endParaRPr>
+            </a:p>
+          </p:txBody>
+        </p:sp>
+        <p:sp>
+          <p:nvSpPr>
+            <p:cNvPr id="7" name="矩形 6">
+              <a:extLst>
+                <a:ext uri="{FF2B5EF4-FFF2-40B4-BE49-F238E27FC236}">
+                  <a16:creationId xmlns:a16="http://schemas.microsoft.com/office/drawing/2014/main" id="{8BA4813D-5E1C-42D9-A51A-236FA101D354}"/>
+                </a:ext>
+              </a:extLst>
+            </p:cNvPr>
+            <p:cNvSpPr/>
+            <p:nvPr/>
+          </p:nvSpPr>
+          <p:spPr>
+            <a:xfrm>
+              <a:off x="8359687" y="2436869"/>
+              <a:ext cx="963850" cy="578673"/>
+            </a:xfrm>
+            <a:prstGeom prst="rect">
+              <a:avLst/>
+            </a:prstGeom>
+            <a:noFill/>
+            <a:ln w="38100">
+              <a:solidFill>
+                <a:srgbClr val="7030A0"/>
+              </a:solidFill>
+            </a:ln>
+          </p:spPr>
+          <p:style>
+            <a:lnRef idx="2">
+              <a:schemeClr val="accent1">
+                <a:shade val="50000"/>
+              </a:schemeClr>
+            </a:lnRef>
+            <a:fillRef idx="1">
+              <a:schemeClr val="accent1"/>
+            </a:fillRef>
+            <a:effectRef idx="0">
+              <a:schemeClr val="accent1"/>
+            </a:effectRef>
+            <a:fontRef idx="minor">
+              <a:schemeClr val="lt1"/>
+            </a:fontRef>
+          </p:style>
+          <p:txBody>
+            <a:bodyPr rtlCol="0" anchor="ctr"/>
+            <a:lstStyle/>
+            <a:p>
+              <a:pPr algn="ctr"/>
+              <a:r>
+                <a:rPr lang="en-US" altLang="zh-TW" dirty="0">
+                  <a:solidFill>
+                    <a:sysClr val="windowText" lastClr="000000"/>
+                  </a:solidFill>
+                  <a:latin typeface="微軟正黑體" panose="020B0604030504040204" pitchFamily="34" charset="-120"/>
+                  <a:ea typeface="微軟正黑體" panose="020B0604030504040204" pitchFamily="34" charset="-120"/>
+                </a:rPr>
+                <a:t>Author</a:t>
+              </a:r>
+              <a:endParaRPr lang="zh-TW" altLang="en-US" dirty="0">
+                <a:solidFill>
+                  <a:sysClr val="windowText" lastClr="000000"/>
+                </a:solidFill>
+                <a:latin typeface="微軟正黑體" panose="020B0604030504040204" pitchFamily="34" charset="-120"/>
+                <a:ea typeface="微軟正黑體" panose="020B0604030504040204" pitchFamily="34" charset="-120"/>
+              </a:endParaRPr>
+            </a:p>
+          </p:txBody>
+        </p:sp>
+        <p:sp>
+          <p:nvSpPr>
+            <p:cNvPr id="8" name="矩形 7">
+              <a:extLst>
+                <a:ext uri="{FF2B5EF4-FFF2-40B4-BE49-F238E27FC236}">
+                  <a16:creationId xmlns:a16="http://schemas.microsoft.com/office/drawing/2014/main" id="{82182DAA-0E8C-4F5B-9213-F4B6CFB4F174}"/>
+                </a:ext>
+              </a:extLst>
+            </p:cNvPr>
+            <p:cNvSpPr/>
+            <p:nvPr/>
+          </p:nvSpPr>
+          <p:spPr>
+            <a:xfrm>
+              <a:off x="6937351" y="1392018"/>
+              <a:ext cx="963850" cy="578673"/>
+            </a:xfrm>
+            <a:prstGeom prst="rect">
+              <a:avLst/>
+            </a:prstGeom>
+            <a:noFill/>
+            <a:ln w="38100">
+              <a:solidFill>
+                <a:srgbClr val="4D4D4D"/>
+              </a:solidFill>
+            </a:ln>
+          </p:spPr>
+          <p:style>
+            <a:lnRef idx="2">
+              <a:schemeClr val="accent1">
+                <a:shade val="50000"/>
+              </a:schemeClr>
+            </a:lnRef>
+            <a:fillRef idx="1">
+              <a:schemeClr val="accent1"/>
+            </a:fillRef>
+            <a:effectRef idx="0">
+              <a:schemeClr val="accent1"/>
+            </a:effectRef>
+            <a:fontRef idx="minor">
+              <a:schemeClr val="lt1"/>
+            </a:fontRef>
+          </p:style>
+          <p:txBody>
+            <a:bodyPr rtlCol="0" anchor="ctr"/>
+            <a:lstStyle/>
+            <a:p>
+              <a:pPr algn="ctr"/>
+              <a:r>
+                <a:rPr lang="en-US" altLang="zh-TW" dirty="0">
+                  <a:solidFill>
+                    <a:sysClr val="windowText" lastClr="000000"/>
+                  </a:solidFill>
+                  <a:latin typeface="微軟正黑體" panose="020B0604030504040204" pitchFamily="34" charset="-120"/>
+                  <a:ea typeface="微軟正黑體" panose="020B0604030504040204" pitchFamily="34" charset="-120"/>
+                </a:rPr>
+                <a:t>User</a:t>
+              </a:r>
+              <a:endParaRPr lang="zh-TW" altLang="en-US" dirty="0">
+                <a:solidFill>
+                  <a:sysClr val="windowText" lastClr="000000"/>
+                </a:solidFill>
+                <a:latin typeface="微軟正黑體" panose="020B0604030504040204" pitchFamily="34" charset="-120"/>
+                <a:ea typeface="微軟正黑體" panose="020B0604030504040204" pitchFamily="34" charset="-120"/>
+              </a:endParaRPr>
+            </a:p>
+          </p:txBody>
+        </p:sp>
+        <p:sp>
+          <p:nvSpPr>
+            <p:cNvPr id="11" name="橢圓 10">
+              <a:extLst>
+                <a:ext uri="{FF2B5EF4-FFF2-40B4-BE49-F238E27FC236}">
+                  <a16:creationId xmlns:a16="http://schemas.microsoft.com/office/drawing/2014/main" id="{A74CC088-F6BB-4D78-8774-E19DB0C79FE8}"/>
+                </a:ext>
+              </a:extLst>
+            </p:cNvPr>
+            <p:cNvSpPr/>
+            <p:nvPr/>
+          </p:nvSpPr>
+          <p:spPr>
+            <a:xfrm>
+              <a:off x="8877939" y="1637578"/>
+              <a:ext cx="1573035" cy="552543"/>
+            </a:xfrm>
+            <a:prstGeom prst="ellipse">
+              <a:avLst/>
+            </a:prstGeom>
+            <a:ln w="76200" cmpd="dbl">
+              <a:solidFill>
+                <a:srgbClr val="4D4D4D"/>
+              </a:solidFill>
+            </a:ln>
+          </p:spPr>
+          <p:style>
+            <a:lnRef idx="2">
+              <a:schemeClr val="accent2"/>
+            </a:lnRef>
+            <a:fillRef idx="1">
+              <a:schemeClr val="lt1"/>
+            </a:fillRef>
+            <a:effectRef idx="0">
+              <a:schemeClr val="accent2"/>
+            </a:effectRef>
+            <a:fontRef idx="minor">
+              <a:schemeClr val="dk1"/>
+            </a:fontRef>
+          </p:style>
+          <p:txBody>
+            <a:bodyPr rtlCol="0" anchor="ctr"/>
+            <a:lstStyle/>
+            <a:p>
+              <a:pPr algn="ctr"/>
+              <a:r>
+                <a:rPr lang="en-US" altLang="zh-TW" dirty="0" err="1">
+                  <a:solidFill>
+                    <a:sysClr val="windowText" lastClr="000000"/>
+                  </a:solidFill>
+                  <a:latin typeface="微軟正黑體" panose="020B0604030504040204" pitchFamily="34" charset="-120"/>
+                  <a:ea typeface="微軟正黑體" panose="020B0604030504040204" pitchFamily="34" charset="-120"/>
+                </a:rPr>
+                <a:t>LoveRecord</a:t>
+              </a:r>
+              <a:endParaRPr lang="zh-TW" altLang="en-US" dirty="0">
+                <a:solidFill>
+                  <a:sysClr val="windowText" lastClr="000000"/>
+                </a:solidFill>
+                <a:latin typeface="微軟正黑體" panose="020B0604030504040204" pitchFamily="34" charset="-120"/>
+                <a:ea typeface="微軟正黑體" panose="020B0604030504040204" pitchFamily="34" charset="-120"/>
+              </a:endParaRPr>
+            </a:p>
+          </p:txBody>
+        </p:sp>
+        <p:sp>
+          <p:nvSpPr>
+            <p:cNvPr id="12" name="橢圓 11">
+              <a:extLst>
+                <a:ext uri="{FF2B5EF4-FFF2-40B4-BE49-F238E27FC236}">
+                  <a16:creationId xmlns:a16="http://schemas.microsoft.com/office/drawing/2014/main" id="{50C7A5AB-1A86-48CD-8E4A-59295C6599A4}"/>
+                </a:ext>
+              </a:extLst>
+            </p:cNvPr>
+            <p:cNvSpPr/>
+            <p:nvPr/>
+          </p:nvSpPr>
+          <p:spPr>
+            <a:xfrm>
+              <a:off x="1835748" y="359170"/>
+              <a:ext cx="1573035" cy="552543"/>
+            </a:xfrm>
+            <a:prstGeom prst="ellipse">
+              <a:avLst/>
+            </a:prstGeom>
+            <a:noFill/>
+            <a:ln w="38100">
+              <a:solidFill>
+                <a:srgbClr val="2F528F"/>
+              </a:solidFill>
+            </a:ln>
+          </p:spPr>
+          <p:style>
+            <a:lnRef idx="2">
+              <a:schemeClr val="accent1">
+                <a:shade val="50000"/>
+              </a:schemeClr>
+            </a:lnRef>
+            <a:fillRef idx="1">
+              <a:schemeClr val="accent1"/>
+            </a:fillRef>
+            <a:effectRef idx="0">
+              <a:schemeClr val="accent1"/>
+            </a:effectRef>
+            <a:fontRef idx="minor">
+              <a:schemeClr val="lt1"/>
+            </a:fontRef>
+          </p:style>
+          <p:txBody>
+            <a:bodyPr rtlCol="0" anchor="ctr"/>
+            <a:lstStyle/>
+            <a:p>
+              <a:pPr algn="ctr"/>
+              <a:r>
+                <a:rPr lang="en-US" altLang="zh-TW" u="sng" dirty="0" err="1">
+                  <a:solidFill>
+                    <a:sysClr val="windowText" lastClr="000000"/>
+                  </a:solidFill>
+                  <a:latin typeface="微軟正黑體" panose="020B0604030504040204" pitchFamily="34" charset="-120"/>
+                  <a:ea typeface="微軟正黑體" panose="020B0604030504040204" pitchFamily="34" charset="-120"/>
+                </a:rPr>
+                <a:t>nIndex</a:t>
+              </a:r>
+              <a:endParaRPr lang="zh-TW" altLang="en-US" u="sng" dirty="0">
+                <a:solidFill>
+                  <a:sysClr val="windowText" lastClr="000000"/>
+                </a:solidFill>
+                <a:latin typeface="微軟正黑體" panose="020B0604030504040204" pitchFamily="34" charset="-120"/>
+                <a:ea typeface="微軟正黑體" panose="020B0604030504040204" pitchFamily="34" charset="-120"/>
+              </a:endParaRPr>
+            </a:p>
+          </p:txBody>
+        </p:sp>
+        <p:sp>
+          <p:nvSpPr>
+            <p:cNvPr id="13" name="橢圓 12">
+              <a:extLst>
+                <a:ext uri="{FF2B5EF4-FFF2-40B4-BE49-F238E27FC236}">
+                  <a16:creationId xmlns:a16="http://schemas.microsoft.com/office/drawing/2014/main" id="{3DA73774-161F-4E32-8D07-D371A0C6B297}"/>
+                </a:ext>
+              </a:extLst>
+            </p:cNvPr>
+            <p:cNvSpPr/>
+            <p:nvPr/>
+          </p:nvSpPr>
+          <p:spPr>
+            <a:xfrm>
+              <a:off x="1039283" y="1819349"/>
+              <a:ext cx="1230942" cy="552543"/>
+            </a:xfrm>
+            <a:prstGeom prst="ellipse">
+              <a:avLst/>
+            </a:prstGeom>
+            <a:noFill/>
+            <a:ln w="38100">
+              <a:solidFill>
+                <a:srgbClr val="2F528F"/>
+              </a:solidFill>
+            </a:ln>
+          </p:spPr>
+          <p:style>
+            <a:lnRef idx="2">
+              <a:schemeClr val="accent1">
+                <a:shade val="50000"/>
+              </a:schemeClr>
+            </a:lnRef>
+            <a:fillRef idx="1">
+              <a:schemeClr val="accent1"/>
+            </a:fillRef>
+            <a:effectRef idx="0">
+              <a:schemeClr val="accent1"/>
+            </a:effectRef>
+            <a:fontRef idx="minor">
+              <a:schemeClr val="lt1"/>
+            </a:fontRef>
+          </p:style>
+          <p:txBody>
+            <a:bodyPr rtlCol="0" anchor="ctr"/>
+            <a:lstStyle/>
+            <a:p>
+              <a:pPr algn="ctr"/>
+              <a:r>
+                <a:rPr lang="en-US" altLang="zh-TW" dirty="0">
+                  <a:solidFill>
+                    <a:sysClr val="windowText" lastClr="000000"/>
+                  </a:solidFill>
+                  <a:latin typeface="微軟正黑體" panose="020B0604030504040204" pitchFamily="34" charset="-120"/>
+                  <a:ea typeface="微軟正黑體" panose="020B0604030504040204" pitchFamily="34" charset="-120"/>
+                </a:rPr>
+                <a:t>State</a:t>
+              </a:r>
+              <a:endParaRPr lang="zh-TW" altLang="en-US" dirty="0">
+                <a:solidFill>
+                  <a:sysClr val="windowText" lastClr="000000"/>
+                </a:solidFill>
+                <a:latin typeface="微軟正黑體" panose="020B0604030504040204" pitchFamily="34" charset="-120"/>
+                <a:ea typeface="微軟正黑體" panose="020B0604030504040204" pitchFamily="34" charset="-120"/>
+              </a:endParaRPr>
+            </a:p>
+          </p:txBody>
+        </p:sp>
+        <p:sp>
+          <p:nvSpPr>
+            <p:cNvPr id="14" name="橢圓 13">
+              <a:extLst>
+                <a:ext uri="{FF2B5EF4-FFF2-40B4-BE49-F238E27FC236}">
+                  <a16:creationId xmlns:a16="http://schemas.microsoft.com/office/drawing/2014/main" id="{6F1FBEB0-2E02-445D-899B-763581FD5A81}"/>
+                </a:ext>
+              </a:extLst>
+            </p:cNvPr>
+            <p:cNvSpPr/>
+            <p:nvPr/>
+          </p:nvSpPr>
+          <p:spPr>
+            <a:xfrm>
+              <a:off x="2264986" y="1637578"/>
+              <a:ext cx="1230942" cy="552543"/>
+            </a:xfrm>
+            <a:prstGeom prst="ellipse">
+              <a:avLst/>
+            </a:prstGeom>
+            <a:noFill/>
+            <a:ln w="38100">
+              <a:solidFill>
+                <a:srgbClr val="2F528F"/>
+              </a:solidFill>
+            </a:ln>
+          </p:spPr>
+          <p:style>
+            <a:lnRef idx="2">
+              <a:schemeClr val="accent1">
+                <a:shade val="50000"/>
+              </a:schemeClr>
+            </a:lnRef>
+            <a:fillRef idx="1">
+              <a:schemeClr val="accent1"/>
+            </a:fillRef>
+            <a:effectRef idx="0">
+              <a:schemeClr val="accent1"/>
+            </a:effectRef>
+            <a:fontRef idx="minor">
+              <a:schemeClr val="lt1"/>
+            </a:fontRef>
+          </p:style>
+          <p:txBody>
+            <a:bodyPr rtlCol="0" anchor="ctr"/>
+            <a:lstStyle/>
+            <a:p>
+              <a:pPr algn="ctr"/>
+              <a:r>
+                <a:rPr lang="en-US" altLang="zh-TW" dirty="0">
+                  <a:solidFill>
+                    <a:sysClr val="windowText" lastClr="000000"/>
+                  </a:solidFill>
+                  <a:latin typeface="微軟正黑體" panose="020B0604030504040204" pitchFamily="34" charset="-120"/>
+                  <a:ea typeface="微軟正黑體" panose="020B0604030504040204" pitchFamily="34" charset="-120"/>
+                </a:rPr>
+                <a:t>Category</a:t>
+              </a:r>
+              <a:endParaRPr lang="zh-TW" altLang="en-US" dirty="0">
+                <a:solidFill>
+                  <a:sysClr val="windowText" lastClr="000000"/>
+                </a:solidFill>
+                <a:latin typeface="微軟正黑體" panose="020B0604030504040204" pitchFamily="34" charset="-120"/>
+                <a:ea typeface="微軟正黑體" panose="020B0604030504040204" pitchFamily="34" charset="-120"/>
+              </a:endParaRPr>
+            </a:p>
+          </p:txBody>
+        </p:sp>
+        <p:sp>
+          <p:nvSpPr>
+            <p:cNvPr id="15" name="橢圓 14">
+              <a:extLst>
+                <a:ext uri="{FF2B5EF4-FFF2-40B4-BE49-F238E27FC236}">
+                  <a16:creationId xmlns:a16="http://schemas.microsoft.com/office/drawing/2014/main" id="{904EE205-B037-44B5-A64A-7F12D5398B76}"/>
+                </a:ext>
+              </a:extLst>
+            </p:cNvPr>
+            <p:cNvSpPr/>
+            <p:nvPr/>
+          </p:nvSpPr>
+          <p:spPr>
+            <a:xfrm>
+              <a:off x="1772095" y="3916653"/>
+              <a:ext cx="1230942" cy="552543"/>
+            </a:xfrm>
+            <a:prstGeom prst="ellipse">
+              <a:avLst/>
+            </a:prstGeom>
+            <a:noFill/>
+            <a:ln w="38100">
+              <a:solidFill>
+                <a:srgbClr val="2F528F"/>
+              </a:solidFill>
+            </a:ln>
+          </p:spPr>
+          <p:style>
+            <a:lnRef idx="2">
+              <a:schemeClr val="accent1">
+                <a:shade val="50000"/>
+              </a:schemeClr>
+            </a:lnRef>
+            <a:fillRef idx="1">
+              <a:schemeClr val="accent1"/>
+            </a:fillRef>
+            <a:effectRef idx="0">
+              <a:schemeClr val="accent1"/>
+            </a:effectRef>
+            <a:fontRef idx="minor">
+              <a:schemeClr val="lt1"/>
+            </a:fontRef>
+          </p:style>
+          <p:txBody>
+            <a:bodyPr rtlCol="0" anchor="ctr"/>
+            <a:lstStyle/>
+            <a:p>
+              <a:pPr algn="ctr"/>
+              <a:r>
+                <a:rPr lang="en-US" altLang="zh-TW" dirty="0">
+                  <a:solidFill>
+                    <a:sysClr val="windowText" lastClr="000000"/>
+                  </a:solidFill>
+                  <a:latin typeface="微軟正黑體" panose="020B0604030504040204" pitchFamily="34" charset="-120"/>
+                  <a:ea typeface="微軟正黑體" panose="020B0604030504040204" pitchFamily="34" charset="-120"/>
+                </a:rPr>
+                <a:t>Introduction</a:t>
+              </a:r>
+              <a:endParaRPr lang="zh-TW" altLang="en-US" dirty="0">
+                <a:solidFill>
+                  <a:sysClr val="windowText" lastClr="000000"/>
+                </a:solidFill>
+                <a:latin typeface="微軟正黑體" panose="020B0604030504040204" pitchFamily="34" charset="-120"/>
+                <a:ea typeface="微軟正黑體" panose="020B0604030504040204" pitchFamily="34" charset="-120"/>
+              </a:endParaRPr>
+            </a:p>
+          </p:txBody>
+        </p:sp>
+        <p:sp>
+          <p:nvSpPr>
+            <p:cNvPr id="17" name="橢圓 16">
+              <a:extLst>
+                <a:ext uri="{FF2B5EF4-FFF2-40B4-BE49-F238E27FC236}">
+                  <a16:creationId xmlns:a16="http://schemas.microsoft.com/office/drawing/2014/main" id="{B6D631BD-55A0-4F2C-86C6-B99A6CBB8065}"/>
+                </a:ext>
+              </a:extLst>
+            </p:cNvPr>
+            <p:cNvSpPr/>
+            <p:nvPr/>
+          </p:nvSpPr>
+          <p:spPr>
+            <a:xfrm>
+              <a:off x="2206414" y="989160"/>
+              <a:ext cx="1230942" cy="552543"/>
+            </a:xfrm>
+            <a:prstGeom prst="ellipse">
+              <a:avLst/>
+            </a:prstGeom>
+            <a:noFill/>
+            <a:ln w="38100">
+              <a:solidFill>
+                <a:srgbClr val="2F528F"/>
+              </a:solidFill>
+            </a:ln>
+          </p:spPr>
+          <p:style>
+            <a:lnRef idx="2">
+              <a:schemeClr val="accent1">
+                <a:shade val="50000"/>
+              </a:schemeClr>
+            </a:lnRef>
+            <a:fillRef idx="1">
+              <a:schemeClr val="accent1"/>
+            </a:fillRef>
+            <a:effectRef idx="0">
+              <a:schemeClr val="accent1"/>
+            </a:effectRef>
+            <a:fontRef idx="minor">
+              <a:schemeClr val="lt1"/>
+            </a:fontRef>
+          </p:style>
+          <p:txBody>
+            <a:bodyPr rtlCol="0" anchor="ctr"/>
+            <a:lstStyle/>
+            <a:p>
+              <a:pPr algn="ctr"/>
+              <a:r>
+                <a:rPr lang="en-US" altLang="zh-TW" dirty="0">
+                  <a:solidFill>
+                    <a:sysClr val="windowText" lastClr="000000"/>
+                  </a:solidFill>
+                  <a:latin typeface="微軟正黑體" panose="020B0604030504040204" pitchFamily="34" charset="-120"/>
+                  <a:ea typeface="微軟正黑體" panose="020B0604030504040204" pitchFamily="34" charset="-120"/>
+                </a:rPr>
+                <a:t>Title</a:t>
+              </a:r>
+              <a:endParaRPr lang="zh-TW" altLang="en-US" dirty="0">
+                <a:solidFill>
+                  <a:sysClr val="windowText" lastClr="000000"/>
+                </a:solidFill>
+                <a:latin typeface="微軟正黑體" panose="020B0604030504040204" pitchFamily="34" charset="-120"/>
+                <a:ea typeface="微軟正黑體" panose="020B0604030504040204" pitchFamily="34" charset="-120"/>
+              </a:endParaRPr>
+            </a:p>
+          </p:txBody>
+        </p:sp>
+        <p:sp>
+          <p:nvSpPr>
+            <p:cNvPr id="18" name="橢圓 17">
+              <a:extLst>
+                <a:ext uri="{FF2B5EF4-FFF2-40B4-BE49-F238E27FC236}">
+                  <a16:creationId xmlns:a16="http://schemas.microsoft.com/office/drawing/2014/main" id="{BC76BE46-86FF-4B5A-968F-C55EC2FA534B}"/>
+                </a:ext>
+              </a:extLst>
+            </p:cNvPr>
+            <p:cNvSpPr/>
+            <p:nvPr/>
+          </p:nvSpPr>
+          <p:spPr>
+            <a:xfrm>
+              <a:off x="1884034" y="2477692"/>
+              <a:ext cx="1230942" cy="552543"/>
+            </a:xfrm>
+            <a:prstGeom prst="ellipse">
+              <a:avLst/>
+            </a:prstGeom>
+            <a:noFill/>
+            <a:ln w="38100">
+              <a:solidFill>
+                <a:srgbClr val="2F528F"/>
+              </a:solidFill>
+            </a:ln>
+          </p:spPr>
+          <p:style>
+            <a:lnRef idx="2">
+              <a:schemeClr val="accent1">
+                <a:shade val="50000"/>
+              </a:schemeClr>
+            </a:lnRef>
+            <a:fillRef idx="1">
+              <a:schemeClr val="accent1"/>
+            </a:fillRef>
+            <a:effectRef idx="0">
+              <a:schemeClr val="accent1"/>
+            </a:effectRef>
+            <a:fontRef idx="minor">
+              <a:schemeClr val="lt1"/>
+            </a:fontRef>
+          </p:style>
+          <p:txBody>
+            <a:bodyPr rtlCol="0" anchor="ctr"/>
+            <a:lstStyle/>
+            <a:p>
+              <a:pPr algn="ctr"/>
+              <a:r>
+                <a:rPr lang="en-US" altLang="zh-TW" dirty="0">
+                  <a:solidFill>
+                    <a:sysClr val="windowText" lastClr="000000"/>
+                  </a:solidFill>
+                  <a:latin typeface="微軟正黑體" panose="020B0604030504040204" pitchFamily="34" charset="-120"/>
+                  <a:ea typeface="微軟正黑體" panose="020B0604030504040204" pitchFamily="34" charset="-120"/>
+                </a:rPr>
+                <a:t>Love</a:t>
+              </a:r>
+              <a:endParaRPr lang="zh-TW" altLang="en-US" dirty="0">
+                <a:solidFill>
+                  <a:sysClr val="windowText" lastClr="000000"/>
+                </a:solidFill>
+                <a:latin typeface="微軟正黑體" panose="020B0604030504040204" pitchFamily="34" charset="-120"/>
+                <a:ea typeface="微軟正黑體" panose="020B0604030504040204" pitchFamily="34" charset="-120"/>
+              </a:endParaRPr>
+            </a:p>
+          </p:txBody>
+        </p:sp>
+        <p:sp>
+          <p:nvSpPr>
+            <p:cNvPr id="19" name="橢圓 18">
+              <a:extLst>
+                <a:ext uri="{FF2B5EF4-FFF2-40B4-BE49-F238E27FC236}">
+                  <a16:creationId xmlns:a16="http://schemas.microsoft.com/office/drawing/2014/main" id="{B4EC46C7-04E8-4310-8736-49F1B6908626}"/>
+                </a:ext>
+              </a:extLst>
+            </p:cNvPr>
+            <p:cNvSpPr/>
+            <p:nvPr/>
+          </p:nvSpPr>
+          <p:spPr>
+            <a:xfrm>
+              <a:off x="4243493" y="271163"/>
+              <a:ext cx="1573035" cy="552543"/>
+            </a:xfrm>
+            <a:prstGeom prst="ellipse">
+              <a:avLst/>
+            </a:prstGeom>
+            <a:ln w="76200" cmpd="dbl"/>
+          </p:spPr>
+          <p:style>
+            <a:lnRef idx="2">
+              <a:schemeClr val="accent2"/>
+            </a:lnRef>
+            <a:fillRef idx="1">
+              <a:schemeClr val="lt1"/>
+            </a:fillRef>
+            <a:effectRef idx="0">
+              <a:schemeClr val="accent2"/>
+            </a:effectRef>
+            <a:fontRef idx="minor">
+              <a:schemeClr val="dk1"/>
+            </a:fontRef>
+          </p:style>
+          <p:txBody>
+            <a:bodyPr rtlCol="0" anchor="ctr"/>
+            <a:lstStyle/>
+            <a:p>
+              <a:pPr algn="ctr"/>
+              <a:r>
+                <a:rPr lang="en-US" altLang="zh-TW" dirty="0">
+                  <a:solidFill>
+                    <a:sysClr val="windowText" lastClr="000000"/>
+                  </a:solidFill>
+                  <a:latin typeface="微軟正黑體" panose="020B0604030504040204" pitchFamily="34" charset="-120"/>
+                  <a:ea typeface="微軟正黑體" panose="020B0604030504040204" pitchFamily="34" charset="-120"/>
+                </a:rPr>
+                <a:t>History</a:t>
+              </a:r>
+              <a:endParaRPr lang="zh-TW" altLang="en-US" dirty="0">
+                <a:solidFill>
+                  <a:sysClr val="windowText" lastClr="000000"/>
+                </a:solidFill>
+                <a:latin typeface="微軟正黑體" panose="020B0604030504040204" pitchFamily="34" charset="-120"/>
+                <a:ea typeface="微軟正黑體" panose="020B0604030504040204" pitchFamily="34" charset="-120"/>
+              </a:endParaRPr>
+            </a:p>
+          </p:txBody>
+        </p:sp>
+        <p:sp>
+          <p:nvSpPr>
+            <p:cNvPr id="20" name="橢圓 19">
+              <a:extLst>
+                <a:ext uri="{FF2B5EF4-FFF2-40B4-BE49-F238E27FC236}">
+                  <a16:creationId xmlns:a16="http://schemas.microsoft.com/office/drawing/2014/main" id="{8581CC69-98F4-46B0-AE91-8CA44F3236EF}"/>
+                </a:ext>
+              </a:extLst>
+            </p:cNvPr>
+            <p:cNvSpPr/>
+            <p:nvPr/>
+          </p:nvSpPr>
+          <p:spPr>
+            <a:xfrm>
+              <a:off x="2005284" y="3280006"/>
+              <a:ext cx="1230942" cy="552543"/>
+            </a:xfrm>
+            <a:prstGeom prst="ellipse">
+              <a:avLst/>
+            </a:prstGeom>
+            <a:noFill/>
+            <a:ln w="38100">
+              <a:solidFill>
+                <a:srgbClr val="2F528F"/>
+              </a:solidFill>
+            </a:ln>
+          </p:spPr>
+          <p:style>
+            <a:lnRef idx="2">
+              <a:schemeClr val="accent1">
+                <a:shade val="50000"/>
+              </a:schemeClr>
+            </a:lnRef>
+            <a:fillRef idx="1">
+              <a:schemeClr val="accent1"/>
+            </a:fillRef>
+            <a:effectRef idx="0">
+              <a:schemeClr val="accent1"/>
+            </a:effectRef>
+            <a:fontRef idx="minor">
+              <a:schemeClr val="lt1"/>
+            </a:fontRef>
+          </p:style>
+          <p:txBody>
+            <a:bodyPr rtlCol="0" anchor="ctr"/>
+            <a:lstStyle/>
+            <a:p>
+              <a:pPr algn="ctr"/>
+              <a:r>
+                <a:rPr lang="en-US" altLang="zh-TW" dirty="0">
+                  <a:solidFill>
+                    <a:sysClr val="windowText" lastClr="000000"/>
+                  </a:solidFill>
+                  <a:latin typeface="微軟正黑體" panose="020B0604030504040204" pitchFamily="34" charset="-120"/>
+                  <a:ea typeface="微軟正黑體" panose="020B0604030504040204" pitchFamily="34" charset="-120"/>
+                </a:rPr>
+                <a:t>Link</a:t>
+              </a:r>
+              <a:endParaRPr lang="zh-TW" altLang="en-US" dirty="0">
+                <a:solidFill>
+                  <a:sysClr val="windowText" lastClr="000000"/>
+                </a:solidFill>
+                <a:latin typeface="微軟正黑體" panose="020B0604030504040204" pitchFamily="34" charset="-120"/>
+                <a:ea typeface="微軟正黑體" panose="020B0604030504040204" pitchFamily="34" charset="-120"/>
+              </a:endParaRPr>
+            </a:p>
+          </p:txBody>
+        </p:sp>
+        <p:sp>
+          <p:nvSpPr>
+            <p:cNvPr id="21" name="橢圓 20">
+              <a:extLst>
+                <a:ext uri="{FF2B5EF4-FFF2-40B4-BE49-F238E27FC236}">
+                  <a16:creationId xmlns:a16="http://schemas.microsoft.com/office/drawing/2014/main" id="{9F875BE5-297C-4CC9-A47C-AE3019E5B3EF}"/>
+                </a:ext>
+              </a:extLst>
+            </p:cNvPr>
+            <p:cNvSpPr/>
+            <p:nvPr/>
+          </p:nvSpPr>
+          <p:spPr>
+            <a:xfrm>
+              <a:off x="722317" y="5396301"/>
+              <a:ext cx="1230942" cy="552543"/>
+            </a:xfrm>
+            <a:prstGeom prst="ellipse">
+              <a:avLst/>
+            </a:prstGeom>
+            <a:noFill/>
+            <a:ln w="38100" cmpd="sng">
+              <a:solidFill>
+                <a:schemeClr val="accent4"/>
+              </a:solidFill>
+            </a:ln>
+          </p:spPr>
+          <p:style>
+            <a:lnRef idx="2">
+              <a:schemeClr val="accent1">
+                <a:shade val="50000"/>
+              </a:schemeClr>
+            </a:lnRef>
+            <a:fillRef idx="1">
+              <a:schemeClr val="accent1"/>
+            </a:fillRef>
+            <a:effectRef idx="0">
+              <a:schemeClr val="accent1"/>
+            </a:effectRef>
+            <a:fontRef idx="minor">
+              <a:schemeClr val="lt1"/>
+            </a:fontRef>
+          </p:style>
+          <p:txBody>
+            <a:bodyPr rtlCol="0" anchor="ctr"/>
+            <a:lstStyle/>
+            <a:p>
+              <a:pPr algn="ctr"/>
+              <a:r>
+                <a:rPr lang="en-US" altLang="zh-TW" dirty="0">
+                  <a:solidFill>
+                    <a:sysClr val="windowText" lastClr="000000"/>
+                  </a:solidFill>
+                  <a:latin typeface="微軟正黑體" panose="020B0604030504040204" pitchFamily="34" charset="-120"/>
+                  <a:ea typeface="微軟正黑體" panose="020B0604030504040204" pitchFamily="34" charset="-120"/>
+                </a:rPr>
+                <a:t>tag</a:t>
+              </a:r>
+              <a:endParaRPr lang="zh-TW" altLang="en-US" dirty="0">
+                <a:solidFill>
+                  <a:sysClr val="windowText" lastClr="000000"/>
+                </a:solidFill>
+                <a:latin typeface="微軟正黑體" panose="020B0604030504040204" pitchFamily="34" charset="-120"/>
+                <a:ea typeface="微軟正黑體" panose="020B0604030504040204" pitchFamily="34" charset="-120"/>
+              </a:endParaRPr>
+            </a:p>
+          </p:txBody>
+        </p:sp>
+        <p:sp>
+          <p:nvSpPr>
+            <p:cNvPr id="22" name="橢圓 21">
+              <a:extLst>
+                <a:ext uri="{FF2B5EF4-FFF2-40B4-BE49-F238E27FC236}">
+                  <a16:creationId xmlns:a16="http://schemas.microsoft.com/office/drawing/2014/main" id="{87A2ED50-B606-411A-8EF1-85E6A3BF2C94}"/>
+                </a:ext>
+              </a:extLst>
+            </p:cNvPr>
+            <p:cNvSpPr/>
+            <p:nvPr/>
+          </p:nvSpPr>
+          <p:spPr>
+            <a:xfrm>
+              <a:off x="1350069" y="6034294"/>
+              <a:ext cx="1829833" cy="552543"/>
+            </a:xfrm>
+            <a:prstGeom prst="ellipse">
+              <a:avLst/>
+            </a:prstGeom>
+            <a:noFill/>
+            <a:ln w="38100" cmpd="sng">
+              <a:solidFill>
+                <a:schemeClr val="accent4"/>
+              </a:solidFill>
+              <a:prstDash val="solid"/>
+            </a:ln>
+          </p:spPr>
+          <p:style>
+            <a:lnRef idx="2">
+              <a:schemeClr val="accent1">
+                <a:shade val="50000"/>
+              </a:schemeClr>
+            </a:lnRef>
+            <a:fillRef idx="1">
+              <a:schemeClr val="accent1"/>
+            </a:fillRef>
+            <a:effectRef idx="0">
+              <a:schemeClr val="accent1"/>
+            </a:effectRef>
+            <a:fontRef idx="minor">
+              <a:schemeClr val="lt1"/>
+            </a:fontRef>
+          </p:style>
+          <p:txBody>
+            <a:bodyPr rtlCol="0" anchor="ctr"/>
+            <a:lstStyle/>
+            <a:p>
+              <a:pPr algn="ctr"/>
+              <a:r>
+                <a:rPr lang="en-US" altLang="zh-TW" dirty="0" err="1">
+                  <a:solidFill>
+                    <a:sysClr val="windowText" lastClr="000000"/>
+                  </a:solidFill>
+                  <a:latin typeface="微軟正黑體" panose="020B0604030504040204" pitchFamily="34" charset="-120"/>
+                  <a:ea typeface="微軟正黑體" panose="020B0604030504040204" pitchFamily="34" charset="-120"/>
+                </a:rPr>
+                <a:t>tagNor</a:t>
+              </a:r>
+              <a:endParaRPr lang="zh-TW" altLang="en-US" dirty="0">
+                <a:solidFill>
+                  <a:sysClr val="windowText" lastClr="000000"/>
+                </a:solidFill>
+                <a:latin typeface="微軟正黑體" panose="020B0604030504040204" pitchFamily="34" charset="-120"/>
+                <a:ea typeface="微軟正黑體" panose="020B0604030504040204" pitchFamily="34" charset="-120"/>
+              </a:endParaRPr>
+            </a:p>
+          </p:txBody>
+        </p:sp>
+        <p:sp>
+          <p:nvSpPr>
+            <p:cNvPr id="23" name="橢圓 22">
+              <a:extLst>
+                <a:ext uri="{FF2B5EF4-FFF2-40B4-BE49-F238E27FC236}">
+                  <a16:creationId xmlns:a16="http://schemas.microsoft.com/office/drawing/2014/main" id="{836AC00E-2EB8-4751-BEAF-3631D95C4980}"/>
+                </a:ext>
+              </a:extLst>
+            </p:cNvPr>
+            <p:cNvSpPr/>
+            <p:nvPr/>
+          </p:nvSpPr>
+          <p:spPr>
+            <a:xfrm>
+              <a:off x="7927915" y="5196238"/>
+              <a:ext cx="1230942" cy="552543"/>
+            </a:xfrm>
+            <a:prstGeom prst="ellipse">
+              <a:avLst/>
+            </a:prstGeom>
+            <a:noFill/>
+            <a:ln w="38100">
+              <a:solidFill>
+                <a:srgbClr val="00B050"/>
+              </a:solidFill>
+            </a:ln>
+          </p:spPr>
+          <p:style>
+            <a:lnRef idx="2">
+              <a:schemeClr val="accent1">
+                <a:shade val="50000"/>
+              </a:schemeClr>
+            </a:lnRef>
+            <a:fillRef idx="1">
+              <a:schemeClr val="accent1"/>
+            </a:fillRef>
+            <a:effectRef idx="0">
+              <a:schemeClr val="accent1"/>
+            </a:effectRef>
+            <a:fontRef idx="minor">
+              <a:schemeClr val="lt1"/>
+            </a:fontRef>
+          </p:style>
+          <p:txBody>
+            <a:bodyPr rtlCol="0" anchor="ctr"/>
+            <a:lstStyle/>
+            <a:p>
+              <a:pPr algn="ctr"/>
+              <a:r>
+                <a:rPr lang="en-US" altLang="zh-TW" dirty="0">
+                  <a:solidFill>
+                    <a:sysClr val="windowText" lastClr="000000"/>
+                  </a:solidFill>
+                  <a:latin typeface="微軟正黑體" panose="020B0604030504040204" pitchFamily="34" charset="-120"/>
+                  <a:ea typeface="微軟正黑體" panose="020B0604030504040204" pitchFamily="34" charset="-120"/>
+                </a:rPr>
+                <a:t>Name</a:t>
+              </a:r>
+              <a:endParaRPr lang="zh-TW" altLang="en-US" dirty="0">
+                <a:solidFill>
+                  <a:sysClr val="windowText" lastClr="000000"/>
+                </a:solidFill>
+                <a:latin typeface="微軟正黑體" panose="020B0604030504040204" pitchFamily="34" charset="-120"/>
+                <a:ea typeface="微軟正黑體" panose="020B0604030504040204" pitchFamily="34" charset="-120"/>
+              </a:endParaRPr>
+            </a:p>
+          </p:txBody>
+        </p:sp>
+        <p:sp>
+          <p:nvSpPr>
+            <p:cNvPr id="24" name="橢圓 23">
+              <a:extLst>
+                <a:ext uri="{FF2B5EF4-FFF2-40B4-BE49-F238E27FC236}">
+                  <a16:creationId xmlns:a16="http://schemas.microsoft.com/office/drawing/2014/main" id="{65D9E7A0-44BE-4855-856A-E6D1E673553D}"/>
+                </a:ext>
+              </a:extLst>
+            </p:cNvPr>
+            <p:cNvSpPr/>
+            <p:nvPr/>
+          </p:nvSpPr>
+          <p:spPr>
+            <a:xfrm>
+              <a:off x="5507702" y="5173201"/>
+              <a:ext cx="1911574" cy="552543"/>
+            </a:xfrm>
+            <a:prstGeom prst="ellipse">
+              <a:avLst/>
+            </a:prstGeom>
+            <a:noFill/>
+            <a:ln w="38100">
+              <a:solidFill>
+                <a:srgbClr val="00B050"/>
+              </a:solidFill>
+            </a:ln>
+          </p:spPr>
+          <p:style>
+            <a:lnRef idx="2">
+              <a:schemeClr val="accent1">
+                <a:shade val="50000"/>
+              </a:schemeClr>
+            </a:lnRef>
+            <a:fillRef idx="1">
+              <a:schemeClr val="accent1"/>
+            </a:fillRef>
+            <a:effectRef idx="0">
+              <a:schemeClr val="accent1"/>
+            </a:effectRef>
+            <a:fontRef idx="minor">
+              <a:schemeClr val="lt1"/>
+            </a:fontRef>
+          </p:style>
+          <p:txBody>
+            <a:bodyPr rtlCol="0" anchor="ctr"/>
+            <a:lstStyle/>
+            <a:p>
+              <a:pPr algn="ctr"/>
+              <a:r>
+                <a:rPr lang="en-US" altLang="zh-TW" u="sng" dirty="0" err="1">
+                  <a:solidFill>
+                    <a:sysClr val="windowText" lastClr="000000"/>
+                  </a:solidFill>
+                  <a:latin typeface="微軟正黑體" panose="020B0604030504040204" pitchFamily="34" charset="-120"/>
+                  <a:ea typeface="微軟正黑體" panose="020B0604030504040204" pitchFamily="34" charset="-120"/>
+                </a:rPr>
+                <a:t>pIndex</a:t>
+              </a:r>
+              <a:endParaRPr lang="zh-TW" altLang="en-US" u="sng" dirty="0">
+                <a:solidFill>
+                  <a:sysClr val="windowText" lastClr="000000"/>
+                </a:solidFill>
+                <a:latin typeface="微軟正黑體" panose="020B0604030504040204" pitchFamily="34" charset="-120"/>
+                <a:ea typeface="微軟正黑體" panose="020B0604030504040204" pitchFamily="34" charset="-120"/>
+              </a:endParaRPr>
+            </a:p>
+          </p:txBody>
+        </p:sp>
+        <p:sp>
+          <p:nvSpPr>
+            <p:cNvPr id="25" name="橢圓 24">
+              <a:extLst>
+                <a:ext uri="{FF2B5EF4-FFF2-40B4-BE49-F238E27FC236}">
+                  <a16:creationId xmlns:a16="http://schemas.microsoft.com/office/drawing/2014/main" id="{916C7219-7D59-477B-83BF-4AF8FC830BA8}"/>
+                </a:ext>
+              </a:extLst>
+            </p:cNvPr>
+            <p:cNvSpPr/>
+            <p:nvPr/>
+          </p:nvSpPr>
+          <p:spPr>
+            <a:xfrm>
+              <a:off x="9760774" y="3311111"/>
+              <a:ext cx="1230942" cy="552543"/>
+            </a:xfrm>
+            <a:prstGeom prst="ellipse">
+              <a:avLst/>
+            </a:prstGeom>
+            <a:noFill/>
+            <a:ln w="38100">
+              <a:solidFill>
+                <a:srgbClr val="7030A0"/>
+              </a:solidFill>
+            </a:ln>
+          </p:spPr>
+          <p:style>
+            <a:lnRef idx="2">
+              <a:schemeClr val="accent1">
+                <a:shade val="50000"/>
+              </a:schemeClr>
+            </a:lnRef>
+            <a:fillRef idx="1">
+              <a:schemeClr val="accent1"/>
+            </a:fillRef>
+            <a:effectRef idx="0">
+              <a:schemeClr val="accent1"/>
+            </a:effectRef>
+            <a:fontRef idx="minor">
+              <a:schemeClr val="lt1"/>
+            </a:fontRef>
+          </p:style>
+          <p:txBody>
+            <a:bodyPr rtlCol="0" anchor="ctr"/>
+            <a:lstStyle/>
+            <a:p>
+              <a:pPr algn="ctr"/>
+              <a:r>
+                <a:rPr lang="en-US" altLang="zh-TW" dirty="0">
+                  <a:solidFill>
+                    <a:sysClr val="windowText" lastClr="000000"/>
+                  </a:solidFill>
+                  <a:latin typeface="微軟正黑體" panose="020B0604030504040204" pitchFamily="34" charset="-120"/>
+                  <a:ea typeface="微軟正黑體" panose="020B0604030504040204" pitchFamily="34" charset="-120"/>
+                </a:rPr>
+                <a:t>Name</a:t>
+              </a:r>
+              <a:endParaRPr lang="zh-TW" altLang="en-US" dirty="0">
+                <a:solidFill>
+                  <a:sysClr val="windowText" lastClr="000000"/>
+                </a:solidFill>
+                <a:latin typeface="微軟正黑體" panose="020B0604030504040204" pitchFamily="34" charset="-120"/>
+                <a:ea typeface="微軟正黑體" panose="020B0604030504040204" pitchFamily="34" charset="-120"/>
+              </a:endParaRPr>
+            </a:p>
+          </p:txBody>
+        </p:sp>
+        <p:sp>
+          <p:nvSpPr>
+            <p:cNvPr id="26" name="橢圓 25">
+              <a:extLst>
+                <a:ext uri="{FF2B5EF4-FFF2-40B4-BE49-F238E27FC236}">
+                  <a16:creationId xmlns:a16="http://schemas.microsoft.com/office/drawing/2014/main" id="{6DCCC405-FA22-4278-8938-CED02EE90AFB}"/>
+                </a:ext>
+              </a:extLst>
+            </p:cNvPr>
+            <p:cNvSpPr/>
+            <p:nvPr/>
+          </p:nvSpPr>
+          <p:spPr>
+            <a:xfrm>
+              <a:off x="9740654" y="2440191"/>
+              <a:ext cx="1573035" cy="552543"/>
+            </a:xfrm>
+            <a:prstGeom prst="ellipse">
+              <a:avLst/>
+            </a:prstGeom>
+            <a:ln w="38100">
+              <a:solidFill>
+                <a:srgbClr val="7030A0"/>
+              </a:solidFill>
+            </a:ln>
+          </p:spPr>
+          <p:style>
+            <a:lnRef idx="2">
+              <a:schemeClr val="accent2"/>
+            </a:lnRef>
+            <a:fillRef idx="1">
+              <a:schemeClr val="lt1"/>
+            </a:fillRef>
+            <a:effectRef idx="0">
+              <a:schemeClr val="accent2"/>
+            </a:effectRef>
+            <a:fontRef idx="minor">
+              <a:schemeClr val="dk1"/>
+            </a:fontRef>
+          </p:style>
+          <p:txBody>
+            <a:bodyPr rtlCol="0" anchor="ctr"/>
+            <a:lstStyle/>
+            <a:p>
+              <a:pPr algn="ctr"/>
+              <a:r>
+                <a:rPr lang="en-US" altLang="zh-TW" u="sng" dirty="0" err="1">
+                  <a:solidFill>
+                    <a:sysClr val="windowText" lastClr="000000"/>
+                  </a:solidFill>
+                  <a:latin typeface="微軟正黑體" panose="020B0604030504040204" pitchFamily="34" charset="-120"/>
+                  <a:ea typeface="微軟正黑體" panose="020B0604030504040204" pitchFamily="34" charset="-120"/>
+                </a:rPr>
+                <a:t>aIndex</a:t>
+              </a:r>
+              <a:endParaRPr lang="zh-TW" altLang="en-US" u="sng" dirty="0">
+                <a:solidFill>
+                  <a:sysClr val="windowText" lastClr="000000"/>
+                </a:solidFill>
+                <a:latin typeface="微軟正黑體" panose="020B0604030504040204" pitchFamily="34" charset="-120"/>
+                <a:ea typeface="微軟正黑體" panose="020B0604030504040204" pitchFamily="34" charset="-120"/>
+              </a:endParaRPr>
+            </a:p>
+          </p:txBody>
+        </p:sp>
+        <p:sp>
+          <p:nvSpPr>
+            <p:cNvPr id="27" name="橢圓 26">
+              <a:extLst>
+                <a:ext uri="{FF2B5EF4-FFF2-40B4-BE49-F238E27FC236}">
+                  <a16:creationId xmlns:a16="http://schemas.microsoft.com/office/drawing/2014/main" id="{0252EBF0-7A2A-4EA1-9D7D-CA4E813F4901}"/>
+                </a:ext>
+              </a:extLst>
+            </p:cNvPr>
+            <p:cNvSpPr/>
+            <p:nvPr/>
+          </p:nvSpPr>
+          <p:spPr>
+            <a:xfrm>
+              <a:off x="8192434" y="532024"/>
+              <a:ext cx="1230942" cy="552543"/>
+            </a:xfrm>
+            <a:prstGeom prst="ellipse">
+              <a:avLst/>
+            </a:prstGeom>
+            <a:noFill/>
+            <a:ln w="38100">
+              <a:solidFill>
+                <a:srgbClr val="4D4D4D"/>
+              </a:solidFill>
+            </a:ln>
+          </p:spPr>
+          <p:style>
+            <a:lnRef idx="2">
+              <a:schemeClr val="accent1">
+                <a:shade val="50000"/>
+              </a:schemeClr>
+            </a:lnRef>
+            <a:fillRef idx="1">
+              <a:schemeClr val="accent1"/>
+            </a:fillRef>
+            <a:effectRef idx="0">
+              <a:schemeClr val="accent1"/>
+            </a:effectRef>
+            <a:fontRef idx="minor">
+              <a:schemeClr val="lt1"/>
+            </a:fontRef>
+          </p:style>
+          <p:txBody>
+            <a:bodyPr rtlCol="0" anchor="ctr"/>
+            <a:lstStyle/>
+            <a:p>
+              <a:pPr algn="ctr"/>
+              <a:r>
+                <a:rPr lang="en-US" altLang="zh-TW" u="sng" dirty="0">
+                  <a:solidFill>
+                    <a:sysClr val="windowText" lastClr="000000"/>
+                  </a:solidFill>
+                  <a:latin typeface="微軟正黑體" panose="020B0604030504040204" pitchFamily="34" charset="-120"/>
+                  <a:ea typeface="微軟正黑體" panose="020B0604030504040204" pitchFamily="34" charset="-120"/>
+                </a:rPr>
+                <a:t>Account</a:t>
+              </a:r>
+              <a:endParaRPr lang="zh-TW" altLang="en-US" u="sng" dirty="0">
+                <a:solidFill>
+                  <a:sysClr val="windowText" lastClr="000000"/>
+                </a:solidFill>
+                <a:latin typeface="微軟正黑體" panose="020B0604030504040204" pitchFamily="34" charset="-120"/>
+                <a:ea typeface="微軟正黑體" panose="020B0604030504040204" pitchFamily="34" charset="-120"/>
+              </a:endParaRPr>
+            </a:p>
+          </p:txBody>
+        </p:sp>
+        <p:sp>
+          <p:nvSpPr>
+            <p:cNvPr id="28" name="橢圓 27">
+              <a:extLst>
+                <a:ext uri="{FF2B5EF4-FFF2-40B4-BE49-F238E27FC236}">
+                  <a16:creationId xmlns:a16="http://schemas.microsoft.com/office/drawing/2014/main" id="{9DC33FA6-AABC-4C50-975A-D49FACBD2586}"/>
+                </a:ext>
+              </a:extLst>
+            </p:cNvPr>
+            <p:cNvSpPr/>
+            <p:nvPr/>
+          </p:nvSpPr>
+          <p:spPr>
+            <a:xfrm>
+              <a:off x="9337398" y="852541"/>
+              <a:ext cx="1230942" cy="552543"/>
+            </a:xfrm>
+            <a:prstGeom prst="ellipse">
+              <a:avLst/>
+            </a:prstGeom>
+            <a:noFill/>
+            <a:ln w="38100">
+              <a:solidFill>
+                <a:srgbClr val="4D4D4D"/>
+              </a:solidFill>
+            </a:ln>
+          </p:spPr>
+          <p:style>
+            <a:lnRef idx="2">
+              <a:schemeClr val="accent1">
+                <a:shade val="50000"/>
+              </a:schemeClr>
+            </a:lnRef>
+            <a:fillRef idx="1">
+              <a:schemeClr val="accent1"/>
+            </a:fillRef>
+            <a:effectRef idx="0">
+              <a:schemeClr val="accent1"/>
+            </a:effectRef>
+            <a:fontRef idx="minor">
+              <a:schemeClr val="lt1"/>
+            </a:fontRef>
+          </p:style>
+          <p:txBody>
+            <a:bodyPr rtlCol="0" anchor="ctr"/>
+            <a:lstStyle/>
+            <a:p>
+              <a:pPr algn="ctr"/>
+              <a:r>
+                <a:rPr lang="en-US" altLang="zh-TW" dirty="0">
+                  <a:solidFill>
+                    <a:sysClr val="windowText" lastClr="000000"/>
+                  </a:solidFill>
+                  <a:latin typeface="微軟正黑體" panose="020B0604030504040204" pitchFamily="34" charset="-120"/>
+                  <a:ea typeface="微軟正黑體" panose="020B0604030504040204" pitchFamily="34" charset="-120"/>
+                </a:rPr>
+                <a:t>Password</a:t>
+              </a:r>
+              <a:endParaRPr lang="zh-TW" altLang="en-US" dirty="0">
+                <a:solidFill>
+                  <a:sysClr val="windowText" lastClr="000000"/>
+                </a:solidFill>
+                <a:latin typeface="微軟正黑體" panose="020B0604030504040204" pitchFamily="34" charset="-120"/>
+                <a:ea typeface="微軟正黑體" panose="020B0604030504040204" pitchFamily="34" charset="-120"/>
+              </a:endParaRPr>
+            </a:p>
+          </p:txBody>
+        </p:sp>
+        <p:sp>
+          <p:nvSpPr>
+            <p:cNvPr id="29" name="流程圖: 決策 28">
+              <a:extLst>
+                <a:ext uri="{FF2B5EF4-FFF2-40B4-BE49-F238E27FC236}">
+                  <a16:creationId xmlns:a16="http://schemas.microsoft.com/office/drawing/2014/main" id="{DA503EA1-6026-4B2E-85E1-6A63A472D0B0}"/>
+                </a:ext>
+              </a:extLst>
+            </p:cNvPr>
+            <p:cNvSpPr/>
+            <p:nvPr/>
+          </p:nvSpPr>
+          <p:spPr>
+            <a:xfrm>
+              <a:off x="4296468" y="1270815"/>
+              <a:ext cx="1467087" cy="833652"/>
+            </a:xfrm>
+            <a:prstGeom prst="flowChartDecision">
+              <a:avLst/>
+            </a:prstGeom>
+            <a:ln w="38100"/>
+          </p:spPr>
+          <p:style>
+            <a:lnRef idx="2">
+              <a:schemeClr val="accent2"/>
+            </a:lnRef>
+            <a:fillRef idx="1">
+              <a:schemeClr val="lt1"/>
+            </a:fillRef>
+            <a:effectRef idx="0">
+              <a:schemeClr val="accent2"/>
+            </a:effectRef>
+            <a:fontRef idx="minor">
+              <a:schemeClr val="dk1"/>
+            </a:fontRef>
+          </p:style>
+          <p:txBody>
+            <a:bodyPr rtlCol="0" anchor="ctr"/>
+            <a:lstStyle/>
+            <a:p>
+              <a:pPr algn="ctr"/>
+              <a:r>
+                <a:rPr lang="en-US" altLang="zh-TW" dirty="0">
+                  <a:solidFill>
+                    <a:sysClr val="windowText" lastClr="000000"/>
+                  </a:solidFill>
+                  <a:latin typeface="微軟正黑體" panose="020B0604030504040204" pitchFamily="34" charset="-120"/>
+                  <a:ea typeface="微軟正黑體" panose="020B0604030504040204" pitchFamily="34" charset="-120"/>
+                </a:rPr>
+                <a:t>Read</a:t>
+              </a:r>
+              <a:endParaRPr lang="zh-TW" altLang="en-US" dirty="0">
+                <a:solidFill>
+                  <a:sysClr val="windowText" lastClr="000000"/>
+                </a:solidFill>
+                <a:latin typeface="微軟正黑體" panose="020B0604030504040204" pitchFamily="34" charset="-120"/>
+                <a:ea typeface="微軟正黑體" panose="020B0604030504040204" pitchFamily="34" charset="-120"/>
+              </a:endParaRPr>
+            </a:p>
+          </p:txBody>
+        </p:sp>
+        <p:sp>
+          <p:nvSpPr>
+            <p:cNvPr id="30" name="流程圖: 決策 29">
+              <a:extLst>
+                <a:ext uri="{FF2B5EF4-FFF2-40B4-BE49-F238E27FC236}">
+                  <a16:creationId xmlns:a16="http://schemas.microsoft.com/office/drawing/2014/main" id="{AA94ACB0-374A-428F-885A-54E11B5F9156}"/>
+                </a:ext>
+              </a:extLst>
+            </p:cNvPr>
+            <p:cNvSpPr/>
+            <p:nvPr/>
+          </p:nvSpPr>
+          <p:spPr>
+            <a:xfrm>
+              <a:off x="4013181" y="3789893"/>
+              <a:ext cx="1467087" cy="833652"/>
+            </a:xfrm>
+            <a:prstGeom prst="flowChartDecision">
+              <a:avLst/>
+            </a:prstGeom>
+            <a:ln w="38100">
+              <a:solidFill>
+                <a:srgbClr val="ED7D31"/>
+              </a:solidFill>
+            </a:ln>
+          </p:spPr>
+          <p:style>
+            <a:lnRef idx="2">
+              <a:schemeClr val="accent2"/>
+            </a:lnRef>
+            <a:fillRef idx="1">
+              <a:schemeClr val="lt1"/>
+            </a:fillRef>
+            <a:effectRef idx="0">
+              <a:schemeClr val="accent2"/>
+            </a:effectRef>
+            <a:fontRef idx="minor">
+              <a:schemeClr val="dk1"/>
+            </a:fontRef>
+          </p:style>
+          <p:txBody>
+            <a:bodyPr rtlCol="0" anchor="ctr"/>
+            <a:lstStyle/>
+            <a:p>
+              <a:pPr algn="ctr"/>
+              <a:r>
+                <a:rPr lang="en-US" altLang="zh-TW" dirty="0">
+                  <a:solidFill>
+                    <a:sysClr val="windowText" lastClr="000000"/>
+                  </a:solidFill>
+                  <a:latin typeface="微軟正黑體" panose="020B0604030504040204" pitchFamily="34" charset="-120"/>
+                  <a:ea typeface="微軟正黑體" panose="020B0604030504040204" pitchFamily="34" charset="-120"/>
+                </a:rPr>
+                <a:t>Publish</a:t>
+              </a:r>
+              <a:endParaRPr lang="zh-TW" altLang="en-US" dirty="0">
+                <a:solidFill>
+                  <a:sysClr val="windowText" lastClr="000000"/>
+                </a:solidFill>
+                <a:latin typeface="微軟正黑體" panose="020B0604030504040204" pitchFamily="34" charset="-120"/>
+                <a:ea typeface="微軟正黑體" panose="020B0604030504040204" pitchFamily="34" charset="-120"/>
+              </a:endParaRPr>
+            </a:p>
+          </p:txBody>
+        </p:sp>
+        <p:sp>
+          <p:nvSpPr>
+            <p:cNvPr id="31" name="流程圖: 決策 30">
+              <a:extLst>
+                <a:ext uri="{FF2B5EF4-FFF2-40B4-BE49-F238E27FC236}">
+                  <a16:creationId xmlns:a16="http://schemas.microsoft.com/office/drawing/2014/main" id="{B1D1C64B-5E5F-4921-BB31-20BB12819721}"/>
+                </a:ext>
+              </a:extLst>
+            </p:cNvPr>
+            <p:cNvSpPr/>
+            <p:nvPr/>
+          </p:nvSpPr>
+          <p:spPr>
+            <a:xfrm>
+              <a:off x="5850046" y="2310382"/>
+              <a:ext cx="1467087" cy="833652"/>
+            </a:xfrm>
+            <a:prstGeom prst="flowChartDecision">
+              <a:avLst/>
+            </a:prstGeom>
+            <a:ln w="38100"/>
+          </p:spPr>
+          <p:style>
+            <a:lnRef idx="2">
+              <a:schemeClr val="accent2"/>
+            </a:lnRef>
+            <a:fillRef idx="1">
+              <a:schemeClr val="lt1"/>
+            </a:fillRef>
+            <a:effectRef idx="0">
+              <a:schemeClr val="accent2"/>
+            </a:effectRef>
+            <a:fontRef idx="minor">
+              <a:schemeClr val="dk1"/>
+            </a:fontRef>
+          </p:style>
+          <p:txBody>
+            <a:bodyPr rtlCol="0" anchor="ctr"/>
+            <a:lstStyle/>
+            <a:p>
+              <a:pPr algn="ctr"/>
+              <a:r>
+                <a:rPr lang="en-US" altLang="zh-TW" dirty="0">
+                  <a:solidFill>
+                    <a:sysClr val="windowText" lastClr="000000"/>
+                  </a:solidFill>
+                  <a:latin typeface="微軟正黑體" panose="020B0604030504040204" pitchFamily="34" charset="-120"/>
+                  <a:ea typeface="微軟正黑體" panose="020B0604030504040204" pitchFamily="34" charset="-120"/>
+                </a:rPr>
+                <a:t>Write</a:t>
+              </a:r>
+              <a:endParaRPr lang="zh-TW" altLang="en-US" dirty="0">
+                <a:solidFill>
+                  <a:sysClr val="windowText" lastClr="000000"/>
+                </a:solidFill>
+                <a:latin typeface="微軟正黑體" panose="020B0604030504040204" pitchFamily="34" charset="-120"/>
+                <a:ea typeface="微軟正黑體" panose="020B0604030504040204" pitchFamily="34" charset="-120"/>
+              </a:endParaRPr>
+            </a:p>
+          </p:txBody>
+        </p:sp>
+        <p:sp>
+          <p:nvSpPr>
+            <p:cNvPr id="32" name="流程圖: 決策 31">
+              <a:extLst>
+                <a:ext uri="{FF2B5EF4-FFF2-40B4-BE49-F238E27FC236}">
+                  <a16:creationId xmlns:a16="http://schemas.microsoft.com/office/drawing/2014/main" id="{F503F4C1-00BD-42DD-BB32-E8CE9F644772}"/>
+                </a:ext>
+              </a:extLst>
+            </p:cNvPr>
+            <p:cNvSpPr/>
+            <p:nvPr/>
+          </p:nvSpPr>
+          <p:spPr>
+            <a:xfrm>
+              <a:off x="8108068" y="3751637"/>
+              <a:ext cx="1467087" cy="833652"/>
+            </a:xfrm>
+            <a:prstGeom prst="flowChartDecision">
+              <a:avLst/>
+            </a:prstGeom>
+            <a:ln w="38100"/>
+          </p:spPr>
+          <p:style>
+            <a:lnRef idx="2">
+              <a:schemeClr val="accent2"/>
+            </a:lnRef>
+            <a:fillRef idx="1">
+              <a:schemeClr val="lt1"/>
+            </a:fillRef>
+            <a:effectRef idx="0">
+              <a:schemeClr val="accent2"/>
+            </a:effectRef>
+            <a:fontRef idx="minor">
+              <a:schemeClr val="dk1"/>
+            </a:fontRef>
+          </p:style>
+          <p:txBody>
+            <a:bodyPr rtlCol="0" anchor="ctr"/>
+            <a:lstStyle/>
+            <a:p>
+              <a:pPr algn="ctr"/>
+              <a:r>
+                <a:rPr lang="zh-TW" altLang="en-US" dirty="0">
+                  <a:solidFill>
+                    <a:sysClr val="windowText" lastClr="000000"/>
+                  </a:solidFill>
+                  <a:latin typeface="微軟正黑體" panose="020B0604030504040204" pitchFamily="34" charset="-120"/>
+                  <a:ea typeface="微軟正黑體" panose="020B0604030504040204" pitchFamily="34" charset="-120"/>
+                </a:rPr>
+                <a:t>簽約</a:t>
+              </a:r>
+            </a:p>
+          </p:txBody>
+        </p:sp>
+        <p:cxnSp>
+          <p:nvCxnSpPr>
+            <p:cNvPr id="34" name="直線接點 33">
+              <a:extLst>
+                <a:ext uri="{FF2B5EF4-FFF2-40B4-BE49-F238E27FC236}">
+                  <a16:creationId xmlns:a16="http://schemas.microsoft.com/office/drawing/2014/main" id="{30A20B9D-06F8-486A-8C92-BB9D95FD9810}"/>
+                </a:ext>
+              </a:extLst>
+            </p:cNvPr>
+            <p:cNvCxnSpPr>
+              <a:cxnSpLocks/>
+              <a:stCxn id="12" idx="6"/>
+              <a:endCxn id="4" idx="1"/>
+            </p:cNvCxnSpPr>
+            <p:nvPr/>
+          </p:nvCxnSpPr>
+          <p:spPr>
+            <a:xfrm>
+              <a:off x="3408783" y="635442"/>
+              <a:ext cx="409887" cy="2091767"/>
+            </a:xfrm>
+            <a:prstGeom prst="line">
+              <a:avLst/>
+            </a:prstGeom>
+            <a:ln w="38100">
+              <a:solidFill>
+                <a:srgbClr val="2F528F"/>
+              </a:solidFill>
+            </a:ln>
+          </p:spPr>
+          <p:style>
+            <a:lnRef idx="1">
+              <a:schemeClr val="accent1"/>
+            </a:lnRef>
+            <a:fillRef idx="0">
+              <a:schemeClr val="accent1"/>
+            </a:fillRef>
+            <a:effectRef idx="0">
+              <a:schemeClr val="accent1"/>
+            </a:effectRef>
+            <a:fontRef idx="minor">
+              <a:schemeClr val="tx1"/>
+            </a:fontRef>
+          </p:style>
+        </p:cxnSp>
+        <p:cxnSp>
+          <p:nvCxnSpPr>
+            <p:cNvPr id="36" name="直線接點 35">
+              <a:extLst>
+                <a:ext uri="{FF2B5EF4-FFF2-40B4-BE49-F238E27FC236}">
+                  <a16:creationId xmlns:a16="http://schemas.microsoft.com/office/drawing/2014/main" id="{6F6515FF-CABB-4B08-839F-08A4D41C304E}"/>
+                </a:ext>
+              </a:extLst>
+            </p:cNvPr>
+            <p:cNvCxnSpPr>
+              <a:cxnSpLocks/>
+              <a:stCxn id="17" idx="6"/>
+              <a:endCxn id="4" idx="1"/>
+            </p:cNvCxnSpPr>
+            <p:nvPr/>
+          </p:nvCxnSpPr>
+          <p:spPr>
+            <a:xfrm>
+              <a:off x="3437356" y="1265432"/>
+              <a:ext cx="381314" cy="1461777"/>
+            </a:xfrm>
+            <a:prstGeom prst="line">
+              <a:avLst/>
+            </a:prstGeom>
+            <a:ln w="38100">
+              <a:solidFill>
+                <a:srgbClr val="2F528F"/>
+              </a:solidFill>
+            </a:ln>
+          </p:spPr>
+          <p:style>
+            <a:lnRef idx="1">
+              <a:schemeClr val="accent1"/>
+            </a:lnRef>
+            <a:fillRef idx="0">
+              <a:schemeClr val="accent1"/>
+            </a:fillRef>
+            <a:effectRef idx="0">
+              <a:schemeClr val="accent1"/>
+            </a:effectRef>
+            <a:fontRef idx="minor">
+              <a:schemeClr val="tx1"/>
+            </a:fontRef>
+          </p:style>
+        </p:cxnSp>
+        <p:cxnSp>
+          <p:nvCxnSpPr>
+            <p:cNvPr id="42" name="直線接點 41">
+              <a:extLst>
+                <a:ext uri="{FF2B5EF4-FFF2-40B4-BE49-F238E27FC236}">
+                  <a16:creationId xmlns:a16="http://schemas.microsoft.com/office/drawing/2014/main" id="{951EBB64-AFDA-41FF-8829-AD71D11B78DA}"/>
+                </a:ext>
+              </a:extLst>
+            </p:cNvPr>
+            <p:cNvCxnSpPr>
+              <a:stCxn id="14" idx="6"/>
+              <a:endCxn id="4" idx="1"/>
+            </p:cNvCxnSpPr>
+            <p:nvPr/>
+          </p:nvCxnSpPr>
+          <p:spPr>
+            <a:xfrm>
+              <a:off x="3495928" y="1913850"/>
+              <a:ext cx="322742" cy="813359"/>
+            </a:xfrm>
+            <a:prstGeom prst="line">
+              <a:avLst/>
+            </a:prstGeom>
+            <a:ln w="38100">
+              <a:solidFill>
+                <a:srgbClr val="2F528F"/>
+              </a:solidFill>
+            </a:ln>
+          </p:spPr>
+          <p:style>
+            <a:lnRef idx="1">
+              <a:schemeClr val="accent1"/>
+            </a:lnRef>
+            <a:fillRef idx="0">
+              <a:schemeClr val="accent1"/>
+            </a:fillRef>
+            <a:effectRef idx="0">
+              <a:schemeClr val="accent1"/>
+            </a:effectRef>
+            <a:fontRef idx="minor">
+              <a:schemeClr val="tx1"/>
+            </a:fontRef>
+          </p:style>
+        </p:cxnSp>
+        <p:cxnSp>
+          <p:nvCxnSpPr>
+            <p:cNvPr id="44" name="直線接點 43">
+              <a:extLst>
+                <a:ext uri="{FF2B5EF4-FFF2-40B4-BE49-F238E27FC236}">
+                  <a16:creationId xmlns:a16="http://schemas.microsoft.com/office/drawing/2014/main" id="{1EC98F50-6EE5-4EB6-84FD-B4114B954638}"/>
+                </a:ext>
+              </a:extLst>
+            </p:cNvPr>
+            <p:cNvCxnSpPr>
+              <a:cxnSpLocks/>
+              <a:stCxn id="15" idx="6"/>
+              <a:endCxn id="4" idx="1"/>
+            </p:cNvCxnSpPr>
+            <p:nvPr/>
+          </p:nvCxnSpPr>
+          <p:spPr>
+            <a:xfrm flipV="1">
+              <a:off x="3003037" y="2727209"/>
+              <a:ext cx="815633" cy="1465716"/>
+            </a:xfrm>
+            <a:prstGeom prst="line">
+              <a:avLst/>
+            </a:prstGeom>
+            <a:ln w="38100">
+              <a:solidFill>
+                <a:srgbClr val="2F528F"/>
+              </a:solidFill>
+            </a:ln>
+          </p:spPr>
+          <p:style>
+            <a:lnRef idx="1">
+              <a:schemeClr val="accent1"/>
+            </a:lnRef>
+            <a:fillRef idx="0">
+              <a:schemeClr val="accent1"/>
+            </a:fillRef>
+            <a:effectRef idx="0">
+              <a:schemeClr val="accent1"/>
+            </a:effectRef>
+            <a:fontRef idx="minor">
+              <a:schemeClr val="tx1"/>
+            </a:fontRef>
+          </p:style>
+        </p:cxnSp>
+        <p:cxnSp>
+          <p:nvCxnSpPr>
+            <p:cNvPr id="46" name="直線接點 45">
+              <a:extLst>
+                <a:ext uri="{FF2B5EF4-FFF2-40B4-BE49-F238E27FC236}">
+                  <a16:creationId xmlns:a16="http://schemas.microsoft.com/office/drawing/2014/main" id="{F78D6C6B-AC27-48A0-8770-68F9AAE5D9D8}"/>
+                </a:ext>
+              </a:extLst>
+            </p:cNvPr>
+            <p:cNvCxnSpPr>
+              <a:stCxn id="20" idx="6"/>
+              <a:endCxn id="4" idx="1"/>
+            </p:cNvCxnSpPr>
+            <p:nvPr/>
+          </p:nvCxnSpPr>
+          <p:spPr>
+            <a:xfrm flipV="1">
+              <a:off x="3236226" y="2727209"/>
+              <a:ext cx="582444" cy="829069"/>
+            </a:xfrm>
+            <a:prstGeom prst="line">
+              <a:avLst/>
+            </a:prstGeom>
+            <a:ln w="38100">
+              <a:solidFill>
+                <a:srgbClr val="2F528F"/>
+              </a:solidFill>
+            </a:ln>
+          </p:spPr>
+          <p:style>
+            <a:lnRef idx="1">
+              <a:schemeClr val="accent1"/>
+            </a:lnRef>
+            <a:fillRef idx="0">
+              <a:schemeClr val="accent1"/>
+            </a:fillRef>
+            <a:effectRef idx="0">
+              <a:schemeClr val="accent1"/>
+            </a:effectRef>
+            <a:fontRef idx="minor">
+              <a:schemeClr val="tx1"/>
+            </a:fontRef>
+          </p:style>
+        </p:cxnSp>
+        <p:cxnSp>
+          <p:nvCxnSpPr>
+            <p:cNvPr id="48" name="直線接點 47">
+              <a:extLst>
+                <a:ext uri="{FF2B5EF4-FFF2-40B4-BE49-F238E27FC236}">
+                  <a16:creationId xmlns:a16="http://schemas.microsoft.com/office/drawing/2014/main" id="{B1C70860-DF32-490B-887C-45F51F6D8474}"/>
+                </a:ext>
+              </a:extLst>
+            </p:cNvPr>
+            <p:cNvCxnSpPr>
+              <a:cxnSpLocks/>
+              <a:stCxn id="13" idx="6"/>
+              <a:endCxn id="4" idx="1"/>
+            </p:cNvCxnSpPr>
+            <p:nvPr/>
+          </p:nvCxnSpPr>
+          <p:spPr>
+            <a:xfrm>
+              <a:off x="2270225" y="2095621"/>
+              <a:ext cx="1548445" cy="631588"/>
+            </a:xfrm>
+            <a:prstGeom prst="line">
+              <a:avLst/>
+            </a:prstGeom>
+            <a:ln w="38100">
+              <a:solidFill>
+                <a:srgbClr val="2F528F"/>
+              </a:solidFill>
+            </a:ln>
+          </p:spPr>
+          <p:style>
+            <a:lnRef idx="1">
+              <a:schemeClr val="accent1"/>
+            </a:lnRef>
+            <a:fillRef idx="0">
+              <a:schemeClr val="accent1"/>
+            </a:fillRef>
+            <a:effectRef idx="0">
+              <a:schemeClr val="accent1"/>
+            </a:effectRef>
+            <a:fontRef idx="minor">
+              <a:schemeClr val="tx1"/>
+            </a:fontRef>
+          </p:style>
+        </p:cxnSp>
+        <p:cxnSp>
+          <p:nvCxnSpPr>
+            <p:cNvPr id="50" name="直線接點 49">
+              <a:extLst>
+                <a:ext uri="{FF2B5EF4-FFF2-40B4-BE49-F238E27FC236}">
+                  <a16:creationId xmlns:a16="http://schemas.microsoft.com/office/drawing/2014/main" id="{B9F81377-F027-4094-AD5D-385BA2A4CDA0}"/>
+                </a:ext>
+              </a:extLst>
+            </p:cNvPr>
+            <p:cNvCxnSpPr>
+              <a:stCxn id="18" idx="6"/>
+              <a:endCxn id="4" idx="1"/>
+            </p:cNvCxnSpPr>
+            <p:nvPr/>
+          </p:nvCxnSpPr>
+          <p:spPr>
+            <a:xfrm flipV="1">
+              <a:off x="3114976" y="2727209"/>
+              <a:ext cx="703694" cy="26755"/>
+            </a:xfrm>
+            <a:prstGeom prst="line">
+              <a:avLst/>
+            </a:prstGeom>
+            <a:ln w="38100">
+              <a:solidFill>
+                <a:srgbClr val="2F528F"/>
+              </a:solidFill>
+            </a:ln>
+          </p:spPr>
+          <p:style>
+            <a:lnRef idx="1">
+              <a:schemeClr val="accent1"/>
+            </a:lnRef>
+            <a:fillRef idx="0">
+              <a:schemeClr val="accent1"/>
+            </a:fillRef>
+            <a:effectRef idx="0">
+              <a:schemeClr val="accent1"/>
+            </a:effectRef>
+            <a:fontRef idx="minor">
+              <a:schemeClr val="tx1"/>
+            </a:fontRef>
+          </p:style>
+        </p:cxnSp>
+        <p:cxnSp>
+          <p:nvCxnSpPr>
+            <p:cNvPr id="52" name="直線接點 51">
+              <a:extLst>
+                <a:ext uri="{FF2B5EF4-FFF2-40B4-BE49-F238E27FC236}">
+                  <a16:creationId xmlns:a16="http://schemas.microsoft.com/office/drawing/2014/main" id="{C694CF34-7F3F-4BE0-990D-DCA7D695B5E1}"/>
+                </a:ext>
+              </a:extLst>
+            </p:cNvPr>
+            <p:cNvCxnSpPr>
+              <a:cxnSpLocks/>
+              <a:stCxn id="21" idx="6"/>
+              <a:endCxn id="97" idx="1"/>
+            </p:cNvCxnSpPr>
+            <p:nvPr/>
+          </p:nvCxnSpPr>
+          <p:spPr>
+            <a:xfrm>
+              <a:off x="1953259" y="5672573"/>
+              <a:ext cx="1474602" cy="38217"/>
+            </a:xfrm>
+            <a:prstGeom prst="line">
+              <a:avLst/>
+            </a:prstGeom>
+            <a:ln w="38100">
+              <a:solidFill>
+                <a:schemeClr val="accent4"/>
+              </a:solidFill>
+            </a:ln>
+          </p:spPr>
+          <p:style>
+            <a:lnRef idx="1">
+              <a:schemeClr val="accent1"/>
+            </a:lnRef>
+            <a:fillRef idx="0">
+              <a:schemeClr val="accent1"/>
+            </a:fillRef>
+            <a:effectRef idx="0">
+              <a:schemeClr val="accent1"/>
+            </a:effectRef>
+            <a:fontRef idx="minor">
+              <a:schemeClr val="tx1"/>
+            </a:fontRef>
+          </p:style>
+        </p:cxnSp>
+        <p:cxnSp>
+          <p:nvCxnSpPr>
+            <p:cNvPr id="91" name="直線接點 90">
+              <a:extLst>
+                <a:ext uri="{FF2B5EF4-FFF2-40B4-BE49-F238E27FC236}">
+                  <a16:creationId xmlns:a16="http://schemas.microsoft.com/office/drawing/2014/main" id="{9CD793D7-F2E4-4D46-A236-BCA3175C9881}"/>
+                </a:ext>
+              </a:extLst>
+            </p:cNvPr>
+            <p:cNvCxnSpPr>
+              <a:cxnSpLocks/>
+              <a:stCxn id="97" idx="1"/>
+              <a:endCxn id="22" idx="6"/>
+            </p:cNvCxnSpPr>
+            <p:nvPr/>
+          </p:nvCxnSpPr>
+          <p:spPr>
+            <a:xfrm flipH="1">
+              <a:off x="3179902" y="5710790"/>
+              <a:ext cx="247959" cy="599776"/>
+            </a:xfrm>
+            <a:prstGeom prst="line">
+              <a:avLst/>
+            </a:prstGeom>
+            <a:ln w="38100">
+              <a:solidFill>
+                <a:schemeClr val="accent4"/>
+              </a:solidFill>
+            </a:ln>
+          </p:spPr>
+          <p:style>
+            <a:lnRef idx="1">
+              <a:schemeClr val="accent1"/>
+            </a:lnRef>
+            <a:fillRef idx="0">
+              <a:schemeClr val="accent1"/>
+            </a:fillRef>
+            <a:effectRef idx="0">
+              <a:schemeClr val="accent1"/>
+            </a:effectRef>
+            <a:fontRef idx="minor">
+              <a:schemeClr val="tx1"/>
+            </a:fontRef>
+          </p:style>
+        </p:cxnSp>
+        <p:cxnSp>
+          <p:nvCxnSpPr>
+            <p:cNvPr id="114" name="直線接點 113">
+              <a:extLst>
+                <a:ext uri="{FF2B5EF4-FFF2-40B4-BE49-F238E27FC236}">
+                  <a16:creationId xmlns:a16="http://schemas.microsoft.com/office/drawing/2014/main" id="{D69700CE-C7D1-4D0C-88B5-81FB6269A630}"/>
+                </a:ext>
+              </a:extLst>
+            </p:cNvPr>
+            <p:cNvCxnSpPr>
+              <a:cxnSpLocks/>
+              <a:stCxn id="69" idx="2"/>
+              <a:endCxn id="24" idx="0"/>
+            </p:cNvCxnSpPr>
+            <p:nvPr/>
+          </p:nvCxnSpPr>
+          <p:spPr>
+            <a:xfrm flipH="1">
+              <a:off x="6463489" y="4874626"/>
+              <a:ext cx="701837" cy="298575"/>
+            </a:xfrm>
+            <a:prstGeom prst="line">
+              <a:avLst/>
+            </a:prstGeom>
+            <a:ln w="38100">
+              <a:solidFill>
+                <a:srgbClr val="00B050"/>
+              </a:solidFill>
+            </a:ln>
+          </p:spPr>
+          <p:style>
+            <a:lnRef idx="1">
+              <a:schemeClr val="accent1"/>
+            </a:lnRef>
+            <a:fillRef idx="0">
+              <a:schemeClr val="accent1"/>
+            </a:fillRef>
+            <a:effectRef idx="0">
+              <a:schemeClr val="accent1"/>
+            </a:effectRef>
+            <a:fontRef idx="minor">
+              <a:schemeClr val="tx1"/>
+            </a:fontRef>
+          </p:style>
+        </p:cxnSp>
+        <p:cxnSp>
+          <p:nvCxnSpPr>
+            <p:cNvPr id="116" name="直線接點 115">
+              <a:extLst>
+                <a:ext uri="{FF2B5EF4-FFF2-40B4-BE49-F238E27FC236}">
+                  <a16:creationId xmlns:a16="http://schemas.microsoft.com/office/drawing/2014/main" id="{B3AB68E6-CD60-44EC-AF71-684B072B1039}"/>
+                </a:ext>
+              </a:extLst>
+            </p:cNvPr>
+            <p:cNvCxnSpPr>
+              <a:cxnSpLocks/>
+              <a:stCxn id="69" idx="2"/>
+              <a:endCxn id="23" idx="0"/>
+            </p:cNvCxnSpPr>
+            <p:nvPr/>
+          </p:nvCxnSpPr>
+          <p:spPr>
+            <a:xfrm>
+              <a:off x="7165326" y="4874626"/>
+              <a:ext cx="1378060" cy="321612"/>
+            </a:xfrm>
+            <a:prstGeom prst="line">
+              <a:avLst/>
+            </a:prstGeom>
+            <a:ln w="38100">
+              <a:solidFill>
+                <a:srgbClr val="00B050"/>
+              </a:solidFill>
+            </a:ln>
+          </p:spPr>
+          <p:style>
+            <a:lnRef idx="1">
+              <a:schemeClr val="accent1"/>
+            </a:lnRef>
+            <a:fillRef idx="0">
+              <a:schemeClr val="accent1"/>
+            </a:fillRef>
+            <a:effectRef idx="0">
+              <a:schemeClr val="accent1"/>
+            </a:effectRef>
+            <a:fontRef idx="minor">
+              <a:schemeClr val="tx1"/>
+            </a:fontRef>
+          </p:style>
+        </p:cxnSp>
+        <p:cxnSp>
+          <p:nvCxnSpPr>
+            <p:cNvPr id="118" name="直線接點 117">
+              <a:extLst>
+                <a:ext uri="{FF2B5EF4-FFF2-40B4-BE49-F238E27FC236}">
+                  <a16:creationId xmlns:a16="http://schemas.microsoft.com/office/drawing/2014/main" id="{1583C68D-36B7-47E3-B6FD-4A4F97FE514A}"/>
+                </a:ext>
+              </a:extLst>
+            </p:cNvPr>
+            <p:cNvCxnSpPr>
+              <a:stCxn id="7" idx="3"/>
+              <a:endCxn id="26" idx="2"/>
+            </p:cNvCxnSpPr>
+            <p:nvPr/>
+          </p:nvCxnSpPr>
+          <p:spPr>
+            <a:xfrm flipV="1">
+              <a:off x="9323537" y="2716463"/>
+              <a:ext cx="417117" cy="9743"/>
+            </a:xfrm>
+            <a:prstGeom prst="line">
+              <a:avLst/>
+            </a:prstGeom>
+            <a:ln w="38100">
+              <a:solidFill>
+                <a:srgbClr val="7030A0"/>
+              </a:solidFill>
+            </a:ln>
+          </p:spPr>
+          <p:style>
+            <a:lnRef idx="1">
+              <a:schemeClr val="accent1"/>
+            </a:lnRef>
+            <a:fillRef idx="0">
+              <a:schemeClr val="accent1"/>
+            </a:fillRef>
+            <a:effectRef idx="0">
+              <a:schemeClr val="accent1"/>
+            </a:effectRef>
+            <a:fontRef idx="minor">
+              <a:schemeClr val="tx1"/>
+            </a:fontRef>
+          </p:style>
+        </p:cxnSp>
+        <p:cxnSp>
+          <p:nvCxnSpPr>
+            <p:cNvPr id="120" name="直線接點 119">
+              <a:extLst>
+                <a:ext uri="{FF2B5EF4-FFF2-40B4-BE49-F238E27FC236}">
+                  <a16:creationId xmlns:a16="http://schemas.microsoft.com/office/drawing/2014/main" id="{E0DF614A-B2DC-4E63-92C5-86FE75DCD949}"/>
+                </a:ext>
+              </a:extLst>
+            </p:cNvPr>
+            <p:cNvCxnSpPr>
+              <a:stCxn id="7" idx="3"/>
+              <a:endCxn id="25" idx="2"/>
+            </p:cNvCxnSpPr>
+            <p:nvPr/>
+          </p:nvCxnSpPr>
+          <p:spPr>
+            <a:xfrm>
+              <a:off x="9323537" y="2726206"/>
+              <a:ext cx="437237" cy="861177"/>
+            </a:xfrm>
+            <a:prstGeom prst="line">
+              <a:avLst/>
+            </a:prstGeom>
+            <a:ln w="38100">
+              <a:solidFill>
+                <a:srgbClr val="7030A0"/>
+              </a:solidFill>
+            </a:ln>
+          </p:spPr>
+          <p:style>
+            <a:lnRef idx="1">
+              <a:schemeClr val="accent1"/>
+            </a:lnRef>
+            <a:fillRef idx="0">
+              <a:schemeClr val="accent1"/>
+            </a:fillRef>
+            <a:effectRef idx="0">
+              <a:schemeClr val="accent1"/>
+            </a:effectRef>
+            <a:fontRef idx="minor">
+              <a:schemeClr val="tx1"/>
+            </a:fontRef>
+          </p:style>
+        </p:cxnSp>
+        <p:cxnSp>
+          <p:nvCxnSpPr>
+            <p:cNvPr id="122" name="直線接點 121">
+              <a:extLst>
+                <a:ext uri="{FF2B5EF4-FFF2-40B4-BE49-F238E27FC236}">
+                  <a16:creationId xmlns:a16="http://schemas.microsoft.com/office/drawing/2014/main" id="{EA7F6708-0F86-4704-A171-6426D659B893}"/>
+                </a:ext>
+              </a:extLst>
+            </p:cNvPr>
+            <p:cNvCxnSpPr>
+              <a:stCxn id="8" idx="3"/>
+              <a:endCxn id="28" idx="2"/>
+            </p:cNvCxnSpPr>
+            <p:nvPr/>
+          </p:nvCxnSpPr>
+          <p:spPr>
+            <a:xfrm flipV="1">
+              <a:off x="7901201" y="1128813"/>
+              <a:ext cx="1436197" cy="552542"/>
+            </a:xfrm>
+            <a:prstGeom prst="line">
+              <a:avLst/>
+            </a:prstGeom>
+            <a:ln w="38100">
+              <a:solidFill>
+                <a:srgbClr val="4D4D4D"/>
+              </a:solidFill>
+            </a:ln>
+          </p:spPr>
+          <p:style>
+            <a:lnRef idx="1">
+              <a:schemeClr val="accent1"/>
+            </a:lnRef>
+            <a:fillRef idx="0">
+              <a:schemeClr val="accent1"/>
+            </a:fillRef>
+            <a:effectRef idx="0">
+              <a:schemeClr val="accent1"/>
+            </a:effectRef>
+            <a:fontRef idx="minor">
+              <a:schemeClr val="tx1"/>
+            </a:fontRef>
+          </p:style>
+        </p:cxnSp>
+        <p:cxnSp>
+          <p:nvCxnSpPr>
+            <p:cNvPr id="124" name="直線接點 123">
+              <a:extLst>
+                <a:ext uri="{FF2B5EF4-FFF2-40B4-BE49-F238E27FC236}">
+                  <a16:creationId xmlns:a16="http://schemas.microsoft.com/office/drawing/2014/main" id="{1C677481-5AEA-430D-9A9F-E4FF83DC87EF}"/>
+                </a:ext>
+              </a:extLst>
+            </p:cNvPr>
+            <p:cNvCxnSpPr>
+              <a:stCxn id="8" idx="3"/>
+              <a:endCxn id="27" idx="2"/>
+            </p:cNvCxnSpPr>
+            <p:nvPr/>
+          </p:nvCxnSpPr>
+          <p:spPr>
+            <a:xfrm flipV="1">
+              <a:off x="7901201" y="808296"/>
+              <a:ext cx="291233" cy="873059"/>
+            </a:xfrm>
+            <a:prstGeom prst="line">
+              <a:avLst/>
+            </a:prstGeom>
+            <a:ln w="38100">
+              <a:solidFill>
+                <a:srgbClr val="4D4D4D"/>
+              </a:solidFill>
+            </a:ln>
+          </p:spPr>
+          <p:style>
+            <a:lnRef idx="1">
+              <a:schemeClr val="accent1"/>
+            </a:lnRef>
+            <a:fillRef idx="0">
+              <a:schemeClr val="accent1"/>
+            </a:fillRef>
+            <a:effectRef idx="0">
+              <a:schemeClr val="accent1"/>
+            </a:effectRef>
+            <a:fontRef idx="minor">
+              <a:schemeClr val="tx1"/>
+            </a:fontRef>
+          </p:style>
+        </p:cxnSp>
+        <p:cxnSp>
+          <p:nvCxnSpPr>
+            <p:cNvPr id="130" name="直線接點 129">
+              <a:extLst>
+                <a:ext uri="{FF2B5EF4-FFF2-40B4-BE49-F238E27FC236}">
+                  <a16:creationId xmlns:a16="http://schemas.microsoft.com/office/drawing/2014/main" id="{229CE63F-CCAD-4E96-B326-D719E2AB69E2}"/>
+                </a:ext>
+              </a:extLst>
+            </p:cNvPr>
+            <p:cNvCxnSpPr>
+              <a:cxnSpLocks/>
+              <a:endCxn id="30" idx="0"/>
+            </p:cNvCxnSpPr>
+            <p:nvPr/>
+          </p:nvCxnSpPr>
+          <p:spPr>
+            <a:xfrm>
+              <a:off x="4735901" y="3033816"/>
+              <a:ext cx="10824" cy="756077"/>
+            </a:xfrm>
+            <a:prstGeom prst="line">
+              <a:avLst/>
+            </a:prstGeom>
+            <a:ln w="76200" cmpd="dbl">
+              <a:solidFill>
+                <a:srgbClr val="ED7D31"/>
+              </a:solidFill>
+            </a:ln>
+          </p:spPr>
+          <p:style>
+            <a:lnRef idx="1">
+              <a:schemeClr val="accent1"/>
+            </a:lnRef>
+            <a:fillRef idx="0">
+              <a:schemeClr val="accent1"/>
+            </a:fillRef>
+            <a:effectRef idx="0">
+              <a:schemeClr val="accent1"/>
+            </a:effectRef>
+            <a:fontRef idx="minor">
+              <a:schemeClr val="tx1"/>
+            </a:fontRef>
+          </p:style>
+        </p:cxnSp>
+        <p:cxnSp>
+          <p:nvCxnSpPr>
+            <p:cNvPr id="132" name="直線接點 131">
+              <a:extLst>
+                <a:ext uri="{FF2B5EF4-FFF2-40B4-BE49-F238E27FC236}">
+                  <a16:creationId xmlns:a16="http://schemas.microsoft.com/office/drawing/2014/main" id="{A16D8E0F-6997-4B6A-8072-ED83CA663C6D}"/>
+                </a:ext>
+              </a:extLst>
+            </p:cNvPr>
+            <p:cNvCxnSpPr>
+              <a:cxnSpLocks/>
+              <a:stCxn id="30" idx="2"/>
+              <a:endCxn id="69" idx="1"/>
+            </p:cNvCxnSpPr>
+            <p:nvPr/>
+          </p:nvCxnSpPr>
+          <p:spPr>
+            <a:xfrm flipV="1">
+              <a:off x="4746725" y="4585290"/>
+              <a:ext cx="1936676" cy="38255"/>
+            </a:xfrm>
+            <a:prstGeom prst="line">
+              <a:avLst/>
+            </a:prstGeom>
+            <a:ln w="76200" cmpd="dbl">
+              <a:solidFill>
+                <a:srgbClr val="ED7D31"/>
+              </a:solidFill>
+            </a:ln>
+          </p:spPr>
+          <p:style>
+            <a:lnRef idx="1">
+              <a:schemeClr val="accent1"/>
+            </a:lnRef>
+            <a:fillRef idx="0">
+              <a:schemeClr val="accent1"/>
+            </a:fillRef>
+            <a:effectRef idx="0">
+              <a:schemeClr val="accent1"/>
+            </a:effectRef>
+            <a:fontRef idx="minor">
+              <a:schemeClr val="tx1"/>
+            </a:fontRef>
+          </p:style>
+        </p:cxnSp>
+        <p:cxnSp>
+          <p:nvCxnSpPr>
+            <p:cNvPr id="134" name="直線接點 133">
+              <a:extLst>
+                <a:ext uri="{FF2B5EF4-FFF2-40B4-BE49-F238E27FC236}">
+                  <a16:creationId xmlns:a16="http://schemas.microsoft.com/office/drawing/2014/main" id="{B771A834-D842-4990-843E-A0CFEB6A1311}"/>
+                </a:ext>
+              </a:extLst>
+            </p:cNvPr>
+            <p:cNvCxnSpPr>
+              <a:cxnSpLocks/>
+              <a:stCxn id="69" idx="3"/>
+              <a:endCxn id="32" idx="2"/>
+            </p:cNvCxnSpPr>
+            <p:nvPr/>
+          </p:nvCxnSpPr>
+          <p:spPr>
+            <a:xfrm flipV="1">
+              <a:off x="7647251" y="4585289"/>
+              <a:ext cx="1194361" cy="1"/>
+            </a:xfrm>
+            <a:prstGeom prst="line">
+              <a:avLst/>
+            </a:prstGeom>
+            <a:ln w="76200" cmpd="dbl">
+              <a:solidFill>
+                <a:srgbClr val="ED7D31"/>
+              </a:solidFill>
+            </a:ln>
+          </p:spPr>
+          <p:style>
+            <a:lnRef idx="1">
+              <a:schemeClr val="accent1"/>
+            </a:lnRef>
+            <a:fillRef idx="0">
+              <a:schemeClr val="accent1"/>
+            </a:fillRef>
+            <a:effectRef idx="0">
+              <a:schemeClr val="accent1"/>
+            </a:effectRef>
+            <a:fontRef idx="minor">
+              <a:schemeClr val="tx1"/>
+            </a:fontRef>
+          </p:style>
+        </p:cxnSp>
+        <p:cxnSp>
+          <p:nvCxnSpPr>
+            <p:cNvPr id="136" name="直線接點 135">
+              <a:extLst>
+                <a:ext uri="{FF2B5EF4-FFF2-40B4-BE49-F238E27FC236}">
+                  <a16:creationId xmlns:a16="http://schemas.microsoft.com/office/drawing/2014/main" id="{A91C540E-4196-4AC9-8D8D-188F8B6045E3}"/>
+                </a:ext>
+              </a:extLst>
+            </p:cNvPr>
+            <p:cNvCxnSpPr>
+              <a:stCxn id="32" idx="0"/>
+              <a:endCxn id="7" idx="2"/>
+            </p:cNvCxnSpPr>
+            <p:nvPr/>
+          </p:nvCxnSpPr>
+          <p:spPr>
+            <a:xfrm flipV="1">
+              <a:off x="8841612" y="3015542"/>
+              <a:ext cx="0" cy="736095"/>
+            </a:xfrm>
+            <a:prstGeom prst="line">
+              <a:avLst/>
+            </a:prstGeom>
+            <a:ln w="76200" cmpd="dbl">
+              <a:solidFill>
+                <a:srgbClr val="ED7D31"/>
+              </a:solidFill>
+            </a:ln>
+          </p:spPr>
+          <p:style>
+            <a:lnRef idx="1">
+              <a:schemeClr val="accent1"/>
+            </a:lnRef>
+            <a:fillRef idx="0">
+              <a:schemeClr val="accent1"/>
+            </a:fillRef>
+            <a:effectRef idx="0">
+              <a:schemeClr val="accent1"/>
+            </a:effectRef>
+            <a:fontRef idx="minor">
+              <a:schemeClr val="tx1"/>
+            </a:fontRef>
+          </p:style>
+        </p:cxnSp>
+        <p:cxnSp>
+          <p:nvCxnSpPr>
+            <p:cNvPr id="138" name="直線接點 137">
+              <a:extLst>
+                <a:ext uri="{FF2B5EF4-FFF2-40B4-BE49-F238E27FC236}">
+                  <a16:creationId xmlns:a16="http://schemas.microsoft.com/office/drawing/2014/main" id="{4388DF5F-C414-4034-B9E4-4E5F1AE73A39}"/>
+                </a:ext>
+              </a:extLst>
+            </p:cNvPr>
+            <p:cNvCxnSpPr>
+              <a:stCxn id="31" idx="3"/>
+              <a:endCxn id="7" idx="1"/>
+            </p:cNvCxnSpPr>
+            <p:nvPr/>
+          </p:nvCxnSpPr>
+          <p:spPr>
+            <a:xfrm flipV="1">
+              <a:off x="7317133" y="2726206"/>
+              <a:ext cx="1042554" cy="1002"/>
+            </a:xfrm>
+            <a:prstGeom prst="line">
+              <a:avLst/>
+            </a:prstGeom>
+            <a:ln w="76200" cmpd="dbl">
+              <a:solidFill>
+                <a:srgbClr val="ED7D31"/>
+              </a:solidFill>
+            </a:ln>
+          </p:spPr>
+          <p:style>
+            <a:lnRef idx="1">
+              <a:schemeClr val="accent1"/>
+            </a:lnRef>
+            <a:fillRef idx="0">
+              <a:schemeClr val="accent1"/>
+            </a:fillRef>
+            <a:effectRef idx="0">
+              <a:schemeClr val="accent1"/>
+            </a:effectRef>
+            <a:fontRef idx="minor">
+              <a:schemeClr val="tx1"/>
+            </a:fontRef>
+          </p:style>
+        </p:cxnSp>
+        <p:cxnSp>
+          <p:nvCxnSpPr>
+            <p:cNvPr id="140" name="直線接點 139">
+              <a:extLst>
+                <a:ext uri="{FF2B5EF4-FFF2-40B4-BE49-F238E27FC236}">
+                  <a16:creationId xmlns:a16="http://schemas.microsoft.com/office/drawing/2014/main" id="{D0689312-1238-4003-BB6F-AC7E75B8AD49}"/>
+                </a:ext>
+              </a:extLst>
+            </p:cNvPr>
+            <p:cNvCxnSpPr>
+              <a:stCxn id="4" idx="3"/>
+              <a:endCxn id="31" idx="1"/>
+            </p:cNvCxnSpPr>
+            <p:nvPr/>
+          </p:nvCxnSpPr>
+          <p:spPr>
+            <a:xfrm flipV="1">
+              <a:off x="4782520" y="2727208"/>
+              <a:ext cx="1067526" cy="1"/>
+            </a:xfrm>
+            <a:prstGeom prst="line">
+              <a:avLst/>
+            </a:prstGeom>
+            <a:ln w="76200" cmpd="dbl">
+              <a:solidFill>
+                <a:srgbClr val="ED7D31"/>
+              </a:solidFill>
+            </a:ln>
+          </p:spPr>
+          <p:style>
+            <a:lnRef idx="1">
+              <a:schemeClr val="accent1"/>
+            </a:lnRef>
+            <a:fillRef idx="0">
+              <a:schemeClr val="accent1"/>
+            </a:fillRef>
+            <a:effectRef idx="0">
+              <a:schemeClr val="accent1"/>
+            </a:effectRef>
+            <a:fontRef idx="minor">
+              <a:schemeClr val="tx1"/>
+            </a:fontRef>
+          </p:style>
+        </p:cxnSp>
+        <p:cxnSp>
+          <p:nvCxnSpPr>
+            <p:cNvPr id="142" name="直線接點 141">
+              <a:extLst>
+                <a:ext uri="{FF2B5EF4-FFF2-40B4-BE49-F238E27FC236}">
+                  <a16:creationId xmlns:a16="http://schemas.microsoft.com/office/drawing/2014/main" id="{B86D59E7-50FD-40F7-8089-EBAB50160F7A}"/>
+                </a:ext>
+              </a:extLst>
+            </p:cNvPr>
+            <p:cNvCxnSpPr>
+              <a:stCxn id="29" idx="1"/>
+              <a:endCxn id="4" idx="0"/>
+            </p:cNvCxnSpPr>
+            <p:nvPr/>
+          </p:nvCxnSpPr>
+          <p:spPr>
+            <a:xfrm>
+              <a:off x="4296468" y="1687641"/>
+              <a:ext cx="4127" cy="750231"/>
+            </a:xfrm>
+            <a:prstGeom prst="line">
+              <a:avLst/>
+            </a:prstGeom>
+            <a:ln w="38100">
+              <a:solidFill>
+                <a:srgbClr val="ED7D31"/>
+              </a:solidFill>
+            </a:ln>
+          </p:spPr>
+          <p:style>
+            <a:lnRef idx="1">
+              <a:schemeClr val="accent1"/>
+            </a:lnRef>
+            <a:fillRef idx="0">
+              <a:schemeClr val="accent1"/>
+            </a:fillRef>
+            <a:effectRef idx="0">
+              <a:schemeClr val="accent1"/>
+            </a:effectRef>
+            <a:fontRef idx="minor">
+              <a:schemeClr val="tx1"/>
+            </a:fontRef>
+          </p:style>
+        </p:cxnSp>
+        <p:cxnSp>
+          <p:nvCxnSpPr>
+            <p:cNvPr id="144" name="直線接點 143">
+              <a:extLst>
+                <a:ext uri="{FF2B5EF4-FFF2-40B4-BE49-F238E27FC236}">
+                  <a16:creationId xmlns:a16="http://schemas.microsoft.com/office/drawing/2014/main" id="{66101CEC-8885-4D9C-B364-A9BFF68169CE}"/>
+                </a:ext>
+              </a:extLst>
+            </p:cNvPr>
+            <p:cNvCxnSpPr>
+              <a:stCxn id="29" idx="3"/>
+              <a:endCxn id="8" idx="1"/>
+            </p:cNvCxnSpPr>
+            <p:nvPr/>
+          </p:nvCxnSpPr>
+          <p:spPr>
+            <a:xfrm flipV="1">
+              <a:off x="5763555" y="1681355"/>
+              <a:ext cx="1173796" cy="6286"/>
+            </a:xfrm>
+            <a:prstGeom prst="line">
+              <a:avLst/>
+            </a:prstGeom>
+            <a:ln w="38100">
+              <a:solidFill>
+                <a:srgbClr val="ED7D31"/>
+              </a:solidFill>
+            </a:ln>
+          </p:spPr>
+          <p:style>
+            <a:lnRef idx="1">
+              <a:schemeClr val="accent1"/>
+            </a:lnRef>
+            <a:fillRef idx="0">
+              <a:schemeClr val="accent1"/>
+            </a:fillRef>
+            <a:effectRef idx="0">
+              <a:schemeClr val="accent1"/>
+            </a:effectRef>
+            <a:fontRef idx="minor">
+              <a:schemeClr val="tx1"/>
+            </a:fontRef>
+          </p:style>
+        </p:cxnSp>
+        <p:cxnSp>
+          <p:nvCxnSpPr>
+            <p:cNvPr id="146" name="直線接點 145">
+              <a:extLst>
+                <a:ext uri="{FF2B5EF4-FFF2-40B4-BE49-F238E27FC236}">
+                  <a16:creationId xmlns:a16="http://schemas.microsoft.com/office/drawing/2014/main" id="{219D975D-4DDD-4F6D-9E89-DE35D4BF5166}"/>
+                </a:ext>
+              </a:extLst>
+            </p:cNvPr>
+            <p:cNvCxnSpPr>
+              <a:stCxn id="29" idx="0"/>
+              <a:endCxn id="19" idx="4"/>
+            </p:cNvCxnSpPr>
+            <p:nvPr/>
+          </p:nvCxnSpPr>
+          <p:spPr>
+            <a:xfrm flipH="1" flipV="1">
+              <a:off x="5030011" y="823706"/>
+              <a:ext cx="1" cy="447109"/>
+            </a:xfrm>
+            <a:prstGeom prst="line">
+              <a:avLst/>
+            </a:prstGeom>
+            <a:ln w="38100">
+              <a:solidFill>
+                <a:srgbClr val="ED7D31"/>
+              </a:solidFill>
+            </a:ln>
+          </p:spPr>
+          <p:style>
+            <a:lnRef idx="1">
+              <a:schemeClr val="accent1"/>
+            </a:lnRef>
+            <a:fillRef idx="0">
+              <a:schemeClr val="accent1"/>
+            </a:fillRef>
+            <a:effectRef idx="0">
+              <a:schemeClr val="accent1"/>
+            </a:effectRef>
+            <a:fontRef idx="minor">
+              <a:schemeClr val="tx1"/>
+            </a:fontRef>
+          </p:style>
+        </p:cxnSp>
+        <p:cxnSp>
+          <p:nvCxnSpPr>
+            <p:cNvPr id="148" name="直線接點 147">
+              <a:extLst>
+                <a:ext uri="{FF2B5EF4-FFF2-40B4-BE49-F238E27FC236}">
+                  <a16:creationId xmlns:a16="http://schemas.microsoft.com/office/drawing/2014/main" id="{5AA120E0-7D2C-46D9-A533-2E98BC07C6D9}"/>
+                </a:ext>
+              </a:extLst>
+            </p:cNvPr>
+            <p:cNvCxnSpPr>
+              <a:cxnSpLocks/>
+              <a:stCxn id="11" idx="2"/>
+              <a:endCxn id="8" idx="3"/>
+            </p:cNvCxnSpPr>
+            <p:nvPr/>
+          </p:nvCxnSpPr>
+          <p:spPr>
+            <a:xfrm flipH="1" flipV="1">
+              <a:off x="7901201" y="1681355"/>
+              <a:ext cx="976738" cy="232495"/>
+            </a:xfrm>
+            <a:prstGeom prst="line">
+              <a:avLst/>
+            </a:prstGeom>
+            <a:ln w="38100">
+              <a:solidFill>
+                <a:srgbClr val="4D4D4D"/>
+              </a:solidFill>
+            </a:ln>
+          </p:spPr>
+          <p:style>
+            <a:lnRef idx="1">
+              <a:schemeClr val="accent1"/>
+            </a:lnRef>
+            <a:fillRef idx="0">
+              <a:schemeClr val="accent1"/>
+            </a:fillRef>
+            <a:effectRef idx="0">
+              <a:schemeClr val="accent1"/>
+            </a:effectRef>
+            <a:fontRef idx="minor">
+              <a:schemeClr val="tx1"/>
+            </a:fontRef>
+          </p:style>
+        </p:cxnSp>
+        <p:sp>
+          <p:nvSpPr>
+            <p:cNvPr id="69" name="矩形 68">
+              <a:extLst>
+                <a:ext uri="{FF2B5EF4-FFF2-40B4-BE49-F238E27FC236}">
+                  <a16:creationId xmlns:a16="http://schemas.microsoft.com/office/drawing/2014/main" id="{AF074DE4-C9E2-4A29-A201-EA83108C0221}"/>
+                </a:ext>
+              </a:extLst>
+            </p:cNvPr>
+            <p:cNvSpPr/>
+            <p:nvPr/>
+          </p:nvSpPr>
+          <p:spPr>
+            <a:xfrm>
+              <a:off x="6683401" y="4295953"/>
+              <a:ext cx="963850" cy="578673"/>
+            </a:xfrm>
+            <a:prstGeom prst="rect">
+              <a:avLst/>
+            </a:prstGeom>
+            <a:noFill/>
+            <a:ln w="38100">
+              <a:solidFill>
+                <a:srgbClr val="00B050"/>
+              </a:solidFill>
+            </a:ln>
+          </p:spPr>
+          <p:style>
+            <a:lnRef idx="2">
+              <a:schemeClr val="accent1">
+                <a:shade val="50000"/>
+              </a:schemeClr>
+            </a:lnRef>
+            <a:fillRef idx="1">
+              <a:schemeClr val="accent1"/>
+            </a:fillRef>
+            <a:effectRef idx="0">
+              <a:schemeClr val="accent1"/>
+            </a:effectRef>
+            <a:fontRef idx="minor">
+              <a:schemeClr val="lt1"/>
+            </a:fontRef>
+          </p:style>
+          <p:txBody>
+            <a:bodyPr rtlCol="0" anchor="ctr"/>
+            <a:lstStyle/>
+            <a:p>
+              <a:pPr algn="ctr"/>
+              <a:r>
+                <a:rPr lang="en-US" altLang="zh-TW" dirty="0">
+                  <a:solidFill>
+                    <a:sysClr val="windowText" lastClr="000000"/>
+                  </a:solidFill>
+                  <a:latin typeface="微軟正黑體" panose="020B0604030504040204" pitchFamily="34" charset="-120"/>
+                  <a:ea typeface="微軟正黑體" panose="020B0604030504040204" pitchFamily="34" charset="-120"/>
+                </a:rPr>
+                <a:t>Publisher</a:t>
+              </a:r>
+              <a:endParaRPr lang="zh-TW" altLang="en-US" dirty="0">
+                <a:solidFill>
+                  <a:sysClr val="windowText" lastClr="000000"/>
+                </a:solidFill>
+                <a:latin typeface="微軟正黑體" panose="020B0604030504040204" pitchFamily="34" charset="-120"/>
+                <a:ea typeface="微軟正黑體" panose="020B0604030504040204" pitchFamily="34" charset="-120"/>
+              </a:endParaRPr>
+            </a:p>
+          </p:txBody>
+        </p:sp>
+        <p:sp>
+          <p:nvSpPr>
+            <p:cNvPr id="53" name="橢圓 52">
+              <a:extLst>
+                <a:ext uri="{FF2B5EF4-FFF2-40B4-BE49-F238E27FC236}">
+                  <a16:creationId xmlns:a16="http://schemas.microsoft.com/office/drawing/2014/main" id="{4DFC75C5-AE34-4B0C-A5BA-88EDEE029858}"/>
+                </a:ext>
+              </a:extLst>
+            </p:cNvPr>
+            <p:cNvSpPr/>
+            <p:nvPr/>
+          </p:nvSpPr>
+          <p:spPr>
+            <a:xfrm>
+              <a:off x="878311" y="2981988"/>
+              <a:ext cx="1230942" cy="552543"/>
+            </a:xfrm>
+            <a:prstGeom prst="ellipse">
+              <a:avLst/>
+            </a:prstGeom>
+            <a:noFill/>
+            <a:ln w="38100">
+              <a:solidFill>
+                <a:srgbClr val="2F528F"/>
+              </a:solidFill>
+            </a:ln>
+          </p:spPr>
+          <p:style>
+            <a:lnRef idx="2">
+              <a:schemeClr val="accent1">
+                <a:shade val="50000"/>
+              </a:schemeClr>
+            </a:lnRef>
+            <a:fillRef idx="1">
+              <a:schemeClr val="accent1"/>
+            </a:fillRef>
+            <a:effectRef idx="0">
+              <a:schemeClr val="accent1"/>
+            </a:effectRef>
+            <a:fontRef idx="minor">
+              <a:schemeClr val="lt1"/>
+            </a:fontRef>
+          </p:style>
+          <p:txBody>
+            <a:bodyPr rtlCol="0" anchor="ctr"/>
+            <a:lstStyle/>
+            <a:p>
+              <a:pPr algn="ctr"/>
+              <a:r>
+                <a:rPr lang="en-US" altLang="zh-TW" dirty="0">
+                  <a:solidFill>
+                    <a:sysClr val="windowText" lastClr="000000"/>
+                  </a:solidFill>
+                  <a:latin typeface="微軟正黑體" panose="020B0604030504040204" pitchFamily="34" charset="-120"/>
+                  <a:ea typeface="微軟正黑體" panose="020B0604030504040204" pitchFamily="34" charset="-120"/>
+                </a:rPr>
+                <a:t>Warrant</a:t>
+              </a:r>
+              <a:endParaRPr lang="zh-TW" altLang="en-US" dirty="0">
+                <a:solidFill>
+                  <a:sysClr val="windowText" lastClr="000000"/>
+                </a:solidFill>
+                <a:latin typeface="微軟正黑體" panose="020B0604030504040204" pitchFamily="34" charset="-120"/>
+                <a:ea typeface="微軟正黑體" panose="020B0604030504040204" pitchFamily="34" charset="-120"/>
+              </a:endParaRPr>
+            </a:p>
+          </p:txBody>
+        </p:sp>
+        <p:cxnSp>
+          <p:nvCxnSpPr>
+            <p:cNvPr id="16" name="直線接點 15">
+              <a:extLst>
+                <a:ext uri="{FF2B5EF4-FFF2-40B4-BE49-F238E27FC236}">
+                  <a16:creationId xmlns:a16="http://schemas.microsoft.com/office/drawing/2014/main" id="{6E92AF63-F176-4D6D-A764-41FCE76C92B6}"/>
+                </a:ext>
+              </a:extLst>
+            </p:cNvPr>
+            <p:cNvCxnSpPr>
+              <a:stCxn id="53" idx="6"/>
+              <a:endCxn id="4" idx="1"/>
+            </p:cNvCxnSpPr>
+            <p:nvPr/>
+          </p:nvCxnSpPr>
+          <p:spPr>
+            <a:xfrm flipV="1">
+              <a:off x="2109253" y="2727209"/>
+              <a:ext cx="1709417" cy="531051"/>
+            </a:xfrm>
+            <a:prstGeom prst="line">
+              <a:avLst/>
+            </a:prstGeom>
+            <a:ln w="38100">
+              <a:solidFill>
+                <a:srgbClr val="2F528F"/>
+              </a:solidFill>
+            </a:ln>
+          </p:spPr>
+          <p:style>
+            <a:lnRef idx="1">
+              <a:schemeClr val="accent1"/>
+            </a:lnRef>
+            <a:fillRef idx="0">
+              <a:schemeClr val="accent1"/>
+            </a:fillRef>
+            <a:effectRef idx="0">
+              <a:schemeClr val="accent1"/>
+            </a:effectRef>
+            <a:fontRef idx="minor">
+              <a:schemeClr val="tx1"/>
+            </a:fontRef>
+          </p:style>
+        </p:cxnSp>
+        <p:sp>
+          <p:nvSpPr>
+            <p:cNvPr id="38" name="文字方塊 37">
+              <a:extLst>
+                <a:ext uri="{FF2B5EF4-FFF2-40B4-BE49-F238E27FC236}">
+                  <a16:creationId xmlns:a16="http://schemas.microsoft.com/office/drawing/2014/main" id="{BB0A17A0-8AC3-4401-92F8-48CC09698C99}"/>
+                </a:ext>
+              </a:extLst>
+            </p:cNvPr>
+            <p:cNvSpPr txBox="1"/>
+            <p:nvPr/>
+          </p:nvSpPr>
+          <p:spPr>
+            <a:xfrm>
+              <a:off x="8841612" y="3209838"/>
+              <a:ext cx="372218" cy="369332"/>
+            </a:xfrm>
+            <a:prstGeom prst="rect">
+              <a:avLst/>
+            </a:prstGeom>
+            <a:noFill/>
+          </p:spPr>
+          <p:txBody>
+            <a:bodyPr wrap="none" rtlCol="0">
+              <a:spAutoFit/>
+            </a:bodyPr>
+            <a:lstStyle/>
+            <a:p>
+              <a:r>
+                <a:rPr lang="en-US" altLang="zh-TW" b="1" dirty="0">
+                  <a:solidFill>
+                    <a:srgbClr val="ED7D31"/>
+                  </a:solidFill>
+                </a:rPr>
+                <a:t>m</a:t>
+              </a:r>
+              <a:endParaRPr lang="zh-TW" altLang="en-US" b="1" dirty="0">
+                <a:solidFill>
+                  <a:srgbClr val="ED7D31"/>
+                </a:solidFill>
+              </a:endParaRPr>
+            </a:p>
+          </p:txBody>
+        </p:sp>
+        <p:sp>
+          <p:nvSpPr>
+            <p:cNvPr id="64" name="文字方塊 63">
+              <a:extLst>
+                <a:ext uri="{FF2B5EF4-FFF2-40B4-BE49-F238E27FC236}">
+                  <a16:creationId xmlns:a16="http://schemas.microsoft.com/office/drawing/2014/main" id="{B932F89F-DA41-4B18-85A4-91D3D3AE6254}"/>
+                </a:ext>
+              </a:extLst>
+            </p:cNvPr>
+            <p:cNvSpPr txBox="1"/>
+            <p:nvPr/>
+          </p:nvSpPr>
+          <p:spPr>
+            <a:xfrm>
+              <a:off x="5182147" y="2311763"/>
+              <a:ext cx="308098" cy="369332"/>
+            </a:xfrm>
+            <a:prstGeom prst="rect">
+              <a:avLst/>
+            </a:prstGeom>
+            <a:noFill/>
+          </p:spPr>
+          <p:txBody>
+            <a:bodyPr wrap="none" rtlCol="0">
+              <a:spAutoFit/>
+            </a:bodyPr>
+            <a:lstStyle/>
+            <a:p>
+              <a:r>
+                <a:rPr lang="en-US" altLang="zh-TW" b="1" dirty="0">
+                  <a:solidFill>
+                    <a:srgbClr val="ED7D31"/>
+                  </a:solidFill>
+                </a:rPr>
+                <a:t>n</a:t>
+              </a:r>
+              <a:endParaRPr lang="zh-TW" altLang="en-US" b="1" dirty="0">
+                <a:solidFill>
+                  <a:srgbClr val="ED7D31"/>
+                </a:solidFill>
+              </a:endParaRPr>
+            </a:p>
+          </p:txBody>
+        </p:sp>
+        <p:sp>
+          <p:nvSpPr>
+            <p:cNvPr id="65" name="文字方塊 64">
+              <a:extLst>
+                <a:ext uri="{FF2B5EF4-FFF2-40B4-BE49-F238E27FC236}">
+                  <a16:creationId xmlns:a16="http://schemas.microsoft.com/office/drawing/2014/main" id="{65B7BF98-E8C9-4F76-A59C-13E115F33771}"/>
+                </a:ext>
+              </a:extLst>
+            </p:cNvPr>
+            <p:cNvSpPr txBox="1"/>
+            <p:nvPr/>
+          </p:nvSpPr>
+          <p:spPr>
+            <a:xfrm>
+              <a:off x="7777072" y="2310284"/>
+              <a:ext cx="301686" cy="369332"/>
+            </a:xfrm>
+            <a:prstGeom prst="rect">
+              <a:avLst/>
+            </a:prstGeom>
+            <a:noFill/>
+          </p:spPr>
+          <p:txBody>
+            <a:bodyPr wrap="none" rtlCol="0">
+              <a:spAutoFit/>
+            </a:bodyPr>
+            <a:lstStyle/>
+            <a:p>
+              <a:r>
+                <a:rPr lang="en-US" altLang="zh-TW" b="1" dirty="0">
+                  <a:solidFill>
+                    <a:srgbClr val="ED7D31"/>
+                  </a:solidFill>
+                </a:rPr>
+                <a:t>1</a:t>
+              </a:r>
+              <a:endParaRPr lang="zh-TW" altLang="en-US" b="1" dirty="0">
+                <a:solidFill>
+                  <a:srgbClr val="ED7D31"/>
+                </a:solidFill>
+              </a:endParaRPr>
+            </a:p>
+          </p:txBody>
+        </p:sp>
+        <p:sp>
+          <p:nvSpPr>
+            <p:cNvPr id="66" name="文字方塊 65">
+              <a:extLst>
+                <a:ext uri="{FF2B5EF4-FFF2-40B4-BE49-F238E27FC236}">
+                  <a16:creationId xmlns:a16="http://schemas.microsoft.com/office/drawing/2014/main" id="{72B39064-389D-49D5-8347-E2F15C515391}"/>
+                </a:ext>
+              </a:extLst>
+            </p:cNvPr>
+            <p:cNvSpPr txBox="1"/>
+            <p:nvPr/>
+          </p:nvSpPr>
+          <p:spPr>
+            <a:xfrm>
+              <a:off x="5805499" y="4245790"/>
+              <a:ext cx="301686" cy="369332"/>
+            </a:xfrm>
+            <a:prstGeom prst="rect">
+              <a:avLst/>
+            </a:prstGeom>
+            <a:noFill/>
+          </p:spPr>
+          <p:txBody>
+            <a:bodyPr wrap="none" rtlCol="0">
+              <a:spAutoFit/>
+            </a:bodyPr>
+            <a:lstStyle/>
+            <a:p>
+              <a:r>
+                <a:rPr lang="en-US" altLang="zh-TW" b="1" dirty="0">
+                  <a:solidFill>
+                    <a:srgbClr val="ED7D31"/>
+                  </a:solidFill>
+                </a:rPr>
+                <a:t>1</a:t>
+              </a:r>
+              <a:endParaRPr lang="zh-TW" altLang="en-US" b="1" dirty="0">
+                <a:solidFill>
+                  <a:srgbClr val="ED7D31"/>
+                </a:solidFill>
+              </a:endParaRPr>
+            </a:p>
+          </p:txBody>
+        </p:sp>
+        <p:sp>
+          <p:nvSpPr>
+            <p:cNvPr id="67" name="文字方塊 66">
+              <a:extLst>
+                <a:ext uri="{FF2B5EF4-FFF2-40B4-BE49-F238E27FC236}">
+                  <a16:creationId xmlns:a16="http://schemas.microsoft.com/office/drawing/2014/main" id="{327DB8C5-05A5-4AEE-89EA-BCE23FB8D151}"/>
+                </a:ext>
+              </a:extLst>
+            </p:cNvPr>
+            <p:cNvSpPr txBox="1"/>
+            <p:nvPr/>
+          </p:nvSpPr>
+          <p:spPr>
+            <a:xfrm>
+              <a:off x="3895945" y="1717982"/>
+              <a:ext cx="372218" cy="369332"/>
+            </a:xfrm>
+            <a:prstGeom prst="rect">
+              <a:avLst/>
+            </a:prstGeom>
+            <a:noFill/>
+          </p:spPr>
+          <p:txBody>
+            <a:bodyPr wrap="none" rtlCol="0">
+              <a:spAutoFit/>
+            </a:bodyPr>
+            <a:lstStyle/>
+            <a:p>
+              <a:r>
+                <a:rPr lang="en-US" altLang="zh-TW" b="1" dirty="0">
+                  <a:solidFill>
+                    <a:srgbClr val="ED7D31"/>
+                  </a:solidFill>
+                </a:rPr>
+                <a:t>m</a:t>
+              </a:r>
+              <a:endParaRPr lang="zh-TW" altLang="en-US" b="1" dirty="0">
+                <a:solidFill>
+                  <a:srgbClr val="ED7D31"/>
+                </a:solidFill>
+              </a:endParaRPr>
+            </a:p>
+          </p:txBody>
+        </p:sp>
+        <p:sp>
+          <p:nvSpPr>
+            <p:cNvPr id="68" name="文字方塊 67">
+              <a:extLst>
+                <a:ext uri="{FF2B5EF4-FFF2-40B4-BE49-F238E27FC236}">
+                  <a16:creationId xmlns:a16="http://schemas.microsoft.com/office/drawing/2014/main" id="{82C568CE-4DBC-4A1E-B700-64B22D4A261F}"/>
+                </a:ext>
+              </a:extLst>
+            </p:cNvPr>
+            <p:cNvSpPr txBox="1"/>
+            <p:nvPr/>
+          </p:nvSpPr>
+          <p:spPr>
+            <a:xfrm>
+              <a:off x="7810455" y="4206719"/>
+              <a:ext cx="308098" cy="369332"/>
+            </a:xfrm>
+            <a:prstGeom prst="rect">
+              <a:avLst/>
+            </a:prstGeom>
+            <a:noFill/>
+          </p:spPr>
+          <p:txBody>
+            <a:bodyPr wrap="none" rtlCol="0">
+              <a:spAutoFit/>
+            </a:bodyPr>
+            <a:lstStyle/>
+            <a:p>
+              <a:r>
+                <a:rPr lang="en-US" altLang="zh-TW" b="1" dirty="0">
+                  <a:solidFill>
+                    <a:srgbClr val="ED7D31"/>
+                  </a:solidFill>
+                </a:rPr>
+                <a:t>n</a:t>
+              </a:r>
+              <a:endParaRPr lang="zh-TW" altLang="en-US" b="1" dirty="0">
+                <a:solidFill>
+                  <a:srgbClr val="ED7D31"/>
+                </a:solidFill>
+              </a:endParaRPr>
+            </a:p>
+          </p:txBody>
+        </p:sp>
+        <p:sp>
+          <p:nvSpPr>
+            <p:cNvPr id="70" name="文字方塊 69">
+              <a:extLst>
+                <a:ext uri="{FF2B5EF4-FFF2-40B4-BE49-F238E27FC236}">
+                  <a16:creationId xmlns:a16="http://schemas.microsoft.com/office/drawing/2014/main" id="{0E4D0BE4-AE01-4FD8-8310-03E7D92239C2}"/>
+                </a:ext>
+              </a:extLst>
+            </p:cNvPr>
+            <p:cNvSpPr txBox="1"/>
+            <p:nvPr/>
+          </p:nvSpPr>
+          <p:spPr>
+            <a:xfrm>
+              <a:off x="6195323" y="1329828"/>
+              <a:ext cx="308098" cy="369332"/>
+            </a:xfrm>
+            <a:prstGeom prst="rect">
+              <a:avLst/>
+            </a:prstGeom>
+            <a:noFill/>
+          </p:spPr>
+          <p:txBody>
+            <a:bodyPr wrap="none" rtlCol="0">
+              <a:spAutoFit/>
+            </a:bodyPr>
+            <a:lstStyle/>
+            <a:p>
+              <a:r>
+                <a:rPr lang="en-US" altLang="zh-TW" b="1" dirty="0">
+                  <a:solidFill>
+                    <a:srgbClr val="ED7D31"/>
+                  </a:solidFill>
+                </a:rPr>
+                <a:t>n</a:t>
+              </a:r>
+              <a:endParaRPr lang="zh-TW" altLang="en-US" b="1" dirty="0">
+                <a:solidFill>
+                  <a:srgbClr val="ED7D31"/>
+                </a:solidFill>
+              </a:endParaRPr>
+            </a:p>
+          </p:txBody>
+        </p:sp>
+        <p:sp>
+          <p:nvSpPr>
+            <p:cNvPr id="71" name="文字方塊 70">
+              <a:extLst>
+                <a:ext uri="{FF2B5EF4-FFF2-40B4-BE49-F238E27FC236}">
+                  <a16:creationId xmlns:a16="http://schemas.microsoft.com/office/drawing/2014/main" id="{9ABAFE30-B10B-40B2-B1AC-85B0C5A64B65}"/>
+                </a:ext>
+              </a:extLst>
+            </p:cNvPr>
+            <p:cNvSpPr txBox="1"/>
+            <p:nvPr/>
+          </p:nvSpPr>
+          <p:spPr>
+            <a:xfrm>
+              <a:off x="4746724" y="3218051"/>
+              <a:ext cx="308098" cy="369332"/>
+            </a:xfrm>
+            <a:prstGeom prst="rect">
+              <a:avLst/>
+            </a:prstGeom>
+            <a:noFill/>
+          </p:spPr>
+          <p:txBody>
+            <a:bodyPr wrap="none" rtlCol="0">
+              <a:spAutoFit/>
+            </a:bodyPr>
+            <a:lstStyle/>
+            <a:p>
+              <a:r>
+                <a:rPr lang="en-US" altLang="zh-TW" b="1" dirty="0">
+                  <a:solidFill>
+                    <a:srgbClr val="ED7D31"/>
+                  </a:solidFill>
+                </a:rPr>
+                <a:t>n</a:t>
+              </a:r>
+              <a:endParaRPr lang="zh-TW" altLang="en-US" b="1" dirty="0">
+                <a:solidFill>
+                  <a:srgbClr val="ED7D31"/>
+                </a:solidFill>
+              </a:endParaRPr>
+            </a:p>
+          </p:txBody>
+        </p:sp>
+        <p:cxnSp>
+          <p:nvCxnSpPr>
+            <p:cNvPr id="90" name="直線接點 89">
+              <a:extLst>
+                <a:ext uri="{FF2B5EF4-FFF2-40B4-BE49-F238E27FC236}">
+                  <a16:creationId xmlns:a16="http://schemas.microsoft.com/office/drawing/2014/main" id="{8D0619C2-1813-49C6-A8C4-9F6E78B5F492}"/>
+                </a:ext>
+              </a:extLst>
+            </p:cNvPr>
+            <p:cNvCxnSpPr>
+              <a:cxnSpLocks/>
+              <a:endCxn id="92" idx="0"/>
+            </p:cNvCxnSpPr>
+            <p:nvPr/>
+          </p:nvCxnSpPr>
+          <p:spPr>
+            <a:xfrm>
+              <a:off x="3899172" y="3033816"/>
+              <a:ext cx="9727" cy="1246240"/>
+            </a:xfrm>
+            <a:prstGeom prst="line">
+              <a:avLst/>
+            </a:prstGeom>
+            <a:ln w="76200" cmpd="dbl">
+              <a:solidFill>
+                <a:srgbClr val="ED7D31"/>
+              </a:solidFill>
+            </a:ln>
+          </p:spPr>
+          <p:style>
+            <a:lnRef idx="1">
+              <a:schemeClr val="accent1"/>
+            </a:lnRef>
+            <a:fillRef idx="0">
+              <a:schemeClr val="accent1"/>
+            </a:fillRef>
+            <a:effectRef idx="0">
+              <a:schemeClr val="accent1"/>
+            </a:effectRef>
+            <a:fontRef idx="minor">
+              <a:schemeClr val="tx1"/>
+            </a:fontRef>
+          </p:style>
+        </p:cxnSp>
+        <p:sp>
+          <p:nvSpPr>
+            <p:cNvPr id="92" name="流程圖: 決策 91">
+              <a:extLst>
+                <a:ext uri="{FF2B5EF4-FFF2-40B4-BE49-F238E27FC236}">
+                  <a16:creationId xmlns:a16="http://schemas.microsoft.com/office/drawing/2014/main" id="{1DA8C0A2-709C-49C3-B7CD-59856E645889}"/>
+                </a:ext>
+              </a:extLst>
+            </p:cNvPr>
+            <p:cNvSpPr/>
+            <p:nvPr/>
+          </p:nvSpPr>
+          <p:spPr>
+            <a:xfrm>
+              <a:off x="3175355" y="4280056"/>
+              <a:ext cx="1467087" cy="833652"/>
+            </a:xfrm>
+            <a:prstGeom prst="flowChartDecision">
+              <a:avLst/>
+            </a:prstGeom>
+            <a:ln w="38100">
+              <a:solidFill>
+                <a:srgbClr val="ED7D31"/>
+              </a:solidFill>
+            </a:ln>
+          </p:spPr>
+          <p:style>
+            <a:lnRef idx="2">
+              <a:schemeClr val="accent2"/>
+            </a:lnRef>
+            <a:fillRef idx="1">
+              <a:schemeClr val="lt1"/>
+            </a:fillRef>
+            <a:effectRef idx="0">
+              <a:schemeClr val="accent2"/>
+            </a:effectRef>
+            <a:fontRef idx="minor">
+              <a:schemeClr val="dk1"/>
+            </a:fontRef>
+          </p:style>
+          <p:txBody>
+            <a:bodyPr rtlCol="0" anchor="ctr"/>
+            <a:lstStyle/>
+            <a:p>
+              <a:pPr algn="ctr"/>
+              <a:r>
+                <a:rPr lang="en-US" altLang="zh-TW" dirty="0">
+                  <a:solidFill>
+                    <a:sysClr val="windowText" lastClr="000000"/>
+                  </a:solidFill>
+                  <a:latin typeface="微軟正黑體" panose="020B0604030504040204" pitchFamily="34" charset="-120"/>
+                  <a:ea typeface="微軟正黑體" panose="020B0604030504040204" pitchFamily="34" charset="-120"/>
+                </a:rPr>
+                <a:t>Have</a:t>
+              </a:r>
+              <a:endParaRPr lang="zh-TW" altLang="en-US" dirty="0">
+                <a:solidFill>
+                  <a:sysClr val="windowText" lastClr="000000"/>
+                </a:solidFill>
+                <a:latin typeface="微軟正黑體" panose="020B0604030504040204" pitchFamily="34" charset="-120"/>
+                <a:ea typeface="微軟正黑體" panose="020B0604030504040204" pitchFamily="34" charset="-120"/>
+              </a:endParaRPr>
+            </a:p>
+          </p:txBody>
+        </p:sp>
+        <p:sp>
+          <p:nvSpPr>
+            <p:cNvPr id="97" name="矩形 96">
+              <a:extLst>
+                <a:ext uri="{FF2B5EF4-FFF2-40B4-BE49-F238E27FC236}">
+                  <a16:creationId xmlns:a16="http://schemas.microsoft.com/office/drawing/2014/main" id="{B6219D12-5C09-4654-80EE-120713811794}"/>
+                </a:ext>
+              </a:extLst>
+            </p:cNvPr>
+            <p:cNvSpPr/>
+            <p:nvPr/>
+          </p:nvSpPr>
+          <p:spPr>
+            <a:xfrm>
+              <a:off x="3427861" y="5421453"/>
+              <a:ext cx="963850" cy="578673"/>
+            </a:xfrm>
+            <a:prstGeom prst="rect">
+              <a:avLst/>
+            </a:prstGeom>
+            <a:noFill/>
+            <a:ln w="38100">
+              <a:solidFill>
+                <a:schemeClr val="accent4"/>
+              </a:solidFill>
+            </a:ln>
+          </p:spPr>
+          <p:style>
+            <a:lnRef idx="2">
+              <a:schemeClr val="accent1">
+                <a:shade val="50000"/>
+              </a:schemeClr>
+            </a:lnRef>
+            <a:fillRef idx="1">
+              <a:schemeClr val="accent1"/>
+            </a:fillRef>
+            <a:effectRef idx="0">
+              <a:schemeClr val="accent1"/>
+            </a:effectRef>
+            <a:fontRef idx="minor">
+              <a:schemeClr val="lt1"/>
+            </a:fontRef>
+          </p:style>
+          <p:txBody>
+            <a:bodyPr rtlCol="0" anchor="ctr"/>
+            <a:lstStyle/>
+            <a:p>
+              <a:pPr algn="ctr"/>
+              <a:r>
+                <a:rPr lang="en-US" altLang="zh-TW" dirty="0">
+                  <a:solidFill>
+                    <a:sysClr val="windowText" lastClr="000000"/>
+                  </a:solidFill>
+                  <a:latin typeface="微軟正黑體" panose="020B0604030504040204" pitchFamily="34" charset="-120"/>
+                  <a:ea typeface="微軟正黑體" panose="020B0604030504040204" pitchFamily="34" charset="-120"/>
+                </a:rPr>
+                <a:t>tag</a:t>
+              </a:r>
+              <a:endParaRPr lang="zh-TW" altLang="en-US" dirty="0">
+                <a:solidFill>
+                  <a:sysClr val="windowText" lastClr="000000"/>
+                </a:solidFill>
+                <a:latin typeface="微軟正黑體" panose="020B0604030504040204" pitchFamily="34" charset="-120"/>
+                <a:ea typeface="微軟正黑體" panose="020B0604030504040204" pitchFamily="34" charset="-120"/>
+              </a:endParaRPr>
+            </a:p>
+          </p:txBody>
+        </p:sp>
+        <p:sp>
+          <p:nvSpPr>
+            <p:cNvPr id="98" name="橢圓 97">
+              <a:extLst>
+                <a:ext uri="{FF2B5EF4-FFF2-40B4-BE49-F238E27FC236}">
+                  <a16:creationId xmlns:a16="http://schemas.microsoft.com/office/drawing/2014/main" id="{964692CF-4D88-40A0-B629-D3219F0AAF36}"/>
+                </a:ext>
+              </a:extLst>
+            </p:cNvPr>
+            <p:cNvSpPr/>
+            <p:nvPr/>
+          </p:nvSpPr>
+          <p:spPr>
+            <a:xfrm>
+              <a:off x="1654754" y="4731389"/>
+              <a:ext cx="1515246" cy="552543"/>
+            </a:xfrm>
+            <a:prstGeom prst="ellipse">
+              <a:avLst/>
+            </a:prstGeom>
+            <a:noFill/>
+            <a:ln w="38100" cmpd="sng">
+              <a:solidFill>
+                <a:schemeClr val="accent4"/>
+              </a:solidFill>
+            </a:ln>
+          </p:spPr>
+          <p:style>
+            <a:lnRef idx="2">
+              <a:schemeClr val="accent1">
+                <a:shade val="50000"/>
+              </a:schemeClr>
+            </a:lnRef>
+            <a:fillRef idx="1">
+              <a:schemeClr val="accent1"/>
+            </a:fillRef>
+            <a:effectRef idx="0">
+              <a:schemeClr val="accent1"/>
+            </a:effectRef>
+            <a:fontRef idx="minor">
+              <a:schemeClr val="lt1"/>
+            </a:fontRef>
+          </p:style>
+          <p:txBody>
+            <a:bodyPr rtlCol="0" anchor="ctr"/>
+            <a:lstStyle/>
+            <a:p>
+              <a:pPr algn="ctr"/>
+              <a:r>
+                <a:rPr lang="en-US" altLang="zh-TW" u="sng" dirty="0" err="1">
+                  <a:solidFill>
+                    <a:sysClr val="windowText" lastClr="000000"/>
+                  </a:solidFill>
+                  <a:latin typeface="微軟正黑體" panose="020B0604030504040204" pitchFamily="34" charset="-120"/>
+                  <a:ea typeface="微軟正黑體" panose="020B0604030504040204" pitchFamily="34" charset="-120"/>
+                </a:rPr>
+                <a:t>tIndex</a:t>
+              </a:r>
+              <a:endParaRPr lang="zh-TW" altLang="en-US" u="sng" dirty="0">
+                <a:solidFill>
+                  <a:sysClr val="windowText" lastClr="000000"/>
+                </a:solidFill>
+                <a:latin typeface="微軟正黑體" panose="020B0604030504040204" pitchFamily="34" charset="-120"/>
+                <a:ea typeface="微軟正黑體" panose="020B0604030504040204" pitchFamily="34" charset="-120"/>
+              </a:endParaRPr>
+            </a:p>
+          </p:txBody>
+        </p:sp>
+        <p:cxnSp>
+          <p:nvCxnSpPr>
+            <p:cNvPr id="106" name="直線接點 105">
+              <a:extLst>
+                <a:ext uri="{FF2B5EF4-FFF2-40B4-BE49-F238E27FC236}">
+                  <a16:creationId xmlns:a16="http://schemas.microsoft.com/office/drawing/2014/main" id="{8CBB5843-E777-418A-BBF6-56E98597345A}"/>
+                </a:ext>
+              </a:extLst>
+            </p:cNvPr>
+            <p:cNvCxnSpPr>
+              <a:cxnSpLocks/>
+              <a:stCxn id="92" idx="2"/>
+              <a:endCxn id="97" idx="0"/>
+            </p:cNvCxnSpPr>
+            <p:nvPr/>
+          </p:nvCxnSpPr>
+          <p:spPr>
+            <a:xfrm>
+              <a:off x="3908899" y="5113708"/>
+              <a:ext cx="887" cy="307745"/>
+            </a:xfrm>
+            <a:prstGeom prst="line">
+              <a:avLst/>
+            </a:prstGeom>
+            <a:ln w="76200" cmpd="dbl">
+              <a:solidFill>
+                <a:srgbClr val="ED7D31"/>
+              </a:solidFill>
+            </a:ln>
+          </p:spPr>
+          <p:style>
+            <a:lnRef idx="1">
+              <a:schemeClr val="accent1"/>
+            </a:lnRef>
+            <a:fillRef idx="0">
+              <a:schemeClr val="accent1"/>
+            </a:fillRef>
+            <a:effectRef idx="0">
+              <a:schemeClr val="accent1"/>
+            </a:effectRef>
+            <a:fontRef idx="minor">
+              <a:schemeClr val="tx1"/>
+            </a:fontRef>
+          </p:style>
+        </p:cxnSp>
+        <p:cxnSp>
+          <p:nvCxnSpPr>
+            <p:cNvPr id="121" name="直線接點 120">
+              <a:extLst>
+                <a:ext uri="{FF2B5EF4-FFF2-40B4-BE49-F238E27FC236}">
+                  <a16:creationId xmlns:a16="http://schemas.microsoft.com/office/drawing/2014/main" id="{D98B4ADE-CEC7-4982-A7DC-27181C16D555}"/>
+                </a:ext>
+              </a:extLst>
+            </p:cNvPr>
+            <p:cNvCxnSpPr>
+              <a:cxnSpLocks/>
+              <a:stCxn id="97" idx="1"/>
+              <a:endCxn id="98" idx="6"/>
+            </p:cNvCxnSpPr>
+            <p:nvPr/>
+          </p:nvCxnSpPr>
+          <p:spPr>
+            <a:xfrm flipH="1" flipV="1">
+              <a:off x="3170000" y="5007661"/>
+              <a:ext cx="257861" cy="703129"/>
+            </a:xfrm>
+            <a:prstGeom prst="line">
+              <a:avLst/>
+            </a:prstGeom>
+            <a:ln w="38100">
+              <a:solidFill>
+                <a:schemeClr val="accent4"/>
+              </a:solidFill>
+            </a:ln>
+          </p:spPr>
+          <p:style>
+            <a:lnRef idx="1">
+              <a:schemeClr val="accent1"/>
+            </a:lnRef>
+            <a:fillRef idx="0">
+              <a:schemeClr val="accent1"/>
+            </a:fillRef>
+            <a:effectRef idx="0">
+              <a:schemeClr val="accent1"/>
+            </a:effectRef>
+            <a:fontRef idx="minor">
+              <a:schemeClr val="tx1"/>
+            </a:fontRef>
+          </p:style>
+        </p:cxnSp>
+        <p:sp>
+          <p:nvSpPr>
+            <p:cNvPr id="162" name="文字方塊 161">
+              <a:extLst>
+                <a:ext uri="{FF2B5EF4-FFF2-40B4-BE49-F238E27FC236}">
+                  <a16:creationId xmlns:a16="http://schemas.microsoft.com/office/drawing/2014/main" id="{118EAA88-7231-4785-9C30-133C33D82D5B}"/>
+                </a:ext>
+              </a:extLst>
+            </p:cNvPr>
+            <p:cNvSpPr txBox="1"/>
+            <p:nvPr/>
+          </p:nvSpPr>
+          <p:spPr>
+            <a:xfrm>
+              <a:off x="3922713" y="3230033"/>
+              <a:ext cx="301686" cy="369332"/>
+            </a:xfrm>
+            <a:prstGeom prst="rect">
+              <a:avLst/>
+            </a:prstGeom>
+            <a:noFill/>
+          </p:spPr>
+          <p:txBody>
+            <a:bodyPr wrap="none" rtlCol="0">
+              <a:spAutoFit/>
+            </a:bodyPr>
+            <a:lstStyle/>
+            <a:p>
+              <a:r>
+                <a:rPr lang="en-US" altLang="zh-TW" b="1" dirty="0">
+                  <a:solidFill>
+                    <a:srgbClr val="ED7D31"/>
+                  </a:solidFill>
+                </a:rPr>
+                <a:t>1</a:t>
+              </a:r>
+              <a:endParaRPr lang="zh-TW" altLang="en-US" b="1" dirty="0">
+                <a:solidFill>
+                  <a:srgbClr val="ED7D31"/>
+                </a:solidFill>
+              </a:endParaRPr>
+            </a:p>
+          </p:txBody>
+        </p:sp>
+        <p:sp>
+          <p:nvSpPr>
+            <p:cNvPr id="163" name="文字方塊 162">
+              <a:extLst>
+                <a:ext uri="{FF2B5EF4-FFF2-40B4-BE49-F238E27FC236}">
+                  <a16:creationId xmlns:a16="http://schemas.microsoft.com/office/drawing/2014/main" id="{39639A44-A471-4AC4-B7FB-9912339D40C0}"/>
+                </a:ext>
+              </a:extLst>
+            </p:cNvPr>
+            <p:cNvSpPr txBox="1"/>
+            <p:nvPr/>
+          </p:nvSpPr>
+          <p:spPr>
+            <a:xfrm>
+              <a:off x="4065318" y="5026969"/>
+              <a:ext cx="308098" cy="369332"/>
+            </a:xfrm>
+            <a:prstGeom prst="rect">
+              <a:avLst/>
+            </a:prstGeom>
+            <a:noFill/>
+          </p:spPr>
+          <p:txBody>
+            <a:bodyPr wrap="none" rtlCol="0">
+              <a:spAutoFit/>
+            </a:bodyPr>
+            <a:lstStyle/>
+            <a:p>
+              <a:r>
+                <a:rPr lang="en-US" altLang="zh-TW" b="1" dirty="0">
+                  <a:solidFill>
+                    <a:srgbClr val="ED7D31"/>
+                  </a:solidFill>
+                </a:rPr>
+                <a:t>n</a:t>
+              </a:r>
+              <a:endParaRPr lang="zh-TW" altLang="en-US" b="1" dirty="0">
+                <a:solidFill>
+                  <a:srgbClr val="ED7D31"/>
+                </a:solidFill>
+              </a:endParaRPr>
+            </a:p>
+          </p:txBody>
+        </p:sp>
+      </p:grpSp>
+    </p:spTree>
+    <p:extLst>
+      <p:ext uri="{BB962C8B-B14F-4D97-AF65-F5344CB8AC3E}">
+        <p14:creationId xmlns:p14="http://schemas.microsoft.com/office/powerpoint/2010/main" val="1372170650"/>
+      </p:ext>
+    </p:extLst>
+  </p:cSld>
+  <p:clrMapOvr>
+    <a:masterClrMapping/>
+  </p:clrMapOvr>
+</p:sld>
+</file>
+
+<file path=ppt/slides/slide3.xml><?xml version="1.0" encoding="utf-8"?>
+<p:sld xmlns:a="http://schemas.openxmlformats.org/drawingml/2006/main" xmlns:r="http://schemas.openxmlformats.org/officeDocument/2006/relationships" xmlns:p="http://schemas.openxmlformats.org/presentationml/2006/main">
+  <p:cSld>
+    <p:spTree>
+      <p:nvGrpSpPr>
+        <p:cNvPr id="1" name=""/>
+        <p:cNvGrpSpPr/>
+        <p:nvPr/>
+      </p:nvGrpSpPr>
+      <p:grpSpPr>
+        <a:xfrm>
+          <a:off x="0" y="0"/>
+          <a:ext cx="0" cy="0"/>
+          <a:chOff x="0" y="0"/>
+          <a:chExt cx="0" cy="0"/>
+        </a:xfrm>
+      </p:grpSpPr>
+      <p:grpSp>
+        <p:nvGrpSpPr>
           <p:cNvPr id="39" name="群組 38">
             <a:extLst>
               <a:ext uri="{FF2B5EF4-FFF2-40B4-BE49-F238E27FC236}">
@@ -6435,7 +13687,7 @@
 </p:sld>
 </file>
 
-<file path=ppt/slides/slide2.xml><?xml version="1.0" encoding="utf-8"?>
+<file path=ppt/slides/slide4.xml><?xml version="1.0" encoding="utf-8"?>
 <p:sld xmlns:a="http://schemas.openxmlformats.org/drawingml/2006/main" xmlns:r="http://schemas.openxmlformats.org/officeDocument/2006/relationships" xmlns:p="http://schemas.openxmlformats.org/presentationml/2006/main">
   <p:cSld>
     <p:spTree>
